--- a/Lessons/02_data_exploration_and_preparation/Slides/data_exploration_and_preparation_slides.pptx
+++ b/Lessons/02_data_exploration_and_preparation/Slides/data_exploration_and_preparation_slides.pptx
@@ -845,7 +845,35 @@
             </a:pPr>
             <a:r>
               <a:rPr/>
-              <a:t>Handout Section 4.1. z-score standardises and thresholds; Tukey’s IQR rule fences off anything more than 1.5 interquartile ranges past the quartiles. The 1.5 is not arbitrary - next slide derives it.</a:t>
+              <a:t>Handout Section 4.1. The z-score standardises and thresholds; Tukey’s rule fences off anything more than 1.5 interquartile ranges past the quartiles.</a:t>
+            </a:r>
+          </a:p>
+          <a:p>
+            <a:pPr lvl="0" indent="0" marL="0">
+              <a:buNone/>
+            </a:pPr>
+          </a:p>
+          <a:p>
+            <a:pPr lvl="0" indent="0" marL="0">
+              <a:buNone/>
+            </a:pPr>
+            <a:r>
+              <a:rPr/>
+              <a:t>Give the probabilistic reading of each, because it is what makes them more than recipes. Under normality, |z| &gt; 3 flags about 0.27% of a column. And the 1.5 is not arbitrary: for a normal column the IQR is 1.349 sigma, so the fence lands at 2.698 sigma and flags about 0.35% per tail. Tukey chose the constant precisely so the two rules agree on well-behaved data.</a:t>
+            </a:r>
+          </a:p>
+          <a:p>
+            <a:pPr lvl="0" indent="0" marL="0">
+              <a:buNone/>
+            </a:pPr>
+          </a:p>
+          <a:p>
+            <a:pPr lvl="0" indent="0" marL="0">
+              <a:buNone/>
+            </a:pPr>
+            <a:r>
+              <a:rPr/>
+              <a:t>That agreement is the setup for the next section. Both rules are calibrated on normality; the interesting question is what they do when the data is not normal, and that is where they part company.</a:t>
             </a:r>
           </a:p>
         </p:txBody>
@@ -1201,7 +1229,35 @@
             </a:pPr>
             <a:r>
               <a:rPr/>
-              <a:t>A long-tenure, high-paying customer is not an error; a tenure of 999 is. Say plainly that a statistical rule cannot make this call - it only nominates candidates. Handout Section 4.2 closes on exactly this distinction.</a:t>
+              <a:t>A long-tenure, high-paying customer is not an error; a tenure of 999 months is. Say plainly that a statistical rule cannot make this call - it only nominates candidates, and the decision is a domain decision.</a:t>
+            </a:r>
+          </a:p>
+          <a:p>
+            <a:pPr lvl="0" indent="0" marL="0">
+              <a:buNone/>
+            </a:pPr>
+          </a:p>
+          <a:p>
+            <a:pPr lvl="0" indent="0" marL="0">
+              <a:buNone/>
+            </a:pPr>
+            <a:r>
+              <a:rPr/>
+              <a:t>Walk the four options and note that each is a different claim about the world. Capping says “the value is real but the scale is misleading”. Removing says “this row is not from the population I am modelling”. Correcting says “I know what it should have been”. Leaving it says “the model should handle this”.</a:t>
+            </a:r>
+          </a:p>
+          <a:p>
+            <a:pPr lvl="0" indent="0" marL="0">
+              <a:buNone/>
+            </a:pPr>
+          </a:p>
+          <a:p>
+            <a:pPr lvl="0" indent="0" marL="0">
+              <a:buNone/>
+            </a:pPr>
+            <a:r>
+              <a:rPr/>
+              <a:t>The one that gets chosen by default, without anyone deciding, is removal - and it is the one that silently reweights the sample. Handout Section 4.2 closes on exactly this. If a rule flags 3% of your rows and you drop them all, you have changed the population your model is trained on.</a:t>
             </a:r>
           </a:p>
         </p:txBody>
@@ -1283,21 +1339,35 @@
             </a:pPr>
             <a:r>
               <a:rPr/>
-              <a:t>Work through notebook 1 now. Let them drive; walk the room. The domain-rule cell (negative tenure) is worth pausing on collectively - it is a two-line check with an outsized lesson.</a:t>
-            </a:r>
-          </a:p>
-          <a:p>
-            <a:pPr lvl="0" indent="0" marL="0">
-              <a:buNone/>
-            </a:pPr>
-          </a:p>
-          <a:p>
-            <a:pPr lvl="0" indent="0" marL="0">
-              <a:buNone/>
-            </a:pPr>
-            <a:r>
-              <a:rPr/>
-              <a:t>25 minutes, then break.</a:t>
+              <a:t>Work through notebook 1 now, 25 minutes. Let them drive; walk the room rather than presenting.</a:t>
+            </a:r>
+          </a:p>
+          <a:p>
+            <a:pPr lvl="0" indent="0" marL="0">
+              <a:buNone/>
+            </a:pPr>
+          </a:p>
+          <a:p>
+            <a:pPr lvl="0" indent="0" marL="0">
+              <a:buNone/>
+            </a:pPr>
+            <a:r>
+              <a:rPr/>
+              <a:t>The domain-rule cell is worth pausing on collectively: a two-line check for negative tenure catches something no statistical rule would flag, because a negative tenure is not extreme, it is impossible. That distinction - impossible versus unusual - is the lesson of the whole section, and it lands better from their own screen than from the projector.</a:t>
+            </a:r>
+          </a:p>
+          <a:p>
+            <a:pPr lvl="0" indent="0" marL="0">
+              <a:buNone/>
+            </a:pPr>
+          </a:p>
+          <a:p>
+            <a:pPr lvl="0" indent="0" marL="0">
+              <a:buNone/>
+            </a:pPr>
+            <a:r>
+              <a:rPr/>
+              <a:t>Watch for the group that finishes early. Point them at the “try this” in the notebook: change the missing fraction and watch the correlation attenuate as the derivation predicts.</a:t>
             </a:r>
           </a:p>
         </p:txBody>
@@ -1382,6 +1452,20 @@
               <a:t>15 minutes. Back for scaling, encoding and the pipeline.</a:t>
             </a:r>
           </a:p>
+          <a:p>
+            <a:pPr lvl="0" indent="0" marL="0">
+              <a:buNone/>
+            </a:pPr>
+          </a:p>
+          <a:p>
+            <a:pPr lvl="0" indent="0" marL="0">
+              <a:buNone/>
+            </a:pPr>
+            <a:r>
+              <a:rPr/>
+              <a:t>Use the break to check who is stuck in the notebook - the second half assumes everyone has a working ColumnTransformer, and it is much cheaper to fix now than during the leakage section.</a:t>
+            </a:r>
+          </a:p>
         </p:txBody>
       </p:sp>
       <p:sp>
@@ -1461,7 +1545,35 @@
             </a:pPr>
             <a:r>
               <a:rPr/>
-              <a:t>Set up the problem before the maths. Ask: if two features live on very different scales, can a single learning rate be right for both directions at once? Let the room reason about it before the derivation.</a:t>
+              <a:t>Set up the problem before the mathematics. Ask: if two features live on very different scales, can a single learning rate be right for both directions at once? Let the room reason about it before the derivation.</a:t>
+            </a:r>
+          </a:p>
+          <a:p>
+            <a:pPr lvl="0" indent="0" marL="0">
+              <a:buNone/>
+            </a:pPr>
+          </a:p>
+          <a:p>
+            <a:pPr lvl="0" indent="0" marL="0">
+              <a:buNone/>
+            </a:pPr>
+            <a:r>
+              <a:rPr/>
+              <a:t>Give them the concrete pair from the dataset: tenure runs 0 to 70, monthly charges 15 to 150. The variances differ by roughly an order of magnitude, and gradient descent takes one step size along every axis simultaneously.</a:t>
+            </a:r>
+          </a:p>
+          <a:p>
+            <a:pPr lvl="0" indent="0" marL="0">
+              <a:buNone/>
+            </a:pPr>
+          </a:p>
+          <a:p>
+            <a:pPr lvl="0" indent="0" marL="0">
+              <a:buNone/>
+            </a:pPr>
+            <a:r>
+              <a:rPr/>
+              <a:t>Handout Section 5.2 does it properly, and the punchline is worth previewing: the safe learning rate is set by the largest-variance feature, so progress along the smallest-variance direction is throttled by their ratio. The number of iterations scales with the condition number. Scaling is not cosmetic - it changes how long training takes, and sometimes whether it converges at all.</a:t>
             </a:r>
           </a:p>
         </p:txBody>
@@ -1927,7 +2039,35 @@
             </a:pPr>
             <a:r>
               <a:rPr/>
-              <a:t>The k dummy columns always sum to the intercept column, so they are not independent of it. Handout Section 6.1 has the full proof; notebook 2 confirms it directly with matrix_rank. Next slide shows it as arithmetic.</a:t>
+              <a:t>The k dummy columns always sum to the intercept column, so they are not independent of it: the design matrix loses rank, and the normal equation has no unique solution.</a:t>
+            </a:r>
+          </a:p>
+          <a:p>
+            <a:pPr lvl="0" indent="0" marL="0">
+              <a:buNone/>
+            </a:pPr>
+          </a:p>
+          <a:p>
+            <a:pPr lvl="0" indent="0" marL="0">
+              <a:buNone/>
+            </a:pPr>
+            <a:r>
+              <a:rPr/>
+              <a:t>Stress that this is not a numerical inconvenience but an identifiability problem. There are infinitely many coefficient vectors that fit equally well, because you can add a constant to every dummy coefficient and subtract it from the intercept without changing a single prediction.</a:t>
+            </a:r>
+          </a:p>
+          <a:p>
+            <a:pPr lvl="0" indent="0" marL="0">
+              <a:buNone/>
+            </a:pPr>
+          </a:p>
+          <a:p>
+            <a:pPr lvl="0" indent="0" marL="0">
+              <a:buNone/>
+            </a:pPr>
+            <a:r>
+              <a:rPr/>
+              <a:t>Handout Section 6.1 has the proof; notebook 2 confirms it directly with matrix_rank, which is the version they will believe. The next slide shows it as arithmetic.</a:t>
             </a:r>
           </a:p>
         </p:txBody>
@@ -2009,7 +2149,35 @@
             </a:pPr>
             <a:r>
               <a:rPr/>
-              <a:t>Fix: OneHotEncoder(drop=“first”). The dropped category becomes the reference, absorbed into the intercept - no information lost, full rank restored. Tree-based models (Lesson 7) do not need this, since they split on one dummy at a time and do not care about collinearity.</a:t>
+              <a:t>Point at the number: the rank is short by exactly one, not by an arbitrary amount. That is the signature of a single linear dependence - the sum of the dummies equalling the intercept - rather than of general collinearity.</a:t>
+            </a:r>
+          </a:p>
+          <a:p>
+            <a:pPr lvl="0" indent="0" marL="0">
+              <a:buNone/>
+            </a:pPr>
+          </a:p>
+          <a:p>
+            <a:pPr lvl="0" indent="0" marL="0">
+              <a:buNone/>
+            </a:pPr>
+            <a:r>
+              <a:rPr/>
+              <a:t>The fix is OneHotEncoder(drop=“first”). The dropped category becomes the reference level, absorbed into the intercept: no information is lost, and full rank is restored.</a:t>
+            </a:r>
+          </a:p>
+          <a:p>
+            <a:pPr lvl="0" indent="0" marL="0">
+              <a:buNone/>
+            </a:pPr>
+          </a:p>
+          <a:p>
+            <a:pPr lvl="0" indent="0" marL="0">
+              <a:buNone/>
+            </a:pPr>
+            <a:r>
+              <a:rPr/>
+              <a:t>Two caveats worth saying. Tree-based models (Lesson 7) do not need this, because they never invert a design matrix. And regularised models tolerate the rank deficiency, because the penalty term picks one solution out of the infinitely many - which is a good early illustration of what regularisation actually does, and we return to it in Lesson 3.</a:t>
             </a:r>
           </a:p>
         </p:txBody>
@@ -2187,7 +2355,35 @@
             </a:pPr>
             <a:r>
               <a:rPr/>
-              <a:t>Handout Section 6.3. Quick, not a full treatment - the point is to motivate why target encoding is attractive for high-cardinality columns before the next section shows why it needs care.</a:t>
+              <a:t>Handout Section 6.3. Deliberately quick - the point is to motivate why target encoding looks attractive for high-cardinality columns, before the next section shows why it needs care.</a:t>
+            </a:r>
+          </a:p>
+          <a:p>
+            <a:pPr lvl="0" indent="0" marL="0">
+              <a:buNone/>
+            </a:pPr>
+          </a:p>
+          <a:p>
+            <a:pPr lvl="0" indent="0" marL="0">
+              <a:buNone/>
+            </a:pPr>
+            <a:r>
+              <a:rPr/>
+              <a:t>The number to dwell on: one-hot encoding zip_code produces 493 columns, almost all zero, on 2000 rows. More columns than a quarter of the sample size, for one field.</a:t>
+            </a:r>
+          </a:p>
+          <a:p>
+            <a:pPr lvl="0" indent="0" marL="0">
+              <a:buNone/>
+            </a:pPr>
+          </a:p>
+          <a:p>
+            <a:pPr lvl="0" indent="0" marL="0">
+              <a:buNone/>
+            </a:pPr>
+            <a:r>
+              <a:rPr/>
+              <a:t>Two consequences to name. Distance-based methods (Lesson 6) degrade, because in high dimensions everything becomes roughly equidistant from everything else. And every column is a parameter to estimate from the same fixed amount of data, which is the bias-variance trade-off from Lesson 1 arriving from a new direction.</a:t>
             </a:r>
           </a:p>
         </p:txBody>
@@ -2735,7 +2931,35 @@
             </a:pPr>
             <a:r>
               <a:rPr/>
-              <a:t>Let the room answer: 80/20 imbalance, so accuracy is dominated by the majority class exactly as Lesson 1 warned. AUC, unaffected by the imbalance, shows the model is finding real signal that accuracy alone would hide. Lesson 4 makes both tools precise.</a:t>
+              <a:t>Let the room answer why the accuracy gain is modest. The dataset is 80/20 imbalanced, so accuracy is dominated by the majority class - exactly as Lesson 1 warned, and this is the first time they meet it on data they have prepared themselves.</a:t>
+            </a:r>
+          </a:p>
+          <a:p>
+            <a:pPr lvl="0" indent="0" marL="0">
+              <a:buNone/>
+            </a:pPr>
+          </a:p>
+          <a:p>
+            <a:pPr lvl="0" indent="0" marL="0">
+              <a:buNone/>
+            </a:pPr>
+            <a:r>
+              <a:rPr/>
+              <a:t>AUC is unaffected by the imbalance, and at 0.752 it says the model is finding real signal that accuracy is hiding. Two numbers, two different stories about the same model.</a:t>
+            </a:r>
+          </a:p>
+          <a:p>
+            <a:pPr lvl="0" indent="0" marL="0">
+              <a:buNone/>
+            </a:pPr>
+          </a:p>
+          <a:p>
+            <a:pPr lvl="0" indent="0" marL="0">
+              <a:buNone/>
+            </a:pPr>
+            <a:r>
+              <a:rPr/>
+              <a:t>Worth saying explicitly: had we reported only accuracy, this model would look barely better than the baseline, and someone would reasonably conclude the features were useless. Choosing the metric before seeing results is what Lesson 1 asked for; this is what it buys.</a:t>
             </a:r>
           </a:p>
         </p:txBody>
@@ -2913,7 +3137,35 @@
             </a:pPr>
             <a:r>
               <a:rPr/>
-              <a:t>25 minutes. The gradient descent toy is worth running interactively - change the variance ratio live if time allows, per the handout’s “try this”.</a:t>
+              <a:t>25 minutes. Let them work; circulate.</a:t>
+            </a:r>
+          </a:p>
+          <a:p>
+            <a:pPr lvl="0" indent="0" marL="0">
+              <a:buNone/>
+            </a:pPr>
+          </a:p>
+          <a:p>
+            <a:pPr lvl="0" indent="0" marL="0">
+              <a:buNone/>
+            </a:pPr>
+            <a:r>
+              <a:rPr/>
+              <a:t>The gradient descent toy is worth running interactively - change the variance ratio live and watch the iteration count move, per the handout’s “try this”. It makes the condition number argument concrete in a way the derivation alone does not.</a:t>
+            </a:r>
+          </a:p>
+          <a:p>
+            <a:pPr lvl="0" indent="0" marL="0">
+              <a:buNone/>
+            </a:pPr>
+          </a:p>
+          <a:p>
+            <a:pPr lvl="0" indent="0" marL="0">
+              <a:buNone/>
+            </a:pPr>
+            <a:r>
+              <a:rPr/>
+              <a:t>If the room is moving fast, the ColumnTransformer section is where to slow down: it is the piece they will reuse in every exercise and in the project, and getting the column selectors right is fiddlier than it looks.</a:t>
             </a:r>
           </a:p>
         </p:txBody>
@@ -3077,7 +3329,35 @@
             </a:pPr>
             <a:r>
               <a:rPr/>
-              <a:t>Walk the mechanism before the number. KNNImputer finds nearest neighbours in feature space; “nearest in the whole dataset” includes test rows if it was fitted before the split existed. Notebook 3 does not just claim this - it traces it, row by row.</a:t>
+              <a:t>Walk the mechanism before the number. KNNImputer fills a gap using other rows’ values: it finds the nearest neighbours in feature space and averages them. “Nearest in the whole dataset” includes test rows, if it was fitted before the split existed.</a:t>
+            </a:r>
+          </a:p>
+          <a:p>
+            <a:pPr lvl="0" indent="0" marL="0">
+              <a:buNone/>
+            </a:pPr>
+          </a:p>
+          <a:p>
+            <a:pPr lvl="0" indent="0" marL="0">
+              <a:buNone/>
+            </a:pPr>
+            <a:r>
+              <a:rPr/>
+              <a:t>So a test row’s missing value can be filled using its own neighbours - which may include rows whose labels the model will later be scored on. The imputer did nothing wrong; it was simply shown data it should not have seen.</a:t>
+            </a:r>
+          </a:p>
+          <a:p>
+            <a:pPr lvl="0" indent="0" marL="0">
+              <a:buNone/>
+            </a:pPr>
+          </a:p>
+          <a:p>
+            <a:pPr lvl="0" indent="0" marL="0">
+              <a:buNone/>
+            </a:pPr>
+            <a:r>
+              <a:rPr/>
+              <a:t>Notebook 3 measures the gap. Connect it back to Lesson 1: this is the same independence argument, applied to a step nobody thinks of as learning. The imputer learns; therefore it belongs inside the training fold.</a:t>
             </a:r>
           </a:p>
         </p:txBody>
@@ -3255,7 +3535,35 @@
             </a:pPr>
             <a:r>
               <a:rPr/>
-              <a:t>zip_code has no real relationship with churn, by construction - the correlation heatmap already told us. Watch what a leak manufactures out of nothing.</a:t>
+              <a:t>zip_code has no real relationship with churn - the data was generated that way deliberately, so any apparent signal is an artefact we can measure exactly.</a:t>
+            </a:r>
+          </a:p>
+          <a:p>
+            <a:pPr lvl="0" indent="0" marL="0">
+              <a:buNone/>
+            </a:pPr>
+          </a:p>
+          <a:p>
+            <a:pPr lvl="0" indent="0" marL="0">
+              <a:buNone/>
+            </a:pPr>
+            <a:r>
+              <a:rPr/>
+              <a:t>Target encoding replaces each zip code with the average churn rate of its own customers. Computed before the split, that average includes the test rows’ labels. The feature now contains the answer, in diluted form.</a:t>
+            </a:r>
+          </a:p>
+          <a:p>
+            <a:pPr lvl="0" indent="0" marL="0">
+              <a:buNone/>
+            </a:pPr>
+          </a:p>
+          <a:p>
+            <a:pPr lvl="0" indent="0" marL="0">
+              <a:buNone/>
+            </a:pPr>
+            <a:r>
+              <a:rPr/>
+              <a:t>This is the most dangerous leak of the three, because the resulting column looks entirely reasonable in a dataframe: a number between 0 and 1, sensibly distributed, with no trace of where it came from. Nothing about it says “this was computed from the labels”.</a:t>
             </a:r>
           </a:p>
         </p:txBody>
@@ -3433,7 +3741,35 @@
             </a:pPr>
             <a:r>
               <a:rPr/>
-              <a:t>Handout Section 9.2, derived in full: the gap shrinks as 1/n_c. For n_c=1 the formula degenerates completely - the encoded value literally equals the label. Next slide shows the consequence directly.</a:t>
+              <a:t>Handout Section 9.2 has the algebra. The intuition: for a zip code with a single customer, the target encoding IS that customer’s label, straight through. With two customers it is the average of two labels. Only as the group grows does the encoding become a genuine statistic rather than a copy of the answer.</a:t>
+            </a:r>
+          </a:p>
+          <a:p>
+            <a:pPr lvl="0" indent="0" marL="0">
+              <a:buNone/>
+            </a:pPr>
+          </a:p>
+          <a:p>
+            <a:pPr lvl="0" indent="0" marL="0">
+              <a:buNone/>
+            </a:pPr>
+            <a:r>
+              <a:rPr/>
+              <a:t>So the leak is worst exactly where the data is thinnest - which is also where high-cardinality columns spend most of their mass. Most zip codes here have a handful of customers.</a:t>
+            </a:r>
+          </a:p>
+          <a:p>
+            <a:pPr lvl="0" indent="0" marL="0">
+              <a:buNone/>
+            </a:pPr>
+          </a:p>
+          <a:p>
+            <a:pPr lvl="0" indent="0" marL="0">
+              <a:buNone/>
+            </a:pPr>
+            <a:r>
+              <a:rPr/>
+              <a:t>Give them the diagnostic to remember: if a feature’s usefulness comes mostly from its rarest levels, be suspicious. That is the shape of a leak, not of a signal.</a:t>
             </a:r>
           </a:p>
         </p:txBody>
@@ -3721,7 +4057,35 @@
             </a:pPr>
             <a:r>
               <a:rPr/>
-              <a:t>The library implementation generalises leave-one-out to leave-one-fold-out for efficiency, same idea. Used inside a Pipeline fitted on X_train alone, it recovers the honest 0.752 - because that is the correct answer for a column with nothing to contribute.</a:t>
+              <a:t>Smoothing pulls each group’s mean towards the global mean, weighted by group size, so a one-customer zip code barely moves from the overall rate. It reduces the leak but does not remove it.</a:t>
+            </a:r>
+          </a:p>
+          <a:p>
+            <a:pPr lvl="0" indent="0" marL="0">
+              <a:buNone/>
+            </a:pPr>
+          </a:p>
+          <a:p>
+            <a:pPr lvl="0" indent="0" marL="0">
+              <a:buNone/>
+            </a:pPr>
+            <a:r>
+              <a:rPr/>
+              <a:t>Say clearly what actually removes it: fitting the encoder inside the training fold, exactly as with every other learned step. Smoothing is a refinement on top of that, not a substitute for it.</a:t>
+            </a:r>
+          </a:p>
+          <a:p>
+            <a:pPr lvl="0" indent="0" marL="0">
+              <a:buNone/>
+            </a:pPr>
+          </a:p>
+          <a:p>
+            <a:pPr lvl="0" indent="0" marL="0">
+              <a:buNone/>
+            </a:pPr>
+            <a:r>
+              <a:rPr/>
+              <a:t>This is the third time today the same rule has appeared - imputation, scaling, encoding - and that repetition is the point of the lesson. Lesson 1 stated the rule for one case; today it turns out to be the same rule every time.</a:t>
             </a:r>
           </a:p>
         </p:txBody>
@@ -3899,7 +4263,35 @@
             </a:pPr>
             <a:r>
               <a:rPr/>
-              <a:t>30 minutes - this is the centrepiece of the lesson, give it the time. Let students find the singleton zip code themselves rather than just reading the number.</a:t>
+              <a:t>20 minutes. This notebook is the payoff of the lesson: three leaks, each measured against an honest pipeline on the same data.</a:t>
+            </a:r>
+          </a:p>
+          <a:p>
+            <a:pPr lvl="0" indent="0" marL="0">
+              <a:buNone/>
+            </a:pPr>
+          </a:p>
+          <a:p>
+            <a:pPr lvl="0" indent="0" marL="0">
+              <a:buNone/>
+            </a:pPr>
+            <a:r>
+              <a:rPr/>
+              <a:t>The numbers matter less than the pattern - every leak inflates the score, none of them raises an error, and all three are things a competent person does by accident. Ask them to predict the direction and rough size of each gap before running the cell.</a:t>
+            </a:r>
+          </a:p>
+          <a:p>
+            <a:pPr lvl="0" indent="0" marL="0">
+              <a:buNone/>
+            </a:pPr>
+          </a:p>
+          <a:p>
+            <a:pPr lvl="0" indent="0" marL="0">
+              <a:buNone/>
+            </a:pPr>
+            <a:r>
+              <a:rPr/>
+              <a:t>If time is short, the target encoding case is the one to keep: it is the subtlest and the one most likely to appear in their own project.</a:t>
             </a:r>
           </a:p>
         </p:txBody>
@@ -3981,7 +4373,35 @@
             </a:pPr>
             <a:r>
               <a:rPr/>
-              <a:t>Recap slide. Keep it brisk - the room has done three notebooks and needs the summary, not a re-lecture.</a:t>
+              <a:t>Draw the thread together explicitly. Lesson 1 said nothing is learned before the split, using feature selection as the example. Today every preprocessing step turned out to be a learning step: an imputer learns a mean or a set of neighbours, a scaler learns a mean and a standard deviation, an encoder learns a mapping from categories to numbers.</a:t>
+            </a:r>
+          </a:p>
+          <a:p>
+            <a:pPr lvl="0" indent="0" marL="0">
+              <a:buNone/>
+            </a:pPr>
+          </a:p>
+          <a:p>
+            <a:pPr lvl="0" indent="0" marL="0">
+              <a:buNone/>
+            </a:pPr>
+            <a:r>
+              <a:rPr/>
+              <a:t>So the rule did not get more complicated - it got more general. And the pipeline is not tidiness, it is the mechanism that enforces the rule structurally, which is why we now build one for everything.</a:t>
+            </a:r>
+          </a:p>
+          <a:p>
+            <a:pPr lvl="0" indent="0" marL="0">
+              <a:buNone/>
+            </a:pPr>
+          </a:p>
+          <a:p>
+            <a:pPr lvl="0" indent="0" marL="0">
+              <a:buNone/>
+            </a:pPr>
+            <a:r>
+              <a:rPr/>
+              <a:t>Preview Lesson 3 in one sentence: with the data prepared honestly, we can finally fit something and look at what the fitting actually does.</a:t>
             </a:r>
           </a:p>
         </p:txBody>
@@ -4173,7 +4593,35 @@
             </a:pPr>
             <a:r>
               <a:rPr/>
-              <a:t>Close on time. Lesson 3 is where the course starts building models rather than preparing to build them - say that the pipeline habit from today carries forward unchanged, it is just the “model” box in the diagram that gets interesting now.</a:t>
+              <a:t>Set the exercise explicitly and give the deadline - Friday 9 October, at the start of Lesson 3.</a:t>
+            </a:r>
+          </a:p>
+          <a:p>
+            <a:pPr lvl="0" indent="0" marL="0">
+              <a:buNone/>
+            </a:pPr>
+          </a:p>
+          <a:p>
+            <a:pPr lvl="0" indent="0" marL="0">
+              <a:buNone/>
+            </a:pPr>
+            <a:r>
+              <a:rPr/>
+              <a:t>Point out that it uses the same churn dataset, so the exploration they did today carries over, and that the marks are again on methodology: a pipeline that is correct but modest beats a better score obtained by preparing the full dataset before splitting.</a:t>
+            </a:r>
+          </a:p>
+          <a:p>
+            <a:pPr lvl="0" indent="0" marL="0">
+              <a:buNone/>
+            </a:pPr>
+          </a:p>
+          <a:p>
+            <a:pPr lvl="0" indent="0" marL="0">
+              <a:buNone/>
+            </a:pPr>
+            <a:r>
+              <a:rPr/>
+              <a:t>Remind them the Lesson 1 exercise is due today if anyone has not handed it in, and that the project topic must be confirmed by Lesson 4 - which is two weeks away, so now is the time to be reading dataset descriptions.</a:t>
             </a:r>
           </a:p>
         </p:txBody>
@@ -4351,7 +4799,35 @@
             </a:pPr>
             <a:r>
               <a:rPr/>
-              <a:t>Two columns have gaps: age (8.0%) and num_support_calls (4.8%). The count is the easy half of the question; the next three slides are the hard half - why are they missing?</a:t>
+              <a:t>Two columns have gaps: age at 8.0% and num_support_calls at 4.8%. The count is the easy half of the question; the next three slides are the hard half - why are they missing?</a:t>
+            </a:r>
+          </a:p>
+          <a:p>
+            <a:pPr lvl="0" indent="0" marL="0">
+              <a:buNone/>
+            </a:pPr>
+          </a:p>
+          <a:p>
+            <a:pPr lvl="0" indent="0" marL="0">
+              <a:buNone/>
+            </a:pPr>
+            <a:r>
+              <a:rPr/>
+              <a:t>Make the point that this figure took one line to produce and is the first thing to run on any new dataset, before any modelling thought at all. A column that is 90% empty is a column you drop; a column that is 5% empty is a decision.</a:t>
+            </a:r>
+          </a:p>
+          <a:p>
+            <a:pPr lvl="0" indent="0" marL="0">
+              <a:buNone/>
+            </a:pPr>
+          </a:p>
+          <a:p>
+            <a:pPr lvl="0" indent="0" marL="0">
+              <a:buNone/>
+            </a:pPr>
+            <a:r>
+              <a:rPr/>
+              <a:t>Warn them about what the picture cannot show: whether the gaps are related to each other, or to the target. That is what the next slides are for, and it cannot be read off a bar chart.</a:t>
             </a:r>
           </a:p>
         </p:txBody>
@@ -4557,7 +5033,35 @@
             </a:pPr>
             <a:r>
               <a:rPr/>
-              <a:t>Bridge to the derivation. Ask: if the missingness is completely random, is mean imputation “free”? Let them guess before the next slide - most will say yes.</a:t>
+              <a:t>Bridge to the derivation. Ask: if the missingness is completely random, is mean imputation “free”? Let them guess before the next slide - most will say yes, and the reasoning is sound as far as it goes: the mean is unbiased, so filling with the mean introduces no bias in that column.</a:t>
+            </a:r>
+          </a:p>
+          <a:p>
+            <a:pPr lvl="0" indent="0" marL="0">
+              <a:buNone/>
+            </a:pPr>
+          </a:p>
+          <a:p>
+            <a:pPr lvl="0" indent="0" marL="0">
+              <a:buNone/>
+            </a:pPr>
+            <a:r>
+              <a:rPr/>
+              <a:t>The answer is no, and the reason is that a column is never used alone. Handout Section 3.2 derives it: filling p of the entries with a constant shrinks the variance to (1-p) times the original, and attenuates every correlation the column has with anything else by the square root of (1-p).</a:t>
+            </a:r>
+          </a:p>
+          <a:p>
+            <a:pPr lvl="0" indent="0" marL="0">
+              <a:buNone/>
+            </a:pPr>
+          </a:p>
+          <a:p>
+            <a:pPr lvl="0" indent="0" marL="0">
+              <a:buNone/>
+            </a:pPr>
+            <a:r>
+              <a:rPr/>
+              <a:t>Have the numbers ready. For age at p = 0.08 the factor is 0.96 - small enough to ignore. At p = 0.4 it is 0.77, which erases nearly a quarter of a genuine relationship. Tell them the practical rule that follows: mean imputation is fine when the gaps are few, and quietly destructive when they are many.</a:t>
             </a:r>
           </a:p>
         </p:txBody>

--- a/Lessons/02_data_exploration_and_preparation/Slides/data_exploration_and_preparation_slides.pptx
+++ b/Lessons/02_data_exploration_and_preparation/Slides/data_exploration_and_preparation_slides.pptx
@@ -12798,7 +12798,7 @@
             </a:pPr>
             <a:r>
               <a:rPr/>
-              <a:t>One dataset, all lesson</a:t>
+              <a:t>One dataset, all lesson long</a:t>
             </a:r>
           </a:p>
         </p:txBody>

--- a/Lessons/02_data_exploration_and_preparation/Slides/data_exploration_and_preparation_slides.pptx
+++ b/Lessons/02_data_exploration_and_preparation/Slides/data_exploration_and_preparation_slides.pptx
@@ -749,21 +749,35 @@
             </a:pPr>
             <a:r>
               <a:rPr/>
-              <a:t>Handout Section 3.3. Four options, and the choice depends on the mechanism just covered - dropping rows under MAR or MNAR reweights the sample in a direction you may not intend, since the missing rows are not a random subsample.</a:t>
-            </a:r>
-          </a:p>
-          <a:p>
-            <a:pPr lvl="0" indent="0" marL="0">
-              <a:buNone/>
-            </a:pPr>
-          </a:p>
-          <a:p>
-            <a:pPr lvl="0" indent="0" marL="0">
-              <a:buNone/>
-            </a:pPr>
-            <a:r>
-              <a:rPr/>
-              <a:t>Whichever is chosen, flag the constraint that closes the loop back to Pipeline: the statistic used - a mean, a set of neighbours - is learned from data and must be learned from the training fold only. Section 9 is what happens when that is forgotten.</a:t>
+              <a:t>Four options, and the choice is a question about WHY the data is missing rather than about how much is missing.</a:t>
+            </a:r>
+          </a:p>
+          <a:p>
+            <a:pPr lvl="0" indent="0" marL="0">
+              <a:buNone/>
+            </a:pPr>
+          </a:p>
+          <a:p>
+            <a:pPr lvl="0" indent="0" marL="0">
+              <a:buNone/>
+            </a:pPr>
+            <a:r>
+              <a:rPr/>
+              <a:t>The one worth dwelling on is the fourth: adding a binary indicator keeps the MAR signal itself available to the model - the fact that long-tenure customers are more often missing a call count may be more informative than the count would have been.</a:t>
+            </a:r>
+          </a:p>
+          <a:p>
+            <a:pPr lvl="0" indent="0" marL="0">
+              <a:buNone/>
+            </a:pPr>
+          </a:p>
+          <a:p>
+            <a:pPr lvl="0" indent="0" marL="0">
+              <a:buNone/>
+            </a:pPr>
+            <a:r>
+              <a:rPr/>
+              <a:t>Then the line at the bottom: every option except dropping the column learns a statistic, so all of them belong inside the training fold. That is the thread the whole lesson pulls on.</a:t>
             </a:r>
           </a:p>
         </p:txBody>
@@ -1751,21 +1765,49 @@
             </a:pPr>
             <a:r>
               <a:rPr/>
-              <a:t>Handout Section 5.2, done exactly for linear regression’s quadratic cost and carried over qualitatively to logistic regression, whose Hessian has the same X-transpose-X structure weighted by p(1-p).</a:t>
-            </a:r>
-          </a:p>
-          <a:p>
-            <a:pPr lvl="0" indent="0" marL="0">
-              <a:buNone/>
-            </a:pPr>
-          </a:p>
-          <a:p>
-            <a:pPr lvl="0" indent="0" marL="0">
-              <a:buNone/>
-            </a:pPr>
-            <a:r>
-              <a:rPr/>
-              <a:t>The safe step size along axis j is roughly 2/σⱼ². One global learning rate is bounded by the LARGEST variance feature, which makes progress along the smallest-variance direction painfully slow. That ratio is the condition number κ = σ²max / σ²min, and standardising drives it towards 1.</a:t>
+              <a:t>The figure is the derivation made visible. Left: variances differ, so the bowl is a narrow valley. One step size is bound by the steep axis, so it bounces across the valley while barely advancing along it.</a:t>
+            </a:r>
+          </a:p>
+          <a:p>
+            <a:pPr lvl="0" indent="0" marL="0">
+              <a:buNone/>
+            </a:pPr>
+          </a:p>
+          <a:p>
+            <a:pPr lvl="0" indent="0" marL="0">
+              <a:buNone/>
+            </a:pPr>
+            <a:r>
+              <a:rPr/>
+              <a:t>Right: after scaling, the bowl is round and every step points at the minimum.</a:t>
+            </a:r>
+          </a:p>
+          <a:p>
+            <a:pPr lvl="0" indent="0" marL="0">
+              <a:buNone/>
+            </a:pPr>
+          </a:p>
+          <a:p>
+            <a:pPr lvl="0" indent="0" marL="0">
+              <a:buNone/>
+            </a:pPr>
+            <a:r>
+              <a:rPr/>
+              <a:t>Give them the number that governs it - the condition number, the ratio of largest to smallest variance - and say that the iteration count scales with it. Scaling is not cosmetic: it changes how long training takes, and sometimes whether it converges at all.</a:t>
+            </a:r>
+          </a:p>
+          <a:p>
+            <a:pPr lvl="0" indent="0" marL="0">
+              <a:buNone/>
+            </a:pPr>
+          </a:p>
+          <a:p>
+            <a:pPr lvl="0" indent="0" marL="0">
+              <a:buNone/>
+            </a:pPr>
+            <a:r>
+              <a:rPr/>
+              <a:t>The derivation is Handout Section 5.2: the Hessian of the squared-error cost is the feature covariance matrix, so for uncorrelated centred features it is diagonal with the variances on it. That is why the picture is an axis-aligned ellipse, and why its elongation is the condition number.</a:t>
             </a:r>
           </a:p>
         </p:txBody>
@@ -1787,7 +1829,7 @@
           <a:p>
             <a:fld id="{18BDFEC3-8487-43E8-A154-7C12CBC1FFF2}" type="slidenum">
               <a:rPr lang="en-US"/>
-              <a:t>22</a:t>
+              <a:t>21</a:t>
             </a:fld>
             <a:endParaRPr lang="en-US"/>
           </a:p>
@@ -1883,7 +1925,7 @@
           <a:p>
             <a:fld id="{18BDFEC3-8487-43E8-A154-7C12CBC1FFF2}" type="slidenum">
               <a:rPr lang="en-US"/>
-              <a:t>23</a:t>
+              <a:t>22</a:t>
             </a:fld>
             <a:endParaRPr lang="en-US"/>
           </a:p>
@@ -1979,7 +2021,7 @@
           <a:p>
             <a:fld id="{18BDFEC3-8487-43E8-A154-7C12CBC1FFF2}" type="slidenum">
               <a:rPr lang="en-US"/>
-              <a:t>24</a:t>
+              <a:t>23</a:t>
             </a:fld>
             <a:endParaRPr lang="en-US"/>
           </a:p>
@@ -2089,7 +2131,7 @@
           <a:p>
             <a:fld id="{18BDFEC3-8487-43E8-A154-7C12CBC1FFF2}" type="slidenum">
               <a:rPr lang="en-US"/>
-              <a:t>25</a:t>
+              <a:t>24</a:t>
             </a:fld>
             <a:endParaRPr lang="en-US"/>
           </a:p>
@@ -2199,7 +2241,7 @@
           <a:p>
             <a:fld id="{18BDFEC3-8487-43E8-A154-7C12CBC1FFF2}" type="slidenum">
               <a:rPr lang="en-US"/>
-              <a:t>26</a:t>
+              <a:t>25</a:t>
             </a:fld>
             <a:endParaRPr lang="en-US"/>
           </a:p>
@@ -2259,21 +2301,35 @@
             </a:pPr>
             <a:r>
               <a:rPr/>
-              <a:t>Ordinal encoding on an unordered category (North=0, South=1) tells a model North and South are numerically closer than North and West - meaningless, and actively misleading for anything that uses the number arithmetically.</a:t>
-            </a:r>
-          </a:p>
-          <a:p>
-            <a:pPr lvl="0" indent="0" marL="0">
-              <a:buNone/>
-            </a:pPr>
-          </a:p>
-          <a:p>
-            <a:pPr lvl="0" indent="0" marL="0">
-              <a:buNone/>
-            </a:pPr>
-            <a:r>
-              <a:rPr/>
-              <a:t>Target encoding is why zip_code is tempting: 493 levels compressed to one predictive-looking column. Say directly: the temptation is exactly what makes it worth a whole section. Handout Section 6.2.</a:t>
+              <a:t>Three encodings of one column, and each makes a different claim.</a:t>
+            </a:r>
+          </a:p>
+          <a:p>
+            <a:pPr lvl="0" indent="0" marL="0">
+              <a:buNone/>
+            </a:pPr>
+          </a:p>
+          <a:p>
+            <a:pPr lvl="0" indent="0" marL="0">
+              <a:buNone/>
+            </a:pPr>
+            <a:r>
+              <a:rPr/>
+              <a:t>Ordinal claims the categories are equally spaced on a line - fine for small/medium/large, wrong for region. One-hot claims nothing at all, which is why it is the default, and costs k columns: 493 for zip code on 2000 rows. Target claims each category is summarised by its own churn rate, which is compact and, as the next section shows, computed from the labels.</a:t>
+            </a:r>
+          </a:p>
+          <a:p>
+            <a:pPr lvl="0" indent="0" marL="0">
+              <a:buNone/>
+            </a:pPr>
+          </a:p>
+          <a:p>
+            <a:pPr lvl="0" indent="0" marL="0">
+              <a:buNone/>
+            </a:pPr>
+            <a:r>
+              <a:rPr/>
+              <a:t>The question to leave them with: which claim is true for THIS column? It is a domain question, not a technical one.</a:t>
             </a:r>
           </a:p>
         </p:txBody>
@@ -2295,7 +2351,7 @@
           <a:p>
             <a:fld id="{18BDFEC3-8487-43E8-A154-7C12CBC1FFF2}" type="slidenum">
               <a:rPr lang="en-US"/>
-              <a:t>27</a:t>
+              <a:t>26</a:t>
             </a:fld>
             <a:endParaRPr lang="en-US"/>
           </a:p>
@@ -2355,35 +2411,63 @@
             </a:pPr>
             <a:r>
               <a:rPr/>
-              <a:t>Handout Section 6.3. Deliberately quick - the point is to motivate why target encoding looks attractive for high-cardinality columns, before the next section shows why it needs care.</a:t>
-            </a:r>
-          </a:p>
-          <a:p>
-            <a:pPr lvl="0" indent="0" marL="0">
-              <a:buNone/>
-            </a:pPr>
-          </a:p>
-          <a:p>
-            <a:pPr lvl="0" indent="0" marL="0">
-              <a:buNone/>
-            </a:pPr>
-            <a:r>
-              <a:rPr/>
-              <a:t>The number to dwell on: one-hot encoding zip_code produces 493 columns, almost all zero, on 2000 rows. More columns than a quarter of the sample size, for one field.</a:t>
-            </a:r>
-          </a:p>
-          <a:p>
-            <a:pPr lvl="0" indent="0" marL="0">
-              <a:buNone/>
-            </a:pPr>
-          </a:p>
-          <a:p>
-            <a:pPr lvl="0" indent="0" marL="0">
-              <a:buNone/>
-            </a:pPr>
-            <a:r>
-              <a:rPr/>
-              <a:t>Two consequences to name. Distance-based methods (Lesson 6) degrade, because in high dimensions everything becomes roughly equidistant from everything else. And every column is a parameter to estimate from the same fixed amount of data, which is the bias-variance trade-off from Lesson 1 arriving from a new direction.</a:t>
+              <a:t>The same column under all three schemes, and each makes a different claim about the world.</a:t>
+            </a:r>
+          </a:p>
+          <a:p>
+            <a:pPr lvl="0" indent="0" marL="0">
+              <a:buNone/>
+            </a:pPr>
+          </a:p>
+          <a:p>
+            <a:pPr lvl="0" indent="0" marL="0">
+              <a:buNone/>
+            </a:pPr>
+            <a:r>
+              <a:rPr/>
+              <a:t>Ordinal claims the categories are equally spaced along a line - fine for small/medium/large, wrong for region, and the model has no way to tell you it was the wrong claim.</a:t>
+            </a:r>
+          </a:p>
+          <a:p>
+            <a:pPr lvl="0" indent="0" marL="0">
+              <a:buNone/>
+            </a:pPr>
+          </a:p>
+          <a:p>
+            <a:pPr lvl="0" indent="0" marL="0">
+              <a:buNone/>
+            </a:pPr>
+            <a:r>
+              <a:rPr/>
+              <a:t>One-hot claims nothing at all, which is why it is the default, and pays for that neutrality in columns: 493 of them for zip code, on 2000 rows.</a:t>
+            </a:r>
+          </a:p>
+          <a:p>
+            <a:pPr lvl="0" indent="0" marL="0">
+              <a:buNone/>
+            </a:pPr>
+          </a:p>
+          <a:p>
+            <a:pPr lvl="0" indent="0" marL="0">
+              <a:buNone/>
+            </a:pPr>
+            <a:r>
+              <a:rPr/>
+              <a:t>Target claims each category is summarised by its own churn rate. Compact, effective - and computed from the labels, which is where the next section begins.</a:t>
+            </a:r>
+          </a:p>
+          <a:p>
+            <a:pPr lvl="0" indent="0" marL="0">
+              <a:buNone/>
+            </a:pPr>
+          </a:p>
+          <a:p>
+            <a:pPr lvl="0" indent="0" marL="0">
+              <a:buNone/>
+            </a:pPr>
+            <a:r>
+              <a:rPr/>
+              <a:t>The question to leave with them: which claim is true for THIS column? That is a domain question, not a technical one, and no cross-validation score will answer it.</a:t>
             </a:r>
           </a:p>
         </p:txBody>
@@ -2405,7 +2489,7 @@
           <a:p>
             <a:fld id="{18BDFEC3-8487-43E8-A154-7C12CBC1FFF2}" type="slidenum">
               <a:rPr lang="en-US"/>
-              <a:t>28</a:t>
+              <a:t>27</a:t>
             </a:fld>
             <a:endParaRPr lang="en-US"/>
           </a:p>
@@ -2465,7 +2549,35 @@
             </a:pPr>
             <a:r>
               <a:rPr/>
-              <a:t>Point at the zip_code row/column - or its absence, since it is not even numeric yet - and say: notebook 1’s correlation check already suggests this column carries nothing. One-hot encoding it would add 493 mostly-empty columns. The natural alternative - replace each code with the average churn rate of its customers - is exactly the technique the leakage section is about. Do not resolve the tension yet; let it hang until after the break-free run into notebook 2’s pipeline section.</a:t>
+              <a:t>Handout Section 6.3. Deliberately quick - the point is to motivate why target encoding looks attractive for high-cardinality columns, before the next section shows why it needs care.</a:t>
+            </a:r>
+          </a:p>
+          <a:p>
+            <a:pPr lvl="0" indent="0" marL="0">
+              <a:buNone/>
+            </a:pPr>
+          </a:p>
+          <a:p>
+            <a:pPr lvl="0" indent="0" marL="0">
+              <a:buNone/>
+            </a:pPr>
+            <a:r>
+              <a:rPr/>
+              <a:t>The number to dwell on: one-hot encoding zip_code produces 493 columns, almost all zero, on 2000 rows. More columns than a quarter of the sample size, for one field.</a:t>
+            </a:r>
+          </a:p>
+          <a:p>
+            <a:pPr lvl="0" indent="0" marL="0">
+              <a:buNone/>
+            </a:pPr>
+          </a:p>
+          <a:p>
+            <a:pPr lvl="0" indent="0" marL="0">
+              <a:buNone/>
+            </a:pPr>
+            <a:r>
+              <a:rPr/>
+              <a:t>Two consequences to name. Distance-based methods (Lesson 6) degrade, because in high dimensions everything becomes roughly equidistant from everything else. And every column is a parameter to estimate from the same fixed amount of data, which is the bias-variance trade-off from Lesson 1 arriving from a new direction.</a:t>
             </a:r>
           </a:p>
         </p:txBody>
@@ -2487,7 +2599,7 @@
           <a:p>
             <a:fld id="{18BDFEC3-8487-43E8-A154-7C12CBC1FFF2}" type="slidenum">
               <a:rPr lang="en-US"/>
-              <a:t>29</a:t>
+              <a:t>28</a:t>
             </a:fld>
             <a:endParaRPr lang="en-US"/>
           </a:p>
@@ -2547,21 +2659,7 @@
             </a:pPr>
             <a:r>
               <a:rPr/>
-              <a:t>Handout Section 8.1. Lesson 1’s unbiasedness argument never mentioned “the model” specifically - it is about f, whatever function maps raw inputs to predictions. In deployment, a fitted scaler or imputer travels WITH the model, so f includes their learned parameters too.</a:t>
-            </a:r>
-          </a:p>
-          <a:p>
-            <a:pPr lvl="0" indent="0" marL="0">
-              <a:buNone/>
-            </a:pPr>
-          </a:p>
-          <a:p>
-            <a:pPr lvl="0" indent="0" marL="0">
-              <a:buNone/>
-            </a:pPr>
-            <a:r>
-              <a:rPr/>
-              <a:t>The moment any of those parameters - a mean, a set of neighbours, a per-category average - is estimated using rows that later appear in T, f is no longer independent of T, and the equality breaks. This is the one-sentence version of everything Section 9 is about to demonstrate concretely.</a:t>
+              <a:t>Point at the zip_code row/column - or its absence, since it is not even numeric yet - and say: notebook 1’s correlation check already suggests this column carries nothing. One-hot encoding it would add 493 mostly-empty columns. The natural alternative - replace each code with the average churn rate of its customers - is exactly the technique the leakage section is about. Do not resolve the tension yet; let it hang until after the break-free run into notebook 2’s pipeline section.</a:t>
             </a:r>
           </a:p>
         </p:txBody>
@@ -2583,7 +2681,7 @@
           <a:p>
             <a:fld id="{18BDFEC3-8487-43E8-A154-7C12CBC1FFF2}" type="slidenum">
               <a:rPr lang="en-US"/>
-              <a:t>30</a:t>
+              <a:t>29</a:t>
             </a:fld>
             <a:endParaRPr lang="en-US"/>
           </a:p>
@@ -2643,21 +2741,21 @@
             </a:pPr>
             <a:r>
               <a:rPr/>
-              <a:t>The structural version of the argument just stated. Different columns need different treatment; ColumnTransformer routes each group through its own sub-pipeline and concatenates the result; the outer Pipeline adds the classifier.</a:t>
-            </a:r>
-          </a:p>
-          <a:p>
-            <a:pPr lvl="0" indent="0" marL="0">
-              <a:buNone/>
-            </a:pPr>
-          </a:p>
-          <a:p>
-            <a:pPr lvl="0" indent="0" marL="0">
-              <a:buNone/>
-            </a:pPr>
-            <a:r>
-              <a:rPr/>
-              <a:t>One fit() call, on X_train, fits every imputer, the scaler, the encoder AND the classifier - in that order, on training data only, by construction. Say explicitly: this is not tidiness. It is what makes “nothing learned before the split” true even when nobody is watching, which today’s leakage section is entirely about.</a:t>
+              <a:t>Handout Section 8.1. Lesson 1’s unbiasedness argument never mentioned “the model” specifically - it is about f, whatever function maps raw inputs to predictions. In deployment, a fitted scaler or imputer travels WITH the model, so f includes their learned parameters too.</a:t>
+            </a:r>
+          </a:p>
+          <a:p>
+            <a:pPr lvl="0" indent="0" marL="0">
+              <a:buNone/>
+            </a:pPr>
+          </a:p>
+          <a:p>
+            <a:pPr lvl="0" indent="0" marL="0">
+              <a:buNone/>
+            </a:pPr>
+            <a:r>
+              <a:rPr/>
+              <a:t>The moment any of those parameters - a mean, a set of neighbours, a per-category average - is estimated using rows that later appear in T, f is no longer independent of T, and the equality breaks. This is the one-sentence version of everything Section 9 is about to demonstrate concretely.</a:t>
             </a:r>
           </a:p>
         </p:txBody>
@@ -2679,7 +2777,7 @@
           <a:p>
             <a:fld id="{18BDFEC3-8487-43E8-A154-7C12CBC1FFF2}" type="slidenum">
               <a:rPr lang="en-US"/>
-              <a:t>31</a:t>
+              <a:t>30</a:t>
             </a:fld>
             <a:endParaRPr lang="en-US"/>
           </a:p>
@@ -2835,21 +2933,21 @@
             </a:pPr>
             <a:r>
               <a:rPr/>
-              <a:t>numeric_pipe and categorical_pipe are the impute-then-transform pairs from the diagram; show the full definitions on screen in notebook 2 rather than here. Point out there is exactly ONE call to fit, at the very bottom, on X_train alone - everything above it declares structure, not computation.</a:t>
-            </a:r>
-          </a:p>
-          <a:p>
-            <a:pPr lvl="0" indent="0" marL="0">
-              <a:buNone/>
-            </a:pPr>
-          </a:p>
-          <a:p>
-            <a:pPr lvl="0" indent="0" marL="0">
-              <a:buNone/>
-            </a:pPr>
-            <a:r>
-              <a:rPr/>
-              <a:t>This is the code notebook 2 runs, nearly verbatim. Say that reading it should now feel unremarkable - that is the goal, structure that makes the right thing the easy thing.</a:t>
+              <a:t>The structural version of the argument just stated. Different columns need different treatment; ColumnTransformer routes each group through its own sub-pipeline and concatenates the result; the outer Pipeline adds the classifier.</a:t>
+            </a:r>
+          </a:p>
+          <a:p>
+            <a:pPr lvl="0" indent="0" marL="0">
+              <a:buNone/>
+            </a:pPr>
+          </a:p>
+          <a:p>
+            <a:pPr lvl="0" indent="0" marL="0">
+              <a:buNone/>
+            </a:pPr>
+            <a:r>
+              <a:rPr/>
+              <a:t>One fit() call, on X_train, fits every imputer, the scaler, the encoder AND the classifier - in that order, on training data only, by construction. Say explicitly: this is not tidiness. It is what makes “nothing learned before the split” true even when nobody is watching, which today’s leakage section is entirely about.</a:t>
             </a:r>
           </a:p>
         </p:txBody>
@@ -2871,7 +2969,7 @@
           <a:p>
             <a:fld id="{18BDFEC3-8487-43E8-A154-7C12CBC1FFF2}" type="slidenum">
               <a:rPr lang="en-US"/>
-              <a:t>32</a:t>
+              <a:t>31</a:t>
             </a:fld>
             <a:endParaRPr lang="en-US"/>
           </a:p>
@@ -2931,35 +3029,21 @@
             </a:pPr>
             <a:r>
               <a:rPr/>
-              <a:t>Let the room answer why the accuracy gain is modest. The dataset is 80/20 imbalanced, so accuracy is dominated by the majority class - exactly as Lesson 1 warned, and this is the first time they meet it on data they have prepared themselves.</a:t>
-            </a:r>
-          </a:p>
-          <a:p>
-            <a:pPr lvl="0" indent="0" marL="0">
-              <a:buNone/>
-            </a:pPr>
-          </a:p>
-          <a:p>
-            <a:pPr lvl="0" indent="0" marL="0">
-              <a:buNone/>
-            </a:pPr>
-            <a:r>
-              <a:rPr/>
-              <a:t>AUC is unaffected by the imbalance, and at 0.752 it says the model is finding real signal that accuracy is hiding. Two numbers, two different stories about the same model.</a:t>
-            </a:r>
-          </a:p>
-          <a:p>
-            <a:pPr lvl="0" indent="0" marL="0">
-              <a:buNone/>
-            </a:pPr>
-          </a:p>
-          <a:p>
-            <a:pPr lvl="0" indent="0" marL="0">
-              <a:buNone/>
-            </a:pPr>
-            <a:r>
-              <a:rPr/>
-              <a:t>Worth saying explicitly: had we reported only accuracy, this model would look barely better than the baseline, and someone would reasonably conclude the features were useless. Choosing the metric before seeing results is what Lesson 1 asked for; this is what it buys.</a:t>
+              <a:t>numeric_pipe and categorical_pipe are the impute-then-transform pairs from the diagram; show the full definitions on screen in notebook 2 rather than here. Point out there is exactly ONE call to fit, at the very bottom, on X_train alone - everything above it declares structure, not computation.</a:t>
+            </a:r>
+          </a:p>
+          <a:p>
+            <a:pPr lvl="0" indent="0" marL="0">
+              <a:buNone/>
+            </a:pPr>
+          </a:p>
+          <a:p>
+            <a:pPr lvl="0" indent="0" marL="0">
+              <a:buNone/>
+            </a:pPr>
+            <a:r>
+              <a:rPr/>
+              <a:t>This is the code notebook 2 runs, nearly verbatim. Say that reading it should now feel unremarkable - that is the goal, structure that makes the right thing the easy thing.</a:t>
             </a:r>
           </a:p>
         </p:txBody>
@@ -2981,7 +3065,7 @@
           <a:p>
             <a:fld id="{18BDFEC3-8487-43E8-A154-7C12CBC1FFF2}" type="slidenum">
               <a:rPr lang="en-US"/>
-              <a:t>33</a:t>
+              <a:t>32</a:t>
             </a:fld>
             <a:endParaRPr lang="en-US"/>
           </a:p>
@@ -3041,21 +3125,35 @@
             </a:pPr>
             <a:r>
               <a:rPr/>
-              <a:t>A modest gain, and say plainly that this is itself a legitimate result, not a failed experiment - feature engineering is a hypothesis about the domain, not a guarantee. Handout Section 7.</a:t>
-            </a:r>
-          </a:p>
-          <a:p>
-            <a:pPr lvl="0" indent="0" marL="0">
-              <a:buNone/>
-            </a:pPr>
-          </a:p>
-          <a:p>
-            <a:pPr lvl="0" indent="0" marL="0">
-              <a:buNone/>
-            </a:pPr>
-            <a:r>
-              <a:rPr/>
-              <a:t>The point to land: any engineered feature that involves a statistic LEARNED from data - bin edges from quantiles, a scaled interaction - is subject to the same rule as scaling. A pure arithmetic combination (this ratio) needs no fold-awareness; a learned one does.</a:t>
+              <a:t>Let the room answer why the accuracy gain is modest. The dataset is 80/20 imbalanced, so accuracy is dominated by the majority class - exactly as Lesson 1 warned, and the first time they meet it on data they prepared themselves.</a:t>
+            </a:r>
+          </a:p>
+          <a:p>
+            <a:pPr lvl="0" indent="0" marL="0">
+              <a:buNone/>
+            </a:pPr>
+          </a:p>
+          <a:p>
+            <a:pPr lvl="0" indent="0" marL="0">
+              <a:buNone/>
+            </a:pPr>
+            <a:r>
+              <a:rPr/>
+              <a:t>The matrix shows where the errors sit: read the bottom-left cell, the churners the model missed. AUC at 0.752 is unaffected by the imbalance and says there is real signal that accuracy is hiding.</a:t>
+            </a:r>
+          </a:p>
+          <a:p>
+            <a:pPr lvl="0" indent="0" marL="0">
+              <a:buNone/>
+            </a:pPr>
+          </a:p>
+          <a:p>
+            <a:pPr lvl="0" indent="0" marL="0">
+              <a:buNone/>
+            </a:pPr>
+            <a:r>
+              <a:rPr/>
+              <a:t>Had we reported only accuracy, this model would look barely better than the baseline and someone would reasonably conclude the features were useless.</a:t>
             </a:r>
           </a:p>
         </p:txBody>
@@ -3077,7 +3175,7 @@
           <a:p>
             <a:fld id="{18BDFEC3-8487-43E8-A154-7C12CBC1FFF2}" type="slidenum">
               <a:rPr lang="en-US"/>
-              <a:t>34</a:t>
+              <a:t>33</a:t>
             </a:fld>
             <a:endParaRPr lang="en-US"/>
           </a:p>
@@ -3137,35 +3235,21 @@
             </a:pPr>
             <a:r>
               <a:rPr/>
-              <a:t>25 minutes. Let them work; circulate.</a:t>
-            </a:r>
-          </a:p>
-          <a:p>
-            <a:pPr lvl="0" indent="0" marL="0">
-              <a:buNone/>
-            </a:pPr>
-          </a:p>
-          <a:p>
-            <a:pPr lvl="0" indent="0" marL="0">
-              <a:buNone/>
-            </a:pPr>
-            <a:r>
-              <a:rPr/>
-              <a:t>The gradient descent toy is worth running interactively - change the variance ratio live and watch the iteration count move, per the handout’s “try this”. It makes the condition number argument concrete in a way the derivation alone does not.</a:t>
-            </a:r>
-          </a:p>
-          <a:p>
-            <a:pPr lvl="0" indent="0" marL="0">
-              <a:buNone/>
-            </a:pPr>
-          </a:p>
-          <a:p>
-            <a:pPr lvl="0" indent="0" marL="0">
-              <a:buNone/>
-            </a:pPr>
-            <a:r>
-              <a:rPr/>
-              <a:t>If the room is moving fast, the ColumnTransformer section is where to slow down: it is the piece they will reuse in every exercise and in the project, and getting the column selectors right is fiddlier than it looks.</a:t>
+              <a:t>A modest gain, and say plainly that this is itself a legitimate result, not a failed experiment - feature engineering is a hypothesis about the domain, not a guarantee. Handout Section 7.</a:t>
+            </a:r>
+          </a:p>
+          <a:p>
+            <a:pPr lvl="0" indent="0" marL="0">
+              <a:buNone/>
+            </a:pPr>
+          </a:p>
+          <a:p>
+            <a:pPr lvl="0" indent="0" marL="0">
+              <a:buNone/>
+            </a:pPr>
+            <a:r>
+              <a:rPr/>
+              <a:t>The point to land: any engineered feature that involves a statistic LEARNED from data - bin edges from quantiles, a scaled interaction - is subject to the same rule as scaling. A pure arithmetic combination (this ratio) needs no fold-awareness; a learned one does.</a:t>
             </a:r>
           </a:p>
         </p:txBody>
@@ -3187,7 +3271,7 @@
           <a:p>
             <a:fld id="{18BDFEC3-8487-43E8-A154-7C12CBC1FFF2}" type="slidenum">
               <a:rPr lang="en-US"/>
-              <a:t>35</a:t>
+              <a:t>34</a:t>
             </a:fld>
             <a:endParaRPr lang="en-US"/>
           </a:p>
@@ -3247,7 +3331,35 @@
             </a:pPr>
             <a:r>
               <a:rPr/>
-              <a:t>Set up the closing section. Lesson 1’s leak - selecting features on the full dataset - is visible once you know to look for it: an obviously extra step. Today’s two are not. Imputing a missing value and encoding a category both read as ordinary data cleaning, not as “training a model.” They ARE training a model, in the sense Section 8.1 makes precise: any fitted parameter is part of f, and f must be independent of the test set.</a:t>
+              <a:t>25 minutes. Let them work; circulate.</a:t>
+            </a:r>
+          </a:p>
+          <a:p>
+            <a:pPr lvl="0" indent="0" marL="0">
+              <a:buNone/>
+            </a:pPr>
+          </a:p>
+          <a:p>
+            <a:pPr lvl="0" indent="0" marL="0">
+              <a:buNone/>
+            </a:pPr>
+            <a:r>
+              <a:rPr/>
+              <a:t>The gradient descent toy is worth running interactively - change the variance ratio live and watch the iteration count move, per the handout’s “try this”. It makes the condition number argument concrete in a way the derivation alone does not.</a:t>
+            </a:r>
+          </a:p>
+          <a:p>
+            <a:pPr lvl="0" indent="0" marL="0">
+              <a:buNone/>
+            </a:pPr>
+          </a:p>
+          <a:p>
+            <a:pPr lvl="0" indent="0" marL="0">
+              <a:buNone/>
+            </a:pPr>
+            <a:r>
+              <a:rPr/>
+              <a:t>If the room is moving fast, the ColumnTransformer section is where to slow down: it is the piece they will reuse in every exercise and in the project, and getting the column selectors right is fiddlier than it looks.</a:t>
             </a:r>
           </a:p>
         </p:txBody>
@@ -3269,7 +3381,7 @@
           <a:p>
             <a:fld id="{18BDFEC3-8487-43E8-A154-7C12CBC1FFF2}" type="slidenum">
               <a:rPr lang="en-US"/>
-              <a:t>36</a:t>
+              <a:t>35</a:t>
             </a:fld>
             <a:endParaRPr lang="en-US"/>
           </a:p>
@@ -3329,35 +3441,7 @@
             </a:pPr>
             <a:r>
               <a:rPr/>
-              <a:t>Walk the mechanism before the number. KNNImputer fills a gap using other rows’ values: it finds the nearest neighbours in feature space and averages them. “Nearest in the whole dataset” includes test rows, if it was fitted before the split existed.</a:t>
-            </a:r>
-          </a:p>
-          <a:p>
-            <a:pPr lvl="0" indent="0" marL="0">
-              <a:buNone/>
-            </a:pPr>
-          </a:p>
-          <a:p>
-            <a:pPr lvl="0" indent="0" marL="0">
-              <a:buNone/>
-            </a:pPr>
-            <a:r>
-              <a:rPr/>
-              <a:t>So a test row’s missing value can be filled using its own neighbours - which may include rows whose labels the model will later be scored on. The imputer did nothing wrong; it was simply shown data it should not have seen.</a:t>
-            </a:r>
-          </a:p>
-          <a:p>
-            <a:pPr lvl="0" indent="0" marL="0">
-              <a:buNone/>
-            </a:pPr>
-          </a:p>
-          <a:p>
-            <a:pPr lvl="0" indent="0" marL="0">
-              <a:buNone/>
-            </a:pPr>
-            <a:r>
-              <a:rPr/>
-              <a:t>Notebook 3 measures the gap. Connect it back to Lesson 1: this is the same independence argument, applied to a step nobody thinks of as learning. The imputer learns; therefore it belongs inside the training fold.</a:t>
+              <a:t>Set up the closing section. Lesson 1’s leak - selecting features on the full dataset - is visible once you know to look for it: an obviously extra step. Today’s two are not. Imputing a missing value and encoding a category both read as ordinary data cleaning, not as “training a model.” They ARE training a model, in the sense Section 8.1 makes precise: any fitted parameter is part of f, and f must be independent of the test set.</a:t>
             </a:r>
           </a:p>
         </p:txBody>
@@ -3379,7 +3463,7 @@
           <a:p>
             <a:fld id="{18BDFEC3-8487-43E8-A154-7C12CBC1FFF2}" type="slidenum">
               <a:rPr lang="en-US"/>
-              <a:t>37</a:t>
+              <a:t>36</a:t>
             </a:fld>
             <a:endParaRPr lang="en-US"/>
           </a:p>
@@ -3439,21 +3523,35 @@
             </a:pPr>
             <a:r>
               <a:rPr/>
-              <a:t>This is traceable specifically because we control the ground truth and can look up which rows are in which split. In practice you rarely get this diagnostic; the number here is instead a proof of mechanism, done once so you believe it happens.</a:t>
-            </a:r>
-          </a:p>
-          <a:p>
-            <a:pPr lvl="0" indent="0" marL="0">
-              <a:buNone/>
-            </a:pPr>
-          </a:p>
-          <a:p>
-            <a:pPr lvl="0" indent="0" marL="0">
-              <a:buNone/>
-            </a:pPr>
-            <a:r>
-              <a:rPr/>
-              <a:t>Downstream effect on this run: AUC 0.7548 (leaky) vs 0.7530 (honest) - small. Land the point deliberately: a leak does not have to be dramatic to be wrong. It is still an optimistic number reported to whoever reads it next.</a:t>
+              <a:t>Walk the mechanism before the number. KNNImputer fills a gap using other rows’ values: it finds the nearest neighbours in feature space and averages them. “Nearest in the whole dataset” includes test rows, if it was fitted before the split existed.</a:t>
+            </a:r>
+          </a:p>
+          <a:p>
+            <a:pPr lvl="0" indent="0" marL="0">
+              <a:buNone/>
+            </a:pPr>
+          </a:p>
+          <a:p>
+            <a:pPr lvl="0" indent="0" marL="0">
+              <a:buNone/>
+            </a:pPr>
+            <a:r>
+              <a:rPr/>
+              <a:t>So a test row’s missing value can be filled using its own neighbours - which may include rows whose labels the model will later be scored on. The imputer did nothing wrong; it was simply shown data it should not have seen.</a:t>
+            </a:r>
+          </a:p>
+          <a:p>
+            <a:pPr lvl="0" indent="0" marL="0">
+              <a:buNone/>
+            </a:pPr>
+          </a:p>
+          <a:p>
+            <a:pPr lvl="0" indent="0" marL="0">
+              <a:buNone/>
+            </a:pPr>
+            <a:r>
+              <a:rPr/>
+              <a:t>Notebook 3 measures the gap. Connect it back to Lesson 1: this is the same independence argument, applied to a step nobody thinks of as learning. The imputer learns; therefore it belongs inside the training fold.</a:t>
             </a:r>
           </a:p>
         </p:txBody>
@@ -3475,7 +3573,7 @@
           <a:p>
             <a:fld id="{18BDFEC3-8487-43E8-A154-7C12CBC1FFF2}" type="slidenum">
               <a:rPr lang="en-US"/>
-              <a:t>38</a:t>
+              <a:t>37</a:t>
             </a:fld>
             <a:endParaRPr lang="en-US"/>
           </a:p>
@@ -3535,35 +3633,35 @@
             </a:pPr>
             <a:r>
               <a:rPr/>
-              <a:t>zip_code has no real relationship with churn - the data was generated that way deliberately, so any apparent signal is an artefact we can measure exactly.</a:t>
-            </a:r>
-          </a:p>
-          <a:p>
-            <a:pPr lvl="0" indent="0" marL="0">
-              <a:buNone/>
-            </a:pPr>
-          </a:p>
-          <a:p>
-            <a:pPr lvl="0" indent="0" marL="0">
-              <a:buNone/>
-            </a:pPr>
-            <a:r>
-              <a:rPr/>
-              <a:t>Target encoding replaces each zip code with the average churn rate of its own customers. Computed before the split, that average includes the test rows’ labels. The feature now contains the answer, in diluted form.</a:t>
-            </a:r>
-          </a:p>
-          <a:p>
-            <a:pPr lvl="0" indent="0" marL="0">
-              <a:buNone/>
-            </a:pPr>
-          </a:p>
-          <a:p>
-            <a:pPr lvl="0" indent="0" marL="0">
-              <a:buNone/>
-            </a:pPr>
-            <a:r>
-              <a:rPr/>
-              <a:t>This is the most dangerous leak of the three, because the resulting column looks entirely reasonable in a dataframe: a number between 0 and 1, sensibly distributed, with no trace of where it came from. Nothing about it says “this was computed from the labels”.</a:t>
+              <a:t>98 of 128. Not an edge case - the substantial majority of imputed training rows borrowed a value from at least one row the model would later be scored on.</a:t>
+            </a:r>
+          </a:p>
+          <a:p>
+            <a:pPr lvl="0" indent="0" marL="0">
+              <a:buNone/>
+            </a:pPr>
+          </a:p>
+          <a:p>
+            <a:pPr lvl="0" indent="0" marL="0">
+              <a:buNone/>
+            </a:pPr>
+            <a:r>
+              <a:rPr/>
+              <a:t>Stress that nothing in the code looks wrong. KNNImputer did exactly what it says: found the nearest neighbours in the data it was given. The error was in what it was given, and it happened one line earlier.</a:t>
+            </a:r>
+          </a:p>
+          <a:p>
+            <a:pPr lvl="0" indent="0" marL="0">
+              <a:buNone/>
+            </a:pPr>
+          </a:p>
+          <a:p>
+            <a:pPr lvl="0" indent="0" marL="0">
+              <a:buNone/>
+            </a:pPr>
+            <a:r>
+              <a:rPr/>
+              <a:t>This is the number to put on the board if only one number from today survives.</a:t>
             </a:r>
           </a:p>
         </p:txBody>
@@ -3585,7 +3683,7 @@
           <a:p>
             <a:fld id="{18BDFEC3-8487-43E8-A154-7C12CBC1FFF2}" type="slidenum">
               <a:rPr lang="en-US"/>
-              <a:t>39</a:t>
+              <a:t>38</a:t>
             </a:fld>
             <a:endParaRPr lang="en-US"/>
           </a:p>
@@ -3645,21 +3743,35 @@
             </a:pPr>
             <a:r>
               <a:rPr/>
-              <a:t>Baseline without zip: AUC 0.751. Honest encoding (sklearn’s TargetEncoder, cross-fitted inside the pipeline): 0.752 - indistinguishable, correctly, since zip carries nothing. Leaky encoding, computed before the split: 0.891.</a:t>
-            </a:r>
-          </a:p>
-          <a:p>
-            <a:pPr lvl="0" indent="0" marL="0">
-              <a:buNone/>
-            </a:pPr>
-          </a:p>
-          <a:p>
-            <a:pPr lvl="0" indent="0" marL="0">
-              <a:buNone/>
-            </a:pPr>
-            <a:r>
-              <a:rPr/>
-              <a:t>Let that number sit. It looks like a genuinely better model. It is not one - the improvement is manufactured entirely by the mechanism on the next slide. This is Lesson 1’s 77%-on-coin-flip-labels story again, produced by two unremarkable lines of preprocessing instead of an obviously wrong one.</a:t>
+              <a:t>zip_code has no real relationship with churn - the data was generated that way deliberately, so any apparent signal is an artefact we can measure exactly.</a:t>
+            </a:r>
+          </a:p>
+          <a:p>
+            <a:pPr lvl="0" indent="0" marL="0">
+              <a:buNone/>
+            </a:pPr>
+          </a:p>
+          <a:p>
+            <a:pPr lvl="0" indent="0" marL="0">
+              <a:buNone/>
+            </a:pPr>
+            <a:r>
+              <a:rPr/>
+              <a:t>Target encoding replaces each zip code with the average churn rate of its own customers. Computed before the split, that average includes the test rows’ labels. The feature now contains the answer, in diluted form.</a:t>
+            </a:r>
+          </a:p>
+          <a:p>
+            <a:pPr lvl="0" indent="0" marL="0">
+              <a:buNone/>
+            </a:pPr>
+          </a:p>
+          <a:p>
+            <a:pPr lvl="0" indent="0" marL="0">
+              <a:buNone/>
+            </a:pPr>
+            <a:r>
+              <a:rPr/>
+              <a:t>This is the most dangerous leak of the three, because the resulting column looks entirely reasonable in a dataframe: a number between 0 and 1, sensibly distributed, with no trace of where it came from. Nothing about it says “this was computed from the labels”.</a:t>
             </a:r>
           </a:p>
         </p:txBody>
@@ -3681,7 +3793,7 @@
           <a:p>
             <a:fld id="{18BDFEC3-8487-43E8-A154-7C12CBC1FFF2}" type="slidenum">
               <a:rPr lang="en-US"/>
-              <a:t>40</a:t>
+              <a:t>39</a:t>
             </a:fld>
             <a:endParaRPr lang="en-US"/>
           </a:p>
@@ -3741,35 +3853,21 @@
             </a:pPr>
             <a:r>
               <a:rPr/>
-              <a:t>Handout Section 9.2 has the algebra. The intuition: for a zip code with a single customer, the target encoding IS that customer’s label, straight through. With two customers it is the average of two labels. Only as the group grows does the encoding become a genuine statistic rather than a copy of the answer.</a:t>
-            </a:r>
-          </a:p>
-          <a:p>
-            <a:pPr lvl="0" indent="0" marL="0">
-              <a:buNone/>
-            </a:pPr>
-          </a:p>
-          <a:p>
-            <a:pPr lvl="0" indent="0" marL="0">
-              <a:buNone/>
-            </a:pPr>
-            <a:r>
-              <a:rPr/>
-              <a:t>So the leak is worst exactly where the data is thinnest - which is also where high-cardinality columns spend most of their mass. Most zip codes here have a handful of customers.</a:t>
-            </a:r>
-          </a:p>
-          <a:p>
-            <a:pPr lvl="0" indent="0" marL="0">
-              <a:buNone/>
-            </a:pPr>
-          </a:p>
-          <a:p>
-            <a:pPr lvl="0" indent="0" marL="0">
-              <a:buNone/>
-            </a:pPr>
-            <a:r>
-              <a:rPr/>
-              <a:t>Give them the diagnostic to remember: if a feature’s usefulness comes mostly from its rarest levels, be suspicious. That is the shape of a leak, not of a signal.</a:t>
+              <a:t>Baseline without zip: AUC 0.751. Honest encoding (sklearn’s TargetEncoder, cross-fitted inside the pipeline): 0.752 - indistinguishable, correctly, since zip carries nothing. Leaky encoding, computed before the split: 0.891.</a:t>
+            </a:r>
+          </a:p>
+          <a:p>
+            <a:pPr lvl="0" indent="0" marL="0">
+              <a:buNone/>
+            </a:pPr>
+          </a:p>
+          <a:p>
+            <a:pPr lvl="0" indent="0" marL="0">
+              <a:buNone/>
+            </a:pPr>
+            <a:r>
+              <a:rPr/>
+              <a:t>Let that number sit. It looks like a genuinely better model. It is not one - the improvement is manufactured entirely by the mechanism on the next slide. This is Lesson 1’s 77%-on-coin-flip-labels story again, produced by two unremarkable lines of preprocessing instead of an obviously wrong one.</a:t>
             </a:r>
           </a:p>
         </p:txBody>
@@ -3791,7 +3889,7 @@
           <a:p>
             <a:fld id="{18BDFEC3-8487-43E8-A154-7C12CBC1FFF2}" type="slidenum">
               <a:rPr lang="en-US"/>
-              <a:t>41</a:t>
+              <a:t>40</a:t>
             </a:fld>
             <a:endParaRPr lang="en-US"/>
           </a:p>
@@ -3961,21 +4059,35 @@
             </a:pPr>
             <a:r>
               <a:rPr/>
-              <a:t>Notebook 3 shows the n_c=1 case literally: zip code Z378, one customer, churned=1, encoded value 1.000. Not correlated with the label. IS the label, relabelled as an input.</a:t>
-            </a:r>
-          </a:p>
-          <a:p>
-            <a:pPr lvl="0" indent="0" marL="0">
-              <a:buNone/>
-            </a:pPr>
-          </a:p>
-          <a:p>
-            <a:pPr lvl="0" indent="0" marL="0">
-              <a:buNone/>
-            </a:pPr>
-            <a:r>
-              <a:rPr/>
-              <a:t>Connect to Section 6.3: high cardinality means small groups means a bigger leak by exactly this formula - the curse of dimensionality and the leakage risk are the same underlying fact.</a:t>
+              <a:t>Handout Section 9.2 has the algebra. The intuition: for a zip code with a single customer, the target encoding IS that customer’s label, straight through. With two customers it is the average of two labels. Only as the group grows does the encoding become a genuine statistic rather than a copy of the answer.</a:t>
+            </a:r>
+          </a:p>
+          <a:p>
+            <a:pPr lvl="0" indent="0" marL="0">
+              <a:buNone/>
+            </a:pPr>
+          </a:p>
+          <a:p>
+            <a:pPr lvl="0" indent="0" marL="0">
+              <a:buNone/>
+            </a:pPr>
+            <a:r>
+              <a:rPr/>
+              <a:t>So the leak is worst exactly where the data is thinnest - which is also where high-cardinality columns spend most of their mass. Most zip codes here have a handful of customers.</a:t>
+            </a:r>
+          </a:p>
+          <a:p>
+            <a:pPr lvl="0" indent="0" marL="0">
+              <a:buNone/>
+            </a:pPr>
+          </a:p>
+          <a:p>
+            <a:pPr lvl="0" indent="0" marL="0">
+              <a:buNone/>
+            </a:pPr>
+            <a:r>
+              <a:rPr/>
+              <a:t>Give them the diagnostic to remember: if a feature’s usefulness comes mostly from its rarest levels, be suspicious. That is the shape of a leak, not of a signal.</a:t>
             </a:r>
           </a:p>
         </p:txBody>
@@ -3997,7 +4109,7 @@
           <a:p>
             <a:fld id="{18BDFEC3-8487-43E8-A154-7C12CBC1FFF2}" type="slidenum">
               <a:rPr lang="en-US"/>
-              <a:t>42</a:t>
+              <a:t>41</a:t>
             </a:fld>
             <a:endParaRPr lang="en-US"/>
           </a:p>
@@ -4057,35 +4169,21 @@
             </a:pPr>
             <a:r>
               <a:rPr/>
-              <a:t>Smoothing pulls each group’s mean towards the global mean, weighted by group size, so a one-customer zip code barely moves from the overall rate. It reduces the leak but does not remove it.</a:t>
-            </a:r>
-          </a:p>
-          <a:p>
-            <a:pPr lvl="0" indent="0" marL="0">
-              <a:buNone/>
-            </a:pPr>
-          </a:p>
-          <a:p>
-            <a:pPr lvl="0" indent="0" marL="0">
-              <a:buNone/>
-            </a:pPr>
-            <a:r>
-              <a:rPr/>
-              <a:t>Say clearly what actually removes it: fitting the encoder inside the training fold, exactly as with every other learned step. Smoothing is a refinement on top of that, not a substitute for it.</a:t>
-            </a:r>
-          </a:p>
-          <a:p>
-            <a:pPr lvl="0" indent="0" marL="0">
-              <a:buNone/>
-            </a:pPr>
-          </a:p>
-          <a:p>
-            <a:pPr lvl="0" indent="0" marL="0">
-              <a:buNone/>
-            </a:pPr>
-            <a:r>
-              <a:rPr/>
-              <a:t>This is the third time today the same rule has appeared - imputation, scaling, encoding - and that repetition is the point of the lesson. Lesson 1 stated the rule for one case; today it turns out to be the same rule every time.</a:t>
+              <a:t>Notebook 3 shows the n_c=1 case literally: zip code Z378, one customer, churned=1, encoded value 1.000. Not correlated with the label. IS the label, relabelled as an input.</a:t>
+            </a:r>
+          </a:p>
+          <a:p>
+            <a:pPr lvl="0" indent="0" marL="0">
+              <a:buNone/>
+            </a:pPr>
+          </a:p>
+          <a:p>
+            <a:pPr lvl="0" indent="0" marL="0">
+              <a:buNone/>
+            </a:pPr>
+            <a:r>
+              <a:rPr/>
+              <a:t>Connect to Section 6.3: high cardinality means small groups means a bigger leak by exactly this formula - the curse of dimensionality and the leakage risk are the same underlying fact.</a:t>
             </a:r>
           </a:p>
         </p:txBody>
@@ -4107,7 +4205,7 @@
           <a:p>
             <a:fld id="{18BDFEC3-8487-43E8-A154-7C12CBC1FFF2}" type="slidenum">
               <a:rPr lang="en-US"/>
-              <a:t>43</a:t>
+              <a:t>42</a:t>
             </a:fld>
             <a:endParaRPr lang="en-US"/>
           </a:p>
@@ -4167,21 +4265,35 @@
             </a:pPr>
             <a:r>
               <a:rPr/>
-              <a:t>One test, not a growing list of special cases: does fitting this step compute anything from the rows it is given? If yes, it goes inside the pipeline. Handout Section 9.3.</a:t>
-            </a:r>
-          </a:p>
-          <a:p>
-            <a:pPr lvl="0" indent="0" marL="0">
-              <a:buNone/>
-            </a:pPr>
-          </a:p>
-          <a:p>
-            <a:pPr lvl="0" indent="0" marL="0">
-              <a:buNone/>
-            </a:pPr>
-            <a:r>
-              <a:rPr/>
-              <a:t>Say explicitly: Lesson 5 returns to leakage a third time, for hyperparameter tuning, where the same test applies once more.</a:t>
+              <a:t>Smoothing pulls each group’s mean towards the global mean, weighted by group size, so a one-customer zip code barely moves from the overall rate. It reduces the leak but does not remove it.</a:t>
+            </a:r>
+          </a:p>
+          <a:p>
+            <a:pPr lvl="0" indent="0" marL="0">
+              <a:buNone/>
+            </a:pPr>
+          </a:p>
+          <a:p>
+            <a:pPr lvl="0" indent="0" marL="0">
+              <a:buNone/>
+            </a:pPr>
+            <a:r>
+              <a:rPr/>
+              <a:t>Say clearly what actually removes it: fitting the encoder inside the training fold, exactly as with every other learned step. Smoothing is a refinement on top of that, not a substitute for it.</a:t>
+            </a:r>
+          </a:p>
+          <a:p>
+            <a:pPr lvl="0" indent="0" marL="0">
+              <a:buNone/>
+            </a:pPr>
+          </a:p>
+          <a:p>
+            <a:pPr lvl="0" indent="0" marL="0">
+              <a:buNone/>
+            </a:pPr>
+            <a:r>
+              <a:rPr/>
+              <a:t>This is the third time today the same rule has appeared - imputation, scaling, encoding - and that repetition is the point of the lesson. Lesson 1 stated the rule for one case; today it turns out to be the same rule every time.</a:t>
             </a:r>
           </a:p>
         </p:txBody>
@@ -4203,7 +4315,7 @@
           <a:p>
             <a:fld id="{18BDFEC3-8487-43E8-A154-7C12CBC1FFF2}" type="slidenum">
               <a:rPr lang="en-US"/>
-              <a:t>44</a:t>
+              <a:t>43</a:t>
             </a:fld>
             <a:endParaRPr lang="en-US"/>
           </a:p>
@@ -4263,35 +4375,21 @@
             </a:pPr>
             <a:r>
               <a:rPr/>
-              <a:t>20 minutes. This notebook is the payoff of the lesson: three leaks, each measured against an honest pipeline on the same data.</a:t>
-            </a:r>
-          </a:p>
-          <a:p>
-            <a:pPr lvl="0" indent="0" marL="0">
-              <a:buNone/>
-            </a:pPr>
-          </a:p>
-          <a:p>
-            <a:pPr lvl="0" indent="0" marL="0">
-              <a:buNone/>
-            </a:pPr>
-            <a:r>
-              <a:rPr/>
-              <a:t>The numbers matter less than the pattern - every leak inflates the score, none of them raises an error, and all three are things a competent person does by accident. Ask them to predict the direction and rough size of each gap before running the cell.</a:t>
-            </a:r>
-          </a:p>
-          <a:p>
-            <a:pPr lvl="0" indent="0" marL="0">
-              <a:buNone/>
-            </a:pPr>
-          </a:p>
-          <a:p>
-            <a:pPr lvl="0" indent="0" marL="0">
-              <a:buNone/>
-            </a:pPr>
-            <a:r>
-              <a:rPr/>
-              <a:t>If time is short, the target encoding case is the one to keep: it is the subtlest and the one most likely to appear in their own project.</a:t>
+              <a:t>One test, not a growing list of special cases: does fitting this step compute anything from the rows it is given? If yes, it goes inside the pipeline. Handout Section 9.3.</a:t>
+            </a:r>
+          </a:p>
+          <a:p>
+            <a:pPr lvl="0" indent="0" marL="0">
+              <a:buNone/>
+            </a:pPr>
+          </a:p>
+          <a:p>
+            <a:pPr lvl="0" indent="0" marL="0">
+              <a:buNone/>
+            </a:pPr>
+            <a:r>
+              <a:rPr/>
+              <a:t>Say explicitly: Lesson 5 returns to leakage a third time, for hyperparameter tuning, where the same test applies once more.</a:t>
             </a:r>
           </a:p>
         </p:txBody>
@@ -4313,7 +4411,7 @@
           <a:p>
             <a:fld id="{18BDFEC3-8487-43E8-A154-7C12CBC1FFF2}" type="slidenum">
               <a:rPr lang="en-US"/>
-              <a:t>45</a:t>
+              <a:t>44</a:t>
             </a:fld>
             <a:endParaRPr lang="en-US"/>
           </a:p>
@@ -4373,35 +4471,35 @@
             </a:pPr>
             <a:r>
               <a:rPr/>
-              <a:t>Draw the thread together explicitly. Lesson 1 said nothing is learned before the split, using feature selection as the example. Today every preprocessing step turned out to be a learning step: an imputer learns a mean or a set of neighbours, a scaler learns a mean and a standard deviation, an encoder learns a mapping from categories to numbers.</a:t>
-            </a:r>
-          </a:p>
-          <a:p>
-            <a:pPr lvl="0" indent="0" marL="0">
-              <a:buNone/>
-            </a:pPr>
-          </a:p>
-          <a:p>
-            <a:pPr lvl="0" indent="0" marL="0">
-              <a:buNone/>
-            </a:pPr>
-            <a:r>
-              <a:rPr/>
-              <a:t>So the rule did not get more complicated - it got more general. And the pipeline is not tidiness, it is the mechanism that enforces the rule structurally, which is why we now build one for everything.</a:t>
-            </a:r>
-          </a:p>
-          <a:p>
-            <a:pPr lvl="0" indent="0" marL="0">
-              <a:buNone/>
-            </a:pPr>
-          </a:p>
-          <a:p>
-            <a:pPr lvl="0" indent="0" marL="0">
-              <a:buNone/>
-            </a:pPr>
-            <a:r>
-              <a:rPr/>
-              <a:t>Preview Lesson 3 in one sentence: with the data prepared honestly, we can finally fit something and look at what the fitting actually does.</a:t>
+              <a:t>20 minutes. This notebook is the payoff of the lesson: three leaks, each measured against an honest pipeline on the same data.</a:t>
+            </a:r>
+          </a:p>
+          <a:p>
+            <a:pPr lvl="0" indent="0" marL="0">
+              <a:buNone/>
+            </a:pPr>
+          </a:p>
+          <a:p>
+            <a:pPr lvl="0" indent="0" marL="0">
+              <a:buNone/>
+            </a:pPr>
+            <a:r>
+              <a:rPr/>
+              <a:t>The numbers matter less than the pattern - every leak inflates the score, none of them raises an error, and all three are things a competent person does by accident. Ask them to predict the direction and rough size of each gap before running the cell.</a:t>
+            </a:r>
+          </a:p>
+          <a:p>
+            <a:pPr lvl="0" indent="0" marL="0">
+              <a:buNone/>
+            </a:pPr>
+          </a:p>
+          <a:p>
+            <a:pPr lvl="0" indent="0" marL="0">
+              <a:buNone/>
+            </a:pPr>
+            <a:r>
+              <a:rPr/>
+              <a:t>If time is short, the target encoding case is the one to keep: it is the subtlest and the one most likely to appear in their own project.</a:t>
             </a:r>
           </a:p>
         </p:txBody>
@@ -4423,7 +4521,7 @@
           <a:p>
             <a:fld id="{18BDFEC3-8487-43E8-A154-7C12CBC1FFF2}" type="slidenum">
               <a:rPr lang="en-US"/>
-              <a:t>46</a:t>
+              <a:t>45</a:t>
             </a:fld>
             <a:endParaRPr lang="en-US"/>
           </a:p>
@@ -4483,35 +4581,35 @@
             </a:pPr>
             <a:r>
               <a:rPr/>
-              <a:t>Set it explicitly. The exercise reuses churn_data.py with a different seed, so results will not match today’s numbers exactly - that is intentional, it stops copy-pasted answers from working.</a:t>
-            </a:r>
-          </a:p>
-          <a:p>
-            <a:pPr lvl="0" indent="0" marL="0">
-              <a:buNone/>
-            </a:pPr>
-          </a:p>
-          <a:p>
-            <a:pPr lvl="0" indent="0" marL="0">
-              <a:buNone/>
-            </a:pPr>
-            <a:r>
-              <a:rPr/>
-              <a:t>Remind them: as in Exercise 1, there are no marks for accuracy. Marks are for methodological correctness, and specifically here for correctly identifying which preprocessing steps needed to be inside the pipeline and demonstrating, with a number, what leaving one out would have cost.</a:t>
-            </a:r>
-          </a:p>
-          <a:p>
-            <a:pPr lvl="0" indent="0" marL="0">
-              <a:buNone/>
-            </a:pPr>
-          </a:p>
-          <a:p>
-            <a:pPr lvl="0" indent="0" marL="0">
-              <a:buNone/>
-            </a:pPr>
-            <a:r>
-              <a:rPr/>
-              <a:t>Also point them at the quiz - the reasoning-tagged questions are the closest thing to the exam they will see before the sample papers.</a:t>
+              <a:t>Draw the thread together explicitly. Lesson 1 said nothing is learned before the split, using feature selection as the example. Today every preprocessing step turned out to be a learning step: an imputer learns a mean or a set of neighbours, a scaler learns a mean and a standard deviation, an encoder learns a mapping from categories to numbers.</a:t>
+            </a:r>
+          </a:p>
+          <a:p>
+            <a:pPr lvl="0" indent="0" marL="0">
+              <a:buNone/>
+            </a:pPr>
+          </a:p>
+          <a:p>
+            <a:pPr lvl="0" indent="0" marL="0">
+              <a:buNone/>
+            </a:pPr>
+            <a:r>
+              <a:rPr/>
+              <a:t>So the rule did not get more complicated - it got more general. And the pipeline is not tidiness, it is the mechanism that enforces the rule structurally, which is why we now build one for everything.</a:t>
+            </a:r>
+          </a:p>
+          <a:p>
+            <a:pPr lvl="0" indent="0" marL="0">
+              <a:buNone/>
+            </a:pPr>
+          </a:p>
+          <a:p>
+            <a:pPr lvl="0" indent="0" marL="0">
+              <a:buNone/>
+            </a:pPr>
+            <a:r>
+              <a:rPr/>
+              <a:t>Preview Lesson 3 in one sentence: with the data prepared honestly, we can finally fit something and look at what the fitting actually does.</a:t>
             </a:r>
           </a:p>
         </p:txBody>
@@ -4533,7 +4631,7 @@
           <a:p>
             <a:fld id="{18BDFEC3-8487-43E8-A154-7C12CBC1FFF2}" type="slidenum">
               <a:rPr lang="en-US"/>
-              <a:t>47</a:t>
+              <a:t>46</a:t>
             </a:fld>
             <a:endParaRPr lang="en-US"/>
           </a:p>
@@ -4593,6 +4691,116 @@
             </a:pPr>
             <a:r>
               <a:rPr/>
+              <a:t>Set it explicitly. The exercise reuses churn_data.py with a different seed, so results will not match today’s numbers exactly - that is intentional, it stops copy-pasted answers from working.</a:t>
+            </a:r>
+          </a:p>
+          <a:p>
+            <a:pPr lvl="0" indent="0" marL="0">
+              <a:buNone/>
+            </a:pPr>
+          </a:p>
+          <a:p>
+            <a:pPr lvl="0" indent="0" marL="0">
+              <a:buNone/>
+            </a:pPr>
+            <a:r>
+              <a:rPr/>
+              <a:t>Remind them: as in Exercise 1, there are no marks for accuracy. Marks are for methodological correctness, and specifically here for correctly identifying which preprocessing steps needed to be inside the pipeline and demonstrating, with a number, what leaving one out would have cost.</a:t>
+            </a:r>
+          </a:p>
+          <a:p>
+            <a:pPr lvl="0" indent="0" marL="0">
+              <a:buNone/>
+            </a:pPr>
+          </a:p>
+          <a:p>
+            <a:pPr lvl="0" indent="0" marL="0">
+              <a:buNone/>
+            </a:pPr>
+            <a:r>
+              <a:rPr/>
+              <a:t>Also point them at the quiz - the reasoning-tagged questions are the closest thing to the exam they will see before the sample papers.</a:t>
+            </a:r>
+          </a:p>
+        </p:txBody>
+      </p:sp>
+      <p:sp>
+        <p:nvSpPr>
+          <p:cNvPr id="4" name="Slide Number Placeholder 3"/>
+          <p:cNvSpPr>
+            <a:spLocks noGrp="1"/>
+          </p:cNvSpPr>
+          <p:nvPr>
+            <p:ph type="sldNum" sz="quarter" idx="10"/>
+          </p:nvPr>
+        </p:nvSpPr>
+        <p:spPr/>
+        <p:txBody>
+          <a:bodyPr/>
+          <a:lstStyle/>
+          <a:p>
+            <a:fld id="{18BDFEC3-8487-43E8-A154-7C12CBC1FFF2}" type="slidenum">
+              <a:rPr lang="en-US"/>
+              <a:t>47</a:t>
+            </a:fld>
+            <a:endParaRPr lang="en-US"/>
+          </a:p>
+        </p:txBody>
+      </p:sp>
+    </p:spTree>
+  </p:cSld>
+</p:notes>
+</file>
+
+<file path=ppt/notesSlides/notesSlide47.xml><?xml version="1.0" encoding="utf-8"?>
+<p:notes xmlns:a="http://schemas.openxmlformats.org/drawingml/2006/main" xmlns:r="http://schemas.openxmlformats.org/officeDocument/2006/relationships" xmlns:p="http://schemas.openxmlformats.org/presentationml/2006/main">
+  <p:cSld>
+    <p:spTree>
+      <p:nvGrpSpPr>
+        <p:cNvPr id="1" name=""/>
+        <p:cNvGrpSpPr/>
+        <p:nvPr/>
+      </p:nvGrpSpPr>
+      <p:grpSpPr>
+        <a:xfrm>
+          <a:off x="0" y="0"/>
+          <a:ext cx="0" cy="0"/>
+          <a:chOff x="0" y="0"/>
+          <a:chExt cx="0" cy="0"/>
+        </a:xfrm>
+      </p:grpSpPr>
+      <p:sp>
+        <p:nvSpPr>
+          <p:cNvPr id="2" name="Slide Image Placeholder 1"/>
+          <p:cNvSpPr>
+            <a:spLocks noGrp="1" noRot="1" noChangeAspect="1"/>
+          </p:cNvSpPr>
+          <p:nvPr>
+            <p:ph type="sldImg"/>
+          </p:nvPr>
+        </p:nvSpPr>
+        <p:spPr/>
+      </p:sp>
+      <p:sp>
+        <p:nvSpPr>
+          <p:cNvPr id="3" name="Notes Placeholder 2"/>
+          <p:cNvSpPr>
+            <a:spLocks noGrp="1"/>
+          </p:cNvSpPr>
+          <p:nvPr>
+            <p:ph type="body" idx="1"/>
+          </p:nvPr>
+        </p:nvSpPr>
+        <p:spPr/>
+        <p:txBody>
+          <a:bodyPr/>
+          <a:lstStyle/>
+          <a:p>
+            <a:pPr lvl="0" indent="0" marL="0">
+              <a:buNone/>
+            </a:pPr>
+            <a:r>
+              <a:rPr/>
               <a:t>Set the exercise explicitly and give the deadline - Friday 9 October, at the start of Lesson 3.</a:t>
             </a:r>
           </a:p>
@@ -4703,21 +4911,7 @@
             </a:pPr>
             <a:r>
               <a:rPr/>
-              <a:t>Get a laugh at “999” and use it: nobody wrote a bug, somebody’s system recorded an impossible value and nothing caught it before it reached this table. That is the entire subject of Section 4, arriving early.</a:t>
-            </a:r>
-          </a:p>
-          <a:p>
-            <a:pPr lvl="0" indent="0" marL="0">
-              <a:buNone/>
-            </a:pPr>
-          </a:p>
-          <a:p>
-            <a:pPr lvl="0" indent="0" marL="0">
-              <a:buNone/>
-            </a:pPr>
-            <a:r>
-              <a:rPr/>
-              <a:t>State the baseline the way Lesson 1 insisted: 80.6% is what “always predict no churn” scores. Every later number is measured against that, not against zero. Handout Section 2.</a:t>
+              <a:t>This figure already existed in the notebook and is the reason the next forty minutes happen: monthly_charges is bimodal, tenure is nearly uniform, age is skewed and has a gap. Ask what each shape implies before moving on - a bimodal column usually means two populations mixed together.</a:t>
             </a:r>
           </a:p>
         </p:txBody>
@@ -5143,35 +5337,49 @@
             </a:pPr>
             <a:r>
               <a:rPr/>
-              <a:t>Handout Section 3.2 derives this in full: replacing the missing p-fraction of X with its own mean shrinks Var(X) by (1-p) and Cov(X,Y) by (1-p) too, and the asymmetry between how variance and covariance enter the correlation ratio is where the square root comes from.</a:t>
-            </a:r>
-          </a:p>
-          <a:p>
-            <a:pPr lvl="0" indent="0" marL="0">
-              <a:buNone/>
-            </a:pPr>
-          </a:p>
-          <a:p>
-            <a:pPr lvl="0" indent="0" marL="0">
-              <a:buNone/>
-            </a:pPr>
-            <a:r>
-              <a:rPr/>
-              <a:t>Give the number: p=0.08 for our age column, attenuation factor √0.92 ≈ 0.96 - small. At p=0.4, it is √0.6 ≈ 0.77 - a genuine relationship substantially erased by a constant. The mechanism is identical either way; only the size changes.</a:t>
-            </a:r>
-          </a:p>
-          <a:p>
-            <a:pPr lvl="0" indent="0" marL="0">
-              <a:buNone/>
-            </a:pPr>
-          </a:p>
-          <a:p>
-            <a:pPr lvl="0" indent="0" marL="0">
-              <a:buNone/>
-            </a:pPr>
-            <a:r>
-              <a:rPr/>
-              <a:t>This is not an argument against imputation - dropping rows or columns has its own costs, covered in Section 3.3. It is an argument for knowing what you paid.</a:t>
+              <a:t>Read the curve rather than the formula. Filling gaps with a constant costs correlation, and the cost grows with the fraction filled.</a:t>
+            </a:r>
+          </a:p>
+          <a:p>
+            <a:pPr lvl="0" indent="0" marL="0">
+              <a:buNone/>
+            </a:pPr>
+          </a:p>
+          <a:p>
+            <a:pPr lvl="0" indent="0" marL="0">
+              <a:buNone/>
+            </a:pPr>
+            <a:r>
+              <a:rPr/>
+              <a:t>Point at the two markers. For age at 8% the factor is 0.96 - negligible, and this is why nobody notices. At 40% it is 0.77, which erases nearly a quarter of a real relationship.</a:t>
+            </a:r>
+          </a:p>
+          <a:p>
+            <a:pPr lvl="0" indent="0" marL="0">
+              <a:buNone/>
+            </a:pPr>
+          </a:p>
+          <a:p>
+            <a:pPr lvl="0" indent="0" marL="0">
+              <a:buNone/>
+            </a:pPr>
+            <a:r>
+              <a:rPr/>
+              <a:t>The practical rule to state: mean imputation is fine when gaps are few, and quietly destructive when they are many. Nothing warns you at which point it crossed over.</a:t>
+            </a:r>
+          </a:p>
+          <a:p>
+            <a:pPr lvl="0" indent="0" marL="0">
+              <a:buNone/>
+            </a:pPr>
+          </a:p>
+          <a:p>
+            <a:pPr lvl="0" indent="0" marL="0">
+              <a:buNone/>
+            </a:pPr>
+            <a:r>
+              <a:rPr/>
+              <a:t>The algebra is Handout Section 3.2: the correlation is multiplied by the square root of one minus the missing fraction. Write it on the board if the room wants it - the figure is what they will remember.</a:t>
             </a:r>
           </a:p>
         </p:txBody>
@@ -8399,7 +8607,7 @@
       </p:sp>
       <p:pic>
         <p:nvPicPr>
-          <p:cNvPr descr="eq_5a8674c372.png" id="0" name="Picture 1"/>
+          <p:cNvPr descr="correlation_attenuation.png" id="0" name="Picture 1"/>
           <p:cNvPicPr>
             <a:picLocks noGrp="1" noChangeAspect="1"/>
           </p:cNvPicPr>
@@ -8413,8 +8621,8 @@
         </p:blipFill>
         <p:spPr bwMode="auto">
           <a:xfrm>
-            <a:off x="457202" y="2790541"/>
-            <a:ext cx="8229595" cy="1105468"/>
+            <a:off x="2410327" y="2160270"/>
+            <a:ext cx="4323345" cy="2366010"/>
           </a:xfrm>
           <a:prstGeom prst="rect">
             <a:avLst/>
@@ -8565,8 +8773,8 @@
         </p:nvSpPr>
         <p:spPr>
           <a:xfrm>
-            <a:off x="457200" y="205979"/>
-            <a:ext cx="8229600" cy="857250"/>
+            <a:off x="457200" y="205740"/>
+            <a:ext cx="8229600" cy="874395"/>
           </a:xfrm>
         </p:spPr>
         <p:txBody>
@@ -8585,18 +8793,18 @@
       </p:sp>
       <p:sp>
         <p:nvSpPr>
-          <p:cNvPr id="3" name="Content Placeholder 2"/>
-          <p:cNvSpPr>
-            <a:spLocks noGrp="1"/>
-          </p:cNvSpPr>
-          <p:nvPr>
-            <p:ph idx="1"/>
+          <p:cNvPr id="4" name="Text Placeholder 3"/>
+          <p:cNvSpPr>
+            <a:spLocks noGrp="1"/>
+          </p:cNvSpPr>
+          <p:nvPr>
+            <p:ph idx="2" sz="half" type="body"/>
           </p:nvPr>
         </p:nvSpPr>
         <p:spPr>
           <a:xfrm>
-            <a:off x="457200" y="1200151"/>
-            <a:ext cx="8229600" cy="3394472"/>
+            <a:off x="457200" y="1183005"/>
+            <a:ext cx="8229600" cy="1748790"/>
           </a:xfrm>
         </p:spPr>
         <p:txBody>
@@ -8654,6 +8862,36 @@
           </a:p>
         </p:txBody>
       </p:sp>
+      <p:pic>
+        <p:nvPicPr>
+          <p:cNvPr descr="missing_data_decision.png" id="0" name="Picture 1"/>
+          <p:cNvPicPr>
+            <a:picLocks noGrp="1" noChangeAspect="1"/>
+          </p:cNvPicPr>
+          <p:nvPr/>
+        </p:nvPicPr>
+        <p:blipFill>
+          <a:blip r:embed="rId3"/>
+          <a:stretch>
+            <a:fillRect/>
+          </a:stretch>
+        </p:blipFill>
+        <p:spPr bwMode="auto">
+          <a:xfrm>
+            <a:off x="2559821" y="3034665"/>
+            <a:ext cx="4024357" cy="1491615"/>
+          </a:xfrm>
+          <a:prstGeom prst="rect">
+            <a:avLst/>
+          </a:prstGeom>
+          <a:noFill/>
+          <a:ln w="9525">
+            <a:noFill/>
+            <a:headEnd/>
+            <a:tailEnd/>
+          </a:ln>
+        </p:spPr>
+      </p:pic>
     </p:spTree>
   </p:cSld>
 </p:sld>
@@ -9588,8 +9826,8 @@
         </p:nvSpPr>
         <p:spPr>
           <a:xfrm>
-            <a:off x="457200" y="205979"/>
-            <a:ext cx="8229600" cy="857250"/>
+            <a:off x="457200" y="205740"/>
+            <a:ext cx="8229600" cy="874395"/>
           </a:xfrm>
         </p:spPr>
         <p:txBody>
@@ -9606,24 +9844,54 @@
           </a:p>
         </p:txBody>
       </p:sp>
+      <p:sp>
+        <p:nvSpPr>
+          <p:cNvPr id="4" name="Text Placeholder 3"/>
+          <p:cNvSpPr>
+            <a:spLocks noGrp="1"/>
+          </p:cNvSpPr>
+          <p:nvPr>
+            <p:ph idx="2" sz="half" type="body"/>
+          </p:nvPr>
+        </p:nvSpPr>
+        <p:spPr>
+          <a:xfrm>
+            <a:off x="457200" y="1183005"/>
+            <a:ext cx="8229600" cy="874395"/>
+          </a:xfrm>
+        </p:spPr>
+        <p:txBody>
+          <a:bodyPr/>
+          <a:lstStyle/>
+          <a:p>
+            <a:pPr lvl="0" indent="0" marL="0">
+              <a:buNone/>
+            </a:pPr>
+            <a:r>
+              <a:rPr/>
+              <a:t>For uncorrelated, centred features, H is diagonal — the variances sit on it.</a:t>
+            </a:r>
+          </a:p>
+        </p:txBody>
+      </p:sp>
       <p:pic>
         <p:nvPicPr>
-          <p:cNvPr descr="eq_8b13b51c77.png" id="0" name="Picture 1"/>
+          <p:cNvPr descr="condition_number_geometry.png" id="0" name="Picture 1"/>
           <p:cNvPicPr>
             <a:picLocks noGrp="1" noChangeAspect="1"/>
           </p:cNvPicPr>
           <p:nvPr/>
         </p:nvPicPr>
         <p:blipFill>
-          <a:blip r:embed="rId2"/>
+          <a:blip r:embed="rId3"/>
           <a:stretch>
             <a:fillRect/>
           </a:stretch>
         </p:blipFill>
         <p:spPr bwMode="auto">
           <a:xfrm>
-            <a:off x="457200" y="2198489"/>
-            <a:ext cx="8229599" cy="1295400"/>
+            <a:off x="2263417" y="2160270"/>
+            <a:ext cx="4617165" cy="2366010"/>
           </a:xfrm>
           <a:prstGeom prst="rect">
             <a:avLst/>
@@ -9642,88 +9910,6 @@
 </file>
 
 <file path=ppt/slides/slide22.xml><?xml version="1.0" encoding="utf-8"?>
-<p:sld xmlns:a="http://schemas.openxmlformats.org/drawingml/2006/main" xmlns:r="http://schemas.openxmlformats.org/officeDocument/2006/relationships" xmlns:p="http://schemas.openxmlformats.org/presentationml/2006/main">
-  <p:cSld>
-    <p:spTree>
-      <p:nvGrpSpPr>
-        <p:cNvPr id="1" name=""/>
-        <p:cNvGrpSpPr/>
-        <p:nvPr/>
-      </p:nvGrpSpPr>
-      <p:grpSpPr>
-        <a:xfrm>
-          <a:off x="0" y="0"/>
-          <a:ext cx="0" cy="0"/>
-          <a:chOff x="0" y="0"/>
-          <a:chExt cx="0" cy="0"/>
-        </a:xfrm>
-      </p:grpSpPr>
-      <p:sp>
-        <p:nvSpPr>
-          <p:cNvPr id="4" name="Text Placeholder 3"/>
-          <p:cNvSpPr>
-            <a:spLocks noGrp="1"/>
-          </p:cNvSpPr>
-          <p:nvPr>
-            <p:ph idx="2" sz="half" type="body"/>
-          </p:nvPr>
-        </p:nvSpPr>
-        <p:spPr>
-          <a:xfrm>
-            <a:off x="457200" y="1234440"/>
-            <a:ext cx="8229600" cy="822960"/>
-          </a:xfrm>
-        </p:spPr>
-        <p:txBody>
-          <a:bodyPr/>
-          <a:lstStyle/>
-          <a:p>
-            <a:pPr lvl="0" indent="0" marL="0">
-              <a:buNone/>
-            </a:pPr>
-            <a:r>
-              <a:rPr/>
-              <a:t>For uncorrelated, centred features, H is diagonal:</a:t>
-            </a:r>
-          </a:p>
-        </p:txBody>
-      </p:sp>
-      <p:pic>
-        <p:nvPicPr>
-          <p:cNvPr descr="eq_489fa4802b.png" id="0" name="Picture 1"/>
-          <p:cNvPicPr>
-            <a:picLocks noGrp="1" noChangeAspect="1"/>
-          </p:cNvPicPr>
-          <p:nvPr/>
-        </p:nvPicPr>
-        <p:blipFill>
-          <a:blip r:embed="rId3"/>
-          <a:stretch>
-            <a:fillRect/>
-          </a:stretch>
-        </p:blipFill>
-        <p:spPr bwMode="auto">
-          <a:xfrm>
-            <a:off x="3568700" y="1955800"/>
-            <a:ext cx="5105400" cy="863600"/>
-          </a:xfrm>
-          <a:prstGeom prst="rect">
-            <a:avLst/>
-          </a:prstGeom>
-          <a:noFill/>
-          <a:ln w="9525">
-            <a:noFill/>
-            <a:headEnd/>
-            <a:tailEnd/>
-          </a:ln>
-        </p:spPr>
-      </p:pic>
-    </p:spTree>
-  </p:cSld>
-</p:sld>
-</file>
-
-<file path=ppt/slides/slide23.xml><?xml version="1.0" encoding="utf-8"?>
 <p:sld xmlns:a="http://schemas.openxmlformats.org/drawingml/2006/main" xmlns:r="http://schemas.openxmlformats.org/officeDocument/2006/relationships" xmlns:p="http://schemas.openxmlformats.org/presentationml/2006/main">
   <p:cSld>
     <p:spTree>
@@ -9805,7 +9991,7 @@
 </p:sld>
 </file>
 
-<file path=ppt/slides/slide24.xml><?xml version="1.0" encoding="utf-8"?>
+<file path=ppt/slides/slide23.xml><?xml version="1.0" encoding="utf-8"?>
 <p:sld xmlns:a="http://schemas.openxmlformats.org/drawingml/2006/main" xmlns:r="http://schemas.openxmlformats.org/officeDocument/2006/relationships" xmlns:p="http://schemas.openxmlformats.org/presentationml/2006/main">
   <p:cSld>
     <p:spTree>
@@ -9917,7 +10103,7 @@
 </p:sld>
 </file>
 
-<file path=ppt/slides/slide25.xml><?xml version="1.0" encoding="utf-8"?>
+<file path=ppt/slides/slide24.xml><?xml version="1.0" encoding="utf-8"?>
 <p:sld xmlns:a="http://schemas.openxmlformats.org/drawingml/2006/main" xmlns:r="http://schemas.openxmlformats.org/officeDocument/2006/relationships" xmlns:p="http://schemas.openxmlformats.org/presentationml/2006/main">
   <p:cSld>
     <p:spTree>
@@ -10029,7 +10215,7 @@
 </p:sld>
 </file>
 
-<file path=ppt/slides/slide26.xml><?xml version="1.0" encoding="utf-8"?>
+<file path=ppt/slides/slide25.xml><?xml version="1.0" encoding="utf-8"?>
 <p:sld xmlns:a="http://schemas.openxmlformats.org/drawingml/2006/main" xmlns:r="http://schemas.openxmlformats.org/officeDocument/2006/relationships" xmlns:p="http://schemas.openxmlformats.org/presentationml/2006/main">
   <p:cSld>
     <p:spTree>
@@ -10111,6 +10297,190 @@
 </p:sld>
 </file>
 
+<file path=ppt/slides/slide26.xml><?xml version="1.0" encoding="utf-8"?>
+<p:sld xmlns:a="http://schemas.openxmlformats.org/drawingml/2006/main" xmlns:r="http://schemas.openxmlformats.org/officeDocument/2006/relationships" xmlns:p="http://schemas.openxmlformats.org/presentationml/2006/main">
+  <p:cSld>
+    <p:spTree>
+      <p:nvGrpSpPr>
+        <p:cNvPr id="1" name=""/>
+        <p:cNvGrpSpPr/>
+        <p:nvPr/>
+      </p:nvGrpSpPr>
+      <p:grpSpPr>
+        <a:xfrm>
+          <a:off x="0" y="0"/>
+          <a:ext cx="0" cy="0"/>
+          <a:chOff x="0" y="0"/>
+          <a:chExt cx="0" cy="0"/>
+        </a:xfrm>
+      </p:grpSpPr>
+      <p:sp>
+        <p:nvSpPr>
+          <p:cNvPr id="2" name="Title 1"/>
+          <p:cNvSpPr>
+            <a:spLocks noGrp="1"/>
+          </p:cNvSpPr>
+          <p:nvPr>
+            <p:ph type="title"/>
+          </p:nvPr>
+        </p:nvSpPr>
+        <p:spPr>
+          <a:xfrm>
+            <a:off x="457200" y="205979"/>
+            <a:ext cx="8229600" cy="857250"/>
+          </a:xfrm>
+        </p:spPr>
+        <p:txBody>
+          <a:bodyPr/>
+          <a:lstStyle/>
+          <a:p>
+            <a:pPr lvl="0" indent="0" marL="0">
+              <a:buNone/>
+            </a:pPr>
+            <a:r>
+              <a:rPr/>
+              <a:t>Ordinal vs target encoding</a:t>
+            </a:r>
+          </a:p>
+        </p:txBody>
+      </p:sp>
+      <p:sp>
+        <p:nvSpPr>
+          <p:cNvPr id="3" name="Content Placeholder 2"/>
+          <p:cNvSpPr>
+            <a:spLocks noGrp="1"/>
+          </p:cNvSpPr>
+          <p:nvPr>
+            <p:ph idx="1" sz="half"/>
+          </p:nvPr>
+        </p:nvSpPr>
+        <p:spPr>
+          <a:xfrm>
+            <a:off x="457200" y="1200151"/>
+            <a:ext cx="4038600" cy="3394472"/>
+          </a:xfrm>
+        </p:spPr>
+        <p:txBody>
+          <a:bodyPr/>
+          <a:lstStyle/>
+          <a:p>
+            <a:pPr lvl="0" indent="0" marL="0">
+              <a:buNone/>
+            </a:pPr>
+            <a:r>
+              <a:rPr b="1"/>
+              <a:t>Ordinal</a:t>
+            </a:r>
+          </a:p>
+          <a:p>
+            <a:pPr lvl="0"/>
+            <a:r>
+              <a:rPr/>
+              <a:t>Categories → integers</a:t>
+            </a:r>
+          </a:p>
+          <a:p>
+            <a:pPr lvl="0"/>
+            <a:r>
+              <a:rPr/>
+              <a:t>Only valid if a real </a:t>
+            </a:r>
+            <a:r>
+              <a:rPr b="1"/>
+              <a:t>order</a:t>
+            </a:r>
+            <a:r>
+              <a:rPr/>
+              <a:t> exists</a:t>
+            </a:r>
+          </a:p>
+          <a:p>
+            <a:pPr lvl="0"/>
+            <a:r>
+              <a:rPr>
+                <a:latin typeface="Courier"/>
+              </a:rPr>
+              <a:t>low</a:t>
+            </a:r>
+            <a:r>
+              <a:rPr/>
+              <a:t> &lt; </a:t>
+            </a:r>
+            <a:r>
+              <a:rPr>
+                <a:latin typeface="Courier"/>
+              </a:rPr>
+              <a:t>medium</a:t>
+            </a:r>
+            <a:r>
+              <a:rPr/>
+              <a:t> &lt; </a:t>
+            </a:r>
+            <a:r>
+              <a:rPr>
+                <a:latin typeface="Courier"/>
+              </a:rPr>
+              <a:t>high</a:t>
+            </a:r>
+          </a:p>
+        </p:txBody>
+      </p:sp>
+      <p:sp>
+        <p:nvSpPr>
+          <p:cNvPr id="4" name="Content Placeholder 3"/>
+          <p:cNvSpPr>
+            <a:spLocks noGrp="1"/>
+          </p:cNvSpPr>
+          <p:nvPr>
+            <p:ph idx="2" sz="half"/>
+          </p:nvPr>
+        </p:nvSpPr>
+        <p:spPr>
+          <a:xfrm>
+            <a:off x="4648200" y="1200151"/>
+            <a:ext cx="4038600" cy="3394472"/>
+          </a:xfrm>
+        </p:spPr>
+        <p:txBody>
+          <a:bodyPr/>
+          <a:lstStyle/>
+          <a:p>
+            <a:pPr lvl="0" indent="0" marL="0">
+              <a:buNone/>
+            </a:pPr>
+            <a:r>
+              <a:rPr b="1"/>
+              <a:t>Target</a:t>
+            </a:r>
+          </a:p>
+          <a:p>
+            <a:pPr lvl="0"/>
+            <a:r>
+              <a:rPr/>
+              <a:t>Category → a statistic of y</a:t>
+            </a:r>
+          </a:p>
+          <a:p>
+            <a:pPr lvl="0"/>
+            <a:r>
+              <a:rPr/>
+              <a:t>Compresses any cardinality to one column</a:t>
+            </a:r>
+          </a:p>
+          <a:p>
+            <a:pPr lvl="0"/>
+            <a:r>
+              <a:rPr/>
+              <a:t>The dangerous one — next</a:t>
+            </a:r>
+          </a:p>
+        </p:txBody>
+      </p:sp>
+    </p:spTree>
+  </p:cSld>
+</p:sld>
+</file>
+
 <file path=ppt/slides/slide27.xml><?xml version="1.0" encoding="utf-8"?>
 <p:sld xmlns:a="http://schemas.openxmlformats.org/drawingml/2006/main" xmlns:r="http://schemas.openxmlformats.org/officeDocument/2006/relationships" xmlns:p="http://schemas.openxmlformats.org/presentationml/2006/main">
   <p:cSld>
@@ -10153,143 +10523,41 @@
             </a:pPr>
             <a:r>
               <a:rPr/>
-              <a:t>Ordinal vs target encoding</a:t>
-            </a:r>
-          </a:p>
-        </p:txBody>
-      </p:sp>
-      <p:sp>
-        <p:nvSpPr>
-          <p:cNvPr id="3" name="Content Placeholder 2"/>
-          <p:cNvSpPr>
-            <a:spLocks noGrp="1"/>
-          </p:cNvSpPr>
-          <p:nvPr>
-            <p:ph idx="1" sz="half"/>
-          </p:nvPr>
-        </p:nvSpPr>
-        <p:spPr>
+              <a:t>Three encodings, three claims</a:t>
+            </a:r>
+          </a:p>
+        </p:txBody>
+      </p:sp>
+      <p:pic>
+        <p:nvPicPr>
+          <p:cNvPr descr="encoding_comparison.png" id="0" name="Picture 1"/>
+          <p:cNvPicPr>
+            <a:picLocks noGrp="1" noChangeAspect="1"/>
+          </p:cNvPicPr>
+          <p:nvPr/>
+        </p:nvPicPr>
+        <p:blipFill>
+          <a:blip r:embed="rId3"/>
+          <a:stretch>
+            <a:fillRect/>
+          </a:stretch>
+        </p:blipFill>
+        <p:spPr bwMode="auto">
           <a:xfrm>
-            <a:off x="457200" y="1200151"/>
-            <a:ext cx="4038600" cy="3394472"/>
+            <a:off x="457200" y="1715889"/>
+            <a:ext cx="8229600" cy="2260600"/>
           </a:xfrm>
+          <a:prstGeom prst="rect">
+            <a:avLst/>
+          </a:prstGeom>
+          <a:noFill/>
+          <a:ln w="9525">
+            <a:noFill/>
+            <a:headEnd/>
+            <a:tailEnd/>
+          </a:ln>
         </p:spPr>
-        <p:txBody>
-          <a:bodyPr/>
-          <a:lstStyle/>
-          <a:p>
-            <a:pPr lvl="0" indent="0" marL="0">
-              <a:buNone/>
-            </a:pPr>
-            <a:r>
-              <a:rPr b="1"/>
-              <a:t>Ordinal</a:t>
-            </a:r>
-          </a:p>
-          <a:p>
-            <a:pPr lvl="0"/>
-            <a:r>
-              <a:rPr/>
-              <a:t>Categories → integers</a:t>
-            </a:r>
-          </a:p>
-          <a:p>
-            <a:pPr lvl="0"/>
-            <a:r>
-              <a:rPr/>
-              <a:t>Only valid if a real </a:t>
-            </a:r>
-            <a:r>
-              <a:rPr b="1"/>
-              <a:t>order</a:t>
-            </a:r>
-            <a:r>
-              <a:rPr/>
-              <a:t> exists</a:t>
-            </a:r>
-          </a:p>
-          <a:p>
-            <a:pPr lvl="0"/>
-            <a:r>
-              <a:rPr>
-                <a:latin typeface="Courier"/>
-              </a:rPr>
-              <a:t>low</a:t>
-            </a:r>
-            <a:r>
-              <a:rPr/>
-              <a:t> &lt; </a:t>
-            </a:r>
-            <a:r>
-              <a:rPr>
-                <a:latin typeface="Courier"/>
-              </a:rPr>
-              <a:t>medium</a:t>
-            </a:r>
-            <a:r>
-              <a:rPr/>
-              <a:t> &lt; </a:t>
-            </a:r>
-            <a:r>
-              <a:rPr>
-                <a:latin typeface="Courier"/>
-              </a:rPr>
-              <a:t>high</a:t>
-            </a:r>
-          </a:p>
-        </p:txBody>
-      </p:sp>
-      <p:sp>
-        <p:nvSpPr>
-          <p:cNvPr id="4" name="Content Placeholder 3"/>
-          <p:cNvSpPr>
-            <a:spLocks noGrp="1"/>
-          </p:cNvSpPr>
-          <p:nvPr>
-            <p:ph idx="2" sz="half"/>
-          </p:nvPr>
-        </p:nvSpPr>
-        <p:spPr>
-          <a:xfrm>
-            <a:off x="4648200" y="1200151"/>
-            <a:ext cx="4038600" cy="3394472"/>
-          </a:xfrm>
-        </p:spPr>
-        <p:txBody>
-          <a:bodyPr/>
-          <a:lstStyle/>
-          <a:p>
-            <a:pPr lvl="0" indent="0" marL="0">
-              <a:buNone/>
-            </a:pPr>
-            <a:r>
-              <a:rPr b="1"/>
-              <a:t>Target</a:t>
-            </a:r>
-          </a:p>
-          <a:p>
-            <a:pPr lvl="0"/>
-            <a:r>
-              <a:rPr/>
-              <a:t>Category → a statistic of y</a:t>
-            </a:r>
-          </a:p>
-          <a:p>
-            <a:pPr lvl="0"/>
-            <a:r>
-              <a:rPr/>
-              <a:t>Compresses any cardinality to one column</a:t>
-            </a:r>
-          </a:p>
-          <a:p>
-            <a:pPr lvl="0"/>
-            <a:r>
-              <a:rPr/>
-              <a:t>The dangerous one — next</a:t>
-            </a:r>
-          </a:p>
-        </p:txBody>
-      </p:sp>
+      </p:pic>
     </p:spTree>
   </p:cSld>
 </p:sld>
@@ -11051,8 +11319,8 @@
         </p:nvSpPr>
         <p:spPr>
           <a:xfrm>
-            <a:off x="457200" y="205979"/>
-            <a:ext cx="8229600" cy="857250"/>
+            <a:off x="457200" y="205740"/>
+            <a:ext cx="8229600" cy="874395"/>
           </a:xfrm>
         </p:spPr>
         <p:txBody>
@@ -11071,18 +11339,18 @@
       </p:sp>
       <p:sp>
         <p:nvSpPr>
-          <p:cNvPr id="3" name="Content Placeholder 2"/>
-          <p:cNvSpPr>
-            <a:spLocks noGrp="1"/>
-          </p:cNvSpPr>
-          <p:nvPr>
-            <p:ph idx="1"/>
+          <p:cNvPr id="4" name="Text Placeholder 3"/>
+          <p:cNvSpPr>
+            <a:spLocks noGrp="1"/>
+          </p:cNvSpPr>
+          <p:nvPr>
+            <p:ph idx="2" sz="half" type="body"/>
           </p:nvPr>
         </p:nvSpPr>
         <p:spPr>
           <a:xfrm>
-            <a:off x="457200" y="1200151"/>
-            <a:ext cx="8229600" cy="3394472"/>
+            <a:off x="457200" y="1183005"/>
+            <a:ext cx="8229600" cy="1748790"/>
           </a:xfrm>
         </p:spPr>
         <p:txBody>
@@ -11133,6 +11401,36 @@
           </a:p>
         </p:txBody>
       </p:sp>
+      <p:pic>
+        <p:nvPicPr>
+          <p:cNvPr descr="churn_confusion_matrix.png" id="0" name="Picture 1"/>
+          <p:cNvPicPr>
+            <a:picLocks noGrp="1" noChangeAspect="1"/>
+          </p:cNvPicPr>
+          <p:nvPr/>
+        </p:nvPicPr>
+        <p:blipFill>
+          <a:blip r:embed="rId3"/>
+          <a:stretch>
+            <a:fillRect/>
+          </a:stretch>
+        </p:blipFill>
+        <p:spPr bwMode="auto">
+          <a:xfrm>
+            <a:off x="3782957" y="3034665"/>
+            <a:ext cx="1578085" cy="1491615"/>
+          </a:xfrm>
+          <a:prstGeom prst="rect">
+            <a:avLst/>
+          </a:prstGeom>
+          <a:noFill/>
+          <a:ln w="9525">
+            <a:noFill/>
+            <a:headEnd/>
+            <a:tailEnd/>
+          </a:ln>
+        </p:spPr>
+      </p:pic>
     </p:spTree>
   </p:cSld>
 </p:sld>
@@ -11568,8 +11866,8 @@
         </p:nvSpPr>
         <p:spPr>
           <a:xfrm>
-            <a:off x="457200" y="205979"/>
-            <a:ext cx="8229600" cy="857250"/>
+            <a:off x="457200" y="205740"/>
+            <a:ext cx="8229600" cy="874395"/>
           </a:xfrm>
         </p:spPr>
         <p:txBody>
@@ -11588,18 +11886,18 @@
       </p:sp>
       <p:sp>
         <p:nvSpPr>
-          <p:cNvPr id="3" name="Content Placeholder 2"/>
-          <p:cNvSpPr>
-            <a:spLocks noGrp="1"/>
-          </p:cNvSpPr>
-          <p:nvPr>
-            <p:ph idx="1"/>
+          <p:cNvPr id="4" name="Text Placeholder 3"/>
+          <p:cNvSpPr>
+            <a:spLocks noGrp="1"/>
+          </p:cNvSpPr>
+          <p:nvPr>
+            <p:ph idx="2" sz="half" type="body"/>
           </p:nvPr>
         </p:nvSpPr>
         <p:spPr>
           <a:xfrm>
-            <a:off x="457200" y="1200151"/>
-            <a:ext cx="8229600" cy="3394472"/>
+            <a:off x="457200" y="1183005"/>
+            <a:ext cx="8229600" cy="1311592"/>
           </a:xfrm>
         </p:spPr>
         <p:txBody>
@@ -11637,6 +11935,36 @@
           </a:p>
         </p:txBody>
       </p:sp>
+      <p:pic>
+        <p:nvPicPr>
+          <p:cNvPr descr="smoking_gun.png" id="0" name="Picture 1"/>
+          <p:cNvPicPr>
+            <a:picLocks noGrp="1" noChangeAspect="1"/>
+          </p:cNvPicPr>
+          <p:nvPr/>
+        </p:nvPicPr>
+        <p:blipFill>
+          <a:blip r:embed="rId3"/>
+          <a:stretch>
+            <a:fillRect/>
+          </a:stretch>
+        </p:blipFill>
+        <p:spPr bwMode="auto">
+          <a:xfrm>
+            <a:off x="2193525" y="2597467"/>
+            <a:ext cx="4756949" cy="1928813"/>
+          </a:xfrm>
+          <a:prstGeom prst="rect">
+            <a:avLst/>
+          </a:prstGeom>
+          <a:noFill/>
+          <a:ln w="9525">
+            <a:noFill/>
+            <a:headEnd/>
+            <a:tailEnd/>
+          </a:ln>
+        </p:spPr>
+      </p:pic>
     </p:spTree>
   </p:cSld>
 </p:sld>
@@ -12900,8 +13228,8 @@
         </p:nvSpPr>
         <p:spPr>
           <a:xfrm>
-            <a:off x="457200" y="205979"/>
-            <a:ext cx="8229600" cy="857250"/>
+            <a:off x="457200" y="205740"/>
+            <a:ext cx="8229600" cy="874395"/>
           </a:xfrm>
         </p:spPr>
         <p:txBody>
@@ -12920,18 +13248,18 @@
       </p:sp>
       <p:sp>
         <p:nvSpPr>
-          <p:cNvPr id="3" name="Content Placeholder 2"/>
-          <p:cNvSpPr>
-            <a:spLocks noGrp="1"/>
-          </p:cNvSpPr>
-          <p:nvPr>
-            <p:ph idx="1"/>
+          <p:cNvPr id="4" name="Text Placeholder 3"/>
+          <p:cNvSpPr>
+            <a:spLocks noGrp="1"/>
+          </p:cNvSpPr>
+          <p:nvPr>
+            <p:ph idx="2" sz="half" type="body"/>
           </p:nvPr>
         </p:nvSpPr>
         <p:spPr>
           <a:xfrm>
-            <a:off x="457200" y="1200151"/>
-            <a:ext cx="8229600" cy="3394472"/>
+            <a:off x="457200" y="1183005"/>
+            <a:ext cx="8229600" cy="1748790"/>
           </a:xfrm>
         </p:spPr>
         <p:txBody>
@@ -12999,6 +13327,36 @@
           </a:p>
         </p:txBody>
       </p:sp>
+      <p:pic>
+        <p:nvPicPr>
+          <p:cNvPr descr="numeric_distributions.png" id="0" name="Picture 1"/>
+          <p:cNvPicPr>
+            <a:picLocks noGrp="1" noChangeAspect="1"/>
+          </p:cNvPicPr>
+          <p:nvPr/>
+        </p:nvPicPr>
+        <p:blipFill>
+          <a:blip r:embed="rId3"/>
+          <a:stretch>
+            <a:fillRect/>
+          </a:stretch>
+        </p:blipFill>
+        <p:spPr bwMode="auto">
+          <a:xfrm>
+            <a:off x="1481128" y="3034665"/>
+            <a:ext cx="6181744" cy="1491615"/>
+          </a:xfrm>
+          <a:prstGeom prst="rect">
+            <a:avLst/>
+          </a:prstGeom>
+          <a:noFill/>
+          <a:ln w="9525">
+            <a:noFill/>
+            <a:headEnd/>
+            <a:tailEnd/>
+          </a:ln>
+        </p:spPr>
+      </p:pic>
     </p:spTree>
   </p:cSld>
 </p:sld>

--- a/Lessons/02_data_exploration_and_preparation/Slides/data_exploration_and_preparation_slides.pptx
+++ b/Lessons/02_data_exploration_and_preparation/Slides/data_exploration_and_preparation_slides.pptx
@@ -9154,8 +9154,8 @@
         </p:blipFill>
         <p:spPr bwMode="auto">
           <a:xfrm>
-            <a:off x="457200" y="1207889"/>
-            <a:ext cx="8229600" cy="3276600"/>
+            <a:off x="457200" y="1220589"/>
+            <a:ext cx="8229600" cy="3251200"/>
           </a:xfrm>
           <a:prstGeom prst="rect">
             <a:avLst/>
@@ -11417,8 +11417,8 @@
         </p:blipFill>
         <p:spPr bwMode="auto">
           <a:xfrm>
-            <a:off x="3782957" y="3034665"/>
-            <a:ext cx="1578085" cy="1491615"/>
+            <a:off x="3785119" y="3034665"/>
+            <a:ext cx="1573761" cy="1491615"/>
           </a:xfrm>
           <a:prstGeom prst="rect">
             <a:avLst/>
@@ -12248,8 +12248,8 @@
         </p:blipFill>
         <p:spPr bwMode="auto">
           <a:xfrm>
-            <a:off x="1847359" y="1166099"/>
-            <a:ext cx="5449282" cy="3360181"/>
+            <a:off x="1853651" y="1166099"/>
+            <a:ext cx="5436697" cy="3360181"/>
           </a:xfrm>
           <a:prstGeom prst="rect">
             <a:avLst/>
@@ -13343,8 +13343,8 @@
         </p:blipFill>
         <p:spPr bwMode="auto">
           <a:xfrm>
-            <a:off x="1481128" y="3034665"/>
-            <a:ext cx="6181744" cy="1491615"/>
+            <a:off x="1448931" y="3034665"/>
+            <a:ext cx="6246137" cy="1491615"/>
           </a:xfrm>
           <a:prstGeom prst="rect">
             <a:avLst/>
@@ -13425,8 +13425,8 @@
         </p:blipFill>
         <p:spPr bwMode="auto">
           <a:xfrm>
-            <a:off x="1356546" y="1166099"/>
-            <a:ext cx="6430908" cy="3360181"/>
+            <a:off x="1343961" y="1166099"/>
+            <a:ext cx="6456078" cy="3360181"/>
           </a:xfrm>
           <a:prstGeom prst="rect">
             <a:avLst/>

--- a/Lessons/02_data_exploration_and_preparation/Slides/data_exploration_and_preparation_slides.pptx
+++ b/Lessons/02_data_exploration_and_preparation/Slides/data_exploration_and_preparation_slides.pptx
@@ -3139,7 +3139,7 @@
             </a:pPr>
             <a:r>
               <a:rPr/>
-              <a:t>The matrix shows where the errors sit: read the bottom-left cell, the churners the model missed. AUC at 0.752 is unaffected by the imbalance and says there is real signal that accuracy is hiding.</a:t>
+              <a:t>The matrix shows where the errors sit: read the bottom-left cell, the churners the model missed. The area under the receiver operating characteristic curve — AUC, which Lesson 4 builds properly — at 0.752 is unaffected by the imbalance and says there is real signal that accuracy is hiding.</a:t>
             </a:r>
           </a:p>
           <a:p>
@@ -5117,35 +5117,35 @@
             </a:pPr>
             <a:r>
               <a:rPr/>
-              <a:t>MCAR: probability of missing depends on nothing. A blank field for no systematic reason.</a:t>
-            </a:r>
-          </a:p>
-          <a:p>
-            <a:pPr lvl="0" indent="0" marL="0">
-              <a:buNone/>
-            </a:pPr>
-          </a:p>
-          <a:p>
-            <a:pPr lvl="0" indent="0" marL="0">
-              <a:buNone/>
-            </a:pPr>
-            <a:r>
-              <a:rPr/>
-              <a:t>MAR: depends on something you DO observe. Our num_support_calls is MAR against tenure - long-standing customers’ early call history predates the CRM system. Conditional on tenure, the gap carries no further information.</a:t>
-            </a:r>
-          </a:p>
-          <a:p>
-            <a:pPr lvl="0" indent="0" marL="0">
-              <a:buNone/>
-            </a:pPr>
-          </a:p>
-          <a:p>
-            <a:pPr lvl="0" indent="0" marL="0">
-              <a:buNone/>
-            </a:pPr>
-            <a:r>
-              <a:rPr/>
-              <a:t>MNAR: depends on the value itself, even unobserved. A customer who leaves because of a shockingly high bill and never finishes a survey. No column in the table can detect this - only knowing how the data was collected can. Say plainly: this is the dangerous one, and it does not appear in today’s dataset, which is itself worth noting - most real ones have some.</a:t>
+              <a:t>MCAR, missing completely at random: probability of missing depends on nothing. A blank field for no systematic reason.</a:t>
+            </a:r>
+          </a:p>
+          <a:p>
+            <a:pPr lvl="0" indent="0" marL="0">
+              <a:buNone/>
+            </a:pPr>
+          </a:p>
+          <a:p>
+            <a:pPr lvl="0" indent="0" marL="0">
+              <a:buNone/>
+            </a:pPr>
+            <a:r>
+              <a:rPr/>
+              <a:t>MAR, missing at random: depends on something you DO observe. Our num_support_calls is MAR against tenure - long-standing customers’ early call history predates the CRM system. Conditional on tenure, the gap carries no further information.</a:t>
+            </a:r>
+          </a:p>
+          <a:p>
+            <a:pPr lvl="0" indent="0" marL="0">
+              <a:buNone/>
+            </a:pPr>
+          </a:p>
+          <a:p>
+            <a:pPr lvl="0" indent="0" marL="0">
+              <a:buNone/>
+            </a:pPr>
+            <a:r>
+              <a:rPr/>
+              <a:t>MNAR, missing not at random: depends on the value itself, even unobserved. A customer who leaves because of a shockingly high bill and never finishes a survey. No column in the table can detect this - only knowing how the data was collected can. Say plainly: this is the dangerous one, and it does not appear in today’s dataset, which is itself worth noting - most real ones have some.</a:t>
             </a:r>
           </a:p>
         </p:txBody>
@@ -8957,7 +8957,7 @@
         <p:spPr>
           <a:xfrm>
             <a:off x="457200" y="1183005"/>
-            <a:ext cx="8229600" cy="437197"/>
+            <a:ext cx="8229600" cy="1311592"/>
           </a:xfrm>
         </p:spPr>
         <p:txBody>
@@ -8969,7 +8969,7 @@
             </a:pPr>
             <a:r>
               <a:rPr/>
-              <a:t>Two standard rules for flagging an unusual value:</a:t>
+              <a:t>Two standard rules for flagging an unusual value — the z-score, and Tukey’s fence built on the interquartile range (IQR):</a:t>
             </a:r>
           </a:p>
         </p:txBody>
@@ -8990,7 +8990,7 @@
         </p:blipFill>
         <p:spPr bwMode="auto">
           <a:xfrm>
-            <a:off x="457207" y="2838073"/>
+            <a:off x="457207" y="3275271"/>
             <a:ext cx="8229586" cy="573205"/>
           </a:xfrm>
           <a:prstGeom prst="rect">
@@ -11350,7 +11350,7 @@
         <p:spPr>
           <a:xfrm>
             <a:off x="457200" y="1183005"/>
-            <a:ext cx="8229600" cy="1748790"/>
+            <a:ext cx="8229600" cy="2185987"/>
           </a:xfrm>
         </p:spPr>
         <p:txBody>
@@ -11387,7 +11387,7 @@
             </a:r>
             <a:r>
               <a:rPr/>
-              <a:t> AUC</a:t>
+              <a:t> AUC — area under the receiver operating characteristic curve</a:t>
             </a:r>
           </a:p>
           <a:p>
@@ -11417,8 +11417,8 @@
         </p:blipFill>
         <p:spPr bwMode="auto">
           <a:xfrm>
-            <a:off x="3785119" y="3034665"/>
-            <a:ext cx="1573761" cy="1491615"/>
+            <a:off x="4015756" y="3471862"/>
+            <a:ext cx="1112487" cy="1054418"/>
           </a:xfrm>
           <a:prstGeom prst="rect">
             <a:avLst/>

--- a/Lessons/02_data_exploration_and_preparation/Slides/data_exploration_and_preparation_slides.pptx
+++ b/Lessons/02_data_exploration_and_preparation/Slides/data_exploration_and_preparation_slides.pptx
@@ -5,7 +5,7 @@
     <p:sldMasterId id="2147483648" r:id="rId1"/>
   </p:sldMasterIdLst>
   <p:notesMasterIdLst>
-    <p:notesMasterId r:id="rId50"/>
+    <p:notesMasterId r:id="rId53"/>
   </p:notesMasterIdLst>
   <p:sldIdLst>
     <p:sldId id="256" r:id="rId2"/>
@@ -56,6 +56,9 @@
     <p:sldId id="301" r:id="rId47"/>
     <p:sldId id="302" r:id="rId48"/>
     <p:sldId id="303" r:id="rId49"/>
+    <p:sldId id="304" r:id="rId50"/>
+    <p:sldId id="305" r:id="rId51"/>
+    <p:sldId id="306" r:id="rId52"/>
   </p:sldIdLst>
   <p:sldSz cx="9144000" cy="5143500" type="screen16x9"/>
   <p:notesSz cx="6858000" cy="9144000"/>
@@ -859,35 +862,35 @@
             </a:pPr>
             <a:r>
               <a:rPr/>
-              <a:t>Handout Section 4.1. The z-score standardises and thresholds; Tukey’s rule fences off anything more than 1.5 interquartile ranges past the quartiles.</a:t>
-            </a:r>
-          </a:p>
-          <a:p>
-            <a:pPr lvl="0" indent="0" marL="0">
-              <a:buNone/>
-            </a:pPr>
-          </a:p>
-          <a:p>
-            <a:pPr lvl="0" indent="0" marL="0">
-              <a:buNone/>
-            </a:pPr>
-            <a:r>
-              <a:rPr/>
-              <a:t>Give the probabilistic reading of each, because it is what makes them more than recipes. Under normality, |z| &gt; 3 flags about 0.27% of a column. And the 1.5 is not arbitrary: for a normal column the IQR is 1.349 sigma, so the fence lands at 2.698 sigma and flags about 0.35% per tail. Tukey chose the constant precisely so the two rules agree on well-behaved data.</a:t>
-            </a:r>
-          </a:p>
-          <a:p>
-            <a:pPr lvl="0" indent="0" marL="0">
-              <a:buNone/>
-            </a:pPr>
-          </a:p>
-          <a:p>
-            <a:pPr lvl="0" indent="0" marL="0">
-              <a:buNone/>
-            </a:pPr>
-            <a:r>
-              <a:rPr/>
-              <a:t>That agreement is the setup for the next section. Both rules are calibrated on normality; the interesting question is what they do when the data is not normal, and that is where they part company.</a:t>
+              <a:t>A decision path rather than a rule: how much is missing, does the missingness look related to anything, and what does the column cost if it goes.</a:t>
+            </a:r>
+          </a:p>
+          <a:p>
+            <a:pPr lvl="0" indent="0" marL="0">
+              <a:buNone/>
+            </a:pPr>
+          </a:p>
+          <a:p>
+            <a:pPr lvl="0" indent="0" marL="0">
+              <a:buNone/>
+            </a:pPr>
+            <a:r>
+              <a:rPr/>
+              <a:t>Point out that three of the four branches end somewhere defensible, and that the indicator branch is the one people forget. Adding a column that records that a value was missing costs nothing and keeps the signal alive when the fact of the gap is itself informative - which for anything recorded by a human it usually is.</a:t>
+            </a:r>
+          </a:p>
+          <a:p>
+            <a:pPr lvl="0" indent="0" marL="0">
+              <a:buNone/>
+            </a:pPr>
+          </a:p>
+          <a:p>
+            <a:pPr lvl="0" indent="0" marL="0">
+              <a:buNone/>
+            </a:pPr>
+            <a:r>
+              <a:rPr/>
+              <a:t>The branch worth warning about is dropping rows. It is the easiest to do and the only one that can quietly change what the sample represents.</a:t>
             </a:r>
           </a:p>
         </p:txBody>
@@ -969,7 +972,35 @@
             </a:pPr>
             <a:r>
               <a:rPr/>
-              <a:t>Handout Section 4.1 derives the 1.5 constant from the standard normal quantile function: it is chosen so the IQR fence and a 3-sigma z-score fence flag comparable tails on a genuinely normal column. Say this is a design choice with an assumption baked in, and the next slide is what happens when the assumption fails.</a:t>
+              <a:t>Handout Section 4.1. The z-score standardises and thresholds; Tukey’s rule fences off anything more than 1.5 interquartile ranges past the quartiles.</a:t>
+            </a:r>
+          </a:p>
+          <a:p>
+            <a:pPr lvl="0" indent="0" marL="0">
+              <a:buNone/>
+            </a:pPr>
+          </a:p>
+          <a:p>
+            <a:pPr lvl="0" indent="0" marL="0">
+              <a:buNone/>
+            </a:pPr>
+            <a:r>
+              <a:rPr/>
+              <a:t>Give the probabilistic reading of each, because it is what makes them more than recipes. Under normality, |z| &gt; 3 flags about 0.27% of a column. And the 1.5 is not arbitrary: for a normal column the IQR is 1.349 sigma, so the fence lands at 2.698 sigma and flags about 0.35% per tail. Tukey chose the constant precisely so the two rules agree on well-behaved data.</a:t>
+            </a:r>
+          </a:p>
+          <a:p>
+            <a:pPr lvl="0" indent="0" marL="0">
+              <a:buNone/>
+            </a:pPr>
+          </a:p>
+          <a:p>
+            <a:pPr lvl="0" indent="0" marL="0">
+              <a:buNone/>
+            </a:pPr>
+            <a:r>
+              <a:rPr/>
+              <a:t>That agreement is the setup for the next section. Both rules are calibrated on normality; the interesting question is what they do when the data is not normal, and that is where they part company.</a:t>
             </a:r>
           </a:p>
         </p:txBody>
@@ -1051,21 +1082,7 @@
             </a:pPr>
             <a:r>
               <a:rPr/>
-              <a:t>monthly_charges: z-score flags 20, IQR flags 32. The z-score rule’s own mean and standard deviation are dragged around by the outliers it is trying to catch - a handful of billing errors inflate s directly, making the rule LESS sensitive exactly when it should be more so. IQR barely moves under the same contamination. That is why IQR is the safer default for skewed, error-prone columns.</a:t>
-            </a:r>
-          </a:p>
-          <a:p>
-            <a:pPr lvl="0" indent="0" marL="0">
-              <a:buNone/>
-            </a:pPr>
-          </a:p>
-          <a:p>
-            <a:pPr lvl="0" indent="0" marL="0">
-              <a:buNone/>
-            </a:pPr>
-            <a:r>
-              <a:rPr/>
-              <a:t>tenure_months: only 4 flagged on the right panel, all at 999. Ask the room: where did the negative values go? Nobody will know yet - next slide.</a:t>
+              <a:t>Handout Section 4.1 derives the 1.5 constant from the standard normal quantile function: it is chosen so the IQR fence and a 3-sigma z-score fence flag comparable tails on a genuinely normal column. Say this is a design choice with an assumption baked in, and the next slide is what happens when the assumption fails.</a:t>
             </a:r>
           </a:p>
         </p:txBody>
@@ -1147,21 +1164,21 @@
             </a:pPr>
             <a:r>
               <a:rPr/>
-              <a:t>This is the slide worth remembering over the two formulas. Statistical rules find points that are unusual relative to the rest of a column; they know nothing about domain validity. A negative tenure sits comfortably inside the IQR fence because the column’s own spread is wide enough to hide it.</a:t>
-            </a:r>
-          </a:p>
-          <a:p>
-            <a:pPr lvl="0" indent="0" marL="0">
-              <a:buNone/>
-            </a:pPr>
-          </a:p>
-          <a:p>
-            <a:pPr lvl="0" indent="0" marL="0">
-              <a:buNone/>
-            </a:pPr>
-            <a:r>
-              <a:rPr/>
-              <a:t>The fix is a domain rule: 0 &lt;= tenure_months &lt;= some sane maximum. Say plainly: a thorough pass runs both kinds of check, because they catch different mistakes, and neither substitutes for the other. Handout Section 4.2.</a:t>
+              <a:t>monthly_charges: z-score flags 20, IQR flags 32. The z-score rule’s own mean and standard deviation are dragged around by the outliers it is trying to catch - a handful of billing errors inflate s directly, making the rule LESS sensitive exactly when it should be more so. IQR barely moves under the same contamination. That is why IQR is the safer default for skewed, error-prone columns.</a:t>
+            </a:r>
+          </a:p>
+          <a:p>
+            <a:pPr lvl="0" indent="0" marL="0">
+              <a:buNone/>
+            </a:pPr>
+          </a:p>
+          <a:p>
+            <a:pPr lvl="0" indent="0" marL="0">
+              <a:buNone/>
+            </a:pPr>
+            <a:r>
+              <a:rPr/>
+              <a:t>tenure_months: only 4 flagged on the right panel, all at 999. Ask the room: where did the negative values go? Nobody will know yet - next slide.</a:t>
             </a:r>
           </a:p>
         </p:txBody>
@@ -1243,35 +1260,21 @@
             </a:pPr>
             <a:r>
               <a:rPr/>
-              <a:t>A long-tenure, high-paying customer is not an error; a tenure of 999 months is. Say plainly that a statistical rule cannot make this call - it only nominates candidates, and the decision is a domain decision.</a:t>
-            </a:r>
-          </a:p>
-          <a:p>
-            <a:pPr lvl="0" indent="0" marL="0">
-              <a:buNone/>
-            </a:pPr>
-          </a:p>
-          <a:p>
-            <a:pPr lvl="0" indent="0" marL="0">
-              <a:buNone/>
-            </a:pPr>
-            <a:r>
-              <a:rPr/>
-              <a:t>Walk the four options and note that each is a different claim about the world. Capping says “the value is real but the scale is misleading”. Removing says “this row is not from the population I am modelling”. Correcting says “I know what it should have been”. Leaving it says “the model should handle this”.</a:t>
-            </a:r>
-          </a:p>
-          <a:p>
-            <a:pPr lvl="0" indent="0" marL="0">
-              <a:buNone/>
-            </a:pPr>
-          </a:p>
-          <a:p>
-            <a:pPr lvl="0" indent="0" marL="0">
-              <a:buNone/>
-            </a:pPr>
-            <a:r>
-              <a:rPr/>
-              <a:t>The one that gets chosen by default, without anyone deciding, is removal - and it is the one that silently reweights the sample. Handout Section 4.2 closes on exactly this. If a rule flags 3% of your rows and you drop them all, you have changed the population your model is trained on.</a:t>
+              <a:t>This is the slide worth remembering over the two formulas. Statistical rules find points that are unusual relative to the rest of a column; they know nothing about domain validity. A negative tenure sits comfortably inside the IQR fence because the column’s own spread is wide enough to hide it.</a:t>
+            </a:r>
+          </a:p>
+          <a:p>
+            <a:pPr lvl="0" indent="0" marL="0">
+              <a:buNone/>
+            </a:pPr>
+          </a:p>
+          <a:p>
+            <a:pPr lvl="0" indent="0" marL="0">
+              <a:buNone/>
+            </a:pPr>
+            <a:r>
+              <a:rPr/>
+              <a:t>The fix is a domain rule: 0 &lt;= tenure_months &lt;= some sane maximum. Say plainly: a thorough pass runs both kinds of check, because they catch different mistakes, and neither substitutes for the other. Handout Section 4.2.</a:t>
             </a:r>
           </a:p>
         </p:txBody>
@@ -1353,35 +1356,35 @@
             </a:pPr>
             <a:r>
               <a:rPr/>
-              <a:t>Work through notebook 1 now, 25 minutes. Let them drive; walk the room rather than presenting.</a:t>
-            </a:r>
-          </a:p>
-          <a:p>
-            <a:pPr lvl="0" indent="0" marL="0">
-              <a:buNone/>
-            </a:pPr>
-          </a:p>
-          <a:p>
-            <a:pPr lvl="0" indent="0" marL="0">
-              <a:buNone/>
-            </a:pPr>
-            <a:r>
-              <a:rPr/>
-              <a:t>The domain-rule cell is worth pausing on collectively: a two-line check for negative tenure catches something no statistical rule would flag, because a negative tenure is not extreme, it is impossible. That distinction - impossible versus unusual - is the lesson of the whole section, and it lands better from their own screen than from the projector.</a:t>
-            </a:r>
-          </a:p>
-          <a:p>
-            <a:pPr lvl="0" indent="0" marL="0">
-              <a:buNone/>
-            </a:pPr>
-          </a:p>
-          <a:p>
-            <a:pPr lvl="0" indent="0" marL="0">
-              <a:buNone/>
-            </a:pPr>
-            <a:r>
-              <a:rPr/>
-              <a:t>Watch for the group that finishes early. Point them at the “try this” in the notebook: change the missing fraction and watch the correlation attenuate as the derivation predicts.</a:t>
+              <a:t>A long-tenure, high-paying customer is not an error; a tenure of 999 months is. Say plainly that a statistical rule cannot make this call - it only nominates candidates, and the decision is a domain decision.</a:t>
+            </a:r>
+          </a:p>
+          <a:p>
+            <a:pPr lvl="0" indent="0" marL="0">
+              <a:buNone/>
+            </a:pPr>
+          </a:p>
+          <a:p>
+            <a:pPr lvl="0" indent="0" marL="0">
+              <a:buNone/>
+            </a:pPr>
+            <a:r>
+              <a:rPr/>
+              <a:t>Walk the four options and note that each is a different claim about the world. Capping says “the value is real but the scale is misleading”. Removing says “this row is not from the population I am modelling”. Correcting says “I know what it should have been”. Leaving it says “the model should handle this”.</a:t>
+            </a:r>
+          </a:p>
+          <a:p>
+            <a:pPr lvl="0" indent="0" marL="0">
+              <a:buNone/>
+            </a:pPr>
+          </a:p>
+          <a:p>
+            <a:pPr lvl="0" indent="0" marL="0">
+              <a:buNone/>
+            </a:pPr>
+            <a:r>
+              <a:rPr/>
+              <a:t>The one that gets chosen by default, without anyone deciding, is removal - and it is the one that silently reweights the sample. Handout Section 4.2 closes on exactly this. If a rule flags 3% of your rows and you drop them all, you have changed the population your model is trained on.</a:t>
             </a:r>
           </a:p>
         </p:txBody>
@@ -1463,21 +1466,35 @@
             </a:pPr>
             <a:r>
               <a:rPr/>
-              <a:t>15 minutes. Back for scaling, encoding and the pipeline.</a:t>
-            </a:r>
-          </a:p>
-          <a:p>
-            <a:pPr lvl="0" indent="0" marL="0">
-              <a:buNone/>
-            </a:pPr>
-          </a:p>
-          <a:p>
-            <a:pPr lvl="0" indent="0" marL="0">
-              <a:buNone/>
-            </a:pPr>
-            <a:r>
-              <a:rPr/>
-              <a:t>Use the break to check who is stuck in the notebook - the second half assumes everyone has a working ColumnTransformer, and it is much cheaper to fix now than during the leakage section.</a:t>
+              <a:t>Work through notebook 1 now, 25 minutes. Let them drive; walk the room rather than presenting.</a:t>
+            </a:r>
+          </a:p>
+          <a:p>
+            <a:pPr lvl="0" indent="0" marL="0">
+              <a:buNone/>
+            </a:pPr>
+          </a:p>
+          <a:p>
+            <a:pPr lvl="0" indent="0" marL="0">
+              <a:buNone/>
+            </a:pPr>
+            <a:r>
+              <a:rPr/>
+              <a:t>The domain-rule cell is worth pausing on collectively: a two-line check for negative tenure catches something no statistical rule would flag, because a negative tenure is not extreme, it is impossible. That distinction - impossible versus unusual - is the lesson of the whole section, and it lands better from their own screen than from the projector.</a:t>
+            </a:r>
+          </a:p>
+          <a:p>
+            <a:pPr lvl="0" indent="0" marL="0">
+              <a:buNone/>
+            </a:pPr>
+          </a:p>
+          <a:p>
+            <a:pPr lvl="0" indent="0" marL="0">
+              <a:buNone/>
+            </a:pPr>
+            <a:r>
+              <a:rPr/>
+              <a:t>Watch for the group that finishes early. Point them at the “try this” in the notebook: change the missing fraction and watch the correlation attenuate as the derivation predicts.</a:t>
             </a:r>
           </a:p>
         </p:txBody>
@@ -1559,35 +1576,21 @@
             </a:pPr>
             <a:r>
               <a:rPr/>
-              <a:t>Set up the problem before the mathematics. Ask: if two features live on very different scales, can a single learning rate be right for both directions at once? Let the room reason about it before the derivation.</a:t>
-            </a:r>
-          </a:p>
-          <a:p>
-            <a:pPr lvl="0" indent="0" marL="0">
-              <a:buNone/>
-            </a:pPr>
-          </a:p>
-          <a:p>
-            <a:pPr lvl="0" indent="0" marL="0">
-              <a:buNone/>
-            </a:pPr>
-            <a:r>
-              <a:rPr/>
-              <a:t>Give them the concrete pair from the dataset: tenure runs 0 to 70, monthly charges 15 to 150. The variances differ by roughly an order of magnitude, and gradient descent takes one step size along every axis simultaneously.</a:t>
-            </a:r>
-          </a:p>
-          <a:p>
-            <a:pPr lvl="0" indent="0" marL="0">
-              <a:buNone/>
-            </a:pPr>
-          </a:p>
-          <a:p>
-            <a:pPr lvl="0" indent="0" marL="0">
-              <a:buNone/>
-            </a:pPr>
-            <a:r>
-              <a:rPr/>
-              <a:t>Handout Section 5.2 does it properly, and the punchline is worth previewing: the safe learning rate is set by the largest-variance feature, so progress along the smallest-variance direction is throttled by their ratio. The number of iterations scales with the condition number. Scaling is not cosmetic - it changes how long training takes, and sometimes whether it converges at all.</a:t>
+              <a:t>15 minutes. Back for scaling, encoding and the pipeline.</a:t>
+            </a:r>
+          </a:p>
+          <a:p>
+            <a:pPr lvl="0" indent="0" marL="0">
+              <a:buNone/>
+            </a:pPr>
+          </a:p>
+          <a:p>
+            <a:pPr lvl="0" indent="0" marL="0">
+              <a:buNone/>
+            </a:pPr>
+            <a:r>
+              <a:rPr/>
+              <a:t>Use the break to check who is stuck in the notebook - the second half assumes everyone has a working ColumnTransformer, and it is much cheaper to fix now than during the leakage section.</a:t>
             </a:r>
           </a:p>
         </p:txBody>
@@ -1765,49 +1768,35 @@
             </a:pPr>
             <a:r>
               <a:rPr/>
-              <a:t>The figure is the derivation made visible. Left: variances differ, so the bowl is a narrow valley. One step size is bound by the steep axis, so it bounces across the valley while barely advancing along it.</a:t>
-            </a:r>
-          </a:p>
-          <a:p>
-            <a:pPr lvl="0" indent="0" marL="0">
-              <a:buNone/>
-            </a:pPr>
-          </a:p>
-          <a:p>
-            <a:pPr lvl="0" indent="0" marL="0">
-              <a:buNone/>
-            </a:pPr>
-            <a:r>
-              <a:rPr/>
-              <a:t>Right: after scaling, the bowl is round and every step points at the minimum.</a:t>
-            </a:r>
-          </a:p>
-          <a:p>
-            <a:pPr lvl="0" indent="0" marL="0">
-              <a:buNone/>
-            </a:pPr>
-          </a:p>
-          <a:p>
-            <a:pPr lvl="0" indent="0" marL="0">
-              <a:buNone/>
-            </a:pPr>
-            <a:r>
-              <a:rPr/>
-              <a:t>Give them the number that governs it - the condition number, the ratio of largest to smallest variance - and say that the iteration count scales with it. Scaling is not cosmetic: it changes how long training takes, and sometimes whether it converges at all.</a:t>
-            </a:r>
-          </a:p>
-          <a:p>
-            <a:pPr lvl="0" indent="0" marL="0">
-              <a:buNone/>
-            </a:pPr>
-          </a:p>
-          <a:p>
-            <a:pPr lvl="0" indent="0" marL="0">
-              <a:buNone/>
-            </a:pPr>
-            <a:r>
-              <a:rPr/>
-              <a:t>The derivation is Handout Section 5.2: the Hessian of the squared-error cost is the feature covariance matrix, so for uncorrelated centred features it is diagonal with the variances on it. That is why the picture is an axis-aligned ellipse, and why its elongation is the condition number.</a:t>
+              <a:t>Set up the problem before the mathematics. Ask: if two features live on very different scales, can a single learning rate be right for both directions at once? Let the room reason about it before the derivation.</a:t>
+            </a:r>
+          </a:p>
+          <a:p>
+            <a:pPr lvl="0" indent="0" marL="0">
+              <a:buNone/>
+            </a:pPr>
+          </a:p>
+          <a:p>
+            <a:pPr lvl="0" indent="0" marL="0">
+              <a:buNone/>
+            </a:pPr>
+            <a:r>
+              <a:rPr/>
+              <a:t>Give them the concrete pair from the dataset: tenure runs 0 to 70, monthly charges 15 to 150. The variances differ by roughly an order of magnitude, and gradient descent takes one step size along every axis simultaneously.</a:t>
+            </a:r>
+          </a:p>
+          <a:p>
+            <a:pPr lvl="0" indent="0" marL="0">
+              <a:buNone/>
+            </a:pPr>
+          </a:p>
+          <a:p>
+            <a:pPr lvl="0" indent="0" marL="0">
+              <a:buNone/>
+            </a:pPr>
+            <a:r>
+              <a:rPr/>
+              <a:t>Handout Section 5.2 does it properly, and the punchline is worth previewing: the safe learning rate is set by the largest-variance feature, so progress along the smallest-variance direction is throttled by their ratio. The number of iterations scales with the condition number. Scaling is not cosmetic - it changes how long training takes, and sometimes whether it converges at all.</a:t>
             </a:r>
           </a:p>
         </p:txBody>
@@ -1889,21 +1878,49 @@
             </a:pPr>
             <a:r>
               <a:rPr/>
-              <a:t>Left panel: each feature set at its OWN safe rate - standardised still gets there faster, because it tolerates a larger rate. Right panel is the sharper point: give the RAW features the rate the standardised ones handle comfortably, and it does not converge slowly - it diverges. Same data, same starting point, one rate stable and one exploding.</a:t>
-            </a:r>
-          </a:p>
-          <a:p>
-            <a:pPr lvl="0" indent="0" marL="0">
-              <a:buNone/>
-            </a:pPr>
-          </a:p>
-          <a:p>
-            <a:pPr lvl="0" indent="0" marL="0">
-              <a:buNone/>
-            </a:pPr>
-            <a:r>
-              <a:rPr/>
-              <a:t>This is a controlled toy (notebook 2), built with exactly a 100:1 variance ratio so the effect is unambiguous - real churn features show the same direction of effect more mildly, since monthly_charges has roughly 3-4 times the spread of tenure_months, not 100 times.</a:t>
+              <a:t>The figure is the derivation made visible. Left: variances differ, so the bowl is a narrow valley. One step size is bound by the steep axis, so it bounces across the valley while barely advancing along it.</a:t>
+            </a:r>
+          </a:p>
+          <a:p>
+            <a:pPr lvl="0" indent="0" marL="0">
+              <a:buNone/>
+            </a:pPr>
+          </a:p>
+          <a:p>
+            <a:pPr lvl="0" indent="0" marL="0">
+              <a:buNone/>
+            </a:pPr>
+            <a:r>
+              <a:rPr/>
+              <a:t>Right: after scaling, the bowl is round and every step points at the minimum.</a:t>
+            </a:r>
+          </a:p>
+          <a:p>
+            <a:pPr lvl="0" indent="0" marL="0">
+              <a:buNone/>
+            </a:pPr>
+          </a:p>
+          <a:p>
+            <a:pPr lvl="0" indent="0" marL="0">
+              <a:buNone/>
+            </a:pPr>
+            <a:r>
+              <a:rPr/>
+              <a:t>Give them the number that governs it - the condition number, the ratio of largest to smallest variance - and say that the iteration count scales with it. Scaling is not cosmetic: it changes how long training takes, and sometimes whether it converges at all.</a:t>
+            </a:r>
+          </a:p>
+          <a:p>
+            <a:pPr lvl="0" indent="0" marL="0">
+              <a:buNone/>
+            </a:pPr>
+          </a:p>
+          <a:p>
+            <a:pPr lvl="0" indent="0" marL="0">
+              <a:buNone/>
+            </a:pPr>
+            <a:r>
+              <a:rPr/>
+              <a:t>The derivation is Handout Section 5.2: the Hessian of the squared-error cost is the feature covariance matrix, so for uncorrelated centred features it is diagonal with the variances on it. That is why the picture is an axis-aligned ellipse, and why its elongation is the condition number.</a:t>
             </a:r>
           </a:p>
         </p:txBody>
@@ -1985,21 +2002,21 @@
             </a:pPr>
             <a:r>
               <a:rPr/>
-              <a:t>MinMaxScaler is the more outlier-sensitive of the two: one extreme billing error stretches the whole 0-1 range, compressing every ordinary customer into a sliver of it. StandardScaler is pulled too, through the mean and standard deviation, but far less dramatically.</a:t>
-            </a:r>
-          </a:p>
-          <a:p>
-            <a:pPr lvl="0" indent="0" marL="0">
-              <a:buNone/>
-            </a:pPr>
-          </a:p>
-          <a:p>
-            <a:pPr lvl="0" indent="0" marL="0">
-              <a:buNone/>
-            </a:pPr>
-            <a:r>
-              <a:rPr/>
-              <a:t>Both must be fitted on training data only - say this every time a fitted transform appears, because it is the thread the whole lesson hangs from.</a:t>
+              <a:t>Left panel: each feature set at its OWN safe rate - standardised still gets there faster, because it tolerates a larger rate. Right panel is the sharper point: give the RAW features the rate the standardised ones handle comfortably, and it does not converge slowly - it diverges. Same data, same starting point, one rate stable and one exploding.</a:t>
+            </a:r>
+          </a:p>
+          <a:p>
+            <a:pPr lvl="0" indent="0" marL="0">
+              <a:buNone/>
+            </a:pPr>
+          </a:p>
+          <a:p>
+            <a:pPr lvl="0" indent="0" marL="0">
+              <a:buNone/>
+            </a:pPr>
+            <a:r>
+              <a:rPr/>
+              <a:t>This is a controlled toy (notebook 2), built with exactly a 100:1 variance ratio so the effect is unambiguous - real churn features show the same direction of effect more mildly, since monthly_charges has roughly 3-4 times the spread of tenure_months, not 100 times.</a:t>
             </a:r>
           </a:p>
         </p:txBody>
@@ -2081,35 +2098,21 @@
             </a:pPr>
             <a:r>
               <a:rPr/>
-              <a:t>The k dummy columns always sum to the intercept column, so they are not independent of it: the design matrix loses rank, and the normal equation has no unique solution.</a:t>
-            </a:r>
-          </a:p>
-          <a:p>
-            <a:pPr lvl="0" indent="0" marL="0">
-              <a:buNone/>
-            </a:pPr>
-          </a:p>
-          <a:p>
-            <a:pPr lvl="0" indent="0" marL="0">
-              <a:buNone/>
-            </a:pPr>
-            <a:r>
-              <a:rPr/>
-              <a:t>Stress that this is not a numerical inconvenience but an identifiability problem. There are infinitely many coefficient vectors that fit equally well, because you can add a constant to every dummy coefficient and subtract it from the intercept without changing a single prediction.</a:t>
-            </a:r>
-          </a:p>
-          <a:p>
-            <a:pPr lvl="0" indent="0" marL="0">
-              <a:buNone/>
-            </a:pPr>
-          </a:p>
-          <a:p>
-            <a:pPr lvl="0" indent="0" marL="0">
-              <a:buNone/>
-            </a:pPr>
-            <a:r>
-              <a:rPr/>
-              <a:t>Handout Section 6.1 has the proof; notebook 2 confirms it directly with matrix_rank, which is the version they will believe. The next slide shows it as arithmetic.</a:t>
+              <a:t>MinMaxScaler is the more outlier-sensitive of the two: one extreme billing error stretches the whole 0-1 range, compressing every ordinary customer into a sliver of it. StandardScaler is pulled too, through the mean and standard deviation, but far less dramatically.</a:t>
+            </a:r>
+          </a:p>
+          <a:p>
+            <a:pPr lvl="0" indent="0" marL="0">
+              <a:buNone/>
+            </a:pPr>
+          </a:p>
+          <a:p>
+            <a:pPr lvl="0" indent="0" marL="0">
+              <a:buNone/>
+            </a:pPr>
+            <a:r>
+              <a:rPr/>
+              <a:t>Both must be fitted on training data only - say this every time a fitted transform appears, because it is the thread the whole lesson hangs from.</a:t>
             </a:r>
           </a:p>
         </p:txBody>
@@ -2191,35 +2194,35 @@
             </a:pPr>
             <a:r>
               <a:rPr/>
-              <a:t>Point at the number: the rank is short by exactly one, not by an arbitrary amount. That is the signature of a single linear dependence - the sum of the dummies equalling the intercept - rather than of general collinearity.</a:t>
-            </a:r>
-          </a:p>
-          <a:p>
-            <a:pPr lvl="0" indent="0" marL="0">
-              <a:buNone/>
-            </a:pPr>
-          </a:p>
-          <a:p>
-            <a:pPr lvl="0" indent="0" marL="0">
-              <a:buNone/>
-            </a:pPr>
-            <a:r>
-              <a:rPr/>
-              <a:t>The fix is OneHotEncoder(drop=“first”). The dropped category becomes the reference level, absorbed into the intercept: no information is lost, and full rank is restored.</a:t>
-            </a:r>
-          </a:p>
-          <a:p>
-            <a:pPr lvl="0" indent="0" marL="0">
-              <a:buNone/>
-            </a:pPr>
-          </a:p>
-          <a:p>
-            <a:pPr lvl="0" indent="0" marL="0">
-              <a:buNone/>
-            </a:pPr>
-            <a:r>
-              <a:rPr/>
-              <a:t>Two caveats worth saying. Tree-based models (Lesson 7) do not need this, because they never invert a design matrix. And regularised models tolerate the rank deficiency, because the penalty term picks one solution out of the infinitely many - which is a good early illustration of what regularisation actually does, and we return to it in Lesson 3.</a:t>
+              <a:t>The k dummy columns always sum to the intercept column, so they are not independent of it: the design matrix loses rank, and the normal equation has no unique solution.</a:t>
+            </a:r>
+          </a:p>
+          <a:p>
+            <a:pPr lvl="0" indent="0" marL="0">
+              <a:buNone/>
+            </a:pPr>
+          </a:p>
+          <a:p>
+            <a:pPr lvl="0" indent="0" marL="0">
+              <a:buNone/>
+            </a:pPr>
+            <a:r>
+              <a:rPr/>
+              <a:t>Stress that this is not a numerical inconvenience but an identifiability problem. There are infinitely many coefficient vectors that fit equally well, because you can add a constant to every dummy coefficient and subtract it from the intercept without changing a single prediction.</a:t>
+            </a:r>
+          </a:p>
+          <a:p>
+            <a:pPr lvl="0" indent="0" marL="0">
+              <a:buNone/>
+            </a:pPr>
+          </a:p>
+          <a:p>
+            <a:pPr lvl="0" indent="0" marL="0">
+              <a:buNone/>
+            </a:pPr>
+            <a:r>
+              <a:rPr/>
+              <a:t>Handout Section 6.1 has the proof; notebook 2 confirms it directly with matrix_rank, which is the version they will believe. The next slide shows it as arithmetic.</a:t>
             </a:r>
           </a:p>
         </p:txBody>
@@ -2301,35 +2304,35 @@
             </a:pPr>
             <a:r>
               <a:rPr/>
-              <a:t>Three encodings of one column, and each makes a different claim.</a:t>
-            </a:r>
-          </a:p>
-          <a:p>
-            <a:pPr lvl="0" indent="0" marL="0">
-              <a:buNone/>
-            </a:pPr>
-          </a:p>
-          <a:p>
-            <a:pPr lvl="0" indent="0" marL="0">
-              <a:buNone/>
-            </a:pPr>
-            <a:r>
-              <a:rPr/>
-              <a:t>Ordinal claims the categories are equally spaced on a line - fine for small/medium/large, wrong for region. One-hot claims nothing at all, which is why it is the default, and costs k columns: 493 for zip code on 2000 rows. Target claims each category is summarised by its own churn rate, which is compact and, as the next section shows, computed from the labels.</a:t>
-            </a:r>
-          </a:p>
-          <a:p>
-            <a:pPr lvl="0" indent="0" marL="0">
-              <a:buNone/>
-            </a:pPr>
-          </a:p>
-          <a:p>
-            <a:pPr lvl="0" indent="0" marL="0">
-              <a:buNone/>
-            </a:pPr>
-            <a:r>
-              <a:rPr/>
-              <a:t>The question to leave them with: which claim is true for THIS column? It is a domain question, not a technical one.</a:t>
+              <a:t>Point at the number: the rank is short by exactly one, not by an arbitrary amount. That is the signature of a single linear dependence - the sum of the dummies equalling the intercept - rather than of general collinearity.</a:t>
+            </a:r>
+          </a:p>
+          <a:p>
+            <a:pPr lvl="0" indent="0" marL="0">
+              <a:buNone/>
+            </a:pPr>
+          </a:p>
+          <a:p>
+            <a:pPr lvl="0" indent="0" marL="0">
+              <a:buNone/>
+            </a:pPr>
+            <a:r>
+              <a:rPr/>
+              <a:t>The fix is OneHotEncoder(drop=“first”). The dropped category becomes the reference level, absorbed into the intercept: no information is lost, and full rank is restored.</a:t>
+            </a:r>
+          </a:p>
+          <a:p>
+            <a:pPr lvl="0" indent="0" marL="0">
+              <a:buNone/>
+            </a:pPr>
+          </a:p>
+          <a:p>
+            <a:pPr lvl="0" indent="0" marL="0">
+              <a:buNone/>
+            </a:pPr>
+            <a:r>
+              <a:rPr/>
+              <a:t>Two caveats worth saying. Tree-based models (Lesson 7) do not need this, because they never invert a design matrix. And regularised models tolerate the rank deficiency, because the penalty term picks one solution out of the infinitely many - which is a good early illustration of what regularisation actually does, and we return to it in Lesson 3.</a:t>
             </a:r>
           </a:p>
         </p:txBody>
@@ -2411,63 +2414,35 @@
             </a:pPr>
             <a:r>
               <a:rPr/>
-              <a:t>The same column under all three schemes, and each makes a different claim about the world.</a:t>
-            </a:r>
-          </a:p>
-          <a:p>
-            <a:pPr lvl="0" indent="0" marL="0">
-              <a:buNone/>
-            </a:pPr>
-          </a:p>
-          <a:p>
-            <a:pPr lvl="0" indent="0" marL="0">
-              <a:buNone/>
-            </a:pPr>
-            <a:r>
-              <a:rPr/>
-              <a:t>Ordinal claims the categories are equally spaced along a line - fine for small/medium/large, wrong for region, and the model has no way to tell you it was the wrong claim.</a:t>
-            </a:r>
-          </a:p>
-          <a:p>
-            <a:pPr lvl="0" indent="0" marL="0">
-              <a:buNone/>
-            </a:pPr>
-          </a:p>
-          <a:p>
-            <a:pPr lvl="0" indent="0" marL="0">
-              <a:buNone/>
-            </a:pPr>
-            <a:r>
-              <a:rPr/>
-              <a:t>One-hot claims nothing at all, which is why it is the default, and pays for that neutrality in columns: 493 of them for zip code, on 2000 rows.</a:t>
-            </a:r>
-          </a:p>
-          <a:p>
-            <a:pPr lvl="0" indent="0" marL="0">
-              <a:buNone/>
-            </a:pPr>
-          </a:p>
-          <a:p>
-            <a:pPr lvl="0" indent="0" marL="0">
-              <a:buNone/>
-            </a:pPr>
-            <a:r>
-              <a:rPr/>
-              <a:t>Target claims each category is summarised by its own churn rate. Compact, effective - and computed from the labels, which is where the next section begins.</a:t>
-            </a:r>
-          </a:p>
-          <a:p>
-            <a:pPr lvl="0" indent="0" marL="0">
-              <a:buNone/>
-            </a:pPr>
-          </a:p>
-          <a:p>
-            <a:pPr lvl="0" indent="0" marL="0">
-              <a:buNone/>
-            </a:pPr>
-            <a:r>
-              <a:rPr/>
-              <a:t>The question to leave with them: which claim is true for THIS column? That is a domain question, not a technical one, and no cross-validation score will answer it.</a:t>
+              <a:t>Three encodings of one column, and each makes a different claim.</a:t>
+            </a:r>
+          </a:p>
+          <a:p>
+            <a:pPr lvl="0" indent="0" marL="0">
+              <a:buNone/>
+            </a:pPr>
+          </a:p>
+          <a:p>
+            <a:pPr lvl="0" indent="0" marL="0">
+              <a:buNone/>
+            </a:pPr>
+            <a:r>
+              <a:rPr/>
+              <a:t>Ordinal claims the categories are equally spaced on a line - fine for small/medium/large, wrong for region. One-hot claims nothing at all, which is why it is the default, and costs k columns: 493 for zip code on 2000 rows. Target claims each category is summarised by its own churn rate, which is compact and, as the next section shows, computed from the labels.</a:t>
+            </a:r>
+          </a:p>
+          <a:p>
+            <a:pPr lvl="0" indent="0" marL="0">
+              <a:buNone/>
+            </a:pPr>
+          </a:p>
+          <a:p>
+            <a:pPr lvl="0" indent="0" marL="0">
+              <a:buNone/>
+            </a:pPr>
+            <a:r>
+              <a:rPr/>
+              <a:t>The question to leave them with: which claim is true for THIS column? It is a domain question, not a technical one.</a:t>
             </a:r>
           </a:p>
         </p:txBody>
@@ -2549,35 +2524,63 @@
             </a:pPr>
             <a:r>
               <a:rPr/>
-              <a:t>Handout Section 6.3. Deliberately quick - the point is to motivate why target encoding looks attractive for high-cardinality columns, before the next section shows why it needs care.</a:t>
-            </a:r>
-          </a:p>
-          <a:p>
-            <a:pPr lvl="0" indent="0" marL="0">
-              <a:buNone/>
-            </a:pPr>
-          </a:p>
-          <a:p>
-            <a:pPr lvl="0" indent="0" marL="0">
-              <a:buNone/>
-            </a:pPr>
-            <a:r>
-              <a:rPr/>
-              <a:t>The number to dwell on: one-hot encoding zip_code produces 493 columns, almost all zero, on 2000 rows. More columns than a quarter of the sample size, for one field.</a:t>
-            </a:r>
-          </a:p>
-          <a:p>
-            <a:pPr lvl="0" indent="0" marL="0">
-              <a:buNone/>
-            </a:pPr>
-          </a:p>
-          <a:p>
-            <a:pPr lvl="0" indent="0" marL="0">
-              <a:buNone/>
-            </a:pPr>
-            <a:r>
-              <a:rPr/>
-              <a:t>Two consequences to name. Distance-based methods (Lesson 6) degrade, because in high dimensions everything becomes roughly equidistant from everything else. And every column is a parameter to estimate from the same fixed amount of data, which is the bias-variance trade-off from Lesson 1 arriving from a new direction.</a:t>
+              <a:t>The same column under all three schemes, and each makes a different claim about the world.</a:t>
+            </a:r>
+          </a:p>
+          <a:p>
+            <a:pPr lvl="0" indent="0" marL="0">
+              <a:buNone/>
+            </a:pPr>
+          </a:p>
+          <a:p>
+            <a:pPr lvl="0" indent="0" marL="0">
+              <a:buNone/>
+            </a:pPr>
+            <a:r>
+              <a:rPr/>
+              <a:t>Ordinal claims the categories are equally spaced along a line - fine for small/medium/large, wrong for region, and the model has no way to tell you it was the wrong claim.</a:t>
+            </a:r>
+          </a:p>
+          <a:p>
+            <a:pPr lvl="0" indent="0" marL="0">
+              <a:buNone/>
+            </a:pPr>
+          </a:p>
+          <a:p>
+            <a:pPr lvl="0" indent="0" marL="0">
+              <a:buNone/>
+            </a:pPr>
+            <a:r>
+              <a:rPr/>
+              <a:t>One-hot claims nothing at all, which is why it is the default, and pays for that neutrality in columns: 493 of them for zip code, on 2000 rows.</a:t>
+            </a:r>
+          </a:p>
+          <a:p>
+            <a:pPr lvl="0" indent="0" marL="0">
+              <a:buNone/>
+            </a:pPr>
+          </a:p>
+          <a:p>
+            <a:pPr lvl="0" indent="0" marL="0">
+              <a:buNone/>
+            </a:pPr>
+            <a:r>
+              <a:rPr/>
+              <a:t>Target claims each category is summarised by its own churn rate. Compact, effective - and computed from the labels, which is where the next section begins.</a:t>
+            </a:r>
+          </a:p>
+          <a:p>
+            <a:pPr lvl="0" indent="0" marL="0">
+              <a:buNone/>
+            </a:pPr>
+          </a:p>
+          <a:p>
+            <a:pPr lvl="0" indent="0" marL="0">
+              <a:buNone/>
+            </a:pPr>
+            <a:r>
+              <a:rPr/>
+              <a:t>The question to leave with them: which claim is true for THIS column? That is a domain question, not a technical one, and no cross-validation score will answer it.</a:t>
             </a:r>
           </a:p>
         </p:txBody>
@@ -2659,7 +2662,35 @@
             </a:pPr>
             <a:r>
               <a:rPr/>
-              <a:t>Point at the zip_code row/column - or its absence, since it is not even numeric yet - and say: notebook 1’s correlation check already suggests this column carries nothing. One-hot encoding it would add 493 mostly-empty columns. The natural alternative - replace each code with the average churn rate of its customers - is exactly the technique the leakage section is about. Do not resolve the tension yet; let it hang until after the break-free run into notebook 2’s pipeline section.</a:t>
+              <a:t>Handout Section 6.3. Deliberately quick - the point is to motivate why target encoding looks attractive for high-cardinality columns, before the next section shows why it needs care.</a:t>
+            </a:r>
+          </a:p>
+          <a:p>
+            <a:pPr lvl="0" indent="0" marL="0">
+              <a:buNone/>
+            </a:pPr>
+          </a:p>
+          <a:p>
+            <a:pPr lvl="0" indent="0" marL="0">
+              <a:buNone/>
+            </a:pPr>
+            <a:r>
+              <a:rPr/>
+              <a:t>The number to dwell on: one-hot encoding zip_code produces 493 columns, almost all zero, on 2000 rows. More columns than a quarter of the sample size, for one field.</a:t>
+            </a:r>
+          </a:p>
+          <a:p>
+            <a:pPr lvl="0" indent="0" marL="0">
+              <a:buNone/>
+            </a:pPr>
+          </a:p>
+          <a:p>
+            <a:pPr lvl="0" indent="0" marL="0">
+              <a:buNone/>
+            </a:pPr>
+            <a:r>
+              <a:rPr/>
+              <a:t>Two consequences to name. Distance-based methods (Lesson 6) degrade, because in high dimensions everything becomes roughly equidistant from everything else. And every column is a parameter to estimate from the same fixed amount of data, which is the bias-variance trade-off from Lesson 1 arriving from a new direction.</a:t>
             </a:r>
           </a:p>
         </p:txBody>
@@ -2741,21 +2772,7 @@
             </a:pPr>
             <a:r>
               <a:rPr/>
-              <a:t>Handout Section 8.1. Lesson 1’s unbiasedness argument never mentioned “the model” specifically - it is about f, whatever function maps raw inputs to predictions. In deployment, a fitted scaler or imputer travels WITH the model, so f includes their learned parameters too.</a:t>
-            </a:r>
-          </a:p>
-          <a:p>
-            <a:pPr lvl="0" indent="0" marL="0">
-              <a:buNone/>
-            </a:pPr>
-          </a:p>
-          <a:p>
-            <a:pPr lvl="0" indent="0" marL="0">
-              <a:buNone/>
-            </a:pPr>
-            <a:r>
-              <a:rPr/>
-              <a:t>The moment any of those parameters - a mean, a set of neighbours, a per-category average - is estimated using rows that later appear in T, f is no longer independent of T, and the equality breaks. This is the one-sentence version of everything Section 9 is about to demonstrate concretely.</a:t>
+              <a:t>Point at the zip_code row/column - or its absence, since it is not even numeric yet - and say: notebook 1’s correlation check already suggests this column carries nothing. One-hot encoding it would add 493 mostly-empty columns. The natural alternative - replace each code with the average churn rate of its customers - is exactly the technique the leakage section is about. Do not resolve the tension yet; let it hang until after the break-free run into notebook 2’s pipeline section.</a:t>
             </a:r>
           </a:p>
         </p:txBody>
@@ -2933,21 +2950,21 @@
             </a:pPr>
             <a:r>
               <a:rPr/>
-              <a:t>The structural version of the argument just stated. Different columns need different treatment; ColumnTransformer routes each group through its own sub-pipeline and concatenates the result; the outer Pipeline adds the classifier.</a:t>
-            </a:r>
-          </a:p>
-          <a:p>
-            <a:pPr lvl="0" indent="0" marL="0">
-              <a:buNone/>
-            </a:pPr>
-          </a:p>
-          <a:p>
-            <a:pPr lvl="0" indent="0" marL="0">
-              <a:buNone/>
-            </a:pPr>
-            <a:r>
-              <a:rPr/>
-              <a:t>One fit() call, on X_train, fits every imputer, the scaler, the encoder AND the classifier - in that order, on training data only, by construction. Say explicitly: this is not tidiness. It is what makes “nothing learned before the split” true even when nobody is watching, which today’s leakage section is entirely about.</a:t>
+              <a:t>Handout Section 8.1. Lesson 1’s unbiasedness argument never mentioned “the model” specifically - it is about f, whatever function maps raw inputs to predictions. In deployment, a fitted scaler or imputer travels WITH the model, so f includes their learned parameters too.</a:t>
+            </a:r>
+          </a:p>
+          <a:p>
+            <a:pPr lvl="0" indent="0" marL="0">
+              <a:buNone/>
+            </a:pPr>
+          </a:p>
+          <a:p>
+            <a:pPr lvl="0" indent="0" marL="0">
+              <a:buNone/>
+            </a:pPr>
+            <a:r>
+              <a:rPr/>
+              <a:t>The moment any of those parameters - a mean, a set of neighbours, a per-category average - is estimated using rows that later appear in T, f is no longer independent of T, and the equality breaks. This is the one-sentence version of everything Section 9 is about to demonstrate concretely.</a:t>
             </a:r>
           </a:p>
         </p:txBody>
@@ -3029,21 +3046,21 @@
             </a:pPr>
             <a:r>
               <a:rPr/>
-              <a:t>numeric_pipe and categorical_pipe are the impute-then-transform pairs from the diagram; show the full definitions on screen in notebook 2 rather than here. Point out there is exactly ONE call to fit, at the very bottom, on X_train alone - everything above it declares structure, not computation.</a:t>
-            </a:r>
-          </a:p>
-          <a:p>
-            <a:pPr lvl="0" indent="0" marL="0">
-              <a:buNone/>
-            </a:pPr>
-          </a:p>
-          <a:p>
-            <a:pPr lvl="0" indent="0" marL="0">
-              <a:buNone/>
-            </a:pPr>
-            <a:r>
-              <a:rPr/>
-              <a:t>This is the code notebook 2 runs, nearly verbatim. Say that reading it should now feel unremarkable - that is the goal, structure that makes the right thing the easy thing.</a:t>
+              <a:t>The structural version of the argument just stated. Different columns need different treatment; ColumnTransformer routes each group through its own sub-pipeline and concatenates the result; the outer Pipeline adds the classifier.</a:t>
+            </a:r>
+          </a:p>
+          <a:p>
+            <a:pPr lvl="0" indent="0" marL="0">
+              <a:buNone/>
+            </a:pPr>
+          </a:p>
+          <a:p>
+            <a:pPr lvl="0" indent="0" marL="0">
+              <a:buNone/>
+            </a:pPr>
+            <a:r>
+              <a:rPr/>
+              <a:t>One fit() call, on X_train, fits every imputer, the scaler, the encoder AND the classifier - in that order, on training data only, by construction. Say explicitly: this is not tidiness. It is what makes “nothing learned before the split” true even when nobody is watching, which today’s leakage section is entirely about.</a:t>
             </a:r>
           </a:p>
         </p:txBody>
@@ -3125,35 +3142,21 @@
             </a:pPr>
             <a:r>
               <a:rPr/>
-              <a:t>Let the room answer why the accuracy gain is modest. The dataset is 80/20 imbalanced, so accuracy is dominated by the majority class - exactly as Lesson 1 warned, and the first time they meet it on data they prepared themselves.</a:t>
-            </a:r>
-          </a:p>
-          <a:p>
-            <a:pPr lvl="0" indent="0" marL="0">
-              <a:buNone/>
-            </a:pPr>
-          </a:p>
-          <a:p>
-            <a:pPr lvl="0" indent="0" marL="0">
-              <a:buNone/>
-            </a:pPr>
-            <a:r>
-              <a:rPr/>
-              <a:t>The matrix shows where the errors sit: read the bottom-left cell, the churners the model missed. The area under the receiver operating characteristic curve — AUC, which Lesson 4 builds properly — at 0.752 is unaffected by the imbalance and says there is real signal that accuracy is hiding.</a:t>
-            </a:r>
-          </a:p>
-          <a:p>
-            <a:pPr lvl="0" indent="0" marL="0">
-              <a:buNone/>
-            </a:pPr>
-          </a:p>
-          <a:p>
-            <a:pPr lvl="0" indent="0" marL="0">
-              <a:buNone/>
-            </a:pPr>
-            <a:r>
-              <a:rPr/>
-              <a:t>Had we reported only accuracy, this model would look barely better than the baseline and someone would reasonably conclude the features were useless.</a:t>
+              <a:t>numeric_pipe and categorical_pipe are the impute-then-transform pairs from the diagram; show the full definitions on screen in notebook 2 rather than here. Point out there is exactly ONE call to fit, at the very bottom, on X_train alone - everything above it declares structure, not computation.</a:t>
+            </a:r>
+          </a:p>
+          <a:p>
+            <a:pPr lvl="0" indent="0" marL="0">
+              <a:buNone/>
+            </a:pPr>
+          </a:p>
+          <a:p>
+            <a:pPr lvl="0" indent="0" marL="0">
+              <a:buNone/>
+            </a:pPr>
+            <a:r>
+              <a:rPr/>
+              <a:t>This is the code notebook 2 runs, nearly verbatim. Say that reading it should now feel unremarkable - that is the goal, structure that makes the right thing the easy thing.</a:t>
             </a:r>
           </a:p>
         </p:txBody>
@@ -3235,21 +3238,35 @@
             </a:pPr>
             <a:r>
               <a:rPr/>
-              <a:t>A modest gain, and say plainly that this is itself a legitimate result, not a failed experiment - feature engineering is a hypothesis about the domain, not a guarantee. Handout Section 7.</a:t>
-            </a:r>
-          </a:p>
-          <a:p>
-            <a:pPr lvl="0" indent="0" marL="0">
-              <a:buNone/>
-            </a:pPr>
-          </a:p>
-          <a:p>
-            <a:pPr lvl="0" indent="0" marL="0">
-              <a:buNone/>
-            </a:pPr>
-            <a:r>
-              <a:rPr/>
-              <a:t>The point to land: any engineered feature that involves a statistic LEARNED from data - bin edges from quantiles, a scaled interaction - is subject to the same rule as scaling. A pure arithmetic combination (this ratio) needs no fold-awareness; a learned one does.</a:t>
+              <a:t>Let the room answer why the accuracy gain is modest. The dataset is 80/20 imbalanced, so accuracy is dominated by the majority class - exactly as Lesson 1 warned, and the first time they meet it on data they prepared themselves.</a:t>
+            </a:r>
+          </a:p>
+          <a:p>
+            <a:pPr lvl="0" indent="0" marL="0">
+              <a:buNone/>
+            </a:pPr>
+          </a:p>
+          <a:p>
+            <a:pPr lvl="0" indent="0" marL="0">
+              <a:buNone/>
+            </a:pPr>
+            <a:r>
+              <a:rPr/>
+              <a:t>The matrix shows where the errors sit: read the bottom-left cell, the churners the model missed. The area under the receiver operating characteristic curve — AUC, which Lesson 4 builds properly — at 0.752 is unaffected by the imbalance and says there is real signal that accuracy is hiding.</a:t>
+            </a:r>
+          </a:p>
+          <a:p>
+            <a:pPr lvl="0" indent="0" marL="0">
+              <a:buNone/>
+            </a:pPr>
+          </a:p>
+          <a:p>
+            <a:pPr lvl="0" indent="0" marL="0">
+              <a:buNone/>
+            </a:pPr>
+            <a:r>
+              <a:rPr/>
+              <a:t>Had we reported only accuracy, this model would look barely better than the baseline and someone would reasonably conclude the features were useless.</a:t>
             </a:r>
           </a:p>
         </p:txBody>
@@ -3331,35 +3348,35 @@
             </a:pPr>
             <a:r>
               <a:rPr/>
-              <a:t>25 minutes. Let them work; circulate.</a:t>
-            </a:r>
-          </a:p>
-          <a:p>
-            <a:pPr lvl="0" indent="0" marL="0">
-              <a:buNone/>
-            </a:pPr>
-          </a:p>
-          <a:p>
-            <a:pPr lvl="0" indent="0" marL="0">
-              <a:buNone/>
-            </a:pPr>
-            <a:r>
-              <a:rPr/>
-              <a:t>The gradient descent toy is worth running interactively - change the variance ratio live and watch the iteration count move, per the handout’s “try this”. It makes the condition number argument concrete in a way the derivation alone does not.</a:t>
-            </a:r>
-          </a:p>
-          <a:p>
-            <a:pPr lvl="0" indent="0" marL="0">
-              <a:buNone/>
-            </a:pPr>
-          </a:p>
-          <a:p>
-            <a:pPr lvl="0" indent="0" marL="0">
-              <a:buNone/>
-            </a:pPr>
-            <a:r>
-              <a:rPr/>
-              <a:t>If the room is moving fast, the ColumnTransformer section is where to slow down: it is the piece they will reuse in every exercise and in the project, and getting the column selectors right is fiddlier than it looks.</a:t>
+              <a:t>The accuracy gain was fourteen thousandths. This is where those errors actually sit, and it explains why the gain is small.</a:t>
+            </a:r>
+          </a:p>
+          <a:p>
+            <a:pPr lvl="0" indent="0" marL="0">
+              <a:buNone/>
+            </a:pPr>
+          </a:p>
+          <a:p>
+            <a:pPr lvl="0" indent="0" marL="0">
+              <a:buNone/>
+            </a:pPr>
+            <a:r>
+              <a:rPr/>
+              <a:t>Read the bottom row: almost every customer who churned was predicted to stay. The model has learned to predict the majority class slightly more cleverly than the baseline does, and on the class the business would pay to identify it is close to useless.</a:t>
+            </a:r>
+          </a:p>
+          <a:p>
+            <a:pPr lvl="0" indent="0" marL="0">
+              <a:buNone/>
+            </a:pPr>
+          </a:p>
+          <a:p>
+            <a:pPr lvl="0" indent="0" marL="0">
+              <a:buNone/>
+            </a:pPr>
+            <a:r>
+              <a:rPr/>
+              <a:t>Then connect it back to lesson 1 and its imbalance slide. Same shape, different dataset, and it took a confusion matrix to see it in both cases. Accuracy on its own would have reported this as progress.</a:t>
             </a:r>
           </a:p>
         </p:txBody>
@@ -3441,7 +3458,21 @@
             </a:pPr>
             <a:r>
               <a:rPr/>
-              <a:t>Set up the closing section. Lesson 1’s leak - selecting features on the full dataset - is visible once you know to look for it: an obviously extra step. Today’s two are not. Imputing a missing value and encoding a category both read as ordinary data cleaning, not as “training a model.” They ARE training a model, in the sense Section 8.1 makes precise: any fitted parameter is part of f, and f must be independent of the test set.</a:t>
+              <a:t>A modest gain, and say plainly that this is itself a legitimate result, not a failed experiment - feature engineering is a hypothesis about the domain, not a guarantee. Handout Section 7.</a:t>
+            </a:r>
+          </a:p>
+          <a:p>
+            <a:pPr lvl="0" indent="0" marL="0">
+              <a:buNone/>
+            </a:pPr>
+          </a:p>
+          <a:p>
+            <a:pPr lvl="0" indent="0" marL="0">
+              <a:buNone/>
+            </a:pPr>
+            <a:r>
+              <a:rPr/>
+              <a:t>The point to land: any engineered feature that involves a statistic LEARNED from data - bin edges from quantiles, a scaled interaction - is subject to the same rule as scaling. A pure arithmetic combination (this ratio) needs no fold-awareness; a learned one does.</a:t>
             </a:r>
           </a:p>
         </p:txBody>
@@ -3523,35 +3554,35 @@
             </a:pPr>
             <a:r>
               <a:rPr/>
-              <a:t>Walk the mechanism before the number. KNNImputer fills a gap using other rows’ values: it finds the nearest neighbours in feature space and averages them. “Nearest in the whole dataset” includes test rows, if it was fitted before the split existed.</a:t>
-            </a:r>
-          </a:p>
-          <a:p>
-            <a:pPr lvl="0" indent="0" marL="0">
-              <a:buNone/>
-            </a:pPr>
-          </a:p>
-          <a:p>
-            <a:pPr lvl="0" indent="0" marL="0">
-              <a:buNone/>
-            </a:pPr>
-            <a:r>
-              <a:rPr/>
-              <a:t>So a test row’s missing value can be filled using its own neighbours - which may include rows whose labels the model will later be scored on. The imputer did nothing wrong; it was simply shown data it should not have seen.</a:t>
-            </a:r>
-          </a:p>
-          <a:p>
-            <a:pPr lvl="0" indent="0" marL="0">
-              <a:buNone/>
-            </a:pPr>
-          </a:p>
-          <a:p>
-            <a:pPr lvl="0" indent="0" marL="0">
-              <a:buNone/>
-            </a:pPr>
-            <a:r>
-              <a:rPr/>
-              <a:t>Notebook 3 measures the gap. Connect it back to Lesson 1: this is the same independence argument, applied to a step nobody thinks of as learning. The imputer learns; therefore it belongs inside the training fold.</a:t>
+              <a:t>25 minutes. Let them work; circulate.</a:t>
+            </a:r>
+          </a:p>
+          <a:p>
+            <a:pPr lvl="0" indent="0" marL="0">
+              <a:buNone/>
+            </a:pPr>
+          </a:p>
+          <a:p>
+            <a:pPr lvl="0" indent="0" marL="0">
+              <a:buNone/>
+            </a:pPr>
+            <a:r>
+              <a:rPr/>
+              <a:t>The gradient descent toy is worth running interactively - change the variance ratio live and watch the iteration count move, per the handout’s “try this”. It makes the condition number argument concrete in a way the derivation alone does not.</a:t>
+            </a:r>
+          </a:p>
+          <a:p>
+            <a:pPr lvl="0" indent="0" marL="0">
+              <a:buNone/>
+            </a:pPr>
+          </a:p>
+          <a:p>
+            <a:pPr lvl="0" indent="0" marL="0">
+              <a:buNone/>
+            </a:pPr>
+            <a:r>
+              <a:rPr/>
+              <a:t>If the room is moving fast, the ColumnTransformer section is where to slow down: it is the piece they will reuse in every exercise and in the project, and getting the column selectors right is fiddlier than it looks.</a:t>
             </a:r>
           </a:p>
         </p:txBody>
@@ -3633,35 +3664,7 @@
             </a:pPr>
             <a:r>
               <a:rPr/>
-              <a:t>98 of 128. Not an edge case - the substantial majority of imputed training rows borrowed a value from at least one row the model would later be scored on.</a:t>
-            </a:r>
-          </a:p>
-          <a:p>
-            <a:pPr lvl="0" indent="0" marL="0">
-              <a:buNone/>
-            </a:pPr>
-          </a:p>
-          <a:p>
-            <a:pPr lvl="0" indent="0" marL="0">
-              <a:buNone/>
-            </a:pPr>
-            <a:r>
-              <a:rPr/>
-              <a:t>Stress that nothing in the code looks wrong. KNNImputer did exactly what it says: found the nearest neighbours in the data it was given. The error was in what it was given, and it happened one line earlier.</a:t>
-            </a:r>
-          </a:p>
-          <a:p>
-            <a:pPr lvl="0" indent="0" marL="0">
-              <a:buNone/>
-            </a:pPr>
-          </a:p>
-          <a:p>
-            <a:pPr lvl="0" indent="0" marL="0">
-              <a:buNone/>
-            </a:pPr>
-            <a:r>
-              <a:rPr/>
-              <a:t>This is the number to put on the board if only one number from today survives.</a:t>
+              <a:t>Set up the closing section. Lesson 1’s leak - selecting features on the full dataset - is visible once you know to look for it: an obviously extra step. Today’s two are not. Imputing a missing value and encoding a category both read as ordinary data cleaning, not as “training a model.” They ARE training a model, in the sense Section 8.1 makes precise: any fitted parameter is part of f, and f must be independent of the test set.</a:t>
             </a:r>
           </a:p>
         </p:txBody>
@@ -3743,35 +3746,35 @@
             </a:pPr>
             <a:r>
               <a:rPr/>
-              <a:t>zip_code has no real relationship with churn - the data was generated that way deliberately, so any apparent signal is an artefact we can measure exactly.</a:t>
-            </a:r>
-          </a:p>
-          <a:p>
-            <a:pPr lvl="0" indent="0" marL="0">
-              <a:buNone/>
-            </a:pPr>
-          </a:p>
-          <a:p>
-            <a:pPr lvl="0" indent="0" marL="0">
-              <a:buNone/>
-            </a:pPr>
-            <a:r>
-              <a:rPr/>
-              <a:t>Target encoding replaces each zip code with the average churn rate of its own customers. Computed before the split, that average includes the test rows’ labels. The feature now contains the answer, in diluted form.</a:t>
-            </a:r>
-          </a:p>
-          <a:p>
-            <a:pPr lvl="0" indent="0" marL="0">
-              <a:buNone/>
-            </a:pPr>
-          </a:p>
-          <a:p>
-            <a:pPr lvl="0" indent="0" marL="0">
-              <a:buNone/>
-            </a:pPr>
-            <a:r>
-              <a:rPr/>
-              <a:t>This is the most dangerous leak of the three, because the resulting column looks entirely reasonable in a dataframe: a number between 0 and 1, sensibly distributed, with no trace of where it came from. Nothing about it says “this was computed from the labels”.</a:t>
+              <a:t>Walk the mechanism before the number. KNNImputer fills a gap using other rows’ values: it finds the nearest neighbours in feature space and averages them. “Nearest in the whole dataset” includes test rows, if it was fitted before the split existed.</a:t>
+            </a:r>
+          </a:p>
+          <a:p>
+            <a:pPr lvl="0" indent="0" marL="0">
+              <a:buNone/>
+            </a:pPr>
+          </a:p>
+          <a:p>
+            <a:pPr lvl="0" indent="0" marL="0">
+              <a:buNone/>
+            </a:pPr>
+            <a:r>
+              <a:rPr/>
+              <a:t>So a test row’s missing value can be filled using its own neighbours - which may include rows whose labels the model will later be scored on. The imputer did nothing wrong; it was simply shown data it should not have seen.</a:t>
+            </a:r>
+          </a:p>
+          <a:p>
+            <a:pPr lvl="0" indent="0" marL="0">
+              <a:buNone/>
+            </a:pPr>
+          </a:p>
+          <a:p>
+            <a:pPr lvl="0" indent="0" marL="0">
+              <a:buNone/>
+            </a:pPr>
+            <a:r>
+              <a:rPr/>
+              <a:t>Notebook 3 measures the gap. Connect it back to Lesson 1: this is the same independence argument, applied to a step nobody thinks of as learning. The imputer learns; therefore it belongs inside the training fold.</a:t>
             </a:r>
           </a:p>
         </p:txBody>
@@ -3853,21 +3856,35 @@
             </a:pPr>
             <a:r>
               <a:rPr/>
-              <a:t>Baseline without zip: AUC 0.751. Honest encoding (sklearn’s TargetEncoder, cross-fitted inside the pipeline): 0.752 - indistinguishable, correctly, since zip carries nothing. Leaky encoding, computed before the split: 0.891.</a:t>
-            </a:r>
-          </a:p>
-          <a:p>
-            <a:pPr lvl="0" indent="0" marL="0">
-              <a:buNone/>
-            </a:pPr>
-          </a:p>
-          <a:p>
-            <a:pPr lvl="0" indent="0" marL="0">
-              <a:buNone/>
-            </a:pPr>
-            <a:r>
-              <a:rPr/>
-              <a:t>Let that number sit. It looks like a genuinely better model. It is not one - the improvement is manufactured entirely by the mechanism on the next slide. This is Lesson 1’s 77%-on-coin-flip-labels story again, produced by two unremarkable lines of preprocessing instead of an obviously wrong one.</a:t>
+              <a:t>98 of 128. Not an edge case - the substantial majority of imputed training rows borrowed a value from at least one row the model would later be scored on.</a:t>
+            </a:r>
+          </a:p>
+          <a:p>
+            <a:pPr lvl="0" indent="0" marL="0">
+              <a:buNone/>
+            </a:pPr>
+          </a:p>
+          <a:p>
+            <a:pPr lvl="0" indent="0" marL="0">
+              <a:buNone/>
+            </a:pPr>
+            <a:r>
+              <a:rPr/>
+              <a:t>Stress that nothing in the code looks wrong. KNNImputer did exactly what it says: found the nearest neighbours in the data it was given. The error was in what it was given, and it happened one line earlier.</a:t>
+            </a:r>
+          </a:p>
+          <a:p>
+            <a:pPr lvl="0" indent="0" marL="0">
+              <a:buNone/>
+            </a:pPr>
+          </a:p>
+          <a:p>
+            <a:pPr lvl="0" indent="0" marL="0">
+              <a:buNone/>
+            </a:pPr>
+            <a:r>
+              <a:rPr/>
+              <a:t>This is the number to put on the board if only one number from today survives.</a:t>
             </a:r>
           </a:p>
         </p:txBody>
@@ -4059,35 +4076,35 @@
             </a:pPr>
             <a:r>
               <a:rPr/>
-              <a:t>Handout Section 9.2 has the algebra. The intuition: for a zip code with a single customer, the target encoding IS that customer’s label, straight through. With two customers it is the average of two labels. Only as the group grows does the encoding become a genuine statistic rather than a copy of the answer.</a:t>
-            </a:r>
-          </a:p>
-          <a:p>
-            <a:pPr lvl="0" indent="0" marL="0">
-              <a:buNone/>
-            </a:pPr>
-          </a:p>
-          <a:p>
-            <a:pPr lvl="0" indent="0" marL="0">
-              <a:buNone/>
-            </a:pPr>
-            <a:r>
-              <a:rPr/>
-              <a:t>So the leak is worst exactly where the data is thinnest - which is also where high-cardinality columns spend most of their mass. Most zip codes here have a handful of customers.</a:t>
-            </a:r>
-          </a:p>
-          <a:p>
-            <a:pPr lvl="0" indent="0" marL="0">
-              <a:buNone/>
-            </a:pPr>
-          </a:p>
-          <a:p>
-            <a:pPr lvl="0" indent="0" marL="0">
-              <a:buNone/>
-            </a:pPr>
-            <a:r>
-              <a:rPr/>
-              <a:t>Give them the diagnostic to remember: if a feature’s usefulness comes mostly from its rarest levels, be suspicious. That is the shape of a leak, not of a signal.</a:t>
+              <a:t>Ninety-eight of a hundred and twenty-eight, drawn so the proportion lands.</a:t>
+            </a:r>
+          </a:p>
+          <a:p>
+            <a:pPr lvl="0" indent="0" marL="0">
+              <a:buNone/>
+            </a:pPr>
+          </a:p>
+          <a:p>
+            <a:pPr lvl="0" indent="0" marL="0">
+              <a:buNone/>
+            </a:pPr>
+            <a:r>
+              <a:rPr/>
+              <a:t>Say what was actually done: the imputer was fitted before the split, so when it filled a missing age it was allowed to look at test rows to decide what to fill it with. Three quarters of the affected training rows had a test row among the five neighbours it consulted.</a:t>
+            </a:r>
+          </a:p>
+          <a:p>
+            <a:pPr lvl="0" indent="0" marL="0">
+              <a:buNone/>
+            </a:pPr>
+          </a:p>
+          <a:p>
+            <a:pPr lvl="0" indent="0" marL="0">
+              <a:buNone/>
+            </a:pPr>
+            <a:r>
+              <a:rPr/>
+              <a:t>The sentence to leave hanging is the one from the slide before: nothing raised an error. The notebook ran, the score improved, and the improvement was the test set leaking into the training data one imputed value at a time. This is the argument for the pipeline, made in numbers.</a:t>
             </a:r>
           </a:p>
         </p:txBody>
@@ -4169,21 +4186,35 @@
             </a:pPr>
             <a:r>
               <a:rPr/>
-              <a:t>Notebook 3 shows the n_c=1 case literally: zip code Z378, one customer, churned=1, encoded value 1.000. Not correlated with the label. IS the label, relabelled as an input.</a:t>
-            </a:r>
-          </a:p>
-          <a:p>
-            <a:pPr lvl="0" indent="0" marL="0">
-              <a:buNone/>
-            </a:pPr>
-          </a:p>
-          <a:p>
-            <a:pPr lvl="0" indent="0" marL="0">
-              <a:buNone/>
-            </a:pPr>
-            <a:r>
-              <a:rPr/>
-              <a:t>Connect to Section 6.3: high cardinality means small groups means a bigger leak by exactly this formula - the curse of dimensionality and the leakage risk are the same underlying fact.</a:t>
+              <a:t>zip_code has no real relationship with churn - the data was generated that way deliberately, so any apparent signal is an artefact we can measure exactly.</a:t>
+            </a:r>
+          </a:p>
+          <a:p>
+            <a:pPr lvl="0" indent="0" marL="0">
+              <a:buNone/>
+            </a:pPr>
+          </a:p>
+          <a:p>
+            <a:pPr lvl="0" indent="0" marL="0">
+              <a:buNone/>
+            </a:pPr>
+            <a:r>
+              <a:rPr/>
+              <a:t>Target encoding replaces each zip code with the average churn rate of its own customers. Computed before the split, that average includes the test rows’ labels. The feature now contains the answer, in diluted form.</a:t>
+            </a:r>
+          </a:p>
+          <a:p>
+            <a:pPr lvl="0" indent="0" marL="0">
+              <a:buNone/>
+            </a:pPr>
+          </a:p>
+          <a:p>
+            <a:pPr lvl="0" indent="0" marL="0">
+              <a:buNone/>
+            </a:pPr>
+            <a:r>
+              <a:rPr/>
+              <a:t>This is the most dangerous leak of the three, because the resulting column looks entirely reasonable in a dataframe: a number between 0 and 1, sensibly distributed, with no trace of where it came from. Nothing about it says “this was computed from the labels”.</a:t>
             </a:r>
           </a:p>
         </p:txBody>
@@ -4265,35 +4296,21 @@
             </a:pPr>
             <a:r>
               <a:rPr/>
-              <a:t>Smoothing pulls each group’s mean towards the global mean, weighted by group size, so a one-customer zip code barely moves from the overall rate. It reduces the leak but does not remove it.</a:t>
-            </a:r>
-          </a:p>
-          <a:p>
-            <a:pPr lvl="0" indent="0" marL="0">
-              <a:buNone/>
-            </a:pPr>
-          </a:p>
-          <a:p>
-            <a:pPr lvl="0" indent="0" marL="0">
-              <a:buNone/>
-            </a:pPr>
-            <a:r>
-              <a:rPr/>
-              <a:t>Say clearly what actually removes it: fitting the encoder inside the training fold, exactly as with every other learned step. Smoothing is a refinement on top of that, not a substitute for it.</a:t>
-            </a:r>
-          </a:p>
-          <a:p>
-            <a:pPr lvl="0" indent="0" marL="0">
-              <a:buNone/>
-            </a:pPr>
-          </a:p>
-          <a:p>
-            <a:pPr lvl="0" indent="0" marL="0">
-              <a:buNone/>
-            </a:pPr>
-            <a:r>
-              <a:rPr/>
-              <a:t>This is the third time today the same rule has appeared - imputation, scaling, encoding - and that repetition is the point of the lesson. Lesson 1 stated the rule for one case; today it turns out to be the same rule every time.</a:t>
+              <a:t>Baseline without zip: AUC 0.751. Honest encoding (sklearn’s TargetEncoder, cross-fitted inside the pipeline): 0.752 - indistinguishable, correctly, since zip carries nothing. Leaky encoding, computed before the split: 0.891.</a:t>
+            </a:r>
+          </a:p>
+          <a:p>
+            <a:pPr lvl="0" indent="0" marL="0">
+              <a:buNone/>
+            </a:pPr>
+          </a:p>
+          <a:p>
+            <a:pPr lvl="0" indent="0" marL="0">
+              <a:buNone/>
+            </a:pPr>
+            <a:r>
+              <a:rPr/>
+              <a:t>Let that number sit. It looks like a genuinely better model. It is not one - the improvement is manufactured entirely by the mechanism on the next slide. This is Lesson 1’s 77%-on-coin-flip-labels story again, produced by two unremarkable lines of preprocessing instead of an obviously wrong one.</a:t>
             </a:r>
           </a:p>
         </p:txBody>
@@ -4375,21 +4392,35 @@
             </a:pPr>
             <a:r>
               <a:rPr/>
-              <a:t>One test, not a growing list of special cases: does fitting this step compute anything from the rows it is given? If yes, it goes inside the pipeline. Handout Section 9.3.</a:t>
-            </a:r>
-          </a:p>
-          <a:p>
-            <a:pPr lvl="0" indent="0" marL="0">
-              <a:buNone/>
-            </a:pPr>
-          </a:p>
-          <a:p>
-            <a:pPr lvl="0" indent="0" marL="0">
-              <a:buNone/>
-            </a:pPr>
-            <a:r>
-              <a:rPr/>
-              <a:t>Say explicitly: Lesson 5 returns to leakage a third time, for hyperparameter tuning, where the same test applies once more.</a:t>
+              <a:t>Handout Section 9.2 has the algebra. The intuition: for a zip code with a single customer, the target encoding IS that customer’s label, straight through. With two customers it is the average of two labels. Only as the group grows does the encoding become a genuine statistic rather than a copy of the answer.</a:t>
+            </a:r>
+          </a:p>
+          <a:p>
+            <a:pPr lvl="0" indent="0" marL="0">
+              <a:buNone/>
+            </a:pPr>
+          </a:p>
+          <a:p>
+            <a:pPr lvl="0" indent="0" marL="0">
+              <a:buNone/>
+            </a:pPr>
+            <a:r>
+              <a:rPr/>
+              <a:t>So the leak is worst exactly where the data is thinnest - which is also where high-cardinality columns spend most of their mass. Most zip codes here have a handful of customers.</a:t>
+            </a:r>
+          </a:p>
+          <a:p>
+            <a:pPr lvl="0" indent="0" marL="0">
+              <a:buNone/>
+            </a:pPr>
+          </a:p>
+          <a:p>
+            <a:pPr lvl="0" indent="0" marL="0">
+              <a:buNone/>
+            </a:pPr>
+            <a:r>
+              <a:rPr/>
+              <a:t>Give them the diagnostic to remember: if a feature’s usefulness comes mostly from its rarest levels, be suspicious. That is the shape of a leak, not of a signal.</a:t>
             </a:r>
           </a:p>
         </p:txBody>
@@ -4471,35 +4502,21 @@
             </a:pPr>
             <a:r>
               <a:rPr/>
-              <a:t>20 minutes. This notebook is the payoff of the lesson: three leaks, each measured against an honest pipeline on the same data.</a:t>
-            </a:r>
-          </a:p>
-          <a:p>
-            <a:pPr lvl="0" indent="0" marL="0">
-              <a:buNone/>
-            </a:pPr>
-          </a:p>
-          <a:p>
-            <a:pPr lvl="0" indent="0" marL="0">
-              <a:buNone/>
-            </a:pPr>
-            <a:r>
-              <a:rPr/>
-              <a:t>The numbers matter less than the pattern - every leak inflates the score, none of them raises an error, and all three are things a competent person does by accident. Ask them to predict the direction and rough size of each gap before running the cell.</a:t>
-            </a:r>
-          </a:p>
-          <a:p>
-            <a:pPr lvl="0" indent="0" marL="0">
-              <a:buNone/>
-            </a:pPr>
-          </a:p>
-          <a:p>
-            <a:pPr lvl="0" indent="0" marL="0">
-              <a:buNone/>
-            </a:pPr>
-            <a:r>
-              <a:rPr/>
-              <a:t>If time is short, the target encoding case is the one to keep: it is the subtlest and the one most likely to appear in their own project.</a:t>
+              <a:t>Notebook 3 shows the n_c=1 case literally: zip code Z378, one customer, churned=1, encoded value 1.000. Not correlated with the label. IS the label, relabelled as an input.</a:t>
+            </a:r>
+          </a:p>
+          <a:p>
+            <a:pPr lvl="0" indent="0" marL="0">
+              <a:buNone/>
+            </a:pPr>
+          </a:p>
+          <a:p>
+            <a:pPr lvl="0" indent="0" marL="0">
+              <a:buNone/>
+            </a:pPr>
+            <a:r>
+              <a:rPr/>
+              <a:t>Connect to Section 6.3: high cardinality means small groups means a bigger leak by exactly this formula - the curse of dimensionality and the leakage risk are the same underlying fact.</a:t>
             </a:r>
           </a:p>
         </p:txBody>
@@ -4581,35 +4598,35 @@
             </a:pPr>
             <a:r>
               <a:rPr/>
-              <a:t>Draw the thread together explicitly. Lesson 1 said nothing is learned before the split, using feature selection as the example. Today every preprocessing step turned out to be a learning step: an imputer learns a mean or a set of neighbours, a scaler learns a mean and a standard deviation, an encoder learns a mapping from categories to numbers.</a:t>
-            </a:r>
-          </a:p>
-          <a:p>
-            <a:pPr lvl="0" indent="0" marL="0">
-              <a:buNone/>
-            </a:pPr>
-          </a:p>
-          <a:p>
-            <a:pPr lvl="0" indent="0" marL="0">
-              <a:buNone/>
-            </a:pPr>
-            <a:r>
-              <a:rPr/>
-              <a:t>So the rule did not get more complicated - it got more general. And the pipeline is not tidiness, it is the mechanism that enforces the rule structurally, which is why we now build one for everything.</a:t>
-            </a:r>
-          </a:p>
-          <a:p>
-            <a:pPr lvl="0" indent="0" marL="0">
-              <a:buNone/>
-            </a:pPr>
-          </a:p>
-          <a:p>
-            <a:pPr lvl="0" indent="0" marL="0">
-              <a:buNone/>
-            </a:pPr>
-            <a:r>
-              <a:rPr/>
-              <a:t>Preview Lesson 3 in one sentence: with the data prepared honestly, we can finally fit something and look at what the fitting actually does.</a:t>
+              <a:t>Smoothing pulls each group’s mean towards the global mean, weighted by group size, so a one-customer zip code barely moves from the overall rate. It reduces the leak but does not remove it.</a:t>
+            </a:r>
+          </a:p>
+          <a:p>
+            <a:pPr lvl="0" indent="0" marL="0">
+              <a:buNone/>
+            </a:pPr>
+          </a:p>
+          <a:p>
+            <a:pPr lvl="0" indent="0" marL="0">
+              <a:buNone/>
+            </a:pPr>
+            <a:r>
+              <a:rPr/>
+              <a:t>Say clearly what actually removes it: fitting the encoder inside the training fold, exactly as with every other learned step. Smoothing is a refinement on top of that, not a substitute for it.</a:t>
+            </a:r>
+          </a:p>
+          <a:p>
+            <a:pPr lvl="0" indent="0" marL="0">
+              <a:buNone/>
+            </a:pPr>
+          </a:p>
+          <a:p>
+            <a:pPr lvl="0" indent="0" marL="0">
+              <a:buNone/>
+            </a:pPr>
+            <a:r>
+              <a:rPr/>
+              <a:t>This is the third time today the same rule has appeared - imputation, scaling, encoding - and that repetition is the point of the lesson. Lesson 1 stated the rule for one case; today it turns out to be the same rule every time.</a:t>
             </a:r>
           </a:p>
         </p:txBody>
@@ -4691,35 +4708,21 @@
             </a:pPr>
             <a:r>
               <a:rPr/>
-              <a:t>Set it explicitly. The exercise reuses churn_data.py with a different seed, so results will not match today’s numbers exactly - that is intentional, it stops copy-pasted answers from working.</a:t>
-            </a:r>
-          </a:p>
-          <a:p>
-            <a:pPr lvl="0" indent="0" marL="0">
-              <a:buNone/>
-            </a:pPr>
-          </a:p>
-          <a:p>
-            <a:pPr lvl="0" indent="0" marL="0">
-              <a:buNone/>
-            </a:pPr>
-            <a:r>
-              <a:rPr/>
-              <a:t>Remind them: as in Exercise 1, there are no marks for accuracy. Marks are for methodological correctness, and specifically here for correctly identifying which preprocessing steps needed to be inside the pipeline and demonstrating, with a number, what leaving one out would have cost.</a:t>
-            </a:r>
-          </a:p>
-          <a:p>
-            <a:pPr lvl="0" indent="0" marL="0">
-              <a:buNone/>
-            </a:pPr>
-          </a:p>
-          <a:p>
-            <a:pPr lvl="0" indent="0" marL="0">
-              <a:buNone/>
-            </a:pPr>
-            <a:r>
-              <a:rPr/>
-              <a:t>Also point them at the quiz - the reasoning-tagged questions are the closest thing to the exam they will see before the sample papers.</a:t>
+              <a:t>One test, not a growing list of special cases: does fitting this step compute anything from the rows it is given? If yes, it goes inside the pipeline. Handout Section 9.3.</a:t>
+            </a:r>
+          </a:p>
+          <a:p>
+            <a:pPr lvl="0" indent="0" marL="0">
+              <a:buNone/>
+            </a:pPr>
+          </a:p>
+          <a:p>
+            <a:pPr lvl="0" indent="0" marL="0">
+              <a:buNone/>
+            </a:pPr>
+            <a:r>
+              <a:rPr/>
+              <a:t>Say explicitly: Lesson 5 returns to leakage a third time, for hyperparameter tuning, where the same test applies once more.</a:t>
             </a:r>
           </a:p>
         </p:txBody>
@@ -4801,35 +4804,35 @@
             </a:pPr>
             <a:r>
               <a:rPr/>
-              <a:t>Set the exercise explicitly and give the deadline - Friday 9 October, at the start of Lesson 3.</a:t>
-            </a:r>
-          </a:p>
-          <a:p>
-            <a:pPr lvl="0" indent="0" marL="0">
-              <a:buNone/>
-            </a:pPr>
-          </a:p>
-          <a:p>
-            <a:pPr lvl="0" indent="0" marL="0">
-              <a:buNone/>
-            </a:pPr>
-            <a:r>
-              <a:rPr/>
-              <a:t>Point out that it uses the same churn dataset, so the exploration they did today carries over, and that the marks are again on methodology: a pipeline that is correct but modest beats a better score obtained by preparing the full dataset before splitting.</a:t>
-            </a:r>
-          </a:p>
-          <a:p>
-            <a:pPr lvl="0" indent="0" marL="0">
-              <a:buNone/>
-            </a:pPr>
-          </a:p>
-          <a:p>
-            <a:pPr lvl="0" indent="0" marL="0">
-              <a:buNone/>
-            </a:pPr>
-            <a:r>
-              <a:rPr/>
-              <a:t>Remind them the Lesson 1 exercise is due today if anyone has not handed it in, and that the project topic must be confirmed by Lesson 4 - which is two weeks away, so now is the time to be reading dataset descriptions.</a:t>
+              <a:t>20 minutes. This notebook is the payoff of the lesson: three leaks, each measured against an honest pipeline on the same data.</a:t>
+            </a:r>
+          </a:p>
+          <a:p>
+            <a:pPr lvl="0" indent="0" marL="0">
+              <a:buNone/>
+            </a:pPr>
+          </a:p>
+          <a:p>
+            <a:pPr lvl="0" indent="0" marL="0">
+              <a:buNone/>
+            </a:pPr>
+            <a:r>
+              <a:rPr/>
+              <a:t>The numbers matter less than the pattern - every leak inflates the score, none of them raises an error, and all three are things a competent person does by accident. Ask them to predict the direction and rough size of each gap before running the cell.</a:t>
+            </a:r>
+          </a:p>
+          <a:p>
+            <a:pPr lvl="0" indent="0" marL="0">
+              <a:buNone/>
+            </a:pPr>
+          </a:p>
+          <a:p>
+            <a:pPr lvl="0" indent="0" marL="0">
+              <a:buNone/>
+            </a:pPr>
+            <a:r>
+              <a:rPr/>
+              <a:t>If time is short, the target encoding case is the one to keep: it is the subtlest and the one most likely to appear in their own project.</a:t>
             </a:r>
           </a:p>
         </p:txBody>
@@ -4852,6 +4855,226 @@
             <a:fld id="{18BDFEC3-8487-43E8-A154-7C12CBC1FFF2}" type="slidenum">
               <a:rPr lang="en-US"/>
               <a:t>48</a:t>
+            </a:fld>
+            <a:endParaRPr lang="en-US"/>
+          </a:p>
+        </p:txBody>
+      </p:sp>
+    </p:spTree>
+  </p:cSld>
+</p:notes>
+</file>
+
+<file path=ppt/notesSlides/notesSlide48.xml><?xml version="1.0" encoding="utf-8"?>
+<p:notes xmlns:a="http://schemas.openxmlformats.org/drawingml/2006/main" xmlns:r="http://schemas.openxmlformats.org/officeDocument/2006/relationships" xmlns:p="http://schemas.openxmlformats.org/presentationml/2006/main">
+  <p:cSld>
+    <p:spTree>
+      <p:nvGrpSpPr>
+        <p:cNvPr id="1" name=""/>
+        <p:cNvGrpSpPr/>
+        <p:nvPr/>
+      </p:nvGrpSpPr>
+      <p:grpSpPr>
+        <a:xfrm>
+          <a:off x="0" y="0"/>
+          <a:ext cx="0" cy="0"/>
+          <a:chOff x="0" y="0"/>
+          <a:chExt cx="0" cy="0"/>
+        </a:xfrm>
+      </p:grpSpPr>
+      <p:sp>
+        <p:nvSpPr>
+          <p:cNvPr id="2" name="Slide Image Placeholder 1"/>
+          <p:cNvSpPr>
+            <a:spLocks noGrp="1" noRot="1" noChangeAspect="1"/>
+          </p:cNvSpPr>
+          <p:nvPr>
+            <p:ph type="sldImg"/>
+          </p:nvPr>
+        </p:nvSpPr>
+        <p:spPr/>
+      </p:sp>
+      <p:sp>
+        <p:nvSpPr>
+          <p:cNvPr id="3" name="Notes Placeholder 2"/>
+          <p:cNvSpPr>
+            <a:spLocks noGrp="1"/>
+          </p:cNvSpPr>
+          <p:nvPr>
+            <p:ph type="body" idx="1"/>
+          </p:nvPr>
+        </p:nvSpPr>
+        <p:spPr/>
+        <p:txBody>
+          <a:bodyPr/>
+          <a:lstStyle/>
+          <a:p>
+            <a:pPr lvl="0" indent="0" marL="0">
+              <a:buNone/>
+            </a:pPr>
+            <a:r>
+              <a:rPr/>
+              <a:t>Draw the thread together explicitly. Lesson 1 said nothing is learned before the split, using feature selection as the example. Today every preprocessing step turned out to be a learning step: an imputer learns a mean or a set of neighbours, a scaler learns a mean and a standard deviation, an encoder learns a mapping from categories to numbers.</a:t>
+            </a:r>
+          </a:p>
+          <a:p>
+            <a:pPr lvl="0" indent="0" marL="0">
+              <a:buNone/>
+            </a:pPr>
+          </a:p>
+          <a:p>
+            <a:pPr lvl="0" indent="0" marL="0">
+              <a:buNone/>
+            </a:pPr>
+            <a:r>
+              <a:rPr/>
+              <a:t>So the rule did not get more complicated - it got more general. And the pipeline is not tidiness, it is the mechanism that enforces the rule structurally, which is why we now build one for everything.</a:t>
+            </a:r>
+          </a:p>
+          <a:p>
+            <a:pPr lvl="0" indent="0" marL="0">
+              <a:buNone/>
+            </a:pPr>
+          </a:p>
+          <a:p>
+            <a:pPr lvl="0" indent="0" marL="0">
+              <a:buNone/>
+            </a:pPr>
+            <a:r>
+              <a:rPr/>
+              <a:t>Preview Lesson 3 in one sentence: with the data prepared honestly, we can finally fit something and look at what the fitting actually does.</a:t>
+            </a:r>
+          </a:p>
+        </p:txBody>
+      </p:sp>
+      <p:sp>
+        <p:nvSpPr>
+          <p:cNvPr id="4" name="Slide Number Placeholder 3"/>
+          <p:cNvSpPr>
+            <a:spLocks noGrp="1"/>
+          </p:cNvSpPr>
+          <p:nvPr>
+            <p:ph type="sldNum" sz="quarter" idx="10"/>
+          </p:nvPr>
+        </p:nvSpPr>
+        <p:spPr/>
+        <p:txBody>
+          <a:bodyPr/>
+          <a:lstStyle/>
+          <a:p>
+            <a:fld id="{18BDFEC3-8487-43E8-A154-7C12CBC1FFF2}" type="slidenum">
+              <a:rPr lang="en-US"/>
+              <a:t>49</a:t>
+            </a:fld>
+            <a:endParaRPr lang="en-US"/>
+          </a:p>
+        </p:txBody>
+      </p:sp>
+    </p:spTree>
+  </p:cSld>
+</p:notes>
+</file>
+
+<file path=ppt/notesSlides/notesSlide49.xml><?xml version="1.0" encoding="utf-8"?>
+<p:notes xmlns:a="http://schemas.openxmlformats.org/drawingml/2006/main" xmlns:r="http://schemas.openxmlformats.org/officeDocument/2006/relationships" xmlns:p="http://schemas.openxmlformats.org/presentationml/2006/main">
+  <p:cSld>
+    <p:spTree>
+      <p:nvGrpSpPr>
+        <p:cNvPr id="1" name=""/>
+        <p:cNvGrpSpPr/>
+        <p:nvPr/>
+      </p:nvGrpSpPr>
+      <p:grpSpPr>
+        <a:xfrm>
+          <a:off x="0" y="0"/>
+          <a:ext cx="0" cy="0"/>
+          <a:chOff x="0" y="0"/>
+          <a:chExt cx="0" cy="0"/>
+        </a:xfrm>
+      </p:grpSpPr>
+      <p:sp>
+        <p:nvSpPr>
+          <p:cNvPr id="2" name="Slide Image Placeholder 1"/>
+          <p:cNvSpPr>
+            <a:spLocks noGrp="1" noRot="1" noChangeAspect="1"/>
+          </p:cNvSpPr>
+          <p:nvPr>
+            <p:ph type="sldImg"/>
+          </p:nvPr>
+        </p:nvSpPr>
+        <p:spPr/>
+      </p:sp>
+      <p:sp>
+        <p:nvSpPr>
+          <p:cNvPr id="3" name="Notes Placeholder 2"/>
+          <p:cNvSpPr>
+            <a:spLocks noGrp="1"/>
+          </p:cNvSpPr>
+          <p:nvPr>
+            <p:ph type="body" idx="1"/>
+          </p:nvPr>
+        </p:nvSpPr>
+        <p:spPr/>
+        <p:txBody>
+          <a:bodyPr/>
+          <a:lstStyle/>
+          <a:p>
+            <a:pPr lvl="0" indent="0" marL="0">
+              <a:buNone/>
+            </a:pPr>
+            <a:r>
+              <a:rPr/>
+              <a:t>Set it explicitly. The exercise reuses churn_data.py with a different seed, so results will not match today’s numbers exactly - that is intentional, it stops copy-pasted answers from working.</a:t>
+            </a:r>
+          </a:p>
+          <a:p>
+            <a:pPr lvl="0" indent="0" marL="0">
+              <a:buNone/>
+            </a:pPr>
+          </a:p>
+          <a:p>
+            <a:pPr lvl="0" indent="0" marL="0">
+              <a:buNone/>
+            </a:pPr>
+            <a:r>
+              <a:rPr/>
+              <a:t>Remind them: as in Exercise 1, there are no marks for accuracy. Marks are for methodological correctness, and specifically here for correctly identifying which preprocessing steps needed to be inside the pipeline and demonstrating, with a number, what leaving one out would have cost.</a:t>
+            </a:r>
+          </a:p>
+          <a:p>
+            <a:pPr lvl="0" indent="0" marL="0">
+              <a:buNone/>
+            </a:pPr>
+          </a:p>
+          <a:p>
+            <a:pPr lvl="0" indent="0" marL="0">
+              <a:buNone/>
+            </a:pPr>
+            <a:r>
+              <a:rPr/>
+              <a:t>Also point them at the quiz - the reasoning-tagged questions are the closest thing to the exam they will see before the sample papers.</a:t>
+            </a:r>
+          </a:p>
+        </p:txBody>
+      </p:sp>
+      <p:sp>
+        <p:nvSpPr>
+          <p:cNvPr id="4" name="Slide Number Placeholder 3"/>
+          <p:cNvSpPr>
+            <a:spLocks noGrp="1"/>
+          </p:cNvSpPr>
+          <p:nvPr>
+            <p:ph type="sldNum" sz="quarter" idx="10"/>
+          </p:nvPr>
+        </p:nvSpPr>
+        <p:spPr/>
+        <p:txBody>
+          <a:bodyPr/>
+          <a:lstStyle/>
+          <a:p>
+            <a:fld id="{18BDFEC3-8487-43E8-A154-7C12CBC1FFF2}" type="slidenum">
+              <a:rPr lang="en-US"/>
+              <a:t>50</a:t>
             </a:fld>
             <a:endParaRPr lang="en-US"/>
           </a:p>
@@ -4934,6 +5157,116 @@
             <a:fld id="{18BDFEC3-8487-43E8-A154-7C12CBC1FFF2}" type="slidenum">
               <a:rPr lang="en-US"/>
               <a:t>6</a:t>
+            </a:fld>
+            <a:endParaRPr lang="en-US"/>
+          </a:p>
+        </p:txBody>
+      </p:sp>
+    </p:spTree>
+  </p:cSld>
+</p:notes>
+</file>
+
+<file path=ppt/notesSlides/notesSlide50.xml><?xml version="1.0" encoding="utf-8"?>
+<p:notes xmlns:a="http://schemas.openxmlformats.org/drawingml/2006/main" xmlns:r="http://schemas.openxmlformats.org/officeDocument/2006/relationships" xmlns:p="http://schemas.openxmlformats.org/presentationml/2006/main">
+  <p:cSld>
+    <p:spTree>
+      <p:nvGrpSpPr>
+        <p:cNvPr id="1" name=""/>
+        <p:cNvGrpSpPr/>
+        <p:nvPr/>
+      </p:nvGrpSpPr>
+      <p:grpSpPr>
+        <a:xfrm>
+          <a:off x="0" y="0"/>
+          <a:ext cx="0" cy="0"/>
+          <a:chOff x="0" y="0"/>
+          <a:chExt cx="0" cy="0"/>
+        </a:xfrm>
+      </p:grpSpPr>
+      <p:sp>
+        <p:nvSpPr>
+          <p:cNvPr id="2" name="Slide Image Placeholder 1"/>
+          <p:cNvSpPr>
+            <a:spLocks noGrp="1" noRot="1" noChangeAspect="1"/>
+          </p:cNvSpPr>
+          <p:nvPr>
+            <p:ph type="sldImg"/>
+          </p:nvPr>
+        </p:nvSpPr>
+        <p:spPr/>
+      </p:sp>
+      <p:sp>
+        <p:nvSpPr>
+          <p:cNvPr id="3" name="Notes Placeholder 2"/>
+          <p:cNvSpPr>
+            <a:spLocks noGrp="1"/>
+          </p:cNvSpPr>
+          <p:nvPr>
+            <p:ph type="body" idx="1"/>
+          </p:nvPr>
+        </p:nvSpPr>
+        <p:spPr/>
+        <p:txBody>
+          <a:bodyPr/>
+          <a:lstStyle/>
+          <a:p>
+            <a:pPr lvl="0" indent="0" marL="0">
+              <a:buNone/>
+            </a:pPr>
+            <a:r>
+              <a:rPr/>
+              <a:t>Set the exercise explicitly and give the deadline - Friday 9 October, at the start of Lesson 3.</a:t>
+            </a:r>
+          </a:p>
+          <a:p>
+            <a:pPr lvl="0" indent="0" marL="0">
+              <a:buNone/>
+            </a:pPr>
+          </a:p>
+          <a:p>
+            <a:pPr lvl="0" indent="0" marL="0">
+              <a:buNone/>
+            </a:pPr>
+            <a:r>
+              <a:rPr/>
+              <a:t>Point out that it uses the same churn dataset, so the exploration they did today carries over, and that the marks are again on methodology: a pipeline that is correct but modest beats a better score obtained by preparing the full dataset before splitting.</a:t>
+            </a:r>
+          </a:p>
+          <a:p>
+            <a:pPr lvl="0" indent="0" marL="0">
+              <a:buNone/>
+            </a:pPr>
+          </a:p>
+          <a:p>
+            <a:pPr lvl="0" indent="0" marL="0">
+              <a:buNone/>
+            </a:pPr>
+            <a:r>
+              <a:rPr/>
+              <a:t>Remind them the Lesson 1 exercise is due today if anyone has not handed it in, and that the project topic must be confirmed by Lesson 4 - which is two weeks away, so now is the time to be reading dataset descriptions.</a:t>
+            </a:r>
+          </a:p>
+        </p:txBody>
+      </p:sp>
+      <p:sp>
+        <p:nvSpPr>
+          <p:cNvPr id="4" name="Slide Number Placeholder 3"/>
+          <p:cNvSpPr>
+            <a:spLocks noGrp="1"/>
+          </p:cNvSpPr>
+          <p:nvPr>
+            <p:ph type="sldNum" sz="quarter" idx="10"/>
+          </p:nvPr>
+        </p:nvSpPr>
+        <p:spPr/>
+        <p:txBody>
+          <a:bodyPr/>
+          <a:lstStyle/>
+          <a:p>
+            <a:fld id="{18BDFEC3-8487-43E8-A154-7C12CBC1FFF2}" type="slidenum">
+              <a:rPr lang="en-US"/>
+              <a:t>51</a:t>
             </a:fld>
             <a:endParaRPr lang="en-US"/>
           </a:p>
@@ -8773,8 +9106,8 @@
         </p:nvSpPr>
         <p:spPr>
           <a:xfrm>
-            <a:off x="457200" y="205740"/>
-            <a:ext cx="8229600" cy="874395"/>
+            <a:off x="457200" y="205979"/>
+            <a:ext cx="8229600" cy="857250"/>
           </a:xfrm>
         </p:spPr>
         <p:txBody>
@@ -8793,18 +9126,18 @@
       </p:sp>
       <p:sp>
         <p:nvSpPr>
-          <p:cNvPr id="4" name="Text Placeholder 3"/>
-          <p:cNvSpPr>
-            <a:spLocks noGrp="1"/>
-          </p:cNvSpPr>
-          <p:nvPr>
-            <p:ph idx="2" sz="half" type="body"/>
+          <p:cNvPr id="3" name="Content Placeholder 2"/>
+          <p:cNvSpPr>
+            <a:spLocks noGrp="1"/>
+          </p:cNvSpPr>
+          <p:nvPr>
+            <p:ph idx="1"/>
           </p:nvPr>
         </p:nvSpPr>
         <p:spPr>
           <a:xfrm>
-            <a:off x="457200" y="1183005"/>
-            <a:ext cx="8229600" cy="1748790"/>
+            <a:off x="457200" y="1200151"/>
+            <a:ext cx="8229600" cy="3394472"/>
           </a:xfrm>
         </p:spPr>
         <p:txBody>
@@ -8858,6 +9191,58 @@
             <a:r>
               <a:rPr/>
               <a:t> — keeps MAR signal alive</a:t>
+            </a:r>
+          </a:p>
+        </p:txBody>
+      </p:sp>
+    </p:spTree>
+  </p:cSld>
+</p:sld>
+</file>
+
+<file path=ppt/slides/slide13.xml><?xml version="1.0" encoding="utf-8"?>
+<p:sld xmlns:a="http://schemas.openxmlformats.org/drawingml/2006/main" xmlns:r="http://schemas.openxmlformats.org/officeDocument/2006/relationships" xmlns:p="http://schemas.openxmlformats.org/presentationml/2006/main">
+  <p:cSld>
+    <p:spTree>
+      <p:nvGrpSpPr>
+        <p:cNvPr id="1" name=""/>
+        <p:cNvGrpSpPr/>
+        <p:nvPr/>
+      </p:nvGrpSpPr>
+      <p:grpSpPr>
+        <a:xfrm>
+          <a:off x="0" y="0"/>
+          <a:ext cx="0" cy="0"/>
+          <a:chOff x="0" y="0"/>
+          <a:chExt cx="0" cy="0"/>
+        </a:xfrm>
+      </p:grpSpPr>
+      <p:sp>
+        <p:nvSpPr>
+          <p:cNvPr id="2" name="Title 1"/>
+          <p:cNvSpPr>
+            <a:spLocks noGrp="1"/>
+          </p:cNvSpPr>
+          <p:nvPr>
+            <p:ph type="title"/>
+          </p:nvPr>
+        </p:nvSpPr>
+        <p:spPr>
+          <a:xfrm>
+            <a:off x="457200" y="205979"/>
+            <a:ext cx="8229600" cy="857250"/>
+          </a:xfrm>
+        </p:spPr>
+        <p:txBody>
+          <a:bodyPr/>
+          <a:lstStyle/>
+          <a:p>
+            <a:pPr lvl="0" indent="0" marL="0">
+              <a:buNone/>
+            </a:pPr>
+            <a:r>
+              <a:rPr/>
+              <a:t>Choosing among the four</a:t>
             </a:r>
           </a:p>
         </p:txBody>
@@ -8878,8 +9263,8 @@
         </p:blipFill>
         <p:spPr bwMode="auto">
           <a:xfrm>
-            <a:off x="2559821" y="3034665"/>
-            <a:ext cx="4024357" cy="1491615"/>
+            <a:off x="457200" y="1328539"/>
+            <a:ext cx="8229600" cy="3035300"/>
           </a:xfrm>
           <a:prstGeom prst="rect">
             <a:avLst/>
@@ -8897,7 +9282,7 @@
 </p:sld>
 </file>
 
-<file path=ppt/slides/slide13.xml><?xml version="1.0" encoding="utf-8"?>
+<file path=ppt/slides/slide14.xml><?xml version="1.0" encoding="utf-8"?>
 <p:sld xmlns:a="http://schemas.openxmlformats.org/drawingml/2006/main" xmlns:r="http://schemas.openxmlformats.org/officeDocument/2006/relationships" xmlns:p="http://schemas.openxmlformats.org/presentationml/2006/main">
   <p:cSld>
     <p:spTree>
@@ -9009,7 +9394,7 @@
 </p:sld>
 </file>
 
-<file path=ppt/slides/slide14.xml><?xml version="1.0" encoding="utf-8"?>
+<file path=ppt/slides/slide15.xml><?xml version="1.0" encoding="utf-8"?>
 <p:sld xmlns:a="http://schemas.openxmlformats.org/drawingml/2006/main" xmlns:r="http://schemas.openxmlformats.org/officeDocument/2006/relationships" xmlns:p="http://schemas.openxmlformats.org/presentationml/2006/main">
   <p:cSld>
     <p:spTree>
@@ -9091,7 +9476,7 @@
 </p:sld>
 </file>
 
-<file path=ppt/slides/slide15.xml><?xml version="1.0" encoding="utf-8"?>
+<file path=ppt/slides/slide16.xml><?xml version="1.0" encoding="utf-8"?>
 <p:sld xmlns:a="http://schemas.openxmlformats.org/drawingml/2006/main" xmlns:r="http://schemas.openxmlformats.org/officeDocument/2006/relationships" xmlns:p="http://schemas.openxmlformats.org/presentationml/2006/main">
   <p:cSld>
     <p:spTree>
@@ -9173,140 +9558,6 @@
 </p:sld>
 </file>
 
-<file path=ppt/slides/slide16.xml><?xml version="1.0" encoding="utf-8"?>
-<p:sld xmlns:a="http://schemas.openxmlformats.org/drawingml/2006/main" xmlns:r="http://schemas.openxmlformats.org/officeDocument/2006/relationships" xmlns:p="http://schemas.openxmlformats.org/presentationml/2006/main">
-  <p:cSld>
-    <p:spTree>
-      <p:nvGrpSpPr>
-        <p:cNvPr id="1" name=""/>
-        <p:cNvGrpSpPr/>
-        <p:nvPr/>
-      </p:nvGrpSpPr>
-      <p:grpSpPr>
-        <a:xfrm>
-          <a:off x="0" y="0"/>
-          <a:ext cx="0" cy="0"/>
-          <a:chOff x="0" y="0"/>
-          <a:chExt cx="0" cy="0"/>
-        </a:xfrm>
-      </p:grpSpPr>
-      <p:sp>
-        <p:nvSpPr>
-          <p:cNvPr id="2" name="Title 1"/>
-          <p:cNvSpPr>
-            <a:spLocks noGrp="1"/>
-          </p:cNvSpPr>
-          <p:nvPr>
-            <p:ph type="title"/>
-          </p:nvPr>
-        </p:nvSpPr>
-        <p:spPr>
-          <a:xfrm>
-            <a:off x="457200" y="205979"/>
-            <a:ext cx="8229600" cy="857250"/>
-          </a:xfrm>
-        </p:spPr>
-        <p:txBody>
-          <a:bodyPr/>
-          <a:lstStyle/>
-          <a:p>
-            <a:pPr lvl="0" indent="0" marL="0">
-              <a:buNone/>
-            </a:pPr>
-            <a:r>
-              <a:rPr/>
-              <a:t>What neither rule can tell you</a:t>
-            </a:r>
-          </a:p>
-        </p:txBody>
-      </p:sp>
-      <p:sp>
-        <p:nvSpPr>
-          <p:cNvPr id="3" name="Content Placeholder 2"/>
-          <p:cNvSpPr>
-            <a:spLocks noGrp="1"/>
-          </p:cNvSpPr>
-          <p:nvPr>
-            <p:ph idx="1"/>
-          </p:nvPr>
-        </p:nvSpPr>
-        <p:spPr>
-          <a:xfrm>
-            <a:off x="457200" y="1200151"/>
-            <a:ext cx="8229600" cy="3394472"/>
-          </a:xfrm>
-        </p:spPr>
-        <p:txBody>
-          <a:bodyPr/>
-          <a:lstStyle/>
-          <a:p>
-            <a:pPr lvl="0" indent="0" marL="0">
-              <a:buNone/>
-            </a:pPr>
-            <a:r>
-              <a:rPr>
-                <a:latin typeface="Courier"/>
-              </a:rPr>
-              <a:t>tenure_months</a:t>
-            </a:r>
-            <a:r>
-              <a:rPr/>
-              <a:t> of </a:t>
-            </a:r>
-            <a:r>
-              <a:rPr b="1"/>
-              <a:t>-3</a:t>
-            </a:r>
-            <a:r>
-              <a:rPr/>
-              <a:t> is impossible. Neither rule flags it.</a:t>
-            </a:r>
-          </a:p>
-          <a:p>
-            <a:pPr lvl="0"/>
-            <a:r>
-              <a:rPr/>
-              <a:t>-3 is not </a:t>
-            </a:r>
-            <a:r>
-              <a:rPr i="1"/>
-              <a:t>extreme</a:t>
-            </a:r>
-            <a:r>
-              <a:rPr/>
-              <a:t> relative to a column spanning 0–72</a:t>
-            </a:r>
-          </a:p>
-          <a:p>
-            <a:pPr lvl="0"/>
-            <a:r>
-              <a:rPr/>
-              <a:t>It is not </a:t>
-            </a:r>
-            <a:r>
-              <a:rPr i="1"/>
-              <a:t>unusual</a:t>
-            </a:r>
-            <a:r>
-              <a:rPr/>
-              <a:t>. It is </a:t>
-            </a:r>
-            <a:r>
-              <a:rPr i="1"/>
-              <a:t>invalid</a:t>
-            </a:r>
-            <a:r>
-              <a:rPr/>
-              <a:t> — a different question entirely</a:t>
-            </a:r>
-          </a:p>
-        </p:txBody>
-      </p:sp>
-    </p:spTree>
-  </p:cSld>
-</p:sld>
-</file>
-
 <file path=ppt/slides/slide17.xml><?xml version="1.0" encoding="utf-8"?>
 <p:sld xmlns:a="http://schemas.openxmlformats.org/drawingml/2006/main" xmlns:r="http://schemas.openxmlformats.org/officeDocument/2006/relationships" xmlns:p="http://schemas.openxmlformats.org/presentationml/2006/main">
   <p:cSld>
@@ -9349,7 +9600,7 @@
             </a:pPr>
             <a:r>
               <a:rPr/>
-              <a:t>Once something is flagged</a:t>
+              <a:t>What neither rule can tell you</a:t>
             </a:r>
           </a:p>
         </p:txBody>
@@ -9378,60 +9629,60 @@
               <a:buNone/>
             </a:pPr>
             <a:r>
-              <a:rPr/>
-              <a:t>Detection finds candidates. What to do next is a </a:t>
+              <a:rPr>
+                <a:latin typeface="Courier"/>
+              </a:rPr>
+              <a:t>tenure_months</a:t>
+            </a:r>
+            <a:r>
+              <a:rPr/>
+              <a:t> of </a:t>
             </a:r>
             <a:r>
               <a:rPr b="1"/>
-              <a:t>domain</a:t>
-            </a:r>
-            <a:r>
-              <a:rPr/>
-              <a:t> decision.</a:t>
+              <a:t>-3</a:t>
+            </a:r>
+            <a:r>
+              <a:rPr/>
+              <a:t> is impossible. Neither rule flags it.</a:t>
             </a:r>
           </a:p>
           <a:p>
             <a:pPr lvl="0"/>
             <a:r>
-              <a:rPr b="1"/>
-              <a:t>Cap</a:t>
-            </a:r>
-            <a:r>
-              <a:rPr/>
-              <a:t> it at the fence (Winsorise)</a:t>
+              <a:rPr/>
+              <a:t>-3 is not </a:t>
+            </a:r>
+            <a:r>
+              <a:rPr i="1"/>
+              <a:t>extreme</a:t>
+            </a:r>
+            <a:r>
+              <a:rPr/>
+              <a:t> relative to a column spanning 0–72</a:t>
             </a:r>
           </a:p>
           <a:p>
             <a:pPr lvl="0"/>
             <a:r>
-              <a:rPr b="1"/>
-              <a:t>Remove</a:t>
-            </a:r>
-            <a:r>
-              <a:rPr/>
-              <a:t> the row</a:t>
-            </a:r>
-          </a:p>
-          <a:p>
-            <a:pPr lvl="0"/>
-            <a:r>
-              <a:rPr b="1"/>
-              <a:t>Correct</a:t>
-            </a:r>
-            <a:r>
-              <a:rPr/>
-              <a:t> it, if the true value is recoverable</a:t>
-            </a:r>
-          </a:p>
-          <a:p>
-            <a:pPr lvl="0"/>
-            <a:r>
-              <a:rPr b="1"/>
-              <a:t>Leave</a:t>
-            </a:r>
-            <a:r>
-              <a:rPr/>
-              <a:t> it — unusual is not the same as wrong</a:t>
+              <a:rPr/>
+              <a:t>It is not </a:t>
+            </a:r>
+            <a:r>
+              <a:rPr i="1"/>
+              <a:t>unusual</a:t>
+            </a:r>
+            <a:r>
+              <a:rPr/>
+              <a:t>. It is </a:t>
+            </a:r>
+            <a:r>
+              <a:rPr i="1"/>
+              <a:t>invalid</a:t>
+            </a:r>
+            <a:r>
+              <a:rPr/>
+              <a:t> — a different question entirely</a:t>
             </a:r>
           </a:p>
         </p:txBody>
@@ -9483,7 +9734,7 @@
             </a:pPr>
             <a:r>
               <a:rPr/>
-              <a:t>Notebook 1, live</a:t>
+              <a:t>Once something is flagged</a:t>
             </a:r>
           </a:p>
         </p:txBody>
@@ -9513,7 +9764,59 @@
             </a:pPr>
             <a:r>
               <a:rPr/>
-              <a:t>Exploration, missingness mechanisms, both outlier rules — from scratch.</a:t>
+              <a:t>Detection finds candidates. What to do next is a </a:t>
+            </a:r>
+            <a:r>
+              <a:rPr b="1"/>
+              <a:t>domain</a:t>
+            </a:r>
+            <a:r>
+              <a:rPr/>
+              <a:t> decision.</a:t>
+            </a:r>
+          </a:p>
+          <a:p>
+            <a:pPr lvl="0"/>
+            <a:r>
+              <a:rPr b="1"/>
+              <a:t>Cap</a:t>
+            </a:r>
+            <a:r>
+              <a:rPr/>
+              <a:t> it at the fence (Winsorise)</a:t>
+            </a:r>
+          </a:p>
+          <a:p>
+            <a:pPr lvl="0"/>
+            <a:r>
+              <a:rPr b="1"/>
+              <a:t>Remove</a:t>
+            </a:r>
+            <a:r>
+              <a:rPr/>
+              <a:t> the row</a:t>
+            </a:r>
+          </a:p>
+          <a:p>
+            <a:pPr lvl="0"/>
+            <a:r>
+              <a:rPr b="1"/>
+              <a:t>Correct</a:t>
+            </a:r>
+            <a:r>
+              <a:rPr/>
+              <a:t> it, if the true value is recoverable</a:t>
+            </a:r>
+          </a:p>
+          <a:p>
+            <a:pPr lvl="0"/>
+            <a:r>
+              <a:rPr b="1"/>
+              <a:t>Leave</a:t>
+            </a:r>
+            <a:r>
+              <a:rPr/>
+              <a:t> it — unusual is not the same as wrong</a:t>
             </a:r>
           </a:p>
         </p:txBody>
@@ -9565,7 +9868,37 @@
             </a:pPr>
             <a:r>
               <a:rPr/>
-              <a:t>Break</a:t>
+              <a:t>Notebook 1, live</a:t>
+            </a:r>
+          </a:p>
+        </p:txBody>
+      </p:sp>
+      <p:sp>
+        <p:nvSpPr>
+          <p:cNvPr id="3" name="Content Placeholder 2"/>
+          <p:cNvSpPr>
+            <a:spLocks noGrp="1"/>
+          </p:cNvSpPr>
+          <p:nvPr>
+            <p:ph idx="1"/>
+          </p:nvPr>
+        </p:nvSpPr>
+        <p:spPr>
+          <a:xfrm>
+            <a:off x="457200" y="1200151"/>
+            <a:ext cx="8229600" cy="3394472"/>
+          </a:xfrm>
+        </p:spPr>
+        <p:txBody>
+          <a:bodyPr/>
+          <a:lstStyle/>
+          <a:p>
+            <a:pPr lvl="0" indent="0" marL="0">
+              <a:buNone/>
+            </a:pPr>
+            <a:r>
+              <a:rPr/>
+              <a:t>Exploration, missingness mechanisms, both outlier rules — from scratch.</a:t>
             </a:r>
           </a:p>
         </p:txBody>
@@ -9728,6 +10061,58 @@
             </a:pPr>
             <a:r>
               <a:rPr/>
+              <a:t>Break</a:t>
+            </a:r>
+          </a:p>
+        </p:txBody>
+      </p:sp>
+    </p:spTree>
+  </p:cSld>
+</p:sld>
+</file>
+
+<file path=ppt/slides/slide21.xml><?xml version="1.0" encoding="utf-8"?>
+<p:sld xmlns:a="http://schemas.openxmlformats.org/drawingml/2006/main" xmlns:r="http://schemas.openxmlformats.org/officeDocument/2006/relationships" xmlns:p="http://schemas.openxmlformats.org/presentationml/2006/main">
+  <p:cSld>
+    <p:spTree>
+      <p:nvGrpSpPr>
+        <p:cNvPr id="1" name=""/>
+        <p:cNvGrpSpPr/>
+        <p:nvPr/>
+      </p:nvGrpSpPr>
+      <p:grpSpPr>
+        <a:xfrm>
+          <a:off x="0" y="0"/>
+          <a:ext cx="0" cy="0"/>
+          <a:chOff x="0" y="0"/>
+          <a:chExt cx="0" cy="0"/>
+        </a:xfrm>
+      </p:grpSpPr>
+      <p:sp>
+        <p:nvSpPr>
+          <p:cNvPr id="2" name="Title 1"/>
+          <p:cNvSpPr>
+            <a:spLocks noGrp="1"/>
+          </p:cNvSpPr>
+          <p:nvPr>
+            <p:ph type="title"/>
+          </p:nvPr>
+        </p:nvSpPr>
+        <p:spPr>
+          <a:xfrm>
+            <a:off x="457200" y="205979"/>
+            <a:ext cx="8229600" cy="857250"/>
+          </a:xfrm>
+        </p:spPr>
+        <p:txBody>
+          <a:bodyPr/>
+          <a:lstStyle/>
+          <a:p>
+            <a:pPr lvl="0" indent="0" marL="0">
+              <a:buNone/>
+            </a:pPr>
+            <a:r>
+              <a:rPr/>
               <a:t>Why scale?</a:t>
             </a:r>
           </a:p>
@@ -9797,7 +10182,7 @@
 </p:sld>
 </file>
 
-<file path=ppt/slides/slide21.xml><?xml version="1.0" encoding="utf-8"?>
+<file path=ppt/slides/slide22.xml><?xml version="1.0" encoding="utf-8"?>
 <p:sld xmlns:a="http://schemas.openxmlformats.org/drawingml/2006/main" xmlns:r="http://schemas.openxmlformats.org/officeDocument/2006/relationships" xmlns:p="http://schemas.openxmlformats.org/presentationml/2006/main">
   <p:cSld>
     <p:spTree>
@@ -9909,7 +10294,7 @@
 </p:sld>
 </file>
 
-<file path=ppt/slides/slide22.xml><?xml version="1.0" encoding="utf-8"?>
+<file path=ppt/slides/slide23.xml><?xml version="1.0" encoding="utf-8"?>
 <p:sld xmlns:a="http://schemas.openxmlformats.org/drawingml/2006/main" xmlns:r="http://schemas.openxmlformats.org/officeDocument/2006/relationships" xmlns:p="http://schemas.openxmlformats.org/presentationml/2006/main">
   <p:cSld>
     <p:spTree>
@@ -9991,7 +10376,7 @@
 </p:sld>
 </file>
 
-<file path=ppt/slides/slide23.xml><?xml version="1.0" encoding="utf-8"?>
+<file path=ppt/slides/slide24.xml><?xml version="1.0" encoding="utf-8"?>
 <p:sld xmlns:a="http://schemas.openxmlformats.org/drawingml/2006/main" xmlns:r="http://schemas.openxmlformats.org/officeDocument/2006/relationships" xmlns:p="http://schemas.openxmlformats.org/presentationml/2006/main">
   <p:cSld>
     <p:spTree>
@@ -10103,7 +10488,7 @@
 </p:sld>
 </file>
 
-<file path=ppt/slides/slide24.xml><?xml version="1.0" encoding="utf-8"?>
+<file path=ppt/slides/slide25.xml><?xml version="1.0" encoding="utf-8"?>
 <p:sld xmlns:a="http://schemas.openxmlformats.org/drawingml/2006/main" xmlns:r="http://schemas.openxmlformats.org/officeDocument/2006/relationships" xmlns:p="http://schemas.openxmlformats.org/presentationml/2006/main">
   <p:cSld>
     <p:spTree>
@@ -10215,7 +10600,7 @@
 </p:sld>
 </file>
 
-<file path=ppt/slides/slide25.xml><?xml version="1.0" encoding="utf-8"?>
+<file path=ppt/slides/slide26.xml><?xml version="1.0" encoding="utf-8"?>
 <p:sld xmlns:a="http://schemas.openxmlformats.org/drawingml/2006/main" xmlns:r="http://schemas.openxmlformats.org/officeDocument/2006/relationships" xmlns:p="http://schemas.openxmlformats.org/presentationml/2006/main">
   <p:cSld>
     <p:spTree>
@@ -10297,7 +10682,7 @@
 </p:sld>
 </file>
 
-<file path=ppt/slides/slide26.xml><?xml version="1.0" encoding="utf-8"?>
+<file path=ppt/slides/slide27.xml><?xml version="1.0" encoding="utf-8"?>
 <p:sld xmlns:a="http://schemas.openxmlformats.org/drawingml/2006/main" xmlns:r="http://schemas.openxmlformats.org/officeDocument/2006/relationships" xmlns:p="http://schemas.openxmlformats.org/presentationml/2006/main">
   <p:cSld>
     <p:spTree>
@@ -10481,7 +10866,7 @@
 </p:sld>
 </file>
 
-<file path=ppt/slides/slide27.xml><?xml version="1.0" encoding="utf-8"?>
+<file path=ppt/slides/slide28.xml><?xml version="1.0" encoding="utf-8"?>
 <p:sld xmlns:a="http://schemas.openxmlformats.org/drawingml/2006/main" xmlns:r="http://schemas.openxmlformats.org/officeDocument/2006/relationships" xmlns:p="http://schemas.openxmlformats.org/presentationml/2006/main">
   <p:cSld>
     <p:spTree>
@@ -10563,7 +10948,7 @@
 </p:sld>
 </file>
 
-<file path=ppt/slides/slide28.xml><?xml version="1.0" encoding="utf-8"?>
+<file path=ppt/slides/slide29.xml><?xml version="1.0" encoding="utf-8"?>
 <p:sld xmlns:a="http://schemas.openxmlformats.org/drawingml/2006/main" xmlns:r="http://schemas.openxmlformats.org/officeDocument/2006/relationships" xmlns:p="http://schemas.openxmlformats.org/presentationml/2006/main">
   <p:cSld>
     <p:spTree>
@@ -10677,7 +11062,115 @@
 </p:sld>
 </file>
 
-<file path=ppt/slides/slide29.xml><?xml version="1.0" encoding="utf-8"?>
+<file path=ppt/slides/slide3.xml><?xml version="1.0" encoding="utf-8"?>
+<p:sld xmlns:a="http://schemas.openxmlformats.org/drawingml/2006/main" xmlns:r="http://schemas.openxmlformats.org/officeDocument/2006/relationships" xmlns:p="http://schemas.openxmlformats.org/presentationml/2006/main">
+  <p:cSld>
+    <p:spTree>
+      <p:nvGrpSpPr>
+        <p:cNvPr id="1" name=""/>
+        <p:cNvGrpSpPr/>
+        <p:nvPr/>
+      </p:nvGrpSpPr>
+      <p:grpSpPr>
+        <a:xfrm>
+          <a:off x="0" y="0"/>
+          <a:ext cx="0" cy="0"/>
+          <a:chOff x="0" y="0"/>
+          <a:chExt cx="0" cy="0"/>
+        </a:xfrm>
+      </p:grpSpPr>
+      <p:sp>
+        <p:nvSpPr>
+          <p:cNvPr id="2" name="Title 1"/>
+          <p:cNvSpPr>
+            <a:spLocks noGrp="1"/>
+          </p:cNvSpPr>
+          <p:nvPr>
+            <p:ph type="title"/>
+          </p:nvPr>
+        </p:nvSpPr>
+        <p:spPr>
+          <a:xfrm>
+            <a:off x="457200" y="205979"/>
+            <a:ext cx="8229600" cy="857250"/>
+          </a:xfrm>
+        </p:spPr>
+        <p:txBody>
+          <a:bodyPr/>
+          <a:lstStyle/>
+          <a:p>
+            <a:pPr lvl="0" indent="0" marL="0">
+              <a:buNone/>
+            </a:pPr>
+            <a:r>
+              <a:rPr/>
+              <a:t>What today builds on</a:t>
+            </a:r>
+          </a:p>
+        </p:txBody>
+      </p:sp>
+      <p:sp>
+        <p:nvSpPr>
+          <p:cNvPr id="3" name="Content Placeholder 2"/>
+          <p:cNvSpPr>
+            <a:spLocks noGrp="1"/>
+          </p:cNvSpPr>
+          <p:nvPr>
+            <p:ph idx="1"/>
+          </p:nvPr>
+        </p:nvSpPr>
+        <p:spPr>
+          <a:xfrm>
+            <a:off x="457200" y="1200151"/>
+            <a:ext cx="8229600" cy="3394472"/>
+          </a:xfrm>
+        </p:spPr>
+        <p:txBody>
+          <a:bodyPr/>
+          <a:lstStyle/>
+          <a:p>
+            <a:pPr lvl="0"/>
+            <a:r>
+              <a:rPr/>
+              <a:t>Lesson 1’s rule: </a:t>
+            </a:r>
+            <a:r>
+              <a:rPr b="1"/>
+              <a:t>nothing is learned before the split</a:t>
+            </a:r>
+          </a:p>
+          <a:p>
+            <a:pPr lvl="0"/>
+            <a:r>
+              <a:rPr/>
+              <a:t>Lesson 1’s tool: </a:t>
+            </a:r>
+            <a:r>
+              <a:rPr>
+                <a:latin typeface="Courier"/>
+              </a:rPr>
+              <a:t>Pipeline</a:t>
+            </a:r>
+            <a:r>
+              <a:rPr/>
+              <a:t>, so the rule is structural, not just discipline</a:t>
+            </a:r>
+          </a:p>
+          <a:p>
+            <a:pPr lvl="0"/>
+            <a:r>
+              <a:rPr/>
+              <a:t>Today: apply both to data that is actually messy</a:t>
+            </a:r>
+          </a:p>
+        </p:txBody>
+      </p:sp>
+    </p:spTree>
+  </p:cSld>
+</p:sld>
+</file>
+
+<file path=ppt/slides/slide30.xml><?xml version="1.0" encoding="utf-8"?>
 <p:sld xmlns:a="http://schemas.openxmlformats.org/drawingml/2006/main" xmlns:r="http://schemas.openxmlformats.org/officeDocument/2006/relationships" xmlns:p="http://schemas.openxmlformats.org/presentationml/2006/main">
   <p:cSld>
     <p:spTree>
@@ -10759,115 +11252,7 @@
 </p:sld>
 </file>
 
-<file path=ppt/slides/slide3.xml><?xml version="1.0" encoding="utf-8"?>
-<p:sld xmlns:a="http://schemas.openxmlformats.org/drawingml/2006/main" xmlns:r="http://schemas.openxmlformats.org/officeDocument/2006/relationships" xmlns:p="http://schemas.openxmlformats.org/presentationml/2006/main">
-  <p:cSld>
-    <p:spTree>
-      <p:nvGrpSpPr>
-        <p:cNvPr id="1" name=""/>
-        <p:cNvGrpSpPr/>
-        <p:nvPr/>
-      </p:nvGrpSpPr>
-      <p:grpSpPr>
-        <a:xfrm>
-          <a:off x="0" y="0"/>
-          <a:ext cx="0" cy="0"/>
-          <a:chOff x="0" y="0"/>
-          <a:chExt cx="0" cy="0"/>
-        </a:xfrm>
-      </p:grpSpPr>
-      <p:sp>
-        <p:nvSpPr>
-          <p:cNvPr id="2" name="Title 1"/>
-          <p:cNvSpPr>
-            <a:spLocks noGrp="1"/>
-          </p:cNvSpPr>
-          <p:nvPr>
-            <p:ph type="title"/>
-          </p:nvPr>
-        </p:nvSpPr>
-        <p:spPr>
-          <a:xfrm>
-            <a:off x="457200" y="205979"/>
-            <a:ext cx="8229600" cy="857250"/>
-          </a:xfrm>
-        </p:spPr>
-        <p:txBody>
-          <a:bodyPr/>
-          <a:lstStyle/>
-          <a:p>
-            <a:pPr lvl="0" indent="0" marL="0">
-              <a:buNone/>
-            </a:pPr>
-            <a:r>
-              <a:rPr/>
-              <a:t>What today builds on</a:t>
-            </a:r>
-          </a:p>
-        </p:txBody>
-      </p:sp>
-      <p:sp>
-        <p:nvSpPr>
-          <p:cNvPr id="3" name="Content Placeholder 2"/>
-          <p:cNvSpPr>
-            <a:spLocks noGrp="1"/>
-          </p:cNvSpPr>
-          <p:nvPr>
-            <p:ph idx="1"/>
-          </p:nvPr>
-        </p:nvSpPr>
-        <p:spPr>
-          <a:xfrm>
-            <a:off x="457200" y="1200151"/>
-            <a:ext cx="8229600" cy="3394472"/>
-          </a:xfrm>
-        </p:spPr>
-        <p:txBody>
-          <a:bodyPr/>
-          <a:lstStyle/>
-          <a:p>
-            <a:pPr lvl="0"/>
-            <a:r>
-              <a:rPr/>
-              <a:t>Lesson 1’s rule: </a:t>
-            </a:r>
-            <a:r>
-              <a:rPr b="1"/>
-              <a:t>nothing is learned before the split</a:t>
-            </a:r>
-          </a:p>
-          <a:p>
-            <a:pPr lvl="0"/>
-            <a:r>
-              <a:rPr/>
-              <a:t>Lesson 1’s tool: </a:t>
-            </a:r>
-            <a:r>
-              <a:rPr>
-                <a:latin typeface="Courier"/>
-              </a:rPr>
-              <a:t>Pipeline</a:t>
-            </a:r>
-            <a:r>
-              <a:rPr/>
-              <a:t>, so the rule is structural, not just discipline</a:t>
-            </a:r>
-          </a:p>
-          <a:p>
-            <a:pPr lvl="0"/>
-            <a:r>
-              <a:rPr/>
-              <a:t>Today: apply both to data that is actually messy</a:t>
-            </a:r>
-          </a:p>
-        </p:txBody>
-      </p:sp>
-    </p:spTree>
-  </p:cSld>
-</p:sld>
-</file>
-
-<file path=ppt/slides/slide30.xml><?xml version="1.0" encoding="utf-8"?>
+<file path=ppt/slides/slide31.xml><?xml version="1.0" encoding="utf-8"?>
 <p:sld xmlns:a="http://schemas.openxmlformats.org/drawingml/2006/main" xmlns:r="http://schemas.openxmlformats.org/officeDocument/2006/relationships" xmlns:p="http://schemas.openxmlformats.org/presentationml/2006/main">
   <p:cSld>
     <p:spTree>
@@ -10987,7 +11372,7 @@
 </p:sld>
 </file>
 
-<file path=ppt/slides/slide31.xml><?xml version="1.0" encoding="utf-8"?>
+<file path=ppt/slides/slide32.xml><?xml version="1.0" encoding="utf-8"?>
 <p:sld xmlns:a="http://schemas.openxmlformats.org/drawingml/2006/main" xmlns:r="http://schemas.openxmlformats.org/officeDocument/2006/relationships" xmlns:p="http://schemas.openxmlformats.org/presentationml/2006/main">
   <p:cSld>
     <p:spTree>
@@ -11081,215 +11466,6 @@
 </p:sld>
 </file>
 
-<file path=ppt/slides/slide32.xml><?xml version="1.0" encoding="utf-8"?>
-<p:sld xmlns:a="http://schemas.openxmlformats.org/drawingml/2006/main" xmlns:r="http://schemas.openxmlformats.org/officeDocument/2006/relationships" xmlns:p="http://schemas.openxmlformats.org/presentationml/2006/main">
-  <p:cSld>
-    <p:spTree>
-      <p:nvGrpSpPr>
-        <p:cNvPr id="1" name=""/>
-        <p:cNvGrpSpPr/>
-        <p:nvPr/>
-      </p:nvGrpSpPr>
-      <p:grpSpPr>
-        <a:xfrm>
-          <a:off x="0" y="0"/>
-          <a:ext cx="0" cy="0"/>
-          <a:chOff x="0" y="0"/>
-          <a:chExt cx="0" cy="0"/>
-        </a:xfrm>
-      </p:grpSpPr>
-      <p:sp>
-        <p:nvSpPr>
-          <p:cNvPr id="2" name="Title 1"/>
-          <p:cNvSpPr>
-            <a:spLocks noGrp="1"/>
-          </p:cNvSpPr>
-          <p:nvPr>
-            <p:ph type="title"/>
-          </p:nvPr>
-        </p:nvSpPr>
-        <p:spPr>
-          <a:xfrm>
-            <a:off x="457200" y="205979"/>
-            <a:ext cx="8229600" cy="857250"/>
-          </a:xfrm>
-        </p:spPr>
-        <p:txBody>
-          <a:bodyPr/>
-          <a:lstStyle/>
-          <a:p>
-            <a:pPr lvl="0" indent="0" marL="0">
-              <a:buNone/>
-            </a:pPr>
-            <a:r>
-              <a:rPr/>
-              <a:t>The code</a:t>
-            </a:r>
-          </a:p>
-        </p:txBody>
-      </p:sp>
-      <p:sp>
-        <p:nvSpPr>
-          <p:cNvPr id="3" name="Content Placeholder 2"/>
-          <p:cNvSpPr>
-            <a:spLocks noGrp="1"/>
-          </p:cNvSpPr>
-          <p:nvPr>
-            <p:ph idx="1"/>
-          </p:nvPr>
-        </p:nvSpPr>
-        <p:spPr>
-          <a:xfrm>
-            <a:off x="457200" y="1200151"/>
-            <a:ext cx="8229600" cy="3394472"/>
-          </a:xfrm>
-        </p:spPr>
-        <p:txBody>
-          <a:bodyPr/>
-          <a:lstStyle/>
-          <a:p>
-            <a:pPr lvl="0" indent="0">
-              <a:buNone/>
-            </a:pPr>
-            <a:r>
-              <a:rPr>
-                <a:latin typeface="Courier"/>
-              </a:rPr>
-              <a:t>prep </a:t>
-            </a:r>
-            <a:r>
-              <a:rPr>
-                <a:solidFill>
-                  <a:srgbClr val="666666"/>
-                </a:solidFill>
-                <a:latin typeface="Courier"/>
-              </a:rPr>
-              <a:t>=</a:t>
-            </a:r>
-            <a:r>
-              <a:rPr>
-                <a:latin typeface="Courier"/>
-              </a:rPr>
-              <a:t> ColumnTransformer([</a:t>
-            </a:r>
-            <a:br/>
-            <a:r>
-              <a:rPr>
-                <a:latin typeface="Courier"/>
-              </a:rPr>
-              <a:t>    (</a:t>
-            </a:r>
-            <a:r>
-              <a:rPr>
-                <a:solidFill>
-                  <a:srgbClr val="4070A0"/>
-                </a:solidFill>
-                <a:latin typeface="Courier"/>
-              </a:rPr>
-              <a:t>"num"</a:t>
-            </a:r>
-            <a:r>
-              <a:rPr>
-                <a:latin typeface="Courier"/>
-              </a:rPr>
-              <a:t>, num_pipe, num_cols),</a:t>
-            </a:r>
-            <a:br/>
-            <a:r>
-              <a:rPr>
-                <a:latin typeface="Courier"/>
-              </a:rPr>
-              <a:t>    (</a:t>
-            </a:r>
-            <a:r>
-              <a:rPr>
-                <a:solidFill>
-                  <a:srgbClr val="4070A0"/>
-                </a:solidFill>
-                <a:latin typeface="Courier"/>
-              </a:rPr>
-              <a:t>"cat"</a:t>
-            </a:r>
-            <a:r>
-              <a:rPr>
-                <a:latin typeface="Courier"/>
-              </a:rPr>
-              <a:t>, cat_pipe, cat_cols),</a:t>
-            </a:r>
-            <a:br/>
-            <a:r>
-              <a:rPr>
-                <a:latin typeface="Courier"/>
-              </a:rPr>
-              <a:t>])</a:t>
-            </a:r>
-            <a:br/>
-            <a:r>
-              <a:rPr>
-                <a:latin typeface="Courier"/>
-              </a:rPr>
-              <a:t>model </a:t>
-            </a:r>
-            <a:r>
-              <a:rPr>
-                <a:solidFill>
-                  <a:srgbClr val="666666"/>
-                </a:solidFill>
-                <a:latin typeface="Courier"/>
-              </a:rPr>
-              <a:t>=</a:t>
-            </a:r>
-            <a:r>
-              <a:rPr>
-                <a:latin typeface="Courier"/>
-              </a:rPr>
-              <a:t> Pipeline([(</a:t>
-            </a:r>
-            <a:r>
-              <a:rPr>
-                <a:solidFill>
-                  <a:srgbClr val="4070A0"/>
-                </a:solidFill>
-                <a:latin typeface="Courier"/>
-              </a:rPr>
-              <a:t>"prep"</a:t>
-            </a:r>
-            <a:r>
-              <a:rPr>
-                <a:latin typeface="Courier"/>
-              </a:rPr>
-              <a:t>, prep), (</a:t>
-            </a:r>
-            <a:r>
-              <a:rPr>
-                <a:solidFill>
-                  <a:srgbClr val="4070A0"/>
-                </a:solidFill>
-                <a:latin typeface="Courier"/>
-              </a:rPr>
-              <a:t>"clf"</a:t>
-            </a:r>
-            <a:r>
-              <a:rPr>
-                <a:latin typeface="Courier"/>
-              </a:rPr>
-              <a:t>, clf)])</a:t>
-            </a:r>
-            <a:br/>
-            <a:r>
-              <a:rPr>
-                <a:latin typeface="Courier"/>
-              </a:rPr>
-              <a:t>model.fit(X_train, y_train)</a:t>
-            </a:r>
-          </a:p>
-        </p:txBody>
-      </p:sp>
-    </p:spTree>
-  </p:cSld>
-</p:sld>
-</file>
-
 <file path=ppt/slides/slide33.xml><?xml version="1.0" encoding="utf-8"?>
 <p:sld xmlns:a="http://schemas.openxmlformats.org/drawingml/2006/main" xmlns:r="http://schemas.openxmlformats.org/officeDocument/2006/relationships" xmlns:p="http://schemas.openxmlformats.org/presentationml/2006/main">
   <p:cSld>
@@ -11319,8 +11495,8 @@
         </p:nvSpPr>
         <p:spPr>
           <a:xfrm>
-            <a:off x="457200" y="205740"/>
-            <a:ext cx="8229600" cy="874395"/>
+            <a:off x="457200" y="205979"/>
+            <a:ext cx="8229600" cy="857250"/>
           </a:xfrm>
         </p:spPr>
         <p:txBody>
@@ -11332,31 +11508,240 @@
             </a:pPr>
             <a:r>
               <a:rPr/>
-              <a:t>The model, on churn</a:t>
-            </a:r>
-          </a:p>
-        </p:txBody>
-      </p:sp>
-      <p:sp>
-        <p:nvSpPr>
-          <p:cNvPr id="4" name="Text Placeholder 3"/>
-          <p:cNvSpPr>
-            <a:spLocks noGrp="1"/>
-          </p:cNvSpPr>
-          <p:nvPr>
-            <p:ph idx="2" sz="half" type="body"/>
+              <a:t>The code</a:t>
+            </a:r>
+          </a:p>
+        </p:txBody>
+      </p:sp>
+      <p:sp>
+        <p:nvSpPr>
+          <p:cNvPr id="3" name="Content Placeholder 2"/>
+          <p:cNvSpPr>
+            <a:spLocks noGrp="1"/>
+          </p:cNvSpPr>
+          <p:nvPr>
+            <p:ph idx="1"/>
           </p:nvPr>
         </p:nvSpPr>
         <p:spPr>
           <a:xfrm>
-            <a:off x="457200" y="1183005"/>
-            <a:ext cx="8229600" cy="2185987"/>
+            <a:off x="457200" y="1200151"/>
+            <a:ext cx="8229600" cy="3394472"/>
           </a:xfrm>
         </p:spPr>
         <p:txBody>
           <a:bodyPr/>
           <a:lstStyle/>
           <a:p>
+            <a:pPr lvl="0" indent="0">
+              <a:buNone/>
+            </a:pPr>
+            <a:r>
+              <a:rPr>
+                <a:latin typeface="Courier"/>
+              </a:rPr>
+              <a:t>prep </a:t>
+            </a:r>
+            <a:r>
+              <a:rPr>
+                <a:solidFill>
+                  <a:srgbClr val="666666"/>
+                </a:solidFill>
+                <a:latin typeface="Courier"/>
+              </a:rPr>
+              <a:t>=</a:t>
+            </a:r>
+            <a:r>
+              <a:rPr>
+                <a:latin typeface="Courier"/>
+              </a:rPr>
+              <a:t> ColumnTransformer([</a:t>
+            </a:r>
+            <a:br/>
+            <a:r>
+              <a:rPr>
+                <a:latin typeface="Courier"/>
+              </a:rPr>
+              <a:t>    (</a:t>
+            </a:r>
+            <a:r>
+              <a:rPr>
+                <a:solidFill>
+                  <a:srgbClr val="4070A0"/>
+                </a:solidFill>
+                <a:latin typeface="Courier"/>
+              </a:rPr>
+              <a:t>"num"</a:t>
+            </a:r>
+            <a:r>
+              <a:rPr>
+                <a:latin typeface="Courier"/>
+              </a:rPr>
+              <a:t>, num_pipe, num_cols),</a:t>
+            </a:r>
+            <a:br/>
+            <a:r>
+              <a:rPr>
+                <a:latin typeface="Courier"/>
+              </a:rPr>
+              <a:t>    (</a:t>
+            </a:r>
+            <a:r>
+              <a:rPr>
+                <a:solidFill>
+                  <a:srgbClr val="4070A0"/>
+                </a:solidFill>
+                <a:latin typeface="Courier"/>
+              </a:rPr>
+              <a:t>"cat"</a:t>
+            </a:r>
+            <a:r>
+              <a:rPr>
+                <a:latin typeface="Courier"/>
+              </a:rPr>
+              <a:t>, cat_pipe, cat_cols),</a:t>
+            </a:r>
+            <a:br/>
+            <a:r>
+              <a:rPr>
+                <a:latin typeface="Courier"/>
+              </a:rPr>
+              <a:t>])</a:t>
+            </a:r>
+            <a:br/>
+            <a:r>
+              <a:rPr>
+                <a:latin typeface="Courier"/>
+              </a:rPr>
+              <a:t>model </a:t>
+            </a:r>
+            <a:r>
+              <a:rPr>
+                <a:solidFill>
+                  <a:srgbClr val="666666"/>
+                </a:solidFill>
+                <a:latin typeface="Courier"/>
+              </a:rPr>
+              <a:t>=</a:t>
+            </a:r>
+            <a:r>
+              <a:rPr>
+                <a:latin typeface="Courier"/>
+              </a:rPr>
+              <a:t> Pipeline([(</a:t>
+            </a:r>
+            <a:r>
+              <a:rPr>
+                <a:solidFill>
+                  <a:srgbClr val="4070A0"/>
+                </a:solidFill>
+                <a:latin typeface="Courier"/>
+              </a:rPr>
+              <a:t>"prep"</a:t>
+            </a:r>
+            <a:r>
+              <a:rPr>
+                <a:latin typeface="Courier"/>
+              </a:rPr>
+              <a:t>, prep), (</a:t>
+            </a:r>
+            <a:r>
+              <a:rPr>
+                <a:solidFill>
+                  <a:srgbClr val="4070A0"/>
+                </a:solidFill>
+                <a:latin typeface="Courier"/>
+              </a:rPr>
+              <a:t>"clf"</a:t>
+            </a:r>
+            <a:r>
+              <a:rPr>
+                <a:latin typeface="Courier"/>
+              </a:rPr>
+              <a:t>, clf)])</a:t>
+            </a:r>
+            <a:br/>
+            <a:r>
+              <a:rPr>
+                <a:latin typeface="Courier"/>
+              </a:rPr>
+              <a:t>model.fit(X_train, y_train)</a:t>
+            </a:r>
+          </a:p>
+        </p:txBody>
+      </p:sp>
+    </p:spTree>
+  </p:cSld>
+</p:sld>
+</file>
+
+<file path=ppt/slides/slide34.xml><?xml version="1.0" encoding="utf-8"?>
+<p:sld xmlns:a="http://schemas.openxmlformats.org/drawingml/2006/main" xmlns:r="http://schemas.openxmlformats.org/officeDocument/2006/relationships" xmlns:p="http://schemas.openxmlformats.org/presentationml/2006/main">
+  <p:cSld>
+    <p:spTree>
+      <p:nvGrpSpPr>
+        <p:cNvPr id="1" name=""/>
+        <p:cNvGrpSpPr/>
+        <p:nvPr/>
+      </p:nvGrpSpPr>
+      <p:grpSpPr>
+        <a:xfrm>
+          <a:off x="0" y="0"/>
+          <a:ext cx="0" cy="0"/>
+          <a:chOff x="0" y="0"/>
+          <a:chExt cx="0" cy="0"/>
+        </a:xfrm>
+      </p:grpSpPr>
+      <p:sp>
+        <p:nvSpPr>
+          <p:cNvPr id="2" name="Title 1"/>
+          <p:cNvSpPr>
+            <a:spLocks noGrp="1"/>
+          </p:cNvSpPr>
+          <p:nvPr>
+            <p:ph type="title"/>
+          </p:nvPr>
+        </p:nvSpPr>
+        <p:spPr>
+          <a:xfrm>
+            <a:off x="457200" y="205979"/>
+            <a:ext cx="8229600" cy="857250"/>
+          </a:xfrm>
+        </p:spPr>
+        <p:txBody>
+          <a:bodyPr/>
+          <a:lstStyle/>
+          <a:p>
+            <a:pPr lvl="0" indent="0" marL="0">
+              <a:buNone/>
+            </a:pPr>
+            <a:r>
+              <a:rPr/>
+              <a:t>The model, on churn</a:t>
+            </a:r>
+          </a:p>
+        </p:txBody>
+      </p:sp>
+      <p:sp>
+        <p:nvSpPr>
+          <p:cNvPr id="3" name="Content Placeholder 2"/>
+          <p:cNvSpPr>
+            <a:spLocks noGrp="1"/>
+          </p:cNvSpPr>
+          <p:nvPr>
+            <p:ph idx="1"/>
+          </p:nvPr>
+        </p:nvSpPr>
+        <p:spPr>
+          <a:xfrm>
+            <a:off x="457200" y="1200151"/>
+            <a:ext cx="8229600" cy="3394472"/>
+          </a:xfrm>
+        </p:spPr>
+        <p:txBody>
+          <a:bodyPr/>
+          <a:lstStyle/>
+          <a:p>
             <a:pPr lvl="0"/>
             <a:r>
               <a:rPr/>
@@ -11397,6 +11782,58 @@
             <a:r>
               <a:rPr/>
               <a:t>Modest accuracy gain. Why?</a:t>
+            </a:r>
+          </a:p>
+        </p:txBody>
+      </p:sp>
+    </p:spTree>
+  </p:cSld>
+</p:sld>
+</file>
+
+<file path=ppt/slides/slide35.xml><?xml version="1.0" encoding="utf-8"?>
+<p:sld xmlns:a="http://schemas.openxmlformats.org/drawingml/2006/main" xmlns:r="http://schemas.openxmlformats.org/officeDocument/2006/relationships" xmlns:p="http://schemas.openxmlformats.org/presentationml/2006/main">
+  <p:cSld>
+    <p:spTree>
+      <p:nvGrpSpPr>
+        <p:cNvPr id="1" name=""/>
+        <p:cNvGrpSpPr/>
+        <p:nvPr/>
+      </p:nvGrpSpPr>
+      <p:grpSpPr>
+        <a:xfrm>
+          <a:off x="0" y="0"/>
+          <a:ext cx="0" cy="0"/>
+          <a:chOff x="0" y="0"/>
+          <a:chExt cx="0" cy="0"/>
+        </a:xfrm>
+      </p:grpSpPr>
+      <p:sp>
+        <p:nvSpPr>
+          <p:cNvPr id="2" name="Title 1"/>
+          <p:cNvSpPr>
+            <a:spLocks noGrp="1"/>
+          </p:cNvSpPr>
+          <p:nvPr>
+            <p:ph type="title"/>
+          </p:nvPr>
+        </p:nvSpPr>
+        <p:spPr>
+          <a:xfrm>
+            <a:off x="457200" y="205979"/>
+            <a:ext cx="8229600" cy="857250"/>
+          </a:xfrm>
+        </p:spPr>
+        <p:txBody>
+          <a:bodyPr/>
+          <a:lstStyle/>
+          <a:p>
+            <a:pPr lvl="0" indent="0" marL="0">
+              <a:buNone/>
+            </a:pPr>
+            <a:r>
+              <a:rPr/>
+              <a:t>Where the errors fall</a:t>
             </a:r>
           </a:p>
         </p:txBody>
@@ -11417,8 +11854,8 @@
         </p:blipFill>
         <p:spPr bwMode="auto">
           <a:xfrm>
-            <a:off x="4015756" y="3471862"/>
-            <a:ext cx="1112487" cy="1054418"/>
+            <a:off x="2797522" y="1166099"/>
+            <a:ext cx="3548955" cy="3360181"/>
           </a:xfrm>
           <a:prstGeom prst="rect">
             <a:avLst/>
@@ -11436,7 +11873,7 @@
 </p:sld>
 </file>
 
-<file path=ppt/slides/slide34.xml><?xml version="1.0" encoding="utf-8"?>
+<file path=ppt/slides/slide36.xml><?xml version="1.0" encoding="utf-8"?>
 <p:sld xmlns:a="http://schemas.openxmlformats.org/drawingml/2006/main" xmlns:r="http://schemas.openxmlformats.org/officeDocument/2006/relationships" xmlns:p="http://schemas.openxmlformats.org/presentationml/2006/main">
   <p:cSld>
     <p:spTree>
@@ -11548,7 +11985,7 @@
 </p:sld>
 </file>
 
-<file path=ppt/slides/slide35.xml><?xml version="1.0" encoding="utf-8"?>
+<file path=ppt/slides/slide37.xml><?xml version="1.0" encoding="utf-8"?>
 <p:sld xmlns:a="http://schemas.openxmlformats.org/drawingml/2006/main" xmlns:r="http://schemas.openxmlformats.org/officeDocument/2006/relationships" xmlns:p="http://schemas.openxmlformats.org/presentationml/2006/main">
   <p:cSld>
     <p:spTree>
@@ -11650,7 +12087,7 @@
 </p:sld>
 </file>
 
-<file path=ppt/slides/slide36.xml><?xml version="1.0" encoding="utf-8"?>
+<file path=ppt/slides/slide38.xml><?xml version="1.0" encoding="utf-8"?>
 <p:sld xmlns:a="http://schemas.openxmlformats.org/drawingml/2006/main" xmlns:r="http://schemas.openxmlformats.org/officeDocument/2006/relationships" xmlns:p="http://schemas.openxmlformats.org/presentationml/2006/main">
   <p:cSld>
     <p:spTree>
@@ -11732,244 +12169,6 @@
 </p:sld>
 </file>
 
-<file path=ppt/slides/slide37.xml><?xml version="1.0" encoding="utf-8"?>
-<p:sld xmlns:a="http://schemas.openxmlformats.org/drawingml/2006/main" xmlns:r="http://schemas.openxmlformats.org/officeDocument/2006/relationships" xmlns:p="http://schemas.openxmlformats.org/presentationml/2006/main">
-  <p:cSld>
-    <p:spTree>
-      <p:nvGrpSpPr>
-        <p:cNvPr id="1" name=""/>
-        <p:cNvGrpSpPr/>
-        <p:nvPr/>
-      </p:nvGrpSpPr>
-      <p:grpSpPr>
-        <a:xfrm>
-          <a:off x="0" y="0"/>
-          <a:ext cx="0" cy="0"/>
-          <a:chOff x="0" y="0"/>
-          <a:chExt cx="0" cy="0"/>
-        </a:xfrm>
-      </p:grpSpPr>
-      <p:sp>
-        <p:nvSpPr>
-          <p:cNvPr id="2" name="Title 1"/>
-          <p:cNvSpPr>
-            <a:spLocks noGrp="1"/>
-          </p:cNvSpPr>
-          <p:nvPr>
-            <p:ph type="title"/>
-          </p:nvPr>
-        </p:nvSpPr>
-        <p:spPr>
-          <a:xfrm>
-            <a:off x="457200" y="205979"/>
-            <a:ext cx="8229600" cy="857250"/>
-          </a:xfrm>
-        </p:spPr>
-        <p:txBody>
-          <a:bodyPr/>
-          <a:lstStyle/>
-          <a:p>
-            <a:pPr lvl="0" indent="0" marL="0">
-              <a:buNone/>
-            </a:pPr>
-            <a:r>
-              <a:rPr/>
-              <a:t>Leak 1 — impute before splitting</a:t>
-            </a:r>
-          </a:p>
-        </p:txBody>
-      </p:sp>
-      <p:sp>
-        <p:nvSpPr>
-          <p:cNvPr id="3" name="Content Placeholder 2"/>
-          <p:cNvSpPr>
-            <a:spLocks noGrp="1"/>
-          </p:cNvSpPr>
-          <p:nvPr>
-            <p:ph idx="1"/>
-          </p:nvPr>
-        </p:nvSpPr>
-        <p:spPr>
-          <a:xfrm>
-            <a:off x="457200" y="1200151"/>
-            <a:ext cx="8229600" cy="3394472"/>
-          </a:xfrm>
-        </p:spPr>
-        <p:txBody>
-          <a:bodyPr/>
-          <a:lstStyle/>
-          <a:p>
-            <a:pPr lvl="0" indent="0" marL="0">
-              <a:buNone/>
-            </a:pPr>
-            <a:r>
-              <a:rPr>
-                <a:latin typeface="Courier"/>
-              </a:rPr>
-              <a:t>KNNImputer</a:t>
-            </a:r>
-            <a:r>
-              <a:rPr/>
-              <a:t> fills a gap using </a:t>
-            </a:r>
-            <a:r>
-              <a:rPr b="1"/>
-              <a:t>other rows’ values</a:t>
-            </a:r>
-            <a:r>
-              <a:rPr/>
-              <a:t>.</a:t>
-            </a:r>
-          </a:p>
-          <a:p>
-            <a:pPr lvl="0" indent="0" marL="0">
-              <a:buNone/>
-            </a:pPr>
-            <a:r>
-              <a:rPr/>
-              <a:t>Fit it on train + test, and some of those rows are in the test set.</a:t>
-            </a:r>
-          </a:p>
-        </p:txBody>
-      </p:sp>
-    </p:spTree>
-  </p:cSld>
-</p:sld>
-</file>
-
-<file path=ppt/slides/slide38.xml><?xml version="1.0" encoding="utf-8"?>
-<p:sld xmlns:a="http://schemas.openxmlformats.org/drawingml/2006/main" xmlns:r="http://schemas.openxmlformats.org/officeDocument/2006/relationships" xmlns:p="http://schemas.openxmlformats.org/presentationml/2006/main">
-  <p:cSld>
-    <p:spTree>
-      <p:nvGrpSpPr>
-        <p:cNvPr id="1" name=""/>
-        <p:cNvGrpSpPr/>
-        <p:nvPr/>
-      </p:nvGrpSpPr>
-      <p:grpSpPr>
-        <a:xfrm>
-          <a:off x="0" y="0"/>
-          <a:ext cx="0" cy="0"/>
-          <a:chOff x="0" y="0"/>
-          <a:chExt cx="0" cy="0"/>
-        </a:xfrm>
-      </p:grpSpPr>
-      <p:sp>
-        <p:nvSpPr>
-          <p:cNvPr id="2" name="Title 1"/>
-          <p:cNvSpPr>
-            <a:spLocks noGrp="1"/>
-          </p:cNvSpPr>
-          <p:nvPr>
-            <p:ph type="title"/>
-          </p:nvPr>
-        </p:nvSpPr>
-        <p:spPr>
-          <a:xfrm>
-            <a:off x="457200" y="205740"/>
-            <a:ext cx="8229600" cy="874395"/>
-          </a:xfrm>
-        </p:spPr>
-        <p:txBody>
-          <a:bodyPr/>
-          <a:lstStyle/>
-          <a:p>
-            <a:pPr lvl="0" indent="0" marL="0">
-              <a:buNone/>
-            </a:pPr>
-            <a:r>
-              <a:rPr/>
-              <a:t>The smoking gun</a:t>
-            </a:r>
-          </a:p>
-        </p:txBody>
-      </p:sp>
-      <p:sp>
-        <p:nvSpPr>
-          <p:cNvPr id="4" name="Text Placeholder 3"/>
-          <p:cNvSpPr>
-            <a:spLocks noGrp="1"/>
-          </p:cNvSpPr>
-          <p:nvPr>
-            <p:ph idx="2" sz="half" type="body"/>
-          </p:nvPr>
-        </p:nvSpPr>
-        <p:spPr>
-          <a:xfrm>
-            <a:off x="457200" y="1183005"/>
-            <a:ext cx="8229600" cy="1311592"/>
-          </a:xfrm>
-        </p:spPr>
-        <p:txBody>
-          <a:bodyPr/>
-          <a:lstStyle/>
-          <a:p>
-            <a:pPr lvl="0" indent="0" marL="0">
-              <a:buNone/>
-            </a:pPr>
-            <a:r>
-              <a:rPr b="1"/>
-              <a:t>98 of 128</a:t>
-            </a:r>
-            <a:r>
-              <a:rPr/>
-              <a:t> training rows with missing age had a </a:t>
-            </a:r>
-            <a:r>
-              <a:rPr b="1"/>
-              <a:t>test-set row</a:t>
-            </a:r>
-            <a:r>
-              <a:rPr/>
-              <a:t> among their five nearest neighbours.</a:t>
-            </a:r>
-          </a:p>
-          <a:p>
-            <a:pPr lvl="0" indent="0" marL="0">
-              <a:buNone/>
-            </a:pPr>
-            <a:r>
-              <a:rPr/>
-              <a:t>Nothing raised an error.</a:t>
-            </a:r>
-          </a:p>
-        </p:txBody>
-      </p:sp>
-      <p:pic>
-        <p:nvPicPr>
-          <p:cNvPr descr="smoking_gun.png" id="0" name="Picture 1"/>
-          <p:cNvPicPr>
-            <a:picLocks noGrp="1" noChangeAspect="1"/>
-          </p:cNvPicPr>
-          <p:nvPr/>
-        </p:nvPicPr>
-        <p:blipFill>
-          <a:blip r:embed="rId3"/>
-          <a:stretch>
-            <a:fillRect/>
-          </a:stretch>
-        </p:blipFill>
-        <p:spPr bwMode="auto">
-          <a:xfrm>
-            <a:off x="2193525" y="2597467"/>
-            <a:ext cx="4756949" cy="1928813"/>
-          </a:xfrm>
-          <a:prstGeom prst="rect">
-            <a:avLst/>
-          </a:prstGeom>
-          <a:noFill/>
-          <a:ln w="9525">
-            <a:noFill/>
-            <a:headEnd/>
-            <a:tailEnd/>
-          </a:ln>
-        </p:spPr>
-      </p:pic>
-    </p:spTree>
-  </p:cSld>
-</p:sld>
-</file>
-
 <file path=ppt/slides/slide39.xml><?xml version="1.0" encoding="utf-8"?>
 <p:sld xmlns:a="http://schemas.openxmlformats.org/drawingml/2006/main" xmlns:r="http://schemas.openxmlformats.org/officeDocument/2006/relationships" xmlns:p="http://schemas.openxmlformats.org/presentationml/2006/main">
   <p:cSld>
@@ -12012,7 +12211,7 @@
             </a:pPr>
             <a:r>
               <a:rPr/>
-              <a:t>Leak 2 — encode before splitting</a:t>
+              <a:t>Leak 1 — impute before splitting</a:t>
             </a:r>
           </a:p>
         </p:txBody>
@@ -12041,26 +12240,31 @@
               <a:buNone/>
             </a:pPr>
             <a:r>
-              <a:rPr/>
-              <a:t>Replace </a:t>
-            </a:r>
-            <a:r>
               <a:rPr>
                 <a:latin typeface="Courier"/>
               </a:rPr>
-              <a:t>zip_code</a:t>
-            </a:r>
-            <a:r>
-              <a:rPr/>
-              <a:t> with the </a:t>
+              <a:t>KNNImputer</a:t>
+            </a:r>
+            <a:r>
+              <a:rPr/>
+              <a:t> fills a gap using </a:t>
             </a:r>
             <a:r>
               <a:rPr b="1"/>
-              <a:t>average churn rate of its own customers</a:t>
-            </a:r>
-            <a:r>
-              <a:rPr/>
-              <a:t>, computed before anybody has split anything.</a:t>
+              <a:t>other rows’ values</a:t>
+            </a:r>
+            <a:r>
+              <a:rPr/>
+              <a:t>.</a:t>
+            </a:r>
+          </a:p>
+          <a:p>
+            <a:pPr lvl="0" indent="0" marL="0">
+              <a:buNone/>
+            </a:pPr>
+            <a:r>
+              <a:rPr/>
+              <a:t>Fit it on train + test, and some of those rows are in the test set.</a:t>
             </a:r>
           </a:p>
         </p:txBody>
@@ -12186,6 +12390,291 @@
 </file>
 
 <file path=ppt/slides/slide40.xml><?xml version="1.0" encoding="utf-8"?>
+<p:sld xmlns:a="http://schemas.openxmlformats.org/drawingml/2006/main" xmlns:r="http://schemas.openxmlformats.org/officeDocument/2006/relationships" xmlns:p="http://schemas.openxmlformats.org/presentationml/2006/main">
+  <p:cSld>
+    <p:spTree>
+      <p:nvGrpSpPr>
+        <p:cNvPr id="1" name=""/>
+        <p:cNvGrpSpPr/>
+        <p:nvPr/>
+      </p:nvGrpSpPr>
+      <p:grpSpPr>
+        <a:xfrm>
+          <a:off x="0" y="0"/>
+          <a:ext cx="0" cy="0"/>
+          <a:chOff x="0" y="0"/>
+          <a:chExt cx="0" cy="0"/>
+        </a:xfrm>
+      </p:grpSpPr>
+      <p:sp>
+        <p:nvSpPr>
+          <p:cNvPr id="2" name="Title 1"/>
+          <p:cNvSpPr>
+            <a:spLocks noGrp="1"/>
+          </p:cNvSpPr>
+          <p:nvPr>
+            <p:ph type="title"/>
+          </p:nvPr>
+        </p:nvSpPr>
+        <p:spPr>
+          <a:xfrm>
+            <a:off x="457200" y="205979"/>
+            <a:ext cx="8229600" cy="857250"/>
+          </a:xfrm>
+        </p:spPr>
+        <p:txBody>
+          <a:bodyPr/>
+          <a:lstStyle/>
+          <a:p>
+            <a:pPr lvl="0" indent="0" marL="0">
+              <a:buNone/>
+            </a:pPr>
+            <a:r>
+              <a:rPr/>
+              <a:t>The smoking gun</a:t>
+            </a:r>
+          </a:p>
+        </p:txBody>
+      </p:sp>
+      <p:sp>
+        <p:nvSpPr>
+          <p:cNvPr id="3" name="Content Placeholder 2"/>
+          <p:cNvSpPr>
+            <a:spLocks noGrp="1"/>
+          </p:cNvSpPr>
+          <p:nvPr>
+            <p:ph idx="1"/>
+          </p:nvPr>
+        </p:nvSpPr>
+        <p:spPr>
+          <a:xfrm>
+            <a:off x="457200" y="1200151"/>
+            <a:ext cx="8229600" cy="3394472"/>
+          </a:xfrm>
+        </p:spPr>
+        <p:txBody>
+          <a:bodyPr/>
+          <a:lstStyle/>
+          <a:p>
+            <a:pPr lvl="0" indent="0" marL="0">
+              <a:buNone/>
+            </a:pPr>
+            <a:r>
+              <a:rPr b="1"/>
+              <a:t>98 of 128</a:t>
+            </a:r>
+            <a:r>
+              <a:rPr/>
+              <a:t> training rows with missing age had a </a:t>
+            </a:r>
+            <a:r>
+              <a:rPr b="1"/>
+              <a:t>test-set row</a:t>
+            </a:r>
+            <a:r>
+              <a:rPr/>
+              <a:t> among their five nearest neighbours.</a:t>
+            </a:r>
+          </a:p>
+          <a:p>
+            <a:pPr lvl="0" indent="0" marL="0">
+              <a:buNone/>
+            </a:pPr>
+            <a:r>
+              <a:rPr/>
+              <a:t>Nothing raised an error.</a:t>
+            </a:r>
+          </a:p>
+        </p:txBody>
+      </p:sp>
+    </p:spTree>
+  </p:cSld>
+</p:sld>
+</file>
+
+<file path=ppt/slides/slide41.xml><?xml version="1.0" encoding="utf-8"?>
+<p:sld xmlns:a="http://schemas.openxmlformats.org/drawingml/2006/main" xmlns:r="http://schemas.openxmlformats.org/officeDocument/2006/relationships" xmlns:p="http://schemas.openxmlformats.org/presentationml/2006/main">
+  <p:cSld>
+    <p:spTree>
+      <p:nvGrpSpPr>
+        <p:cNvPr id="1" name=""/>
+        <p:cNvGrpSpPr/>
+        <p:nvPr/>
+      </p:nvGrpSpPr>
+      <p:grpSpPr>
+        <a:xfrm>
+          <a:off x="0" y="0"/>
+          <a:ext cx="0" cy="0"/>
+          <a:chOff x="0" y="0"/>
+          <a:chExt cx="0" cy="0"/>
+        </a:xfrm>
+      </p:grpSpPr>
+      <p:sp>
+        <p:nvSpPr>
+          <p:cNvPr id="2" name="Title 1"/>
+          <p:cNvSpPr>
+            <a:spLocks noGrp="1"/>
+          </p:cNvSpPr>
+          <p:nvPr>
+            <p:ph type="title"/>
+          </p:nvPr>
+        </p:nvSpPr>
+        <p:spPr>
+          <a:xfrm>
+            <a:off x="457200" y="205979"/>
+            <a:ext cx="8229600" cy="857250"/>
+          </a:xfrm>
+        </p:spPr>
+        <p:txBody>
+          <a:bodyPr/>
+          <a:lstStyle/>
+          <a:p>
+            <a:pPr lvl="0" indent="0" marL="0">
+              <a:buNone/>
+            </a:pPr>
+            <a:r>
+              <a:rPr/>
+              <a:t>Leakage, counted</a:t>
+            </a:r>
+          </a:p>
+        </p:txBody>
+      </p:sp>
+      <p:pic>
+        <p:nvPicPr>
+          <p:cNvPr descr="smoking_gun.png" id="0" name="Picture 1"/>
+          <p:cNvPicPr>
+            <a:picLocks noGrp="1" noChangeAspect="1"/>
+          </p:cNvPicPr>
+          <p:nvPr/>
+        </p:nvPicPr>
+        <p:blipFill>
+          <a:blip r:embed="rId3"/>
+          <a:stretch>
+            <a:fillRect/>
+          </a:stretch>
+        </p:blipFill>
+        <p:spPr bwMode="auto">
+          <a:xfrm>
+            <a:off x="457201" y="1176140"/>
+            <a:ext cx="8229597" cy="3340099"/>
+          </a:xfrm>
+          <a:prstGeom prst="rect">
+            <a:avLst/>
+          </a:prstGeom>
+          <a:noFill/>
+          <a:ln w="9525">
+            <a:noFill/>
+            <a:headEnd/>
+            <a:tailEnd/>
+          </a:ln>
+        </p:spPr>
+      </p:pic>
+    </p:spTree>
+  </p:cSld>
+</p:sld>
+</file>
+
+<file path=ppt/slides/slide42.xml><?xml version="1.0" encoding="utf-8"?>
+<p:sld xmlns:a="http://schemas.openxmlformats.org/drawingml/2006/main" xmlns:r="http://schemas.openxmlformats.org/officeDocument/2006/relationships" xmlns:p="http://schemas.openxmlformats.org/presentationml/2006/main">
+  <p:cSld>
+    <p:spTree>
+      <p:nvGrpSpPr>
+        <p:cNvPr id="1" name=""/>
+        <p:cNvGrpSpPr/>
+        <p:nvPr/>
+      </p:nvGrpSpPr>
+      <p:grpSpPr>
+        <a:xfrm>
+          <a:off x="0" y="0"/>
+          <a:ext cx="0" cy="0"/>
+          <a:chOff x="0" y="0"/>
+          <a:chExt cx="0" cy="0"/>
+        </a:xfrm>
+      </p:grpSpPr>
+      <p:sp>
+        <p:nvSpPr>
+          <p:cNvPr id="2" name="Title 1"/>
+          <p:cNvSpPr>
+            <a:spLocks noGrp="1"/>
+          </p:cNvSpPr>
+          <p:nvPr>
+            <p:ph type="title"/>
+          </p:nvPr>
+        </p:nvSpPr>
+        <p:spPr>
+          <a:xfrm>
+            <a:off x="457200" y="205979"/>
+            <a:ext cx="8229600" cy="857250"/>
+          </a:xfrm>
+        </p:spPr>
+        <p:txBody>
+          <a:bodyPr/>
+          <a:lstStyle/>
+          <a:p>
+            <a:pPr lvl="0" indent="0" marL="0">
+              <a:buNone/>
+            </a:pPr>
+            <a:r>
+              <a:rPr/>
+              <a:t>Leak 2 — encode before splitting</a:t>
+            </a:r>
+          </a:p>
+        </p:txBody>
+      </p:sp>
+      <p:sp>
+        <p:nvSpPr>
+          <p:cNvPr id="3" name="Content Placeholder 2"/>
+          <p:cNvSpPr>
+            <a:spLocks noGrp="1"/>
+          </p:cNvSpPr>
+          <p:nvPr>
+            <p:ph idx="1"/>
+          </p:nvPr>
+        </p:nvSpPr>
+        <p:spPr>
+          <a:xfrm>
+            <a:off x="457200" y="1200151"/>
+            <a:ext cx="8229600" cy="3394472"/>
+          </a:xfrm>
+        </p:spPr>
+        <p:txBody>
+          <a:bodyPr/>
+          <a:lstStyle/>
+          <a:p>
+            <a:pPr lvl="0" indent="0" marL="0">
+              <a:buNone/>
+            </a:pPr>
+            <a:r>
+              <a:rPr/>
+              <a:t>Replace </a:t>
+            </a:r>
+            <a:r>
+              <a:rPr>
+                <a:latin typeface="Courier"/>
+              </a:rPr>
+              <a:t>zip_code</a:t>
+            </a:r>
+            <a:r>
+              <a:rPr/>
+              <a:t> with the </a:t>
+            </a:r>
+            <a:r>
+              <a:rPr b="1"/>
+              <a:t>average churn rate of its own customers</a:t>
+            </a:r>
+            <a:r>
+              <a:rPr/>
+              <a:t>, computed before anybody has split anything.</a:t>
+            </a:r>
+          </a:p>
+        </p:txBody>
+      </p:sp>
+    </p:spTree>
+  </p:cSld>
+</p:sld>
+</file>
+
+<file path=ppt/slides/slide43.xml><?xml version="1.0" encoding="utf-8"?>
 <p:sld xmlns:a="http://schemas.openxmlformats.org/drawingml/2006/main" xmlns:r="http://schemas.openxmlformats.org/officeDocument/2006/relationships" xmlns:p="http://schemas.openxmlformats.org/presentationml/2006/main">
   <p:cSld>
     <p:spTree>
@@ -12267,7 +12756,7 @@
 </p:sld>
 </file>
 
-<file path=ppt/slides/slide41.xml><?xml version="1.0" encoding="utf-8"?>
+<file path=ppt/slides/slide44.xml><?xml version="1.0" encoding="utf-8"?>
 <p:sld xmlns:a="http://schemas.openxmlformats.org/drawingml/2006/main" xmlns:r="http://schemas.openxmlformats.org/officeDocument/2006/relationships" xmlns:p="http://schemas.openxmlformats.org/presentationml/2006/main">
   <p:cSld>
     <p:spTree>
@@ -12379,7 +12868,7 @@
 </p:sld>
 </file>
 
-<file path=ppt/slides/slide42.xml><?xml version="1.0" encoding="utf-8"?>
+<file path=ppt/slides/slide45.xml><?xml version="1.0" encoding="utf-8"?>
 <p:sld xmlns:a="http://schemas.openxmlformats.org/drawingml/2006/main" xmlns:r="http://schemas.openxmlformats.org/officeDocument/2006/relationships" xmlns:p="http://schemas.openxmlformats.org/presentationml/2006/main">
   <p:cSld>
     <p:spTree>
@@ -12461,292 +12950,6 @@
 </p:sld>
 </file>
 
-<file path=ppt/slides/slide43.xml><?xml version="1.0" encoding="utf-8"?>
-<p:sld xmlns:a="http://schemas.openxmlformats.org/drawingml/2006/main" xmlns:r="http://schemas.openxmlformats.org/officeDocument/2006/relationships" xmlns:p="http://schemas.openxmlformats.org/presentationml/2006/main">
-  <p:cSld>
-    <p:spTree>
-      <p:nvGrpSpPr>
-        <p:cNvPr id="1" name=""/>
-        <p:cNvGrpSpPr/>
-        <p:nvPr/>
-      </p:nvGrpSpPr>
-      <p:grpSpPr>
-        <a:xfrm>
-          <a:off x="0" y="0"/>
-          <a:ext cx="0" cy="0"/>
-          <a:chOff x="0" y="0"/>
-          <a:chExt cx="0" cy="0"/>
-        </a:xfrm>
-      </p:grpSpPr>
-      <p:sp>
-        <p:nvSpPr>
-          <p:cNvPr id="2" name="Title 1"/>
-          <p:cNvSpPr>
-            <a:spLocks noGrp="1"/>
-          </p:cNvSpPr>
-          <p:nvPr>
-            <p:ph type="title"/>
-          </p:nvPr>
-        </p:nvSpPr>
-        <p:spPr>
-          <a:xfrm>
-            <a:off x="457200" y="205979"/>
-            <a:ext cx="8229600" cy="857250"/>
-          </a:xfrm>
-        </p:spPr>
-        <p:txBody>
-          <a:bodyPr/>
-          <a:lstStyle/>
-          <a:p>
-            <a:pPr lvl="0" indent="0" marL="0">
-              <a:buNone/>
-            </a:pPr>
-            <a:r>
-              <a:rPr/>
-              <a:t>The fix</a:t>
-            </a:r>
-          </a:p>
-        </p:txBody>
-      </p:sp>
-      <p:sp>
-        <p:nvSpPr>
-          <p:cNvPr id="3" name="Content Placeholder 2"/>
-          <p:cNvSpPr>
-            <a:spLocks noGrp="1"/>
-          </p:cNvSpPr>
-          <p:nvPr>
-            <p:ph idx="1"/>
-          </p:nvPr>
-        </p:nvSpPr>
-        <p:spPr>
-          <a:xfrm>
-            <a:off x="457200" y="1200151"/>
-            <a:ext cx="8229600" cy="3394472"/>
-          </a:xfrm>
-        </p:spPr>
-        <p:txBody>
-          <a:bodyPr/>
-          <a:lstStyle/>
-          <a:p>
-            <a:pPr lvl="0" indent="0" marL="0">
-              <a:buNone/>
-            </a:pPr>
-            <a:r>
-              <a:rPr>
-                <a:latin typeface="Courier"/>
-              </a:rPr>
-              <a:t>sklearn.preprocessing.TargetEncoder</a:t>
-            </a:r>
-            <a:r>
-              <a:rPr/>
-              <a:t> — cross-fitted inside the pipeline.</a:t>
-            </a:r>
-          </a:p>
-          <a:p>
-            <a:pPr lvl="0" indent="0" marL="0">
-              <a:buNone/>
-            </a:pPr>
-            <a:r>
-              <a:rPr/>
-              <a:t>Each row’s encoded value comes from </a:t>
-            </a:r>
-            <a:r>
-              <a:rPr b="1"/>
-              <a:t>other</a:t>
-            </a:r>
-            <a:r>
-              <a:rPr/>
-              <a:t> folds, never its own label.</a:t>
-            </a:r>
-          </a:p>
-        </p:txBody>
-      </p:sp>
-    </p:spTree>
-  </p:cSld>
-</p:sld>
-</file>
-
-<file path=ppt/slides/slide44.xml><?xml version="1.0" encoding="utf-8"?>
-<p:sld xmlns:a="http://schemas.openxmlformats.org/drawingml/2006/main" xmlns:r="http://schemas.openxmlformats.org/officeDocument/2006/relationships" xmlns:p="http://schemas.openxmlformats.org/presentationml/2006/main">
-  <p:cSld>
-    <p:spTree>
-      <p:nvGrpSpPr>
-        <p:cNvPr id="1" name=""/>
-        <p:cNvGrpSpPr/>
-        <p:nvPr/>
-      </p:nvGrpSpPr>
-      <p:grpSpPr>
-        <a:xfrm>
-          <a:off x="0" y="0"/>
-          <a:ext cx="0" cy="0"/>
-          <a:chOff x="0" y="0"/>
-          <a:chExt cx="0" cy="0"/>
-        </a:xfrm>
-      </p:grpSpPr>
-      <p:sp>
-        <p:nvSpPr>
-          <p:cNvPr id="2" name="Title 1"/>
-          <p:cNvSpPr>
-            <a:spLocks noGrp="1"/>
-          </p:cNvSpPr>
-          <p:nvPr>
-            <p:ph type="title"/>
-          </p:nvPr>
-        </p:nvSpPr>
-        <p:spPr>
-          <a:xfrm>
-            <a:off x="457200" y="205979"/>
-            <a:ext cx="8229600" cy="857250"/>
-          </a:xfrm>
-        </p:spPr>
-        <p:txBody>
-          <a:bodyPr/>
-          <a:lstStyle/>
-          <a:p>
-            <a:pPr lvl="0" indent="0" marL="0">
-              <a:buNone/>
-            </a:pPr>
-            <a:r>
-              <a:rPr/>
-              <a:t>The rule, restated</a:t>
-            </a:r>
-          </a:p>
-        </p:txBody>
-      </p:sp>
-      <p:sp>
-        <p:nvSpPr>
-          <p:cNvPr id="3" name="Content Placeholder 2"/>
-          <p:cNvSpPr>
-            <a:spLocks noGrp="1"/>
-          </p:cNvSpPr>
-          <p:nvPr>
-            <p:ph idx="1"/>
-          </p:nvPr>
-        </p:nvSpPr>
-        <p:spPr>
-          <a:xfrm>
-            <a:off x="457200" y="1200151"/>
-            <a:ext cx="8229600" cy="3394472"/>
-          </a:xfrm>
-        </p:spPr>
-        <p:txBody>
-          <a:bodyPr/>
-          <a:lstStyle/>
-          <a:p>
-            <a:pPr lvl="0" indent="0" marL="0">
-              <a:buNone/>
-            </a:pPr>
-            <a:r>
-              <a:rPr/>
-              <a:t>Everything that </a:t>
-            </a:r>
-            <a:r>
-              <a:rPr b="1"/>
-              <a:t>learns from data</a:t>
-            </a:r>
-            <a:r>
-              <a:rPr/>
-              <a:t> belongs inside the fold it is fitted on.</a:t>
-            </a:r>
-          </a:p>
-          <a:p>
-            <a:pPr lvl="0" indent="0" marL="0">
-              <a:buNone/>
-            </a:pPr>
-            <a:r>
-              <a:rPr/>
-              <a:t>A mean. A median. A set of neighbours. A per-category average. A set of bin edges.</a:t>
-            </a:r>
-          </a:p>
-        </p:txBody>
-      </p:sp>
-    </p:spTree>
-  </p:cSld>
-</p:sld>
-</file>
-
-<file path=ppt/slides/slide45.xml><?xml version="1.0" encoding="utf-8"?>
-<p:sld xmlns:a="http://schemas.openxmlformats.org/drawingml/2006/main" xmlns:r="http://schemas.openxmlformats.org/officeDocument/2006/relationships" xmlns:p="http://schemas.openxmlformats.org/presentationml/2006/main">
-  <p:cSld>
-    <p:spTree>
-      <p:nvGrpSpPr>
-        <p:cNvPr id="1" name=""/>
-        <p:cNvGrpSpPr/>
-        <p:nvPr/>
-      </p:nvGrpSpPr>
-      <p:grpSpPr>
-        <a:xfrm>
-          <a:off x="0" y="0"/>
-          <a:ext cx="0" cy="0"/>
-          <a:chOff x="0" y="0"/>
-          <a:chExt cx="0" cy="0"/>
-        </a:xfrm>
-      </p:grpSpPr>
-      <p:sp>
-        <p:nvSpPr>
-          <p:cNvPr id="2" name="Title 1"/>
-          <p:cNvSpPr>
-            <a:spLocks noGrp="1"/>
-          </p:cNvSpPr>
-          <p:nvPr>
-            <p:ph type="title"/>
-          </p:nvPr>
-        </p:nvSpPr>
-        <p:spPr>
-          <a:xfrm>
-            <a:off x="457200" y="205979"/>
-            <a:ext cx="8229600" cy="857250"/>
-          </a:xfrm>
-        </p:spPr>
-        <p:txBody>
-          <a:bodyPr/>
-          <a:lstStyle/>
-          <a:p>
-            <a:pPr lvl="0" indent="0" marL="0">
-              <a:buNone/>
-            </a:pPr>
-            <a:r>
-              <a:rPr/>
-              <a:t>Notebook 3, live</a:t>
-            </a:r>
-          </a:p>
-        </p:txBody>
-      </p:sp>
-      <p:sp>
-        <p:nvSpPr>
-          <p:cNvPr id="3" name="Content Placeholder 2"/>
-          <p:cNvSpPr>
-            <a:spLocks noGrp="1"/>
-          </p:cNvSpPr>
-          <p:nvPr>
-            <p:ph idx="1"/>
-          </p:nvPr>
-        </p:nvSpPr>
-        <p:spPr>
-          <a:xfrm>
-            <a:off x="457200" y="1200151"/>
-            <a:ext cx="8229600" cy="3394472"/>
-          </a:xfrm>
-        </p:spPr>
-        <p:txBody>
-          <a:bodyPr/>
-          <a:lstStyle/>
-          <a:p>
-            <a:pPr lvl="0" indent="0" marL="0">
-              <a:buNone/>
-            </a:pPr>
-            <a:r>
-              <a:rPr/>
-              <a:t>Trace the imputation leak. Watch the encoding leak manufacture 0.89 from noise.</a:t>
-            </a:r>
-          </a:p>
-        </p:txBody>
-      </p:sp>
-    </p:spTree>
-  </p:cSld>
-</p:sld>
-</file>
-
 <file path=ppt/slides/slide46.xml><?xml version="1.0" encoding="utf-8"?>
 <p:sld xmlns:a="http://schemas.openxmlformats.org/drawingml/2006/main" xmlns:r="http://schemas.openxmlformats.org/officeDocument/2006/relationships" xmlns:p="http://schemas.openxmlformats.org/presentationml/2006/main">
   <p:cSld>
@@ -12789,7 +12992,7 @@
             </a:pPr>
             <a:r>
               <a:rPr/>
-              <a:t>What we did today</a:t>
+              <a:t>The fix</a:t>
             </a:r>
           </a:p>
         </p:txBody>
@@ -12814,56 +13017,35 @@
           <a:bodyPr/>
           <a:lstStyle/>
           <a:p>
-            <a:pPr lvl="0"/>
-            <a:r>
-              <a:rPr/>
-              <a:t>Explored before transforming — types, gaps, shape, correlations</a:t>
-            </a:r>
-          </a:p>
-          <a:p>
-            <a:pPr lvl="0"/>
-            <a:r>
-              <a:rPr/>
-              <a:t>Diagnosed </a:t>
-            </a:r>
-            <a:r>
-              <a:rPr i="1"/>
-              <a:t>why</a:t>
-            </a:r>
-            <a:r>
-              <a:rPr/>
-              <a:t> values are missing, not just </a:t>
-            </a:r>
-            <a:r>
-              <a:rPr i="1"/>
-              <a:t>how many</a:t>
-            </a:r>
-          </a:p>
-          <a:p>
-            <a:pPr lvl="0"/>
-            <a:r>
-              <a:rPr/>
-              <a:t>Two outlier rules, and what neither can tell you</a:t>
-            </a:r>
-          </a:p>
-          <a:p>
-            <a:pPr lvl="0"/>
-            <a:r>
-              <a:rPr/>
-              <a:t>Scaling, encoding, engineering — all inside </a:t>
-            </a:r>
+            <a:pPr lvl="0" indent="0" marL="0">
+              <a:buNone/>
+            </a:pPr>
             <a:r>
               <a:rPr>
                 <a:latin typeface="Courier"/>
               </a:rPr>
-              <a:t>Pipeline</a:t>
-            </a:r>
-          </a:p>
-          <a:p>
-            <a:pPr lvl="0"/>
-            <a:r>
-              <a:rPr/>
-              <a:t>Two leaks that look nothing like leaking</a:t>
+              <a:t>sklearn.preprocessing.TargetEncoder</a:t>
+            </a:r>
+            <a:r>
+              <a:rPr/>
+              <a:t> — cross-fitted inside the pipeline.</a:t>
+            </a:r>
+          </a:p>
+          <a:p>
+            <a:pPr lvl="0" indent="0" marL="0">
+              <a:buNone/>
+            </a:pPr>
+            <a:r>
+              <a:rPr/>
+              <a:t>Each row’s encoded value comes from </a:t>
+            </a:r>
+            <a:r>
+              <a:rPr b="1"/>
+              <a:t>other</a:t>
+            </a:r>
+            <a:r>
+              <a:rPr/>
+              <a:t> folds, never its own label.</a:t>
             </a:r>
           </a:p>
         </p:txBody>
@@ -12915,7 +13097,7 @@
             </a:pPr>
             <a:r>
               <a:rPr/>
-              <a:t>Homework — due Friday 9 October</a:t>
+              <a:t>The rule, restated</a:t>
             </a:r>
           </a:p>
         </p:txBody>
@@ -12944,27 +13126,25 @@
               <a:buNone/>
             </a:pPr>
             <a:r>
-              <a:rPr>
-                <a:latin typeface="Courier"/>
-              </a:rPr>
-              <a:t>Exercises/02_data_exploration_and_preparation.md</a:t>
-            </a:r>
-          </a:p>
-          <a:p>
-            <a:pPr lvl="0" indent="0" marL="0">
-              <a:buNone/>
-            </a:pPr>
-            <a:r>
-              <a:rPr/>
-              <a:t>Build the full preparation pipeline yourself, and </a:t>
+              <a:rPr/>
+              <a:t>Everything that </a:t>
             </a:r>
             <a:r>
               <a:rPr b="1"/>
-              <a:t>find a leak on purpose</a:t>
-            </a:r>
-            <a:r>
-              <a:rPr/>
-              <a:t> before fixing it.</a:t>
+              <a:t>learns from data</a:t>
+            </a:r>
+            <a:r>
+              <a:rPr/>
+              <a:t> belongs inside the fold it is fitted on.</a:t>
+            </a:r>
+          </a:p>
+          <a:p>
+            <a:pPr lvl="0" indent="0" marL="0">
+              <a:buNone/>
+            </a:pPr>
+            <a:r>
+              <a:rPr/>
+              <a:t>A mean. A median. A set of neighbours. A per-category average. A set of bin edges.</a:t>
             </a:r>
           </a:p>
         </p:txBody>
@@ -13016,7 +13196,7 @@
             </a:pPr>
             <a:r>
               <a:rPr/>
-              <a:t>Before next week</a:t>
+              <a:t>Notebook 3, live</a:t>
             </a:r>
           </a:p>
         </p:txBody>
@@ -13041,40 +13221,138 @@
           <a:bodyPr/>
           <a:lstStyle/>
           <a:p>
+            <a:pPr lvl="0" indent="0" marL="0">
+              <a:buNone/>
+            </a:pPr>
+            <a:r>
+              <a:rPr/>
+              <a:t>Trace the imputation leak. Watch the encoding leak manufacture 0.89 from noise.</a:t>
+            </a:r>
+          </a:p>
+        </p:txBody>
+      </p:sp>
+    </p:spTree>
+  </p:cSld>
+</p:sld>
+</file>
+
+<file path=ppt/slides/slide49.xml><?xml version="1.0" encoding="utf-8"?>
+<p:sld xmlns:a="http://schemas.openxmlformats.org/drawingml/2006/main" xmlns:r="http://schemas.openxmlformats.org/officeDocument/2006/relationships" xmlns:p="http://schemas.openxmlformats.org/presentationml/2006/main">
+  <p:cSld>
+    <p:spTree>
+      <p:nvGrpSpPr>
+        <p:cNvPr id="1" name=""/>
+        <p:cNvGrpSpPr/>
+        <p:nvPr/>
+      </p:nvGrpSpPr>
+      <p:grpSpPr>
+        <a:xfrm>
+          <a:off x="0" y="0"/>
+          <a:ext cx="0" cy="0"/>
+          <a:chOff x="0" y="0"/>
+          <a:chExt cx="0" cy="0"/>
+        </a:xfrm>
+      </p:grpSpPr>
+      <p:sp>
+        <p:nvSpPr>
+          <p:cNvPr id="2" name="Title 1"/>
+          <p:cNvSpPr>
+            <a:spLocks noGrp="1"/>
+          </p:cNvSpPr>
+          <p:nvPr>
+            <p:ph type="title"/>
+          </p:nvPr>
+        </p:nvSpPr>
+        <p:spPr>
+          <a:xfrm>
+            <a:off x="457200" y="205979"/>
+            <a:ext cx="8229600" cy="857250"/>
+          </a:xfrm>
+        </p:spPr>
+        <p:txBody>
+          <a:bodyPr/>
+          <a:lstStyle/>
+          <a:p>
+            <a:pPr lvl="0" indent="0" marL="0">
+              <a:buNone/>
+            </a:pPr>
+            <a:r>
+              <a:rPr/>
+              <a:t>What we did today</a:t>
+            </a:r>
+          </a:p>
+        </p:txBody>
+      </p:sp>
+      <p:sp>
+        <p:nvSpPr>
+          <p:cNvPr id="3" name="Content Placeholder 2"/>
+          <p:cNvSpPr>
+            <a:spLocks noGrp="1"/>
+          </p:cNvSpPr>
+          <p:nvPr>
+            <p:ph idx="1"/>
+          </p:nvPr>
+        </p:nvSpPr>
+        <p:spPr>
+          <a:xfrm>
+            <a:off x="457200" y="1200151"/>
+            <a:ext cx="8229600" cy="3394472"/>
+          </a:xfrm>
+        </p:spPr>
+        <p:txBody>
+          <a:bodyPr/>
+          <a:lstStyle/>
+          <a:p>
             <a:pPr lvl="0"/>
             <a:r>
               <a:rPr/>
-              <a:t>Work the three notebooks in order</a:t>
+              <a:t>Explored before transforming — types, gaps, shape, correlations</a:t>
             </a:r>
           </a:p>
           <a:p>
             <a:pPr lvl="0"/>
             <a:r>
               <a:rPr/>
-              <a:t>Read the handout — the derivations are examinable</a:t>
+              <a:t>Diagnosed </a:t>
+            </a:r>
+            <a:r>
+              <a:rPr i="1"/>
+              <a:t>why</a:t>
+            </a:r>
+            <a:r>
+              <a:rPr/>
+              <a:t> values are missing, not just </a:t>
+            </a:r>
+            <a:r>
+              <a:rPr i="1"/>
+              <a:t>how many</a:t>
             </a:r>
           </a:p>
           <a:p>
             <a:pPr lvl="0"/>
             <a:r>
               <a:rPr/>
-              <a:t>Take the quiz</a:t>
+              <a:t>Two outlier rules, and what neither can tell you</a:t>
             </a:r>
           </a:p>
           <a:p>
             <a:pPr lvl="0"/>
             <a:r>
-              <a:rPr b="1"/>
-              <a:t>Do the exercise</a:t>
-            </a:r>
-          </a:p>
-          <a:p>
-            <a:pPr lvl="0" indent="0" marL="0">
-              <a:buNone/>
-            </a:pPr>
-            <a:r>
-              <a:rPr/>
-              <a:t>Next: regression — the first model we derive completely.</a:t>
+              <a:rPr/>
+              <a:t>Scaling, encoding, engineering — all inside </a:t>
+            </a:r>
+            <a:r>
+              <a:rPr>
+                <a:latin typeface="Courier"/>
+              </a:rPr>
+              <a:t>Pipeline</a:t>
+            </a:r>
+          </a:p>
+          <a:p>
+            <a:pPr lvl="0"/>
+            <a:r>
+              <a:rPr/>
+              <a:t>Two leaks that look nothing like leaking</a:t>
             </a:r>
           </a:p>
         </p:txBody>
@@ -13190,6 +13468,217 @@
             <a:r>
               <a:rPr b="1"/>
               <a:t>no signal</a:t>
+            </a:r>
+          </a:p>
+        </p:txBody>
+      </p:sp>
+    </p:spTree>
+  </p:cSld>
+</p:sld>
+</file>
+
+<file path=ppt/slides/slide50.xml><?xml version="1.0" encoding="utf-8"?>
+<p:sld xmlns:a="http://schemas.openxmlformats.org/drawingml/2006/main" xmlns:r="http://schemas.openxmlformats.org/officeDocument/2006/relationships" xmlns:p="http://schemas.openxmlformats.org/presentationml/2006/main">
+  <p:cSld>
+    <p:spTree>
+      <p:nvGrpSpPr>
+        <p:cNvPr id="1" name=""/>
+        <p:cNvGrpSpPr/>
+        <p:nvPr/>
+      </p:nvGrpSpPr>
+      <p:grpSpPr>
+        <a:xfrm>
+          <a:off x="0" y="0"/>
+          <a:ext cx="0" cy="0"/>
+          <a:chOff x="0" y="0"/>
+          <a:chExt cx="0" cy="0"/>
+        </a:xfrm>
+      </p:grpSpPr>
+      <p:sp>
+        <p:nvSpPr>
+          <p:cNvPr id="2" name="Title 1"/>
+          <p:cNvSpPr>
+            <a:spLocks noGrp="1"/>
+          </p:cNvSpPr>
+          <p:nvPr>
+            <p:ph type="title"/>
+          </p:nvPr>
+        </p:nvSpPr>
+        <p:spPr>
+          <a:xfrm>
+            <a:off x="457200" y="205979"/>
+            <a:ext cx="8229600" cy="857250"/>
+          </a:xfrm>
+        </p:spPr>
+        <p:txBody>
+          <a:bodyPr/>
+          <a:lstStyle/>
+          <a:p>
+            <a:pPr lvl="0" indent="0" marL="0">
+              <a:buNone/>
+            </a:pPr>
+            <a:r>
+              <a:rPr/>
+              <a:t>Homework — due Friday 9 October</a:t>
+            </a:r>
+          </a:p>
+        </p:txBody>
+      </p:sp>
+      <p:sp>
+        <p:nvSpPr>
+          <p:cNvPr id="3" name="Content Placeholder 2"/>
+          <p:cNvSpPr>
+            <a:spLocks noGrp="1"/>
+          </p:cNvSpPr>
+          <p:nvPr>
+            <p:ph idx="1"/>
+          </p:nvPr>
+        </p:nvSpPr>
+        <p:spPr>
+          <a:xfrm>
+            <a:off x="457200" y="1200151"/>
+            <a:ext cx="8229600" cy="3394472"/>
+          </a:xfrm>
+        </p:spPr>
+        <p:txBody>
+          <a:bodyPr/>
+          <a:lstStyle/>
+          <a:p>
+            <a:pPr lvl="0" indent="0" marL="0">
+              <a:buNone/>
+            </a:pPr>
+            <a:r>
+              <a:rPr>
+                <a:latin typeface="Courier"/>
+              </a:rPr>
+              <a:t>Exercises/02_data_exploration_and_preparation.md</a:t>
+            </a:r>
+          </a:p>
+          <a:p>
+            <a:pPr lvl="0" indent="0" marL="0">
+              <a:buNone/>
+            </a:pPr>
+            <a:r>
+              <a:rPr/>
+              <a:t>Build the full preparation pipeline yourself, and </a:t>
+            </a:r>
+            <a:r>
+              <a:rPr b="1"/>
+              <a:t>find a leak on purpose</a:t>
+            </a:r>
+            <a:r>
+              <a:rPr/>
+              <a:t> before fixing it.</a:t>
+            </a:r>
+          </a:p>
+        </p:txBody>
+      </p:sp>
+    </p:spTree>
+  </p:cSld>
+</p:sld>
+</file>
+
+<file path=ppt/slides/slide51.xml><?xml version="1.0" encoding="utf-8"?>
+<p:sld xmlns:a="http://schemas.openxmlformats.org/drawingml/2006/main" xmlns:r="http://schemas.openxmlformats.org/officeDocument/2006/relationships" xmlns:p="http://schemas.openxmlformats.org/presentationml/2006/main">
+  <p:cSld>
+    <p:spTree>
+      <p:nvGrpSpPr>
+        <p:cNvPr id="1" name=""/>
+        <p:cNvGrpSpPr/>
+        <p:nvPr/>
+      </p:nvGrpSpPr>
+      <p:grpSpPr>
+        <a:xfrm>
+          <a:off x="0" y="0"/>
+          <a:ext cx="0" cy="0"/>
+          <a:chOff x="0" y="0"/>
+          <a:chExt cx="0" cy="0"/>
+        </a:xfrm>
+      </p:grpSpPr>
+      <p:sp>
+        <p:nvSpPr>
+          <p:cNvPr id="2" name="Title 1"/>
+          <p:cNvSpPr>
+            <a:spLocks noGrp="1"/>
+          </p:cNvSpPr>
+          <p:nvPr>
+            <p:ph type="title"/>
+          </p:nvPr>
+        </p:nvSpPr>
+        <p:spPr>
+          <a:xfrm>
+            <a:off x="457200" y="205979"/>
+            <a:ext cx="8229600" cy="857250"/>
+          </a:xfrm>
+        </p:spPr>
+        <p:txBody>
+          <a:bodyPr/>
+          <a:lstStyle/>
+          <a:p>
+            <a:pPr lvl="0" indent="0" marL="0">
+              <a:buNone/>
+            </a:pPr>
+            <a:r>
+              <a:rPr/>
+              <a:t>Before next week</a:t>
+            </a:r>
+          </a:p>
+        </p:txBody>
+      </p:sp>
+      <p:sp>
+        <p:nvSpPr>
+          <p:cNvPr id="3" name="Content Placeholder 2"/>
+          <p:cNvSpPr>
+            <a:spLocks noGrp="1"/>
+          </p:cNvSpPr>
+          <p:nvPr>
+            <p:ph idx="1"/>
+          </p:nvPr>
+        </p:nvSpPr>
+        <p:spPr>
+          <a:xfrm>
+            <a:off x="457200" y="1200151"/>
+            <a:ext cx="8229600" cy="3394472"/>
+          </a:xfrm>
+        </p:spPr>
+        <p:txBody>
+          <a:bodyPr/>
+          <a:lstStyle/>
+          <a:p>
+            <a:pPr lvl="0"/>
+            <a:r>
+              <a:rPr/>
+              <a:t>Work the three notebooks in order</a:t>
+            </a:r>
+          </a:p>
+          <a:p>
+            <a:pPr lvl="0"/>
+            <a:r>
+              <a:rPr/>
+              <a:t>Read the handout — the derivations are examinable</a:t>
+            </a:r>
+          </a:p>
+          <a:p>
+            <a:pPr lvl="0"/>
+            <a:r>
+              <a:rPr/>
+              <a:t>Take the quiz</a:t>
+            </a:r>
+          </a:p>
+          <a:p>
+            <a:pPr lvl="0"/>
+            <a:r>
+              <a:rPr b="1"/>
+              <a:t>Do the exercise</a:t>
+            </a:r>
+          </a:p>
+          <a:p>
+            <a:pPr lvl="0" indent="0" marL="0">
+              <a:buNone/>
+            </a:pPr>
+            <a:r>
+              <a:rPr/>
+              <a:t>Next: regression — the first model we derive completely.</a:t>
             </a:r>
           </a:p>
         </p:txBody>

--- a/Lessons/02_data_exploration_and_preparation/Slides/data_exploration_and_preparation_slides.pptx
+++ b/Lessons/02_data_exploration_and_preparation/Slides/data_exploration_and_preparation_slides.pptx
@@ -1768,35 +1768,35 @@
             </a:pPr>
             <a:r>
               <a:rPr/>
-              <a:t>Set up the problem before the mathematics. Ask: if two features live on very different scales, can a single learning rate be right for both directions at once? Let the room reason about it before the derivation.</a:t>
-            </a:r>
-          </a:p>
-          <a:p>
-            <a:pPr lvl="0" indent="0" marL="0">
-              <a:buNone/>
-            </a:pPr>
-          </a:p>
-          <a:p>
-            <a:pPr lvl="0" indent="0" marL="0">
-              <a:buNone/>
-            </a:pPr>
-            <a:r>
-              <a:rPr/>
-              <a:t>Give them the concrete pair from the dataset: tenure runs 0 to 70, monthly charges 15 to 150. The variances differ by roughly an order of magnitude, and gradient descent takes one step size along every axis simultaneously.</a:t>
-            </a:r>
-          </a:p>
-          <a:p>
-            <a:pPr lvl="0" indent="0" marL="0">
-              <a:buNone/>
-            </a:pPr>
-          </a:p>
-          <a:p>
-            <a:pPr lvl="0" indent="0" marL="0">
-              <a:buNone/>
-            </a:pPr>
-            <a:r>
-              <a:rPr/>
-              <a:t>Handout Section 5.2 does it properly, and the punchline is worth previewing: the safe learning rate is set by the largest-variance feature, so progress along the smallest-variance direction is throttled by their ratio. The number of iterations scales with the condition number. Scaling is not cosmetic - it changes how long training takes, and sometimes whether it converges at all.</a:t>
+              <a:t>Set up the problem before any mathematics. Ask: if two features live on very different scales, can a single step size be right for both directions at once? Let the room reason about it first.</a:t>
+            </a:r>
+          </a:p>
+          <a:p>
+            <a:pPr lvl="0" indent="0" marL="0">
+              <a:buNone/>
+            </a:pPr>
+          </a:p>
+          <a:p>
+            <a:pPr lvl="0" indent="0" marL="0">
+              <a:buNone/>
+            </a:pPr>
+            <a:r>
+              <a:rPr/>
+              <a:t>Be honest about this dataset, because a sharp student will check: once the outliers of Section 4 are removed, these two columns have comparable spreads - the ratio of their standard deviations is about 0.8. They are not a dramatic case, which is exactly why notebook 2 builds a toy pair with a 110:1 variance ratio to make the effect unambiguous. The point is not that churn data is pathological; it is that you cannot count on it not being.</a:t>
+            </a:r>
+          </a:p>
+          <a:p>
+            <a:pPr lvl="0" indent="0" marL="0">
+              <a:buNone/>
+            </a:pPr>
+          </a:p>
+          <a:p>
+            <a:pPr lvl="0" indent="0" marL="0">
+              <a:buNone/>
+            </a:pPr>
+            <a:r>
+              <a:rPr/>
+              <a:t>The punchline, which handout Section 5.2 states: the safe step size is set by the feature with the largest spread, so progress along the smallest-spread direction is throttled by their ratio. Scaling is not cosmetic - it changes how long training takes, and sometimes whether it converges at all. The derivation is deliberately NOT here: it belongs with gradient descent itself, Lesson 3.</a:t>
             </a:r>
           </a:p>
         </p:txBody>
@@ -1878,49 +1878,63 @@
             </a:pPr>
             <a:r>
               <a:rPr/>
-              <a:t>The figure is the derivation made visible. Left: variances differ, so the bowl is a narrow valley. One step size is bound by the steep axis, so it bounces across the valley while barely advancing along it.</a:t>
-            </a:r>
-          </a:p>
-          <a:p>
-            <a:pPr lvl="0" indent="0" marL="0">
-              <a:buNone/>
-            </a:pPr>
-          </a:p>
-          <a:p>
-            <a:pPr lvl="0" indent="0" marL="0">
-              <a:buNone/>
-            </a:pPr>
-            <a:r>
-              <a:rPr/>
-              <a:t>Right: after scaling, the bowl is round and every step points at the minimum.</a:t>
-            </a:r>
-          </a:p>
-          <a:p>
-            <a:pPr lvl="0" indent="0" marL="0">
-              <a:buNone/>
-            </a:pPr>
-          </a:p>
-          <a:p>
-            <a:pPr lvl="0" indent="0" marL="0">
-              <a:buNone/>
-            </a:pPr>
-            <a:r>
-              <a:rPr/>
-              <a:t>Give them the number that governs it - the condition number, the ratio of largest to smallest variance - and say that the iteration count scales with it. Scaling is not cosmetic: it changes how long training takes, and sometimes whether it converges at all.</a:t>
-            </a:r>
-          </a:p>
-          <a:p>
-            <a:pPr lvl="0" indent="0" marL="0">
-              <a:buNone/>
-            </a:pPr>
-          </a:p>
-          <a:p>
-            <a:pPr lvl="0" indent="0" marL="0">
-              <a:buNone/>
-            </a:pPr>
-            <a:r>
-              <a:rPr/>
-              <a:t>The derivation is Handout Section 5.2: the Hessian of the squared-error cost is the feature covariance matrix, so for uncorrelated centred features it is diagonal with the variances on it. That is why the picture is an axis-aligned ellipse, and why its elongation is the condition number.</a:t>
+              <a:t>Do this one entirely on the picture; there is no algebra on this slide by choice.</a:t>
+            </a:r>
+          </a:p>
+          <a:p>
+            <a:pPr lvl="0" indent="0" marL="0">
+              <a:buNone/>
+            </a:pPr>
+          </a:p>
+          <a:p>
+            <a:pPr lvl="0" indent="0" marL="0">
+              <a:buNone/>
+            </a:pPr>
+            <a:r>
+              <a:rPr/>
+              <a:t>Left: the two features have different spreads, so the cost surface is a narrow ravine - steep across, almost flat along. One step size has to serve both. Long enough to advance along the flat direction and it overshoots the steep one and bounces from wall to wall; short enough to be safe on the steep one and it crawls along the flat one.</a:t>
+            </a:r>
+          </a:p>
+          <a:p>
+            <a:pPr lvl="0" indent="0" marL="0">
+              <a:buNone/>
+            </a:pPr>
+          </a:p>
+          <a:p>
+            <a:pPr lvl="0" indent="0" marL="0">
+              <a:buNone/>
+            </a:pPr>
+            <a:r>
+              <a:rPr/>
+              <a:t>Right: after scaling, the ravine is a bowl and every step points at the minimum.</a:t>
+            </a:r>
+          </a:p>
+          <a:p>
+            <a:pPr lvl="0" indent="0" marL="0">
+              <a:buNone/>
+            </a:pPr>
+          </a:p>
+          <a:p>
+            <a:pPr lvl="0" indent="0" marL="0">
+              <a:buNone/>
+            </a:pPr>
+            <a:r>
+              <a:rPr/>
+              <a:t>Give them the handle without the derivation: how stretched the ravine is - the ratio of the largest feature variance to the smallest - is called the condition number, and the number of steps you need grows with it.</a:t>
+            </a:r>
+          </a:p>
+          <a:p>
+            <a:pPr lvl="0" indent="0" marL="0">
+              <a:buNone/>
+            </a:pPr>
+          </a:p>
+          <a:p>
+            <a:pPr lvl="0" indent="0" marL="0">
+              <a:buNone/>
+            </a:pPr>
+            <a:r>
+              <a:rPr/>
+              <a:t>If someone asks WHY the surface has that shape, that is the right question and the honest answer is “Lesson 3, where we derive gradient descent” - its Section 4.4 puts the number on it: standardising the housing design matrix takes the condition number from 285 to 3.4.</a:t>
             </a:r>
           </a:p>
         </p:txBody>
@@ -2016,7 +2030,7 @@
             </a:pPr>
             <a:r>
               <a:rPr/>
-              <a:t>This is a controlled toy (notebook 2), built with exactly a 100:1 variance ratio so the effect is unambiguous - real churn features show the same direction of effect more mildly, since monthly_charges has roughly 3-4 times the spread of tenure_months, not 100 times.</a:t>
+              <a:t>This is a controlled toy (notebook 2), built with exactly a 100:1 variance ratio so the effect is unambiguous. On the real churn columns, once cleaned, the two spreads are within about 20% of each other - so this toy is not exaggerating a big effect in the data, it is manufacturing a clear one to show a mechanism.</a:t>
             </a:r>
           </a:p>
         </p:txBody>
@@ -9457,8 +9471,8 @@
         </p:blipFill>
         <p:spPr bwMode="auto">
           <a:xfrm>
-            <a:off x="1098554" y="1166099"/>
-            <a:ext cx="6946891" cy="3360181"/>
+            <a:off x="1111139" y="1166099"/>
+            <a:ext cx="6921721" cy="3360181"/>
           </a:xfrm>
           <a:prstGeom prst="rect">
             <a:avLst/>
@@ -10149,7 +10163,7 @@
             </a:r>
             <a:r>
               <a:rPr/>
-              <a:t>: 0–70. </a:t>
+              <a:t>: 0–72. </a:t>
             </a:r>
             <a:r>
               <a:rPr>
@@ -10159,7 +10173,7 @@
             </a:r>
             <a:r>
               <a:rPr/>
-              <a:t>: 15–150.</a:t>
+              <a:t>: 15–128.</a:t>
             </a:r>
           </a:p>
           <a:p>
@@ -10211,8 +10225,8 @@
         </p:nvSpPr>
         <p:spPr>
           <a:xfrm>
-            <a:off x="457200" y="205740"/>
-            <a:ext cx="8229600" cy="874395"/>
+            <a:off x="457200" y="205979"/>
+            <a:ext cx="8229600" cy="857250"/>
           </a:xfrm>
         </p:spPr>
         <p:txBody>
@@ -10224,37 +10238,7 @@
             </a:pPr>
             <a:r>
               <a:rPr/>
-              <a:t>The Hessian is the feature covariance</a:t>
-            </a:r>
-          </a:p>
-        </p:txBody>
-      </p:sp>
-      <p:sp>
-        <p:nvSpPr>
-          <p:cNvPr id="4" name="Text Placeholder 3"/>
-          <p:cNvSpPr>
-            <a:spLocks noGrp="1"/>
-          </p:cNvSpPr>
-          <p:nvPr>
-            <p:ph idx="2" sz="half" type="body"/>
-          </p:nvPr>
-        </p:nvSpPr>
-        <p:spPr>
-          <a:xfrm>
-            <a:off x="457200" y="1183005"/>
-            <a:ext cx="8229600" cy="874395"/>
-          </a:xfrm>
-        </p:spPr>
-        <p:txBody>
-          <a:bodyPr/>
-          <a:lstStyle/>
-          <a:p>
-            <a:pPr lvl="0" indent="0" marL="0">
-              <a:buNone/>
-            </a:pPr>
-            <a:r>
-              <a:rPr/>
-              <a:t>For uncorrelated, centred features, H is diagonal — the variances sit on it.</a:t>
+              <a:t>A ravine, not a bowl</a:t>
             </a:r>
           </a:p>
         </p:txBody>
@@ -10275,8 +10259,8 @@
         </p:blipFill>
         <p:spPr bwMode="auto">
           <a:xfrm>
-            <a:off x="2263417" y="2160270"/>
-            <a:ext cx="4617165" cy="2366010"/>
+            <a:off x="1293621" y="1166099"/>
+            <a:ext cx="6556757" cy="3360181"/>
           </a:xfrm>
           <a:prstGeom prst="rect">
             <a:avLst/>
@@ -10663,8 +10647,8 @@
         </p:blipFill>
         <p:spPr bwMode="auto">
           <a:xfrm>
-            <a:off x="702129" y="1166099"/>
-            <a:ext cx="7739742" cy="3360181"/>
+            <a:off x="651789" y="1166099"/>
+            <a:ext cx="7840422" cy="3360181"/>
           </a:xfrm>
           <a:prstGeom prst="rect">
             <a:avLst/>
@@ -11219,7 +11203,7 @@
       </p:sp>
       <p:pic>
         <p:nvPicPr>
-          <p:cNvPr descr="correlation_heatmap.png" id="0" name="Picture 1"/>
+          <p:cNvPr descr="onehot_width.png" id="0" name="Picture 1"/>
           <p:cNvPicPr>
             <a:picLocks noGrp="1" noChangeAspect="1"/>
           </p:cNvPicPr>
@@ -11233,8 +11217,8 @@
         </p:blipFill>
         <p:spPr bwMode="auto">
           <a:xfrm>
-            <a:off x="2577286" y="1166099"/>
-            <a:ext cx="3989428" cy="3360181"/>
+            <a:off x="457200" y="1493639"/>
+            <a:ext cx="8229600" cy="2705100"/>
           </a:xfrm>
           <a:prstGeom prst="rect">
             <a:avLst/>
@@ -12555,8 +12539,8 @@
         </p:blipFill>
         <p:spPr bwMode="auto">
           <a:xfrm>
-            <a:off x="457201" y="1176140"/>
-            <a:ext cx="8229597" cy="3340099"/>
+            <a:off x="457200" y="1182489"/>
+            <a:ext cx="8229600" cy="3327400"/>
           </a:xfrm>
           <a:prstGeom prst="rect">
             <a:avLst/>

--- a/Lessons/02_data_exploration_and_preparation/Slides/data_exploration_and_preparation_slides.pptx
+++ b/Lessons/02_data_exploration_and_preparation/Slides/data_exploration_and_preparation_slides.pptx
@@ -12721,8 +12721,8 @@
         </p:blipFill>
         <p:spPr bwMode="auto">
           <a:xfrm>
-            <a:off x="1853651" y="1166099"/>
-            <a:ext cx="5436697" cy="3360181"/>
+            <a:off x="1834774" y="1166099"/>
+            <a:ext cx="5474452" cy="3360181"/>
           </a:xfrm>
           <a:prstGeom prst="rect">
             <a:avLst/>
@@ -13898,8 +13898,8 @@
         </p:blipFill>
         <p:spPr bwMode="auto">
           <a:xfrm>
-            <a:off x="1343961" y="1166099"/>
-            <a:ext cx="6456078" cy="3360181"/>
+            <a:off x="1325084" y="1166099"/>
+            <a:ext cx="6493832" cy="3360181"/>
           </a:xfrm>
           <a:prstGeom prst="rect">
             <a:avLst/>

--- a/Lessons/02_data_exploration_and_preparation/Slides/data_exploration_and_preparation_slides.pptx
+++ b/Lessons/02_data_exploration_and_preparation/Slides/data_exploration_and_preparation_slides.pptx
@@ -3266,7 +3266,7 @@
             </a:pPr>
             <a:r>
               <a:rPr/>
-              <a:t>The matrix shows where the errors sit: read the bottom-left cell, the churners the model missed. The area under the receiver operating characteristic curve — AUC, which Lesson 4 builds properly — at 0.752 is unaffected by the imbalance and says there is real signal that accuracy is hiding.</a:t>
+              <a:t>The matrix shows where the errors sit: read the bottom-left cell, the churners the model missed. The area under the receiver operating characteristic curve - AUC, which Lesson 4 builds properly - at 0.752 is unaffected by the imbalance and says there is real signal that accuracy is hiding.</a:t>
             </a:r>
           </a:p>
           <a:p>
@@ -8799,7 +8799,7 @@
             </a:pPr>
             <a:r>
               <a:rPr/>
-              <a:t>Lesson 2 — Data: Exploration and Preparation</a:t>
+              <a:t>Lesson 2: Data Exploration and Preparation</a:t>
             </a:r>
           </a:p>
         </p:txBody>
@@ -8835,7 +8835,7 @@
             <a:br/>
             <a:r>
               <a:rPr/>
-              <a:t>Fabio Antonini — Università degli Studi dell’Aquila</a:t>
+              <a:t>Fabio Antonini, Università degli Studi dell’Aquila</a:t>
             </a:r>
           </a:p>
         </p:txBody>
@@ -8947,7 +8947,7 @@
             </a:pPr>
             <a:r>
               <a:rPr/>
-              <a:t>Every correlation involving the imputed column shrinks — even under MCAR.</a:t>
+              <a:t>Every correlation involving the imputed column shrinks, even under MCAR.</a:t>
             </a:r>
           </a:p>
         </p:txBody>
@@ -9059,7 +9059,7 @@
             </a:pPr>
             <a:r>
               <a:rPr/>
-              <a:t>Missing more often for long-tenure customers — not by chance.</a:t>
+              <a:t>Missing more often for long-tenure customers, not by chance.</a:t>
             </a:r>
           </a:p>
           <a:p>
@@ -9165,7 +9165,7 @@
             </a:r>
             <a:r>
               <a:rPr/>
-              <a:t> — only if few, and only if MCAR</a:t>
+              <a:t>: only if few, and only if MCAR</a:t>
             </a:r>
           </a:p>
           <a:p>
@@ -9176,7 +9176,7 @@
             </a:r>
             <a:r>
               <a:rPr/>
-              <a:t> — if it is missing too often to help</a:t>
+              <a:t>: if it is missing too often to help</a:t>
             </a:r>
           </a:p>
           <a:p>
@@ -9187,7 +9187,7 @@
             </a:r>
             <a:r>
               <a:rPr/>
-              <a:t> — mean/median, most-frequent, </a:t>
+              <a:t>: mean/median, most-frequent, </a:t>
             </a:r>
             <a:r>
               <a:rPr>
@@ -9204,7 +9204,7 @@
             </a:r>
             <a:r>
               <a:rPr/>
-              <a:t> — keeps MAR signal alive</a:t>
+              <a:t>: keeps MAR signal alive</a:t>
             </a:r>
           </a:p>
         </p:txBody>
@@ -9368,7 +9368,7 @@
             </a:pPr>
             <a:r>
               <a:rPr/>
-              <a:t>Two standard rules for flagging an unusual value — the z-score, and Tukey’s fence built on the interquartile range (IQR):</a:t>
+              <a:t>Two standard rules for flagging an unusual value: the z-score, and Tukey’s fence built on the interquartile range (IQR):</a:t>
             </a:r>
           </a:p>
         </p:txBody>
@@ -9450,7 +9450,7 @@
             </a:pPr>
             <a:r>
               <a:rPr/>
-              <a:t>Calibrated to agree — on a normal column</a:t>
+              <a:t>Calibrated to agree: on a normal column</a:t>
             </a:r>
           </a:p>
         </p:txBody>
@@ -9696,7 +9696,7 @@
             </a:r>
             <a:r>
               <a:rPr/>
-              <a:t> — a different question entirely</a:t>
+              <a:t>: a different question entirely</a:t>
             </a:r>
           </a:p>
         </p:txBody>
@@ -9830,7 +9830,7 @@
             </a:r>
             <a:r>
               <a:rPr/>
-              <a:t> it — unusual is not the same as wrong</a:t>
+              <a:t> it: unusual is not the same as wrong</a:t>
             </a:r>
           </a:p>
         </p:txBody>
@@ -9912,7 +9912,7 @@
             </a:pPr>
             <a:r>
               <a:rPr/>
-              <a:t>Exploration, missingness mechanisms, both outlier rules — from scratch.</a:t>
+              <a:t>Exploration, missingness mechanisms, both outlier rules: from scratch.</a:t>
             </a:r>
           </a:p>
         </p:txBody>
@@ -10840,7 +10840,7 @@
             <a:pPr lvl="0"/>
             <a:r>
               <a:rPr/>
-              <a:t>The dangerous one — next</a:t>
+              <a:t>The dangerous one comes next</a:t>
             </a:r>
           </a:p>
         </p:txBody>
@@ -11316,7 +11316,7 @@
             </a:r>
             <a:r>
               <a:rPr/>
-              <a:t> learned parameter — not just “the model part”.</a:t>
+              <a:t> learned parameter, not just “the model part”.</a:t>
             </a:r>
           </a:p>
         </p:txBody>
@@ -11756,7 +11756,7 @@
             </a:r>
             <a:r>
               <a:rPr/>
-              <a:t> AUC — area under the receiver operating characteristic curve</a:t>
+              <a:t> AUC (area under the receiver operating characteristic curve)</a:t>
             </a:r>
           </a:p>
           <a:p>
@@ -11929,7 +11929,7 @@
             </a:pPr>
             <a:r>
               <a:rPr/>
-              <a:t>Ratios, interactions, binning — a linear model cannot invent these itself. AUC: 0.752 → 0.754, a modest but real gain.</a:t>
+              <a:t>Ratios, interactions, binning: a linear model cannot invent these itself. AUC: 0.752 → 0.754, a modest but real gain.</a:t>
             </a:r>
           </a:p>
         </p:txBody>
@@ -12195,7 +12195,7 @@
             </a:pPr>
             <a:r>
               <a:rPr/>
-              <a:t>Leak 1 — impute before splitting</a:t>
+              <a:t>Leak 1: impute before splitting</a:t>
             </a:r>
           </a:p>
         </p:txBody>
@@ -12600,7 +12600,7 @@
             </a:pPr>
             <a:r>
               <a:rPr/>
-              <a:t>Leak 2 — encode before splitting</a:t>
+              <a:t>Leak 2: encode before splitting</a:t>
             </a:r>
           </a:p>
         </p:txBody>
@@ -13012,7 +13012,7 @@
             </a:r>
             <a:r>
               <a:rPr/>
-              <a:t> — cross-fitted inside the pipeline.</a:t>
+              <a:t>: cross-fitted inside the pipeline.</a:t>
             </a:r>
           </a:p>
           <a:p>
@@ -13290,7 +13290,7 @@
             <a:pPr lvl="0"/>
             <a:r>
               <a:rPr/>
-              <a:t>Explored before transforming — types, gaps, shape, correlations</a:t>
+              <a:t>Explored before transforming: types, gaps, shape, correlations</a:t>
             </a:r>
           </a:p>
           <a:p>
@@ -13323,7 +13323,7 @@
             <a:pPr lvl="0"/>
             <a:r>
               <a:rPr/>
-              <a:t>Scaling, encoding, engineering — all inside </a:t>
+              <a:t>Scaling, encoding, engineering: all inside </a:t>
             </a:r>
             <a:r>
               <a:rPr>
@@ -13503,7 +13503,7 @@
             </a:pPr>
             <a:r>
               <a:rPr/>
-              <a:t>Homework — due Friday 9 October</a:t>
+              <a:t>Homework: due Friday 9 October</a:t>
             </a:r>
           </a:p>
         </p:txBody>
@@ -13639,7 +13639,7 @@
             <a:pPr lvl="0"/>
             <a:r>
               <a:rPr/>
-              <a:t>Read the handout — the derivations are examinable</a:t>
+              <a:t>Read the handout: the derivations are examinable</a:t>
             </a:r>
           </a:p>
           <a:p>
@@ -13662,7 +13662,7 @@
             </a:pPr>
             <a:r>
               <a:rPr/>
-              <a:t>Next: regression — the first model we derive completely.</a:t>
+              <a:t>Next: regression, the first model we derive completely.</a:t>
             </a:r>
           </a:p>
         </p:txBody>
@@ -13760,7 +13760,7 @@
             </a:r>
             <a:r>
               <a:rPr/>
-              <a:t>, class balance, first — always.</a:t>
+              <a:t>, class balance, first: always.</a:t>
             </a:r>
           </a:p>
           <a:p>
@@ -14085,7 +14085,7 @@
             <a:pPr lvl="0"/>
             <a:r>
               <a:rPr/>
-              <a:t>The bias question is not “is this fair” — it is “what does filling it cost”</a:t>
+              <a:t>The bias question is not “is this fair”: it is “what does filling it cost”</a:t>
             </a:r>
           </a:p>
         </p:txBody>

--- a/Lessons/02_data_exploration_and_preparation/Slides/data_exploration_and_preparation_slides.pptx
+++ b/Lessons/02_data_exploration_and_preparation/Slides/data_exploration_and_preparation_slides.pptx
@@ -10259,8 +10259,8 @@
         </p:blipFill>
         <p:spPr bwMode="auto">
           <a:xfrm>
-            <a:off x="1293621" y="1166099"/>
-            <a:ext cx="6556757" cy="3360181"/>
+            <a:off x="1299914" y="1166099"/>
+            <a:ext cx="6544172" cy="3360181"/>
           </a:xfrm>
           <a:prstGeom prst="rect">
             <a:avLst/>
@@ -12539,8 +12539,8 @@
         </p:blipFill>
         <p:spPr bwMode="auto">
           <a:xfrm>
-            <a:off x="457200" y="1182489"/>
-            <a:ext cx="8229600" cy="3327400"/>
+            <a:off x="457201" y="1176140"/>
+            <a:ext cx="8229597" cy="3340099"/>
           </a:xfrm>
           <a:prstGeom prst="rect">
             <a:avLst/>
@@ -12915,8 +12915,8 @@
         </p:blipFill>
         <p:spPr bwMode="auto">
           <a:xfrm>
-            <a:off x="1564198" y="1166099"/>
-            <a:ext cx="6015604" cy="3360181"/>
+            <a:off x="1557905" y="1166099"/>
+            <a:ext cx="6028189" cy="3360181"/>
           </a:xfrm>
           <a:prstGeom prst="rect">
             <a:avLst/>

--- a/Lessons/02_data_exploration_and_preparation/Slides/data_exploration_and_preparation_slides.pptx
+++ b/Lessons/02_data_exploration_and_preparation/Slides/data_exploration_and_preparation_slides.pptx
@@ -3266,7 +3266,7 @@
             </a:pPr>
             <a:r>
               <a:rPr/>
-              <a:t>The matrix shows where the errors sit: read the bottom-left cell, the churners the model missed. The area under the receiver operating characteristic curve - AUC, which Lesson 4 builds properly - at 0.752 is unaffected by the imbalance and says there is real signal that accuracy is hiding.</a:t>
+              <a:t>The matrix shows where the errors sit: read the bottom-left cell, the churners the model missed. The area under the receiver operating characteristic curve - AUC, which Lesson 4 builds properly - at 0.751 is unaffected by the imbalance and says there is real signal that accuracy is hiding.</a:t>
             </a:r>
           </a:p>
           <a:p>
@@ -4310,7 +4310,7 @@
             </a:pPr>
             <a:r>
               <a:rPr/>
-              <a:t>Baseline without zip: AUC 0.751. Honest encoding (sklearn’s TargetEncoder, cross-fitted inside the pipeline): 0.752 - indistinguishable, correctly, since zip carries nothing. Leaky encoding, computed before the split: 0.891.</a:t>
+              <a:t>Baseline without zip: AUC 0.751. Honest encoding (sklearn’s TargetEncoder, cross-fitted inside the pipeline): 0.751 - indistinguishable, correctly, since zip carries nothing. Leaky encoding, computed before the split: 0.891.</a:t>
             </a:r>
           </a:p>
           <a:p>
@@ -11752,7 +11752,7 @@
             </a:r>
             <a:r>
               <a:rPr b="1"/>
-              <a:t>0.752</a:t>
+              <a:t>0.751</a:t>
             </a:r>
             <a:r>
               <a:rPr/>
@@ -11929,7 +11929,7 @@
             </a:pPr>
             <a:r>
               <a:rPr/>
-              <a:t>Ratios, interactions, binning: a linear model cannot invent these itself. AUC: 0.752 → 0.754, a modest but real gain.</a:t>
+              <a:t>Ratios, interactions, binning: a linear model cannot invent these itself. AUC: 0.751 → 0.754, a modest but real gain.</a:t>
             </a:r>
           </a:p>
         </p:txBody>

--- a/Lessons/02_data_exploration_and_preparation/Slides/data_exploration_and_preparation_slides.pptx
+++ b/Lessons/02_data_exploration_and_preparation/Slides/data_exploration_and_preparation_slides.pptx
@@ -5,7 +5,7 @@
     <p:sldMasterId id="2147483648" r:id="rId1"/>
   </p:sldMasterIdLst>
   <p:notesMasterIdLst>
-    <p:notesMasterId r:id="rId53"/>
+    <p:notesMasterId r:id="rId54"/>
   </p:notesMasterIdLst>
   <p:sldIdLst>
     <p:sldId id="256" r:id="rId2"/>
@@ -59,6 +59,7 @@
     <p:sldId id="304" r:id="rId50"/>
     <p:sldId id="305" r:id="rId51"/>
     <p:sldId id="306" r:id="rId52"/>
+    <p:sldId id="307" r:id="rId53"/>
   </p:sldIdLst>
   <p:sldSz cx="9144000" cy="5143500" type="screen16x9"/>
   <p:notesSz cx="6858000" cy="9144000"/>
@@ -972,35 +973,21 @@
             </a:pPr>
             <a:r>
               <a:rPr/>
-              <a:t>Handout Section 4.1. The z-score standardises and thresholds; Tukey’s rule fences off anything more than 1.5 interquartile ranges past the quartiles.</a:t>
-            </a:r>
-          </a:p>
-          <a:p>
-            <a:pPr lvl="0" indent="0" marL="0">
-              <a:buNone/>
-            </a:pPr>
-          </a:p>
-          <a:p>
-            <a:pPr lvl="0" indent="0" marL="0">
-              <a:buNone/>
-            </a:pPr>
-            <a:r>
-              <a:rPr/>
-              <a:t>Give the probabilistic reading of each, because it is what makes them more than recipes. Under normality, |z| &gt; 3 flags about 0.27% of a column. And the 1.5 is not arbitrary: for a normal column the IQR is 1.349 sigma, so the fence lands at 2.698 sigma and flags about 0.35% per tail. Tukey chose the constant precisely so the two rules agree on well-behaved data.</a:t>
-            </a:r>
-          </a:p>
-          <a:p>
-            <a:pPr lvl="0" indent="0" marL="0">
-              <a:buNone/>
-            </a:pPr>
-          </a:p>
-          <a:p>
-            <a:pPr lvl="0" indent="0" marL="0">
-              <a:buNone/>
-            </a:pPr>
-            <a:r>
-              <a:rPr/>
-              <a:t>That agreement is the setup for the next section. Both rules are calibrated on normality; the interesting question is what they do when the data is not normal, and that is where they part company.</a:t>
+              <a:t>The z-score rule. Standardise the column, then flag anything more than k standard deviations from the mean - we use k = 3 throughout.</a:t>
+            </a:r>
+          </a:p>
+          <a:p>
+            <a:pPr lvl="0" indent="0" marL="0">
+              <a:buNone/>
+            </a:pPr>
+          </a:p>
+          <a:p>
+            <a:pPr lvl="0" indent="0" marL="0">
+              <a:buNone/>
+            </a:pPr>
+            <a:r>
+              <a:rPr/>
+              <a:t>Say what it assumes, because everything in the next three slides follows from it: measuring in standard deviations only means “surprising” if the column is a bell curve. It also computes its own ruler from the data being measured, which is the crack the section prises open.</a:t>
             </a:r>
           </a:p>
         </p:txBody>
@@ -1082,7 +1069,63 @@
             </a:pPr>
             <a:r>
               <a:rPr/>
-              <a:t>Handout Section 4.1 derives the 1.5 constant from the standard normal quantile function: it is chosen so the IQR fence and a 3-sigma z-score fence flag comparable tails on a genuinely normal column. Say this is a design choice with an assumption baked in, and the next slide is what happens when the assumption fails.</a:t>
+              <a:t>Tukey’s fence, built on the interquartile range (IQR) - the spread between the first and third quartiles, so the middle half of the data. Flag anything more than 1.5 interquartile ranges past the quartiles.</a:t>
+            </a:r>
+          </a:p>
+          <a:p>
+            <a:pPr lvl="0" indent="0" marL="0">
+              <a:buNone/>
+            </a:pPr>
+          </a:p>
+          <a:p>
+            <a:pPr lvl="0" indent="0" marL="0">
+              <a:buNone/>
+            </a:pPr>
+            <a:r>
+              <a:rPr/>
+              <a:t>It assumes no shape at all, and its ruler barely moves when a few points are extreme. That sounds strictly better than rule 1. Two slides from now it will be the rule making the mistakes.</a:t>
+            </a:r>
+          </a:p>
+          <a:p>
+            <a:pPr lvl="0" indent="0" marL="0">
+              <a:buNone/>
+            </a:pPr>
+          </a:p>
+          <a:p>
+            <a:pPr lvl="0" indent="0" marL="0">
+              <a:buNone/>
+            </a:pPr>
+            <a:r>
+              <a:rPr/>
+              <a:t>Now give the probabilistic reading of each, because it is what makes them more than recipes. Under normality |z| &gt; 3 flags 0.27% of a column, both tails together. And the 1.5 is not arbitrary: for a normal column the IQR is 1.349 sigma, so the fence lands at 2.698 sigma - just inside 3. Handout Section 4.1 derives it.</a:t>
+            </a:r>
+          </a:p>
+          <a:p>
+            <a:pPr lvl="0" indent="0" marL="0">
+              <a:buNone/>
+            </a:pPr>
+          </a:p>
+          <a:p>
+            <a:pPr lvl="0" indent="0" marL="0">
+              <a:buNone/>
+            </a:pPr>
+            <a:r>
+              <a:rPr/>
+              <a:t>Then put the two side by side, counting both tails each time, because this is where people quietly mislead themselves: 0.27% against 0.70%. The fences are 10% apart in position and a factor of 2.6 apart in what they flag. In 2,000 normal values that is about 5 points against about 14.</a:t>
+            </a:r>
+          </a:p>
+          <a:p>
+            <a:pPr lvl="0" indent="0" marL="0">
+              <a:buNone/>
+            </a:pPr>
+          </a:p>
+          <a:p>
+            <a:pPr lvl="0" indent="0" marL="0">
+              <a:buNone/>
+            </a:pPr>
+            <a:r>
+              <a:rPr/>
+              <a:t>The moral to state out loud: the two rules were built to sit in the same neighbourhood, not to agree, and even on perfect data Tukey’s is the readier of the two to call something an outlier. The next slide draws it.</a:t>
             </a:r>
           </a:p>
         </p:txBody>
@@ -1164,21 +1207,49 @@
             </a:pPr>
             <a:r>
               <a:rPr/>
-              <a:t>monthly_charges: z-score flags 20, IQR flags 32. The z-score rule’s own mean and standard deviation are dragged around by the outliers it is trying to catch - a handful of billing errors inflate s directly, making the rule LESS sensitive exactly when it should be more so. IQR barely moves under the same contamination. That is why IQR is the safer default for skewed, error-prone columns.</a:t>
-            </a:r>
-          </a:p>
-          <a:p>
-            <a:pPr lvl="0" indent="0" marL="0">
-              <a:buNone/>
-            </a:pPr>
-          </a:p>
-          <a:p>
-            <a:pPr lvl="0" indent="0" marL="0">
-              <a:buNone/>
-            </a:pPr>
-            <a:r>
-              <a:rPr/>
-              <a:t>tenure_months: only 4 flagged on the right panel, all at 999. Ask the room: where did the negative values go? Nobody will know yet - next slide.</a:t>
+              <a:t>Handout Section 4.1 derives the 1.5 constant from the standard normal quantile function.</a:t>
+            </a:r>
+          </a:p>
+          <a:p>
+            <a:pPr lvl="0" indent="0" marL="0">
+              <a:buNone/>
+            </a:pPr>
+          </a:p>
+          <a:p>
+            <a:pPr lvl="0" indent="0" marL="0">
+              <a:buNone/>
+            </a:pPr>
+            <a:r>
+              <a:rPr/>
+              <a:t>Work the two panels in order, because the slide is an argument and not an illustration. Left: the two fences are 0.30 sigma apart. Ask the room whether that looks like a difference worth caring about - it does not. Right: the same two rules flag 0.27% and 0.70% of a normal column, a factor of 2.6.</a:t>
+            </a:r>
+          </a:p>
+          <a:p>
+            <a:pPr lvl="0" indent="0" marL="0">
+              <a:buNone/>
+            </a:pPr>
+          </a:p>
+          <a:p>
+            <a:pPr lvl="0" indent="0" marL="0">
+              <a:buNone/>
+            </a:pPr>
+            <a:r>
+              <a:rPr/>
+              <a:t>The reason is the steepness of the tail. Move a fence in by a third of a standard deviation and you nearly triple the area beyond it. So resist saying “the two rules agree here”: they sit in the same neighbourhood, and out in the tail a neighbourhood is a factor of 2.6.</a:t>
+            </a:r>
+          </a:p>
+          <a:p>
+            <a:pPr lvl="0" indent="0" marL="0">
+              <a:buNone/>
+            </a:pPr>
+          </a:p>
+          <a:p>
+            <a:pPr lvl="0" indent="0" marL="0">
+              <a:buNone/>
+            </a:pPr>
+            <a:r>
+              <a:rPr/>
+              <a:t>Say this is a design choice with an assumption baked in, and the next slide is what happens when the assumption fails.</a:t>
             </a:r>
           </a:p>
         </p:txBody>
@@ -1260,21 +1331,77 @@
             </a:pPr>
             <a:r>
               <a:rPr/>
-              <a:t>This is the slide worth remembering over the two formulas. Statistical rules find points that are unusual relative to the rest of a column; they know nothing about domain validity. A negative tenure sits comfortably inside the IQR fence because the column’s own spread is wide enough to hide it.</a:t>
-            </a:r>
-          </a:p>
-          <a:p>
-            <a:pPr lvl="0" indent="0" marL="0">
-              <a:buNone/>
-            </a:pPr>
-          </a:p>
-          <a:p>
-            <a:pPr lvl="0" indent="0" marL="0">
-              <a:buNone/>
-            </a:pPr>
-            <a:r>
-              <a:rPr/>
-              <a:t>The fix is a domain rule: 0 &lt;= tenure_months &lt;= some sane maximum. Say plainly: a thorough pass runs both kinds of check, because they catch different mistakes, and neither substitutes for the other. Handout Section 4.2.</a:t>
+              <a:t>Put the counts up before the picture is read: 20 genuine billing errors in monthly_charges. The z-score rule flags 20 - all of them, nothing else. Tukey flags 32 - the same 20, plus 12 ordinary customers.</a:t>
+            </a:r>
+          </a:p>
+          <a:p>
+            <a:pPr lvl="0" indent="0" marL="0">
+              <a:buNone/>
+            </a:pPr>
+          </a:p>
+          <a:p>
+            <a:pPr lvl="0" indent="0" marL="0">
+              <a:buNone/>
+            </a:pPr>
+            <a:r>
+              <a:rPr/>
+              <a:t>Ask the room to predict which rule was damaged by the contamination, then give them the number: the billing errors inflate s from 17.2 to 171.3, dragging the z-score fence from 115 out to 593. The rule was genuinely crippled. It got every error anyway, because the smallest of them is 780 - still past the ruined fence.</a:t>
+            </a:r>
+          </a:p>
+          <a:p>
+            <a:pPr lvl="0" indent="0" marL="0">
+              <a:buNone/>
+            </a:pPr>
+          </a:p>
+          <a:p>
+            <a:pPr lvl="0" indent="0" marL="0">
+              <a:buNone/>
+            </a:pPr>
+            <a:r>
+              <a:rPr/>
+              <a:t>Meanwhile the twelve Tukey extras are real people on real tariffs: eight paying 15 to 17, four paying 112 to 128, outside fences of 17.3 and 110.</a:t>
+            </a:r>
+          </a:p>
+          <a:p>
+            <a:pPr lvl="0" indent="0" marL="0">
+              <a:buNone/>
+            </a:pPr>
+          </a:p>
+          <a:p>
+            <a:pPr lvl="0" indent="0" marL="0">
+              <a:buNone/>
+            </a:pPr>
+            <a:r>
+              <a:rPr/>
+              <a:t>The line to land, and it is the whole point of the slide: a detector’s output does not report the detector’s health. The z-score rule was right by luck. Push those errors down towards 200 and its fence sails straight past them, exactly as the theory says. So the lesson is not “prefer IQR” - it is “recompute s without the candidates and see what moved”. Handout Section 4.2.</a:t>
+            </a:r>
+          </a:p>
+          <a:p>
+            <a:pPr lvl="0" indent="0" marL="0">
+              <a:buNone/>
+            </a:pPr>
+          </a:p>
+          <a:p>
+            <a:pPr lvl="0" indent="0" marL="0">
+              <a:buNone/>
+            </a:pPr>
+            <a:r>
+              <a:rPr/>
+              <a:t>Point at the left panel’s bottom band: those scattered red dots down in the ordinary customers are the twelve.</a:t>
+            </a:r>
+          </a:p>
+          <a:p>
+            <a:pPr lvl="0" indent="0" marL="0">
+              <a:buNone/>
+            </a:pPr>
+          </a:p>
+          <a:p>
+            <a:pPr lvl="0" indent="0" marL="0">
+              <a:buNone/>
+            </a:pPr>
+            <a:r>
+              <a:rPr/>
+              <a:t>tenure_months, right panel: only 4 flagged, all at 999, and here the two rules agree exactly. Ask the room: where did the negative values go? Nobody will know yet - next slide.</a:t>
             </a:r>
           </a:p>
         </p:txBody>
@@ -1356,35 +1483,21 @@
             </a:pPr>
             <a:r>
               <a:rPr/>
-              <a:t>A long-tenure, high-paying customer is not an error; a tenure of 999 months is. Say plainly that a statistical rule cannot make this call - it only nominates candidates, and the decision is a domain decision.</a:t>
-            </a:r>
-          </a:p>
-          <a:p>
-            <a:pPr lvl="0" indent="0" marL="0">
-              <a:buNone/>
-            </a:pPr>
-          </a:p>
-          <a:p>
-            <a:pPr lvl="0" indent="0" marL="0">
-              <a:buNone/>
-            </a:pPr>
-            <a:r>
-              <a:rPr/>
-              <a:t>Walk the four options and note that each is a different claim about the world. Capping says “the value is real but the scale is misleading”. Removing says “this row is not from the population I am modelling”. Correcting says “I know what it should have been”. Leaving it says “the model should handle this”.</a:t>
-            </a:r>
-          </a:p>
-          <a:p>
-            <a:pPr lvl="0" indent="0" marL="0">
-              <a:buNone/>
-            </a:pPr>
-          </a:p>
-          <a:p>
-            <a:pPr lvl="0" indent="0" marL="0">
-              <a:buNone/>
-            </a:pPr>
-            <a:r>
-              <a:rPr/>
-              <a:t>The one that gets chosen by default, without anyone deciding, is removal - and it is the one that silently reweights the sample. Handout Section 4.2 closes on exactly this. If a rule flags 3% of your rows and you drop them all, you have changed the population your model is trained on.</a:t>
+              <a:t>This is the slide worth remembering over the two formulas. Statistical rules find points that are unusual relative to the rest of a column; they know nothing about domain validity. A negative tenure sits comfortably inside the IQR fence because the column’s own spread is wide enough to hide it.</a:t>
+            </a:r>
+          </a:p>
+          <a:p>
+            <a:pPr lvl="0" indent="0" marL="0">
+              <a:buNone/>
+            </a:pPr>
+          </a:p>
+          <a:p>
+            <a:pPr lvl="0" indent="0" marL="0">
+              <a:buNone/>
+            </a:pPr>
+            <a:r>
+              <a:rPr/>
+              <a:t>The fix is a domain rule: 0 &lt;= tenure_months &lt;= some sane maximum. Say plainly: a thorough pass runs both kinds of check, because they catch different mistakes, and neither substitutes for the other. Handout Section 4.2.</a:t>
             </a:r>
           </a:p>
         </p:txBody>
@@ -1466,35 +1579,35 @@
             </a:pPr>
             <a:r>
               <a:rPr/>
-              <a:t>Work through notebook 1 now, 25 minutes. Let them drive; walk the room rather than presenting.</a:t>
-            </a:r>
-          </a:p>
-          <a:p>
-            <a:pPr lvl="0" indent="0" marL="0">
-              <a:buNone/>
-            </a:pPr>
-          </a:p>
-          <a:p>
-            <a:pPr lvl="0" indent="0" marL="0">
-              <a:buNone/>
-            </a:pPr>
-            <a:r>
-              <a:rPr/>
-              <a:t>The domain-rule cell is worth pausing on collectively: a two-line check for negative tenure catches something no statistical rule would flag, because a negative tenure is not extreme, it is impossible. That distinction - impossible versus unusual - is the lesson of the whole section, and it lands better from their own screen than from the projector.</a:t>
-            </a:r>
-          </a:p>
-          <a:p>
-            <a:pPr lvl="0" indent="0" marL="0">
-              <a:buNone/>
-            </a:pPr>
-          </a:p>
-          <a:p>
-            <a:pPr lvl="0" indent="0" marL="0">
-              <a:buNone/>
-            </a:pPr>
-            <a:r>
-              <a:rPr/>
-              <a:t>Watch for the group that finishes early. Point them at the “try this” in the notebook: change the missing fraction and watch the correlation attenuate as the derivation predicts.</a:t>
+              <a:t>A long-tenure, high-paying customer is not an error; a tenure of 999 months is. Say plainly that a statistical rule cannot make this call - it only nominates candidates, and the decision is a domain decision.</a:t>
+            </a:r>
+          </a:p>
+          <a:p>
+            <a:pPr lvl="0" indent="0" marL="0">
+              <a:buNone/>
+            </a:pPr>
+          </a:p>
+          <a:p>
+            <a:pPr lvl="0" indent="0" marL="0">
+              <a:buNone/>
+            </a:pPr>
+            <a:r>
+              <a:rPr/>
+              <a:t>Walk the four options and note that each is a different claim about the world. Capping says “the value is real but the scale is misleading”. Removing says “this row is not from the population I am modelling”. Correcting says “I know what it should have been”. Leaving it says “the model should handle this”.</a:t>
+            </a:r>
+          </a:p>
+          <a:p>
+            <a:pPr lvl="0" indent="0" marL="0">
+              <a:buNone/>
+            </a:pPr>
+          </a:p>
+          <a:p>
+            <a:pPr lvl="0" indent="0" marL="0">
+              <a:buNone/>
+            </a:pPr>
+            <a:r>
+              <a:rPr/>
+              <a:t>The one that gets chosen by default, without anyone deciding, is removal - and it is the one that silently reweights the sample. Handout Section 4.2 closes on exactly this. If a rule flags 3% of your rows and you drop them all, you have changed the population your model is trained on.</a:t>
             </a:r>
           </a:p>
         </p:txBody>
@@ -1576,21 +1689,35 @@
             </a:pPr>
             <a:r>
               <a:rPr/>
-              <a:t>15 minutes. Back for scaling, encoding and the pipeline.</a:t>
-            </a:r>
-          </a:p>
-          <a:p>
-            <a:pPr lvl="0" indent="0" marL="0">
-              <a:buNone/>
-            </a:pPr>
-          </a:p>
-          <a:p>
-            <a:pPr lvl="0" indent="0" marL="0">
-              <a:buNone/>
-            </a:pPr>
-            <a:r>
-              <a:rPr/>
-              <a:t>Use the break to check who is stuck in the notebook - the second half assumes everyone has a working ColumnTransformer, and it is much cheaper to fix now than during the leakage section.</a:t>
+              <a:t>Work through notebook 1 now, 22 minutes. Let them drive; walk the room rather than presenting.</a:t>
+            </a:r>
+          </a:p>
+          <a:p>
+            <a:pPr lvl="0" indent="0" marL="0">
+              <a:buNone/>
+            </a:pPr>
+          </a:p>
+          <a:p>
+            <a:pPr lvl="0" indent="0" marL="0">
+              <a:buNone/>
+            </a:pPr>
+            <a:r>
+              <a:rPr/>
+              <a:t>The domain-rule cell is worth pausing on collectively: a two-line check for negative tenure catches something no statistical rule would flag, because a negative tenure is not extreme, it is impossible. That distinction - impossible versus unusual - is the lesson of the whole section, and it lands better from their own screen than from the projector.</a:t>
+            </a:r>
+          </a:p>
+          <a:p>
+            <a:pPr lvl="0" indent="0" marL="0">
+              <a:buNone/>
+            </a:pPr>
+          </a:p>
+          <a:p>
+            <a:pPr lvl="0" indent="0" marL="0">
+              <a:buNone/>
+            </a:pPr>
+            <a:r>
+              <a:rPr/>
+              <a:t>Watch for the group that finishes early. Point them at the “try this” in the notebook: change the missing fraction and watch the correlation attenuate as the derivation predicts.</a:t>
             </a:r>
           </a:p>
         </p:txBody>
@@ -1768,35 +1895,21 @@
             </a:pPr>
             <a:r>
               <a:rPr/>
-              <a:t>Set up the problem before any mathematics. Ask: if two features live on very different scales, can a single step size be right for both directions at once? Let the room reason about it first.</a:t>
-            </a:r>
-          </a:p>
-          <a:p>
-            <a:pPr lvl="0" indent="0" marL="0">
-              <a:buNone/>
-            </a:pPr>
-          </a:p>
-          <a:p>
-            <a:pPr lvl="0" indent="0" marL="0">
-              <a:buNone/>
-            </a:pPr>
-            <a:r>
-              <a:rPr/>
-              <a:t>Be honest about this dataset, because a sharp student will check: once the outliers of Section 4 are removed, these two columns have comparable spreads - the ratio of their standard deviations is about 0.8. They are not a dramatic case, which is exactly why notebook 2 builds a toy pair with a 110:1 variance ratio to make the effect unambiguous. The point is not that churn data is pathological; it is that you cannot count on it not being.</a:t>
-            </a:r>
-          </a:p>
-          <a:p>
-            <a:pPr lvl="0" indent="0" marL="0">
-              <a:buNone/>
-            </a:pPr>
-          </a:p>
-          <a:p>
-            <a:pPr lvl="0" indent="0" marL="0">
-              <a:buNone/>
-            </a:pPr>
-            <a:r>
-              <a:rPr/>
-              <a:t>The punchline, which handout Section 5.2 states: the safe step size is set by the feature with the largest spread, so progress along the smallest-spread direction is throttled by their ratio. Scaling is not cosmetic - it changes how long training takes, and sometimes whether it converges at all. The derivation is deliberately NOT here: it belongs with gradient descent itself, Lesson 3.</a:t>
+              <a:t>15 minutes. Back for scaling, encoding and the pipeline.</a:t>
+            </a:r>
+          </a:p>
+          <a:p>
+            <a:pPr lvl="0" indent="0" marL="0">
+              <a:buNone/>
+            </a:pPr>
+          </a:p>
+          <a:p>
+            <a:pPr lvl="0" indent="0" marL="0">
+              <a:buNone/>
+            </a:pPr>
+            <a:r>
+              <a:rPr/>
+              <a:t>Use the break to check who is stuck in the notebook - the second half assumes everyone has a working ColumnTransformer, and it is much cheaper to fix now than during the leakage section.</a:t>
             </a:r>
           </a:p>
         </p:txBody>
@@ -1878,63 +1991,35 @@
             </a:pPr>
             <a:r>
               <a:rPr/>
-              <a:t>Do this one entirely on the picture; there is no algebra on this slide by choice.</a:t>
-            </a:r>
-          </a:p>
-          <a:p>
-            <a:pPr lvl="0" indent="0" marL="0">
-              <a:buNone/>
-            </a:pPr>
-          </a:p>
-          <a:p>
-            <a:pPr lvl="0" indent="0" marL="0">
-              <a:buNone/>
-            </a:pPr>
-            <a:r>
-              <a:rPr/>
-              <a:t>Left: the two features have different spreads, so the cost surface is a narrow ravine - steep across, almost flat along. One step size has to serve both. Long enough to advance along the flat direction and it overshoots the steep one and bounces from wall to wall; short enough to be safe on the steep one and it crawls along the flat one.</a:t>
-            </a:r>
-          </a:p>
-          <a:p>
-            <a:pPr lvl="0" indent="0" marL="0">
-              <a:buNone/>
-            </a:pPr>
-          </a:p>
-          <a:p>
-            <a:pPr lvl="0" indent="0" marL="0">
-              <a:buNone/>
-            </a:pPr>
-            <a:r>
-              <a:rPr/>
-              <a:t>Right: after scaling, the ravine is a bowl and every step points at the minimum.</a:t>
-            </a:r>
-          </a:p>
-          <a:p>
-            <a:pPr lvl="0" indent="0" marL="0">
-              <a:buNone/>
-            </a:pPr>
-          </a:p>
-          <a:p>
-            <a:pPr lvl="0" indent="0" marL="0">
-              <a:buNone/>
-            </a:pPr>
-            <a:r>
-              <a:rPr/>
-              <a:t>Give them the handle without the derivation: how stretched the ravine is - the ratio of the largest feature variance to the smallest - is called the condition number, and the number of steps you need grows with it.</a:t>
-            </a:r>
-          </a:p>
-          <a:p>
-            <a:pPr lvl="0" indent="0" marL="0">
-              <a:buNone/>
-            </a:pPr>
-          </a:p>
-          <a:p>
-            <a:pPr lvl="0" indent="0" marL="0">
-              <a:buNone/>
-            </a:pPr>
-            <a:r>
-              <a:rPr/>
-              <a:t>If someone asks WHY the surface has that shape, that is the right question and the honest answer is “Lesson 3, where we derive gradient descent” - its Section 4.4 puts the number on it: standardising the housing design matrix takes the condition number from 285 to 3.4.</a:t>
+              <a:t>Set up the problem before any mathematics. Ask: if two features live on very different scales, can a single step size be right for both directions at once? Let the room reason about it first.</a:t>
+            </a:r>
+          </a:p>
+          <a:p>
+            <a:pPr lvl="0" indent="0" marL="0">
+              <a:buNone/>
+            </a:pPr>
+          </a:p>
+          <a:p>
+            <a:pPr lvl="0" indent="0" marL="0">
+              <a:buNone/>
+            </a:pPr>
+            <a:r>
+              <a:rPr/>
+              <a:t>Be honest about this dataset, because a sharp student will check: once the outliers of Section 4 are removed, these two columns have comparable spreads - the ratio of their standard deviations is about 0.8. They are not a dramatic case, which is exactly why notebook 2 builds a toy pair with a 110:1 variance ratio to make the effect unambiguous. The point is not that churn data is pathological; it is that you cannot count on it not being.</a:t>
+            </a:r>
+          </a:p>
+          <a:p>
+            <a:pPr lvl="0" indent="0" marL="0">
+              <a:buNone/>
+            </a:pPr>
+          </a:p>
+          <a:p>
+            <a:pPr lvl="0" indent="0" marL="0">
+              <a:buNone/>
+            </a:pPr>
+            <a:r>
+              <a:rPr/>
+              <a:t>The punchline, which handout Section 5.2 states: the safe step size is set by the feature with the largest spread, so progress along the smallest-spread direction is throttled by their ratio. Scaling is not cosmetic - it changes how long training takes, and sometimes whether it converges at all. The derivation is deliberately NOT here: it belongs with gradient descent itself, Lesson 3.</a:t>
             </a:r>
           </a:p>
         </p:txBody>
@@ -2016,21 +2101,63 @@
             </a:pPr>
             <a:r>
               <a:rPr/>
-              <a:t>Left panel: each feature set at its OWN safe rate - standardised still gets there faster, because it tolerates a larger rate. Right panel is the sharper point: give the RAW features the rate the standardised ones handle comfortably, and it does not converge slowly - it diverges. Same data, same starting point, one rate stable and one exploding.</a:t>
-            </a:r>
-          </a:p>
-          <a:p>
-            <a:pPr lvl="0" indent="0" marL="0">
-              <a:buNone/>
-            </a:pPr>
-          </a:p>
-          <a:p>
-            <a:pPr lvl="0" indent="0" marL="0">
-              <a:buNone/>
-            </a:pPr>
-            <a:r>
-              <a:rPr/>
-              <a:t>This is a controlled toy (notebook 2), built with exactly a 100:1 variance ratio so the effect is unambiguous. On the real churn columns, once cleaned, the two spreads are within about 20% of each other - so this toy is not exaggerating a big effect in the data, it is manufacturing a clear one to show a mechanism.</a:t>
+              <a:t>Do this one entirely on the picture; there is no algebra on this slide by choice.</a:t>
+            </a:r>
+          </a:p>
+          <a:p>
+            <a:pPr lvl="0" indent="0" marL="0">
+              <a:buNone/>
+            </a:pPr>
+          </a:p>
+          <a:p>
+            <a:pPr lvl="0" indent="0" marL="0">
+              <a:buNone/>
+            </a:pPr>
+            <a:r>
+              <a:rPr/>
+              <a:t>Left: the two features have different spreads, so the cost surface is a narrow ravine - steep across, almost flat along. One step size has to serve both. Long enough to advance along the flat direction and it overshoots the steep one and bounces from wall to wall; short enough to be safe on the steep one and it crawls along the flat one.</a:t>
+            </a:r>
+          </a:p>
+          <a:p>
+            <a:pPr lvl="0" indent="0" marL="0">
+              <a:buNone/>
+            </a:pPr>
+          </a:p>
+          <a:p>
+            <a:pPr lvl="0" indent="0" marL="0">
+              <a:buNone/>
+            </a:pPr>
+            <a:r>
+              <a:rPr/>
+              <a:t>Right: after scaling, the ravine is a bowl and every step points at the minimum.</a:t>
+            </a:r>
+          </a:p>
+          <a:p>
+            <a:pPr lvl="0" indent="0" marL="0">
+              <a:buNone/>
+            </a:pPr>
+          </a:p>
+          <a:p>
+            <a:pPr lvl="0" indent="0" marL="0">
+              <a:buNone/>
+            </a:pPr>
+            <a:r>
+              <a:rPr/>
+              <a:t>Give them the handle without the derivation: how stretched the ravine is - the ratio of the largest feature variance to the smallest - is called the condition number, and the number of steps you need grows with it.</a:t>
+            </a:r>
+          </a:p>
+          <a:p>
+            <a:pPr lvl="0" indent="0" marL="0">
+              <a:buNone/>
+            </a:pPr>
+          </a:p>
+          <a:p>
+            <a:pPr lvl="0" indent="0" marL="0">
+              <a:buNone/>
+            </a:pPr>
+            <a:r>
+              <a:rPr/>
+              <a:t>If someone asks WHY the surface has that shape, that is the right question and the honest answer is “Lesson 3, where we derive gradient descent” - its Section 4.4 puts the number on it: standardising the housing design matrix takes the condition number from 285 to 3.4.</a:t>
             </a:r>
           </a:p>
         </p:txBody>
@@ -2112,21 +2239,35 @@
             </a:pPr>
             <a:r>
               <a:rPr/>
-              <a:t>MinMaxScaler is the more outlier-sensitive of the two: one extreme billing error stretches the whole 0-1 range, compressing every ordinary customer into a sliver of it. StandardScaler is pulled too, through the mean and standard deviation, but far less dramatically.</a:t>
-            </a:r>
-          </a:p>
-          <a:p>
-            <a:pPr lvl="0" indent="0" marL="0">
-              <a:buNone/>
-            </a:pPr>
-          </a:p>
-          <a:p>
-            <a:pPr lvl="0" indent="0" marL="0">
-              <a:buNone/>
-            </a:pPr>
-            <a:r>
-              <a:rPr/>
-              <a:t>Both must be fitted on training data only - say this every time a fitted transform appears, because it is the thread the whole lesson hangs from.</a:t>
+              <a:t>Left panel: each feature set at its OWN safe rate - standardised still gets there faster, because it tolerates a larger rate. Right panel is the sharper point: give the RAW features the rate the standardised ones handle comfortably and it does not converge slowly, it never converges at all.</a:t>
+            </a:r>
+          </a:p>
+          <a:p>
+            <a:pPr lvl="0" indent="0" marL="0">
+              <a:buNone/>
+            </a:pPr>
+          </a:p>
+          <a:p>
+            <a:pPr lvl="0" indent="0" marL="0">
+              <a:buNone/>
+            </a:pPr>
+            <a:r>
+              <a:rPr/>
+              <a:t>Be precise about the failure if anyone asks, because “diverges” is the word people reach for and it is not what this is. The loss does not climb away to infinity - it swings between 0.69 and 8.29 and stays there, bouncing off one wall of the ravine into the other. Run it for 2000 steps and it is still in the same band. Worse than slow, not better: a slow run finishes.</a:t>
+            </a:r>
+          </a:p>
+          <a:p>
+            <a:pPr lvl="0" indent="0" marL="0">
+              <a:buNone/>
+            </a:pPr>
+          </a:p>
+          <a:p>
+            <a:pPr lvl="0" indent="0" marL="0">
+              <a:buNone/>
+            </a:pPr>
+            <a:r>
+              <a:rPr/>
+              <a:t>This is a controlled toy (notebook 2), built to a 100:1 variance ratio and landing at 110 once drawn, so the effect is unambiguous. On the real churn columns, once cleaned, the two spreads are within about 20% of each other - so this toy is not exaggerating a big effect in the data, it is manufacturing a clear one to show a mechanism.</a:t>
             </a:r>
           </a:p>
         </p:txBody>
@@ -2208,35 +2349,21 @@
             </a:pPr>
             <a:r>
               <a:rPr/>
-              <a:t>The k dummy columns always sum to the intercept column, so they are not independent of it: the design matrix loses rank, and the normal equation has no unique solution.</a:t>
-            </a:r>
-          </a:p>
-          <a:p>
-            <a:pPr lvl="0" indent="0" marL="0">
-              <a:buNone/>
-            </a:pPr>
-          </a:p>
-          <a:p>
-            <a:pPr lvl="0" indent="0" marL="0">
-              <a:buNone/>
-            </a:pPr>
-            <a:r>
-              <a:rPr/>
-              <a:t>Stress that this is not a numerical inconvenience but an identifiability problem. There are infinitely many coefficient vectors that fit equally well, because you can add a constant to every dummy coefficient and subtract it from the intercept without changing a single prediction.</a:t>
-            </a:r>
-          </a:p>
-          <a:p>
-            <a:pPr lvl="0" indent="0" marL="0">
-              <a:buNone/>
-            </a:pPr>
-          </a:p>
-          <a:p>
-            <a:pPr lvl="0" indent="0" marL="0">
-              <a:buNone/>
-            </a:pPr>
-            <a:r>
-              <a:rPr/>
-              <a:t>Handout Section 6.1 has the proof; notebook 2 confirms it directly with matrix_rank, which is the version they will believe. The next slide shows it as arithmetic.</a:t>
+              <a:t>MinMaxScaler is the more outlier-sensitive of the two: one extreme billing error stretches the whole 0-1 range, compressing every ordinary customer into a sliver of it. StandardScaler is pulled too, through the mean and standard deviation, but far less dramatically.</a:t>
+            </a:r>
+          </a:p>
+          <a:p>
+            <a:pPr lvl="0" indent="0" marL="0">
+              <a:buNone/>
+            </a:pPr>
+          </a:p>
+          <a:p>
+            <a:pPr lvl="0" indent="0" marL="0">
+              <a:buNone/>
+            </a:pPr>
+            <a:r>
+              <a:rPr/>
+              <a:t>Both must be fitted on training data only - say this every time a fitted transform appears, because it is the thread the whole lesson hangs from.</a:t>
             </a:r>
           </a:p>
         </p:txBody>
@@ -2318,35 +2445,49 @@
             </a:pPr>
             <a:r>
               <a:rPr/>
-              <a:t>Point at the number: the rank is short by exactly one, not by an arbitrary amount. That is the signature of a single linear dependence - the sum of the dummies equalling the intercept - rather than of general collinearity.</a:t>
-            </a:r>
-          </a:p>
-          <a:p>
-            <a:pPr lvl="0" indent="0" marL="0">
-              <a:buNone/>
-            </a:pPr>
-          </a:p>
-          <a:p>
-            <a:pPr lvl="0" indent="0" marL="0">
-              <a:buNone/>
-            </a:pPr>
-            <a:r>
-              <a:rPr/>
-              <a:t>The fix is OneHotEncoder(drop=“first”). The dropped category becomes the reference level, absorbed into the intercept: no information is lost, and full rank is restored.</a:t>
-            </a:r>
-          </a:p>
-          <a:p>
-            <a:pPr lvl="0" indent="0" marL="0">
-              <a:buNone/>
-            </a:pPr>
-          </a:p>
-          <a:p>
-            <a:pPr lvl="0" indent="0" marL="0">
-              <a:buNone/>
-            </a:pPr>
-            <a:r>
-              <a:rPr/>
-              <a:t>Two caveats worth saying. Tree-based models (Lesson 7) do not need this, because they never invert a design matrix. And regularised models tolerate the rank deficiency, because the penalty term picks one solution out of the infinitely many - which is a good early illustration of what regularisation actually does, and we return to it in Lesson 3.</a:t>
+              <a:t>Read the slide as the sentence it is: one-hot encode all k categories AND fit an intercept, and this identity holds for every single row.</a:t>
+            </a:r>
+          </a:p>
+          <a:p>
+            <a:pPr lvl="0" indent="0" marL="0">
+              <a:buNone/>
+            </a:pPr>
+          </a:p>
+          <a:p>
+            <a:pPr lvl="0" indent="0" marL="0">
+              <a:buNone/>
+            </a:pPr>
+            <a:r>
+              <a:rPr/>
+              <a:t>The k dummy columns always sum to the intercept column, so they are not independent of it: the design matrix loses rank, and the normal equation has no unique solution.</a:t>
+            </a:r>
+          </a:p>
+          <a:p>
+            <a:pPr lvl="0" indent="0" marL="0">
+              <a:buNone/>
+            </a:pPr>
+          </a:p>
+          <a:p>
+            <a:pPr lvl="0" indent="0" marL="0">
+              <a:buNone/>
+            </a:pPr>
+            <a:r>
+              <a:rPr/>
+              <a:t>Stress that this is not a numerical inconvenience but an identifiability problem. There are infinitely many coefficient vectors that fit equally well, because you can add a constant to every dummy coefficient and subtract it from the intercept without changing a single prediction.</a:t>
+            </a:r>
+          </a:p>
+          <a:p>
+            <a:pPr lvl="0" indent="0" marL="0">
+              <a:buNone/>
+            </a:pPr>
+          </a:p>
+          <a:p>
+            <a:pPr lvl="0" indent="0" marL="0">
+              <a:buNone/>
+            </a:pPr>
+            <a:r>
+              <a:rPr/>
+              <a:t>Handout Section 6.1 has the proof; notebook 2 confirms it directly with matrix_rank, which is the version they will believe. The next slide shows it as arithmetic.</a:t>
             </a:r>
           </a:p>
         </p:txBody>
@@ -2428,35 +2569,35 @@
             </a:pPr>
             <a:r>
               <a:rPr/>
-              <a:t>Three encodings of one column, and each makes a different claim.</a:t>
-            </a:r>
-          </a:p>
-          <a:p>
-            <a:pPr lvl="0" indent="0" marL="0">
-              <a:buNone/>
-            </a:pPr>
-          </a:p>
-          <a:p>
-            <a:pPr lvl="0" indent="0" marL="0">
-              <a:buNone/>
-            </a:pPr>
-            <a:r>
-              <a:rPr/>
-              <a:t>Ordinal claims the categories are equally spaced on a line - fine for small/medium/large, wrong for region. One-hot claims nothing at all, which is why it is the default, and costs k columns: 493 for zip code on 2000 rows. Target claims each category is summarised by its own churn rate, which is compact and, as the next section shows, computed from the labels.</a:t>
-            </a:r>
-          </a:p>
-          <a:p>
-            <a:pPr lvl="0" indent="0" marL="0">
-              <a:buNone/>
-            </a:pPr>
-          </a:p>
-          <a:p>
-            <a:pPr lvl="0" indent="0" marL="0">
-              <a:buNone/>
-            </a:pPr>
-            <a:r>
-              <a:rPr/>
-              <a:t>The question to leave them with: which claim is true for THIS column? It is a domain question, not a technical one.</a:t>
+              <a:t>Point at the number: the rank is short by exactly one, not by an arbitrary amount. That is the signature of a single linear dependence - the sum of the dummies equalling the intercept - rather than of general collinearity.</a:t>
+            </a:r>
+          </a:p>
+          <a:p>
+            <a:pPr lvl="0" indent="0" marL="0">
+              <a:buNone/>
+            </a:pPr>
+          </a:p>
+          <a:p>
+            <a:pPr lvl="0" indent="0" marL="0">
+              <a:buNone/>
+            </a:pPr>
+            <a:r>
+              <a:rPr/>
+              <a:t>The fix is OneHotEncoder(drop=“first”). The dropped category becomes the reference level, absorbed into the intercept: no information is lost, and full rank is restored.</a:t>
+            </a:r>
+          </a:p>
+          <a:p>
+            <a:pPr lvl="0" indent="0" marL="0">
+              <a:buNone/>
+            </a:pPr>
+          </a:p>
+          <a:p>
+            <a:pPr lvl="0" indent="0" marL="0">
+              <a:buNone/>
+            </a:pPr>
+            <a:r>
+              <a:rPr/>
+              <a:t>Two caveats worth saying. Tree-based models (Lesson 7) do not need this, because they never invert a design matrix. And regularised models tolerate the rank deficiency, because the penalty term picks one solution out of the infinitely many - which is a good early illustration of what regularisation actually does, and we return to it in Lesson 3.</a:t>
             </a:r>
           </a:p>
         </p:txBody>
@@ -2538,63 +2679,35 @@
             </a:pPr>
             <a:r>
               <a:rPr/>
-              <a:t>The same column under all three schemes, and each makes a different claim about the world.</a:t>
-            </a:r>
-          </a:p>
-          <a:p>
-            <a:pPr lvl="0" indent="0" marL="0">
-              <a:buNone/>
-            </a:pPr>
-          </a:p>
-          <a:p>
-            <a:pPr lvl="0" indent="0" marL="0">
-              <a:buNone/>
-            </a:pPr>
-            <a:r>
-              <a:rPr/>
-              <a:t>Ordinal claims the categories are equally spaced along a line - fine for small/medium/large, wrong for region, and the model has no way to tell you it was the wrong claim.</a:t>
-            </a:r>
-          </a:p>
-          <a:p>
-            <a:pPr lvl="0" indent="0" marL="0">
-              <a:buNone/>
-            </a:pPr>
-          </a:p>
-          <a:p>
-            <a:pPr lvl="0" indent="0" marL="0">
-              <a:buNone/>
-            </a:pPr>
-            <a:r>
-              <a:rPr/>
-              <a:t>One-hot claims nothing at all, which is why it is the default, and pays for that neutrality in columns: 493 of them for zip code, on 2000 rows.</a:t>
-            </a:r>
-          </a:p>
-          <a:p>
-            <a:pPr lvl="0" indent="0" marL="0">
-              <a:buNone/>
-            </a:pPr>
-          </a:p>
-          <a:p>
-            <a:pPr lvl="0" indent="0" marL="0">
-              <a:buNone/>
-            </a:pPr>
-            <a:r>
-              <a:rPr/>
-              <a:t>Target claims each category is summarised by its own churn rate. Compact, effective - and computed from the labels, which is where the next section begins.</a:t>
-            </a:r>
-          </a:p>
-          <a:p>
-            <a:pPr lvl="0" indent="0" marL="0">
-              <a:buNone/>
-            </a:pPr>
-          </a:p>
-          <a:p>
-            <a:pPr lvl="0" indent="0" marL="0">
-              <a:buNone/>
-            </a:pPr>
-            <a:r>
-              <a:rPr/>
-              <a:t>The question to leave with them: which claim is true for THIS column? That is a domain question, not a technical one, and no cross-validation score will answer it.</a:t>
+              <a:t>Three encodings of one column, and each makes a different claim.</a:t>
+            </a:r>
+          </a:p>
+          <a:p>
+            <a:pPr lvl="0" indent="0" marL="0">
+              <a:buNone/>
+            </a:pPr>
+          </a:p>
+          <a:p>
+            <a:pPr lvl="0" indent="0" marL="0">
+              <a:buNone/>
+            </a:pPr>
+            <a:r>
+              <a:rPr/>
+              <a:t>Ordinal claims the categories are equally spaced on a line - fine for small/medium/large, wrong for region. One-hot claims nothing at all, which is why it is the default, and costs k columns: 493 for zip code on 2000 rows. Target claims each category is summarised by its own churn rate, which is compact and, as the next section shows, computed from the labels.</a:t>
+            </a:r>
+          </a:p>
+          <a:p>
+            <a:pPr lvl="0" indent="0" marL="0">
+              <a:buNone/>
+            </a:pPr>
+          </a:p>
+          <a:p>
+            <a:pPr lvl="0" indent="0" marL="0">
+              <a:buNone/>
+            </a:pPr>
+            <a:r>
+              <a:rPr/>
+              <a:t>The question to leave them with: which claim is true for THIS column? It is a domain question, not a technical one.</a:t>
             </a:r>
           </a:p>
         </p:txBody>
@@ -2676,35 +2789,63 @@
             </a:pPr>
             <a:r>
               <a:rPr/>
-              <a:t>Handout Section 6.3. Deliberately quick - the point is to motivate why target encoding looks attractive for high-cardinality columns, before the next section shows why it needs care.</a:t>
-            </a:r>
-          </a:p>
-          <a:p>
-            <a:pPr lvl="0" indent="0" marL="0">
-              <a:buNone/>
-            </a:pPr>
-          </a:p>
-          <a:p>
-            <a:pPr lvl="0" indent="0" marL="0">
-              <a:buNone/>
-            </a:pPr>
-            <a:r>
-              <a:rPr/>
-              <a:t>The number to dwell on: one-hot encoding zip_code produces 493 columns, almost all zero, on 2000 rows. More columns than a quarter of the sample size, for one field.</a:t>
-            </a:r>
-          </a:p>
-          <a:p>
-            <a:pPr lvl="0" indent="0" marL="0">
-              <a:buNone/>
-            </a:pPr>
-          </a:p>
-          <a:p>
-            <a:pPr lvl="0" indent="0" marL="0">
-              <a:buNone/>
-            </a:pPr>
-            <a:r>
-              <a:rPr/>
-              <a:t>Two consequences to name. Distance-based methods (Lesson 6) degrade, because in high dimensions everything becomes roughly equidistant from everything else. And every column is a parameter to estimate from the same fixed amount of data, which is the bias-variance trade-off from Lesson 1 arriving from a new direction.</a:t>
+              <a:t>The same column under all three schemes, and each makes a different claim about the world.</a:t>
+            </a:r>
+          </a:p>
+          <a:p>
+            <a:pPr lvl="0" indent="0" marL="0">
+              <a:buNone/>
+            </a:pPr>
+          </a:p>
+          <a:p>
+            <a:pPr lvl="0" indent="0" marL="0">
+              <a:buNone/>
+            </a:pPr>
+            <a:r>
+              <a:rPr/>
+              <a:t>Ordinal claims the categories are equally spaced along a line - fine for small/medium/large, wrong for region, and the model has no way to tell you it was the wrong claim.</a:t>
+            </a:r>
+          </a:p>
+          <a:p>
+            <a:pPr lvl="0" indent="0" marL="0">
+              <a:buNone/>
+            </a:pPr>
+          </a:p>
+          <a:p>
+            <a:pPr lvl="0" indent="0" marL="0">
+              <a:buNone/>
+            </a:pPr>
+            <a:r>
+              <a:rPr/>
+              <a:t>One-hot claims nothing at all, which is why it is the default, and pays for that neutrality in columns: 493 of them for zip code, on 2000 rows.</a:t>
+            </a:r>
+          </a:p>
+          <a:p>
+            <a:pPr lvl="0" indent="0" marL="0">
+              <a:buNone/>
+            </a:pPr>
+          </a:p>
+          <a:p>
+            <a:pPr lvl="0" indent="0" marL="0">
+              <a:buNone/>
+            </a:pPr>
+            <a:r>
+              <a:rPr/>
+              <a:t>Target claims each category is summarised by its own churn rate. Compact, effective - and computed from the labels, which is where the next section begins.</a:t>
+            </a:r>
+          </a:p>
+          <a:p>
+            <a:pPr lvl="0" indent="0" marL="0">
+              <a:buNone/>
+            </a:pPr>
+          </a:p>
+          <a:p>
+            <a:pPr lvl="0" indent="0" marL="0">
+              <a:buNone/>
+            </a:pPr>
+            <a:r>
+              <a:rPr/>
+              <a:t>The question to leave with them: which claim is true for THIS column? That is a domain question, not a technical one, and no cross-validation score will answer it.</a:t>
             </a:r>
           </a:p>
         </p:txBody>
@@ -2786,7 +2927,35 @@
             </a:pPr>
             <a:r>
               <a:rPr/>
-              <a:t>Point at the zip_code row/column - or its absence, since it is not even numeric yet - and say: notebook 1’s correlation check already suggests this column carries nothing. One-hot encoding it would add 493 mostly-empty columns. The natural alternative - replace each code with the average churn rate of its customers - is exactly the technique the leakage section is about. Do not resolve the tension yet; let it hang until after the break-free run into notebook 2’s pipeline section.</a:t>
+              <a:t>Handout Section 6.3. Deliberately quick - the point is to motivate why target encoding looks attractive for high-cardinality columns, before the next section shows why it needs care.</a:t>
+            </a:r>
+          </a:p>
+          <a:p>
+            <a:pPr lvl="0" indent="0" marL="0">
+              <a:buNone/>
+            </a:pPr>
+          </a:p>
+          <a:p>
+            <a:pPr lvl="0" indent="0" marL="0">
+              <a:buNone/>
+            </a:pPr>
+            <a:r>
+              <a:rPr/>
+              <a:t>The number to dwell on: one-hot encoding zip_code produces 493 columns, almost all zero, on 2000 rows. More columns than a quarter of the sample size, for one field.</a:t>
+            </a:r>
+          </a:p>
+          <a:p>
+            <a:pPr lvl="0" indent="0" marL="0">
+              <a:buNone/>
+            </a:pPr>
+          </a:p>
+          <a:p>
+            <a:pPr lvl="0" indent="0" marL="0">
+              <a:buNone/>
+            </a:pPr>
+            <a:r>
+              <a:rPr/>
+              <a:t>Two consequences to name. Distance-based methods (Lesson 6) degrade, because in high dimensions everything becomes roughly equidistant from everything else. And every column is a parameter to estimate from the same fixed amount of data, which is the bias-variance trade-off from Lesson 1 arriving from a new direction.</a:t>
             </a:r>
           </a:p>
         </p:txBody>
@@ -2964,21 +3133,7 @@
             </a:pPr>
             <a:r>
               <a:rPr/>
-              <a:t>Handout Section 8.1. Lesson 1’s unbiasedness argument never mentioned “the model” specifically - it is about f, whatever function maps raw inputs to predictions. In deployment, a fitted scaler or imputer travels WITH the model, so f includes their learned parameters too.</a:t>
-            </a:r>
-          </a:p>
-          <a:p>
-            <a:pPr lvl="0" indent="0" marL="0">
-              <a:buNone/>
-            </a:pPr>
-          </a:p>
-          <a:p>
-            <a:pPr lvl="0" indent="0" marL="0">
-              <a:buNone/>
-            </a:pPr>
-            <a:r>
-              <a:rPr/>
-              <a:t>The moment any of those parameters - a mean, a set of neighbours, a per-category average - is estimated using rows that later appear in T, f is no longer independent of T, and the equality breaks. This is the one-sentence version of everything Section 9 is about to demonstrate concretely.</a:t>
+              <a:t>Point at the zip_code row/column - or its absence, since it is not even numeric yet - and say: notebook 1’s correlation check already suggests this column carries nothing. One-hot encoding it would add 493 mostly-empty columns. The natural alternative - replace each code with the average churn rate of its customers - is exactly the technique the leakage section is about. Do not resolve the tension yet; let it hang until after the break-free run into notebook 2’s pipeline section.</a:t>
             </a:r>
           </a:p>
         </p:txBody>
@@ -3060,21 +3215,21 @@
             </a:pPr>
             <a:r>
               <a:rPr/>
-              <a:t>The structural version of the argument just stated. Different columns need different treatment; ColumnTransformer routes each group through its own sub-pipeline and concatenates the result; the outer Pipeline adds the classifier.</a:t>
-            </a:r>
-          </a:p>
-          <a:p>
-            <a:pPr lvl="0" indent="0" marL="0">
-              <a:buNone/>
-            </a:pPr>
-          </a:p>
-          <a:p>
-            <a:pPr lvl="0" indent="0" marL="0">
-              <a:buNone/>
-            </a:pPr>
-            <a:r>
-              <a:rPr/>
-              <a:t>One fit() call, on X_train, fits every imputer, the scaler, the encoder AND the classifier - in that order, on training data only, by construction. Say explicitly: this is not tidiness. It is what makes “nothing learned before the split” true even when nobody is watching, which today’s leakage section is entirely about.</a:t>
+              <a:t>Handout Section 8.1. Lesson 1’s unbiasedness argument never mentioned “the model” specifically - it is about f, whatever function maps raw inputs to predictions. In deployment, a fitted scaler or imputer travels WITH the model, so f includes their learned parameters too.</a:t>
+            </a:r>
+          </a:p>
+          <a:p>
+            <a:pPr lvl="0" indent="0" marL="0">
+              <a:buNone/>
+            </a:pPr>
+          </a:p>
+          <a:p>
+            <a:pPr lvl="0" indent="0" marL="0">
+              <a:buNone/>
+            </a:pPr>
+            <a:r>
+              <a:rPr/>
+              <a:t>The moment any of those parameters - a mean, a set of neighbours, a per-category average - is estimated using rows that later appear in T, f is no longer independent of T, and the equality breaks. This is the one-sentence version of everything Section 9 is about to demonstrate concretely.</a:t>
             </a:r>
           </a:p>
         </p:txBody>
@@ -3156,21 +3311,21 @@
             </a:pPr>
             <a:r>
               <a:rPr/>
-              <a:t>numeric_pipe and categorical_pipe are the impute-then-transform pairs from the diagram; show the full definitions on screen in notebook 2 rather than here. Point out there is exactly ONE call to fit, at the very bottom, on X_train alone - everything above it declares structure, not computation.</a:t>
-            </a:r>
-          </a:p>
-          <a:p>
-            <a:pPr lvl="0" indent="0" marL="0">
-              <a:buNone/>
-            </a:pPr>
-          </a:p>
-          <a:p>
-            <a:pPr lvl="0" indent="0" marL="0">
-              <a:buNone/>
-            </a:pPr>
-            <a:r>
-              <a:rPr/>
-              <a:t>This is the code notebook 2 runs, nearly verbatim. Say that reading it should now feel unremarkable - that is the goal, structure that makes the right thing the easy thing.</a:t>
+              <a:t>The structural version of the argument just stated. Different columns need different treatment; ColumnTransformer routes each group through its own sub-pipeline and concatenates the result; the outer Pipeline adds the classifier.</a:t>
+            </a:r>
+          </a:p>
+          <a:p>
+            <a:pPr lvl="0" indent="0" marL="0">
+              <a:buNone/>
+            </a:pPr>
+          </a:p>
+          <a:p>
+            <a:pPr lvl="0" indent="0" marL="0">
+              <a:buNone/>
+            </a:pPr>
+            <a:r>
+              <a:rPr/>
+              <a:t>One fit() call, on X_train, fits every imputer, the scaler, the encoder AND the classifier - in that order, on training data only, by construction. Say explicitly: this is not tidiness. It is what makes “nothing learned before the split” true even when nobody is watching, which today’s leakage section is entirely about.</a:t>
             </a:r>
           </a:p>
         </p:txBody>
@@ -3252,35 +3407,35 @@
             </a:pPr>
             <a:r>
               <a:rPr/>
-              <a:t>Let the room answer why the accuracy gain is modest. The dataset is 80/20 imbalanced, so accuracy is dominated by the majority class - exactly as Lesson 1 warned, and the first time they meet it on data they prepared themselves.</a:t>
-            </a:r>
-          </a:p>
-          <a:p>
-            <a:pPr lvl="0" indent="0" marL="0">
-              <a:buNone/>
-            </a:pPr>
-          </a:p>
-          <a:p>
-            <a:pPr lvl="0" indent="0" marL="0">
-              <a:buNone/>
-            </a:pPr>
-            <a:r>
-              <a:rPr/>
-              <a:t>The matrix shows where the errors sit: read the bottom-left cell, the churners the model missed. The area under the receiver operating characteristic curve - AUC, which Lesson 4 builds properly - at 0.751 is unaffected by the imbalance and says there is real signal that accuracy is hiding.</a:t>
-            </a:r>
-          </a:p>
-          <a:p>
-            <a:pPr lvl="0" indent="0" marL="0">
-              <a:buNone/>
-            </a:pPr>
-          </a:p>
-          <a:p>
-            <a:pPr lvl="0" indent="0" marL="0">
-              <a:buNone/>
-            </a:pPr>
-            <a:r>
-              <a:rPr/>
-              <a:t>Had we reported only accuracy, this model would look barely better than the baseline and someone would reasonably conclude the features were useless.</a:t>
+              <a:t>Say out loud what the five short names stand for, or someone spends the next minute working it out instead of listening: num_pipe and cat_pipe are the impute-then-transform pairs from the diagram two slides back, num_cols and cat_cols are plain lists of column names, and clf is the classifier. They are abbreviated here only to fit the slide - handout Section 8.2 prints the same block with full names, every import, and both column lists, and it runs as printed.</a:t>
+            </a:r>
+          </a:p>
+          <a:p>
+            <a:pPr lvl="0" indent="0" marL="0">
+              <a:buNone/>
+            </a:pPr>
+          </a:p>
+          <a:p>
+            <a:pPr lvl="0" indent="0" marL="0">
+              <a:buNone/>
+            </a:pPr>
+            <a:r>
+              <a:rPr/>
+              <a:t>Point out there is exactly ONE call to fit, at the very bottom, on X_train alone - everything above it declares structure, not computation.</a:t>
+            </a:r>
+          </a:p>
+          <a:p>
+            <a:pPr lvl="0" indent="0" marL="0">
+              <a:buNone/>
+            </a:pPr>
+          </a:p>
+          <a:p>
+            <a:pPr lvl="0" indent="0" marL="0">
+              <a:buNone/>
+            </a:pPr>
+            <a:r>
+              <a:rPr/>
+              <a:t>This is the code notebook 2 runs, nearly verbatim. Say that reading it should now feel unremarkable - that is the goal, structure that makes the right thing the easy thing.</a:t>
             </a:r>
           </a:p>
         </p:txBody>
@@ -3362,35 +3517,35 @@
             </a:pPr>
             <a:r>
               <a:rPr/>
-              <a:t>The accuracy gain was fourteen thousandths. This is where those errors actually sit, and it explains why the gain is small.</a:t>
-            </a:r>
-          </a:p>
-          <a:p>
-            <a:pPr lvl="0" indent="0" marL="0">
-              <a:buNone/>
-            </a:pPr>
-          </a:p>
-          <a:p>
-            <a:pPr lvl="0" indent="0" marL="0">
-              <a:buNone/>
-            </a:pPr>
-            <a:r>
-              <a:rPr/>
-              <a:t>Read the bottom row: almost every customer who churned was predicted to stay. The model has learned to predict the majority class slightly more cleverly than the baseline does, and on the class the business would pay to identify it is close to useless.</a:t>
-            </a:r>
-          </a:p>
-          <a:p>
-            <a:pPr lvl="0" indent="0" marL="0">
-              <a:buNone/>
-            </a:pPr>
-          </a:p>
-          <a:p>
-            <a:pPr lvl="0" indent="0" marL="0">
-              <a:buNone/>
-            </a:pPr>
-            <a:r>
-              <a:rPr/>
-              <a:t>Then connect it back to lesson 1 and its imbalance slide. Same shape, different dataset, and it took a confusion matrix to see it in both cases. Accuracy on its own would have reported this as progress.</a:t>
+              <a:t>Let the room answer why the accuracy gain is modest. The dataset is 80/20 imbalanced, so accuracy is dominated by the majority class - exactly as Lesson 1 warned, and the first time they meet it on data they prepared themselves.</a:t>
+            </a:r>
+          </a:p>
+          <a:p>
+            <a:pPr lvl="0" indent="0" marL="0">
+              <a:buNone/>
+            </a:pPr>
+          </a:p>
+          <a:p>
+            <a:pPr lvl="0" indent="0" marL="0">
+              <a:buNone/>
+            </a:pPr>
+            <a:r>
+              <a:rPr/>
+              <a:t>The matrix shows where the errors sit: read the bottom-left cell, the churners the model missed. The area under the receiver operating characteristic curve - AUC, which Lesson 4 builds properly - at 0.751 is unaffected by the imbalance and says there is real signal that accuracy is hiding.</a:t>
+            </a:r>
+          </a:p>
+          <a:p>
+            <a:pPr lvl="0" indent="0" marL="0">
+              <a:buNone/>
+            </a:pPr>
+          </a:p>
+          <a:p>
+            <a:pPr lvl="0" indent="0" marL="0">
+              <a:buNone/>
+            </a:pPr>
+            <a:r>
+              <a:rPr/>
+              <a:t>Had we reported only accuracy, this model would look barely better than the baseline and someone would reasonably conclude the features were useless.</a:t>
             </a:r>
           </a:p>
         </p:txBody>
@@ -3472,21 +3627,35 @@
             </a:pPr>
             <a:r>
               <a:rPr/>
-              <a:t>A modest gain, and say plainly that this is itself a legitimate result, not a failed experiment - feature engineering is a hypothesis about the domain, not a guarantee. Handout Section 7.</a:t>
-            </a:r>
-          </a:p>
-          <a:p>
-            <a:pPr lvl="0" indent="0" marL="0">
-              <a:buNone/>
-            </a:pPr>
-          </a:p>
-          <a:p>
-            <a:pPr lvl="0" indent="0" marL="0">
-              <a:buNone/>
-            </a:pPr>
-            <a:r>
-              <a:rPr/>
-              <a:t>The point to land: any engineered feature that involves a statistic LEARNED from data - bin edges from quantiles, a scaled interaction - is subject to the same rule as scaling. A pure arithmetic combination (this ratio) needs no fold-awareness; a learned one does.</a:t>
+              <a:t>The accuracy gain was fourteen thousandths. This is where those errors actually sit, and it explains why the gain is small.</a:t>
+            </a:r>
+          </a:p>
+          <a:p>
+            <a:pPr lvl="0" indent="0" marL="0">
+              <a:buNone/>
+            </a:pPr>
+          </a:p>
+          <a:p>
+            <a:pPr lvl="0" indent="0" marL="0">
+              <a:buNone/>
+            </a:pPr>
+            <a:r>
+              <a:rPr/>
+              <a:t>Read the bottom row: almost every customer who churned was predicted to stay. The model has learned to predict the majority class slightly more cleverly than the baseline does, and on the class the business would pay to identify it is close to useless.</a:t>
+            </a:r>
+          </a:p>
+          <a:p>
+            <a:pPr lvl="0" indent="0" marL="0">
+              <a:buNone/>
+            </a:pPr>
+          </a:p>
+          <a:p>
+            <a:pPr lvl="0" indent="0" marL="0">
+              <a:buNone/>
+            </a:pPr>
+            <a:r>
+              <a:rPr/>
+              <a:t>Then connect it back to lesson 1 and its imbalance slide. Same shape, different dataset, and it took a confusion matrix to see it in both cases. Accuracy on its own would have reported this as progress.</a:t>
             </a:r>
           </a:p>
         </p:txBody>
@@ -3568,35 +3737,49 @@
             </a:pPr>
             <a:r>
               <a:rPr/>
-              <a:t>25 minutes. Let them work; circulate.</a:t>
-            </a:r>
-          </a:p>
-          <a:p>
-            <a:pPr lvl="0" indent="0" marL="0">
-              <a:buNone/>
-            </a:pPr>
-          </a:p>
-          <a:p>
-            <a:pPr lvl="0" indent="0" marL="0">
-              <a:buNone/>
-            </a:pPr>
-            <a:r>
-              <a:rPr/>
-              <a:t>The gradient descent toy is worth running interactively - change the variance ratio live and watch the iteration count move, per the handout’s “try this”. It makes the condition number argument concrete in a way the derivation alone does not.</a:t>
-            </a:r>
-          </a:p>
-          <a:p>
-            <a:pPr lvl="0" indent="0" marL="0">
-              <a:buNone/>
-            </a:pPr>
-          </a:p>
-          <a:p>
-            <a:pPr lvl="0" indent="0" marL="0">
-              <a:buNone/>
-            </a:pPr>
-            <a:r>
-              <a:rPr/>
-              <a:t>If the room is moving fast, the ColumnTransformer section is where to slow down: it is the piece they will reuse in every exercise and in the project, and getting the column selectors right is fiddlier than it looks.</a:t>
+              <a:t>Do not let anyone in the room call two thousandths a win, and do not call it one yourself. It is a legitimate result, not a failed experiment - the hypothesis that cost intensity matters here was reasonable, it was tested, and the data declined it. Feature engineering is a hypothesis about the domain, not a guarantee. Handout Section 7.</a:t>
+            </a:r>
+          </a:p>
+          <a:p>
+            <a:pPr lvl="0" indent="0" marL="0">
+              <a:buNone/>
+            </a:pPr>
+          </a:p>
+          <a:p>
+            <a:pPr lvl="0" indent="0" marL="0">
+              <a:buNone/>
+            </a:pPr>
+            <a:r>
+              <a:rPr/>
+              <a:t>Then plant the flag for Lesson 5: a difference this small is inside the range a different train/test split would produce on its own, so a single split cannot settle it either way. Reporting it as an improvement is the first step onto exactly the path Lesson 5 exists to close off.</a:t>
+            </a:r>
+          </a:p>
+          <a:p>
+            <a:pPr lvl="0" indent="0" marL="0">
+              <a:buNone/>
+            </a:pPr>
+          </a:p>
+          <a:p>
+            <a:pPr lvl="0" indent="0" marL="0">
+              <a:buNone/>
+            </a:pPr>
+            <a:r>
+              <a:rPr/>
+              <a:t>Explain the max and the +1 rather than skating over them, because someone will ask. tenure_months holds zeros and, before Section 4’s domain rule, a -3: divide by it raw and you get an infinity and a sign flip. That is Section 4 turning up in Section 7, and it is what feature engineering on real data actually looks like - one line of algebra, three lines of defending it against the column you have.</a:t>
+            </a:r>
+          </a:p>
+          <a:p>
+            <a:pPr lvl="0" indent="0" marL="0">
+              <a:buNone/>
+            </a:pPr>
+          </a:p>
+          <a:p>
+            <a:pPr lvl="0" indent="0" marL="0">
+              <a:buNone/>
+            </a:pPr>
+            <a:r>
+              <a:rPr/>
+              <a:t>The point to land: any engineered feature that involves a statistic LEARNED from data - bin edges from quantiles, a scaled interaction - is subject to the same rule as scaling. A pure arithmetic combination (this ratio) needs no fold-awareness; a learned one does.</a:t>
             </a:r>
           </a:p>
         </p:txBody>
@@ -3678,7 +3861,35 @@
             </a:pPr>
             <a:r>
               <a:rPr/>
-              <a:t>Set up the closing section. Lesson 1’s leak - selecting features on the full dataset - is visible once you know to look for it: an obviously extra step. Today’s two are not. Imputing a missing value and encoding a category both read as ordinary data cleaning, not as “training a model.” They ARE training a model, in the sense Section 8.1 makes precise: any fitted parameter is part of f, and f must be independent of the test set.</a:t>
+              <a:t>22 minutes. Let them work; circulate.</a:t>
+            </a:r>
+          </a:p>
+          <a:p>
+            <a:pPr lvl="0" indent="0" marL="0">
+              <a:buNone/>
+            </a:pPr>
+          </a:p>
+          <a:p>
+            <a:pPr lvl="0" indent="0" marL="0">
+              <a:buNone/>
+            </a:pPr>
+            <a:r>
+              <a:rPr/>
+              <a:t>The gradient descent toy is worth running interactively - change the variance ratio live and watch the iteration count move, per the handout’s “try this”. It makes the condition number argument concrete in a way the derivation alone does not.</a:t>
+            </a:r>
+          </a:p>
+          <a:p>
+            <a:pPr lvl="0" indent="0" marL="0">
+              <a:buNone/>
+            </a:pPr>
+          </a:p>
+          <a:p>
+            <a:pPr lvl="0" indent="0" marL="0">
+              <a:buNone/>
+            </a:pPr>
+            <a:r>
+              <a:rPr/>
+              <a:t>If the room is moving fast, the ColumnTransformer section is where to slow down: it is the piece they will reuse in every exercise and in the project, and getting the column selectors right is fiddlier than it looks.</a:t>
             </a:r>
           </a:p>
         </p:txBody>
@@ -3760,35 +3971,7 @@
             </a:pPr>
             <a:r>
               <a:rPr/>
-              <a:t>Walk the mechanism before the number. KNNImputer fills a gap using other rows’ values: it finds the nearest neighbours in feature space and averages them. “Nearest in the whole dataset” includes test rows, if it was fitted before the split existed.</a:t>
-            </a:r>
-          </a:p>
-          <a:p>
-            <a:pPr lvl="0" indent="0" marL="0">
-              <a:buNone/>
-            </a:pPr>
-          </a:p>
-          <a:p>
-            <a:pPr lvl="0" indent="0" marL="0">
-              <a:buNone/>
-            </a:pPr>
-            <a:r>
-              <a:rPr/>
-              <a:t>So a test row’s missing value can be filled using its own neighbours - which may include rows whose labels the model will later be scored on. The imputer did nothing wrong; it was simply shown data it should not have seen.</a:t>
-            </a:r>
-          </a:p>
-          <a:p>
-            <a:pPr lvl="0" indent="0" marL="0">
-              <a:buNone/>
-            </a:pPr>
-          </a:p>
-          <a:p>
-            <a:pPr lvl="0" indent="0" marL="0">
-              <a:buNone/>
-            </a:pPr>
-            <a:r>
-              <a:rPr/>
-              <a:t>Notebook 3 measures the gap. Connect it back to Lesson 1: this is the same independence argument, applied to a step nobody thinks of as learning. The imputer learns; therefore it belongs inside the training fold.</a:t>
+              <a:t>Set up the closing section. Lesson 1’s leak - selecting features on the full dataset - is visible once you know to look for it: an obviously extra step. Today’s two are not. Imputing a missing value and encoding a category both read as ordinary data cleaning, not as “training a model.” They ARE training a model, in the sense Section 8.1 makes precise: any fitted parameter is part of f, and f must be independent of the test set.</a:t>
             </a:r>
           </a:p>
         </p:txBody>
@@ -3870,35 +4053,35 @@
             </a:pPr>
             <a:r>
               <a:rPr/>
-              <a:t>98 of 128. Not an edge case - the substantial majority of imputed training rows borrowed a value from at least one row the model would later be scored on.</a:t>
-            </a:r>
-          </a:p>
-          <a:p>
-            <a:pPr lvl="0" indent="0" marL="0">
-              <a:buNone/>
-            </a:pPr>
-          </a:p>
-          <a:p>
-            <a:pPr lvl="0" indent="0" marL="0">
-              <a:buNone/>
-            </a:pPr>
-            <a:r>
-              <a:rPr/>
-              <a:t>Stress that nothing in the code looks wrong. KNNImputer did exactly what it says: found the nearest neighbours in the data it was given. The error was in what it was given, and it happened one line earlier.</a:t>
-            </a:r>
-          </a:p>
-          <a:p>
-            <a:pPr lvl="0" indent="0" marL="0">
-              <a:buNone/>
-            </a:pPr>
-          </a:p>
-          <a:p>
-            <a:pPr lvl="0" indent="0" marL="0">
-              <a:buNone/>
-            </a:pPr>
-            <a:r>
-              <a:rPr/>
-              <a:t>This is the number to put on the board if only one number from today survives.</a:t>
+              <a:t>Walk the mechanism before the number. KNNImputer fills a gap using other rows’ values: it finds the nearest neighbours in feature space and averages them. “Nearest in the whole dataset” includes test rows, if it was fitted before the split existed.</a:t>
+            </a:r>
+          </a:p>
+          <a:p>
+            <a:pPr lvl="0" indent="0" marL="0">
+              <a:buNone/>
+            </a:pPr>
+          </a:p>
+          <a:p>
+            <a:pPr lvl="0" indent="0" marL="0">
+              <a:buNone/>
+            </a:pPr>
+            <a:r>
+              <a:rPr/>
+              <a:t>So a TRAINING row’s missing age can be filled with a value read off a TEST row - the test set writing into the training data, one gap at a time. Note the imputer never touches a label; it copies feature values. That is enough: those values are what the model then fits on. The imputer did nothing wrong; it was simply shown data it should not have seen.</a:t>
+            </a:r>
+          </a:p>
+          <a:p>
+            <a:pPr lvl="0" indent="0" marL="0">
+              <a:buNone/>
+            </a:pPr>
+          </a:p>
+          <a:p>
+            <a:pPr lvl="0" indent="0" marL="0">
+              <a:buNone/>
+            </a:pPr>
+            <a:r>
+              <a:rPr/>
+              <a:t>Notebook 3 measures the gap. Connect it back to Lesson 1: this is the same independence argument, applied to a step nobody thinks of as learning. The imputer learns; therefore it belongs inside the training fold.</a:t>
             </a:r>
           </a:p>
         </p:txBody>
@@ -4090,35 +4273,35 @@
             </a:pPr>
             <a:r>
               <a:rPr/>
-              <a:t>Ninety-eight of a hundred and twenty-eight, drawn so the proportion lands.</a:t>
-            </a:r>
-          </a:p>
-          <a:p>
-            <a:pPr lvl="0" indent="0" marL="0">
-              <a:buNone/>
-            </a:pPr>
-          </a:p>
-          <a:p>
-            <a:pPr lvl="0" indent="0" marL="0">
-              <a:buNone/>
-            </a:pPr>
-            <a:r>
-              <a:rPr/>
-              <a:t>Say what was actually done: the imputer was fitted before the split, so when it filled a missing age it was allowed to look at test rows to decide what to fill it with. Three quarters of the affected training rows had a test row among the five neighbours it consulted.</a:t>
-            </a:r>
-          </a:p>
-          <a:p>
-            <a:pPr lvl="0" indent="0" marL="0">
-              <a:buNone/>
-            </a:pPr>
-          </a:p>
-          <a:p>
-            <a:pPr lvl="0" indent="0" marL="0">
-              <a:buNone/>
-            </a:pPr>
-            <a:r>
-              <a:rPr/>
-              <a:t>The sentence to leave hanging is the one from the slide before: nothing raised an error. The notebook ran, the score improved, and the improvement was the test set leaking into the training data one imputed value at a time. This is the argument for the pipeline, made in numbers.</a:t>
+              <a:t>94 of 128. Not an edge case - nearly three quarters of the imputed training rows borrowed a value from at least one row the model would later be scored on.</a:t>
+            </a:r>
+          </a:p>
+          <a:p>
+            <a:pPr lvl="0" indent="0" marL="0">
+              <a:buNone/>
+            </a:pPr>
+          </a:p>
+          <a:p>
+            <a:pPr lvl="0" indent="0" marL="0">
+              <a:buNone/>
+            </a:pPr>
+            <a:r>
+              <a:rPr/>
+              <a:t>Stress that nothing in the code looks wrong. KNNImputer did exactly what it says: found the nearest neighbours in the data it was given. The error was in what it was given, and it happened one line earlier.</a:t>
+            </a:r>
+          </a:p>
+          <a:p>
+            <a:pPr lvl="0" indent="0" marL="0">
+              <a:buNone/>
+            </a:pPr>
+          </a:p>
+          <a:p>
+            <a:pPr lvl="0" indent="0" marL="0">
+              <a:buNone/>
+            </a:pPr>
+            <a:r>
+              <a:rPr/>
+              <a:t>This is the number to put on the board if only one number from today survives.</a:t>
             </a:r>
           </a:p>
         </p:txBody>
@@ -4200,35 +4383,35 @@
             </a:pPr>
             <a:r>
               <a:rPr/>
-              <a:t>zip_code has no real relationship with churn - the data was generated that way deliberately, so any apparent signal is an artefact we can measure exactly.</a:t>
-            </a:r>
-          </a:p>
-          <a:p>
-            <a:pPr lvl="0" indent="0" marL="0">
-              <a:buNone/>
-            </a:pPr>
-          </a:p>
-          <a:p>
-            <a:pPr lvl="0" indent="0" marL="0">
-              <a:buNone/>
-            </a:pPr>
-            <a:r>
-              <a:rPr/>
-              <a:t>Target encoding replaces each zip code with the average churn rate of its own customers. Computed before the split, that average includes the test rows’ labels. The feature now contains the answer, in diluted form.</a:t>
-            </a:r>
-          </a:p>
-          <a:p>
-            <a:pPr lvl="0" indent="0" marL="0">
-              <a:buNone/>
-            </a:pPr>
-          </a:p>
-          <a:p>
-            <a:pPr lvl="0" indent="0" marL="0">
-              <a:buNone/>
-            </a:pPr>
-            <a:r>
-              <a:rPr/>
-              <a:t>This is the most dangerous leak of the three, because the resulting column looks entirely reasonable in a dataframe: a number between 0 and 1, sensibly distributed, with no trace of where it came from. Nothing about it says “this was computed from the labels”.</a:t>
+              <a:t>Ninety-four of a hundred and twenty-eight, drawn so the proportion lands.</a:t>
+            </a:r>
+          </a:p>
+          <a:p>
+            <a:pPr lvl="0" indent="0" marL="0">
+              <a:buNone/>
+            </a:pPr>
+          </a:p>
+          <a:p>
+            <a:pPr lvl="0" indent="0" marL="0">
+              <a:buNone/>
+            </a:pPr>
+            <a:r>
+              <a:rPr/>
+              <a:t>Say what was actually done: the imputer was fitted before the split, so when it filled a missing age it was allowed to look at test rows to decide what to fill it with. Nearly three quarters of the affected training rows had a test row among the five donors it consulted.</a:t>
+            </a:r>
+          </a:p>
+          <a:p>
+            <a:pPr lvl="0" indent="0" marL="0">
+              <a:buNone/>
+            </a:pPr>
+          </a:p>
+          <a:p>
+            <a:pPr lvl="0" indent="0" marL="0">
+              <a:buNone/>
+            </a:pPr>
+            <a:r>
+              <a:rPr/>
+              <a:t>The sentence to leave hanging is the one from the slide before: nothing raised an error. The notebook ran, the score improved, and the improvement was the test set leaking into the training data one imputed value at a time. This is the argument for the pipeline, made in numbers.</a:t>
             </a:r>
           </a:p>
         </p:txBody>
@@ -4310,21 +4493,35 @@
             </a:pPr>
             <a:r>
               <a:rPr/>
-              <a:t>Baseline without zip: AUC 0.751. Honest encoding (sklearn’s TargetEncoder, cross-fitted inside the pipeline): 0.751 - indistinguishable, correctly, since zip carries nothing. Leaky encoding, computed before the split: 0.891.</a:t>
-            </a:r>
-          </a:p>
-          <a:p>
-            <a:pPr lvl="0" indent="0" marL="0">
-              <a:buNone/>
-            </a:pPr>
-          </a:p>
-          <a:p>
-            <a:pPr lvl="0" indent="0" marL="0">
-              <a:buNone/>
-            </a:pPr>
-            <a:r>
-              <a:rPr/>
-              <a:t>Let that number sit. It looks like a genuinely better model. It is not one - the improvement is manufactured entirely by the mechanism on the next slide. This is Lesson 1’s 77%-on-coin-flip-labels story again, produced by two unremarkable lines of preprocessing instead of an obviously wrong one.</a:t>
+              <a:t>zip_code has no real relationship with churn - the data was generated that way deliberately, so any apparent signal is an artefact we can measure exactly.</a:t>
+            </a:r>
+          </a:p>
+          <a:p>
+            <a:pPr lvl="0" indent="0" marL="0">
+              <a:buNone/>
+            </a:pPr>
+          </a:p>
+          <a:p>
+            <a:pPr lvl="0" indent="0" marL="0">
+              <a:buNone/>
+            </a:pPr>
+            <a:r>
+              <a:rPr/>
+              <a:t>Target encoding replaces each zip code with the average churn rate of its own customers. Computed before the split, that average includes the test rows’ labels. The feature now contains the answer, in diluted form.</a:t>
+            </a:r>
+          </a:p>
+          <a:p>
+            <a:pPr lvl="0" indent="0" marL="0">
+              <a:buNone/>
+            </a:pPr>
+          </a:p>
+          <a:p>
+            <a:pPr lvl="0" indent="0" marL="0">
+              <a:buNone/>
+            </a:pPr>
+            <a:r>
+              <a:rPr/>
+              <a:t>This is the most dangerous leak of the three, because the resulting column looks entirely reasonable in a dataframe: a number between 0 and 1, sensibly distributed, with no trace of where it came from. Nothing about it says “this was computed from the labels”.</a:t>
             </a:r>
           </a:p>
         </p:txBody>
@@ -4406,35 +4603,21 @@
             </a:pPr>
             <a:r>
               <a:rPr/>
-              <a:t>Handout Section 9.2 has the algebra. The intuition: for a zip code with a single customer, the target encoding IS that customer’s label, straight through. With two customers it is the average of two labels. Only as the group grows does the encoding become a genuine statistic rather than a copy of the answer.</a:t>
-            </a:r>
-          </a:p>
-          <a:p>
-            <a:pPr lvl="0" indent="0" marL="0">
-              <a:buNone/>
-            </a:pPr>
-          </a:p>
-          <a:p>
-            <a:pPr lvl="0" indent="0" marL="0">
-              <a:buNone/>
-            </a:pPr>
-            <a:r>
-              <a:rPr/>
-              <a:t>So the leak is worst exactly where the data is thinnest - which is also where high-cardinality columns spend most of their mass. Most zip codes here have a handful of customers.</a:t>
-            </a:r>
-          </a:p>
-          <a:p>
-            <a:pPr lvl="0" indent="0" marL="0">
-              <a:buNone/>
-            </a:pPr>
-          </a:p>
-          <a:p>
-            <a:pPr lvl="0" indent="0" marL="0">
-              <a:buNone/>
-            </a:pPr>
-            <a:r>
-              <a:rPr/>
-              <a:t>Give them the diagnostic to remember: if a feature’s usefulness comes mostly from its rarest levels, be suspicious. That is the shape of a leak, not of a signal.</a:t>
+              <a:t>Baseline without zip: AUC 0.751. Honest encoding (sklearn’s TargetEncoder, cross-fitted inside the pipeline): 0.751 - indistinguishable, correctly, since zip carries nothing. Leaky encoding, computed before the split: 0.891.</a:t>
+            </a:r>
+          </a:p>
+          <a:p>
+            <a:pPr lvl="0" indent="0" marL="0">
+              <a:buNone/>
+            </a:pPr>
+          </a:p>
+          <a:p>
+            <a:pPr lvl="0" indent="0" marL="0">
+              <a:buNone/>
+            </a:pPr>
+            <a:r>
+              <a:rPr/>
+              <a:t>Let that number sit. It looks like a genuinely better model. It is not one - the improvement is manufactured entirely by the mechanism on the next slide. This is Lesson 1’s 77%-on-coin-flip-labels story again, produced by two unremarkable lines of preprocessing instead of an obviously wrong one.</a:t>
             </a:r>
           </a:p>
         </p:txBody>
@@ -4516,21 +4699,49 @@
             </a:pPr>
             <a:r>
               <a:rPr/>
-              <a:t>Notebook 3 shows the n_c=1 case literally: zip code Z378, one customer, churned=1, encoded value 1.000. Not correlated with the label. IS the label, relabelled as an input.</a:t>
-            </a:r>
-          </a:p>
-          <a:p>
-            <a:pPr lvl="0" indent="0" marL="0">
-              <a:buNone/>
-            </a:pPr>
-          </a:p>
-          <a:p>
-            <a:pPr lvl="0" indent="0" marL="0">
-              <a:buNone/>
-            </a:pPr>
-            <a:r>
-              <a:rPr/>
-              <a:t>Connect to Section 6.3: high cardinality means small groups means a bigger leak by exactly this formula - the curse of dimensionality and the leakage risk are the same underlying fact.</a:t>
+              <a:t>Read the equation out as a sentence: the “leave-in” encoding differs from the honest leave-one-out encoding by the row’s own disagreement with its group, divided by how many people are in it.</a:t>
+            </a:r>
+          </a:p>
+          <a:p>
+            <a:pPr lvl="0" indent="0" marL="0">
+              <a:buNone/>
+            </a:pPr>
+          </a:p>
+          <a:p>
+            <a:pPr lvl="0" indent="0" marL="0">
+              <a:buNone/>
+            </a:pPr>
+            <a:r>
+              <a:rPr/>
+              <a:t>Handout Section 9.2 has the algebra. The intuition: for a zip code with a single customer, the target encoding IS that customer’s label, straight through. With two customers it is the average of two labels. Only as the group grows does the encoding become a genuine statistic rather than a copy of the answer.</a:t>
+            </a:r>
+          </a:p>
+          <a:p>
+            <a:pPr lvl="0" indent="0" marL="0">
+              <a:buNone/>
+            </a:pPr>
+          </a:p>
+          <a:p>
+            <a:pPr lvl="0" indent="0" marL="0">
+              <a:buNone/>
+            </a:pPr>
+            <a:r>
+              <a:rPr/>
+              <a:t>So the leak is worst exactly where the data is thinnest - which is also where high-cardinality columns spend most of their mass. Most zip codes here have a handful of customers.</a:t>
+            </a:r>
+          </a:p>
+          <a:p>
+            <a:pPr lvl="0" indent="0" marL="0">
+              <a:buNone/>
+            </a:pPr>
+          </a:p>
+          <a:p>
+            <a:pPr lvl="0" indent="0" marL="0">
+              <a:buNone/>
+            </a:pPr>
+            <a:r>
+              <a:rPr/>
+              <a:t>Give them the diagnostic to remember: if a feature’s usefulness comes mostly from its rarest levels, be suspicious. That is the shape of a leak, not of a signal.</a:t>
             </a:r>
           </a:p>
         </p:txBody>
@@ -4612,35 +4823,21 @@
             </a:pPr>
             <a:r>
               <a:rPr/>
-              <a:t>Smoothing pulls each group’s mean towards the global mean, weighted by group size, so a one-customer zip code barely moves from the overall rate. It reduces the leak but does not remove it.</a:t>
-            </a:r>
-          </a:p>
-          <a:p>
-            <a:pPr lvl="0" indent="0" marL="0">
-              <a:buNone/>
-            </a:pPr>
-          </a:p>
-          <a:p>
-            <a:pPr lvl="0" indent="0" marL="0">
-              <a:buNone/>
-            </a:pPr>
-            <a:r>
-              <a:rPr/>
-              <a:t>Say clearly what actually removes it: fitting the encoder inside the training fold, exactly as with every other learned step. Smoothing is a refinement on top of that, not a substitute for it.</a:t>
-            </a:r>
-          </a:p>
-          <a:p>
-            <a:pPr lvl="0" indent="0" marL="0">
-              <a:buNone/>
-            </a:pPr>
-          </a:p>
-          <a:p>
-            <a:pPr lvl="0" indent="0" marL="0">
-              <a:buNone/>
-            </a:pPr>
-            <a:r>
-              <a:rPr/>
-              <a:t>This is the third time today the same rule has appeared - imputation, scaling, encoding - and that repetition is the point of the lesson. Lesson 1 stated the rule for one case; today it turns out to be the same rule every time.</a:t>
+              <a:t>Notebook 3 shows the n_c=1 case literally: zip code Z472, one customer, churn label 0, encoded value 0.000. Not correlated with the label. IS the label, relabelled as an input.</a:t>
+            </a:r>
+          </a:p>
+          <a:p>
+            <a:pPr lvl="0" indent="0" marL="0">
+              <a:buNone/>
+            </a:pPr>
+          </a:p>
+          <a:p>
+            <a:pPr lvl="0" indent="0" marL="0">
+              <a:buNone/>
+            </a:pPr>
+            <a:r>
+              <a:rPr/>
+              <a:t>Connect to Section 6.3: high cardinality means small groups means a bigger leak by exactly this formula - the curse of dimensionality and the leakage risk are the same underlying fact.</a:t>
             </a:r>
           </a:p>
         </p:txBody>
@@ -4722,21 +4919,35 @@
             </a:pPr>
             <a:r>
               <a:rPr/>
-              <a:t>One test, not a growing list of special cases: does fitting this step compute anything from the rows it is given? If yes, it goes inside the pipeline. Handout Section 9.3.</a:t>
-            </a:r>
-          </a:p>
-          <a:p>
-            <a:pPr lvl="0" indent="0" marL="0">
-              <a:buNone/>
-            </a:pPr>
-          </a:p>
-          <a:p>
-            <a:pPr lvl="0" indent="0" marL="0">
-              <a:buNone/>
-            </a:pPr>
-            <a:r>
-              <a:rPr/>
-              <a:t>Say explicitly: Lesson 5 returns to leakage a third time, for hyperparameter tuning, where the same test applies once more.</a:t>
+              <a:t>Smoothing pulls each group’s mean towards the global mean, weighted by group size, so a one-customer zip code barely moves from the overall rate. It reduces the leak but does not remove it.</a:t>
+            </a:r>
+          </a:p>
+          <a:p>
+            <a:pPr lvl="0" indent="0" marL="0">
+              <a:buNone/>
+            </a:pPr>
+          </a:p>
+          <a:p>
+            <a:pPr lvl="0" indent="0" marL="0">
+              <a:buNone/>
+            </a:pPr>
+            <a:r>
+              <a:rPr/>
+              <a:t>Say clearly what actually removes it: fitting the encoder inside the training fold, exactly as with every other learned step. Smoothing is a refinement on top of that, not a substitute for it.</a:t>
+            </a:r>
+          </a:p>
+          <a:p>
+            <a:pPr lvl="0" indent="0" marL="0">
+              <a:buNone/>
+            </a:pPr>
+          </a:p>
+          <a:p>
+            <a:pPr lvl="0" indent="0" marL="0">
+              <a:buNone/>
+            </a:pPr>
+            <a:r>
+              <a:rPr/>
+              <a:t>This is the third time today the same rule has appeared - imputation, scaling, encoding - and that repetition is the point of the lesson. Lesson 1 stated the rule for one case; today it turns out to be the same rule every time.</a:t>
             </a:r>
           </a:p>
         </p:txBody>
@@ -4818,35 +5029,21 @@
             </a:pPr>
             <a:r>
               <a:rPr/>
-              <a:t>20 minutes. This notebook is the payoff of the lesson: three leaks, each measured against an honest pipeline on the same data.</a:t>
-            </a:r>
-          </a:p>
-          <a:p>
-            <a:pPr lvl="0" indent="0" marL="0">
-              <a:buNone/>
-            </a:pPr>
-          </a:p>
-          <a:p>
-            <a:pPr lvl="0" indent="0" marL="0">
-              <a:buNone/>
-            </a:pPr>
-            <a:r>
-              <a:rPr/>
-              <a:t>The numbers matter less than the pattern - every leak inflates the score, none of them raises an error, and all three are things a competent person does by accident. Ask them to predict the direction and rough size of each gap before running the cell.</a:t>
-            </a:r>
-          </a:p>
-          <a:p>
-            <a:pPr lvl="0" indent="0" marL="0">
-              <a:buNone/>
-            </a:pPr>
-          </a:p>
-          <a:p>
-            <a:pPr lvl="0" indent="0" marL="0">
-              <a:buNone/>
-            </a:pPr>
-            <a:r>
-              <a:rPr/>
-              <a:t>If time is short, the target encoding case is the one to keep: it is the subtlest and the one most likely to appear in their own project.</a:t>
+              <a:t>One test, not a growing list of special cases: does fitting this step compute anything from the rows it is given? If yes, it goes inside the pipeline. Handout Section 9.3.</a:t>
+            </a:r>
+          </a:p>
+          <a:p>
+            <a:pPr lvl="0" indent="0" marL="0">
+              <a:buNone/>
+            </a:pPr>
+          </a:p>
+          <a:p>
+            <a:pPr lvl="0" indent="0" marL="0">
+              <a:buNone/>
+            </a:pPr>
+            <a:r>
+              <a:rPr/>
+              <a:t>Say explicitly: Lesson 5 returns to leakage a third time, for hyperparameter tuning, where the same test applies once more.</a:t>
             </a:r>
           </a:p>
         </p:txBody>
@@ -4928,35 +5125,35 @@
             </a:pPr>
             <a:r>
               <a:rPr/>
-              <a:t>Draw the thread together explicitly. Lesson 1 said nothing is learned before the split, using feature selection as the example. Today every preprocessing step turned out to be a learning step: an imputer learns a mean or a set of neighbours, a scaler learns a mean and a standard deviation, an encoder learns a mapping from categories to numbers.</a:t>
-            </a:r>
-          </a:p>
-          <a:p>
-            <a:pPr lvl="0" indent="0" marL="0">
-              <a:buNone/>
-            </a:pPr>
-          </a:p>
-          <a:p>
-            <a:pPr lvl="0" indent="0" marL="0">
-              <a:buNone/>
-            </a:pPr>
-            <a:r>
-              <a:rPr/>
-              <a:t>So the rule did not get more complicated - it got more general. And the pipeline is not tidiness, it is the mechanism that enforces the rule structurally, which is why we now build one for everything.</a:t>
-            </a:r>
-          </a:p>
-          <a:p>
-            <a:pPr lvl="0" indent="0" marL="0">
-              <a:buNone/>
-            </a:pPr>
-          </a:p>
-          <a:p>
-            <a:pPr lvl="0" indent="0" marL="0">
-              <a:buNone/>
-            </a:pPr>
-            <a:r>
-              <a:rPr/>
-              <a:t>Preview Lesson 3 in one sentence: with the data prepared honestly, we can finally fit something and look at what the fitting actually does.</a:t>
+              <a:t>22 minutes. This notebook is the payoff of the lesson: the two leaks of today, each measured against an honest pipeline on the same data. The third way of breaking the rule, on the earlier diagram, was Lesson 1’s.</a:t>
+            </a:r>
+          </a:p>
+          <a:p>
+            <a:pPr lvl="0" indent="0" marL="0">
+              <a:buNone/>
+            </a:pPr>
+          </a:p>
+          <a:p>
+            <a:pPr lvl="0" indent="0" marL="0">
+              <a:buNone/>
+            </a:pPr>
+            <a:r>
+              <a:rPr/>
+              <a:t>The numbers matter less than the pattern - both leaks inflate the score, neither raises an error, and both are things a competent person does by accident. Ask them to predict the direction and rough size of each gap before running the cell.</a:t>
+            </a:r>
+          </a:p>
+          <a:p>
+            <a:pPr lvl="0" indent="0" marL="0">
+              <a:buNone/>
+            </a:pPr>
+          </a:p>
+          <a:p>
+            <a:pPr lvl="0" indent="0" marL="0">
+              <a:buNone/>
+            </a:pPr>
+            <a:r>
+              <a:rPr/>
+              <a:t>If time is short, the target encoding case is the one to keep: it is the subtlest and the one most likely to appear in their own project.</a:t>
             </a:r>
           </a:p>
         </p:txBody>
@@ -5038,35 +5235,35 @@
             </a:pPr>
             <a:r>
               <a:rPr/>
-              <a:t>Set it explicitly. The exercise reuses churn_data.py with a different seed, so results will not match today’s numbers exactly - that is intentional, it stops copy-pasted answers from working.</a:t>
-            </a:r>
-          </a:p>
-          <a:p>
-            <a:pPr lvl="0" indent="0" marL="0">
-              <a:buNone/>
-            </a:pPr>
-          </a:p>
-          <a:p>
-            <a:pPr lvl="0" indent="0" marL="0">
-              <a:buNone/>
-            </a:pPr>
-            <a:r>
-              <a:rPr/>
-              <a:t>Remind them: as in Exercise 1, there are no marks for accuracy. Marks are for methodological correctness, and specifically here for correctly identifying which preprocessing steps needed to be inside the pipeline and demonstrating, with a number, what leaving one out would have cost.</a:t>
-            </a:r>
-          </a:p>
-          <a:p>
-            <a:pPr lvl="0" indent="0" marL="0">
-              <a:buNone/>
-            </a:pPr>
-          </a:p>
-          <a:p>
-            <a:pPr lvl="0" indent="0" marL="0">
-              <a:buNone/>
-            </a:pPr>
-            <a:r>
-              <a:rPr/>
-              <a:t>Also point them at the quiz - the reasoning-tagged questions are the closest thing to the exam they will see before the sample papers.</a:t>
+              <a:t>Draw the thread together explicitly. Lesson 1 said nothing is learned before the split, using feature selection as the example. Today every preprocessing step turned out to be a learning step: an imputer learns a mean or a set of neighbours, a scaler learns a mean and a standard deviation, an encoder learns a mapping from categories to numbers.</a:t>
+            </a:r>
+          </a:p>
+          <a:p>
+            <a:pPr lvl="0" indent="0" marL="0">
+              <a:buNone/>
+            </a:pPr>
+          </a:p>
+          <a:p>
+            <a:pPr lvl="0" indent="0" marL="0">
+              <a:buNone/>
+            </a:pPr>
+            <a:r>
+              <a:rPr/>
+              <a:t>So the rule did not get more complicated - it got more general. And the pipeline is not tidiness, it is the mechanism that enforces the rule structurally, which is why we now build one for everything.</a:t>
+            </a:r>
+          </a:p>
+          <a:p>
+            <a:pPr lvl="0" indent="0" marL="0">
+              <a:buNone/>
+            </a:pPr>
+          </a:p>
+          <a:p>
+            <a:pPr lvl="0" indent="0" marL="0">
+              <a:buNone/>
+            </a:pPr>
+            <a:r>
+              <a:rPr/>
+              <a:t>Preview Lesson 3 in one sentence: with the data prepared honestly, we can finally fit something and look at what the fitting actually does.</a:t>
             </a:r>
           </a:p>
         </p:txBody>
@@ -5148,7 +5345,35 @@
             </a:pPr>
             <a:r>
               <a:rPr/>
-              <a:t>This figure already existed in the notebook and is the reason the next forty minutes happen: monthly_charges is bimodal, tenure is nearly uniform, age is skewed and has a gap. Ask what each shape implies before moving on - a bimodal column usually means two populations mixed together.</a:t>
+              <a:t>Do not describe shapes the room cannot see. On the first two panels there is no shape to read: tenure and monthly_charges are each a single spike at the left, with the axis running out to 1000 and 3500 and nothing drawn out there.</a:t>
+            </a:r>
+          </a:p>
+          <a:p>
+            <a:pPr lvl="0" indent="0" marL="0">
+              <a:buNone/>
+            </a:pPr>
+          </a:p>
+          <a:p>
+            <a:pPr lvl="0" indent="0" marL="0">
+              <a:buNone/>
+            </a:pPr>
+            <a:r>
+              <a:rPr/>
+              <a:t>That absence IS the slide. Ask them what stretched the axis, and let someone say it: a few values so extreme that every other customer has been squashed into one bar. This is the figure that makes the next forty minutes necessary.</a:t>
+            </a:r>
+          </a:p>
+          <a:p>
+            <a:pPr lvl="0" indent="0" marL="0">
+              <a:buNone/>
+            </a:pPr>
+          </a:p>
+          <a:p>
+            <a:pPr lvl="0" indent="0" marL="0">
+              <a:buNone/>
+            </a:pPr>
+            <a:r>
+              <a:rPr/>
+              <a:t>Then point at age and num_support_calls, which are on their own honest ranges and do show a distribution - age skewed with a spike at the youngest bound, support calls a Poisson-looking count. That contrast is the argument for cleaning before looking any further, and it is why the same plot reappears after Section 4.</a:t>
             </a:r>
           </a:p>
         </p:txBody>
@@ -5230,35 +5455,35 @@
             </a:pPr>
             <a:r>
               <a:rPr/>
-              <a:t>Set the exercise explicitly and give the deadline - Friday 9 October, at the start of Lesson 3.</a:t>
-            </a:r>
-          </a:p>
-          <a:p>
-            <a:pPr lvl="0" indent="0" marL="0">
-              <a:buNone/>
-            </a:pPr>
-          </a:p>
-          <a:p>
-            <a:pPr lvl="0" indent="0" marL="0">
-              <a:buNone/>
-            </a:pPr>
-            <a:r>
-              <a:rPr/>
-              <a:t>Point out that it uses the same churn dataset, so the exploration they did today carries over, and that the marks are again on methodology: a pipeline that is correct but modest beats a better score obtained by preparing the full dataset before splitting.</a:t>
-            </a:r>
-          </a:p>
-          <a:p>
-            <a:pPr lvl="0" indent="0" marL="0">
-              <a:buNone/>
-            </a:pPr>
-          </a:p>
-          <a:p>
-            <a:pPr lvl="0" indent="0" marL="0">
-              <a:buNone/>
-            </a:pPr>
-            <a:r>
-              <a:rPr/>
-              <a:t>Remind them the Lesson 1 exercise is due today if anyone has not handed it in, and that the project topic must be confirmed by Lesson 4 - which is two weeks away, so now is the time to be reading dataset descriptions.</a:t>
+              <a:t>Set it explicitly. The exercise reuses churn_data.py with a different seed, so results will not match today’s numbers exactly - that is intentional, it stops copy-pasted answers from working.</a:t>
+            </a:r>
+          </a:p>
+          <a:p>
+            <a:pPr lvl="0" indent="0" marL="0">
+              <a:buNone/>
+            </a:pPr>
+          </a:p>
+          <a:p>
+            <a:pPr lvl="0" indent="0" marL="0">
+              <a:buNone/>
+            </a:pPr>
+            <a:r>
+              <a:rPr/>
+              <a:t>Remind them: as in Exercise 1, there are no marks for accuracy. Marks are for methodological correctness, and specifically here for correctly identifying which preprocessing steps needed to be inside the pipeline and demonstrating, with a number, what leaving one out would have cost.</a:t>
+            </a:r>
+          </a:p>
+          <a:p>
+            <a:pPr lvl="0" indent="0" marL="0">
+              <a:buNone/>
+            </a:pPr>
+          </a:p>
+          <a:p>
+            <a:pPr lvl="0" indent="0" marL="0">
+              <a:buNone/>
+            </a:pPr>
+            <a:r>
+              <a:rPr/>
+              <a:t>Also point them at the quiz - the reasoning-tagged questions are the closest thing to the exam they will see before the sample papers.</a:t>
             </a:r>
           </a:p>
         </p:txBody>
@@ -5281,6 +5506,116 @@
             <a:fld id="{18BDFEC3-8487-43E8-A154-7C12CBC1FFF2}" type="slidenum">
               <a:rPr lang="en-US"/>
               <a:t>51</a:t>
+            </a:fld>
+            <a:endParaRPr lang="en-US"/>
+          </a:p>
+        </p:txBody>
+      </p:sp>
+    </p:spTree>
+  </p:cSld>
+</p:notes>
+</file>
+
+<file path=ppt/notesSlides/notesSlide51.xml><?xml version="1.0" encoding="utf-8"?>
+<p:notes xmlns:a="http://schemas.openxmlformats.org/drawingml/2006/main" xmlns:r="http://schemas.openxmlformats.org/officeDocument/2006/relationships" xmlns:p="http://schemas.openxmlformats.org/presentationml/2006/main">
+  <p:cSld>
+    <p:spTree>
+      <p:nvGrpSpPr>
+        <p:cNvPr id="1" name=""/>
+        <p:cNvGrpSpPr/>
+        <p:nvPr/>
+      </p:nvGrpSpPr>
+      <p:grpSpPr>
+        <a:xfrm>
+          <a:off x="0" y="0"/>
+          <a:ext cx="0" cy="0"/>
+          <a:chOff x="0" y="0"/>
+          <a:chExt cx="0" cy="0"/>
+        </a:xfrm>
+      </p:grpSpPr>
+      <p:sp>
+        <p:nvSpPr>
+          <p:cNvPr id="2" name="Slide Image Placeholder 1"/>
+          <p:cNvSpPr>
+            <a:spLocks noGrp="1" noRot="1" noChangeAspect="1"/>
+          </p:cNvSpPr>
+          <p:nvPr>
+            <p:ph type="sldImg"/>
+          </p:nvPr>
+        </p:nvSpPr>
+        <p:spPr/>
+      </p:sp>
+      <p:sp>
+        <p:nvSpPr>
+          <p:cNvPr id="3" name="Notes Placeholder 2"/>
+          <p:cNvSpPr>
+            <a:spLocks noGrp="1"/>
+          </p:cNvSpPr>
+          <p:nvPr>
+            <p:ph type="body" idx="1"/>
+          </p:nvPr>
+        </p:nvSpPr>
+        <p:spPr/>
+        <p:txBody>
+          <a:bodyPr/>
+          <a:lstStyle/>
+          <a:p>
+            <a:pPr lvl="0" indent="0" marL="0">
+              <a:buNone/>
+            </a:pPr>
+            <a:r>
+              <a:rPr/>
+              <a:t>Set the exercise explicitly and give the deadline - Friday 9 October, at the start of Lesson 3.</a:t>
+            </a:r>
+          </a:p>
+          <a:p>
+            <a:pPr lvl="0" indent="0" marL="0">
+              <a:buNone/>
+            </a:pPr>
+          </a:p>
+          <a:p>
+            <a:pPr lvl="0" indent="0" marL="0">
+              <a:buNone/>
+            </a:pPr>
+            <a:r>
+              <a:rPr/>
+              <a:t>Point out that it uses the same churn dataset, so the exploration they did today carries over, and that the marks are again on methodology: a pipeline that is correct but modest beats a better score obtained by preparing the full dataset before splitting.</a:t>
+            </a:r>
+          </a:p>
+          <a:p>
+            <a:pPr lvl="0" indent="0" marL="0">
+              <a:buNone/>
+            </a:pPr>
+          </a:p>
+          <a:p>
+            <a:pPr lvl="0" indent="0" marL="0">
+              <a:buNone/>
+            </a:pPr>
+            <a:r>
+              <a:rPr/>
+              <a:t>Remind them the Lesson 1 exercise is due today if anyone has not handed it in, and that the project topic must be confirmed by Lesson 4 - which is two weeks away, so now is the time to be reading dataset descriptions.</a:t>
+            </a:r>
+          </a:p>
+        </p:txBody>
+      </p:sp>
+      <p:sp>
+        <p:nvSpPr>
+          <p:cNvPr id="4" name="Slide Number Placeholder 3"/>
+          <p:cNvSpPr>
+            <a:spLocks noGrp="1"/>
+          </p:cNvSpPr>
+          <p:nvPr>
+            <p:ph type="sldNum" sz="quarter" idx="10"/>
+          </p:nvPr>
+        </p:nvSpPr>
+        <p:spPr/>
+        <p:txBody>
+          <a:bodyPr/>
+          <a:lstStyle/>
+          <a:p>
+            <a:fld id="{18BDFEC3-8487-43E8-A154-7C12CBC1FFF2}" type="slidenum">
+              <a:rPr lang="en-US"/>
+              <a:t>52</a:t>
             </a:fld>
             <a:endParaRPr lang="en-US"/>
           </a:p>
@@ -5478,7 +5813,7 @@
             </a:pPr>
             <a:r>
               <a:rPr/>
-              <a:t>MAR, missing at random: depends on something you DO observe. Our num_support_calls is MAR against tenure - long-standing customers’ early call history predates the CRM system. Conditional on tenure, the gap carries no further information.</a:t>
+              <a:t>MAR, missing at random: depends on something you DO observe. Our num_support_calls is MAR against tenure - long-standing customers’ early call history predates the customer relationship management (CRM) system. Conditional on tenure, the gap carries no further information.</a:t>
             </a:r>
           </a:p>
           <a:p>
@@ -9325,8 +9660,8 @@
         </p:nvSpPr>
         <p:spPr>
           <a:xfrm>
-            <a:off x="457200" y="205740"/>
-            <a:ext cx="8229600" cy="874395"/>
+            <a:off x="457200" y="205979"/>
+            <a:ext cx="8229600" cy="857250"/>
           </a:xfrm>
         </p:spPr>
         <p:txBody>
@@ -9338,44 +9673,14 @@
             </a:pPr>
             <a:r>
               <a:rPr/>
-              <a:t>Outliers, two rules</a:t>
-            </a:r>
-          </a:p>
-        </p:txBody>
-      </p:sp>
-      <p:sp>
-        <p:nvSpPr>
-          <p:cNvPr id="4" name="Text Placeholder 3"/>
-          <p:cNvSpPr>
-            <a:spLocks noGrp="1"/>
-          </p:cNvSpPr>
-          <p:nvPr>
-            <p:ph idx="2" sz="half" type="body"/>
-          </p:nvPr>
-        </p:nvSpPr>
-        <p:spPr>
-          <a:xfrm>
-            <a:off x="457200" y="1183005"/>
-            <a:ext cx="8229600" cy="1311592"/>
-          </a:xfrm>
-        </p:spPr>
-        <p:txBody>
-          <a:bodyPr/>
-          <a:lstStyle/>
-          <a:p>
-            <a:pPr lvl="0" indent="0" marL="0">
-              <a:buNone/>
-            </a:pPr>
-            <a:r>
-              <a:rPr/>
-              <a:t>Two standard rules for flagging an unusual value: the z-score, and Tukey’s fence built on the interquartile range (IQR):</a:t>
+              <a:t>Rule 1: distance in standard deviations, flag beyond k = 3</a:t>
             </a:r>
           </a:p>
         </p:txBody>
       </p:sp>
       <p:pic>
         <p:nvPicPr>
-          <p:cNvPr descr="eq_362884ef2b.png" id="0" name="Picture 1"/>
+          <p:cNvPr descr="eq_fe122443eb.png" id="0" name="Picture 1"/>
           <p:cNvPicPr>
             <a:picLocks noGrp="1" noChangeAspect="1"/>
           </p:cNvPicPr>
@@ -9389,8 +9694,8 @@
         </p:blipFill>
         <p:spPr bwMode="auto">
           <a:xfrm>
-            <a:off x="457207" y="3275271"/>
-            <a:ext cx="8229586" cy="573205"/>
+            <a:off x="457200" y="1322189"/>
+            <a:ext cx="8229600" cy="3048000"/>
           </a:xfrm>
           <a:prstGeom prst="rect">
             <a:avLst/>
@@ -9450,14 +9755,14 @@
             </a:pPr>
             <a:r>
               <a:rPr/>
-              <a:t>Calibrated to agree: on a normal column</a:t>
+              <a:t>Rule 2: distance measured in quartiles</a:t>
             </a:r>
           </a:p>
         </p:txBody>
       </p:sp>
       <p:pic>
         <p:nvPicPr>
-          <p:cNvPr descr="outlier_fences.png" id="0" name="Picture 1"/>
+          <p:cNvPr descr="eq_f508402a31.png" id="0" name="Picture 1"/>
           <p:cNvPicPr>
             <a:picLocks noGrp="1" noChangeAspect="1"/>
           </p:cNvPicPr>
@@ -9471,8 +9776,8 @@
         </p:blipFill>
         <p:spPr bwMode="auto">
           <a:xfrm>
-            <a:off x="1111139" y="1166099"/>
-            <a:ext cx="6921721" cy="3360181"/>
+            <a:off x="457200" y="2484239"/>
+            <a:ext cx="8229600" cy="723900"/>
           </a:xfrm>
           <a:prstGeom prst="rect">
             <a:avLst/>
@@ -9532,7 +9837,89 @@
             </a:pPr>
             <a:r>
               <a:rPr/>
-              <a:t>The two rules disagree on real data</a:t>
+              <a:t>Same neighbourhood, not the same answer</a:t>
+            </a:r>
+          </a:p>
+        </p:txBody>
+      </p:sp>
+      <p:pic>
+        <p:nvPicPr>
+          <p:cNvPr descr="outlier_fences.png" id="0" name="Picture 1"/>
+          <p:cNvPicPr>
+            <a:picLocks noGrp="1" noChangeAspect="1"/>
+          </p:cNvPicPr>
+          <p:nvPr/>
+        </p:nvPicPr>
+        <p:blipFill>
+          <a:blip r:embed="rId3"/>
+          <a:stretch>
+            <a:fillRect/>
+          </a:stretch>
+        </p:blipFill>
+        <p:spPr bwMode="auto">
+          <a:xfrm>
+            <a:off x="457200" y="1309489"/>
+            <a:ext cx="8229600" cy="3073400"/>
+          </a:xfrm>
+          <a:prstGeom prst="rect">
+            <a:avLst/>
+          </a:prstGeom>
+          <a:noFill/>
+          <a:ln w="9525">
+            <a:noFill/>
+            <a:headEnd/>
+            <a:tailEnd/>
+          </a:ln>
+        </p:spPr>
+      </p:pic>
+    </p:spTree>
+  </p:cSld>
+</p:sld>
+</file>
+
+<file path=ppt/slides/slide17.xml><?xml version="1.0" encoding="utf-8"?>
+<p:sld xmlns:a="http://schemas.openxmlformats.org/drawingml/2006/main" xmlns:r="http://schemas.openxmlformats.org/officeDocument/2006/relationships" xmlns:p="http://schemas.openxmlformats.org/presentationml/2006/main">
+  <p:cSld>
+    <p:spTree>
+      <p:nvGrpSpPr>
+        <p:cNvPr id="1" name=""/>
+        <p:cNvGrpSpPr/>
+        <p:nvPr/>
+      </p:nvGrpSpPr>
+      <p:grpSpPr>
+        <a:xfrm>
+          <a:off x="0" y="0"/>
+          <a:ext cx="0" cy="0"/>
+          <a:chOff x="0" y="0"/>
+          <a:chExt cx="0" cy="0"/>
+        </a:xfrm>
+      </p:grpSpPr>
+      <p:sp>
+        <p:nvSpPr>
+          <p:cNvPr id="2" name="Title 1"/>
+          <p:cNvSpPr>
+            <a:spLocks noGrp="1"/>
+          </p:cNvSpPr>
+          <p:nvPr>
+            <p:ph type="title"/>
+          </p:nvPr>
+        </p:nvSpPr>
+        <p:spPr>
+          <a:xfrm>
+            <a:off x="457200" y="205979"/>
+            <a:ext cx="8229600" cy="857250"/>
+          </a:xfrm>
+        </p:spPr>
+        <p:txBody>
+          <a:bodyPr/>
+          <a:lstStyle/>
+          <a:p>
+            <a:pPr lvl="0" indent="0" marL="0">
+              <a:buNone/>
+            </a:pPr>
+            <a:r>
+              <a:rPr/>
+              <a:t>The robust rule is the one that got it wrong</a:t>
             </a:r>
           </a:p>
         </p:txBody>
@@ -9572,140 +9959,6 @@
 </p:sld>
 </file>
 
-<file path=ppt/slides/slide17.xml><?xml version="1.0" encoding="utf-8"?>
-<p:sld xmlns:a="http://schemas.openxmlformats.org/drawingml/2006/main" xmlns:r="http://schemas.openxmlformats.org/officeDocument/2006/relationships" xmlns:p="http://schemas.openxmlformats.org/presentationml/2006/main">
-  <p:cSld>
-    <p:spTree>
-      <p:nvGrpSpPr>
-        <p:cNvPr id="1" name=""/>
-        <p:cNvGrpSpPr/>
-        <p:nvPr/>
-      </p:nvGrpSpPr>
-      <p:grpSpPr>
-        <a:xfrm>
-          <a:off x="0" y="0"/>
-          <a:ext cx="0" cy="0"/>
-          <a:chOff x="0" y="0"/>
-          <a:chExt cx="0" cy="0"/>
-        </a:xfrm>
-      </p:grpSpPr>
-      <p:sp>
-        <p:nvSpPr>
-          <p:cNvPr id="2" name="Title 1"/>
-          <p:cNvSpPr>
-            <a:spLocks noGrp="1"/>
-          </p:cNvSpPr>
-          <p:nvPr>
-            <p:ph type="title"/>
-          </p:nvPr>
-        </p:nvSpPr>
-        <p:spPr>
-          <a:xfrm>
-            <a:off x="457200" y="205979"/>
-            <a:ext cx="8229600" cy="857250"/>
-          </a:xfrm>
-        </p:spPr>
-        <p:txBody>
-          <a:bodyPr/>
-          <a:lstStyle/>
-          <a:p>
-            <a:pPr lvl="0" indent="0" marL="0">
-              <a:buNone/>
-            </a:pPr>
-            <a:r>
-              <a:rPr/>
-              <a:t>What neither rule can tell you</a:t>
-            </a:r>
-          </a:p>
-        </p:txBody>
-      </p:sp>
-      <p:sp>
-        <p:nvSpPr>
-          <p:cNvPr id="3" name="Content Placeholder 2"/>
-          <p:cNvSpPr>
-            <a:spLocks noGrp="1"/>
-          </p:cNvSpPr>
-          <p:nvPr>
-            <p:ph idx="1"/>
-          </p:nvPr>
-        </p:nvSpPr>
-        <p:spPr>
-          <a:xfrm>
-            <a:off x="457200" y="1200151"/>
-            <a:ext cx="8229600" cy="3394472"/>
-          </a:xfrm>
-        </p:spPr>
-        <p:txBody>
-          <a:bodyPr/>
-          <a:lstStyle/>
-          <a:p>
-            <a:pPr lvl="0" indent="0" marL="0">
-              <a:buNone/>
-            </a:pPr>
-            <a:r>
-              <a:rPr>
-                <a:latin typeface="Courier"/>
-              </a:rPr>
-              <a:t>tenure_months</a:t>
-            </a:r>
-            <a:r>
-              <a:rPr/>
-              <a:t> of </a:t>
-            </a:r>
-            <a:r>
-              <a:rPr b="1"/>
-              <a:t>-3</a:t>
-            </a:r>
-            <a:r>
-              <a:rPr/>
-              <a:t> is impossible. Neither rule flags it.</a:t>
-            </a:r>
-          </a:p>
-          <a:p>
-            <a:pPr lvl="0"/>
-            <a:r>
-              <a:rPr/>
-              <a:t>-3 is not </a:t>
-            </a:r>
-            <a:r>
-              <a:rPr i="1"/>
-              <a:t>extreme</a:t>
-            </a:r>
-            <a:r>
-              <a:rPr/>
-              <a:t> relative to a column spanning 0–72</a:t>
-            </a:r>
-          </a:p>
-          <a:p>
-            <a:pPr lvl="0"/>
-            <a:r>
-              <a:rPr/>
-              <a:t>It is not </a:t>
-            </a:r>
-            <a:r>
-              <a:rPr i="1"/>
-              <a:t>unusual</a:t>
-            </a:r>
-            <a:r>
-              <a:rPr/>
-              <a:t>. It is </a:t>
-            </a:r>
-            <a:r>
-              <a:rPr i="1"/>
-              <a:t>invalid</a:t>
-            </a:r>
-            <a:r>
-              <a:rPr/>
-              <a:t>: a different question entirely</a:t>
-            </a:r>
-          </a:p>
-        </p:txBody>
-      </p:sp>
-    </p:spTree>
-  </p:cSld>
-</p:sld>
-</file>
-
 <file path=ppt/slides/slide18.xml><?xml version="1.0" encoding="utf-8"?>
 <p:sld xmlns:a="http://schemas.openxmlformats.org/drawingml/2006/main" xmlns:r="http://schemas.openxmlformats.org/officeDocument/2006/relationships" xmlns:p="http://schemas.openxmlformats.org/presentationml/2006/main">
   <p:cSld>
@@ -9748,7 +10001,7 @@
             </a:pPr>
             <a:r>
               <a:rPr/>
-              <a:t>Once something is flagged</a:t>
+              <a:t>What neither rule can tell you</a:t>
             </a:r>
           </a:p>
         </p:txBody>
@@ -9777,60 +10030,60 @@
               <a:buNone/>
             </a:pPr>
             <a:r>
-              <a:rPr/>
-              <a:t>Detection finds candidates. What to do next is a </a:t>
+              <a:rPr>
+                <a:latin typeface="Courier"/>
+              </a:rPr>
+              <a:t>tenure_months</a:t>
+            </a:r>
+            <a:r>
+              <a:rPr/>
+              <a:t> of </a:t>
             </a:r>
             <a:r>
               <a:rPr b="1"/>
-              <a:t>domain</a:t>
-            </a:r>
-            <a:r>
-              <a:rPr/>
-              <a:t> decision.</a:t>
+              <a:t>-3</a:t>
+            </a:r>
+            <a:r>
+              <a:rPr/>
+              <a:t> is impossible. Neither rule flags it.</a:t>
             </a:r>
           </a:p>
           <a:p>
             <a:pPr lvl="0"/>
             <a:r>
-              <a:rPr b="1"/>
-              <a:t>Cap</a:t>
-            </a:r>
-            <a:r>
-              <a:rPr/>
-              <a:t> it at the fence (Winsorise)</a:t>
+              <a:rPr/>
+              <a:t>-3 is not </a:t>
+            </a:r>
+            <a:r>
+              <a:rPr i="1"/>
+              <a:t>extreme</a:t>
+            </a:r>
+            <a:r>
+              <a:rPr/>
+              <a:t> relative to a column spanning 0–72</a:t>
             </a:r>
           </a:p>
           <a:p>
             <a:pPr lvl="0"/>
             <a:r>
-              <a:rPr b="1"/>
-              <a:t>Remove</a:t>
-            </a:r>
-            <a:r>
-              <a:rPr/>
-              <a:t> the row</a:t>
-            </a:r>
-          </a:p>
-          <a:p>
-            <a:pPr lvl="0"/>
-            <a:r>
-              <a:rPr b="1"/>
-              <a:t>Correct</a:t>
-            </a:r>
-            <a:r>
-              <a:rPr/>
-              <a:t> it, if the true value is recoverable</a:t>
-            </a:r>
-          </a:p>
-          <a:p>
-            <a:pPr lvl="0"/>
-            <a:r>
-              <a:rPr b="1"/>
-              <a:t>Leave</a:t>
-            </a:r>
-            <a:r>
-              <a:rPr/>
-              <a:t> it: unusual is not the same as wrong</a:t>
+              <a:rPr/>
+              <a:t>It is not </a:t>
+            </a:r>
+            <a:r>
+              <a:rPr i="1"/>
+              <a:t>unusual</a:t>
+            </a:r>
+            <a:r>
+              <a:rPr/>
+              <a:t>. It is </a:t>
+            </a:r>
+            <a:r>
+              <a:rPr i="1"/>
+              <a:t>invalid</a:t>
+            </a:r>
+            <a:r>
+              <a:rPr/>
+              <a:t>: a different question entirely</a:t>
             </a:r>
           </a:p>
         </p:txBody>
@@ -9882,7 +10135,7 @@
             </a:pPr>
             <a:r>
               <a:rPr/>
-              <a:t>Notebook 1, live</a:t>
+              <a:t>Once something is flagged</a:t>
             </a:r>
           </a:p>
         </p:txBody>
@@ -9912,7 +10165,59 @@
             </a:pPr>
             <a:r>
               <a:rPr/>
-              <a:t>Exploration, missingness mechanisms, both outlier rules: from scratch.</a:t>
+              <a:t>Detection finds candidates. What to do next is a </a:t>
+            </a:r>
+            <a:r>
+              <a:rPr b="1"/>
+              <a:t>domain</a:t>
+            </a:r>
+            <a:r>
+              <a:rPr/>
+              <a:t> decision.</a:t>
+            </a:r>
+          </a:p>
+          <a:p>
+            <a:pPr lvl="0"/>
+            <a:r>
+              <a:rPr b="1"/>
+              <a:t>Cap</a:t>
+            </a:r>
+            <a:r>
+              <a:rPr/>
+              <a:t> it at the fence (Winsorise)</a:t>
+            </a:r>
+          </a:p>
+          <a:p>
+            <a:pPr lvl="0"/>
+            <a:r>
+              <a:rPr b="1"/>
+              <a:t>Remove</a:t>
+            </a:r>
+            <a:r>
+              <a:rPr/>
+              <a:t> the row</a:t>
+            </a:r>
+          </a:p>
+          <a:p>
+            <a:pPr lvl="0"/>
+            <a:r>
+              <a:rPr b="1"/>
+              <a:t>Correct</a:t>
+            </a:r>
+            <a:r>
+              <a:rPr/>
+              <a:t> it, if the true value is recoverable</a:t>
+            </a:r>
+          </a:p>
+          <a:p>
+            <a:pPr lvl="0"/>
+            <a:r>
+              <a:rPr b="1"/>
+              <a:t>Leave</a:t>
+            </a:r>
+            <a:r>
+              <a:rPr/>
+              <a:t> it: unusual is not the same as wrong</a:t>
             </a:r>
           </a:p>
         </p:txBody>
@@ -10075,7 +10380,37 @@
             </a:pPr>
             <a:r>
               <a:rPr/>
-              <a:t>Break</a:t>
+              <a:t>Notebook 1, live</a:t>
+            </a:r>
+          </a:p>
+        </p:txBody>
+      </p:sp>
+      <p:sp>
+        <p:nvSpPr>
+          <p:cNvPr id="3" name="Content Placeholder 2"/>
+          <p:cNvSpPr>
+            <a:spLocks noGrp="1"/>
+          </p:cNvSpPr>
+          <p:nvPr>
+            <p:ph idx="1"/>
+          </p:nvPr>
+        </p:nvSpPr>
+        <p:spPr>
+          <a:xfrm>
+            <a:off x="457200" y="1200151"/>
+            <a:ext cx="8229600" cy="3394472"/>
+          </a:xfrm>
+        </p:spPr>
+        <p:txBody>
+          <a:bodyPr/>
+          <a:lstStyle/>
+          <a:p>
+            <a:pPr lvl="0" indent="0" marL="0">
+              <a:buNone/>
+            </a:pPr>
+            <a:r>
+              <a:rPr/>
+              <a:t>Exploration, missingness mechanisms, both outlier rules: from scratch.</a:t>
             </a:r>
           </a:p>
         </p:txBody>
@@ -10127,6 +10462,58 @@
             </a:pPr>
             <a:r>
               <a:rPr/>
+              <a:t>Break</a:t>
+            </a:r>
+          </a:p>
+        </p:txBody>
+      </p:sp>
+    </p:spTree>
+  </p:cSld>
+</p:sld>
+</file>
+
+<file path=ppt/slides/slide22.xml><?xml version="1.0" encoding="utf-8"?>
+<p:sld xmlns:a="http://schemas.openxmlformats.org/drawingml/2006/main" xmlns:r="http://schemas.openxmlformats.org/officeDocument/2006/relationships" xmlns:p="http://schemas.openxmlformats.org/presentationml/2006/main">
+  <p:cSld>
+    <p:spTree>
+      <p:nvGrpSpPr>
+        <p:cNvPr id="1" name=""/>
+        <p:cNvGrpSpPr/>
+        <p:nvPr/>
+      </p:nvGrpSpPr>
+      <p:grpSpPr>
+        <a:xfrm>
+          <a:off x="0" y="0"/>
+          <a:ext cx="0" cy="0"/>
+          <a:chOff x="0" y="0"/>
+          <a:chExt cx="0" cy="0"/>
+        </a:xfrm>
+      </p:grpSpPr>
+      <p:sp>
+        <p:nvSpPr>
+          <p:cNvPr id="2" name="Title 1"/>
+          <p:cNvSpPr>
+            <a:spLocks noGrp="1"/>
+          </p:cNvSpPr>
+          <p:nvPr>
+            <p:ph type="title"/>
+          </p:nvPr>
+        </p:nvSpPr>
+        <p:spPr>
+          <a:xfrm>
+            <a:off x="457200" y="205979"/>
+            <a:ext cx="8229600" cy="857250"/>
+          </a:xfrm>
+        </p:spPr>
+        <p:txBody>
+          <a:bodyPr/>
+          <a:lstStyle/>
+          <a:p>
+            <a:pPr lvl="0" indent="0" marL="0">
+              <a:buNone/>
+            </a:pPr>
+            <a:r>
+              <a:rPr/>
               <a:t>Why scale?</a:t>
             </a:r>
           </a:p>
@@ -10196,7 +10583,7 @@
 </p:sld>
 </file>
 
-<file path=ppt/slides/slide22.xml><?xml version="1.0" encoding="utf-8"?>
+<file path=ppt/slides/slide23.xml><?xml version="1.0" encoding="utf-8"?>
 <p:sld xmlns:a="http://schemas.openxmlformats.org/drawingml/2006/main" xmlns:r="http://schemas.openxmlformats.org/officeDocument/2006/relationships" xmlns:p="http://schemas.openxmlformats.org/presentationml/2006/main">
   <p:cSld>
     <p:spTree>
@@ -10278,7 +10665,7 @@
 </p:sld>
 </file>
 
-<file path=ppt/slides/slide23.xml><?xml version="1.0" encoding="utf-8"?>
+<file path=ppt/slides/slide24.xml><?xml version="1.0" encoding="utf-8"?>
 <p:sld xmlns:a="http://schemas.openxmlformats.org/drawingml/2006/main" xmlns:r="http://schemas.openxmlformats.org/officeDocument/2006/relationships" xmlns:p="http://schemas.openxmlformats.org/presentationml/2006/main">
   <p:cSld>
     <p:spTree>
@@ -10360,7 +10747,7 @@
 </p:sld>
 </file>
 
-<file path=ppt/slides/slide24.xml><?xml version="1.0" encoding="utf-8"?>
+<file path=ppt/slides/slide25.xml><?xml version="1.0" encoding="utf-8"?>
 <p:sld xmlns:a="http://schemas.openxmlformats.org/drawingml/2006/main" xmlns:r="http://schemas.openxmlformats.org/officeDocument/2006/relationships" xmlns:p="http://schemas.openxmlformats.org/presentationml/2006/main">
   <p:cSld>
     <p:spTree>
@@ -10472,7 +10859,7 @@
 </p:sld>
 </file>
 
-<file path=ppt/slides/slide25.xml><?xml version="1.0" encoding="utf-8"?>
+<file path=ppt/slides/slide26.xml><?xml version="1.0" encoding="utf-8"?>
 <p:sld xmlns:a="http://schemas.openxmlformats.org/drawingml/2006/main" xmlns:r="http://schemas.openxmlformats.org/officeDocument/2006/relationships" xmlns:p="http://schemas.openxmlformats.org/presentationml/2006/main">
   <p:cSld>
     <p:spTree>
@@ -10501,8 +10888,8 @@
         </p:nvSpPr>
         <p:spPr>
           <a:xfrm>
-            <a:off x="457200" y="205740"/>
-            <a:ext cx="8229600" cy="874395"/>
+            <a:off x="457200" y="205979"/>
+            <a:ext cx="8229600" cy="857250"/>
           </a:xfrm>
         </p:spPr>
         <p:txBody>
@@ -10514,37 +10901,7 @@
             </a:pPr>
             <a:r>
               <a:rPr/>
-              <a:t>The dummy variable trap</a:t>
-            </a:r>
-          </a:p>
-        </p:txBody>
-      </p:sp>
-      <p:sp>
-        <p:nvSpPr>
-          <p:cNvPr id="4" name="Text Placeholder 3"/>
-          <p:cNvSpPr>
-            <a:spLocks noGrp="1"/>
-          </p:cNvSpPr>
-          <p:nvPr>
-            <p:ph idx="2" sz="half" type="body"/>
-          </p:nvPr>
-        </p:nvSpPr>
-        <p:spPr>
-          <a:xfrm>
-            <a:off x="457200" y="1183005"/>
-            <a:ext cx="8229600" cy="874395"/>
-          </a:xfrm>
-        </p:spPr>
-        <p:txBody>
-          <a:bodyPr/>
-          <a:lstStyle/>
-          <a:p>
-            <a:pPr lvl="0" indent="0" marL="0">
-              <a:buNone/>
-            </a:pPr>
-            <a:r>
-              <a:rPr/>
-              <a:t>One-hot encode all k categories AND fit an intercept:</a:t>
+              <a:t>All k dummies plus an intercept cannot both be free</a:t>
             </a:r>
           </a:p>
         </p:txBody>
@@ -10565,8 +10922,8 @@
         </p:blipFill>
         <p:spPr bwMode="auto">
           <a:xfrm>
-            <a:off x="457201" y="2360636"/>
-            <a:ext cx="8229597" cy="1965277"/>
+            <a:off x="457200" y="1861939"/>
+            <a:ext cx="8229600" cy="1968500"/>
           </a:xfrm>
           <a:prstGeom prst="rect">
             <a:avLst/>
@@ -10584,7 +10941,7 @@
 </p:sld>
 </file>
 
-<file path=ppt/slides/slide26.xml><?xml version="1.0" encoding="utf-8"?>
+<file path=ppt/slides/slide27.xml><?xml version="1.0" encoding="utf-8"?>
 <p:sld xmlns:a="http://schemas.openxmlformats.org/drawingml/2006/main" xmlns:r="http://schemas.openxmlformats.org/officeDocument/2006/relationships" xmlns:p="http://schemas.openxmlformats.org/presentationml/2006/main">
   <p:cSld>
     <p:spTree>
@@ -10666,190 +11023,6 @@
 </p:sld>
 </file>
 
-<file path=ppt/slides/slide27.xml><?xml version="1.0" encoding="utf-8"?>
-<p:sld xmlns:a="http://schemas.openxmlformats.org/drawingml/2006/main" xmlns:r="http://schemas.openxmlformats.org/officeDocument/2006/relationships" xmlns:p="http://schemas.openxmlformats.org/presentationml/2006/main">
-  <p:cSld>
-    <p:spTree>
-      <p:nvGrpSpPr>
-        <p:cNvPr id="1" name=""/>
-        <p:cNvGrpSpPr/>
-        <p:nvPr/>
-      </p:nvGrpSpPr>
-      <p:grpSpPr>
-        <a:xfrm>
-          <a:off x="0" y="0"/>
-          <a:ext cx="0" cy="0"/>
-          <a:chOff x="0" y="0"/>
-          <a:chExt cx="0" cy="0"/>
-        </a:xfrm>
-      </p:grpSpPr>
-      <p:sp>
-        <p:nvSpPr>
-          <p:cNvPr id="2" name="Title 1"/>
-          <p:cNvSpPr>
-            <a:spLocks noGrp="1"/>
-          </p:cNvSpPr>
-          <p:nvPr>
-            <p:ph type="title"/>
-          </p:nvPr>
-        </p:nvSpPr>
-        <p:spPr>
-          <a:xfrm>
-            <a:off x="457200" y="205979"/>
-            <a:ext cx="8229600" cy="857250"/>
-          </a:xfrm>
-        </p:spPr>
-        <p:txBody>
-          <a:bodyPr/>
-          <a:lstStyle/>
-          <a:p>
-            <a:pPr lvl="0" indent="0" marL="0">
-              <a:buNone/>
-            </a:pPr>
-            <a:r>
-              <a:rPr/>
-              <a:t>Ordinal vs target encoding</a:t>
-            </a:r>
-          </a:p>
-        </p:txBody>
-      </p:sp>
-      <p:sp>
-        <p:nvSpPr>
-          <p:cNvPr id="3" name="Content Placeholder 2"/>
-          <p:cNvSpPr>
-            <a:spLocks noGrp="1"/>
-          </p:cNvSpPr>
-          <p:nvPr>
-            <p:ph idx="1" sz="half"/>
-          </p:nvPr>
-        </p:nvSpPr>
-        <p:spPr>
-          <a:xfrm>
-            <a:off x="457200" y="1200151"/>
-            <a:ext cx="4038600" cy="3394472"/>
-          </a:xfrm>
-        </p:spPr>
-        <p:txBody>
-          <a:bodyPr/>
-          <a:lstStyle/>
-          <a:p>
-            <a:pPr lvl="0" indent="0" marL="0">
-              <a:buNone/>
-            </a:pPr>
-            <a:r>
-              <a:rPr b="1"/>
-              <a:t>Ordinal</a:t>
-            </a:r>
-          </a:p>
-          <a:p>
-            <a:pPr lvl="0"/>
-            <a:r>
-              <a:rPr/>
-              <a:t>Categories → integers</a:t>
-            </a:r>
-          </a:p>
-          <a:p>
-            <a:pPr lvl="0"/>
-            <a:r>
-              <a:rPr/>
-              <a:t>Only valid if a real </a:t>
-            </a:r>
-            <a:r>
-              <a:rPr b="1"/>
-              <a:t>order</a:t>
-            </a:r>
-            <a:r>
-              <a:rPr/>
-              <a:t> exists</a:t>
-            </a:r>
-          </a:p>
-          <a:p>
-            <a:pPr lvl="0"/>
-            <a:r>
-              <a:rPr>
-                <a:latin typeface="Courier"/>
-              </a:rPr>
-              <a:t>low</a:t>
-            </a:r>
-            <a:r>
-              <a:rPr/>
-              <a:t> &lt; </a:t>
-            </a:r>
-            <a:r>
-              <a:rPr>
-                <a:latin typeface="Courier"/>
-              </a:rPr>
-              <a:t>medium</a:t>
-            </a:r>
-            <a:r>
-              <a:rPr/>
-              <a:t> &lt; </a:t>
-            </a:r>
-            <a:r>
-              <a:rPr>
-                <a:latin typeface="Courier"/>
-              </a:rPr>
-              <a:t>high</a:t>
-            </a:r>
-          </a:p>
-        </p:txBody>
-      </p:sp>
-      <p:sp>
-        <p:nvSpPr>
-          <p:cNvPr id="4" name="Content Placeholder 3"/>
-          <p:cNvSpPr>
-            <a:spLocks noGrp="1"/>
-          </p:cNvSpPr>
-          <p:nvPr>
-            <p:ph idx="2" sz="half"/>
-          </p:nvPr>
-        </p:nvSpPr>
-        <p:spPr>
-          <a:xfrm>
-            <a:off x="4648200" y="1200151"/>
-            <a:ext cx="4038600" cy="3394472"/>
-          </a:xfrm>
-        </p:spPr>
-        <p:txBody>
-          <a:bodyPr/>
-          <a:lstStyle/>
-          <a:p>
-            <a:pPr lvl="0" indent="0" marL="0">
-              <a:buNone/>
-            </a:pPr>
-            <a:r>
-              <a:rPr b="1"/>
-              <a:t>Target</a:t>
-            </a:r>
-          </a:p>
-          <a:p>
-            <a:pPr lvl="0"/>
-            <a:r>
-              <a:rPr/>
-              <a:t>Category → a statistic of y</a:t>
-            </a:r>
-          </a:p>
-          <a:p>
-            <a:pPr lvl="0"/>
-            <a:r>
-              <a:rPr/>
-              <a:t>Compresses any cardinality to one column</a:t>
-            </a:r>
-          </a:p>
-          <a:p>
-            <a:pPr lvl="0"/>
-            <a:r>
-              <a:rPr/>
-              <a:t>The dangerous one comes next</a:t>
-            </a:r>
-          </a:p>
-        </p:txBody>
-      </p:sp>
-    </p:spTree>
-  </p:cSld>
-</p:sld>
-</file>
-
 <file path=ppt/slides/slide28.xml><?xml version="1.0" encoding="utf-8"?>
 <p:sld xmlns:a="http://schemas.openxmlformats.org/drawingml/2006/main" xmlns:r="http://schemas.openxmlformats.org/officeDocument/2006/relationships" xmlns:p="http://schemas.openxmlformats.org/presentationml/2006/main">
   <p:cSld>
@@ -10892,41 +11065,143 @@
             </a:pPr>
             <a:r>
               <a:rPr/>
-              <a:t>Three encodings, three claims</a:t>
-            </a:r>
-          </a:p>
-        </p:txBody>
-      </p:sp>
-      <p:pic>
-        <p:nvPicPr>
-          <p:cNvPr descr="encoding_comparison.png" id="0" name="Picture 1"/>
-          <p:cNvPicPr>
-            <a:picLocks noGrp="1" noChangeAspect="1"/>
-          </p:cNvPicPr>
-          <p:nvPr/>
-        </p:nvPicPr>
-        <p:blipFill>
-          <a:blip r:embed="rId3"/>
-          <a:stretch>
-            <a:fillRect/>
-          </a:stretch>
-        </p:blipFill>
-        <p:spPr bwMode="auto">
+              <a:t>Ordinal vs target encoding</a:t>
+            </a:r>
+          </a:p>
+        </p:txBody>
+      </p:sp>
+      <p:sp>
+        <p:nvSpPr>
+          <p:cNvPr id="3" name="Content Placeholder 2"/>
+          <p:cNvSpPr>
+            <a:spLocks noGrp="1"/>
+          </p:cNvSpPr>
+          <p:nvPr>
+            <p:ph idx="1" sz="half"/>
+          </p:nvPr>
+        </p:nvSpPr>
+        <p:spPr>
           <a:xfrm>
-            <a:off x="457200" y="1715889"/>
-            <a:ext cx="8229600" cy="2260600"/>
+            <a:off x="457200" y="1200151"/>
+            <a:ext cx="4038600" cy="3394472"/>
           </a:xfrm>
-          <a:prstGeom prst="rect">
-            <a:avLst/>
-          </a:prstGeom>
-          <a:noFill/>
-          <a:ln w="9525">
-            <a:noFill/>
-            <a:headEnd/>
-            <a:tailEnd/>
-          </a:ln>
         </p:spPr>
-      </p:pic>
+        <p:txBody>
+          <a:bodyPr/>
+          <a:lstStyle/>
+          <a:p>
+            <a:pPr lvl="0" indent="0" marL="0">
+              <a:buNone/>
+            </a:pPr>
+            <a:r>
+              <a:rPr b="1"/>
+              <a:t>Ordinal</a:t>
+            </a:r>
+          </a:p>
+          <a:p>
+            <a:pPr lvl="0"/>
+            <a:r>
+              <a:rPr/>
+              <a:t>Categories → integers</a:t>
+            </a:r>
+          </a:p>
+          <a:p>
+            <a:pPr lvl="0"/>
+            <a:r>
+              <a:rPr/>
+              <a:t>Only valid if a real </a:t>
+            </a:r>
+            <a:r>
+              <a:rPr b="1"/>
+              <a:t>order</a:t>
+            </a:r>
+            <a:r>
+              <a:rPr/>
+              <a:t> exists</a:t>
+            </a:r>
+          </a:p>
+          <a:p>
+            <a:pPr lvl="0"/>
+            <a:r>
+              <a:rPr>
+                <a:latin typeface="Courier"/>
+              </a:rPr>
+              <a:t>low</a:t>
+            </a:r>
+            <a:r>
+              <a:rPr/>
+              <a:t> &lt; </a:t>
+            </a:r>
+            <a:r>
+              <a:rPr>
+                <a:latin typeface="Courier"/>
+              </a:rPr>
+              <a:t>medium</a:t>
+            </a:r>
+            <a:r>
+              <a:rPr/>
+              <a:t> &lt; </a:t>
+            </a:r>
+            <a:r>
+              <a:rPr>
+                <a:latin typeface="Courier"/>
+              </a:rPr>
+              <a:t>high</a:t>
+            </a:r>
+          </a:p>
+        </p:txBody>
+      </p:sp>
+      <p:sp>
+        <p:nvSpPr>
+          <p:cNvPr id="4" name="Content Placeholder 3"/>
+          <p:cNvSpPr>
+            <a:spLocks noGrp="1"/>
+          </p:cNvSpPr>
+          <p:nvPr>
+            <p:ph idx="2" sz="half"/>
+          </p:nvPr>
+        </p:nvSpPr>
+        <p:spPr>
+          <a:xfrm>
+            <a:off x="4648200" y="1200151"/>
+            <a:ext cx="4038600" cy="3394472"/>
+          </a:xfrm>
+        </p:spPr>
+        <p:txBody>
+          <a:bodyPr/>
+          <a:lstStyle/>
+          <a:p>
+            <a:pPr lvl="0" indent="0" marL="0">
+              <a:buNone/>
+            </a:pPr>
+            <a:r>
+              <a:rPr b="1"/>
+              <a:t>Target</a:t>
+            </a:r>
+          </a:p>
+          <a:p>
+            <a:pPr lvl="0"/>
+            <a:r>
+              <a:rPr/>
+              <a:t>Category → a statistic of y</a:t>
+            </a:r>
+          </a:p>
+          <a:p>
+            <a:pPr lvl="0"/>
+            <a:r>
+              <a:rPr/>
+              <a:t>Compresses any cardinality to one column</a:t>
+            </a:r>
+          </a:p>
+          <a:p>
+            <a:pPr lvl="0"/>
+            <a:r>
+              <a:rPr/>
+              <a:t>The dangerous one comes next</a:t>
+            </a:r>
+          </a:p>
+        </p:txBody>
+      </p:sp>
     </p:spTree>
   </p:cSld>
 </p:sld>
@@ -10974,73 +11249,41 @@
             </a:pPr>
             <a:r>
               <a:rPr/>
-              <a:t>The curse of dimensionality, briefly</a:t>
-            </a:r>
-          </a:p>
-        </p:txBody>
-      </p:sp>
-      <p:sp>
-        <p:nvSpPr>
-          <p:cNvPr id="3" name="Content Placeholder 2"/>
-          <p:cNvSpPr>
-            <a:spLocks noGrp="1"/>
-          </p:cNvSpPr>
-          <p:nvPr>
-            <p:ph idx="1"/>
-          </p:nvPr>
-        </p:nvSpPr>
-        <p:spPr>
+              <a:t>Three encodings, three claims</a:t>
+            </a:r>
+          </a:p>
+        </p:txBody>
+      </p:sp>
+      <p:pic>
+        <p:nvPicPr>
+          <p:cNvPr descr="encoding_comparison.png" id="0" name="Picture 1"/>
+          <p:cNvPicPr>
+            <a:picLocks noGrp="1" noChangeAspect="1"/>
+          </p:cNvPicPr>
+          <p:nvPr/>
+        </p:nvPicPr>
+        <p:blipFill>
+          <a:blip r:embed="rId3"/>
+          <a:stretch>
+            <a:fillRect/>
+          </a:stretch>
+        </p:blipFill>
+        <p:spPr bwMode="auto">
           <a:xfrm>
-            <a:off x="457200" y="1200151"/>
-            <a:ext cx="8229600" cy="3394472"/>
+            <a:off x="457200" y="1601589"/>
+            <a:ext cx="8229600" cy="2489200"/>
           </a:xfrm>
+          <a:prstGeom prst="rect">
+            <a:avLst/>
+          </a:prstGeom>
+          <a:noFill/>
+          <a:ln w="9525">
+            <a:noFill/>
+            <a:headEnd/>
+            <a:tailEnd/>
+          </a:ln>
         </p:spPr>
-        <p:txBody>
-          <a:bodyPr/>
-          <a:lstStyle/>
-          <a:p>
-            <a:pPr lvl="0" indent="0" marL="0">
-              <a:buNone/>
-            </a:pPr>
-            <a:r>
-              <a:rPr/>
-              <a:t>One-hot </a:t>
-            </a:r>
-            <a:r>
-              <a:rPr>
-                <a:latin typeface="Courier"/>
-              </a:rPr>
-              <a:t>zip_code</a:t>
-            </a:r>
-            <a:r>
-              <a:rPr/>
-              <a:t>: </a:t>
-            </a:r>
-            <a:r>
-              <a:rPr b="1"/>
-              <a:t>493</a:t>
-            </a:r>
-            <a:r>
-              <a:rPr/>
-              <a:t> new columns, mostly zero.</a:t>
-            </a:r>
-          </a:p>
-          <a:p>
-            <a:pPr lvl="0"/>
-            <a:r>
-              <a:rPr/>
-              <a:t>Distance-based methods (Lesson 6): everything looks equidistant</a:t>
-            </a:r>
-          </a:p>
-          <a:p>
-            <a:pPr lvl="0"/>
-            <a:r>
-              <a:rPr/>
-              <a:t>More parameters to estimate, same sample size → more variance</a:t>
-            </a:r>
-          </a:p>
-        </p:txBody>
-      </p:sp>
+      </p:pic>
     </p:spTree>
   </p:cSld>
 </p:sld>
@@ -11155,6 +11398,120 @@
 </file>
 
 <file path=ppt/slides/slide30.xml><?xml version="1.0" encoding="utf-8"?>
+<p:sld xmlns:a="http://schemas.openxmlformats.org/drawingml/2006/main" xmlns:r="http://schemas.openxmlformats.org/officeDocument/2006/relationships" xmlns:p="http://schemas.openxmlformats.org/presentationml/2006/main">
+  <p:cSld>
+    <p:spTree>
+      <p:nvGrpSpPr>
+        <p:cNvPr id="1" name=""/>
+        <p:cNvGrpSpPr/>
+        <p:nvPr/>
+      </p:nvGrpSpPr>
+      <p:grpSpPr>
+        <a:xfrm>
+          <a:off x="0" y="0"/>
+          <a:ext cx="0" cy="0"/>
+          <a:chOff x="0" y="0"/>
+          <a:chExt cx="0" cy="0"/>
+        </a:xfrm>
+      </p:grpSpPr>
+      <p:sp>
+        <p:nvSpPr>
+          <p:cNvPr id="2" name="Title 1"/>
+          <p:cNvSpPr>
+            <a:spLocks noGrp="1"/>
+          </p:cNvSpPr>
+          <p:nvPr>
+            <p:ph type="title"/>
+          </p:nvPr>
+        </p:nvSpPr>
+        <p:spPr>
+          <a:xfrm>
+            <a:off x="457200" y="205979"/>
+            <a:ext cx="8229600" cy="857250"/>
+          </a:xfrm>
+        </p:spPr>
+        <p:txBody>
+          <a:bodyPr/>
+          <a:lstStyle/>
+          <a:p>
+            <a:pPr lvl="0" indent="0" marL="0">
+              <a:buNone/>
+            </a:pPr>
+            <a:r>
+              <a:rPr/>
+              <a:t>The curse of dimensionality, briefly</a:t>
+            </a:r>
+          </a:p>
+        </p:txBody>
+      </p:sp>
+      <p:sp>
+        <p:nvSpPr>
+          <p:cNvPr id="3" name="Content Placeholder 2"/>
+          <p:cNvSpPr>
+            <a:spLocks noGrp="1"/>
+          </p:cNvSpPr>
+          <p:nvPr>
+            <p:ph idx="1"/>
+          </p:nvPr>
+        </p:nvSpPr>
+        <p:spPr>
+          <a:xfrm>
+            <a:off x="457200" y="1200151"/>
+            <a:ext cx="8229600" cy="3394472"/>
+          </a:xfrm>
+        </p:spPr>
+        <p:txBody>
+          <a:bodyPr/>
+          <a:lstStyle/>
+          <a:p>
+            <a:pPr lvl="0" indent="0" marL="0">
+              <a:buNone/>
+            </a:pPr>
+            <a:r>
+              <a:rPr/>
+              <a:t>One-hot </a:t>
+            </a:r>
+            <a:r>
+              <a:rPr>
+                <a:latin typeface="Courier"/>
+              </a:rPr>
+              <a:t>zip_code</a:t>
+            </a:r>
+            <a:r>
+              <a:rPr/>
+              <a:t>: </a:t>
+            </a:r>
+            <a:r>
+              <a:rPr b="1"/>
+              <a:t>493</a:t>
+            </a:r>
+            <a:r>
+              <a:rPr/>
+              <a:t> new columns, mostly zero.</a:t>
+            </a:r>
+          </a:p>
+          <a:p>
+            <a:pPr lvl="0"/>
+            <a:r>
+              <a:rPr/>
+              <a:t>Distance-based methods (Lesson 6): everything looks equidistant</a:t>
+            </a:r>
+          </a:p>
+          <a:p>
+            <a:pPr lvl="0"/>
+            <a:r>
+              <a:rPr/>
+              <a:t>More parameters to estimate, same sample size → more variance</a:t>
+            </a:r>
+          </a:p>
+        </p:txBody>
+      </p:sp>
+    </p:spTree>
+  </p:cSld>
+</p:sld>
+</file>
+
+<file path=ppt/slides/slide31.xml><?xml version="1.0" encoding="utf-8"?>
 <p:sld xmlns:a="http://schemas.openxmlformats.org/drawingml/2006/main" xmlns:r="http://schemas.openxmlformats.org/officeDocument/2006/relationships" xmlns:p="http://schemas.openxmlformats.org/presentationml/2006/main">
   <p:cSld>
     <p:spTree>
@@ -11236,7 +11593,7 @@
 </p:sld>
 </file>
 
-<file path=ppt/slides/slide31.xml><?xml version="1.0" encoding="utf-8"?>
+<file path=ppt/slides/slide32.xml><?xml version="1.0" encoding="utf-8"?>
 <p:sld xmlns:a="http://schemas.openxmlformats.org/drawingml/2006/main" xmlns:r="http://schemas.openxmlformats.org/officeDocument/2006/relationships" xmlns:p="http://schemas.openxmlformats.org/presentationml/2006/main">
   <p:cSld>
     <p:spTree>
@@ -11356,7 +11713,7 @@
 </p:sld>
 </file>
 
-<file path=ppt/slides/slide32.xml><?xml version="1.0" encoding="utf-8"?>
+<file path=ppt/slides/slide33.xml><?xml version="1.0" encoding="utf-8"?>
 <p:sld xmlns:a="http://schemas.openxmlformats.org/drawingml/2006/main" xmlns:r="http://schemas.openxmlformats.org/officeDocument/2006/relationships" xmlns:p="http://schemas.openxmlformats.org/presentationml/2006/main">
   <p:cSld>
     <p:spTree>
@@ -11450,215 +11807,6 @@
 </p:sld>
 </file>
 
-<file path=ppt/slides/slide33.xml><?xml version="1.0" encoding="utf-8"?>
-<p:sld xmlns:a="http://schemas.openxmlformats.org/drawingml/2006/main" xmlns:r="http://schemas.openxmlformats.org/officeDocument/2006/relationships" xmlns:p="http://schemas.openxmlformats.org/presentationml/2006/main">
-  <p:cSld>
-    <p:spTree>
-      <p:nvGrpSpPr>
-        <p:cNvPr id="1" name=""/>
-        <p:cNvGrpSpPr/>
-        <p:nvPr/>
-      </p:nvGrpSpPr>
-      <p:grpSpPr>
-        <a:xfrm>
-          <a:off x="0" y="0"/>
-          <a:ext cx="0" cy="0"/>
-          <a:chOff x="0" y="0"/>
-          <a:chExt cx="0" cy="0"/>
-        </a:xfrm>
-      </p:grpSpPr>
-      <p:sp>
-        <p:nvSpPr>
-          <p:cNvPr id="2" name="Title 1"/>
-          <p:cNvSpPr>
-            <a:spLocks noGrp="1"/>
-          </p:cNvSpPr>
-          <p:nvPr>
-            <p:ph type="title"/>
-          </p:nvPr>
-        </p:nvSpPr>
-        <p:spPr>
-          <a:xfrm>
-            <a:off x="457200" y="205979"/>
-            <a:ext cx="8229600" cy="857250"/>
-          </a:xfrm>
-        </p:spPr>
-        <p:txBody>
-          <a:bodyPr/>
-          <a:lstStyle/>
-          <a:p>
-            <a:pPr lvl="0" indent="0" marL="0">
-              <a:buNone/>
-            </a:pPr>
-            <a:r>
-              <a:rPr/>
-              <a:t>The code</a:t>
-            </a:r>
-          </a:p>
-        </p:txBody>
-      </p:sp>
-      <p:sp>
-        <p:nvSpPr>
-          <p:cNvPr id="3" name="Content Placeholder 2"/>
-          <p:cNvSpPr>
-            <a:spLocks noGrp="1"/>
-          </p:cNvSpPr>
-          <p:nvPr>
-            <p:ph idx="1"/>
-          </p:nvPr>
-        </p:nvSpPr>
-        <p:spPr>
-          <a:xfrm>
-            <a:off x="457200" y="1200151"/>
-            <a:ext cx="8229600" cy="3394472"/>
-          </a:xfrm>
-        </p:spPr>
-        <p:txBody>
-          <a:bodyPr/>
-          <a:lstStyle/>
-          <a:p>
-            <a:pPr lvl="0" indent="0">
-              <a:buNone/>
-            </a:pPr>
-            <a:r>
-              <a:rPr>
-                <a:latin typeface="Courier"/>
-              </a:rPr>
-              <a:t>prep </a:t>
-            </a:r>
-            <a:r>
-              <a:rPr>
-                <a:solidFill>
-                  <a:srgbClr val="666666"/>
-                </a:solidFill>
-                <a:latin typeface="Courier"/>
-              </a:rPr>
-              <a:t>=</a:t>
-            </a:r>
-            <a:r>
-              <a:rPr>
-                <a:latin typeface="Courier"/>
-              </a:rPr>
-              <a:t> ColumnTransformer([</a:t>
-            </a:r>
-            <a:br/>
-            <a:r>
-              <a:rPr>
-                <a:latin typeface="Courier"/>
-              </a:rPr>
-              <a:t>    (</a:t>
-            </a:r>
-            <a:r>
-              <a:rPr>
-                <a:solidFill>
-                  <a:srgbClr val="4070A0"/>
-                </a:solidFill>
-                <a:latin typeface="Courier"/>
-              </a:rPr>
-              <a:t>"num"</a:t>
-            </a:r>
-            <a:r>
-              <a:rPr>
-                <a:latin typeface="Courier"/>
-              </a:rPr>
-              <a:t>, num_pipe, num_cols),</a:t>
-            </a:r>
-            <a:br/>
-            <a:r>
-              <a:rPr>
-                <a:latin typeface="Courier"/>
-              </a:rPr>
-              <a:t>    (</a:t>
-            </a:r>
-            <a:r>
-              <a:rPr>
-                <a:solidFill>
-                  <a:srgbClr val="4070A0"/>
-                </a:solidFill>
-                <a:latin typeface="Courier"/>
-              </a:rPr>
-              <a:t>"cat"</a:t>
-            </a:r>
-            <a:r>
-              <a:rPr>
-                <a:latin typeface="Courier"/>
-              </a:rPr>
-              <a:t>, cat_pipe, cat_cols),</a:t>
-            </a:r>
-            <a:br/>
-            <a:r>
-              <a:rPr>
-                <a:latin typeface="Courier"/>
-              </a:rPr>
-              <a:t>])</a:t>
-            </a:r>
-            <a:br/>
-            <a:r>
-              <a:rPr>
-                <a:latin typeface="Courier"/>
-              </a:rPr>
-              <a:t>model </a:t>
-            </a:r>
-            <a:r>
-              <a:rPr>
-                <a:solidFill>
-                  <a:srgbClr val="666666"/>
-                </a:solidFill>
-                <a:latin typeface="Courier"/>
-              </a:rPr>
-              <a:t>=</a:t>
-            </a:r>
-            <a:r>
-              <a:rPr>
-                <a:latin typeface="Courier"/>
-              </a:rPr>
-              <a:t> Pipeline([(</a:t>
-            </a:r>
-            <a:r>
-              <a:rPr>
-                <a:solidFill>
-                  <a:srgbClr val="4070A0"/>
-                </a:solidFill>
-                <a:latin typeface="Courier"/>
-              </a:rPr>
-              <a:t>"prep"</a:t>
-            </a:r>
-            <a:r>
-              <a:rPr>
-                <a:latin typeface="Courier"/>
-              </a:rPr>
-              <a:t>, prep), (</a:t>
-            </a:r>
-            <a:r>
-              <a:rPr>
-                <a:solidFill>
-                  <a:srgbClr val="4070A0"/>
-                </a:solidFill>
-                <a:latin typeface="Courier"/>
-              </a:rPr>
-              <a:t>"clf"</a:t>
-            </a:r>
-            <a:r>
-              <a:rPr>
-                <a:latin typeface="Courier"/>
-              </a:rPr>
-              <a:t>, clf)])</a:t>
-            </a:r>
-            <a:br/>
-            <a:r>
-              <a:rPr>
-                <a:latin typeface="Courier"/>
-              </a:rPr>
-              <a:t>model.fit(X_train, y_train)</a:t>
-            </a:r>
-          </a:p>
-        </p:txBody>
-      </p:sp>
-    </p:spTree>
-  </p:cSld>
-</p:sld>
-</file>
-
 <file path=ppt/slides/slide34.xml><?xml version="1.0" encoding="utf-8"?>
 <p:sld xmlns:a="http://schemas.openxmlformats.org/drawingml/2006/main" xmlns:r="http://schemas.openxmlformats.org/officeDocument/2006/relationships" xmlns:p="http://schemas.openxmlformats.org/presentationml/2006/main">
   <p:cSld>
@@ -11701,7 +11849,7 @@
             </a:pPr>
             <a:r>
               <a:rPr/>
-              <a:t>The model, on churn</a:t>
+              <a:t>The code</a:t>
             </a:r>
           </a:p>
         </p:txBody>
@@ -11726,46 +11874,160 @@
           <a:bodyPr/>
           <a:lstStyle/>
           <a:p>
-            <a:pPr lvl="0"/>
-            <a:r>
-              <a:rPr/>
-              <a:t>Baseline: </a:t>
-            </a:r>
-            <a:r>
-              <a:rPr b="1"/>
-              <a:t>0.806</a:t>
-            </a:r>
-          </a:p>
-          <a:p>
-            <a:pPr lvl="0"/>
-            <a:r>
-              <a:rPr/>
-              <a:t>Model (numeric + low-card categorical, no zip): </a:t>
-            </a:r>
-            <a:r>
-              <a:rPr b="1"/>
-              <a:t>0.820</a:t>
-            </a:r>
-            <a:r>
-              <a:rPr/>
-              <a:t> accuracy, </a:t>
-            </a:r>
-            <a:r>
-              <a:rPr b="1"/>
-              <a:t>0.751</a:t>
-            </a:r>
-            <a:r>
-              <a:rPr/>
-              <a:t> AUC (area under the receiver operating characteristic curve)</a:t>
-            </a:r>
-          </a:p>
-          <a:p>
-            <a:pPr lvl="0" indent="0" marL="0">
-              <a:buNone/>
-            </a:pPr>
-            <a:r>
-              <a:rPr/>
-              <a:t>Modest accuracy gain. Why?</a:t>
+            <a:pPr lvl="0" indent="0">
+              <a:buNone/>
+            </a:pPr>
+            <a:r>
+              <a:rPr>
+                <a:latin typeface="Courier"/>
+              </a:rPr>
+              <a:t>prep </a:t>
+            </a:r>
+            <a:r>
+              <a:rPr>
+                <a:solidFill>
+                  <a:srgbClr val="666666"/>
+                </a:solidFill>
+                <a:latin typeface="Courier"/>
+              </a:rPr>
+              <a:t>=</a:t>
+            </a:r>
+            <a:r>
+              <a:rPr>
+                <a:latin typeface="Courier"/>
+              </a:rPr>
+              <a:t> ColumnTransformer([</a:t>
+            </a:r>
+            <a:br/>
+            <a:r>
+              <a:rPr>
+                <a:latin typeface="Courier"/>
+              </a:rPr>
+              <a:t>    (</a:t>
+            </a:r>
+            <a:r>
+              <a:rPr>
+                <a:solidFill>
+                  <a:srgbClr val="4070A0"/>
+                </a:solidFill>
+                <a:latin typeface="Courier"/>
+              </a:rPr>
+              <a:t>"num"</a:t>
+            </a:r>
+            <a:r>
+              <a:rPr>
+                <a:latin typeface="Courier"/>
+              </a:rPr>
+              <a:t>, num_pipe, num_cols),</a:t>
+            </a:r>
+            <a:br/>
+            <a:r>
+              <a:rPr>
+                <a:latin typeface="Courier"/>
+              </a:rPr>
+              <a:t>    (</a:t>
+            </a:r>
+            <a:r>
+              <a:rPr>
+                <a:solidFill>
+                  <a:srgbClr val="4070A0"/>
+                </a:solidFill>
+                <a:latin typeface="Courier"/>
+              </a:rPr>
+              <a:t>"cat"</a:t>
+            </a:r>
+            <a:r>
+              <a:rPr>
+                <a:latin typeface="Courier"/>
+              </a:rPr>
+              <a:t>, cat_pipe, cat_cols),</a:t>
+            </a:r>
+            <a:br/>
+            <a:r>
+              <a:rPr>
+                <a:latin typeface="Courier"/>
+              </a:rPr>
+              <a:t>])</a:t>
+            </a:r>
+            <a:br/>
+            <a:r>
+              <a:rPr>
+                <a:latin typeface="Courier"/>
+              </a:rPr>
+              <a:t>model </a:t>
+            </a:r>
+            <a:r>
+              <a:rPr>
+                <a:solidFill>
+                  <a:srgbClr val="666666"/>
+                </a:solidFill>
+                <a:latin typeface="Courier"/>
+              </a:rPr>
+              <a:t>=</a:t>
+            </a:r>
+            <a:r>
+              <a:rPr>
+                <a:latin typeface="Courier"/>
+              </a:rPr>
+              <a:t> Pipeline([</a:t>
+            </a:r>
+            <a:br/>
+            <a:r>
+              <a:rPr>
+                <a:latin typeface="Courier"/>
+              </a:rPr>
+              <a:t>    (</a:t>
+            </a:r>
+            <a:r>
+              <a:rPr>
+                <a:solidFill>
+                  <a:srgbClr val="4070A0"/>
+                </a:solidFill>
+                <a:latin typeface="Courier"/>
+              </a:rPr>
+              <a:t>"prep"</a:t>
+            </a:r>
+            <a:r>
+              <a:rPr>
+                <a:latin typeface="Courier"/>
+              </a:rPr>
+              <a:t>, prep),</a:t>
+            </a:r>
+            <a:br/>
+            <a:r>
+              <a:rPr>
+                <a:latin typeface="Courier"/>
+              </a:rPr>
+              <a:t>    (</a:t>
+            </a:r>
+            <a:r>
+              <a:rPr>
+                <a:solidFill>
+                  <a:srgbClr val="4070A0"/>
+                </a:solidFill>
+                <a:latin typeface="Courier"/>
+              </a:rPr>
+              <a:t>"clf"</a:t>
+            </a:r>
+            <a:r>
+              <a:rPr>
+                <a:latin typeface="Courier"/>
+              </a:rPr>
+              <a:t>, clf),</a:t>
+            </a:r>
+            <a:br/>
+            <a:r>
+              <a:rPr>
+                <a:latin typeface="Courier"/>
+              </a:rPr>
+              <a:t>])</a:t>
+            </a:r>
+            <a:br/>
+            <a:r>
+              <a:rPr>
+                <a:latin typeface="Courier"/>
+              </a:rPr>
+              <a:t>model.fit(X_train, y_train)</a:t>
             </a:r>
           </a:p>
         </p:txBody>
@@ -11776,6 +12038,122 @@
 </file>
 
 <file path=ppt/slides/slide35.xml><?xml version="1.0" encoding="utf-8"?>
+<p:sld xmlns:a="http://schemas.openxmlformats.org/drawingml/2006/main" xmlns:r="http://schemas.openxmlformats.org/officeDocument/2006/relationships" xmlns:p="http://schemas.openxmlformats.org/presentationml/2006/main">
+  <p:cSld>
+    <p:spTree>
+      <p:nvGrpSpPr>
+        <p:cNvPr id="1" name=""/>
+        <p:cNvGrpSpPr/>
+        <p:nvPr/>
+      </p:nvGrpSpPr>
+      <p:grpSpPr>
+        <a:xfrm>
+          <a:off x="0" y="0"/>
+          <a:ext cx="0" cy="0"/>
+          <a:chOff x="0" y="0"/>
+          <a:chExt cx="0" cy="0"/>
+        </a:xfrm>
+      </p:grpSpPr>
+      <p:sp>
+        <p:nvSpPr>
+          <p:cNvPr id="2" name="Title 1"/>
+          <p:cNvSpPr>
+            <a:spLocks noGrp="1"/>
+          </p:cNvSpPr>
+          <p:nvPr>
+            <p:ph type="title"/>
+          </p:nvPr>
+        </p:nvSpPr>
+        <p:spPr>
+          <a:xfrm>
+            <a:off x="457200" y="205979"/>
+            <a:ext cx="8229600" cy="857250"/>
+          </a:xfrm>
+        </p:spPr>
+        <p:txBody>
+          <a:bodyPr/>
+          <a:lstStyle/>
+          <a:p>
+            <a:pPr lvl="0" indent="0" marL="0">
+              <a:buNone/>
+            </a:pPr>
+            <a:r>
+              <a:rPr/>
+              <a:t>The model, on churn</a:t>
+            </a:r>
+          </a:p>
+        </p:txBody>
+      </p:sp>
+      <p:sp>
+        <p:nvSpPr>
+          <p:cNvPr id="3" name="Content Placeholder 2"/>
+          <p:cNvSpPr>
+            <a:spLocks noGrp="1"/>
+          </p:cNvSpPr>
+          <p:nvPr>
+            <p:ph idx="1"/>
+          </p:nvPr>
+        </p:nvSpPr>
+        <p:spPr>
+          <a:xfrm>
+            <a:off x="457200" y="1200151"/>
+            <a:ext cx="8229600" cy="3394472"/>
+          </a:xfrm>
+        </p:spPr>
+        <p:txBody>
+          <a:bodyPr/>
+          <a:lstStyle/>
+          <a:p>
+            <a:pPr lvl="0"/>
+            <a:r>
+              <a:rPr/>
+              <a:t>Baseline: </a:t>
+            </a:r>
+            <a:r>
+              <a:rPr b="1"/>
+              <a:t>0.806</a:t>
+            </a:r>
+          </a:p>
+          <a:p>
+            <a:pPr lvl="0"/>
+            <a:r>
+              <a:rPr/>
+              <a:t>Model (numeric + the low-cardinality categoricals, no zip): </a:t>
+            </a:r>
+            <a:r>
+              <a:rPr b="1"/>
+              <a:t>0.820</a:t>
+            </a:r>
+            <a:r>
+              <a:rPr/>
+              <a:t> accuracy, </a:t>
+            </a:r>
+            <a:r>
+              <a:rPr b="1"/>
+              <a:t>0.751</a:t>
+            </a:r>
+            <a:r>
+              <a:rPr/>
+              <a:t> AUC (area under the receiver operating characteristic curve)</a:t>
+            </a:r>
+          </a:p>
+          <a:p>
+            <a:pPr lvl="0" indent="0" marL="0">
+              <a:buNone/>
+            </a:pPr>
+            <a:r>
+              <a:rPr/>
+              <a:t>Modest accuracy gain. Why?</a:t>
+            </a:r>
+          </a:p>
+        </p:txBody>
+      </p:sp>
+    </p:spTree>
+  </p:cSld>
+</p:sld>
+</file>
+
+<file path=ppt/slides/slide36.xml><?xml version="1.0" encoding="utf-8"?>
 <p:sld xmlns:a="http://schemas.openxmlformats.org/drawingml/2006/main" xmlns:r="http://schemas.openxmlformats.org/officeDocument/2006/relationships" xmlns:p="http://schemas.openxmlformats.org/presentationml/2006/main">
   <p:cSld>
     <p:spTree>
@@ -11857,7 +12235,7 @@
 </p:sld>
 </file>
 
-<file path=ppt/slides/slide36.xml><?xml version="1.0" encoding="utf-8"?>
+<file path=ppt/slides/slide37.xml><?xml version="1.0" encoding="utf-8"?>
 <p:sld xmlns:a="http://schemas.openxmlformats.org/drawingml/2006/main" xmlns:r="http://schemas.openxmlformats.org/officeDocument/2006/relationships" xmlns:p="http://schemas.openxmlformats.org/presentationml/2006/main">
   <p:cSld>
     <p:spTree>
@@ -11929,14 +12307,18 @@
             </a:pPr>
             <a:r>
               <a:rPr/>
-              <a:t>Ratios, interactions, binning: a linear model cannot invent these itself. AUC: 0.751 → 0.754, a modest but real gain.</a:t>
+              <a:t>Ratios, interactions, binning: a linear model cannot invent these itself. AUC: 0.751 → 0.754. </a:t>
+            </a:r>
+            <a:r>
+              <a:rPr b="1"/>
+              <a:t>Two thousandths: one split cannot tell that from noise.</a:t>
             </a:r>
           </a:p>
         </p:txBody>
       </p:sp>
       <p:pic>
         <p:nvPicPr>
-          <p:cNvPr descr="eq_0ab17cabfc.png" id="0" name="Picture 1"/>
+          <p:cNvPr descr="eq_708e41c00f.png" id="0" name="Picture 1"/>
           <p:cNvPicPr>
             <a:picLocks noGrp="1" noChangeAspect="1"/>
           </p:cNvPicPr>
@@ -11950,8 +12332,8 @@
         </p:blipFill>
         <p:spPr bwMode="auto">
           <a:xfrm>
-            <a:off x="457201" y="3111497"/>
-            <a:ext cx="8229597" cy="900752"/>
+            <a:off x="457204" y="3183148"/>
+            <a:ext cx="8229591" cy="757450"/>
           </a:xfrm>
           <a:prstGeom prst="rect">
             <a:avLst/>
@@ -11969,7 +12351,7 @@
 </p:sld>
 </file>
 
-<file path=ppt/slides/slide37.xml><?xml version="1.0" encoding="utf-8"?>
+<file path=ppt/slides/slide38.xml><?xml version="1.0" encoding="utf-8"?>
 <p:sld xmlns:a="http://schemas.openxmlformats.org/drawingml/2006/main" xmlns:r="http://schemas.openxmlformats.org/officeDocument/2006/relationships" xmlns:p="http://schemas.openxmlformats.org/presentationml/2006/main">
   <p:cSld>
     <p:spTree>
@@ -12071,7 +12453,7 @@
 </p:sld>
 </file>
 
-<file path=ppt/slides/slide38.xml><?xml version="1.0" encoding="utf-8"?>
+<file path=ppt/slides/slide39.xml><?xml version="1.0" encoding="utf-8"?>
 <p:sld xmlns:a="http://schemas.openxmlformats.org/drawingml/2006/main" xmlns:r="http://schemas.openxmlformats.org/officeDocument/2006/relationships" xmlns:p="http://schemas.openxmlformats.org/presentationml/2006/main">
   <p:cSld>
     <p:spTree>
@@ -12153,111 +12535,6 @@
 </p:sld>
 </file>
 
-<file path=ppt/slides/slide39.xml><?xml version="1.0" encoding="utf-8"?>
-<p:sld xmlns:a="http://schemas.openxmlformats.org/drawingml/2006/main" xmlns:r="http://schemas.openxmlformats.org/officeDocument/2006/relationships" xmlns:p="http://schemas.openxmlformats.org/presentationml/2006/main">
-  <p:cSld>
-    <p:spTree>
-      <p:nvGrpSpPr>
-        <p:cNvPr id="1" name=""/>
-        <p:cNvGrpSpPr/>
-        <p:nvPr/>
-      </p:nvGrpSpPr>
-      <p:grpSpPr>
-        <a:xfrm>
-          <a:off x="0" y="0"/>
-          <a:ext cx="0" cy="0"/>
-          <a:chOff x="0" y="0"/>
-          <a:chExt cx="0" cy="0"/>
-        </a:xfrm>
-      </p:grpSpPr>
-      <p:sp>
-        <p:nvSpPr>
-          <p:cNvPr id="2" name="Title 1"/>
-          <p:cNvSpPr>
-            <a:spLocks noGrp="1"/>
-          </p:cNvSpPr>
-          <p:nvPr>
-            <p:ph type="title"/>
-          </p:nvPr>
-        </p:nvSpPr>
-        <p:spPr>
-          <a:xfrm>
-            <a:off x="457200" y="205979"/>
-            <a:ext cx="8229600" cy="857250"/>
-          </a:xfrm>
-        </p:spPr>
-        <p:txBody>
-          <a:bodyPr/>
-          <a:lstStyle/>
-          <a:p>
-            <a:pPr lvl="0" indent="0" marL="0">
-              <a:buNone/>
-            </a:pPr>
-            <a:r>
-              <a:rPr/>
-              <a:t>Leak 1: impute before splitting</a:t>
-            </a:r>
-          </a:p>
-        </p:txBody>
-      </p:sp>
-      <p:sp>
-        <p:nvSpPr>
-          <p:cNvPr id="3" name="Content Placeholder 2"/>
-          <p:cNvSpPr>
-            <a:spLocks noGrp="1"/>
-          </p:cNvSpPr>
-          <p:nvPr>
-            <p:ph idx="1"/>
-          </p:nvPr>
-        </p:nvSpPr>
-        <p:spPr>
-          <a:xfrm>
-            <a:off x="457200" y="1200151"/>
-            <a:ext cx="8229600" cy="3394472"/>
-          </a:xfrm>
-        </p:spPr>
-        <p:txBody>
-          <a:bodyPr/>
-          <a:lstStyle/>
-          <a:p>
-            <a:pPr lvl="0" indent="0" marL="0">
-              <a:buNone/>
-            </a:pPr>
-            <a:r>
-              <a:rPr>
-                <a:latin typeface="Courier"/>
-              </a:rPr>
-              <a:t>KNNImputer</a:t>
-            </a:r>
-            <a:r>
-              <a:rPr/>
-              <a:t> fills a gap using </a:t>
-            </a:r>
-            <a:r>
-              <a:rPr b="1"/>
-              <a:t>other rows’ values</a:t>
-            </a:r>
-            <a:r>
-              <a:rPr/>
-              <a:t>.</a:t>
-            </a:r>
-          </a:p>
-          <a:p>
-            <a:pPr lvl="0" indent="0" marL="0">
-              <a:buNone/>
-            </a:pPr>
-            <a:r>
-              <a:rPr/>
-              <a:t>Fit it on train + test, and some of those rows are in the test set.</a:t>
-            </a:r>
-          </a:p>
-        </p:txBody>
-      </p:sp>
-    </p:spTree>
-  </p:cSld>
-</p:sld>
-</file>
-
 <file path=ppt/slides/slide4.xml><?xml version="1.0" encoding="utf-8"?>
 <p:sld xmlns:a="http://schemas.openxmlformats.org/drawingml/2006/main" xmlns:r="http://schemas.openxmlformats.org/officeDocument/2006/relationships" xmlns:p="http://schemas.openxmlformats.org/presentationml/2006/main">
   <p:cSld>
@@ -12415,7 +12692,7 @@
             </a:pPr>
             <a:r>
               <a:rPr/>
-              <a:t>The smoking gun</a:t>
+              <a:t>Leak 1: impute before splitting</a:t>
             </a:r>
           </a:p>
         </p:txBody>
@@ -12444,29 +12721,31 @@
               <a:buNone/>
             </a:pPr>
             <a:r>
+              <a:rPr>
+                <a:latin typeface="Courier"/>
+              </a:rPr>
+              <a:t>KNNImputer</a:t>
+            </a:r>
+            <a:r>
+              <a:rPr/>
+              <a:t> fills a gap using </a:t>
+            </a:r>
+            <a:r>
               <a:rPr b="1"/>
-              <a:t>98 of 128</a:t>
-            </a:r>
-            <a:r>
-              <a:rPr/>
-              <a:t> training rows with missing age had a </a:t>
-            </a:r>
-            <a:r>
-              <a:rPr b="1"/>
-              <a:t>test-set row</a:t>
-            </a:r>
-            <a:r>
-              <a:rPr/>
-              <a:t> among their five nearest neighbours.</a:t>
-            </a:r>
-          </a:p>
-          <a:p>
-            <a:pPr lvl="0" indent="0" marL="0">
-              <a:buNone/>
-            </a:pPr>
-            <a:r>
-              <a:rPr/>
-              <a:t>Nothing raised an error.</a:t>
+              <a:t>other rows’ values</a:t>
+            </a:r>
+            <a:r>
+              <a:rPr/>
+              <a:t>.</a:t>
+            </a:r>
+          </a:p>
+          <a:p>
+            <a:pPr lvl="0" indent="0" marL="0">
+              <a:buNone/>
+            </a:pPr>
+            <a:r>
+              <a:rPr/>
+              <a:t>Fit it on train + test, and some of those rows are in the test set.</a:t>
             </a:r>
           </a:p>
         </p:txBody>
@@ -12477,6 +12756,109 @@
 </file>
 
 <file path=ppt/slides/slide41.xml><?xml version="1.0" encoding="utf-8"?>
+<p:sld xmlns:a="http://schemas.openxmlformats.org/drawingml/2006/main" xmlns:r="http://schemas.openxmlformats.org/officeDocument/2006/relationships" xmlns:p="http://schemas.openxmlformats.org/presentationml/2006/main">
+  <p:cSld>
+    <p:spTree>
+      <p:nvGrpSpPr>
+        <p:cNvPr id="1" name=""/>
+        <p:cNvGrpSpPr/>
+        <p:nvPr/>
+      </p:nvGrpSpPr>
+      <p:grpSpPr>
+        <a:xfrm>
+          <a:off x="0" y="0"/>
+          <a:ext cx="0" cy="0"/>
+          <a:chOff x="0" y="0"/>
+          <a:chExt cx="0" cy="0"/>
+        </a:xfrm>
+      </p:grpSpPr>
+      <p:sp>
+        <p:nvSpPr>
+          <p:cNvPr id="2" name="Title 1"/>
+          <p:cNvSpPr>
+            <a:spLocks noGrp="1"/>
+          </p:cNvSpPr>
+          <p:nvPr>
+            <p:ph type="title"/>
+          </p:nvPr>
+        </p:nvSpPr>
+        <p:spPr>
+          <a:xfrm>
+            <a:off x="457200" y="205979"/>
+            <a:ext cx="8229600" cy="857250"/>
+          </a:xfrm>
+        </p:spPr>
+        <p:txBody>
+          <a:bodyPr/>
+          <a:lstStyle/>
+          <a:p>
+            <a:pPr lvl="0" indent="0" marL="0">
+              <a:buNone/>
+            </a:pPr>
+            <a:r>
+              <a:rPr/>
+              <a:t>The smoking gun</a:t>
+            </a:r>
+          </a:p>
+        </p:txBody>
+      </p:sp>
+      <p:sp>
+        <p:nvSpPr>
+          <p:cNvPr id="3" name="Content Placeholder 2"/>
+          <p:cNvSpPr>
+            <a:spLocks noGrp="1"/>
+          </p:cNvSpPr>
+          <p:nvPr>
+            <p:ph idx="1"/>
+          </p:nvPr>
+        </p:nvSpPr>
+        <p:spPr>
+          <a:xfrm>
+            <a:off x="457200" y="1200151"/>
+            <a:ext cx="8229600" cy="3394472"/>
+          </a:xfrm>
+        </p:spPr>
+        <p:txBody>
+          <a:bodyPr/>
+          <a:lstStyle/>
+          <a:p>
+            <a:pPr lvl="0" indent="0" marL="0">
+              <a:buNone/>
+            </a:pPr>
+            <a:r>
+              <a:rPr b="1"/>
+              <a:t>94 of 128</a:t>
+            </a:r>
+            <a:r>
+              <a:rPr/>
+              <a:t> training rows with missing age had a </a:t>
+            </a:r>
+            <a:r>
+              <a:rPr b="1"/>
+              <a:t>test-set row</a:t>
+            </a:r>
+            <a:r>
+              <a:rPr/>
+              <a:t> among the five donors used to fill it.</a:t>
+            </a:r>
+          </a:p>
+          <a:p>
+            <a:pPr lvl="0" indent="0" marL="0">
+              <a:buNone/>
+            </a:pPr>
+            <a:r>
+              <a:rPr/>
+              <a:t>Nothing raised an error.</a:t>
+            </a:r>
+          </a:p>
+        </p:txBody>
+      </p:sp>
+    </p:spTree>
+  </p:cSld>
+</p:sld>
+</file>
+
+<file path=ppt/slides/slide42.xml><?xml version="1.0" encoding="utf-8"?>
 <p:sld xmlns:a="http://schemas.openxmlformats.org/drawingml/2006/main" xmlns:r="http://schemas.openxmlformats.org/officeDocument/2006/relationships" xmlns:p="http://schemas.openxmlformats.org/presentationml/2006/main">
   <p:cSld>
     <p:spTree>
@@ -12558,7 +12940,7 @@
 </p:sld>
 </file>
 
-<file path=ppt/slides/slide42.xml><?xml version="1.0" encoding="utf-8"?>
+<file path=ppt/slides/slide43.xml><?xml version="1.0" encoding="utf-8"?>
 <p:sld xmlns:a="http://schemas.openxmlformats.org/drawingml/2006/main" xmlns:r="http://schemas.openxmlformats.org/officeDocument/2006/relationships" xmlns:p="http://schemas.openxmlformats.org/presentationml/2006/main">
   <p:cSld>
     <p:spTree>
@@ -12658,7 +13040,7 @@
 </p:sld>
 </file>
 
-<file path=ppt/slides/slide43.xml><?xml version="1.0" encoding="utf-8"?>
+<file path=ppt/slides/slide44.xml><?xml version="1.0" encoding="utf-8"?>
 <p:sld xmlns:a="http://schemas.openxmlformats.org/drawingml/2006/main" xmlns:r="http://schemas.openxmlformats.org/officeDocument/2006/relationships" xmlns:p="http://schemas.openxmlformats.org/presentationml/2006/main">
   <p:cSld>
     <p:spTree>
@@ -12740,7 +13122,7 @@
 </p:sld>
 </file>
 
-<file path=ppt/slides/slide44.xml><?xml version="1.0" encoding="utf-8"?>
+<file path=ppt/slides/slide45.xml><?xml version="1.0" encoding="utf-8"?>
 <p:sld xmlns:a="http://schemas.openxmlformats.org/drawingml/2006/main" xmlns:r="http://schemas.openxmlformats.org/officeDocument/2006/relationships" xmlns:p="http://schemas.openxmlformats.org/presentationml/2006/main">
   <p:cSld>
     <p:spTree>
@@ -12769,8 +13151,8 @@
         </p:nvSpPr>
         <p:spPr>
           <a:xfrm>
-            <a:off x="457200" y="205740"/>
-            <a:ext cx="8229600" cy="874395"/>
+            <a:off x="457200" y="205979"/>
+            <a:ext cx="8229600" cy="857250"/>
           </a:xfrm>
         </p:spPr>
         <p:txBody>
@@ -12782,37 +13164,7 @@
             </a:pPr>
             <a:r>
               <a:rPr/>
-              <a:t>Why small groups make it worse</a:t>
-            </a:r>
-          </a:p>
-        </p:txBody>
-      </p:sp>
-      <p:sp>
-        <p:nvSpPr>
-          <p:cNvPr id="4" name="Text Placeholder 3"/>
-          <p:cNvSpPr>
-            <a:spLocks noGrp="1"/>
-          </p:cNvSpPr>
-          <p:nvPr>
-            <p:ph idx="2" sz="half" type="body"/>
-          </p:nvPr>
-        </p:nvSpPr>
-        <p:spPr>
-          <a:xfrm>
-            <a:off x="457200" y="1183005"/>
-            <a:ext cx="8229600" cy="874395"/>
-          </a:xfrm>
-        </p:spPr>
-        <p:txBody>
-          <a:bodyPr/>
-          <a:lstStyle/>
-          <a:p>
-            <a:pPr lvl="0" indent="0" marL="0">
-              <a:buNone/>
-            </a:pPr>
-            <a:r>
-              <a:rPr/>
-              <a:t>The “leave-in” encoding differs from the honest leave-one-out encoding by:</a:t>
+              <a:t>Your own disagreement, divided by your group size</a:t>
             </a:r>
           </a:p>
         </p:txBody>
@@ -12833,8 +13185,8 @@
         </p:blipFill>
         <p:spPr bwMode="auto">
           <a:xfrm>
-            <a:off x="457201" y="2411815"/>
-            <a:ext cx="8229598" cy="1862919"/>
+            <a:off x="457200" y="1919089"/>
+            <a:ext cx="8229600" cy="1854200"/>
           </a:xfrm>
           <a:prstGeom prst="rect">
             <a:avLst/>
@@ -12852,7 +13204,7 @@
 </p:sld>
 </file>
 
-<file path=ppt/slides/slide45.xml><?xml version="1.0" encoding="utf-8"?>
+<file path=ppt/slides/slide46.xml><?xml version="1.0" encoding="utf-8"?>
 <p:sld xmlns:a="http://schemas.openxmlformats.org/drawingml/2006/main" xmlns:r="http://schemas.openxmlformats.org/officeDocument/2006/relationships" xmlns:p="http://schemas.openxmlformats.org/presentationml/2006/main">
   <p:cSld>
     <p:spTree>
@@ -12934,111 +13286,6 @@
 </p:sld>
 </file>
 
-<file path=ppt/slides/slide46.xml><?xml version="1.0" encoding="utf-8"?>
-<p:sld xmlns:a="http://schemas.openxmlformats.org/drawingml/2006/main" xmlns:r="http://schemas.openxmlformats.org/officeDocument/2006/relationships" xmlns:p="http://schemas.openxmlformats.org/presentationml/2006/main">
-  <p:cSld>
-    <p:spTree>
-      <p:nvGrpSpPr>
-        <p:cNvPr id="1" name=""/>
-        <p:cNvGrpSpPr/>
-        <p:nvPr/>
-      </p:nvGrpSpPr>
-      <p:grpSpPr>
-        <a:xfrm>
-          <a:off x="0" y="0"/>
-          <a:ext cx="0" cy="0"/>
-          <a:chOff x="0" y="0"/>
-          <a:chExt cx="0" cy="0"/>
-        </a:xfrm>
-      </p:grpSpPr>
-      <p:sp>
-        <p:nvSpPr>
-          <p:cNvPr id="2" name="Title 1"/>
-          <p:cNvSpPr>
-            <a:spLocks noGrp="1"/>
-          </p:cNvSpPr>
-          <p:nvPr>
-            <p:ph type="title"/>
-          </p:nvPr>
-        </p:nvSpPr>
-        <p:spPr>
-          <a:xfrm>
-            <a:off x="457200" y="205979"/>
-            <a:ext cx="8229600" cy="857250"/>
-          </a:xfrm>
-        </p:spPr>
-        <p:txBody>
-          <a:bodyPr/>
-          <a:lstStyle/>
-          <a:p>
-            <a:pPr lvl="0" indent="0" marL="0">
-              <a:buNone/>
-            </a:pPr>
-            <a:r>
-              <a:rPr/>
-              <a:t>The fix</a:t>
-            </a:r>
-          </a:p>
-        </p:txBody>
-      </p:sp>
-      <p:sp>
-        <p:nvSpPr>
-          <p:cNvPr id="3" name="Content Placeholder 2"/>
-          <p:cNvSpPr>
-            <a:spLocks noGrp="1"/>
-          </p:cNvSpPr>
-          <p:nvPr>
-            <p:ph idx="1"/>
-          </p:nvPr>
-        </p:nvSpPr>
-        <p:spPr>
-          <a:xfrm>
-            <a:off x="457200" y="1200151"/>
-            <a:ext cx="8229600" cy="3394472"/>
-          </a:xfrm>
-        </p:spPr>
-        <p:txBody>
-          <a:bodyPr/>
-          <a:lstStyle/>
-          <a:p>
-            <a:pPr lvl="0" indent="0" marL="0">
-              <a:buNone/>
-            </a:pPr>
-            <a:r>
-              <a:rPr>
-                <a:latin typeface="Courier"/>
-              </a:rPr>
-              <a:t>sklearn.preprocessing.TargetEncoder</a:t>
-            </a:r>
-            <a:r>
-              <a:rPr/>
-              <a:t>: cross-fitted inside the pipeline.</a:t>
-            </a:r>
-          </a:p>
-          <a:p>
-            <a:pPr lvl="0" indent="0" marL="0">
-              <a:buNone/>
-            </a:pPr>
-            <a:r>
-              <a:rPr/>
-              <a:t>Each row’s encoded value comes from </a:t>
-            </a:r>
-            <a:r>
-              <a:rPr b="1"/>
-              <a:t>other</a:t>
-            </a:r>
-            <a:r>
-              <a:rPr/>
-              <a:t> folds, never its own label.</a:t>
-            </a:r>
-          </a:p>
-        </p:txBody>
-      </p:sp>
-    </p:spTree>
-  </p:cSld>
-</p:sld>
-</file>
-
 <file path=ppt/slides/slide47.xml><?xml version="1.0" encoding="utf-8"?>
 <p:sld xmlns:a="http://schemas.openxmlformats.org/drawingml/2006/main" xmlns:r="http://schemas.openxmlformats.org/officeDocument/2006/relationships" xmlns:p="http://schemas.openxmlformats.org/presentationml/2006/main">
   <p:cSld>
@@ -13081,7 +13328,7 @@
             </a:pPr>
             <a:r>
               <a:rPr/>
-              <a:t>The rule, restated</a:t>
+              <a:t>The fix</a:t>
             </a:r>
           </a:p>
         </p:txBody>
@@ -13110,25 +13357,31 @@
               <a:buNone/>
             </a:pPr>
             <a:r>
-              <a:rPr/>
-              <a:t>Everything that </a:t>
+              <a:rPr>
+                <a:latin typeface="Courier"/>
+              </a:rPr>
+              <a:t>sklearn.preprocessing.TargetEncoder</a:t>
+            </a:r>
+            <a:r>
+              <a:rPr/>
+              <a:t>: cross-fitted inside the pipeline.</a:t>
+            </a:r>
+          </a:p>
+          <a:p>
+            <a:pPr lvl="0" indent="0" marL="0">
+              <a:buNone/>
+            </a:pPr>
+            <a:r>
+              <a:rPr/>
+              <a:t>Each row’s encoded value comes from </a:t>
             </a:r>
             <a:r>
               <a:rPr b="1"/>
-              <a:t>learns from data</a:t>
-            </a:r>
-            <a:r>
-              <a:rPr/>
-              <a:t> belongs inside the fold it is fitted on.</a:t>
-            </a:r>
-          </a:p>
-          <a:p>
-            <a:pPr lvl="0" indent="0" marL="0">
-              <a:buNone/>
-            </a:pPr>
-            <a:r>
-              <a:rPr/>
-              <a:t>A mean. A median. A set of neighbours. A per-category average. A set of bin edges.</a:t>
+              <a:t>other</a:t>
+            </a:r>
+            <a:r>
+              <a:rPr/>
+              <a:t> folds, never its own label.</a:t>
             </a:r>
           </a:p>
         </p:txBody>
@@ -13180,7 +13433,7 @@
             </a:pPr>
             <a:r>
               <a:rPr/>
-              <a:t>Notebook 3, live</a:t>
+              <a:t>The rule, restated</a:t>
             </a:r>
           </a:p>
         </p:txBody>
@@ -13210,7 +13463,24 @@
             </a:pPr>
             <a:r>
               <a:rPr/>
-              <a:t>Trace the imputation leak. Watch the encoding leak manufacture 0.89 from noise.</a:t>
+              <a:t>Everything that </a:t>
+            </a:r>
+            <a:r>
+              <a:rPr b="1"/>
+              <a:t>learns from data</a:t>
+            </a:r>
+            <a:r>
+              <a:rPr/>
+              <a:t> belongs inside the fold it is fitted on.</a:t>
+            </a:r>
+          </a:p>
+          <a:p>
+            <a:pPr lvl="0" indent="0" marL="0">
+              <a:buNone/>
+            </a:pPr>
+            <a:r>
+              <a:rPr/>
+              <a:t>A mean. A median. A set of neighbours. A per-category average. A set of bin edges.</a:t>
             </a:r>
           </a:p>
         </p:txBody>
@@ -13262,7 +13532,7 @@
             </a:pPr>
             <a:r>
               <a:rPr/>
-              <a:t>What we did today</a:t>
+              <a:t>Notebook 3, live</a:t>
             </a:r>
           </a:p>
         </p:txBody>
@@ -13287,56 +13557,12 @@
           <a:bodyPr/>
           <a:lstStyle/>
           <a:p>
-            <a:pPr lvl="0"/>
-            <a:r>
-              <a:rPr/>
-              <a:t>Explored before transforming: types, gaps, shape, correlations</a:t>
-            </a:r>
-          </a:p>
-          <a:p>
-            <a:pPr lvl="0"/>
-            <a:r>
-              <a:rPr/>
-              <a:t>Diagnosed </a:t>
-            </a:r>
-            <a:r>
-              <a:rPr i="1"/>
-              <a:t>why</a:t>
-            </a:r>
-            <a:r>
-              <a:rPr/>
-              <a:t> values are missing, not just </a:t>
-            </a:r>
-            <a:r>
-              <a:rPr i="1"/>
-              <a:t>how many</a:t>
-            </a:r>
-          </a:p>
-          <a:p>
-            <a:pPr lvl="0"/>
-            <a:r>
-              <a:rPr/>
-              <a:t>Two outlier rules, and what neither can tell you</a:t>
-            </a:r>
-          </a:p>
-          <a:p>
-            <a:pPr lvl="0"/>
-            <a:r>
-              <a:rPr/>
-              <a:t>Scaling, encoding, engineering: all inside </a:t>
-            </a:r>
-            <a:r>
-              <a:rPr>
-                <a:latin typeface="Courier"/>
-              </a:rPr>
-              <a:t>Pipeline</a:t>
-            </a:r>
-          </a:p>
-          <a:p>
-            <a:pPr lvl="0"/>
-            <a:r>
-              <a:rPr/>
-              <a:t>Two leaks that look nothing like leaking</a:t>
+            <a:pPr lvl="0" indent="0" marL="0">
+              <a:buNone/>
+            </a:pPr>
+            <a:r>
+              <a:rPr/>
+              <a:t>Trace the imputation leak. Watch the encoding leak manufacture 0.89 from noise.</a:t>
             </a:r>
           </a:p>
         </p:txBody>
@@ -13503,7 +13729,7 @@
             </a:pPr>
             <a:r>
               <a:rPr/>
-              <a:t>Homework: due Friday 9 October</a:t>
+              <a:t>What we did today</a:t>
             </a:r>
           </a:p>
         </p:txBody>
@@ -13528,31 +13754,56 @@
           <a:bodyPr/>
           <a:lstStyle/>
           <a:p>
-            <a:pPr lvl="0" indent="0" marL="0">
-              <a:buNone/>
-            </a:pPr>
+            <a:pPr lvl="0"/>
+            <a:r>
+              <a:rPr/>
+              <a:t>Explored before transforming: types, gaps, shape, correlations</a:t>
+            </a:r>
+          </a:p>
+          <a:p>
+            <a:pPr lvl="0"/>
+            <a:r>
+              <a:rPr/>
+              <a:t>Diagnosed </a:t>
+            </a:r>
+            <a:r>
+              <a:rPr i="1"/>
+              <a:t>why</a:t>
+            </a:r>
+            <a:r>
+              <a:rPr/>
+              <a:t> values are missing, not just </a:t>
+            </a:r>
+            <a:r>
+              <a:rPr i="1"/>
+              <a:t>how many</a:t>
+            </a:r>
+          </a:p>
+          <a:p>
+            <a:pPr lvl="0"/>
+            <a:r>
+              <a:rPr/>
+              <a:t>Two outlier rules, and what neither can tell you</a:t>
+            </a:r>
+          </a:p>
+          <a:p>
+            <a:pPr lvl="0"/>
+            <a:r>
+              <a:rPr/>
+              <a:t>Scaling, encoding, engineering: all inside </a:t>
+            </a:r>
             <a:r>
               <a:rPr>
                 <a:latin typeface="Courier"/>
               </a:rPr>
-              <a:t>Exercises/02_data_exploration_and_preparation.md</a:t>
-            </a:r>
-          </a:p>
-          <a:p>
-            <a:pPr lvl="0" indent="0" marL="0">
-              <a:buNone/>
-            </a:pPr>
-            <a:r>
-              <a:rPr/>
-              <a:t>Build the full preparation pipeline yourself, and </a:t>
-            </a:r>
-            <a:r>
-              <a:rPr b="1"/>
-              <a:t>find a leak on purpose</a:t>
-            </a:r>
-            <a:r>
-              <a:rPr/>
-              <a:t> before fixing it.</a:t>
+              <a:t>Pipeline</a:t>
+            </a:r>
+          </a:p>
+          <a:p>
+            <a:pPr lvl="0"/>
+            <a:r>
+              <a:rPr/>
+              <a:t>Two leaks that look nothing like leaking</a:t>
             </a:r>
           </a:p>
         </p:txBody>
@@ -13563,6 +13814,107 @@
 </file>
 
 <file path=ppt/slides/slide51.xml><?xml version="1.0" encoding="utf-8"?>
+<p:sld xmlns:a="http://schemas.openxmlformats.org/drawingml/2006/main" xmlns:r="http://schemas.openxmlformats.org/officeDocument/2006/relationships" xmlns:p="http://schemas.openxmlformats.org/presentationml/2006/main">
+  <p:cSld>
+    <p:spTree>
+      <p:nvGrpSpPr>
+        <p:cNvPr id="1" name=""/>
+        <p:cNvGrpSpPr/>
+        <p:nvPr/>
+      </p:nvGrpSpPr>
+      <p:grpSpPr>
+        <a:xfrm>
+          <a:off x="0" y="0"/>
+          <a:ext cx="0" cy="0"/>
+          <a:chOff x="0" y="0"/>
+          <a:chExt cx="0" cy="0"/>
+        </a:xfrm>
+      </p:grpSpPr>
+      <p:sp>
+        <p:nvSpPr>
+          <p:cNvPr id="2" name="Title 1"/>
+          <p:cNvSpPr>
+            <a:spLocks noGrp="1"/>
+          </p:cNvSpPr>
+          <p:nvPr>
+            <p:ph type="title"/>
+          </p:nvPr>
+        </p:nvSpPr>
+        <p:spPr>
+          <a:xfrm>
+            <a:off x="457200" y="205979"/>
+            <a:ext cx="8229600" cy="857250"/>
+          </a:xfrm>
+        </p:spPr>
+        <p:txBody>
+          <a:bodyPr/>
+          <a:lstStyle/>
+          <a:p>
+            <a:pPr lvl="0" indent="0" marL="0">
+              <a:buNone/>
+            </a:pPr>
+            <a:r>
+              <a:rPr/>
+              <a:t>Homework: due Friday 9 October</a:t>
+            </a:r>
+          </a:p>
+        </p:txBody>
+      </p:sp>
+      <p:sp>
+        <p:nvSpPr>
+          <p:cNvPr id="3" name="Content Placeholder 2"/>
+          <p:cNvSpPr>
+            <a:spLocks noGrp="1"/>
+          </p:cNvSpPr>
+          <p:nvPr>
+            <p:ph idx="1"/>
+          </p:nvPr>
+        </p:nvSpPr>
+        <p:spPr>
+          <a:xfrm>
+            <a:off x="457200" y="1200151"/>
+            <a:ext cx="8229600" cy="3394472"/>
+          </a:xfrm>
+        </p:spPr>
+        <p:txBody>
+          <a:bodyPr/>
+          <a:lstStyle/>
+          <a:p>
+            <a:pPr lvl="0" indent="0" marL="0">
+              <a:buNone/>
+            </a:pPr>
+            <a:r>
+              <a:rPr>
+                <a:latin typeface="Courier"/>
+              </a:rPr>
+              <a:t>Exercises/02_data_exploration_and_preparation.md</a:t>
+            </a:r>
+          </a:p>
+          <a:p>
+            <a:pPr lvl="0" indent="0" marL="0">
+              <a:buNone/>
+            </a:pPr>
+            <a:r>
+              <a:rPr/>
+              <a:t>Build the full preparation pipeline yourself, and </a:t>
+            </a:r>
+            <a:r>
+              <a:rPr b="1"/>
+              <a:t>find a leak on purpose</a:t>
+            </a:r>
+            <a:r>
+              <a:rPr/>
+              <a:t> before fixing it.</a:t>
+            </a:r>
+          </a:p>
+        </p:txBody>
+      </p:sp>
+    </p:spTree>
+  </p:cSld>
+</p:sld>
+</file>
+
+<file path=ppt/slides/slide52.xml><?xml version="1.0" encoding="utf-8"?>
 <p:sld xmlns:a="http://schemas.openxmlformats.org/drawingml/2006/main" xmlns:r="http://schemas.openxmlformats.org/officeDocument/2006/relationships" xmlns:p="http://schemas.openxmlformats.org/presentationml/2006/main">
   <p:cSld>
     <p:spTree>

--- a/Lessons/02_data_exploration_and_preparation/Slides/data_exploration_and_preparation_slides.pptx
+++ b/Lessons/02_data_exploration_and_preparation/Slides/data_exploration_and_preparation_slides.pptx
@@ -11694,8 +11694,8 @@
         </p:blipFill>
         <p:spPr bwMode="auto">
           <a:xfrm>
-            <a:off x="457202" y="3036200"/>
-            <a:ext cx="8229596" cy="614149"/>
+            <a:off x="457207" y="3056672"/>
+            <a:ext cx="8229586" cy="573205"/>
           </a:xfrm>
           <a:prstGeom prst="rect">
             <a:avLst/>

--- a/Lessons/02_data_exploration_and_preparation/Slides/data_exploration_and_preparation_slides.pptx
+++ b/Lessons/02_data_exploration_and_preparation/Slides/data_exploration_and_preparation_slides.pptx
@@ -5,7 +5,7 @@
     <p:sldMasterId id="2147483648" r:id="rId1"/>
   </p:sldMasterIdLst>
   <p:notesMasterIdLst>
-    <p:notesMasterId r:id="rId54"/>
+    <p:notesMasterId r:id="rId55"/>
   </p:notesMasterIdLst>
   <p:sldIdLst>
     <p:sldId id="256" r:id="rId2"/>
@@ -60,6 +60,7 @@
     <p:sldId id="305" r:id="rId51"/>
     <p:sldId id="306" r:id="rId52"/>
     <p:sldId id="307" r:id="rId53"/>
+    <p:sldId id="308" r:id="rId54"/>
   </p:sldIdLst>
   <p:sldSz cx="9144000" cy="5143500" type="screen16x9"/>
   <p:notesSz cx="6858000" cy="9144000"/>
@@ -671,7 +672,49 @@
             </a:pPr>
             <a:r>
               <a:rPr/>
-              <a:t>The fix that MCAR imputation does not need: add a binary column recording whether the value was missing. It lets a model use the fact of missingness - which, under MAR, is genuinely informative about tenure - even after the gap itself is filled with a number. Handout Section 3.3.</a:t>
+              <a:t>Read the curve rather than the formula. Filling gaps with a constant costs correlation, and the cost grows with the fraction filled.</a:t>
+            </a:r>
+          </a:p>
+          <a:p>
+            <a:pPr lvl="0" indent="0" marL="0">
+              <a:buNone/>
+            </a:pPr>
+          </a:p>
+          <a:p>
+            <a:pPr lvl="0" indent="0" marL="0">
+              <a:buNone/>
+            </a:pPr>
+            <a:r>
+              <a:rPr/>
+              <a:t>Point at the two markers. For age at 8% the factor is 0.96 - negligible, and this is why nobody notices. At 40% it is 0.77, which erases nearly a quarter of a real relationship.</a:t>
+            </a:r>
+          </a:p>
+          <a:p>
+            <a:pPr lvl="0" indent="0" marL="0">
+              <a:buNone/>
+            </a:pPr>
+          </a:p>
+          <a:p>
+            <a:pPr lvl="0" indent="0" marL="0">
+              <a:buNone/>
+            </a:pPr>
+            <a:r>
+              <a:rPr/>
+              <a:t>The practical rule to state: mean imputation is fine when gaps are few, and quietly destructive when they are many. Nothing warns you at which point it crossed over.</a:t>
+            </a:r>
+          </a:p>
+          <a:p>
+            <a:pPr lvl="0" indent="0" marL="0">
+              <a:buNone/>
+            </a:pPr>
+          </a:p>
+          <a:p>
+            <a:pPr lvl="0" indent="0" marL="0">
+              <a:buNone/>
+            </a:pPr>
+            <a:r>
+              <a:rPr/>
+              <a:t>The algebra is Handout Section 3.2: the correlation is multiplied by the square root of one minus the missing fraction. Write it on the board if the room wants it - the figure is what they will remember.</a:t>
             </a:r>
           </a:p>
         </p:txBody>
@@ -753,35 +796,7 @@
             </a:pPr>
             <a:r>
               <a:rPr/>
-              <a:t>Four options, and the choice is a question about WHY the data is missing rather than about how much is missing.</a:t>
-            </a:r>
-          </a:p>
-          <a:p>
-            <a:pPr lvl="0" indent="0" marL="0">
-              <a:buNone/>
-            </a:pPr>
-          </a:p>
-          <a:p>
-            <a:pPr lvl="0" indent="0" marL="0">
-              <a:buNone/>
-            </a:pPr>
-            <a:r>
-              <a:rPr/>
-              <a:t>The one worth dwelling on is the fourth: adding a binary indicator keeps the MAR signal itself available to the model - the fact that long-tenure customers are more often missing a call count may be more informative than the count would have been.</a:t>
-            </a:r>
-          </a:p>
-          <a:p>
-            <a:pPr lvl="0" indent="0" marL="0">
-              <a:buNone/>
-            </a:pPr>
-          </a:p>
-          <a:p>
-            <a:pPr lvl="0" indent="0" marL="0">
-              <a:buNone/>
-            </a:pPr>
-            <a:r>
-              <a:rPr/>
-              <a:t>Then the line at the bottom: every option except dropping the column learns a statistic, so all of them belong inside the training fold. That is the thread the whole lesson pulls on.</a:t>
+              <a:t>The fix that MCAR imputation does not need: add a binary column recording whether the value was missing. It lets a model use the fact of missingness - which, under MAR, is genuinely informative about tenure - even after the gap itself is filled with a number. Handout Section 3.3.</a:t>
             </a:r>
           </a:p>
         </p:txBody>
@@ -863,35 +878,35 @@
             </a:pPr>
             <a:r>
               <a:rPr/>
-              <a:t>A decision path rather than a rule: how much is missing, does the missingness look related to anything, and what does the column cost if it goes.</a:t>
-            </a:r>
-          </a:p>
-          <a:p>
-            <a:pPr lvl="0" indent="0" marL="0">
-              <a:buNone/>
-            </a:pPr>
-          </a:p>
-          <a:p>
-            <a:pPr lvl="0" indent="0" marL="0">
-              <a:buNone/>
-            </a:pPr>
-            <a:r>
-              <a:rPr/>
-              <a:t>Point out that three of the four branches end somewhere defensible, and that the indicator branch is the one people forget. Adding a column that records that a value was missing costs nothing and keeps the signal alive when the fact of the gap is itself informative - which for anything recorded by a human it usually is.</a:t>
-            </a:r>
-          </a:p>
-          <a:p>
-            <a:pPr lvl="0" indent="0" marL="0">
-              <a:buNone/>
-            </a:pPr>
-          </a:p>
-          <a:p>
-            <a:pPr lvl="0" indent="0" marL="0">
-              <a:buNone/>
-            </a:pPr>
-            <a:r>
-              <a:rPr/>
-              <a:t>The branch worth warning about is dropping rows. It is the easiest to do and the only one that can quietly change what the sample represents.</a:t>
+              <a:t>Four options, and the choice is a question about WHY the data is missing rather than about how much is missing.</a:t>
+            </a:r>
+          </a:p>
+          <a:p>
+            <a:pPr lvl="0" indent="0" marL="0">
+              <a:buNone/>
+            </a:pPr>
+          </a:p>
+          <a:p>
+            <a:pPr lvl="0" indent="0" marL="0">
+              <a:buNone/>
+            </a:pPr>
+            <a:r>
+              <a:rPr/>
+              <a:t>The one worth dwelling on is the fourth: adding a binary indicator keeps the MAR signal itself available to the model - the fact that long-tenure customers are more often missing a call count may be more informative than the count would have been.</a:t>
+            </a:r>
+          </a:p>
+          <a:p>
+            <a:pPr lvl="0" indent="0" marL="0">
+              <a:buNone/>
+            </a:pPr>
+          </a:p>
+          <a:p>
+            <a:pPr lvl="0" indent="0" marL="0">
+              <a:buNone/>
+            </a:pPr>
+            <a:r>
+              <a:rPr/>
+              <a:t>Then the line at the bottom: every option except dropping the column learns a statistic, so all of them belong inside the training fold. That is the thread the whole lesson pulls on.</a:t>
             </a:r>
           </a:p>
         </p:txBody>
@@ -973,21 +988,35 @@
             </a:pPr>
             <a:r>
               <a:rPr/>
-              <a:t>The z-score rule. Standardise the column, then flag anything more than k standard deviations from the mean - we use k = 3 throughout.</a:t>
-            </a:r>
-          </a:p>
-          <a:p>
-            <a:pPr lvl="0" indent="0" marL="0">
-              <a:buNone/>
-            </a:pPr>
-          </a:p>
-          <a:p>
-            <a:pPr lvl="0" indent="0" marL="0">
-              <a:buNone/>
-            </a:pPr>
-            <a:r>
-              <a:rPr/>
-              <a:t>Say what it assumes, because everything in the next three slides follows from it: measuring in standard deviations only means “surprising” if the column is a bell curve. It also computes its own ruler from the data being measured, which is the crack the section prises open.</a:t>
+              <a:t>A decision path rather than a rule: how much is missing, does the missingness look related to anything, and what does the column cost if it goes.</a:t>
+            </a:r>
+          </a:p>
+          <a:p>
+            <a:pPr lvl="0" indent="0" marL="0">
+              <a:buNone/>
+            </a:pPr>
+          </a:p>
+          <a:p>
+            <a:pPr lvl="0" indent="0" marL="0">
+              <a:buNone/>
+            </a:pPr>
+            <a:r>
+              <a:rPr/>
+              <a:t>Point out that three of the four branches end somewhere defensible, and that the indicator branch is the one people forget. Adding a column that records that a value was missing costs nothing and keeps the signal alive when the fact of the gap is itself informative - which for anything recorded by a human it usually is.</a:t>
+            </a:r>
+          </a:p>
+          <a:p>
+            <a:pPr lvl="0" indent="0" marL="0">
+              <a:buNone/>
+            </a:pPr>
+          </a:p>
+          <a:p>
+            <a:pPr lvl="0" indent="0" marL="0">
+              <a:buNone/>
+            </a:pPr>
+            <a:r>
+              <a:rPr/>
+              <a:t>The branch worth warning about is dropping rows. It is the easiest to do and the only one that can quietly change what the sample represents.</a:t>
             </a:r>
           </a:p>
         </p:txBody>
@@ -1069,63 +1098,21 @@
             </a:pPr>
             <a:r>
               <a:rPr/>
-              <a:t>Tukey’s fence, built on the interquartile range (IQR) - the spread between the first and third quartiles, so the middle half of the data. Flag anything more than 1.5 interquartile ranges past the quartiles.</a:t>
-            </a:r>
-          </a:p>
-          <a:p>
-            <a:pPr lvl="0" indent="0" marL="0">
-              <a:buNone/>
-            </a:pPr>
-          </a:p>
-          <a:p>
-            <a:pPr lvl="0" indent="0" marL="0">
-              <a:buNone/>
-            </a:pPr>
-            <a:r>
-              <a:rPr/>
-              <a:t>It assumes no shape at all, and its ruler barely moves when a few points are extreme. That sounds strictly better than rule 1. Two slides from now it will be the rule making the mistakes.</a:t>
-            </a:r>
-          </a:p>
-          <a:p>
-            <a:pPr lvl="0" indent="0" marL="0">
-              <a:buNone/>
-            </a:pPr>
-          </a:p>
-          <a:p>
-            <a:pPr lvl="0" indent="0" marL="0">
-              <a:buNone/>
-            </a:pPr>
-            <a:r>
-              <a:rPr/>
-              <a:t>Now give the probabilistic reading of each, because it is what makes them more than recipes. Under normality |z| &gt; 3 flags 0.27% of a column, both tails together. And the 1.5 is not arbitrary: for a normal column the IQR is 1.349 sigma, so the fence lands at 2.698 sigma - just inside 3. Handout Section 4.1 derives it.</a:t>
-            </a:r>
-          </a:p>
-          <a:p>
-            <a:pPr lvl="0" indent="0" marL="0">
-              <a:buNone/>
-            </a:pPr>
-          </a:p>
-          <a:p>
-            <a:pPr lvl="0" indent="0" marL="0">
-              <a:buNone/>
-            </a:pPr>
-            <a:r>
-              <a:rPr/>
-              <a:t>Then put the two side by side, counting both tails each time, because this is where people quietly mislead themselves: 0.27% against 0.70%. The fences are 10% apart in position and a factor of 2.6 apart in what they flag. In 2,000 normal values that is about 5 points against about 14.</a:t>
-            </a:r>
-          </a:p>
-          <a:p>
-            <a:pPr lvl="0" indent="0" marL="0">
-              <a:buNone/>
-            </a:pPr>
-          </a:p>
-          <a:p>
-            <a:pPr lvl="0" indent="0" marL="0">
-              <a:buNone/>
-            </a:pPr>
-            <a:r>
-              <a:rPr/>
-              <a:t>The moral to state out loud: the two rules were built to sit in the same neighbourhood, not to agree, and even on perfect data Tukey’s is the readier of the two to call something an outlier. The next slide draws it.</a:t>
+              <a:t>The z-score rule. Standardise the column, then flag anything more than k standard deviations from the mean - we use k = 3 throughout.</a:t>
+            </a:r>
+          </a:p>
+          <a:p>
+            <a:pPr lvl="0" indent="0" marL="0">
+              <a:buNone/>
+            </a:pPr>
+          </a:p>
+          <a:p>
+            <a:pPr lvl="0" indent="0" marL="0">
+              <a:buNone/>
+            </a:pPr>
+            <a:r>
+              <a:rPr/>
+              <a:t>Say what it assumes, because everything in the next three slides follows from it: measuring in standard deviations only means “surprising” if the column is a bell curve. It also computes its own ruler from the data being measured, which is the crack the section prises open.</a:t>
             </a:r>
           </a:p>
         </p:txBody>
@@ -1207,49 +1194,63 @@
             </a:pPr>
             <a:r>
               <a:rPr/>
-              <a:t>Handout Section 4.1 derives the 1.5 constant from the standard normal quantile function.</a:t>
-            </a:r>
-          </a:p>
-          <a:p>
-            <a:pPr lvl="0" indent="0" marL="0">
-              <a:buNone/>
-            </a:pPr>
-          </a:p>
-          <a:p>
-            <a:pPr lvl="0" indent="0" marL="0">
-              <a:buNone/>
-            </a:pPr>
-            <a:r>
-              <a:rPr/>
-              <a:t>Work the two panels in order, because the slide is an argument and not an illustration. Left: the two fences are 0.30 sigma apart. Ask the room whether that looks like a difference worth caring about - it does not. Right: the same two rules flag 0.27% and 0.70% of a normal column, a factor of 2.6.</a:t>
-            </a:r>
-          </a:p>
-          <a:p>
-            <a:pPr lvl="0" indent="0" marL="0">
-              <a:buNone/>
-            </a:pPr>
-          </a:p>
-          <a:p>
-            <a:pPr lvl="0" indent="0" marL="0">
-              <a:buNone/>
-            </a:pPr>
-            <a:r>
-              <a:rPr/>
-              <a:t>The reason is the steepness of the tail. Move a fence in by a third of a standard deviation and you nearly triple the area beyond it. So resist saying “the two rules agree here”: they sit in the same neighbourhood, and out in the tail a neighbourhood is a factor of 2.6.</a:t>
-            </a:r>
-          </a:p>
-          <a:p>
-            <a:pPr lvl="0" indent="0" marL="0">
-              <a:buNone/>
-            </a:pPr>
-          </a:p>
-          <a:p>
-            <a:pPr lvl="0" indent="0" marL="0">
-              <a:buNone/>
-            </a:pPr>
-            <a:r>
-              <a:rPr/>
-              <a:t>Say this is a design choice with an assumption baked in, and the next slide is what happens when the assumption fails.</a:t>
+              <a:t>Tukey’s fence, built on the interquartile range (IQR) - the spread between the first and third quartiles, so the middle half of the data. Flag anything more than 1.5 interquartile ranges past the quartiles.</a:t>
+            </a:r>
+          </a:p>
+          <a:p>
+            <a:pPr lvl="0" indent="0" marL="0">
+              <a:buNone/>
+            </a:pPr>
+          </a:p>
+          <a:p>
+            <a:pPr lvl="0" indent="0" marL="0">
+              <a:buNone/>
+            </a:pPr>
+            <a:r>
+              <a:rPr/>
+              <a:t>It assumes no shape at all, and its ruler barely moves when a few points are extreme. That sounds strictly better than rule 1. Two slides from now it will be the rule making the mistakes.</a:t>
+            </a:r>
+          </a:p>
+          <a:p>
+            <a:pPr lvl="0" indent="0" marL="0">
+              <a:buNone/>
+            </a:pPr>
+          </a:p>
+          <a:p>
+            <a:pPr lvl="0" indent="0" marL="0">
+              <a:buNone/>
+            </a:pPr>
+            <a:r>
+              <a:rPr/>
+              <a:t>Now give the probabilistic reading of each, because it is what makes them more than recipes. Under normality |z| &gt; 3 flags 0.27% of a column, both tails together. And the 1.5 is not arbitrary: for a normal column the IQR is 1.349 sigma, so the fence lands at 2.698 sigma - just inside 3. Handout Section 4.1 derives it.</a:t>
+            </a:r>
+          </a:p>
+          <a:p>
+            <a:pPr lvl="0" indent="0" marL="0">
+              <a:buNone/>
+            </a:pPr>
+          </a:p>
+          <a:p>
+            <a:pPr lvl="0" indent="0" marL="0">
+              <a:buNone/>
+            </a:pPr>
+            <a:r>
+              <a:rPr/>
+              <a:t>Then put the two side by side, counting both tails each time, because this is where people quietly mislead themselves: 0.27% against 0.70%. The fences are 10% apart in position and a factor of 2.6 apart in what they flag. In 2,000 normal values that is about 5 points against about 14.</a:t>
+            </a:r>
+          </a:p>
+          <a:p>
+            <a:pPr lvl="0" indent="0" marL="0">
+              <a:buNone/>
+            </a:pPr>
+          </a:p>
+          <a:p>
+            <a:pPr lvl="0" indent="0" marL="0">
+              <a:buNone/>
+            </a:pPr>
+            <a:r>
+              <a:rPr/>
+              <a:t>The moral to state out loud: the two rules were built to sit in the same neighbourhood, not to agree, and even on perfect data Tukey’s is the readier of the two to call something an outlier. The next slide draws it.</a:t>
             </a:r>
           </a:p>
         </p:txBody>
@@ -1331,77 +1332,49 @@
             </a:pPr>
             <a:r>
               <a:rPr/>
-              <a:t>Put the counts up before the picture is read: 20 genuine billing errors in monthly_charges. The z-score rule flags 20 - all of them, nothing else. Tukey flags 32 - the same 20, plus 12 ordinary customers.</a:t>
-            </a:r>
-          </a:p>
-          <a:p>
-            <a:pPr lvl="0" indent="0" marL="0">
-              <a:buNone/>
-            </a:pPr>
-          </a:p>
-          <a:p>
-            <a:pPr lvl="0" indent="0" marL="0">
-              <a:buNone/>
-            </a:pPr>
-            <a:r>
-              <a:rPr/>
-              <a:t>Ask the room to predict which rule was damaged by the contamination, then give them the number: the billing errors inflate s from 17.2 to 171.3, dragging the z-score fence from 115 out to 593. The rule was genuinely crippled. It got every error anyway, because the smallest of them is 780 - still past the ruined fence.</a:t>
-            </a:r>
-          </a:p>
-          <a:p>
-            <a:pPr lvl="0" indent="0" marL="0">
-              <a:buNone/>
-            </a:pPr>
-          </a:p>
-          <a:p>
-            <a:pPr lvl="0" indent="0" marL="0">
-              <a:buNone/>
-            </a:pPr>
-            <a:r>
-              <a:rPr/>
-              <a:t>Meanwhile the twelve Tukey extras are real people on real tariffs: eight paying 15 to 17, four paying 112 to 128, outside fences of 17.3 and 110.</a:t>
-            </a:r>
-          </a:p>
-          <a:p>
-            <a:pPr lvl="0" indent="0" marL="0">
-              <a:buNone/>
-            </a:pPr>
-          </a:p>
-          <a:p>
-            <a:pPr lvl="0" indent="0" marL="0">
-              <a:buNone/>
-            </a:pPr>
-            <a:r>
-              <a:rPr/>
-              <a:t>The line to land, and it is the whole point of the slide: a detector’s output does not report the detector’s health. The z-score rule was right by luck. Push those errors down towards 200 and its fence sails straight past them, exactly as the theory says. So the lesson is not “prefer IQR” - it is “recompute s without the candidates and see what moved”. Handout Section 4.2.</a:t>
-            </a:r>
-          </a:p>
-          <a:p>
-            <a:pPr lvl="0" indent="0" marL="0">
-              <a:buNone/>
-            </a:pPr>
-          </a:p>
-          <a:p>
-            <a:pPr lvl="0" indent="0" marL="0">
-              <a:buNone/>
-            </a:pPr>
-            <a:r>
-              <a:rPr/>
-              <a:t>Point at the left panel’s bottom band: those scattered red dots down in the ordinary customers are the twelve.</a:t>
-            </a:r>
-          </a:p>
-          <a:p>
-            <a:pPr lvl="0" indent="0" marL="0">
-              <a:buNone/>
-            </a:pPr>
-          </a:p>
-          <a:p>
-            <a:pPr lvl="0" indent="0" marL="0">
-              <a:buNone/>
-            </a:pPr>
-            <a:r>
-              <a:rPr/>
-              <a:t>tenure_months, right panel: only 4 flagged, all at 999, and here the two rules agree exactly. Ask the room: where did the negative values go? Nobody will know yet - next slide.</a:t>
+              <a:t>Handout Section 4.1 derives the 1.5 constant from the standard normal quantile function.</a:t>
+            </a:r>
+          </a:p>
+          <a:p>
+            <a:pPr lvl="0" indent="0" marL="0">
+              <a:buNone/>
+            </a:pPr>
+          </a:p>
+          <a:p>
+            <a:pPr lvl="0" indent="0" marL="0">
+              <a:buNone/>
+            </a:pPr>
+            <a:r>
+              <a:rPr/>
+              <a:t>Work the two panels in order, because the slide is an argument and not an illustration. Left: the two fences are 0.30 sigma apart. Ask the room whether that looks like a difference worth caring about - it does not. Right: the same two rules flag 0.27% and 0.70% of a normal column, a factor of 2.6.</a:t>
+            </a:r>
+          </a:p>
+          <a:p>
+            <a:pPr lvl="0" indent="0" marL="0">
+              <a:buNone/>
+            </a:pPr>
+          </a:p>
+          <a:p>
+            <a:pPr lvl="0" indent="0" marL="0">
+              <a:buNone/>
+            </a:pPr>
+            <a:r>
+              <a:rPr/>
+              <a:t>The reason is the steepness of the tail. Move a fence in by a third of a standard deviation and you nearly triple the area beyond it. So resist saying “the two rules agree here”: they sit in the same neighbourhood, and out in the tail a neighbourhood is a factor of 2.6.</a:t>
+            </a:r>
+          </a:p>
+          <a:p>
+            <a:pPr lvl="0" indent="0" marL="0">
+              <a:buNone/>
+            </a:pPr>
+          </a:p>
+          <a:p>
+            <a:pPr lvl="0" indent="0" marL="0">
+              <a:buNone/>
+            </a:pPr>
+            <a:r>
+              <a:rPr/>
+              <a:t>Say this is a design choice with an assumption baked in, and the next slide is what happens when the assumption fails.</a:t>
             </a:r>
           </a:p>
         </p:txBody>
@@ -1483,21 +1456,77 @@
             </a:pPr>
             <a:r>
               <a:rPr/>
-              <a:t>This is the slide worth remembering over the two formulas. Statistical rules find points that are unusual relative to the rest of a column; they know nothing about domain validity. A negative tenure sits comfortably inside the IQR fence because the column’s own spread is wide enough to hide it.</a:t>
-            </a:r>
-          </a:p>
-          <a:p>
-            <a:pPr lvl="0" indent="0" marL="0">
-              <a:buNone/>
-            </a:pPr>
-          </a:p>
-          <a:p>
-            <a:pPr lvl="0" indent="0" marL="0">
-              <a:buNone/>
-            </a:pPr>
-            <a:r>
-              <a:rPr/>
-              <a:t>The fix is a domain rule: 0 &lt;= tenure_months &lt;= some sane maximum. Say plainly: a thorough pass runs both kinds of check, because they catch different mistakes, and neither substitutes for the other. Handout Section 4.2.</a:t>
+              <a:t>Put the counts up before the picture is read: 20 genuine billing errors in monthly_charges. The z-score rule flags 20 - all of them, nothing else. Tukey flags 32 - the same 20, plus 12 ordinary customers.</a:t>
+            </a:r>
+          </a:p>
+          <a:p>
+            <a:pPr lvl="0" indent="0" marL="0">
+              <a:buNone/>
+            </a:pPr>
+          </a:p>
+          <a:p>
+            <a:pPr lvl="0" indent="0" marL="0">
+              <a:buNone/>
+            </a:pPr>
+            <a:r>
+              <a:rPr/>
+              <a:t>Ask the room to predict which rule was damaged by the contamination, then give them the number: the billing errors inflate s from 17.2 to 171.3, dragging the z-score fence from 115 out to 593. The rule was genuinely crippled. It got every error anyway, because the smallest of them is 780 - still past the ruined fence.</a:t>
+            </a:r>
+          </a:p>
+          <a:p>
+            <a:pPr lvl="0" indent="0" marL="0">
+              <a:buNone/>
+            </a:pPr>
+          </a:p>
+          <a:p>
+            <a:pPr lvl="0" indent="0" marL="0">
+              <a:buNone/>
+            </a:pPr>
+            <a:r>
+              <a:rPr/>
+              <a:t>Meanwhile the twelve Tukey extras are real people on real tariffs: eight paying 15 to 17, four paying 112 to 128, outside fences of 17.3 and 110.</a:t>
+            </a:r>
+          </a:p>
+          <a:p>
+            <a:pPr lvl="0" indent="0" marL="0">
+              <a:buNone/>
+            </a:pPr>
+          </a:p>
+          <a:p>
+            <a:pPr lvl="0" indent="0" marL="0">
+              <a:buNone/>
+            </a:pPr>
+            <a:r>
+              <a:rPr/>
+              <a:t>The line to land, and it is the whole point of the slide: a detector’s output does not report the detector’s health. The z-score rule was right by luck. Push those errors down towards 200 and its fence sails straight past them, exactly as the theory says. So the lesson is not “prefer IQR” - it is “recompute s without the candidates and see what moved”. Handout Section 4.2.</a:t>
+            </a:r>
+          </a:p>
+          <a:p>
+            <a:pPr lvl="0" indent="0" marL="0">
+              <a:buNone/>
+            </a:pPr>
+          </a:p>
+          <a:p>
+            <a:pPr lvl="0" indent="0" marL="0">
+              <a:buNone/>
+            </a:pPr>
+            <a:r>
+              <a:rPr/>
+              <a:t>Point at the left panel’s bottom band: those scattered red dots down in the ordinary customers are the twelve.</a:t>
+            </a:r>
+          </a:p>
+          <a:p>
+            <a:pPr lvl="0" indent="0" marL="0">
+              <a:buNone/>
+            </a:pPr>
+          </a:p>
+          <a:p>
+            <a:pPr lvl="0" indent="0" marL="0">
+              <a:buNone/>
+            </a:pPr>
+            <a:r>
+              <a:rPr/>
+              <a:t>tenure_months, right panel: only 4 flagged, all at 999, and here the two rules agree exactly. Ask the room: where did the negative values go? Nobody will know yet - next slide.</a:t>
             </a:r>
           </a:p>
         </p:txBody>
@@ -1579,35 +1608,21 @@
             </a:pPr>
             <a:r>
               <a:rPr/>
-              <a:t>A long-tenure, high-paying customer is not an error; a tenure of 999 months is. Say plainly that a statistical rule cannot make this call - it only nominates candidates, and the decision is a domain decision.</a:t>
-            </a:r>
-          </a:p>
-          <a:p>
-            <a:pPr lvl="0" indent="0" marL="0">
-              <a:buNone/>
-            </a:pPr>
-          </a:p>
-          <a:p>
-            <a:pPr lvl="0" indent="0" marL="0">
-              <a:buNone/>
-            </a:pPr>
-            <a:r>
-              <a:rPr/>
-              <a:t>Walk the four options and note that each is a different claim about the world. Capping says “the value is real but the scale is misleading”. Removing says “this row is not from the population I am modelling”. Correcting says “I know what it should have been”. Leaving it says “the model should handle this”.</a:t>
-            </a:r>
-          </a:p>
-          <a:p>
-            <a:pPr lvl="0" indent="0" marL="0">
-              <a:buNone/>
-            </a:pPr>
-          </a:p>
-          <a:p>
-            <a:pPr lvl="0" indent="0" marL="0">
-              <a:buNone/>
-            </a:pPr>
-            <a:r>
-              <a:rPr/>
-              <a:t>The one that gets chosen by default, without anyone deciding, is removal - and it is the one that silently reweights the sample. Handout Section 4.2 closes on exactly this. If a rule flags 3% of your rows and you drop them all, you have changed the population your model is trained on.</a:t>
+              <a:t>This is the slide worth remembering over the two formulas. Statistical rules find points that are unusual relative to the rest of a column; they know nothing about domain validity. A negative tenure sits comfortably inside the IQR fence because the column’s own spread is wide enough to hide it.</a:t>
+            </a:r>
+          </a:p>
+          <a:p>
+            <a:pPr lvl="0" indent="0" marL="0">
+              <a:buNone/>
+            </a:pPr>
+          </a:p>
+          <a:p>
+            <a:pPr lvl="0" indent="0" marL="0">
+              <a:buNone/>
+            </a:pPr>
+            <a:r>
+              <a:rPr/>
+              <a:t>The fix is a domain rule: 0 &lt;= tenure_months &lt;= some sane maximum. Say plainly: a thorough pass runs both kinds of check, because they catch different mistakes, and neither substitutes for the other. Handout Section 4.2.</a:t>
             </a:r>
           </a:p>
         </p:txBody>
@@ -1689,35 +1704,35 @@
             </a:pPr>
             <a:r>
               <a:rPr/>
-              <a:t>Work through notebook 1 now, 22 minutes. Let them drive; walk the room rather than presenting.</a:t>
-            </a:r>
-          </a:p>
-          <a:p>
-            <a:pPr lvl="0" indent="0" marL="0">
-              <a:buNone/>
-            </a:pPr>
-          </a:p>
-          <a:p>
-            <a:pPr lvl="0" indent="0" marL="0">
-              <a:buNone/>
-            </a:pPr>
-            <a:r>
-              <a:rPr/>
-              <a:t>The domain-rule cell is worth pausing on collectively: a two-line check for negative tenure catches something no statistical rule would flag, because a negative tenure is not extreme, it is impossible. That distinction - impossible versus unusual - is the lesson of the whole section, and it lands better from their own screen than from the projector.</a:t>
-            </a:r>
-          </a:p>
-          <a:p>
-            <a:pPr lvl="0" indent="0" marL="0">
-              <a:buNone/>
-            </a:pPr>
-          </a:p>
-          <a:p>
-            <a:pPr lvl="0" indent="0" marL="0">
-              <a:buNone/>
-            </a:pPr>
-            <a:r>
-              <a:rPr/>
-              <a:t>Watch for the group that finishes early. Point them at the “try this” in the notebook: change the missing fraction and watch the correlation attenuate as the derivation predicts.</a:t>
+              <a:t>A long-tenure, high-paying customer is not an error; a tenure of 999 months is. Say plainly that a statistical rule cannot make this call - it only nominates candidates, and the decision is a domain decision.</a:t>
+            </a:r>
+          </a:p>
+          <a:p>
+            <a:pPr lvl="0" indent="0" marL="0">
+              <a:buNone/>
+            </a:pPr>
+          </a:p>
+          <a:p>
+            <a:pPr lvl="0" indent="0" marL="0">
+              <a:buNone/>
+            </a:pPr>
+            <a:r>
+              <a:rPr/>
+              <a:t>Walk the four options and note that each is a different claim about the world. Capping says “the value is real but the scale is misleading”. Removing says “this row is not from the population I am modelling”. Correcting says “I know what it should have been”. Leaving it says “the model should handle this”.</a:t>
+            </a:r>
+          </a:p>
+          <a:p>
+            <a:pPr lvl="0" indent="0" marL="0">
+              <a:buNone/>
+            </a:pPr>
+          </a:p>
+          <a:p>
+            <a:pPr lvl="0" indent="0" marL="0">
+              <a:buNone/>
+            </a:pPr>
+            <a:r>
+              <a:rPr/>
+              <a:t>The one that gets chosen by default, without anyone deciding, is removal - and it is the one that silently reweights the sample. Handout Section 4.2 closes on exactly this. If a rule flags 3% of your rows and you drop them all, you have changed the population your model is trained on.</a:t>
             </a:r>
           </a:p>
         </p:txBody>
@@ -1895,21 +1910,35 @@
             </a:pPr>
             <a:r>
               <a:rPr/>
-              <a:t>15 minutes. Back for scaling, encoding and the pipeline.</a:t>
-            </a:r>
-          </a:p>
-          <a:p>
-            <a:pPr lvl="0" indent="0" marL="0">
-              <a:buNone/>
-            </a:pPr>
-          </a:p>
-          <a:p>
-            <a:pPr lvl="0" indent="0" marL="0">
-              <a:buNone/>
-            </a:pPr>
-            <a:r>
-              <a:rPr/>
-              <a:t>Use the break to check who is stuck in the notebook - the second half assumes everyone has a working ColumnTransformer, and it is much cheaper to fix now than during the leakage section.</a:t>
+              <a:t>Work through notebook 1 now, 22 minutes. Let them drive; walk the room rather than presenting.</a:t>
+            </a:r>
+          </a:p>
+          <a:p>
+            <a:pPr lvl="0" indent="0" marL="0">
+              <a:buNone/>
+            </a:pPr>
+          </a:p>
+          <a:p>
+            <a:pPr lvl="0" indent="0" marL="0">
+              <a:buNone/>
+            </a:pPr>
+            <a:r>
+              <a:rPr/>
+              <a:t>The domain-rule cell is worth pausing on collectively: a two-line check for negative tenure catches something no statistical rule would flag, because a negative tenure is not extreme, it is impossible. That distinction - impossible versus unusual - is the lesson of the whole section, and it lands better from their own screen than from the projector.</a:t>
+            </a:r>
+          </a:p>
+          <a:p>
+            <a:pPr lvl="0" indent="0" marL="0">
+              <a:buNone/>
+            </a:pPr>
+          </a:p>
+          <a:p>
+            <a:pPr lvl="0" indent="0" marL="0">
+              <a:buNone/>
+            </a:pPr>
+            <a:r>
+              <a:rPr/>
+              <a:t>Watch for the group that finishes early. Point them at the “try this” in the notebook: change the missing fraction and watch the correlation attenuate as the derivation predicts.</a:t>
             </a:r>
           </a:p>
         </p:txBody>
@@ -1991,35 +2020,21 @@
             </a:pPr>
             <a:r>
               <a:rPr/>
-              <a:t>Set up the problem before any mathematics. Ask: if two features live on very different scales, can a single step size be right for both directions at once? Let the room reason about it first.</a:t>
-            </a:r>
-          </a:p>
-          <a:p>
-            <a:pPr lvl="0" indent="0" marL="0">
-              <a:buNone/>
-            </a:pPr>
-          </a:p>
-          <a:p>
-            <a:pPr lvl="0" indent="0" marL="0">
-              <a:buNone/>
-            </a:pPr>
-            <a:r>
-              <a:rPr/>
-              <a:t>Be honest about this dataset, because a sharp student will check: once the outliers of Section 4 are removed, these two columns have comparable spreads - the ratio of their standard deviations is about 0.8. They are not a dramatic case, which is exactly why notebook 2 builds a toy pair with a 110:1 variance ratio to make the effect unambiguous. The point is not that churn data is pathological; it is that you cannot count on it not being.</a:t>
-            </a:r>
-          </a:p>
-          <a:p>
-            <a:pPr lvl="0" indent="0" marL="0">
-              <a:buNone/>
-            </a:pPr>
-          </a:p>
-          <a:p>
-            <a:pPr lvl="0" indent="0" marL="0">
-              <a:buNone/>
-            </a:pPr>
-            <a:r>
-              <a:rPr/>
-              <a:t>The punchline, which handout Section 5.2 states: the safe step size is set by the feature with the largest spread, so progress along the smallest-spread direction is throttled by their ratio. Scaling is not cosmetic - it changes how long training takes, and sometimes whether it converges at all. The derivation is deliberately NOT here: it belongs with gradient descent itself, Lesson 3.</a:t>
+              <a:t>15 minutes. Back for scaling, encoding and the pipeline.</a:t>
+            </a:r>
+          </a:p>
+          <a:p>
+            <a:pPr lvl="0" indent="0" marL="0">
+              <a:buNone/>
+            </a:pPr>
+          </a:p>
+          <a:p>
+            <a:pPr lvl="0" indent="0" marL="0">
+              <a:buNone/>
+            </a:pPr>
+            <a:r>
+              <a:rPr/>
+              <a:t>Use the break to check who is stuck in the notebook - the second half assumes everyone has a working ColumnTransformer, and it is much cheaper to fix now than during the leakage section.</a:t>
             </a:r>
           </a:p>
         </p:txBody>
@@ -2101,63 +2116,35 @@
             </a:pPr>
             <a:r>
               <a:rPr/>
-              <a:t>Do this one entirely on the picture; there is no algebra on this slide by choice.</a:t>
-            </a:r>
-          </a:p>
-          <a:p>
-            <a:pPr lvl="0" indent="0" marL="0">
-              <a:buNone/>
-            </a:pPr>
-          </a:p>
-          <a:p>
-            <a:pPr lvl="0" indent="0" marL="0">
-              <a:buNone/>
-            </a:pPr>
-            <a:r>
-              <a:rPr/>
-              <a:t>Left: the two features have different spreads, so the cost surface is a narrow ravine - steep across, almost flat along. One step size has to serve both. Long enough to advance along the flat direction and it overshoots the steep one and bounces from wall to wall; short enough to be safe on the steep one and it crawls along the flat one.</a:t>
-            </a:r>
-          </a:p>
-          <a:p>
-            <a:pPr lvl="0" indent="0" marL="0">
-              <a:buNone/>
-            </a:pPr>
-          </a:p>
-          <a:p>
-            <a:pPr lvl="0" indent="0" marL="0">
-              <a:buNone/>
-            </a:pPr>
-            <a:r>
-              <a:rPr/>
-              <a:t>Right: after scaling, the ravine is a bowl and every step points at the minimum.</a:t>
-            </a:r>
-          </a:p>
-          <a:p>
-            <a:pPr lvl="0" indent="0" marL="0">
-              <a:buNone/>
-            </a:pPr>
-          </a:p>
-          <a:p>
-            <a:pPr lvl="0" indent="0" marL="0">
-              <a:buNone/>
-            </a:pPr>
-            <a:r>
-              <a:rPr/>
-              <a:t>Give them the handle without the derivation: how stretched the ravine is - the ratio of the largest feature variance to the smallest - is called the condition number, and the number of steps you need grows with it.</a:t>
-            </a:r>
-          </a:p>
-          <a:p>
-            <a:pPr lvl="0" indent="0" marL="0">
-              <a:buNone/>
-            </a:pPr>
-          </a:p>
-          <a:p>
-            <a:pPr lvl="0" indent="0" marL="0">
-              <a:buNone/>
-            </a:pPr>
-            <a:r>
-              <a:rPr/>
-              <a:t>If someone asks WHY the surface has that shape, that is the right question and the honest answer is “Lesson 3, where we derive gradient descent” - its Section 4.4 puts the number on it: standardising the housing design matrix takes the condition number from 285 to 3.4.</a:t>
+              <a:t>Set up the problem before any mathematics. Ask: if two features live on very different scales, can a single step size be right for both directions at once? Let the room reason about it first.</a:t>
+            </a:r>
+          </a:p>
+          <a:p>
+            <a:pPr lvl="0" indent="0" marL="0">
+              <a:buNone/>
+            </a:pPr>
+          </a:p>
+          <a:p>
+            <a:pPr lvl="0" indent="0" marL="0">
+              <a:buNone/>
+            </a:pPr>
+            <a:r>
+              <a:rPr/>
+              <a:t>Be honest about this dataset, because a sharp student will check: once the outliers of Section 4 are removed, these two columns have comparable spreads - the ratio of their standard deviations is about 0.8. They are not a dramatic case, which is exactly why notebook 2 builds a toy pair with a 110:1 variance ratio to make the effect unambiguous. The point is not that churn data is pathological; it is that you cannot count on it not being.</a:t>
+            </a:r>
+          </a:p>
+          <a:p>
+            <a:pPr lvl="0" indent="0" marL="0">
+              <a:buNone/>
+            </a:pPr>
+          </a:p>
+          <a:p>
+            <a:pPr lvl="0" indent="0" marL="0">
+              <a:buNone/>
+            </a:pPr>
+            <a:r>
+              <a:rPr/>
+              <a:t>The punchline, which handout Section 5.2 states: the safe step size is set by the feature with the largest spread, so progress along the smallest-spread direction is throttled by their ratio. Scaling is not cosmetic - it changes how long training takes, and sometimes whether it converges at all. The derivation is deliberately NOT here: it belongs with gradient descent itself, Lesson 3.</a:t>
             </a:r>
           </a:p>
         </p:txBody>
@@ -2239,35 +2226,63 @@
             </a:pPr>
             <a:r>
               <a:rPr/>
-              <a:t>Left panel: each feature set at its OWN safe rate - standardised still gets there faster, because it tolerates a larger rate. Right panel is the sharper point: give the RAW features the rate the standardised ones handle comfortably and it does not converge slowly, it never converges at all.</a:t>
-            </a:r>
-          </a:p>
-          <a:p>
-            <a:pPr lvl="0" indent="0" marL="0">
-              <a:buNone/>
-            </a:pPr>
-          </a:p>
-          <a:p>
-            <a:pPr lvl="0" indent="0" marL="0">
-              <a:buNone/>
-            </a:pPr>
-            <a:r>
-              <a:rPr/>
-              <a:t>Be precise about the failure if anyone asks, because “diverges” is the word people reach for and it is not what this is. The loss does not climb away to infinity - it swings between 0.69 and 8.29 and stays there, bouncing off one wall of the ravine into the other. Run it for 2000 steps and it is still in the same band. Worse than slow, not better: a slow run finishes.</a:t>
-            </a:r>
-          </a:p>
-          <a:p>
-            <a:pPr lvl="0" indent="0" marL="0">
-              <a:buNone/>
-            </a:pPr>
-          </a:p>
-          <a:p>
-            <a:pPr lvl="0" indent="0" marL="0">
-              <a:buNone/>
-            </a:pPr>
-            <a:r>
-              <a:rPr/>
-              <a:t>This is a controlled toy (notebook 2), built to a 100:1 variance ratio and landing at 110 once drawn, so the effect is unambiguous. On the real churn columns, once cleaned, the two spreads are within about 20% of each other - so this toy is not exaggerating a big effect in the data, it is manufacturing a clear one to show a mechanism.</a:t>
+              <a:t>Do this one entirely on the picture; there is no algebra on this slide by choice.</a:t>
+            </a:r>
+          </a:p>
+          <a:p>
+            <a:pPr lvl="0" indent="0" marL="0">
+              <a:buNone/>
+            </a:pPr>
+          </a:p>
+          <a:p>
+            <a:pPr lvl="0" indent="0" marL="0">
+              <a:buNone/>
+            </a:pPr>
+            <a:r>
+              <a:rPr/>
+              <a:t>Left: the two features have different spreads, so the cost surface is a narrow ravine - steep across, almost flat along. One step size has to serve both. Long enough to advance along the flat direction and it overshoots the steep one and bounces from wall to wall; short enough to be safe on the steep one and it crawls along the flat one.</a:t>
+            </a:r>
+          </a:p>
+          <a:p>
+            <a:pPr lvl="0" indent="0" marL="0">
+              <a:buNone/>
+            </a:pPr>
+          </a:p>
+          <a:p>
+            <a:pPr lvl="0" indent="0" marL="0">
+              <a:buNone/>
+            </a:pPr>
+            <a:r>
+              <a:rPr/>
+              <a:t>Right: after scaling, the ravine is a bowl and every step points at the minimum.</a:t>
+            </a:r>
+          </a:p>
+          <a:p>
+            <a:pPr lvl="0" indent="0" marL="0">
+              <a:buNone/>
+            </a:pPr>
+          </a:p>
+          <a:p>
+            <a:pPr lvl="0" indent="0" marL="0">
+              <a:buNone/>
+            </a:pPr>
+            <a:r>
+              <a:rPr/>
+              <a:t>Give them the handle without the derivation: how stretched the ravine is - the ratio of the largest feature variance to the smallest - is called the condition number, and the number of steps you need grows with it.</a:t>
+            </a:r>
+          </a:p>
+          <a:p>
+            <a:pPr lvl="0" indent="0" marL="0">
+              <a:buNone/>
+            </a:pPr>
+          </a:p>
+          <a:p>
+            <a:pPr lvl="0" indent="0" marL="0">
+              <a:buNone/>
+            </a:pPr>
+            <a:r>
+              <a:rPr/>
+              <a:t>If someone asks WHY the surface has that shape, that is the right question and the honest answer is “Lesson 3, where we derive gradient descent” - its Section 4.4 puts the number on it: standardising the housing design matrix takes the condition number from 285 to 3.4.</a:t>
             </a:r>
           </a:p>
         </p:txBody>
@@ -2349,21 +2364,35 @@
             </a:pPr>
             <a:r>
               <a:rPr/>
-              <a:t>MinMaxScaler is the more outlier-sensitive of the two: one extreme billing error stretches the whole 0-1 range, compressing every ordinary customer into a sliver of it. StandardScaler is pulled too, through the mean and standard deviation, but far less dramatically.</a:t>
-            </a:r>
-          </a:p>
-          <a:p>
-            <a:pPr lvl="0" indent="0" marL="0">
-              <a:buNone/>
-            </a:pPr>
-          </a:p>
-          <a:p>
-            <a:pPr lvl="0" indent="0" marL="0">
-              <a:buNone/>
-            </a:pPr>
-            <a:r>
-              <a:rPr/>
-              <a:t>Both must be fitted on training data only - say this every time a fitted transform appears, because it is the thread the whole lesson hangs from.</a:t>
+              <a:t>Left panel: each feature set at its OWN safe rate - standardised still gets there faster, because it tolerates a larger rate. Right panel is the sharper point: give the RAW features the rate the standardised ones handle comfortably and it does not converge slowly, it never converges at all.</a:t>
+            </a:r>
+          </a:p>
+          <a:p>
+            <a:pPr lvl="0" indent="0" marL="0">
+              <a:buNone/>
+            </a:pPr>
+          </a:p>
+          <a:p>
+            <a:pPr lvl="0" indent="0" marL="0">
+              <a:buNone/>
+            </a:pPr>
+            <a:r>
+              <a:rPr/>
+              <a:t>Be precise about the failure if anyone asks, because “diverges” is the word people reach for and it is not what this is. The loss does not climb away to infinity - it swings between 0.69 and 8.29 and stays there, bouncing off one wall of the ravine into the other. Run it for 2000 steps and it is still in the same band. Worse than slow, not better: a slow run finishes.</a:t>
+            </a:r>
+          </a:p>
+          <a:p>
+            <a:pPr lvl="0" indent="0" marL="0">
+              <a:buNone/>
+            </a:pPr>
+          </a:p>
+          <a:p>
+            <a:pPr lvl="0" indent="0" marL="0">
+              <a:buNone/>
+            </a:pPr>
+            <a:r>
+              <a:rPr/>
+              <a:t>This is a controlled toy (notebook 2), built to a 100:1 variance ratio and landing at 110 once drawn, so the effect is unambiguous. On the real churn columns, once cleaned, the two spreads are within about 20% of each other - so this toy is not exaggerating a big effect in the data, it is manufacturing a clear one to show a mechanism.</a:t>
             </a:r>
           </a:p>
         </p:txBody>
@@ -2445,49 +2474,21 @@
             </a:pPr>
             <a:r>
               <a:rPr/>
-              <a:t>Read the slide as the sentence it is: one-hot encode all k categories AND fit an intercept, and this identity holds for every single row.</a:t>
-            </a:r>
-          </a:p>
-          <a:p>
-            <a:pPr lvl="0" indent="0" marL="0">
-              <a:buNone/>
-            </a:pPr>
-          </a:p>
-          <a:p>
-            <a:pPr lvl="0" indent="0" marL="0">
-              <a:buNone/>
-            </a:pPr>
-            <a:r>
-              <a:rPr/>
-              <a:t>The k dummy columns always sum to the intercept column, so they are not independent of it: the design matrix loses rank, and the normal equation has no unique solution.</a:t>
-            </a:r>
-          </a:p>
-          <a:p>
-            <a:pPr lvl="0" indent="0" marL="0">
-              <a:buNone/>
-            </a:pPr>
-          </a:p>
-          <a:p>
-            <a:pPr lvl="0" indent="0" marL="0">
-              <a:buNone/>
-            </a:pPr>
-            <a:r>
-              <a:rPr/>
-              <a:t>Stress that this is not a numerical inconvenience but an identifiability problem. There are infinitely many coefficient vectors that fit equally well, because you can add a constant to every dummy coefficient and subtract it from the intercept without changing a single prediction.</a:t>
-            </a:r>
-          </a:p>
-          <a:p>
-            <a:pPr lvl="0" indent="0" marL="0">
-              <a:buNone/>
-            </a:pPr>
-          </a:p>
-          <a:p>
-            <a:pPr lvl="0" indent="0" marL="0">
-              <a:buNone/>
-            </a:pPr>
-            <a:r>
-              <a:rPr/>
-              <a:t>Handout Section 6.1 has the proof; notebook 2 confirms it directly with matrix_rank, which is the version they will believe. The next slide shows it as arithmetic.</a:t>
+              <a:t>MinMaxScaler is the more outlier-sensitive of the two: one extreme billing error stretches the whole 0-1 range, compressing every ordinary customer into a sliver of it. StandardScaler is pulled too, through the mean and standard deviation, but far less dramatically.</a:t>
+            </a:r>
+          </a:p>
+          <a:p>
+            <a:pPr lvl="0" indent="0" marL="0">
+              <a:buNone/>
+            </a:pPr>
+          </a:p>
+          <a:p>
+            <a:pPr lvl="0" indent="0" marL="0">
+              <a:buNone/>
+            </a:pPr>
+            <a:r>
+              <a:rPr/>
+              <a:t>Both must be fitted on training data only - say this every time a fitted transform appears, because it is the thread the whole lesson hangs from.</a:t>
             </a:r>
           </a:p>
         </p:txBody>
@@ -2569,35 +2570,49 @@
             </a:pPr>
             <a:r>
               <a:rPr/>
-              <a:t>Point at the number: the rank is short by exactly one, not by an arbitrary amount. That is the signature of a single linear dependence - the sum of the dummies equalling the intercept - rather than of general collinearity.</a:t>
-            </a:r>
-          </a:p>
-          <a:p>
-            <a:pPr lvl="0" indent="0" marL="0">
-              <a:buNone/>
-            </a:pPr>
-          </a:p>
-          <a:p>
-            <a:pPr lvl="0" indent="0" marL="0">
-              <a:buNone/>
-            </a:pPr>
-            <a:r>
-              <a:rPr/>
-              <a:t>The fix is OneHotEncoder(drop=“first”). The dropped category becomes the reference level, absorbed into the intercept: no information is lost, and full rank is restored.</a:t>
-            </a:r>
-          </a:p>
-          <a:p>
-            <a:pPr lvl="0" indent="0" marL="0">
-              <a:buNone/>
-            </a:pPr>
-          </a:p>
-          <a:p>
-            <a:pPr lvl="0" indent="0" marL="0">
-              <a:buNone/>
-            </a:pPr>
-            <a:r>
-              <a:rPr/>
-              <a:t>Two caveats worth saying. Tree-based models (Lesson 7) do not need this, because they never invert a design matrix. And regularised models tolerate the rank deficiency, because the penalty term picks one solution out of the infinitely many - which is a good early illustration of what regularisation actually does, and we return to it in Lesson 3.</a:t>
+              <a:t>Read the slide as the sentence it is: one-hot encode all k categories AND fit an intercept, and this identity holds for every single row.</a:t>
+            </a:r>
+          </a:p>
+          <a:p>
+            <a:pPr lvl="0" indent="0" marL="0">
+              <a:buNone/>
+            </a:pPr>
+          </a:p>
+          <a:p>
+            <a:pPr lvl="0" indent="0" marL="0">
+              <a:buNone/>
+            </a:pPr>
+            <a:r>
+              <a:rPr/>
+              <a:t>The k dummy columns always sum to the intercept column, so they are not independent of it: the design matrix loses rank, and the normal equation has no unique solution.</a:t>
+            </a:r>
+          </a:p>
+          <a:p>
+            <a:pPr lvl="0" indent="0" marL="0">
+              <a:buNone/>
+            </a:pPr>
+          </a:p>
+          <a:p>
+            <a:pPr lvl="0" indent="0" marL="0">
+              <a:buNone/>
+            </a:pPr>
+            <a:r>
+              <a:rPr/>
+              <a:t>Stress that this is not a numerical inconvenience but an identifiability problem. There are infinitely many coefficient vectors that fit equally well, because you can add a constant to every dummy coefficient and subtract it from the intercept without changing a single prediction.</a:t>
+            </a:r>
+          </a:p>
+          <a:p>
+            <a:pPr lvl="0" indent="0" marL="0">
+              <a:buNone/>
+            </a:pPr>
+          </a:p>
+          <a:p>
+            <a:pPr lvl="0" indent="0" marL="0">
+              <a:buNone/>
+            </a:pPr>
+            <a:r>
+              <a:rPr/>
+              <a:t>Handout Section 6.1 has the proof; notebook 2 confirms it directly with matrix_rank, which is the version they will believe. The next slide shows it as arithmetic.</a:t>
             </a:r>
           </a:p>
         </p:txBody>
@@ -2679,35 +2694,35 @@
             </a:pPr>
             <a:r>
               <a:rPr/>
-              <a:t>Three encodings of one column, and each makes a different claim.</a:t>
-            </a:r>
-          </a:p>
-          <a:p>
-            <a:pPr lvl="0" indent="0" marL="0">
-              <a:buNone/>
-            </a:pPr>
-          </a:p>
-          <a:p>
-            <a:pPr lvl="0" indent="0" marL="0">
-              <a:buNone/>
-            </a:pPr>
-            <a:r>
-              <a:rPr/>
-              <a:t>Ordinal claims the categories are equally spaced on a line - fine for small/medium/large, wrong for region. One-hot claims nothing at all, which is why it is the default, and costs k columns: 493 for zip code on 2000 rows. Target claims each category is summarised by its own churn rate, which is compact and, as the next section shows, computed from the labels.</a:t>
-            </a:r>
-          </a:p>
-          <a:p>
-            <a:pPr lvl="0" indent="0" marL="0">
-              <a:buNone/>
-            </a:pPr>
-          </a:p>
-          <a:p>
-            <a:pPr lvl="0" indent="0" marL="0">
-              <a:buNone/>
-            </a:pPr>
-            <a:r>
-              <a:rPr/>
-              <a:t>The question to leave them with: which claim is true for THIS column? It is a domain question, not a technical one.</a:t>
+              <a:t>Point at the number: the rank is short by exactly one, not by an arbitrary amount. That is the signature of a single linear dependence - the sum of the dummies equalling the intercept - rather than of general collinearity.</a:t>
+            </a:r>
+          </a:p>
+          <a:p>
+            <a:pPr lvl="0" indent="0" marL="0">
+              <a:buNone/>
+            </a:pPr>
+          </a:p>
+          <a:p>
+            <a:pPr lvl="0" indent="0" marL="0">
+              <a:buNone/>
+            </a:pPr>
+            <a:r>
+              <a:rPr/>
+              <a:t>The fix is OneHotEncoder(drop=“first”). The dropped category becomes the reference level, absorbed into the intercept: no information is lost, and full rank is restored.</a:t>
+            </a:r>
+          </a:p>
+          <a:p>
+            <a:pPr lvl="0" indent="0" marL="0">
+              <a:buNone/>
+            </a:pPr>
+          </a:p>
+          <a:p>
+            <a:pPr lvl="0" indent="0" marL="0">
+              <a:buNone/>
+            </a:pPr>
+            <a:r>
+              <a:rPr/>
+              <a:t>Two caveats worth saying. Tree-based models (Lesson 7) do not need this, because they never invert a design matrix. And regularised models tolerate the rank deficiency, because the penalty term picks one solution out of the infinitely many - which is a good early illustration of what regularisation actually does, and we return to it in Lesson 3.</a:t>
             </a:r>
           </a:p>
         </p:txBody>
@@ -2789,63 +2804,35 @@
             </a:pPr>
             <a:r>
               <a:rPr/>
-              <a:t>The same column under all three schemes, and each makes a different claim about the world.</a:t>
-            </a:r>
-          </a:p>
-          <a:p>
-            <a:pPr lvl="0" indent="0" marL="0">
-              <a:buNone/>
-            </a:pPr>
-          </a:p>
-          <a:p>
-            <a:pPr lvl="0" indent="0" marL="0">
-              <a:buNone/>
-            </a:pPr>
-            <a:r>
-              <a:rPr/>
-              <a:t>Ordinal claims the categories are equally spaced along a line - fine for small/medium/large, wrong for region, and the model has no way to tell you it was the wrong claim.</a:t>
-            </a:r>
-          </a:p>
-          <a:p>
-            <a:pPr lvl="0" indent="0" marL="0">
-              <a:buNone/>
-            </a:pPr>
-          </a:p>
-          <a:p>
-            <a:pPr lvl="0" indent="0" marL="0">
-              <a:buNone/>
-            </a:pPr>
-            <a:r>
-              <a:rPr/>
-              <a:t>One-hot claims nothing at all, which is why it is the default, and pays for that neutrality in columns: 493 of them for zip code, on 2000 rows.</a:t>
-            </a:r>
-          </a:p>
-          <a:p>
-            <a:pPr lvl="0" indent="0" marL="0">
-              <a:buNone/>
-            </a:pPr>
-          </a:p>
-          <a:p>
-            <a:pPr lvl="0" indent="0" marL="0">
-              <a:buNone/>
-            </a:pPr>
-            <a:r>
-              <a:rPr/>
-              <a:t>Target claims each category is summarised by its own churn rate. Compact, effective - and computed from the labels, which is where the next section begins.</a:t>
-            </a:r>
-          </a:p>
-          <a:p>
-            <a:pPr lvl="0" indent="0" marL="0">
-              <a:buNone/>
-            </a:pPr>
-          </a:p>
-          <a:p>
-            <a:pPr lvl="0" indent="0" marL="0">
-              <a:buNone/>
-            </a:pPr>
-            <a:r>
-              <a:rPr/>
-              <a:t>The question to leave with them: which claim is true for THIS column? That is a domain question, not a technical one, and no cross-validation score will answer it.</a:t>
+              <a:t>Three encodings of one column, and each makes a different claim.</a:t>
+            </a:r>
+          </a:p>
+          <a:p>
+            <a:pPr lvl="0" indent="0" marL="0">
+              <a:buNone/>
+            </a:pPr>
+          </a:p>
+          <a:p>
+            <a:pPr lvl="0" indent="0" marL="0">
+              <a:buNone/>
+            </a:pPr>
+            <a:r>
+              <a:rPr/>
+              <a:t>Ordinal claims the categories are equally spaced on a line - fine for small/medium/large, wrong for region. One-hot claims nothing at all, which is why it is the default, and costs k columns: 493 for zip code on 2000 rows. Target claims each category is summarised by its own churn rate, which is compact and, as the next section shows, computed from the labels.</a:t>
+            </a:r>
+          </a:p>
+          <a:p>
+            <a:pPr lvl="0" indent="0" marL="0">
+              <a:buNone/>
+            </a:pPr>
+          </a:p>
+          <a:p>
+            <a:pPr lvl="0" indent="0" marL="0">
+              <a:buNone/>
+            </a:pPr>
+            <a:r>
+              <a:rPr/>
+              <a:t>The question to leave them with: which claim is true for THIS column? It is a domain question, not a technical one.</a:t>
             </a:r>
           </a:p>
         </p:txBody>
@@ -2927,35 +2914,63 @@
             </a:pPr>
             <a:r>
               <a:rPr/>
-              <a:t>Handout Section 6.3. Deliberately quick - the point is to motivate why target encoding looks attractive for high-cardinality columns, before the next section shows why it needs care.</a:t>
-            </a:r>
-          </a:p>
-          <a:p>
-            <a:pPr lvl="0" indent="0" marL="0">
-              <a:buNone/>
-            </a:pPr>
-          </a:p>
-          <a:p>
-            <a:pPr lvl="0" indent="0" marL="0">
-              <a:buNone/>
-            </a:pPr>
-            <a:r>
-              <a:rPr/>
-              <a:t>The number to dwell on: one-hot encoding zip_code produces 493 columns, almost all zero, on 2000 rows. More columns than a quarter of the sample size, for one field.</a:t>
-            </a:r>
-          </a:p>
-          <a:p>
-            <a:pPr lvl="0" indent="0" marL="0">
-              <a:buNone/>
-            </a:pPr>
-          </a:p>
-          <a:p>
-            <a:pPr lvl="0" indent="0" marL="0">
-              <a:buNone/>
-            </a:pPr>
-            <a:r>
-              <a:rPr/>
-              <a:t>Two consequences to name. Distance-based methods (Lesson 6) degrade, because in high dimensions everything becomes roughly equidistant from everything else. And every column is a parameter to estimate from the same fixed amount of data, which is the bias-variance trade-off from Lesson 1 arriving from a new direction.</a:t>
+              <a:t>The same column under all three schemes, and each makes a different claim about the world.</a:t>
+            </a:r>
+          </a:p>
+          <a:p>
+            <a:pPr lvl="0" indent="0" marL="0">
+              <a:buNone/>
+            </a:pPr>
+          </a:p>
+          <a:p>
+            <a:pPr lvl="0" indent="0" marL="0">
+              <a:buNone/>
+            </a:pPr>
+            <a:r>
+              <a:rPr/>
+              <a:t>Ordinal claims the categories are equally spaced along a line - fine for small/medium/large, wrong for region, and the model has no way to tell you it was the wrong claim.</a:t>
+            </a:r>
+          </a:p>
+          <a:p>
+            <a:pPr lvl="0" indent="0" marL="0">
+              <a:buNone/>
+            </a:pPr>
+          </a:p>
+          <a:p>
+            <a:pPr lvl="0" indent="0" marL="0">
+              <a:buNone/>
+            </a:pPr>
+            <a:r>
+              <a:rPr/>
+              <a:t>One-hot claims nothing at all, which is why it is the default, and pays for that neutrality in columns: 493 of them for zip code, on 2000 rows.</a:t>
+            </a:r>
+          </a:p>
+          <a:p>
+            <a:pPr lvl="0" indent="0" marL="0">
+              <a:buNone/>
+            </a:pPr>
+          </a:p>
+          <a:p>
+            <a:pPr lvl="0" indent="0" marL="0">
+              <a:buNone/>
+            </a:pPr>
+            <a:r>
+              <a:rPr/>
+              <a:t>Target claims each category is summarised by its own churn rate. Compact, effective - and computed from the labels, which is where the next section begins.</a:t>
+            </a:r>
+          </a:p>
+          <a:p>
+            <a:pPr lvl="0" indent="0" marL="0">
+              <a:buNone/>
+            </a:pPr>
+          </a:p>
+          <a:p>
+            <a:pPr lvl="0" indent="0" marL="0">
+              <a:buNone/>
+            </a:pPr>
+            <a:r>
+              <a:rPr/>
+              <a:t>The question to leave with them: which claim is true for THIS column? That is a domain question, not a technical one, and no cross-validation score will answer it.</a:t>
             </a:r>
           </a:p>
         </p:txBody>
@@ -3133,7 +3148,35 @@
             </a:pPr>
             <a:r>
               <a:rPr/>
-              <a:t>Point at the zip_code row/column - or its absence, since it is not even numeric yet - and say: notebook 1’s correlation check already suggests this column carries nothing. One-hot encoding it would add 493 mostly-empty columns. The natural alternative - replace each code with the average churn rate of its customers - is exactly the technique the leakage section is about. Do not resolve the tension yet; let it hang until after the break-free run into notebook 2’s pipeline section.</a:t>
+              <a:t>Handout Section 6.3. Deliberately quick - the point is to motivate why target encoding looks attractive for high-cardinality columns, before the next section shows why it needs care.</a:t>
+            </a:r>
+          </a:p>
+          <a:p>
+            <a:pPr lvl="0" indent="0" marL="0">
+              <a:buNone/>
+            </a:pPr>
+          </a:p>
+          <a:p>
+            <a:pPr lvl="0" indent="0" marL="0">
+              <a:buNone/>
+            </a:pPr>
+            <a:r>
+              <a:rPr/>
+              <a:t>The number to dwell on: one-hot encoding zip_code produces 493 columns, almost all zero, on 2000 rows. More columns than a quarter of the sample size, for one field.</a:t>
+            </a:r>
+          </a:p>
+          <a:p>
+            <a:pPr lvl="0" indent="0" marL="0">
+              <a:buNone/>
+            </a:pPr>
+          </a:p>
+          <a:p>
+            <a:pPr lvl="0" indent="0" marL="0">
+              <a:buNone/>
+            </a:pPr>
+            <a:r>
+              <a:rPr/>
+              <a:t>Two consequences to name. Distance-based methods (Lesson 6) degrade, because in high dimensions everything becomes roughly equidistant from everything else. And every column is a parameter to estimate from the same fixed amount of data, which is the bias-variance trade-off from Lesson 1 arriving from a new direction.</a:t>
             </a:r>
           </a:p>
         </p:txBody>
@@ -3215,21 +3258,7 @@
             </a:pPr>
             <a:r>
               <a:rPr/>
-              <a:t>Handout Section 8.1. Lesson 1’s unbiasedness argument never mentioned “the model” specifically - it is about f, whatever function maps raw inputs to predictions. In deployment, a fitted scaler or imputer travels WITH the model, so f includes their learned parameters too.</a:t>
-            </a:r>
-          </a:p>
-          <a:p>
-            <a:pPr lvl="0" indent="0" marL="0">
-              <a:buNone/>
-            </a:pPr>
-          </a:p>
-          <a:p>
-            <a:pPr lvl="0" indent="0" marL="0">
-              <a:buNone/>
-            </a:pPr>
-            <a:r>
-              <a:rPr/>
-              <a:t>The moment any of those parameters - a mean, a set of neighbours, a per-category average - is estimated using rows that later appear in T, f is no longer independent of T, and the equality breaks. This is the one-sentence version of everything Section 9 is about to demonstrate concretely.</a:t>
+              <a:t>Point at the zip_code row/column - or its absence, since it is not even numeric yet - and say: notebook 1’s correlation check already suggests this column carries nothing. One-hot encoding it would add 493 mostly-empty columns. The natural alternative - replace each code with the average churn rate of its customers - is exactly the technique the leakage section is about. Do not resolve the tension yet; let it hang until after the break-free run into notebook 2’s pipeline section.</a:t>
             </a:r>
           </a:p>
         </p:txBody>
@@ -3311,21 +3340,21 @@
             </a:pPr>
             <a:r>
               <a:rPr/>
-              <a:t>The structural version of the argument just stated. Different columns need different treatment; ColumnTransformer routes each group through its own sub-pipeline and concatenates the result; the outer Pipeline adds the classifier.</a:t>
-            </a:r>
-          </a:p>
-          <a:p>
-            <a:pPr lvl="0" indent="0" marL="0">
-              <a:buNone/>
-            </a:pPr>
-          </a:p>
-          <a:p>
-            <a:pPr lvl="0" indent="0" marL="0">
-              <a:buNone/>
-            </a:pPr>
-            <a:r>
-              <a:rPr/>
-              <a:t>One fit() call, on X_train, fits every imputer, the scaler, the encoder AND the classifier - in that order, on training data only, by construction. Say explicitly: this is not tidiness. It is what makes “nothing learned before the split” true even when nobody is watching, which today’s leakage section is entirely about.</a:t>
+              <a:t>Handout Section 8.1. Lesson 1’s unbiasedness argument never mentioned “the model” specifically - it is about f, whatever function maps raw inputs to predictions. In deployment, a fitted scaler or imputer travels WITH the model, so f includes their learned parameters too.</a:t>
+            </a:r>
+          </a:p>
+          <a:p>
+            <a:pPr lvl="0" indent="0" marL="0">
+              <a:buNone/>
+            </a:pPr>
+          </a:p>
+          <a:p>
+            <a:pPr lvl="0" indent="0" marL="0">
+              <a:buNone/>
+            </a:pPr>
+            <a:r>
+              <a:rPr/>
+              <a:t>The moment any of those parameters - a mean, a set of neighbours, a per-category average - is estimated using rows that later appear in T, f is no longer independent of T, and the equality breaks. This is the one-sentence version of everything Section 9 is about to demonstrate concretely.</a:t>
             </a:r>
           </a:p>
         </p:txBody>
@@ -3407,35 +3436,21 @@
             </a:pPr>
             <a:r>
               <a:rPr/>
-              <a:t>Say out loud what the five short names stand for, or someone spends the next minute working it out instead of listening: num_pipe and cat_pipe are the impute-then-transform pairs from the diagram two slides back, num_cols and cat_cols are plain lists of column names, and clf is the classifier. They are abbreviated here only to fit the slide - handout Section 8.2 prints the same block with full names, every import, and both column lists, and it runs as printed.</a:t>
-            </a:r>
-          </a:p>
-          <a:p>
-            <a:pPr lvl="0" indent="0" marL="0">
-              <a:buNone/>
-            </a:pPr>
-          </a:p>
-          <a:p>
-            <a:pPr lvl="0" indent="0" marL="0">
-              <a:buNone/>
-            </a:pPr>
-            <a:r>
-              <a:rPr/>
-              <a:t>Point out there is exactly ONE call to fit, at the very bottom, on X_train alone - everything above it declares structure, not computation.</a:t>
-            </a:r>
-          </a:p>
-          <a:p>
-            <a:pPr lvl="0" indent="0" marL="0">
-              <a:buNone/>
-            </a:pPr>
-          </a:p>
-          <a:p>
-            <a:pPr lvl="0" indent="0" marL="0">
-              <a:buNone/>
-            </a:pPr>
-            <a:r>
-              <a:rPr/>
-              <a:t>This is the code notebook 2 runs, nearly verbatim. Say that reading it should now feel unremarkable - that is the goal, structure that makes the right thing the easy thing.</a:t>
+              <a:t>The structural version of the argument just stated. Different columns need different treatment; ColumnTransformer routes each group through its own sub-pipeline and concatenates the result; the outer Pipeline adds the classifier.</a:t>
+            </a:r>
+          </a:p>
+          <a:p>
+            <a:pPr lvl="0" indent="0" marL="0">
+              <a:buNone/>
+            </a:pPr>
+          </a:p>
+          <a:p>
+            <a:pPr lvl="0" indent="0" marL="0">
+              <a:buNone/>
+            </a:pPr>
+            <a:r>
+              <a:rPr/>
+              <a:t>One fit() call, on X_train, fits every imputer, the scaler, the encoder AND the classifier - in that order, on training data only, by construction. Say explicitly: this is not tidiness. It is what makes “nothing learned before the split” true even when nobody is watching, which today’s leakage section is entirely about.</a:t>
             </a:r>
           </a:p>
         </p:txBody>
@@ -3517,35 +3532,35 @@
             </a:pPr>
             <a:r>
               <a:rPr/>
-              <a:t>Let the room answer why the accuracy gain is modest. The dataset is 80/20 imbalanced, so accuracy is dominated by the majority class - exactly as Lesson 1 warned, and the first time they meet it on data they prepared themselves.</a:t>
-            </a:r>
-          </a:p>
-          <a:p>
-            <a:pPr lvl="0" indent="0" marL="0">
-              <a:buNone/>
-            </a:pPr>
-          </a:p>
-          <a:p>
-            <a:pPr lvl="0" indent="0" marL="0">
-              <a:buNone/>
-            </a:pPr>
-            <a:r>
-              <a:rPr/>
-              <a:t>The matrix shows where the errors sit: read the bottom-left cell, the churners the model missed. The area under the receiver operating characteristic curve - AUC, which Lesson 4 builds properly - at 0.751 is unaffected by the imbalance and says there is real signal that accuracy is hiding.</a:t>
-            </a:r>
-          </a:p>
-          <a:p>
-            <a:pPr lvl="0" indent="0" marL="0">
-              <a:buNone/>
-            </a:pPr>
-          </a:p>
-          <a:p>
-            <a:pPr lvl="0" indent="0" marL="0">
-              <a:buNone/>
-            </a:pPr>
-            <a:r>
-              <a:rPr/>
-              <a:t>Had we reported only accuracy, this model would look barely better than the baseline and someone would reasonably conclude the features were useless.</a:t>
+              <a:t>Say out loud what the five short names stand for, or someone spends the next minute working it out instead of listening: num_pipe and cat_pipe are the impute-then-transform pairs from the diagram two slides back, num_cols and cat_cols are plain lists of column names, and clf is the classifier. They are abbreviated here only to fit the slide - handout Section 8.2 prints the same block with full names, every import, and both column lists, and it runs as printed.</a:t>
+            </a:r>
+          </a:p>
+          <a:p>
+            <a:pPr lvl="0" indent="0" marL="0">
+              <a:buNone/>
+            </a:pPr>
+          </a:p>
+          <a:p>
+            <a:pPr lvl="0" indent="0" marL="0">
+              <a:buNone/>
+            </a:pPr>
+            <a:r>
+              <a:rPr/>
+              <a:t>Point out there is exactly ONE call to fit, at the very bottom, on X_train alone - everything above it declares structure, not computation.</a:t>
+            </a:r>
+          </a:p>
+          <a:p>
+            <a:pPr lvl="0" indent="0" marL="0">
+              <a:buNone/>
+            </a:pPr>
+          </a:p>
+          <a:p>
+            <a:pPr lvl="0" indent="0" marL="0">
+              <a:buNone/>
+            </a:pPr>
+            <a:r>
+              <a:rPr/>
+              <a:t>This is the code notebook 2 runs, nearly verbatim. Say that reading it should now feel unremarkable - that is the goal, structure that makes the right thing the easy thing.</a:t>
             </a:r>
           </a:p>
         </p:txBody>
@@ -3627,35 +3642,35 @@
             </a:pPr>
             <a:r>
               <a:rPr/>
-              <a:t>The accuracy gain was fourteen thousandths. This is where those errors actually sit, and it explains why the gain is small.</a:t>
-            </a:r>
-          </a:p>
-          <a:p>
-            <a:pPr lvl="0" indent="0" marL="0">
-              <a:buNone/>
-            </a:pPr>
-          </a:p>
-          <a:p>
-            <a:pPr lvl="0" indent="0" marL="0">
-              <a:buNone/>
-            </a:pPr>
-            <a:r>
-              <a:rPr/>
-              <a:t>Read the bottom row: almost every customer who churned was predicted to stay. The model has learned to predict the majority class slightly more cleverly than the baseline does, and on the class the business would pay to identify it is close to useless.</a:t>
-            </a:r>
-          </a:p>
-          <a:p>
-            <a:pPr lvl="0" indent="0" marL="0">
-              <a:buNone/>
-            </a:pPr>
-          </a:p>
-          <a:p>
-            <a:pPr lvl="0" indent="0" marL="0">
-              <a:buNone/>
-            </a:pPr>
-            <a:r>
-              <a:rPr/>
-              <a:t>Then connect it back to lesson 1 and its imbalance slide. Same shape, different dataset, and it took a confusion matrix to see it in both cases. Accuracy on its own would have reported this as progress.</a:t>
+              <a:t>Let the room answer why the accuracy gain is modest. The dataset is 80/20 imbalanced, so accuracy is dominated by the majority class - exactly as Lesson 1 warned, and the first time they meet it on data they prepared themselves.</a:t>
+            </a:r>
+          </a:p>
+          <a:p>
+            <a:pPr lvl="0" indent="0" marL="0">
+              <a:buNone/>
+            </a:pPr>
+          </a:p>
+          <a:p>
+            <a:pPr lvl="0" indent="0" marL="0">
+              <a:buNone/>
+            </a:pPr>
+            <a:r>
+              <a:rPr/>
+              <a:t>The matrix shows where the errors sit: read the bottom-left cell, the churners the model missed. The area under the receiver operating characteristic curve - AUC, which Lesson 4 builds properly - at 0.751 is unaffected by the imbalance and says there is real signal that accuracy is hiding.</a:t>
+            </a:r>
+          </a:p>
+          <a:p>
+            <a:pPr lvl="0" indent="0" marL="0">
+              <a:buNone/>
+            </a:pPr>
+          </a:p>
+          <a:p>
+            <a:pPr lvl="0" indent="0" marL="0">
+              <a:buNone/>
+            </a:pPr>
+            <a:r>
+              <a:rPr/>
+              <a:t>Had we reported only accuracy, this model would look barely better than the baseline and someone would reasonably conclude the features were useless.</a:t>
             </a:r>
           </a:p>
         </p:txBody>
@@ -3737,49 +3752,35 @@
             </a:pPr>
             <a:r>
               <a:rPr/>
-              <a:t>Do not let anyone in the room call two thousandths a win, and do not call it one yourself. It is a legitimate result, not a failed experiment - the hypothesis that cost intensity matters here was reasonable, it was tested, and the data declined it. Feature engineering is a hypothesis about the domain, not a guarantee. Handout Section 7.</a:t>
-            </a:r>
-          </a:p>
-          <a:p>
-            <a:pPr lvl="0" indent="0" marL="0">
-              <a:buNone/>
-            </a:pPr>
-          </a:p>
-          <a:p>
-            <a:pPr lvl="0" indent="0" marL="0">
-              <a:buNone/>
-            </a:pPr>
-            <a:r>
-              <a:rPr/>
-              <a:t>Then plant the flag for Lesson 5: a difference this small is inside the range a different train/test split would produce on its own, so a single split cannot settle it either way. Reporting it as an improvement is the first step onto exactly the path Lesson 5 exists to close off.</a:t>
-            </a:r>
-          </a:p>
-          <a:p>
-            <a:pPr lvl="0" indent="0" marL="0">
-              <a:buNone/>
-            </a:pPr>
-          </a:p>
-          <a:p>
-            <a:pPr lvl="0" indent="0" marL="0">
-              <a:buNone/>
-            </a:pPr>
-            <a:r>
-              <a:rPr/>
-              <a:t>Explain the max and the +1 rather than skating over them, because someone will ask. tenure_months holds zeros and, before Section 4’s domain rule, a -3: divide by it raw and you get an infinity and a sign flip. That is Section 4 turning up in Section 7, and it is what feature engineering on real data actually looks like - one line of algebra, three lines of defending it against the column you have.</a:t>
-            </a:r>
-          </a:p>
-          <a:p>
-            <a:pPr lvl="0" indent="0" marL="0">
-              <a:buNone/>
-            </a:pPr>
-          </a:p>
-          <a:p>
-            <a:pPr lvl="0" indent="0" marL="0">
-              <a:buNone/>
-            </a:pPr>
-            <a:r>
-              <a:rPr/>
-              <a:t>The point to land: any engineered feature that involves a statistic LEARNED from data - bin edges from quantiles, a scaled interaction - is subject to the same rule as scaling. A pure arithmetic combination (this ratio) needs no fold-awareness; a learned one does.</a:t>
+              <a:t>The accuracy gain was fourteen thousandths. This is where those errors actually sit, and it explains why the gain is small.</a:t>
+            </a:r>
+          </a:p>
+          <a:p>
+            <a:pPr lvl="0" indent="0" marL="0">
+              <a:buNone/>
+            </a:pPr>
+          </a:p>
+          <a:p>
+            <a:pPr lvl="0" indent="0" marL="0">
+              <a:buNone/>
+            </a:pPr>
+            <a:r>
+              <a:rPr/>
+              <a:t>Read the bottom row: almost every customer who churned was predicted to stay. The model has learned to predict the majority class slightly more cleverly than the baseline does, and on the class the business would pay to identify it is close to useless.</a:t>
+            </a:r>
+          </a:p>
+          <a:p>
+            <a:pPr lvl="0" indent="0" marL="0">
+              <a:buNone/>
+            </a:pPr>
+          </a:p>
+          <a:p>
+            <a:pPr lvl="0" indent="0" marL="0">
+              <a:buNone/>
+            </a:pPr>
+            <a:r>
+              <a:rPr/>
+              <a:t>Then connect it back to lesson 1 and its imbalance slide. Same shape, different dataset, and it took a confusion matrix to see it in both cases. Accuracy on its own would have reported this as progress.</a:t>
             </a:r>
           </a:p>
         </p:txBody>
@@ -3861,35 +3862,49 @@
             </a:pPr>
             <a:r>
               <a:rPr/>
-              <a:t>22 minutes. Let them work; circulate.</a:t>
-            </a:r>
-          </a:p>
-          <a:p>
-            <a:pPr lvl="0" indent="0" marL="0">
-              <a:buNone/>
-            </a:pPr>
-          </a:p>
-          <a:p>
-            <a:pPr lvl="0" indent="0" marL="0">
-              <a:buNone/>
-            </a:pPr>
-            <a:r>
-              <a:rPr/>
-              <a:t>The gradient descent toy is worth running interactively - change the variance ratio live and watch the iteration count move, per the handout’s “try this”. It makes the condition number argument concrete in a way the derivation alone does not.</a:t>
-            </a:r>
-          </a:p>
-          <a:p>
-            <a:pPr lvl="0" indent="0" marL="0">
-              <a:buNone/>
-            </a:pPr>
-          </a:p>
-          <a:p>
-            <a:pPr lvl="0" indent="0" marL="0">
-              <a:buNone/>
-            </a:pPr>
-            <a:r>
-              <a:rPr/>
-              <a:t>If the room is moving fast, the ColumnTransformer section is where to slow down: it is the piece they will reuse in every exercise and in the project, and getting the column selectors right is fiddlier than it looks.</a:t>
+              <a:t>Do not let anyone in the room call two thousandths a win, and do not call it one yourself. It is a legitimate result, not a failed experiment - the hypothesis that cost intensity matters here was reasonable, it was tested, and the data declined it. Feature engineering is a hypothesis about the domain, not a guarantee. Handout Section 7.</a:t>
+            </a:r>
+          </a:p>
+          <a:p>
+            <a:pPr lvl="0" indent="0" marL="0">
+              <a:buNone/>
+            </a:pPr>
+          </a:p>
+          <a:p>
+            <a:pPr lvl="0" indent="0" marL="0">
+              <a:buNone/>
+            </a:pPr>
+            <a:r>
+              <a:rPr/>
+              <a:t>Then plant the flag for Lesson 5: a difference this small is inside the range a different train/test split would produce on its own, so a single split cannot settle it either way. Reporting it as an improvement is the first step onto exactly the path Lesson 5 exists to close off.</a:t>
+            </a:r>
+          </a:p>
+          <a:p>
+            <a:pPr lvl="0" indent="0" marL="0">
+              <a:buNone/>
+            </a:pPr>
+          </a:p>
+          <a:p>
+            <a:pPr lvl="0" indent="0" marL="0">
+              <a:buNone/>
+            </a:pPr>
+            <a:r>
+              <a:rPr/>
+              <a:t>Explain the max and the +1 rather than skating over them, because someone will ask. tenure_months holds zeros and, before Section 4’s domain rule, a -3: divide by it raw and you get an infinity and a sign flip. That is Section 4 turning up in Section 7, and it is what feature engineering on real data actually looks like - one line of algebra, three lines of defending it against the column you have.</a:t>
+            </a:r>
+          </a:p>
+          <a:p>
+            <a:pPr lvl="0" indent="0" marL="0">
+              <a:buNone/>
+            </a:pPr>
+          </a:p>
+          <a:p>
+            <a:pPr lvl="0" indent="0" marL="0">
+              <a:buNone/>
+            </a:pPr>
+            <a:r>
+              <a:rPr/>
+              <a:t>The point to land: any engineered feature that involves a statistic LEARNED from data - bin edges from quantiles, a scaled interaction - is subject to the same rule as scaling. A pure arithmetic combination (this ratio) needs no fold-awareness; a learned one does.</a:t>
             </a:r>
           </a:p>
         </p:txBody>
@@ -3971,7 +3986,35 @@
             </a:pPr>
             <a:r>
               <a:rPr/>
-              <a:t>Set up the closing section. Lesson 1’s leak - selecting features on the full dataset - is visible once you know to look for it: an obviously extra step. Today’s two are not. Imputing a missing value and encoding a category both read as ordinary data cleaning, not as “training a model.” They ARE training a model, in the sense Section 8.1 makes precise: any fitted parameter is part of f, and f must be independent of the test set.</a:t>
+              <a:t>22 minutes. Let them work; circulate.</a:t>
+            </a:r>
+          </a:p>
+          <a:p>
+            <a:pPr lvl="0" indent="0" marL="0">
+              <a:buNone/>
+            </a:pPr>
+          </a:p>
+          <a:p>
+            <a:pPr lvl="0" indent="0" marL="0">
+              <a:buNone/>
+            </a:pPr>
+            <a:r>
+              <a:rPr/>
+              <a:t>The gradient descent toy is worth running interactively - change the variance ratio live and watch the iteration count move, per the handout’s “try this”. It makes the condition number argument concrete in a way the derivation alone does not.</a:t>
+            </a:r>
+          </a:p>
+          <a:p>
+            <a:pPr lvl="0" indent="0" marL="0">
+              <a:buNone/>
+            </a:pPr>
+          </a:p>
+          <a:p>
+            <a:pPr lvl="0" indent="0" marL="0">
+              <a:buNone/>
+            </a:pPr>
+            <a:r>
+              <a:rPr/>
+              <a:t>If the room is moving fast, the ColumnTransformer section is where to slow down: it is the piece they will reuse in every exercise and in the project, and getting the column selectors right is fiddlier than it looks.</a:t>
             </a:r>
           </a:p>
         </p:txBody>
@@ -4053,35 +4096,7 @@
             </a:pPr>
             <a:r>
               <a:rPr/>
-              <a:t>Walk the mechanism before the number. KNNImputer fills a gap using other rows’ values: it finds the nearest neighbours in feature space and averages them. “Nearest in the whole dataset” includes test rows, if it was fitted before the split existed.</a:t>
-            </a:r>
-          </a:p>
-          <a:p>
-            <a:pPr lvl="0" indent="0" marL="0">
-              <a:buNone/>
-            </a:pPr>
-          </a:p>
-          <a:p>
-            <a:pPr lvl="0" indent="0" marL="0">
-              <a:buNone/>
-            </a:pPr>
-            <a:r>
-              <a:rPr/>
-              <a:t>So a TRAINING row’s missing age can be filled with a value read off a TEST row - the test set writing into the training data, one gap at a time. Note the imputer never touches a label; it copies feature values. That is enough: those values are what the model then fits on. The imputer did nothing wrong; it was simply shown data it should not have seen.</a:t>
-            </a:r>
-          </a:p>
-          <a:p>
-            <a:pPr lvl="0" indent="0" marL="0">
-              <a:buNone/>
-            </a:pPr>
-          </a:p>
-          <a:p>
-            <a:pPr lvl="0" indent="0" marL="0">
-              <a:buNone/>
-            </a:pPr>
-            <a:r>
-              <a:rPr/>
-              <a:t>Notebook 3 measures the gap. Connect it back to Lesson 1: this is the same independence argument, applied to a step nobody thinks of as learning. The imputer learns; therefore it belongs inside the training fold.</a:t>
+              <a:t>Set up the closing section. Lesson 1’s leak - selecting features on the full dataset - is visible once you know to look for it: an obviously extra step. Today’s two are not. Imputing a missing value and encoding a category both read as ordinary data cleaning, not as “training a model.” They ARE training a model, in the sense Section 8.1 makes precise: any fitted parameter is part of f, and f must be independent of the test set.</a:t>
             </a:r>
           </a:p>
         </p:txBody>
@@ -4273,35 +4288,35 @@
             </a:pPr>
             <a:r>
               <a:rPr/>
-              <a:t>94 of 128. Not an edge case - nearly three quarters of the imputed training rows borrowed a value from at least one row the model would later be scored on.</a:t>
-            </a:r>
-          </a:p>
-          <a:p>
-            <a:pPr lvl="0" indent="0" marL="0">
-              <a:buNone/>
-            </a:pPr>
-          </a:p>
-          <a:p>
-            <a:pPr lvl="0" indent="0" marL="0">
-              <a:buNone/>
-            </a:pPr>
-            <a:r>
-              <a:rPr/>
-              <a:t>Stress that nothing in the code looks wrong. KNNImputer did exactly what it says: found the nearest neighbours in the data it was given. The error was in what it was given, and it happened one line earlier.</a:t>
-            </a:r>
-          </a:p>
-          <a:p>
-            <a:pPr lvl="0" indent="0" marL="0">
-              <a:buNone/>
-            </a:pPr>
-          </a:p>
-          <a:p>
-            <a:pPr lvl="0" indent="0" marL="0">
-              <a:buNone/>
-            </a:pPr>
-            <a:r>
-              <a:rPr/>
-              <a:t>This is the number to put on the board if only one number from today survives.</a:t>
+              <a:t>Walk the mechanism before the number. KNNImputer fills a gap using other rows’ values: it finds the nearest neighbours in feature space and averages them. “Nearest in the whole dataset” includes test rows, if it was fitted before the split existed.</a:t>
+            </a:r>
+          </a:p>
+          <a:p>
+            <a:pPr lvl="0" indent="0" marL="0">
+              <a:buNone/>
+            </a:pPr>
+          </a:p>
+          <a:p>
+            <a:pPr lvl="0" indent="0" marL="0">
+              <a:buNone/>
+            </a:pPr>
+            <a:r>
+              <a:rPr/>
+              <a:t>So a TRAINING row’s missing age can be filled with a value read off a TEST row - the test set writing into the training data, one gap at a time. Note the imputer never touches a label; it copies feature values. That is enough: those values are what the model then fits on. The imputer did nothing wrong; it was simply shown data it should not have seen.</a:t>
+            </a:r>
+          </a:p>
+          <a:p>
+            <a:pPr lvl="0" indent="0" marL="0">
+              <a:buNone/>
+            </a:pPr>
+          </a:p>
+          <a:p>
+            <a:pPr lvl="0" indent="0" marL="0">
+              <a:buNone/>
+            </a:pPr>
+            <a:r>
+              <a:rPr/>
+              <a:t>Notebook 3 measures the gap. Connect it back to Lesson 1: this is the same independence argument, applied to a step nobody thinks of as learning. The imputer learns; therefore it belongs inside the training fold.</a:t>
             </a:r>
           </a:p>
         </p:txBody>
@@ -4383,35 +4398,35 @@
             </a:pPr>
             <a:r>
               <a:rPr/>
-              <a:t>Ninety-four of a hundred and twenty-eight, drawn so the proportion lands.</a:t>
-            </a:r>
-          </a:p>
-          <a:p>
-            <a:pPr lvl="0" indent="0" marL="0">
-              <a:buNone/>
-            </a:pPr>
-          </a:p>
-          <a:p>
-            <a:pPr lvl="0" indent="0" marL="0">
-              <a:buNone/>
-            </a:pPr>
-            <a:r>
-              <a:rPr/>
-              <a:t>Say what was actually done: the imputer was fitted before the split, so when it filled a missing age it was allowed to look at test rows to decide what to fill it with. Nearly three quarters of the affected training rows had a test row among the five donors it consulted.</a:t>
-            </a:r>
-          </a:p>
-          <a:p>
-            <a:pPr lvl="0" indent="0" marL="0">
-              <a:buNone/>
-            </a:pPr>
-          </a:p>
-          <a:p>
-            <a:pPr lvl="0" indent="0" marL="0">
-              <a:buNone/>
-            </a:pPr>
-            <a:r>
-              <a:rPr/>
-              <a:t>The sentence to leave hanging is the one from the slide before: nothing raised an error. The notebook ran, the score improved, and the improvement was the test set leaking into the training data one imputed value at a time. This is the argument for the pipeline, made in numbers.</a:t>
+              <a:t>94 of 128. Not an edge case - nearly three quarters of the imputed training rows borrowed a value from at least one row the model would later be scored on.</a:t>
+            </a:r>
+          </a:p>
+          <a:p>
+            <a:pPr lvl="0" indent="0" marL="0">
+              <a:buNone/>
+            </a:pPr>
+          </a:p>
+          <a:p>
+            <a:pPr lvl="0" indent="0" marL="0">
+              <a:buNone/>
+            </a:pPr>
+            <a:r>
+              <a:rPr/>
+              <a:t>Stress that nothing in the code looks wrong. KNNImputer did exactly what it says: found the nearest neighbours in the data it was given. The error was in what it was given, and it happened one line earlier.</a:t>
+            </a:r>
+          </a:p>
+          <a:p>
+            <a:pPr lvl="0" indent="0" marL="0">
+              <a:buNone/>
+            </a:pPr>
+          </a:p>
+          <a:p>
+            <a:pPr lvl="0" indent="0" marL="0">
+              <a:buNone/>
+            </a:pPr>
+            <a:r>
+              <a:rPr/>
+              <a:t>This is the number to put on the board if only one number from today survives.</a:t>
             </a:r>
           </a:p>
         </p:txBody>
@@ -4493,35 +4508,35 @@
             </a:pPr>
             <a:r>
               <a:rPr/>
-              <a:t>zip_code has no real relationship with churn - the data was generated that way deliberately, so any apparent signal is an artefact we can measure exactly.</a:t>
-            </a:r>
-          </a:p>
-          <a:p>
-            <a:pPr lvl="0" indent="0" marL="0">
-              <a:buNone/>
-            </a:pPr>
-          </a:p>
-          <a:p>
-            <a:pPr lvl="0" indent="0" marL="0">
-              <a:buNone/>
-            </a:pPr>
-            <a:r>
-              <a:rPr/>
-              <a:t>Target encoding replaces each zip code with the average churn rate of its own customers. Computed before the split, that average includes the test rows’ labels. The feature now contains the answer, in diluted form.</a:t>
-            </a:r>
-          </a:p>
-          <a:p>
-            <a:pPr lvl="0" indent="0" marL="0">
-              <a:buNone/>
-            </a:pPr>
-          </a:p>
-          <a:p>
-            <a:pPr lvl="0" indent="0" marL="0">
-              <a:buNone/>
-            </a:pPr>
-            <a:r>
-              <a:rPr/>
-              <a:t>This is the most dangerous leak of the three, because the resulting column looks entirely reasonable in a dataframe: a number between 0 and 1, sensibly distributed, with no trace of where it came from. Nothing about it says “this was computed from the labels”.</a:t>
+              <a:t>Ninety-four of a hundred and twenty-eight, drawn so the proportion lands.</a:t>
+            </a:r>
+          </a:p>
+          <a:p>
+            <a:pPr lvl="0" indent="0" marL="0">
+              <a:buNone/>
+            </a:pPr>
+          </a:p>
+          <a:p>
+            <a:pPr lvl="0" indent="0" marL="0">
+              <a:buNone/>
+            </a:pPr>
+            <a:r>
+              <a:rPr/>
+              <a:t>Say what was actually done: the imputer was fitted before the split, so when it filled a missing age it was allowed to look at test rows to decide what to fill it with. Nearly three quarters of the affected training rows had a test row among the five donors it consulted.</a:t>
+            </a:r>
+          </a:p>
+          <a:p>
+            <a:pPr lvl="0" indent="0" marL="0">
+              <a:buNone/>
+            </a:pPr>
+          </a:p>
+          <a:p>
+            <a:pPr lvl="0" indent="0" marL="0">
+              <a:buNone/>
+            </a:pPr>
+            <a:r>
+              <a:rPr/>
+              <a:t>The sentence to leave hanging is the one from the slide before: nothing raised an error. The notebook ran, the score improved, and the improvement was the test set leaking into the training data one imputed value at a time. This is the argument for the pipeline, made in numbers.</a:t>
             </a:r>
           </a:p>
         </p:txBody>
@@ -4603,21 +4618,35 @@
             </a:pPr>
             <a:r>
               <a:rPr/>
-              <a:t>Baseline without zip: AUC 0.751. Honest encoding (sklearn’s TargetEncoder, cross-fitted inside the pipeline): 0.751 - indistinguishable, correctly, since zip carries nothing. Leaky encoding, computed before the split: 0.891.</a:t>
-            </a:r>
-          </a:p>
-          <a:p>
-            <a:pPr lvl="0" indent="0" marL="0">
-              <a:buNone/>
-            </a:pPr>
-          </a:p>
-          <a:p>
-            <a:pPr lvl="0" indent="0" marL="0">
-              <a:buNone/>
-            </a:pPr>
-            <a:r>
-              <a:rPr/>
-              <a:t>Let that number sit. It looks like a genuinely better model. It is not one - the improvement is manufactured entirely by the mechanism on the next slide. This is Lesson 1’s 77%-on-coin-flip-labels story again, produced by two unremarkable lines of preprocessing instead of an obviously wrong one.</a:t>
+              <a:t>zip_code has no real relationship with churn - the data was generated that way deliberately, so any apparent signal is an artefact we can measure exactly.</a:t>
+            </a:r>
+          </a:p>
+          <a:p>
+            <a:pPr lvl="0" indent="0" marL="0">
+              <a:buNone/>
+            </a:pPr>
+          </a:p>
+          <a:p>
+            <a:pPr lvl="0" indent="0" marL="0">
+              <a:buNone/>
+            </a:pPr>
+            <a:r>
+              <a:rPr/>
+              <a:t>Target encoding replaces each zip code with the average churn rate of its own customers. Computed before the split, that average includes the test rows’ labels. The feature now contains the answer, in diluted form.</a:t>
+            </a:r>
+          </a:p>
+          <a:p>
+            <a:pPr lvl="0" indent="0" marL="0">
+              <a:buNone/>
+            </a:pPr>
+          </a:p>
+          <a:p>
+            <a:pPr lvl="0" indent="0" marL="0">
+              <a:buNone/>
+            </a:pPr>
+            <a:r>
+              <a:rPr/>
+              <a:t>This is the most dangerous leak of the three, because the resulting column looks entirely reasonable in a dataframe: a number between 0 and 1, sensibly distributed, with no trace of where it came from. Nothing about it says “this was computed from the labels”.</a:t>
             </a:r>
           </a:p>
         </p:txBody>
@@ -4699,49 +4728,21 @@
             </a:pPr>
             <a:r>
               <a:rPr/>
-              <a:t>Read the equation out as a sentence: the “leave-in” encoding differs from the honest leave-one-out encoding by the row’s own disagreement with its group, divided by how many people are in it.</a:t>
-            </a:r>
-          </a:p>
-          <a:p>
-            <a:pPr lvl="0" indent="0" marL="0">
-              <a:buNone/>
-            </a:pPr>
-          </a:p>
-          <a:p>
-            <a:pPr lvl="0" indent="0" marL="0">
-              <a:buNone/>
-            </a:pPr>
-            <a:r>
-              <a:rPr/>
-              <a:t>Handout Section 9.2 has the algebra. The intuition: for a zip code with a single customer, the target encoding IS that customer’s label, straight through. With two customers it is the average of two labels. Only as the group grows does the encoding become a genuine statistic rather than a copy of the answer.</a:t>
-            </a:r>
-          </a:p>
-          <a:p>
-            <a:pPr lvl="0" indent="0" marL="0">
-              <a:buNone/>
-            </a:pPr>
-          </a:p>
-          <a:p>
-            <a:pPr lvl="0" indent="0" marL="0">
-              <a:buNone/>
-            </a:pPr>
-            <a:r>
-              <a:rPr/>
-              <a:t>So the leak is worst exactly where the data is thinnest - which is also where high-cardinality columns spend most of their mass. Most zip codes here have a handful of customers.</a:t>
-            </a:r>
-          </a:p>
-          <a:p>
-            <a:pPr lvl="0" indent="0" marL="0">
-              <a:buNone/>
-            </a:pPr>
-          </a:p>
-          <a:p>
-            <a:pPr lvl="0" indent="0" marL="0">
-              <a:buNone/>
-            </a:pPr>
-            <a:r>
-              <a:rPr/>
-              <a:t>Give them the diagnostic to remember: if a feature’s usefulness comes mostly from its rarest levels, be suspicious. That is the shape of a leak, not of a signal.</a:t>
+              <a:t>Baseline without zip: AUC 0.751. Honest encoding (sklearn’s TargetEncoder, cross-fitted inside the pipeline): 0.751 - indistinguishable, correctly, since zip carries nothing. Leaky encoding, computed before the split: 0.891.</a:t>
+            </a:r>
+          </a:p>
+          <a:p>
+            <a:pPr lvl="0" indent="0" marL="0">
+              <a:buNone/>
+            </a:pPr>
+          </a:p>
+          <a:p>
+            <a:pPr lvl="0" indent="0" marL="0">
+              <a:buNone/>
+            </a:pPr>
+            <a:r>
+              <a:rPr/>
+              <a:t>Let that number sit. It looks like a genuinely better model. It is not one - the improvement is manufactured entirely by the mechanism on the next slide. This is Lesson 1’s 77%-on-coin-flip-labels story again, produced by two unremarkable lines of preprocessing instead of an obviously wrong one.</a:t>
             </a:r>
           </a:p>
         </p:txBody>
@@ -4823,21 +4824,49 @@
             </a:pPr>
             <a:r>
               <a:rPr/>
-              <a:t>Notebook 3 shows the n_c=1 case literally: zip code Z472, one customer, churn label 0, encoded value 0.000. Not correlated with the label. IS the label, relabelled as an input.</a:t>
-            </a:r>
-          </a:p>
-          <a:p>
-            <a:pPr lvl="0" indent="0" marL="0">
-              <a:buNone/>
-            </a:pPr>
-          </a:p>
-          <a:p>
-            <a:pPr lvl="0" indent="0" marL="0">
-              <a:buNone/>
-            </a:pPr>
-            <a:r>
-              <a:rPr/>
-              <a:t>Connect to Section 6.3: high cardinality means small groups means a bigger leak by exactly this formula - the curse of dimensionality and the leakage risk are the same underlying fact.</a:t>
+              <a:t>Read the equation out as a sentence: the “leave-in” encoding differs from the honest leave-one-out encoding by the row’s own disagreement with its group, divided by how many people are in it.</a:t>
+            </a:r>
+          </a:p>
+          <a:p>
+            <a:pPr lvl="0" indent="0" marL="0">
+              <a:buNone/>
+            </a:pPr>
+          </a:p>
+          <a:p>
+            <a:pPr lvl="0" indent="0" marL="0">
+              <a:buNone/>
+            </a:pPr>
+            <a:r>
+              <a:rPr/>
+              <a:t>Handout Section 9.2 has the algebra. The intuition: for a zip code with a single customer, the target encoding IS that customer’s label, straight through. With two customers it is the average of two labels. Only as the group grows does the encoding become a genuine statistic rather than a copy of the answer.</a:t>
+            </a:r>
+          </a:p>
+          <a:p>
+            <a:pPr lvl="0" indent="0" marL="0">
+              <a:buNone/>
+            </a:pPr>
+          </a:p>
+          <a:p>
+            <a:pPr lvl="0" indent="0" marL="0">
+              <a:buNone/>
+            </a:pPr>
+            <a:r>
+              <a:rPr/>
+              <a:t>So the leak is worst exactly where the data is thinnest - which is also where high-cardinality columns spend most of their mass. Most zip codes here have a handful of customers.</a:t>
+            </a:r>
+          </a:p>
+          <a:p>
+            <a:pPr lvl="0" indent="0" marL="0">
+              <a:buNone/>
+            </a:pPr>
+          </a:p>
+          <a:p>
+            <a:pPr lvl="0" indent="0" marL="0">
+              <a:buNone/>
+            </a:pPr>
+            <a:r>
+              <a:rPr/>
+              <a:t>Give them the diagnostic to remember: if a feature’s usefulness comes mostly from its rarest levels, be suspicious. That is the shape of a leak, not of a signal.</a:t>
             </a:r>
           </a:p>
         </p:txBody>
@@ -4919,35 +4948,21 @@
             </a:pPr>
             <a:r>
               <a:rPr/>
-              <a:t>Smoothing pulls each group’s mean towards the global mean, weighted by group size, so a one-customer zip code barely moves from the overall rate. It reduces the leak but does not remove it.</a:t>
-            </a:r>
-          </a:p>
-          <a:p>
-            <a:pPr lvl="0" indent="0" marL="0">
-              <a:buNone/>
-            </a:pPr>
-          </a:p>
-          <a:p>
-            <a:pPr lvl="0" indent="0" marL="0">
-              <a:buNone/>
-            </a:pPr>
-            <a:r>
-              <a:rPr/>
-              <a:t>Say clearly what actually removes it: fitting the encoder inside the training fold, exactly as with every other learned step. Smoothing is a refinement on top of that, not a substitute for it.</a:t>
-            </a:r>
-          </a:p>
-          <a:p>
-            <a:pPr lvl="0" indent="0" marL="0">
-              <a:buNone/>
-            </a:pPr>
-          </a:p>
-          <a:p>
-            <a:pPr lvl="0" indent="0" marL="0">
-              <a:buNone/>
-            </a:pPr>
-            <a:r>
-              <a:rPr/>
-              <a:t>This is the third time today the same rule has appeared - imputation, scaling, encoding - and that repetition is the point of the lesson. Lesson 1 stated the rule for one case; today it turns out to be the same rule every time.</a:t>
+              <a:t>Notebook 3 shows the n_c=1 case literally: zip code Z472, one customer, churn label 0, encoded value 0.000. Not correlated with the label. IS the label, relabelled as an input.</a:t>
+            </a:r>
+          </a:p>
+          <a:p>
+            <a:pPr lvl="0" indent="0" marL="0">
+              <a:buNone/>
+            </a:pPr>
+          </a:p>
+          <a:p>
+            <a:pPr lvl="0" indent="0" marL="0">
+              <a:buNone/>
+            </a:pPr>
+            <a:r>
+              <a:rPr/>
+              <a:t>Connect to Section 6.3: high cardinality means small groups means a bigger leak by exactly this formula - the curse of dimensionality and the leakage risk are the same underlying fact.</a:t>
             </a:r>
           </a:p>
         </p:txBody>
@@ -5029,21 +5044,35 @@
             </a:pPr>
             <a:r>
               <a:rPr/>
-              <a:t>One test, not a growing list of special cases: does fitting this step compute anything from the rows it is given? If yes, it goes inside the pipeline. Handout Section 9.3.</a:t>
-            </a:r>
-          </a:p>
-          <a:p>
-            <a:pPr lvl="0" indent="0" marL="0">
-              <a:buNone/>
-            </a:pPr>
-          </a:p>
-          <a:p>
-            <a:pPr lvl="0" indent="0" marL="0">
-              <a:buNone/>
-            </a:pPr>
-            <a:r>
-              <a:rPr/>
-              <a:t>Say explicitly: Lesson 5 returns to leakage a third time, for hyperparameter tuning, where the same test applies once more.</a:t>
+              <a:t>Smoothing pulls each group’s mean towards the global mean, weighted by group size, so a one-customer zip code barely moves from the overall rate. It reduces the leak but does not remove it.</a:t>
+            </a:r>
+          </a:p>
+          <a:p>
+            <a:pPr lvl="0" indent="0" marL="0">
+              <a:buNone/>
+            </a:pPr>
+          </a:p>
+          <a:p>
+            <a:pPr lvl="0" indent="0" marL="0">
+              <a:buNone/>
+            </a:pPr>
+            <a:r>
+              <a:rPr/>
+              <a:t>Say clearly what actually removes it: fitting the encoder inside the training fold, exactly as with every other learned step. Smoothing is a refinement on top of that, not a substitute for it.</a:t>
+            </a:r>
+          </a:p>
+          <a:p>
+            <a:pPr lvl="0" indent="0" marL="0">
+              <a:buNone/>
+            </a:pPr>
+          </a:p>
+          <a:p>
+            <a:pPr lvl="0" indent="0" marL="0">
+              <a:buNone/>
+            </a:pPr>
+            <a:r>
+              <a:rPr/>
+              <a:t>This is the third time today the same rule has appeared - imputation, scaling, encoding - and that repetition is the point of the lesson. Lesson 1 stated the rule for one case; today it turns out to be the same rule every time.</a:t>
             </a:r>
           </a:p>
         </p:txBody>
@@ -5125,35 +5154,21 @@
             </a:pPr>
             <a:r>
               <a:rPr/>
-              <a:t>22 minutes. This notebook is the payoff of the lesson: the two leaks of today, each measured against an honest pipeline on the same data. The third way of breaking the rule, on the earlier diagram, was Lesson 1’s.</a:t>
-            </a:r>
-          </a:p>
-          <a:p>
-            <a:pPr lvl="0" indent="0" marL="0">
-              <a:buNone/>
-            </a:pPr>
-          </a:p>
-          <a:p>
-            <a:pPr lvl="0" indent="0" marL="0">
-              <a:buNone/>
-            </a:pPr>
-            <a:r>
-              <a:rPr/>
-              <a:t>The numbers matter less than the pattern - both leaks inflate the score, neither raises an error, and both are things a competent person does by accident. Ask them to predict the direction and rough size of each gap before running the cell.</a:t>
-            </a:r>
-          </a:p>
-          <a:p>
-            <a:pPr lvl="0" indent="0" marL="0">
-              <a:buNone/>
-            </a:pPr>
-          </a:p>
-          <a:p>
-            <a:pPr lvl="0" indent="0" marL="0">
-              <a:buNone/>
-            </a:pPr>
-            <a:r>
-              <a:rPr/>
-              <a:t>If time is short, the target encoding case is the one to keep: it is the subtlest and the one most likely to appear in their own project.</a:t>
+              <a:t>One test, not a growing list of special cases: does fitting this step compute anything from the rows it is given? If yes, it goes inside the pipeline. Handout Section 9.3.</a:t>
+            </a:r>
+          </a:p>
+          <a:p>
+            <a:pPr lvl="0" indent="0" marL="0">
+              <a:buNone/>
+            </a:pPr>
+          </a:p>
+          <a:p>
+            <a:pPr lvl="0" indent="0" marL="0">
+              <a:buNone/>
+            </a:pPr>
+            <a:r>
+              <a:rPr/>
+              <a:t>Say explicitly: Lesson 5 returns to leakage a third time, for hyperparameter tuning, where the same test applies once more.</a:t>
             </a:r>
           </a:p>
         </p:txBody>
@@ -5235,35 +5250,35 @@
             </a:pPr>
             <a:r>
               <a:rPr/>
-              <a:t>Draw the thread together explicitly. Lesson 1 said nothing is learned before the split, using feature selection as the example. Today every preprocessing step turned out to be a learning step: an imputer learns a mean or a set of neighbours, a scaler learns a mean and a standard deviation, an encoder learns a mapping from categories to numbers.</a:t>
-            </a:r>
-          </a:p>
-          <a:p>
-            <a:pPr lvl="0" indent="0" marL="0">
-              <a:buNone/>
-            </a:pPr>
-          </a:p>
-          <a:p>
-            <a:pPr lvl="0" indent="0" marL="0">
-              <a:buNone/>
-            </a:pPr>
-            <a:r>
-              <a:rPr/>
-              <a:t>So the rule did not get more complicated - it got more general. And the pipeline is not tidiness, it is the mechanism that enforces the rule structurally, which is why we now build one for everything.</a:t>
-            </a:r>
-          </a:p>
-          <a:p>
-            <a:pPr lvl="0" indent="0" marL="0">
-              <a:buNone/>
-            </a:pPr>
-          </a:p>
-          <a:p>
-            <a:pPr lvl="0" indent="0" marL="0">
-              <a:buNone/>
-            </a:pPr>
-            <a:r>
-              <a:rPr/>
-              <a:t>Preview Lesson 3 in one sentence: with the data prepared honestly, we can finally fit something and look at what the fitting actually does.</a:t>
+              <a:t>22 minutes. This notebook is the payoff of the lesson: the two leaks of today, each measured against an honest pipeline on the same data. The third way of breaking the rule, on the earlier diagram, was Lesson 1’s.</a:t>
+            </a:r>
+          </a:p>
+          <a:p>
+            <a:pPr lvl="0" indent="0" marL="0">
+              <a:buNone/>
+            </a:pPr>
+          </a:p>
+          <a:p>
+            <a:pPr lvl="0" indent="0" marL="0">
+              <a:buNone/>
+            </a:pPr>
+            <a:r>
+              <a:rPr/>
+              <a:t>The numbers matter less than the pattern - both leaks inflate the score, neither raises an error, and both are things a competent person does by accident. Ask them to predict the direction and rough size of each gap before running the cell.</a:t>
+            </a:r>
+          </a:p>
+          <a:p>
+            <a:pPr lvl="0" indent="0" marL="0">
+              <a:buNone/>
+            </a:pPr>
+          </a:p>
+          <a:p>
+            <a:pPr lvl="0" indent="0" marL="0">
+              <a:buNone/>
+            </a:pPr>
+            <a:r>
+              <a:rPr/>
+              <a:t>If time is short, the target encoding case is the one to keep: it is the subtlest and the one most likely to appear in their own project.</a:t>
             </a:r>
           </a:p>
         </p:txBody>
@@ -5345,35 +5360,21 @@
             </a:pPr>
             <a:r>
               <a:rPr/>
-              <a:t>Do not describe shapes the room cannot see. On the first two panels there is no shape to read: tenure and monthly_charges are each a single spike at the left, with the axis running out to 1000 and 3500 and nothing drawn out there.</a:t>
-            </a:r>
-          </a:p>
-          <a:p>
-            <a:pPr lvl="0" indent="0" marL="0">
-              <a:buNone/>
-            </a:pPr>
-          </a:p>
-          <a:p>
-            <a:pPr lvl="0" indent="0" marL="0">
-              <a:buNone/>
-            </a:pPr>
-            <a:r>
-              <a:rPr/>
-              <a:t>That absence IS the slide. Ask them what stretched the axis, and let someone say it: a few values so extreme that every other customer has been squashed into one bar. This is the figure that makes the next forty minutes necessary.</a:t>
-            </a:r>
-          </a:p>
-          <a:p>
-            <a:pPr lvl="0" indent="0" marL="0">
-              <a:buNone/>
-            </a:pPr>
-          </a:p>
-          <a:p>
-            <a:pPr lvl="0" indent="0" marL="0">
-              <a:buNone/>
-            </a:pPr>
-            <a:r>
-              <a:rPr/>
-              <a:t>Then point at age and num_support_calls, which are on their own honest ranges and do show a distribution - age skewed with a spike at the youngest bound, support calls a Poisson-looking count. That contrast is the argument for cleaning before looking any further, and it is why the same plot reappears after Section 4.</a:t>
+              <a:t>Read the three numbers off the slide and stop. The plot on the next slide is what makes the 999 mean something, and it needs the whole slide to be legible from the back of the room.</a:t>
+            </a:r>
+          </a:p>
+          <a:p>
+            <a:pPr lvl="0" indent="0" marL="0">
+              <a:buNone/>
+            </a:pPr>
+          </a:p>
+          <a:p>
+            <a:pPr lvl="0" indent="0" marL="0">
+              <a:buNone/>
+            </a:pPr>
+            <a:r>
+              <a:rPr/>
+              <a:t>Ask, before turning over: what will a histogram of tenure look like, if one customer in the file has 999 months?</a:t>
             </a:r>
           </a:p>
         </p:txBody>
@@ -5455,35 +5456,35 @@
             </a:pPr>
             <a:r>
               <a:rPr/>
-              <a:t>Set it explicitly. The exercise reuses churn_data.py with a different seed, so results will not match today’s numbers exactly - that is intentional, it stops copy-pasted answers from working.</a:t>
-            </a:r>
-          </a:p>
-          <a:p>
-            <a:pPr lvl="0" indent="0" marL="0">
-              <a:buNone/>
-            </a:pPr>
-          </a:p>
-          <a:p>
-            <a:pPr lvl="0" indent="0" marL="0">
-              <a:buNone/>
-            </a:pPr>
-            <a:r>
-              <a:rPr/>
-              <a:t>Remind them: as in Exercise 1, there are no marks for accuracy. Marks are for methodological correctness, and specifically here for correctly identifying which preprocessing steps needed to be inside the pipeline and demonstrating, with a number, what leaving one out would have cost.</a:t>
-            </a:r>
-          </a:p>
-          <a:p>
-            <a:pPr lvl="0" indent="0" marL="0">
-              <a:buNone/>
-            </a:pPr>
-          </a:p>
-          <a:p>
-            <a:pPr lvl="0" indent="0" marL="0">
-              <a:buNone/>
-            </a:pPr>
-            <a:r>
-              <a:rPr/>
-              <a:t>Also point them at the quiz - the reasoning-tagged questions are the closest thing to the exam they will see before the sample papers.</a:t>
+              <a:t>Draw the thread together explicitly. Lesson 1 said nothing is learned before the split, using feature selection as the example. Today every preprocessing step turned out to be a learning step: an imputer learns a mean or a set of neighbours, a scaler learns a mean and a standard deviation, an encoder learns a mapping from categories to numbers.</a:t>
+            </a:r>
+          </a:p>
+          <a:p>
+            <a:pPr lvl="0" indent="0" marL="0">
+              <a:buNone/>
+            </a:pPr>
+          </a:p>
+          <a:p>
+            <a:pPr lvl="0" indent="0" marL="0">
+              <a:buNone/>
+            </a:pPr>
+            <a:r>
+              <a:rPr/>
+              <a:t>So the rule did not get more complicated - it got more general. And the pipeline is not tidiness, it is the mechanism that enforces the rule structurally, which is why we now build one for everything.</a:t>
+            </a:r>
+          </a:p>
+          <a:p>
+            <a:pPr lvl="0" indent="0" marL="0">
+              <a:buNone/>
+            </a:pPr>
+          </a:p>
+          <a:p>
+            <a:pPr lvl="0" indent="0" marL="0">
+              <a:buNone/>
+            </a:pPr>
+            <a:r>
+              <a:rPr/>
+              <a:t>Preview Lesson 3 in one sentence: with the data prepared honestly, we can finally fit something and look at what the fitting actually does.</a:t>
             </a:r>
           </a:p>
         </p:txBody>
@@ -5565,35 +5566,35 @@
             </a:pPr>
             <a:r>
               <a:rPr/>
-              <a:t>Set the exercise explicitly and give the deadline - Friday 9 October, at the start of Lesson 3.</a:t>
-            </a:r>
-          </a:p>
-          <a:p>
-            <a:pPr lvl="0" indent="0" marL="0">
-              <a:buNone/>
-            </a:pPr>
-          </a:p>
-          <a:p>
-            <a:pPr lvl="0" indent="0" marL="0">
-              <a:buNone/>
-            </a:pPr>
-            <a:r>
-              <a:rPr/>
-              <a:t>Point out that it uses the same churn dataset, so the exploration they did today carries over, and that the marks are again on methodology: a pipeline that is correct but modest beats a better score obtained by preparing the full dataset before splitting.</a:t>
-            </a:r>
-          </a:p>
-          <a:p>
-            <a:pPr lvl="0" indent="0" marL="0">
-              <a:buNone/>
-            </a:pPr>
-          </a:p>
-          <a:p>
-            <a:pPr lvl="0" indent="0" marL="0">
-              <a:buNone/>
-            </a:pPr>
-            <a:r>
-              <a:rPr/>
-              <a:t>Remind them the Lesson 1 exercise is due today if anyone has not handed it in, and that the project topic must be confirmed by Lesson 4 - which is two weeks away, so now is the time to be reading dataset descriptions.</a:t>
+              <a:t>Set it explicitly. The exercise reuses churn_data.py with a different seed, so results will not match today’s numbers exactly - that is intentional, it stops copy-pasted answers from working.</a:t>
+            </a:r>
+          </a:p>
+          <a:p>
+            <a:pPr lvl="0" indent="0" marL="0">
+              <a:buNone/>
+            </a:pPr>
+          </a:p>
+          <a:p>
+            <a:pPr lvl="0" indent="0" marL="0">
+              <a:buNone/>
+            </a:pPr>
+            <a:r>
+              <a:rPr/>
+              <a:t>Remind them: as in Exercise 1, there are no marks for accuracy. Marks are for methodological correctness, and specifically here for correctly identifying which preprocessing steps needed to be inside the pipeline and demonstrating, with a number, what leaving one out would have cost.</a:t>
+            </a:r>
+          </a:p>
+          <a:p>
+            <a:pPr lvl="0" indent="0" marL="0">
+              <a:buNone/>
+            </a:pPr>
+          </a:p>
+          <a:p>
+            <a:pPr lvl="0" indent="0" marL="0">
+              <a:buNone/>
+            </a:pPr>
+            <a:r>
+              <a:rPr/>
+              <a:t>Also point them at the quiz - the reasoning-tagged questions are the closest thing to the exam they will see before the sample papers.</a:t>
             </a:r>
           </a:p>
         </p:txBody>
@@ -5616,6 +5617,116 @@
             <a:fld id="{18BDFEC3-8487-43E8-A154-7C12CBC1FFF2}" type="slidenum">
               <a:rPr lang="en-US"/>
               <a:t>52</a:t>
+            </a:fld>
+            <a:endParaRPr lang="en-US"/>
+          </a:p>
+        </p:txBody>
+      </p:sp>
+    </p:spTree>
+  </p:cSld>
+</p:notes>
+</file>
+
+<file path=ppt/notesSlides/notesSlide52.xml><?xml version="1.0" encoding="utf-8"?>
+<p:notes xmlns:a="http://schemas.openxmlformats.org/drawingml/2006/main" xmlns:r="http://schemas.openxmlformats.org/officeDocument/2006/relationships" xmlns:p="http://schemas.openxmlformats.org/presentationml/2006/main">
+  <p:cSld>
+    <p:spTree>
+      <p:nvGrpSpPr>
+        <p:cNvPr id="1" name=""/>
+        <p:cNvGrpSpPr/>
+        <p:nvPr/>
+      </p:nvGrpSpPr>
+      <p:grpSpPr>
+        <a:xfrm>
+          <a:off x="0" y="0"/>
+          <a:ext cx="0" cy="0"/>
+          <a:chOff x="0" y="0"/>
+          <a:chExt cx="0" cy="0"/>
+        </a:xfrm>
+      </p:grpSpPr>
+      <p:sp>
+        <p:nvSpPr>
+          <p:cNvPr id="2" name="Slide Image Placeholder 1"/>
+          <p:cNvSpPr>
+            <a:spLocks noGrp="1" noRot="1" noChangeAspect="1"/>
+          </p:cNvSpPr>
+          <p:nvPr>
+            <p:ph type="sldImg"/>
+          </p:nvPr>
+        </p:nvSpPr>
+        <p:spPr/>
+      </p:sp>
+      <p:sp>
+        <p:nvSpPr>
+          <p:cNvPr id="3" name="Notes Placeholder 2"/>
+          <p:cNvSpPr>
+            <a:spLocks noGrp="1"/>
+          </p:cNvSpPr>
+          <p:nvPr>
+            <p:ph type="body" idx="1"/>
+          </p:nvPr>
+        </p:nvSpPr>
+        <p:spPr/>
+        <p:txBody>
+          <a:bodyPr/>
+          <a:lstStyle/>
+          <a:p>
+            <a:pPr lvl="0" indent="0" marL="0">
+              <a:buNone/>
+            </a:pPr>
+            <a:r>
+              <a:rPr/>
+              <a:t>Set the exercise explicitly and give the deadline - Friday 9 October, at the start of Lesson 3.</a:t>
+            </a:r>
+          </a:p>
+          <a:p>
+            <a:pPr lvl="0" indent="0" marL="0">
+              <a:buNone/>
+            </a:pPr>
+          </a:p>
+          <a:p>
+            <a:pPr lvl="0" indent="0" marL="0">
+              <a:buNone/>
+            </a:pPr>
+            <a:r>
+              <a:rPr/>
+              <a:t>Point out that it uses the same churn dataset, so the exploration they did today carries over, and that the marks are again on methodology: a pipeline that is correct but modest beats a better score obtained by preparing the full dataset before splitting.</a:t>
+            </a:r>
+          </a:p>
+          <a:p>
+            <a:pPr lvl="0" indent="0" marL="0">
+              <a:buNone/>
+            </a:pPr>
+          </a:p>
+          <a:p>
+            <a:pPr lvl="0" indent="0" marL="0">
+              <a:buNone/>
+            </a:pPr>
+            <a:r>
+              <a:rPr/>
+              <a:t>Remind them the Lesson 1 exercise is due today if anyone has not handed it in, and that the project topic must be confirmed by Lesson 4 - which is two weeks away, so now is the time to be reading dataset descriptions.</a:t>
+            </a:r>
+          </a:p>
+        </p:txBody>
+      </p:sp>
+      <p:sp>
+        <p:nvSpPr>
+          <p:cNvPr id="4" name="Slide Number Placeholder 3"/>
+          <p:cNvSpPr>
+            <a:spLocks noGrp="1"/>
+          </p:cNvSpPr>
+          <p:nvPr>
+            <p:ph type="sldNum" sz="quarter" idx="10"/>
+          </p:nvPr>
+        </p:nvSpPr>
+        <p:spPr/>
+        <p:txBody>
+          <a:bodyPr/>
+          <a:lstStyle/>
+          <a:p>
+            <a:fld id="{18BDFEC3-8487-43E8-A154-7C12CBC1FFF2}" type="slidenum">
+              <a:rPr lang="en-US"/>
+              <a:t>53</a:t>
             </a:fld>
             <a:endParaRPr lang="en-US"/>
           </a:p>
@@ -5675,35 +5786,35 @@
             </a:pPr>
             <a:r>
               <a:rPr/>
-              <a:t>Two columns have gaps: age at 8.0% and num_support_calls at 4.8%. The count is the easy half of the question; the next three slides are the hard half - why are they missing?</a:t>
-            </a:r>
-          </a:p>
-          <a:p>
-            <a:pPr lvl="0" indent="0" marL="0">
-              <a:buNone/>
-            </a:pPr>
-          </a:p>
-          <a:p>
-            <a:pPr lvl="0" indent="0" marL="0">
-              <a:buNone/>
-            </a:pPr>
-            <a:r>
-              <a:rPr/>
-              <a:t>Make the point that this figure took one line to produce and is the first thing to run on any new dataset, before any modelling thought at all. A column that is 90% empty is a column you drop; a column that is 5% empty is a decision.</a:t>
-            </a:r>
-          </a:p>
-          <a:p>
-            <a:pPr lvl="0" indent="0" marL="0">
-              <a:buNone/>
-            </a:pPr>
-          </a:p>
-          <a:p>
-            <a:pPr lvl="0" indent="0" marL="0">
-              <a:buNone/>
-            </a:pPr>
-            <a:r>
-              <a:rPr/>
-              <a:t>Warn them about what the picture cannot show: whether the gaps are related to each other, or to the target. That is what the next slides are for, and it cannot be read off a bar chart.</a:t>
+              <a:t>Do not describe shapes the room cannot see. On the first two panels there is no shape to read: tenure and monthly_charges are each a single spike at the left, with the axis running out to 1000 and 3500 and nothing drawn out there.</a:t>
+            </a:r>
+          </a:p>
+          <a:p>
+            <a:pPr lvl="0" indent="0" marL="0">
+              <a:buNone/>
+            </a:pPr>
+          </a:p>
+          <a:p>
+            <a:pPr lvl="0" indent="0" marL="0">
+              <a:buNone/>
+            </a:pPr>
+            <a:r>
+              <a:rPr/>
+              <a:t>That absence IS the slide. Ask them what stretched the axis, and let someone say it: a few values so extreme that every other customer has been squashed into one bar. This is the figure that makes the next forty minutes necessary.</a:t>
+            </a:r>
+          </a:p>
+          <a:p>
+            <a:pPr lvl="0" indent="0" marL="0">
+              <a:buNone/>
+            </a:pPr>
+          </a:p>
+          <a:p>
+            <a:pPr lvl="0" indent="0" marL="0">
+              <a:buNone/>
+            </a:pPr>
+            <a:r>
+              <a:rPr/>
+              <a:t>Then point at age and num_support_calls, which are on their own honest ranges and do show a distribution - age skewed with a spike at the youngest bound, support calls a Poisson-looking count. That contrast is the argument for cleaning before looking any further, and it is why the same plot reappears after Section 4.</a:t>
             </a:r>
           </a:p>
         </p:txBody>
@@ -5785,49 +5896,35 @@
             </a:pPr>
             <a:r>
               <a:rPr/>
-              <a:t>Handout Section 3.1. Define each precisely, because the distinction is not academic - it determines which fix is valid.</a:t>
-            </a:r>
-          </a:p>
-          <a:p>
-            <a:pPr lvl="0" indent="0" marL="0">
-              <a:buNone/>
-            </a:pPr>
-          </a:p>
-          <a:p>
-            <a:pPr lvl="0" indent="0" marL="0">
-              <a:buNone/>
-            </a:pPr>
-            <a:r>
-              <a:rPr/>
-              <a:t>MCAR, missing completely at random: probability of missing depends on nothing. A blank field for no systematic reason.</a:t>
-            </a:r>
-          </a:p>
-          <a:p>
-            <a:pPr lvl="0" indent="0" marL="0">
-              <a:buNone/>
-            </a:pPr>
-          </a:p>
-          <a:p>
-            <a:pPr lvl="0" indent="0" marL="0">
-              <a:buNone/>
-            </a:pPr>
-            <a:r>
-              <a:rPr/>
-              <a:t>MAR, missing at random: depends on something you DO observe. Our num_support_calls is MAR against tenure - long-standing customers’ early call history predates the customer relationship management (CRM) system. Conditional on tenure, the gap carries no further information.</a:t>
-            </a:r>
-          </a:p>
-          <a:p>
-            <a:pPr lvl="0" indent="0" marL="0">
-              <a:buNone/>
-            </a:pPr>
-          </a:p>
-          <a:p>
-            <a:pPr lvl="0" indent="0" marL="0">
-              <a:buNone/>
-            </a:pPr>
-            <a:r>
-              <a:rPr/>
-              <a:t>MNAR, missing not at random: depends on the value itself, even unobserved. A customer who leaves because of a shockingly high bill and never finishes a survey. No column in the table can detect this - only knowing how the data was collected can. Say plainly: this is the dangerous one, and it does not appear in today’s dataset, which is itself worth noting - most real ones have some.</a:t>
+              <a:t>Two columns have gaps: age at 8.0% and num_support_calls at 4.8%. The count is the easy half of the question; the next three slides are the hard half - why are they missing?</a:t>
+            </a:r>
+          </a:p>
+          <a:p>
+            <a:pPr lvl="0" indent="0" marL="0">
+              <a:buNone/>
+            </a:pPr>
+          </a:p>
+          <a:p>
+            <a:pPr lvl="0" indent="0" marL="0">
+              <a:buNone/>
+            </a:pPr>
+            <a:r>
+              <a:rPr/>
+              <a:t>Make the point that this figure took one line to produce and is the first thing to run on any new dataset, before any modelling thought at all. A column that is 90% empty is a column you drop; a column that is 5% empty is a decision.</a:t>
+            </a:r>
+          </a:p>
+          <a:p>
+            <a:pPr lvl="0" indent="0" marL="0">
+              <a:buNone/>
+            </a:pPr>
+          </a:p>
+          <a:p>
+            <a:pPr lvl="0" indent="0" marL="0">
+              <a:buNone/>
+            </a:pPr>
+            <a:r>
+              <a:rPr/>
+              <a:t>Warn them about what the picture cannot show: whether the gaps are related to each other, or to the target. That is what the next slides are for, and it cannot be read off a bar chart.</a:t>
             </a:r>
           </a:p>
         </p:txBody>
@@ -5909,35 +6006,49 @@
             </a:pPr>
             <a:r>
               <a:rPr/>
-              <a:t>Bridge to the derivation. Ask: if the missingness is completely random, is mean imputation “free”? Let them guess before the next slide - most will say yes, and the reasoning is sound as far as it goes: the mean is unbiased, so filling with the mean introduces no bias in that column.</a:t>
-            </a:r>
-          </a:p>
-          <a:p>
-            <a:pPr lvl="0" indent="0" marL="0">
-              <a:buNone/>
-            </a:pPr>
-          </a:p>
-          <a:p>
-            <a:pPr lvl="0" indent="0" marL="0">
-              <a:buNone/>
-            </a:pPr>
-            <a:r>
-              <a:rPr/>
-              <a:t>The answer is no, and the reason is that a column is never used alone. Handout Section 3.2 derives it: filling p of the entries with a constant shrinks the variance to (1-p) times the original, and attenuates every correlation the column has with anything else by the square root of (1-p).</a:t>
-            </a:r>
-          </a:p>
-          <a:p>
-            <a:pPr lvl="0" indent="0" marL="0">
-              <a:buNone/>
-            </a:pPr>
-          </a:p>
-          <a:p>
-            <a:pPr lvl="0" indent="0" marL="0">
-              <a:buNone/>
-            </a:pPr>
-            <a:r>
-              <a:rPr/>
-              <a:t>Have the numbers ready. For age at p = 0.08 the factor is 0.96 - small enough to ignore. At p = 0.4 it is 0.77, which erases nearly a quarter of a genuine relationship. Tell them the practical rule that follows: mean imputation is fine when the gaps are few, and quietly destructive when they are many.</a:t>
+              <a:t>Handout Section 3.1. Define each precisely, because the distinction is not academic - it determines which fix is valid.</a:t>
+            </a:r>
+          </a:p>
+          <a:p>
+            <a:pPr lvl="0" indent="0" marL="0">
+              <a:buNone/>
+            </a:pPr>
+          </a:p>
+          <a:p>
+            <a:pPr lvl="0" indent="0" marL="0">
+              <a:buNone/>
+            </a:pPr>
+            <a:r>
+              <a:rPr/>
+              <a:t>MCAR, missing completely at random: probability of missing depends on nothing. A blank field for no systematic reason.</a:t>
+            </a:r>
+          </a:p>
+          <a:p>
+            <a:pPr lvl="0" indent="0" marL="0">
+              <a:buNone/>
+            </a:pPr>
+          </a:p>
+          <a:p>
+            <a:pPr lvl="0" indent="0" marL="0">
+              <a:buNone/>
+            </a:pPr>
+            <a:r>
+              <a:rPr/>
+              <a:t>MAR, missing at random: depends on something you DO observe. Our num_support_calls is MAR against tenure - long-standing customers’ early call history predates the customer relationship management (CRM) system. Conditional on tenure, the gap carries no further information.</a:t>
+            </a:r>
+          </a:p>
+          <a:p>
+            <a:pPr lvl="0" indent="0" marL="0">
+              <a:buNone/>
+            </a:pPr>
+          </a:p>
+          <a:p>
+            <a:pPr lvl="0" indent="0" marL="0">
+              <a:buNone/>
+            </a:pPr>
+            <a:r>
+              <a:rPr/>
+              <a:t>MNAR, missing not at random: depends on the value itself, even unobserved. A customer who leaves because of a shockingly high bill and never finishes a survey. No column in the table can detect this - only knowing how the data was collected can. Say plainly: this is the dangerous one, and it does not appear in today’s dataset, which is itself worth noting - most real ones have some.</a:t>
             </a:r>
           </a:p>
         </p:txBody>
@@ -6019,49 +6130,35 @@
             </a:pPr>
             <a:r>
               <a:rPr/>
-              <a:t>Read the curve rather than the formula. Filling gaps with a constant costs correlation, and the cost grows with the fraction filled.</a:t>
-            </a:r>
-          </a:p>
-          <a:p>
-            <a:pPr lvl="0" indent="0" marL="0">
-              <a:buNone/>
-            </a:pPr>
-          </a:p>
-          <a:p>
-            <a:pPr lvl="0" indent="0" marL="0">
-              <a:buNone/>
-            </a:pPr>
-            <a:r>
-              <a:rPr/>
-              <a:t>Point at the two markers. For age at 8% the factor is 0.96 - negligible, and this is why nobody notices. At 40% it is 0.77, which erases nearly a quarter of a real relationship.</a:t>
-            </a:r>
-          </a:p>
-          <a:p>
-            <a:pPr lvl="0" indent="0" marL="0">
-              <a:buNone/>
-            </a:pPr>
-          </a:p>
-          <a:p>
-            <a:pPr lvl="0" indent="0" marL="0">
-              <a:buNone/>
-            </a:pPr>
-            <a:r>
-              <a:rPr/>
-              <a:t>The practical rule to state: mean imputation is fine when gaps are few, and quietly destructive when they are many. Nothing warns you at which point it crossed over.</a:t>
-            </a:r>
-          </a:p>
-          <a:p>
-            <a:pPr lvl="0" indent="0" marL="0">
-              <a:buNone/>
-            </a:pPr>
-          </a:p>
-          <a:p>
-            <a:pPr lvl="0" indent="0" marL="0">
-              <a:buNone/>
-            </a:pPr>
-            <a:r>
-              <a:rPr/>
-              <a:t>The algebra is Handout Section 3.2: the correlation is multiplied by the square root of one minus the missing fraction. Write it on the board if the room wants it - the figure is what they will remember.</a:t>
+              <a:t>Bridge to the derivation. Ask: if the missingness is completely random, is mean imputation “free”? Let them guess before the next slide - most will say yes, and the reasoning is sound as far as it goes: the mean is unbiased, so filling with the mean introduces no bias in that column.</a:t>
+            </a:r>
+          </a:p>
+          <a:p>
+            <a:pPr lvl="0" indent="0" marL="0">
+              <a:buNone/>
+            </a:pPr>
+          </a:p>
+          <a:p>
+            <a:pPr lvl="0" indent="0" marL="0">
+              <a:buNone/>
+            </a:pPr>
+            <a:r>
+              <a:rPr/>
+              <a:t>The answer is no, and the reason is that a column is never used alone. Handout Section 3.2 derives it: filling p of the entries with a constant shrinks the variance to (1-p) times the original, and attenuates every correlation the column has with anything else by the square root of (1-p).</a:t>
+            </a:r>
+          </a:p>
+          <a:p>
+            <a:pPr lvl="0" indent="0" marL="0">
+              <a:buNone/>
+            </a:pPr>
+          </a:p>
+          <a:p>
+            <a:pPr lvl="0" indent="0" marL="0">
+              <a:buNone/>
+            </a:pPr>
+            <a:r>
+              <a:rPr/>
+              <a:t>Have the numbers ready. For age at p = 0.08 the factor is 0.96 - small enough to ignore. At p = 0.4 it is 0.77, which erases nearly a quarter of a genuine relationship. Tell them the practical rule that follows: mean imputation is fine when the gaps are few, and quietly destructive when they are many.</a:t>
             </a:r>
           </a:p>
         </p:txBody>
@@ -9239,6 +9336,102 @@
         </p:nvSpPr>
         <p:spPr>
           <a:xfrm>
+            <a:off x="457200" y="205979"/>
+            <a:ext cx="8229600" cy="857250"/>
+          </a:xfrm>
+        </p:spPr>
+        <p:txBody>
+          <a:bodyPr/>
+          <a:lstStyle/>
+          <a:p>
+            <a:pPr lvl="0" indent="0" marL="0">
+              <a:buNone/>
+            </a:pPr>
+            <a:r>
+              <a:rPr/>
+              <a:t>age: MCAR</a:t>
+            </a:r>
+          </a:p>
+        </p:txBody>
+      </p:sp>
+      <p:sp>
+        <p:nvSpPr>
+          <p:cNvPr id="3" name="Content Placeholder 2"/>
+          <p:cNvSpPr>
+            <a:spLocks noGrp="1"/>
+          </p:cNvSpPr>
+          <p:nvPr>
+            <p:ph idx="1"/>
+          </p:nvPr>
+        </p:nvSpPr>
+        <p:spPr>
+          <a:xfrm>
+            <a:off x="457200" y="1200151"/>
+            <a:ext cx="8229600" cy="3394472"/>
+          </a:xfrm>
+        </p:spPr>
+        <p:txBody>
+          <a:bodyPr/>
+          <a:lstStyle/>
+          <a:p>
+            <a:pPr lvl="0" indent="0" marL="0">
+              <a:buNone/>
+            </a:pPr>
+            <a:r>
+              <a:rPr/>
+              <a:t>Some customers just left it blank. Nothing systematic.</a:t>
+            </a:r>
+          </a:p>
+          <a:p>
+            <a:pPr lvl="0"/>
+            <a:r>
+              <a:rPr/>
+              <a:t>Safe to impute with a fixed statistic</a:t>
+            </a:r>
+          </a:p>
+          <a:p>
+            <a:pPr lvl="0"/>
+            <a:r>
+              <a:rPr/>
+              <a:t>The bias question is not “is this fair”: it is “what does filling it cost”</a:t>
+            </a:r>
+          </a:p>
+        </p:txBody>
+      </p:sp>
+    </p:spTree>
+  </p:cSld>
+</p:sld>
+</file>
+
+<file path=ppt/slides/slide11.xml><?xml version="1.0" encoding="utf-8"?>
+<p:sld xmlns:a="http://schemas.openxmlformats.org/drawingml/2006/main" xmlns:r="http://schemas.openxmlformats.org/officeDocument/2006/relationships" xmlns:p="http://schemas.openxmlformats.org/presentationml/2006/main">
+  <p:cSld>
+    <p:spTree>
+      <p:nvGrpSpPr>
+        <p:cNvPr id="1" name=""/>
+        <p:cNvGrpSpPr/>
+        <p:nvPr/>
+      </p:nvGrpSpPr>
+      <p:grpSpPr>
+        <a:xfrm>
+          <a:off x="0" y="0"/>
+          <a:ext cx="0" cy="0"/>
+          <a:chOff x="0" y="0"/>
+          <a:chExt cx="0" cy="0"/>
+        </a:xfrm>
+      </p:grpSpPr>
+      <p:sp>
+        <p:nvSpPr>
+          <p:cNvPr id="2" name="Title 1"/>
+          <p:cNvSpPr>
+            <a:spLocks noGrp="1"/>
+          </p:cNvSpPr>
+          <p:nvPr>
+            <p:ph type="title"/>
+          </p:nvPr>
+        </p:nvSpPr>
+        <p:spPr>
+          <a:xfrm>
             <a:off x="457200" y="205740"/>
             <a:ext cx="8229600" cy="874395"/>
           </a:xfrm>
@@ -9322,110 +9515,6 @@
 </p:sld>
 </file>
 
-<file path=ppt/slides/slide11.xml><?xml version="1.0" encoding="utf-8"?>
-<p:sld xmlns:a="http://schemas.openxmlformats.org/drawingml/2006/main" xmlns:r="http://schemas.openxmlformats.org/officeDocument/2006/relationships" xmlns:p="http://schemas.openxmlformats.org/presentationml/2006/main">
-  <p:cSld>
-    <p:spTree>
-      <p:nvGrpSpPr>
-        <p:cNvPr id="1" name=""/>
-        <p:cNvGrpSpPr/>
-        <p:nvPr/>
-      </p:nvGrpSpPr>
-      <p:grpSpPr>
-        <a:xfrm>
-          <a:off x="0" y="0"/>
-          <a:ext cx="0" cy="0"/>
-          <a:chOff x="0" y="0"/>
-          <a:chExt cx="0" cy="0"/>
-        </a:xfrm>
-      </p:grpSpPr>
-      <p:sp>
-        <p:nvSpPr>
-          <p:cNvPr id="2" name="Title 1"/>
-          <p:cNvSpPr>
-            <a:spLocks noGrp="1"/>
-          </p:cNvSpPr>
-          <p:nvPr>
-            <p:ph type="title"/>
-          </p:nvPr>
-        </p:nvSpPr>
-        <p:spPr>
-          <a:xfrm>
-            <a:off x="457200" y="205979"/>
-            <a:ext cx="8229600" cy="857250"/>
-          </a:xfrm>
-        </p:spPr>
-        <p:txBody>
-          <a:bodyPr/>
-          <a:lstStyle/>
-          <a:p>
-            <a:pPr lvl="0" indent="0" marL="0">
-              <a:buNone/>
-            </a:pPr>
-            <a:r>
-              <a:rPr/>
-              <a:t>num_support_calls: MAR</a:t>
-            </a:r>
-          </a:p>
-        </p:txBody>
-      </p:sp>
-      <p:sp>
-        <p:nvSpPr>
-          <p:cNvPr id="3" name="Content Placeholder 2"/>
-          <p:cNvSpPr>
-            <a:spLocks noGrp="1"/>
-          </p:cNvSpPr>
-          <p:nvPr>
-            <p:ph idx="1"/>
-          </p:nvPr>
-        </p:nvSpPr>
-        <p:spPr>
-          <a:xfrm>
-            <a:off x="457200" y="1200151"/>
-            <a:ext cx="8229600" cy="3394472"/>
-          </a:xfrm>
-        </p:spPr>
-        <p:txBody>
-          <a:bodyPr/>
-          <a:lstStyle/>
-          <a:p>
-            <a:pPr lvl="0" indent="0" marL="0">
-              <a:buNone/>
-            </a:pPr>
-            <a:r>
-              <a:rPr/>
-              <a:t>Missing more often for long-tenure customers, not by chance.</a:t>
-            </a:r>
-          </a:p>
-          <a:p>
-            <a:pPr lvl="0"/>
-            <a:r>
-              <a:rPr/>
-              <a:t>Treating it as MCAR reweights the sample the wrong way</a:t>
-            </a:r>
-          </a:p>
-          <a:p>
-            <a:pPr lvl="0"/>
-            <a:r>
-              <a:rPr/>
-              <a:t>A </a:t>
-            </a:r>
-            <a:r>
-              <a:rPr b="1"/>
-              <a:t>missingness indicator</a:t>
-            </a:r>
-            <a:r>
-              <a:rPr/>
-              <a:t> column preserves the signal even after filling</a:t>
-            </a:r>
-          </a:p>
-        </p:txBody>
-      </p:sp>
-    </p:spTree>
-  </p:cSld>
-</p:sld>
-</file>
-
 <file path=ppt/slides/slide12.xml><?xml version="1.0" encoding="utf-8"?>
 <p:sld xmlns:a="http://schemas.openxmlformats.org/drawingml/2006/main" xmlns:r="http://schemas.openxmlformats.org/officeDocument/2006/relationships" xmlns:p="http://schemas.openxmlformats.org/presentationml/2006/main">
   <p:cSld>
@@ -9468,7 +9557,7 @@
             </a:pPr>
             <a:r>
               <a:rPr/>
-              <a:t>What to do about a gap</a:t>
+              <a:t>num_support_calls: MAR</a:t>
             </a:r>
           </a:p>
         </p:txBody>
@@ -9493,53 +9582,34 @@
           <a:bodyPr/>
           <a:lstStyle/>
           <a:p>
+            <a:pPr lvl="0" indent="0" marL="0">
+              <a:buNone/>
+            </a:pPr>
+            <a:r>
+              <a:rPr/>
+              <a:t>Missing more often for long-tenure customers, not by chance.</a:t>
+            </a:r>
+          </a:p>
+          <a:p>
             <a:pPr lvl="0"/>
             <a:r>
+              <a:rPr/>
+              <a:t>Treating it as MCAR reweights the sample the wrong way</a:t>
+            </a:r>
+          </a:p>
+          <a:p>
+            <a:pPr lvl="0"/>
+            <a:r>
+              <a:rPr/>
+              <a:t>A </a:t>
+            </a:r>
+            <a:r>
               <a:rPr b="1"/>
-              <a:t>Drop rows</a:t>
-            </a:r>
-            <a:r>
-              <a:rPr/>
-              <a:t>: only if few, and only if MCAR</a:t>
-            </a:r>
-          </a:p>
-          <a:p>
-            <a:pPr lvl="0"/>
-            <a:r>
-              <a:rPr b="1"/>
-              <a:t>Drop the column</a:t>
-            </a:r>
-            <a:r>
-              <a:rPr/>
-              <a:t>: if it is missing too often to help</a:t>
-            </a:r>
-          </a:p>
-          <a:p>
-            <a:pPr lvl="0"/>
-            <a:r>
-              <a:rPr b="1"/>
-              <a:t>Impute</a:t>
-            </a:r>
-            <a:r>
-              <a:rPr/>
-              <a:t>: mean/median, most-frequent, </a:t>
-            </a:r>
-            <a:r>
-              <a:rPr>
-                <a:latin typeface="Courier"/>
-              </a:rPr>
-              <a:t>KNNImputer</a:t>
-            </a:r>
-          </a:p>
-          <a:p>
-            <a:pPr lvl="0"/>
-            <a:r>
-              <a:rPr b="1"/>
-              <a:t>Add a missingness indicator</a:t>
-            </a:r>
-            <a:r>
-              <a:rPr/>
-              <a:t>: keeps MAR signal alive</a:t>
+              <a:t>missingness indicator</a:t>
+            </a:r>
+            <a:r>
+              <a:rPr/>
+              <a:t> column preserves the signal even after filling</a:t>
             </a:r>
           </a:p>
         </p:txBody>
@@ -9550,6 +9620,129 @@
 </file>
 
 <file path=ppt/slides/slide13.xml><?xml version="1.0" encoding="utf-8"?>
+<p:sld xmlns:a="http://schemas.openxmlformats.org/drawingml/2006/main" xmlns:r="http://schemas.openxmlformats.org/officeDocument/2006/relationships" xmlns:p="http://schemas.openxmlformats.org/presentationml/2006/main">
+  <p:cSld>
+    <p:spTree>
+      <p:nvGrpSpPr>
+        <p:cNvPr id="1" name=""/>
+        <p:cNvGrpSpPr/>
+        <p:nvPr/>
+      </p:nvGrpSpPr>
+      <p:grpSpPr>
+        <a:xfrm>
+          <a:off x="0" y="0"/>
+          <a:ext cx="0" cy="0"/>
+          <a:chOff x="0" y="0"/>
+          <a:chExt cx="0" cy="0"/>
+        </a:xfrm>
+      </p:grpSpPr>
+      <p:sp>
+        <p:nvSpPr>
+          <p:cNvPr id="2" name="Title 1"/>
+          <p:cNvSpPr>
+            <a:spLocks noGrp="1"/>
+          </p:cNvSpPr>
+          <p:nvPr>
+            <p:ph type="title"/>
+          </p:nvPr>
+        </p:nvSpPr>
+        <p:spPr>
+          <a:xfrm>
+            <a:off x="457200" y="205979"/>
+            <a:ext cx="8229600" cy="857250"/>
+          </a:xfrm>
+        </p:spPr>
+        <p:txBody>
+          <a:bodyPr/>
+          <a:lstStyle/>
+          <a:p>
+            <a:pPr lvl="0" indent="0" marL="0">
+              <a:buNone/>
+            </a:pPr>
+            <a:r>
+              <a:rPr/>
+              <a:t>What to do about a gap</a:t>
+            </a:r>
+          </a:p>
+        </p:txBody>
+      </p:sp>
+      <p:sp>
+        <p:nvSpPr>
+          <p:cNvPr id="3" name="Content Placeholder 2"/>
+          <p:cNvSpPr>
+            <a:spLocks noGrp="1"/>
+          </p:cNvSpPr>
+          <p:nvPr>
+            <p:ph idx="1"/>
+          </p:nvPr>
+        </p:nvSpPr>
+        <p:spPr>
+          <a:xfrm>
+            <a:off x="457200" y="1200151"/>
+            <a:ext cx="8229600" cy="3394472"/>
+          </a:xfrm>
+        </p:spPr>
+        <p:txBody>
+          <a:bodyPr/>
+          <a:lstStyle/>
+          <a:p>
+            <a:pPr lvl="0"/>
+            <a:r>
+              <a:rPr b="1"/>
+              <a:t>Drop rows</a:t>
+            </a:r>
+            <a:r>
+              <a:rPr/>
+              <a:t>: only if few, and only if MCAR</a:t>
+            </a:r>
+          </a:p>
+          <a:p>
+            <a:pPr lvl="0"/>
+            <a:r>
+              <a:rPr b="1"/>
+              <a:t>Drop the column</a:t>
+            </a:r>
+            <a:r>
+              <a:rPr/>
+              <a:t>: if it is missing too often to help</a:t>
+            </a:r>
+          </a:p>
+          <a:p>
+            <a:pPr lvl="0"/>
+            <a:r>
+              <a:rPr b="1"/>
+              <a:t>Impute</a:t>
+            </a:r>
+            <a:r>
+              <a:rPr/>
+              <a:t>: mean/median, most-frequent, </a:t>
+            </a:r>
+            <a:r>
+              <a:rPr>
+                <a:latin typeface="Courier"/>
+              </a:rPr>
+              <a:t>KNNImputer</a:t>
+            </a:r>
+          </a:p>
+          <a:p>
+            <a:pPr lvl="0"/>
+            <a:r>
+              <a:rPr b="1"/>
+              <a:t>Add a missingness indicator</a:t>
+            </a:r>
+            <a:r>
+              <a:rPr/>
+              <a:t>: keeps MAR signal alive</a:t>
+            </a:r>
+          </a:p>
+        </p:txBody>
+      </p:sp>
+    </p:spTree>
+  </p:cSld>
+</p:sld>
+</file>
+
+<file path=ppt/slides/slide14.xml><?xml version="1.0" encoding="utf-8"?>
 <p:sld xmlns:a="http://schemas.openxmlformats.org/drawingml/2006/main" xmlns:r="http://schemas.openxmlformats.org/officeDocument/2006/relationships" xmlns:p="http://schemas.openxmlformats.org/presentationml/2006/main">
   <p:cSld>
     <p:spTree>
@@ -9631,7 +9824,7 @@
 </p:sld>
 </file>
 
-<file path=ppt/slides/slide14.xml><?xml version="1.0" encoding="utf-8"?>
+<file path=ppt/slides/slide15.xml><?xml version="1.0" encoding="utf-8"?>
 <p:sld xmlns:a="http://schemas.openxmlformats.org/drawingml/2006/main" xmlns:r="http://schemas.openxmlformats.org/officeDocument/2006/relationships" xmlns:p="http://schemas.openxmlformats.org/presentationml/2006/main">
   <p:cSld>
     <p:spTree>
@@ -9713,7 +9906,7 @@
 </p:sld>
 </file>
 
-<file path=ppt/slides/slide15.xml><?xml version="1.0" encoding="utf-8"?>
+<file path=ppt/slides/slide16.xml><?xml version="1.0" encoding="utf-8"?>
 <p:sld xmlns:a="http://schemas.openxmlformats.org/drawingml/2006/main" xmlns:r="http://schemas.openxmlformats.org/officeDocument/2006/relationships" xmlns:p="http://schemas.openxmlformats.org/presentationml/2006/main">
   <p:cSld>
     <p:spTree>
@@ -9795,7 +9988,7 @@
 </p:sld>
 </file>
 
-<file path=ppt/slides/slide16.xml><?xml version="1.0" encoding="utf-8"?>
+<file path=ppt/slides/slide17.xml><?xml version="1.0" encoding="utf-8"?>
 <p:sld xmlns:a="http://schemas.openxmlformats.org/drawingml/2006/main" xmlns:r="http://schemas.openxmlformats.org/officeDocument/2006/relationships" xmlns:p="http://schemas.openxmlformats.org/presentationml/2006/main">
   <p:cSld>
     <p:spTree>
@@ -9877,7 +10070,7 @@
 </p:sld>
 </file>
 
-<file path=ppt/slides/slide17.xml><?xml version="1.0" encoding="utf-8"?>
+<file path=ppt/slides/slide18.xml><?xml version="1.0" encoding="utf-8"?>
 <p:sld xmlns:a="http://schemas.openxmlformats.org/drawingml/2006/main" xmlns:r="http://schemas.openxmlformats.org/officeDocument/2006/relationships" xmlns:p="http://schemas.openxmlformats.org/presentationml/2006/main">
   <p:cSld>
     <p:spTree>
@@ -9959,140 +10152,6 @@
 </p:sld>
 </file>
 
-<file path=ppt/slides/slide18.xml><?xml version="1.0" encoding="utf-8"?>
-<p:sld xmlns:a="http://schemas.openxmlformats.org/drawingml/2006/main" xmlns:r="http://schemas.openxmlformats.org/officeDocument/2006/relationships" xmlns:p="http://schemas.openxmlformats.org/presentationml/2006/main">
-  <p:cSld>
-    <p:spTree>
-      <p:nvGrpSpPr>
-        <p:cNvPr id="1" name=""/>
-        <p:cNvGrpSpPr/>
-        <p:nvPr/>
-      </p:nvGrpSpPr>
-      <p:grpSpPr>
-        <a:xfrm>
-          <a:off x="0" y="0"/>
-          <a:ext cx="0" cy="0"/>
-          <a:chOff x="0" y="0"/>
-          <a:chExt cx="0" cy="0"/>
-        </a:xfrm>
-      </p:grpSpPr>
-      <p:sp>
-        <p:nvSpPr>
-          <p:cNvPr id="2" name="Title 1"/>
-          <p:cNvSpPr>
-            <a:spLocks noGrp="1"/>
-          </p:cNvSpPr>
-          <p:nvPr>
-            <p:ph type="title"/>
-          </p:nvPr>
-        </p:nvSpPr>
-        <p:spPr>
-          <a:xfrm>
-            <a:off x="457200" y="205979"/>
-            <a:ext cx="8229600" cy="857250"/>
-          </a:xfrm>
-        </p:spPr>
-        <p:txBody>
-          <a:bodyPr/>
-          <a:lstStyle/>
-          <a:p>
-            <a:pPr lvl="0" indent="0" marL="0">
-              <a:buNone/>
-            </a:pPr>
-            <a:r>
-              <a:rPr/>
-              <a:t>What neither rule can tell you</a:t>
-            </a:r>
-          </a:p>
-        </p:txBody>
-      </p:sp>
-      <p:sp>
-        <p:nvSpPr>
-          <p:cNvPr id="3" name="Content Placeholder 2"/>
-          <p:cNvSpPr>
-            <a:spLocks noGrp="1"/>
-          </p:cNvSpPr>
-          <p:nvPr>
-            <p:ph idx="1"/>
-          </p:nvPr>
-        </p:nvSpPr>
-        <p:spPr>
-          <a:xfrm>
-            <a:off x="457200" y="1200151"/>
-            <a:ext cx="8229600" cy="3394472"/>
-          </a:xfrm>
-        </p:spPr>
-        <p:txBody>
-          <a:bodyPr/>
-          <a:lstStyle/>
-          <a:p>
-            <a:pPr lvl="0" indent="0" marL="0">
-              <a:buNone/>
-            </a:pPr>
-            <a:r>
-              <a:rPr>
-                <a:latin typeface="Courier"/>
-              </a:rPr>
-              <a:t>tenure_months</a:t>
-            </a:r>
-            <a:r>
-              <a:rPr/>
-              <a:t> of </a:t>
-            </a:r>
-            <a:r>
-              <a:rPr b="1"/>
-              <a:t>-3</a:t>
-            </a:r>
-            <a:r>
-              <a:rPr/>
-              <a:t> is impossible. Neither rule flags it.</a:t>
-            </a:r>
-          </a:p>
-          <a:p>
-            <a:pPr lvl="0"/>
-            <a:r>
-              <a:rPr/>
-              <a:t>-3 is not </a:t>
-            </a:r>
-            <a:r>
-              <a:rPr i="1"/>
-              <a:t>extreme</a:t>
-            </a:r>
-            <a:r>
-              <a:rPr/>
-              <a:t> relative to a column spanning 0–72</a:t>
-            </a:r>
-          </a:p>
-          <a:p>
-            <a:pPr lvl="0"/>
-            <a:r>
-              <a:rPr/>
-              <a:t>It is not </a:t>
-            </a:r>
-            <a:r>
-              <a:rPr i="1"/>
-              <a:t>unusual</a:t>
-            </a:r>
-            <a:r>
-              <a:rPr/>
-              <a:t>. It is </a:t>
-            </a:r>
-            <a:r>
-              <a:rPr i="1"/>
-              <a:t>invalid</a:t>
-            </a:r>
-            <a:r>
-              <a:rPr/>
-              <a:t>: a different question entirely</a:t>
-            </a:r>
-          </a:p>
-        </p:txBody>
-      </p:sp>
-    </p:spTree>
-  </p:cSld>
-</p:sld>
-</file>
-
 <file path=ppt/slides/slide19.xml><?xml version="1.0" encoding="utf-8"?>
 <p:sld xmlns:a="http://schemas.openxmlformats.org/drawingml/2006/main" xmlns:r="http://schemas.openxmlformats.org/officeDocument/2006/relationships" xmlns:p="http://schemas.openxmlformats.org/presentationml/2006/main">
   <p:cSld>
@@ -10135,7 +10194,7 @@
             </a:pPr>
             <a:r>
               <a:rPr/>
-              <a:t>Once something is flagged</a:t>
+              <a:t>What neither rule can tell you</a:t>
             </a:r>
           </a:p>
         </p:txBody>
@@ -10164,60 +10223,60 @@
               <a:buNone/>
             </a:pPr>
             <a:r>
-              <a:rPr/>
-              <a:t>Detection finds candidates. What to do next is a </a:t>
+              <a:rPr>
+                <a:latin typeface="Courier"/>
+              </a:rPr>
+              <a:t>tenure_months</a:t>
+            </a:r>
+            <a:r>
+              <a:rPr/>
+              <a:t> of </a:t>
             </a:r>
             <a:r>
               <a:rPr b="1"/>
-              <a:t>domain</a:t>
-            </a:r>
-            <a:r>
-              <a:rPr/>
-              <a:t> decision.</a:t>
+              <a:t>-3</a:t>
+            </a:r>
+            <a:r>
+              <a:rPr/>
+              <a:t> is impossible. Neither rule flags it.</a:t>
             </a:r>
           </a:p>
           <a:p>
             <a:pPr lvl="0"/>
             <a:r>
-              <a:rPr b="1"/>
-              <a:t>Cap</a:t>
-            </a:r>
-            <a:r>
-              <a:rPr/>
-              <a:t> it at the fence (Winsorise)</a:t>
+              <a:rPr/>
+              <a:t>-3 is not </a:t>
+            </a:r>
+            <a:r>
+              <a:rPr i="1"/>
+              <a:t>extreme</a:t>
+            </a:r>
+            <a:r>
+              <a:rPr/>
+              <a:t> relative to a column spanning 0–72</a:t>
             </a:r>
           </a:p>
           <a:p>
             <a:pPr lvl="0"/>
             <a:r>
-              <a:rPr b="1"/>
-              <a:t>Remove</a:t>
-            </a:r>
-            <a:r>
-              <a:rPr/>
-              <a:t> the row</a:t>
-            </a:r>
-          </a:p>
-          <a:p>
-            <a:pPr lvl="0"/>
-            <a:r>
-              <a:rPr b="1"/>
-              <a:t>Correct</a:t>
-            </a:r>
-            <a:r>
-              <a:rPr/>
-              <a:t> it, if the true value is recoverable</a:t>
-            </a:r>
-          </a:p>
-          <a:p>
-            <a:pPr lvl="0"/>
-            <a:r>
-              <a:rPr b="1"/>
-              <a:t>Leave</a:t>
-            </a:r>
-            <a:r>
-              <a:rPr/>
-              <a:t> it: unusual is not the same as wrong</a:t>
+              <a:rPr/>
+              <a:t>It is not </a:t>
+            </a:r>
+            <a:r>
+              <a:rPr i="1"/>
+              <a:t>unusual</a:t>
+            </a:r>
+            <a:r>
+              <a:rPr/>
+              <a:t>. It is </a:t>
+            </a:r>
+            <a:r>
+              <a:rPr i="1"/>
+              <a:t>invalid</a:t>
+            </a:r>
+            <a:r>
+              <a:rPr/>
+              <a:t>: a different question entirely</a:t>
             </a:r>
           </a:p>
         </p:txBody>
@@ -10380,7 +10439,7 @@
             </a:pPr>
             <a:r>
               <a:rPr/>
-              <a:t>Notebook 1, live</a:t>
+              <a:t>Once something is flagged</a:t>
             </a:r>
           </a:p>
         </p:txBody>
@@ -10410,7 +10469,59 @@
             </a:pPr>
             <a:r>
               <a:rPr/>
-              <a:t>Exploration, missingness mechanisms, both outlier rules: from scratch.</a:t>
+              <a:t>Detection finds candidates. What to do next is a </a:t>
+            </a:r>
+            <a:r>
+              <a:rPr b="1"/>
+              <a:t>domain</a:t>
+            </a:r>
+            <a:r>
+              <a:rPr/>
+              <a:t> decision.</a:t>
+            </a:r>
+          </a:p>
+          <a:p>
+            <a:pPr lvl="0"/>
+            <a:r>
+              <a:rPr b="1"/>
+              <a:t>Cap</a:t>
+            </a:r>
+            <a:r>
+              <a:rPr/>
+              <a:t> it at the fence (Winsorise)</a:t>
+            </a:r>
+          </a:p>
+          <a:p>
+            <a:pPr lvl="0"/>
+            <a:r>
+              <a:rPr b="1"/>
+              <a:t>Remove</a:t>
+            </a:r>
+            <a:r>
+              <a:rPr/>
+              <a:t> the row</a:t>
+            </a:r>
+          </a:p>
+          <a:p>
+            <a:pPr lvl="0"/>
+            <a:r>
+              <a:rPr b="1"/>
+              <a:t>Correct</a:t>
+            </a:r>
+            <a:r>
+              <a:rPr/>
+              <a:t> it, if the true value is recoverable</a:t>
+            </a:r>
+          </a:p>
+          <a:p>
+            <a:pPr lvl="0"/>
+            <a:r>
+              <a:rPr b="1"/>
+              <a:t>Leave</a:t>
+            </a:r>
+            <a:r>
+              <a:rPr/>
+              <a:t> it: unusual is not the same as wrong</a:t>
             </a:r>
           </a:p>
         </p:txBody>
@@ -10462,7 +10573,37 @@
             </a:pPr>
             <a:r>
               <a:rPr/>
-              <a:t>Break</a:t>
+              <a:t>Notebook 1, live</a:t>
+            </a:r>
+          </a:p>
+        </p:txBody>
+      </p:sp>
+      <p:sp>
+        <p:nvSpPr>
+          <p:cNvPr id="3" name="Content Placeholder 2"/>
+          <p:cNvSpPr>
+            <a:spLocks noGrp="1"/>
+          </p:cNvSpPr>
+          <p:nvPr>
+            <p:ph idx="1"/>
+          </p:nvPr>
+        </p:nvSpPr>
+        <p:spPr>
+          <a:xfrm>
+            <a:off x="457200" y="1200151"/>
+            <a:ext cx="8229600" cy="3394472"/>
+          </a:xfrm>
+        </p:spPr>
+        <p:txBody>
+          <a:bodyPr/>
+          <a:lstStyle/>
+          <a:p>
+            <a:pPr lvl="0" indent="0" marL="0">
+              <a:buNone/>
+            </a:pPr>
+            <a:r>
+              <a:rPr/>
+              <a:t>Exploration, missingness mechanisms, both outlier rules: from scratch.</a:t>
             </a:r>
           </a:p>
         </p:txBody>
@@ -10514,6 +10655,58 @@
             </a:pPr>
             <a:r>
               <a:rPr/>
+              <a:t>Break</a:t>
+            </a:r>
+          </a:p>
+        </p:txBody>
+      </p:sp>
+    </p:spTree>
+  </p:cSld>
+</p:sld>
+</file>
+
+<file path=ppt/slides/slide23.xml><?xml version="1.0" encoding="utf-8"?>
+<p:sld xmlns:a="http://schemas.openxmlformats.org/drawingml/2006/main" xmlns:r="http://schemas.openxmlformats.org/officeDocument/2006/relationships" xmlns:p="http://schemas.openxmlformats.org/presentationml/2006/main">
+  <p:cSld>
+    <p:spTree>
+      <p:nvGrpSpPr>
+        <p:cNvPr id="1" name=""/>
+        <p:cNvGrpSpPr/>
+        <p:nvPr/>
+      </p:nvGrpSpPr>
+      <p:grpSpPr>
+        <a:xfrm>
+          <a:off x="0" y="0"/>
+          <a:ext cx="0" cy="0"/>
+          <a:chOff x="0" y="0"/>
+          <a:chExt cx="0" cy="0"/>
+        </a:xfrm>
+      </p:grpSpPr>
+      <p:sp>
+        <p:nvSpPr>
+          <p:cNvPr id="2" name="Title 1"/>
+          <p:cNvSpPr>
+            <a:spLocks noGrp="1"/>
+          </p:cNvSpPr>
+          <p:nvPr>
+            <p:ph type="title"/>
+          </p:nvPr>
+        </p:nvSpPr>
+        <p:spPr>
+          <a:xfrm>
+            <a:off x="457200" y="205979"/>
+            <a:ext cx="8229600" cy="857250"/>
+          </a:xfrm>
+        </p:spPr>
+        <p:txBody>
+          <a:bodyPr/>
+          <a:lstStyle/>
+          <a:p>
+            <a:pPr lvl="0" indent="0" marL="0">
+              <a:buNone/>
+            </a:pPr>
+            <a:r>
+              <a:rPr/>
               <a:t>Why scale?</a:t>
             </a:r>
           </a:p>
@@ -10583,7 +10776,7 @@
 </p:sld>
 </file>
 
-<file path=ppt/slides/slide23.xml><?xml version="1.0" encoding="utf-8"?>
+<file path=ppt/slides/slide24.xml><?xml version="1.0" encoding="utf-8"?>
 <p:sld xmlns:a="http://schemas.openxmlformats.org/drawingml/2006/main" xmlns:r="http://schemas.openxmlformats.org/officeDocument/2006/relationships" xmlns:p="http://schemas.openxmlformats.org/presentationml/2006/main">
   <p:cSld>
     <p:spTree>
@@ -10665,7 +10858,7 @@
 </p:sld>
 </file>
 
-<file path=ppt/slides/slide24.xml><?xml version="1.0" encoding="utf-8"?>
+<file path=ppt/slides/slide25.xml><?xml version="1.0" encoding="utf-8"?>
 <p:sld xmlns:a="http://schemas.openxmlformats.org/drawingml/2006/main" xmlns:r="http://schemas.openxmlformats.org/officeDocument/2006/relationships" xmlns:p="http://schemas.openxmlformats.org/presentationml/2006/main">
   <p:cSld>
     <p:spTree>
@@ -10747,7 +10940,7 @@
 </p:sld>
 </file>
 
-<file path=ppt/slides/slide25.xml><?xml version="1.0" encoding="utf-8"?>
+<file path=ppt/slides/slide26.xml><?xml version="1.0" encoding="utf-8"?>
 <p:sld xmlns:a="http://schemas.openxmlformats.org/drawingml/2006/main" xmlns:r="http://schemas.openxmlformats.org/officeDocument/2006/relationships" xmlns:p="http://schemas.openxmlformats.org/presentationml/2006/main">
   <p:cSld>
     <p:spTree>
@@ -10859,7 +11052,7 @@
 </p:sld>
 </file>
 
-<file path=ppt/slides/slide26.xml><?xml version="1.0" encoding="utf-8"?>
+<file path=ppt/slides/slide27.xml><?xml version="1.0" encoding="utf-8"?>
 <p:sld xmlns:a="http://schemas.openxmlformats.org/drawingml/2006/main" xmlns:r="http://schemas.openxmlformats.org/officeDocument/2006/relationships" xmlns:p="http://schemas.openxmlformats.org/presentationml/2006/main">
   <p:cSld>
     <p:spTree>
@@ -10941,7 +11134,7 @@
 </p:sld>
 </file>
 
-<file path=ppt/slides/slide27.xml><?xml version="1.0" encoding="utf-8"?>
+<file path=ppt/slides/slide28.xml><?xml version="1.0" encoding="utf-8"?>
 <p:sld xmlns:a="http://schemas.openxmlformats.org/drawingml/2006/main" xmlns:r="http://schemas.openxmlformats.org/officeDocument/2006/relationships" xmlns:p="http://schemas.openxmlformats.org/presentationml/2006/main">
   <p:cSld>
     <p:spTree>
@@ -11023,7 +11216,7 @@
 </p:sld>
 </file>
 
-<file path=ppt/slides/slide28.xml><?xml version="1.0" encoding="utf-8"?>
+<file path=ppt/slides/slide29.xml><?xml version="1.0" encoding="utf-8"?>
 <p:sld xmlns:a="http://schemas.openxmlformats.org/drawingml/2006/main" xmlns:r="http://schemas.openxmlformats.org/officeDocument/2006/relationships" xmlns:p="http://schemas.openxmlformats.org/presentationml/2006/main">
   <p:cSld>
     <p:spTree>
@@ -11207,7 +11400,115 @@
 </p:sld>
 </file>
 
-<file path=ppt/slides/slide29.xml><?xml version="1.0" encoding="utf-8"?>
+<file path=ppt/slides/slide3.xml><?xml version="1.0" encoding="utf-8"?>
+<p:sld xmlns:a="http://schemas.openxmlformats.org/drawingml/2006/main" xmlns:r="http://schemas.openxmlformats.org/officeDocument/2006/relationships" xmlns:p="http://schemas.openxmlformats.org/presentationml/2006/main">
+  <p:cSld>
+    <p:spTree>
+      <p:nvGrpSpPr>
+        <p:cNvPr id="1" name=""/>
+        <p:cNvGrpSpPr/>
+        <p:nvPr/>
+      </p:nvGrpSpPr>
+      <p:grpSpPr>
+        <a:xfrm>
+          <a:off x="0" y="0"/>
+          <a:ext cx="0" cy="0"/>
+          <a:chOff x="0" y="0"/>
+          <a:chExt cx="0" cy="0"/>
+        </a:xfrm>
+      </p:grpSpPr>
+      <p:sp>
+        <p:nvSpPr>
+          <p:cNvPr id="2" name="Title 1"/>
+          <p:cNvSpPr>
+            <a:spLocks noGrp="1"/>
+          </p:cNvSpPr>
+          <p:nvPr>
+            <p:ph type="title"/>
+          </p:nvPr>
+        </p:nvSpPr>
+        <p:spPr>
+          <a:xfrm>
+            <a:off x="457200" y="205979"/>
+            <a:ext cx="8229600" cy="857250"/>
+          </a:xfrm>
+        </p:spPr>
+        <p:txBody>
+          <a:bodyPr/>
+          <a:lstStyle/>
+          <a:p>
+            <a:pPr lvl="0" indent="0" marL="0">
+              <a:buNone/>
+            </a:pPr>
+            <a:r>
+              <a:rPr/>
+              <a:t>What today builds on</a:t>
+            </a:r>
+          </a:p>
+        </p:txBody>
+      </p:sp>
+      <p:sp>
+        <p:nvSpPr>
+          <p:cNvPr id="3" name="Content Placeholder 2"/>
+          <p:cNvSpPr>
+            <a:spLocks noGrp="1"/>
+          </p:cNvSpPr>
+          <p:nvPr>
+            <p:ph idx="1"/>
+          </p:nvPr>
+        </p:nvSpPr>
+        <p:spPr>
+          <a:xfrm>
+            <a:off x="457200" y="1200151"/>
+            <a:ext cx="8229600" cy="3394472"/>
+          </a:xfrm>
+        </p:spPr>
+        <p:txBody>
+          <a:bodyPr/>
+          <a:lstStyle/>
+          <a:p>
+            <a:pPr lvl="0"/>
+            <a:r>
+              <a:rPr/>
+              <a:t>Lesson 1’s rule: </a:t>
+            </a:r>
+            <a:r>
+              <a:rPr b="1"/>
+              <a:t>nothing is learned before the split</a:t>
+            </a:r>
+          </a:p>
+          <a:p>
+            <a:pPr lvl="0"/>
+            <a:r>
+              <a:rPr/>
+              <a:t>Lesson 1’s tool: </a:t>
+            </a:r>
+            <a:r>
+              <a:rPr>
+                <a:latin typeface="Courier"/>
+              </a:rPr>
+              <a:t>Pipeline</a:t>
+            </a:r>
+            <a:r>
+              <a:rPr/>
+              <a:t>, so the rule is structural, not just discipline</a:t>
+            </a:r>
+          </a:p>
+          <a:p>
+            <a:pPr lvl="0"/>
+            <a:r>
+              <a:rPr/>
+              <a:t>Today: apply both to data that is actually messy</a:t>
+            </a:r>
+          </a:p>
+        </p:txBody>
+      </p:sp>
+    </p:spTree>
+  </p:cSld>
+</p:sld>
+</file>
+
+<file path=ppt/slides/slide30.xml><?xml version="1.0" encoding="utf-8"?>
 <p:sld xmlns:a="http://schemas.openxmlformats.org/drawingml/2006/main" xmlns:r="http://schemas.openxmlformats.org/officeDocument/2006/relationships" xmlns:p="http://schemas.openxmlformats.org/presentationml/2006/main">
   <p:cSld>
     <p:spTree>
@@ -11289,7 +11590,7 @@
 </p:sld>
 </file>
 
-<file path=ppt/slides/slide3.xml><?xml version="1.0" encoding="utf-8"?>
+<file path=ppt/slides/slide31.xml><?xml version="1.0" encoding="utf-8"?>
 <p:sld xmlns:a="http://schemas.openxmlformats.org/drawingml/2006/main" xmlns:r="http://schemas.openxmlformats.org/officeDocument/2006/relationships" xmlns:p="http://schemas.openxmlformats.org/presentationml/2006/main">
   <p:cSld>
     <p:spTree>
@@ -11331,7 +11632,7 @@
             </a:pPr>
             <a:r>
               <a:rPr/>
-              <a:t>What today builds on</a:t>
+              <a:t>The curse of dimensionality, briefly</a:t>
             </a:r>
           </a:p>
         </p:txBody>
@@ -11356,38 +11657,44 @@
           <a:bodyPr/>
           <a:lstStyle/>
           <a:p>
-            <a:pPr lvl="0"/>
-            <a:r>
-              <a:rPr/>
-              <a:t>Lesson 1’s rule: </a:t>
-            </a:r>
-            <a:r>
-              <a:rPr b="1"/>
-              <a:t>nothing is learned before the split</a:t>
-            </a:r>
-          </a:p>
-          <a:p>
-            <a:pPr lvl="0"/>
-            <a:r>
-              <a:rPr/>
-              <a:t>Lesson 1’s tool: </a:t>
+            <a:pPr lvl="0" indent="0" marL="0">
+              <a:buNone/>
+            </a:pPr>
+            <a:r>
+              <a:rPr/>
+              <a:t>One-hot </a:t>
             </a:r>
             <a:r>
               <a:rPr>
                 <a:latin typeface="Courier"/>
               </a:rPr>
-              <a:t>Pipeline</a:t>
-            </a:r>
-            <a:r>
-              <a:rPr/>
-              <a:t>, so the rule is structural, not just discipline</a:t>
+              <a:t>zip_code</a:t>
+            </a:r>
+            <a:r>
+              <a:rPr/>
+              <a:t>: </a:t>
+            </a:r>
+            <a:r>
+              <a:rPr b="1"/>
+              <a:t>493</a:t>
+            </a:r>
+            <a:r>
+              <a:rPr/>
+              <a:t> new columns, mostly zero.</a:t>
             </a:r>
           </a:p>
           <a:p>
             <a:pPr lvl="0"/>
             <a:r>
               <a:rPr/>
-              <a:t>Today: apply both to data that is actually messy</a:t>
+              <a:t>Distance-based methods (Lesson 6): everything looks equidistant</a:t>
+            </a:r>
+          </a:p>
+          <a:p>
+            <a:pPr lvl="0"/>
+            <a:r>
+              <a:rPr/>
+              <a:t>More parameters to estimate, same sample size → more variance</a:t>
             </a:r>
           </a:p>
         </p:txBody>
@@ -11397,121 +11704,7 @@
 </p:sld>
 </file>
 
-<file path=ppt/slides/slide30.xml><?xml version="1.0" encoding="utf-8"?>
-<p:sld xmlns:a="http://schemas.openxmlformats.org/drawingml/2006/main" xmlns:r="http://schemas.openxmlformats.org/officeDocument/2006/relationships" xmlns:p="http://schemas.openxmlformats.org/presentationml/2006/main">
-  <p:cSld>
-    <p:spTree>
-      <p:nvGrpSpPr>
-        <p:cNvPr id="1" name=""/>
-        <p:cNvGrpSpPr/>
-        <p:nvPr/>
-      </p:nvGrpSpPr>
-      <p:grpSpPr>
-        <a:xfrm>
-          <a:off x="0" y="0"/>
-          <a:ext cx="0" cy="0"/>
-          <a:chOff x="0" y="0"/>
-          <a:chExt cx="0" cy="0"/>
-        </a:xfrm>
-      </p:grpSpPr>
-      <p:sp>
-        <p:nvSpPr>
-          <p:cNvPr id="2" name="Title 1"/>
-          <p:cNvSpPr>
-            <a:spLocks noGrp="1"/>
-          </p:cNvSpPr>
-          <p:nvPr>
-            <p:ph type="title"/>
-          </p:nvPr>
-        </p:nvSpPr>
-        <p:spPr>
-          <a:xfrm>
-            <a:off x="457200" y="205979"/>
-            <a:ext cx="8229600" cy="857250"/>
-          </a:xfrm>
-        </p:spPr>
-        <p:txBody>
-          <a:bodyPr/>
-          <a:lstStyle/>
-          <a:p>
-            <a:pPr lvl="0" indent="0" marL="0">
-              <a:buNone/>
-            </a:pPr>
-            <a:r>
-              <a:rPr/>
-              <a:t>The curse of dimensionality, briefly</a:t>
-            </a:r>
-          </a:p>
-        </p:txBody>
-      </p:sp>
-      <p:sp>
-        <p:nvSpPr>
-          <p:cNvPr id="3" name="Content Placeholder 2"/>
-          <p:cNvSpPr>
-            <a:spLocks noGrp="1"/>
-          </p:cNvSpPr>
-          <p:nvPr>
-            <p:ph idx="1"/>
-          </p:nvPr>
-        </p:nvSpPr>
-        <p:spPr>
-          <a:xfrm>
-            <a:off x="457200" y="1200151"/>
-            <a:ext cx="8229600" cy="3394472"/>
-          </a:xfrm>
-        </p:spPr>
-        <p:txBody>
-          <a:bodyPr/>
-          <a:lstStyle/>
-          <a:p>
-            <a:pPr lvl="0" indent="0" marL="0">
-              <a:buNone/>
-            </a:pPr>
-            <a:r>
-              <a:rPr/>
-              <a:t>One-hot </a:t>
-            </a:r>
-            <a:r>
-              <a:rPr>
-                <a:latin typeface="Courier"/>
-              </a:rPr>
-              <a:t>zip_code</a:t>
-            </a:r>
-            <a:r>
-              <a:rPr/>
-              <a:t>: </a:t>
-            </a:r>
-            <a:r>
-              <a:rPr b="1"/>
-              <a:t>493</a:t>
-            </a:r>
-            <a:r>
-              <a:rPr/>
-              <a:t> new columns, mostly zero.</a:t>
-            </a:r>
-          </a:p>
-          <a:p>
-            <a:pPr lvl="0"/>
-            <a:r>
-              <a:rPr/>
-              <a:t>Distance-based methods (Lesson 6): everything looks equidistant</a:t>
-            </a:r>
-          </a:p>
-          <a:p>
-            <a:pPr lvl="0"/>
-            <a:r>
-              <a:rPr/>
-              <a:t>More parameters to estimate, same sample size → more variance</a:t>
-            </a:r>
-          </a:p>
-        </p:txBody>
-      </p:sp>
-    </p:spTree>
-  </p:cSld>
-</p:sld>
-</file>
-
-<file path=ppt/slides/slide31.xml><?xml version="1.0" encoding="utf-8"?>
+<file path=ppt/slides/slide32.xml><?xml version="1.0" encoding="utf-8"?>
 <p:sld xmlns:a="http://schemas.openxmlformats.org/drawingml/2006/main" xmlns:r="http://schemas.openxmlformats.org/officeDocument/2006/relationships" xmlns:p="http://schemas.openxmlformats.org/presentationml/2006/main">
   <p:cSld>
     <p:spTree>
@@ -11593,7 +11786,7 @@
 </p:sld>
 </file>
 
-<file path=ppt/slides/slide32.xml><?xml version="1.0" encoding="utf-8"?>
+<file path=ppt/slides/slide33.xml><?xml version="1.0" encoding="utf-8"?>
 <p:sld xmlns:a="http://schemas.openxmlformats.org/drawingml/2006/main" xmlns:r="http://schemas.openxmlformats.org/officeDocument/2006/relationships" xmlns:p="http://schemas.openxmlformats.org/presentationml/2006/main">
   <p:cSld>
     <p:spTree>
@@ -11713,7 +11906,7 @@
 </p:sld>
 </file>
 
-<file path=ppt/slides/slide33.xml><?xml version="1.0" encoding="utf-8"?>
+<file path=ppt/slides/slide34.xml><?xml version="1.0" encoding="utf-8"?>
 <p:sld xmlns:a="http://schemas.openxmlformats.org/drawingml/2006/main" xmlns:r="http://schemas.openxmlformats.org/officeDocument/2006/relationships" xmlns:p="http://schemas.openxmlformats.org/presentationml/2006/main">
   <p:cSld>
     <p:spTree>
@@ -11807,236 +12000,6 @@
 </p:sld>
 </file>
 
-<file path=ppt/slides/slide34.xml><?xml version="1.0" encoding="utf-8"?>
-<p:sld xmlns:a="http://schemas.openxmlformats.org/drawingml/2006/main" xmlns:r="http://schemas.openxmlformats.org/officeDocument/2006/relationships" xmlns:p="http://schemas.openxmlformats.org/presentationml/2006/main">
-  <p:cSld>
-    <p:spTree>
-      <p:nvGrpSpPr>
-        <p:cNvPr id="1" name=""/>
-        <p:cNvGrpSpPr/>
-        <p:nvPr/>
-      </p:nvGrpSpPr>
-      <p:grpSpPr>
-        <a:xfrm>
-          <a:off x="0" y="0"/>
-          <a:ext cx="0" cy="0"/>
-          <a:chOff x="0" y="0"/>
-          <a:chExt cx="0" cy="0"/>
-        </a:xfrm>
-      </p:grpSpPr>
-      <p:sp>
-        <p:nvSpPr>
-          <p:cNvPr id="2" name="Title 1"/>
-          <p:cNvSpPr>
-            <a:spLocks noGrp="1"/>
-          </p:cNvSpPr>
-          <p:nvPr>
-            <p:ph type="title"/>
-          </p:nvPr>
-        </p:nvSpPr>
-        <p:spPr>
-          <a:xfrm>
-            <a:off x="457200" y="205979"/>
-            <a:ext cx="8229600" cy="857250"/>
-          </a:xfrm>
-        </p:spPr>
-        <p:txBody>
-          <a:bodyPr/>
-          <a:lstStyle/>
-          <a:p>
-            <a:pPr lvl="0" indent="0" marL="0">
-              <a:buNone/>
-            </a:pPr>
-            <a:r>
-              <a:rPr/>
-              <a:t>The code</a:t>
-            </a:r>
-          </a:p>
-        </p:txBody>
-      </p:sp>
-      <p:sp>
-        <p:nvSpPr>
-          <p:cNvPr id="3" name="Content Placeholder 2"/>
-          <p:cNvSpPr>
-            <a:spLocks noGrp="1"/>
-          </p:cNvSpPr>
-          <p:nvPr>
-            <p:ph idx="1"/>
-          </p:nvPr>
-        </p:nvSpPr>
-        <p:spPr>
-          <a:xfrm>
-            <a:off x="457200" y="1200151"/>
-            <a:ext cx="8229600" cy="3394472"/>
-          </a:xfrm>
-        </p:spPr>
-        <p:txBody>
-          <a:bodyPr/>
-          <a:lstStyle/>
-          <a:p>
-            <a:pPr lvl="0" indent="0">
-              <a:buNone/>
-            </a:pPr>
-            <a:r>
-              <a:rPr>
-                <a:latin typeface="Courier"/>
-              </a:rPr>
-              <a:t>prep </a:t>
-            </a:r>
-            <a:r>
-              <a:rPr>
-                <a:solidFill>
-                  <a:srgbClr val="666666"/>
-                </a:solidFill>
-                <a:latin typeface="Courier"/>
-              </a:rPr>
-              <a:t>=</a:t>
-            </a:r>
-            <a:r>
-              <a:rPr>
-                <a:latin typeface="Courier"/>
-              </a:rPr>
-              <a:t> ColumnTransformer([</a:t>
-            </a:r>
-            <a:br/>
-            <a:r>
-              <a:rPr>
-                <a:latin typeface="Courier"/>
-              </a:rPr>
-              <a:t>    (</a:t>
-            </a:r>
-            <a:r>
-              <a:rPr>
-                <a:solidFill>
-                  <a:srgbClr val="4070A0"/>
-                </a:solidFill>
-                <a:latin typeface="Courier"/>
-              </a:rPr>
-              <a:t>"num"</a:t>
-            </a:r>
-            <a:r>
-              <a:rPr>
-                <a:latin typeface="Courier"/>
-              </a:rPr>
-              <a:t>, num_pipe, num_cols),</a:t>
-            </a:r>
-            <a:br/>
-            <a:r>
-              <a:rPr>
-                <a:latin typeface="Courier"/>
-              </a:rPr>
-              <a:t>    (</a:t>
-            </a:r>
-            <a:r>
-              <a:rPr>
-                <a:solidFill>
-                  <a:srgbClr val="4070A0"/>
-                </a:solidFill>
-                <a:latin typeface="Courier"/>
-              </a:rPr>
-              <a:t>"cat"</a:t>
-            </a:r>
-            <a:r>
-              <a:rPr>
-                <a:latin typeface="Courier"/>
-              </a:rPr>
-              <a:t>, cat_pipe, cat_cols),</a:t>
-            </a:r>
-            <a:br/>
-            <a:r>
-              <a:rPr>
-                <a:latin typeface="Courier"/>
-              </a:rPr>
-              <a:t>])</a:t>
-            </a:r>
-            <a:br/>
-            <a:r>
-              <a:rPr>
-                <a:latin typeface="Courier"/>
-              </a:rPr>
-              <a:t>model </a:t>
-            </a:r>
-            <a:r>
-              <a:rPr>
-                <a:solidFill>
-                  <a:srgbClr val="666666"/>
-                </a:solidFill>
-                <a:latin typeface="Courier"/>
-              </a:rPr>
-              <a:t>=</a:t>
-            </a:r>
-            <a:r>
-              <a:rPr>
-                <a:latin typeface="Courier"/>
-              </a:rPr>
-              <a:t> Pipeline([</a:t>
-            </a:r>
-            <a:br/>
-            <a:r>
-              <a:rPr>
-                <a:latin typeface="Courier"/>
-              </a:rPr>
-              <a:t>    (</a:t>
-            </a:r>
-            <a:r>
-              <a:rPr>
-                <a:solidFill>
-                  <a:srgbClr val="4070A0"/>
-                </a:solidFill>
-                <a:latin typeface="Courier"/>
-              </a:rPr>
-              <a:t>"prep"</a:t>
-            </a:r>
-            <a:r>
-              <a:rPr>
-                <a:latin typeface="Courier"/>
-              </a:rPr>
-              <a:t>, prep),</a:t>
-            </a:r>
-            <a:br/>
-            <a:r>
-              <a:rPr>
-                <a:latin typeface="Courier"/>
-              </a:rPr>
-              <a:t>    (</a:t>
-            </a:r>
-            <a:r>
-              <a:rPr>
-                <a:solidFill>
-                  <a:srgbClr val="4070A0"/>
-                </a:solidFill>
-                <a:latin typeface="Courier"/>
-              </a:rPr>
-              <a:t>"clf"</a:t>
-            </a:r>
-            <a:r>
-              <a:rPr>
-                <a:latin typeface="Courier"/>
-              </a:rPr>
-              <a:t>, clf),</a:t>
-            </a:r>
-            <a:br/>
-            <a:r>
-              <a:rPr>
-                <a:latin typeface="Courier"/>
-              </a:rPr>
-              <a:t>])</a:t>
-            </a:r>
-            <a:br/>
-            <a:r>
-              <a:rPr>
-                <a:latin typeface="Courier"/>
-              </a:rPr>
-              <a:t>model.fit(X_train, y_train)</a:t>
-            </a:r>
-          </a:p>
-        </p:txBody>
-      </p:sp>
-    </p:spTree>
-  </p:cSld>
-</p:sld>
-</file>
-
 <file path=ppt/slides/slide35.xml><?xml version="1.0" encoding="utf-8"?>
 <p:sld xmlns:a="http://schemas.openxmlformats.org/drawingml/2006/main" xmlns:r="http://schemas.openxmlformats.org/officeDocument/2006/relationships" xmlns:p="http://schemas.openxmlformats.org/presentationml/2006/main">
   <p:cSld>
@@ -12079,7 +12042,7 @@
             </a:pPr>
             <a:r>
               <a:rPr/>
-              <a:t>The model, on churn</a:t>
+              <a:t>The code</a:t>
             </a:r>
           </a:p>
         </p:txBody>
@@ -12104,46 +12067,160 @@
           <a:bodyPr/>
           <a:lstStyle/>
           <a:p>
-            <a:pPr lvl="0"/>
-            <a:r>
-              <a:rPr/>
-              <a:t>Baseline: </a:t>
-            </a:r>
-            <a:r>
-              <a:rPr b="1"/>
-              <a:t>0.806</a:t>
-            </a:r>
-          </a:p>
-          <a:p>
-            <a:pPr lvl="0"/>
-            <a:r>
-              <a:rPr/>
-              <a:t>Model (numeric + the low-cardinality categoricals, no zip): </a:t>
-            </a:r>
-            <a:r>
-              <a:rPr b="1"/>
-              <a:t>0.820</a:t>
-            </a:r>
-            <a:r>
-              <a:rPr/>
-              <a:t> accuracy, </a:t>
-            </a:r>
-            <a:r>
-              <a:rPr b="1"/>
-              <a:t>0.751</a:t>
-            </a:r>
-            <a:r>
-              <a:rPr/>
-              <a:t> AUC (area under the receiver operating characteristic curve)</a:t>
-            </a:r>
-          </a:p>
-          <a:p>
-            <a:pPr lvl="0" indent="0" marL="0">
-              <a:buNone/>
-            </a:pPr>
-            <a:r>
-              <a:rPr/>
-              <a:t>Modest accuracy gain. Why?</a:t>
+            <a:pPr lvl="0" indent="0">
+              <a:buNone/>
+            </a:pPr>
+            <a:r>
+              <a:rPr>
+                <a:latin typeface="Courier"/>
+              </a:rPr>
+              <a:t>prep </a:t>
+            </a:r>
+            <a:r>
+              <a:rPr>
+                <a:solidFill>
+                  <a:srgbClr val="666666"/>
+                </a:solidFill>
+                <a:latin typeface="Courier"/>
+              </a:rPr>
+              <a:t>=</a:t>
+            </a:r>
+            <a:r>
+              <a:rPr>
+                <a:latin typeface="Courier"/>
+              </a:rPr>
+              <a:t> ColumnTransformer([</a:t>
+            </a:r>
+            <a:br/>
+            <a:r>
+              <a:rPr>
+                <a:latin typeface="Courier"/>
+              </a:rPr>
+              <a:t>    (</a:t>
+            </a:r>
+            <a:r>
+              <a:rPr>
+                <a:solidFill>
+                  <a:srgbClr val="4070A0"/>
+                </a:solidFill>
+                <a:latin typeface="Courier"/>
+              </a:rPr>
+              <a:t>"num"</a:t>
+            </a:r>
+            <a:r>
+              <a:rPr>
+                <a:latin typeface="Courier"/>
+              </a:rPr>
+              <a:t>, num_pipe, num_cols),</a:t>
+            </a:r>
+            <a:br/>
+            <a:r>
+              <a:rPr>
+                <a:latin typeface="Courier"/>
+              </a:rPr>
+              <a:t>    (</a:t>
+            </a:r>
+            <a:r>
+              <a:rPr>
+                <a:solidFill>
+                  <a:srgbClr val="4070A0"/>
+                </a:solidFill>
+                <a:latin typeface="Courier"/>
+              </a:rPr>
+              <a:t>"cat"</a:t>
+            </a:r>
+            <a:r>
+              <a:rPr>
+                <a:latin typeface="Courier"/>
+              </a:rPr>
+              <a:t>, cat_pipe, cat_cols),</a:t>
+            </a:r>
+            <a:br/>
+            <a:r>
+              <a:rPr>
+                <a:latin typeface="Courier"/>
+              </a:rPr>
+              <a:t>])</a:t>
+            </a:r>
+            <a:br/>
+            <a:r>
+              <a:rPr>
+                <a:latin typeface="Courier"/>
+              </a:rPr>
+              <a:t>model </a:t>
+            </a:r>
+            <a:r>
+              <a:rPr>
+                <a:solidFill>
+                  <a:srgbClr val="666666"/>
+                </a:solidFill>
+                <a:latin typeface="Courier"/>
+              </a:rPr>
+              <a:t>=</a:t>
+            </a:r>
+            <a:r>
+              <a:rPr>
+                <a:latin typeface="Courier"/>
+              </a:rPr>
+              <a:t> Pipeline([</a:t>
+            </a:r>
+            <a:br/>
+            <a:r>
+              <a:rPr>
+                <a:latin typeface="Courier"/>
+              </a:rPr>
+              <a:t>    (</a:t>
+            </a:r>
+            <a:r>
+              <a:rPr>
+                <a:solidFill>
+                  <a:srgbClr val="4070A0"/>
+                </a:solidFill>
+                <a:latin typeface="Courier"/>
+              </a:rPr>
+              <a:t>"prep"</a:t>
+            </a:r>
+            <a:r>
+              <a:rPr>
+                <a:latin typeface="Courier"/>
+              </a:rPr>
+              <a:t>, prep),</a:t>
+            </a:r>
+            <a:br/>
+            <a:r>
+              <a:rPr>
+                <a:latin typeface="Courier"/>
+              </a:rPr>
+              <a:t>    (</a:t>
+            </a:r>
+            <a:r>
+              <a:rPr>
+                <a:solidFill>
+                  <a:srgbClr val="4070A0"/>
+                </a:solidFill>
+                <a:latin typeface="Courier"/>
+              </a:rPr>
+              <a:t>"clf"</a:t>
+            </a:r>
+            <a:r>
+              <a:rPr>
+                <a:latin typeface="Courier"/>
+              </a:rPr>
+              <a:t>, clf),</a:t>
+            </a:r>
+            <a:br/>
+            <a:r>
+              <a:rPr>
+                <a:latin typeface="Courier"/>
+              </a:rPr>
+              <a:t>])</a:t>
+            </a:r>
+            <a:br/>
+            <a:r>
+              <a:rPr>
+                <a:latin typeface="Courier"/>
+              </a:rPr>
+              <a:t>model.fit(X_train, y_train)</a:t>
             </a:r>
           </a:p>
         </p:txBody>
@@ -12154,6 +12231,122 @@
 </file>
 
 <file path=ppt/slides/slide36.xml><?xml version="1.0" encoding="utf-8"?>
+<p:sld xmlns:a="http://schemas.openxmlformats.org/drawingml/2006/main" xmlns:r="http://schemas.openxmlformats.org/officeDocument/2006/relationships" xmlns:p="http://schemas.openxmlformats.org/presentationml/2006/main">
+  <p:cSld>
+    <p:spTree>
+      <p:nvGrpSpPr>
+        <p:cNvPr id="1" name=""/>
+        <p:cNvGrpSpPr/>
+        <p:nvPr/>
+      </p:nvGrpSpPr>
+      <p:grpSpPr>
+        <a:xfrm>
+          <a:off x="0" y="0"/>
+          <a:ext cx="0" cy="0"/>
+          <a:chOff x="0" y="0"/>
+          <a:chExt cx="0" cy="0"/>
+        </a:xfrm>
+      </p:grpSpPr>
+      <p:sp>
+        <p:nvSpPr>
+          <p:cNvPr id="2" name="Title 1"/>
+          <p:cNvSpPr>
+            <a:spLocks noGrp="1"/>
+          </p:cNvSpPr>
+          <p:nvPr>
+            <p:ph type="title"/>
+          </p:nvPr>
+        </p:nvSpPr>
+        <p:spPr>
+          <a:xfrm>
+            <a:off x="457200" y="205979"/>
+            <a:ext cx="8229600" cy="857250"/>
+          </a:xfrm>
+        </p:spPr>
+        <p:txBody>
+          <a:bodyPr/>
+          <a:lstStyle/>
+          <a:p>
+            <a:pPr lvl="0" indent="0" marL="0">
+              <a:buNone/>
+            </a:pPr>
+            <a:r>
+              <a:rPr/>
+              <a:t>The model, on churn</a:t>
+            </a:r>
+          </a:p>
+        </p:txBody>
+      </p:sp>
+      <p:sp>
+        <p:nvSpPr>
+          <p:cNvPr id="3" name="Content Placeholder 2"/>
+          <p:cNvSpPr>
+            <a:spLocks noGrp="1"/>
+          </p:cNvSpPr>
+          <p:nvPr>
+            <p:ph idx="1"/>
+          </p:nvPr>
+        </p:nvSpPr>
+        <p:spPr>
+          <a:xfrm>
+            <a:off x="457200" y="1200151"/>
+            <a:ext cx="8229600" cy="3394472"/>
+          </a:xfrm>
+        </p:spPr>
+        <p:txBody>
+          <a:bodyPr/>
+          <a:lstStyle/>
+          <a:p>
+            <a:pPr lvl="0"/>
+            <a:r>
+              <a:rPr/>
+              <a:t>Baseline: </a:t>
+            </a:r>
+            <a:r>
+              <a:rPr b="1"/>
+              <a:t>0.806</a:t>
+            </a:r>
+          </a:p>
+          <a:p>
+            <a:pPr lvl="0"/>
+            <a:r>
+              <a:rPr/>
+              <a:t>Model (numeric + the low-cardinality categoricals, no zip): </a:t>
+            </a:r>
+            <a:r>
+              <a:rPr b="1"/>
+              <a:t>0.820</a:t>
+            </a:r>
+            <a:r>
+              <a:rPr/>
+              <a:t> accuracy, </a:t>
+            </a:r>
+            <a:r>
+              <a:rPr b="1"/>
+              <a:t>0.751</a:t>
+            </a:r>
+            <a:r>
+              <a:rPr/>
+              <a:t> AUC (area under the receiver operating characteristic curve)</a:t>
+            </a:r>
+          </a:p>
+          <a:p>
+            <a:pPr lvl="0" indent="0" marL="0">
+              <a:buNone/>
+            </a:pPr>
+            <a:r>
+              <a:rPr/>
+              <a:t>Modest accuracy gain. Why?</a:t>
+            </a:r>
+          </a:p>
+        </p:txBody>
+      </p:sp>
+    </p:spTree>
+  </p:cSld>
+</p:sld>
+</file>
+
+<file path=ppt/slides/slide37.xml><?xml version="1.0" encoding="utf-8"?>
 <p:sld xmlns:a="http://schemas.openxmlformats.org/drawingml/2006/main" xmlns:r="http://schemas.openxmlformats.org/officeDocument/2006/relationships" xmlns:p="http://schemas.openxmlformats.org/presentationml/2006/main">
   <p:cSld>
     <p:spTree>
@@ -12235,7 +12428,7 @@
 </p:sld>
 </file>
 
-<file path=ppt/slides/slide37.xml><?xml version="1.0" encoding="utf-8"?>
+<file path=ppt/slides/slide38.xml><?xml version="1.0" encoding="utf-8"?>
 <p:sld xmlns:a="http://schemas.openxmlformats.org/drawingml/2006/main" xmlns:r="http://schemas.openxmlformats.org/officeDocument/2006/relationships" xmlns:p="http://schemas.openxmlformats.org/presentationml/2006/main">
   <p:cSld>
     <p:spTree>
@@ -12351,7 +12544,7 @@
 </p:sld>
 </file>
 
-<file path=ppt/slides/slide38.xml><?xml version="1.0" encoding="utf-8"?>
+<file path=ppt/slides/slide39.xml><?xml version="1.0" encoding="utf-8"?>
 <p:sld xmlns:a="http://schemas.openxmlformats.org/drawingml/2006/main" xmlns:r="http://schemas.openxmlformats.org/officeDocument/2006/relationships" xmlns:p="http://schemas.openxmlformats.org/presentationml/2006/main">
   <p:cSld>
     <p:spTree>
@@ -12453,7 +12646,122 @@
 </p:sld>
 </file>
 
-<file path=ppt/slides/slide39.xml><?xml version="1.0" encoding="utf-8"?>
+<file path=ppt/slides/slide4.xml><?xml version="1.0" encoding="utf-8"?>
+<p:sld xmlns:a="http://schemas.openxmlformats.org/drawingml/2006/main" xmlns:r="http://schemas.openxmlformats.org/officeDocument/2006/relationships" xmlns:p="http://schemas.openxmlformats.org/presentationml/2006/main">
+  <p:cSld>
+    <p:spTree>
+      <p:nvGrpSpPr>
+        <p:cNvPr id="1" name=""/>
+        <p:cNvGrpSpPr/>
+        <p:nvPr/>
+      </p:nvGrpSpPr>
+      <p:grpSpPr>
+        <a:xfrm>
+          <a:off x="0" y="0"/>
+          <a:ext cx="0" cy="0"/>
+          <a:chOff x="0" y="0"/>
+          <a:chExt cx="0" cy="0"/>
+        </a:xfrm>
+      </p:grpSpPr>
+      <p:sp>
+        <p:nvSpPr>
+          <p:cNvPr id="2" name="Title 1"/>
+          <p:cNvSpPr>
+            <a:spLocks noGrp="1"/>
+          </p:cNvSpPr>
+          <p:nvPr>
+            <p:ph type="title"/>
+          </p:nvPr>
+        </p:nvSpPr>
+        <p:spPr>
+          <a:xfrm>
+            <a:off x="457200" y="205979"/>
+            <a:ext cx="8229600" cy="857250"/>
+          </a:xfrm>
+        </p:spPr>
+        <p:txBody>
+          <a:bodyPr/>
+          <a:lstStyle/>
+          <a:p>
+            <a:pPr lvl="0" indent="0" marL="0">
+              <a:buNone/>
+            </a:pPr>
+            <a:r>
+              <a:rPr/>
+              <a:t>Today</a:t>
+            </a:r>
+          </a:p>
+        </p:txBody>
+      </p:sp>
+      <p:sp>
+        <p:nvSpPr>
+          <p:cNvPr id="3" name="Content Placeholder 2"/>
+          <p:cNvSpPr>
+            <a:spLocks noGrp="1"/>
+          </p:cNvSpPr>
+          <p:nvPr>
+            <p:ph idx="1"/>
+          </p:nvPr>
+        </p:nvSpPr>
+        <p:spPr>
+          <a:xfrm>
+            <a:off x="457200" y="1200151"/>
+            <a:ext cx="8229600" cy="3394472"/>
+          </a:xfrm>
+        </p:spPr>
+        <p:txBody>
+          <a:bodyPr/>
+          <a:lstStyle/>
+          <a:p>
+            <a:pPr lvl="0"/>
+            <a:r>
+              <a:rPr/>
+              <a:t>Exploratory analysis</a:t>
+            </a:r>
+          </a:p>
+          <a:p>
+            <a:pPr lvl="0"/>
+            <a:r>
+              <a:rPr/>
+              <a:t>Missing values</a:t>
+            </a:r>
+          </a:p>
+          <a:p>
+            <a:pPr lvl="0"/>
+            <a:r>
+              <a:rPr/>
+              <a:t>Outliers</a:t>
+            </a:r>
+          </a:p>
+          <a:p>
+            <a:pPr lvl="0"/>
+            <a:r>
+              <a:rPr/>
+              <a:t>Scaling and encoding</a:t>
+            </a:r>
+          </a:p>
+          <a:p>
+            <a:pPr lvl="0"/>
+            <a:r>
+              <a:rPr/>
+              <a:t>Feature engineering and pipelines</a:t>
+            </a:r>
+          </a:p>
+          <a:p>
+            <a:pPr lvl="0"/>
+            <a:r>
+              <a:rPr/>
+              <a:t>Leakage, in a form nothing warns you about</a:t>
+            </a:r>
+          </a:p>
+        </p:txBody>
+      </p:sp>
+    </p:spTree>
+  </p:cSld>
+</p:sld>
+</file>
+
+<file path=ppt/slides/slide40.xml><?xml version="1.0" encoding="utf-8"?>
 <p:sld xmlns:a="http://schemas.openxmlformats.org/drawingml/2006/main" xmlns:r="http://schemas.openxmlformats.org/officeDocument/2006/relationships" xmlns:p="http://schemas.openxmlformats.org/presentationml/2006/main">
   <p:cSld>
     <p:spTree>
@@ -12535,226 +12843,6 @@
 </p:sld>
 </file>
 
-<file path=ppt/slides/slide4.xml><?xml version="1.0" encoding="utf-8"?>
-<p:sld xmlns:a="http://schemas.openxmlformats.org/drawingml/2006/main" xmlns:r="http://schemas.openxmlformats.org/officeDocument/2006/relationships" xmlns:p="http://schemas.openxmlformats.org/presentationml/2006/main">
-  <p:cSld>
-    <p:spTree>
-      <p:nvGrpSpPr>
-        <p:cNvPr id="1" name=""/>
-        <p:cNvGrpSpPr/>
-        <p:nvPr/>
-      </p:nvGrpSpPr>
-      <p:grpSpPr>
-        <a:xfrm>
-          <a:off x="0" y="0"/>
-          <a:ext cx="0" cy="0"/>
-          <a:chOff x="0" y="0"/>
-          <a:chExt cx="0" cy="0"/>
-        </a:xfrm>
-      </p:grpSpPr>
-      <p:sp>
-        <p:nvSpPr>
-          <p:cNvPr id="2" name="Title 1"/>
-          <p:cNvSpPr>
-            <a:spLocks noGrp="1"/>
-          </p:cNvSpPr>
-          <p:nvPr>
-            <p:ph type="title"/>
-          </p:nvPr>
-        </p:nvSpPr>
-        <p:spPr>
-          <a:xfrm>
-            <a:off x="457200" y="205979"/>
-            <a:ext cx="8229600" cy="857250"/>
-          </a:xfrm>
-        </p:spPr>
-        <p:txBody>
-          <a:bodyPr/>
-          <a:lstStyle/>
-          <a:p>
-            <a:pPr lvl="0" indent="0" marL="0">
-              <a:buNone/>
-            </a:pPr>
-            <a:r>
-              <a:rPr/>
-              <a:t>Today</a:t>
-            </a:r>
-          </a:p>
-        </p:txBody>
-      </p:sp>
-      <p:sp>
-        <p:nvSpPr>
-          <p:cNvPr id="3" name="Content Placeholder 2"/>
-          <p:cNvSpPr>
-            <a:spLocks noGrp="1"/>
-          </p:cNvSpPr>
-          <p:nvPr>
-            <p:ph idx="1"/>
-          </p:nvPr>
-        </p:nvSpPr>
-        <p:spPr>
-          <a:xfrm>
-            <a:off x="457200" y="1200151"/>
-            <a:ext cx="8229600" cy="3394472"/>
-          </a:xfrm>
-        </p:spPr>
-        <p:txBody>
-          <a:bodyPr/>
-          <a:lstStyle/>
-          <a:p>
-            <a:pPr lvl="0"/>
-            <a:r>
-              <a:rPr/>
-              <a:t>Exploratory analysis</a:t>
-            </a:r>
-          </a:p>
-          <a:p>
-            <a:pPr lvl="0"/>
-            <a:r>
-              <a:rPr/>
-              <a:t>Missing values</a:t>
-            </a:r>
-          </a:p>
-          <a:p>
-            <a:pPr lvl="0"/>
-            <a:r>
-              <a:rPr/>
-              <a:t>Outliers</a:t>
-            </a:r>
-          </a:p>
-          <a:p>
-            <a:pPr lvl="0"/>
-            <a:r>
-              <a:rPr/>
-              <a:t>Scaling and encoding</a:t>
-            </a:r>
-          </a:p>
-          <a:p>
-            <a:pPr lvl="0"/>
-            <a:r>
-              <a:rPr/>
-              <a:t>Feature engineering and pipelines</a:t>
-            </a:r>
-          </a:p>
-          <a:p>
-            <a:pPr lvl="0"/>
-            <a:r>
-              <a:rPr/>
-              <a:t>Leakage, in a form nothing warns you about</a:t>
-            </a:r>
-          </a:p>
-        </p:txBody>
-      </p:sp>
-    </p:spTree>
-  </p:cSld>
-</p:sld>
-</file>
-
-<file path=ppt/slides/slide40.xml><?xml version="1.0" encoding="utf-8"?>
-<p:sld xmlns:a="http://schemas.openxmlformats.org/drawingml/2006/main" xmlns:r="http://schemas.openxmlformats.org/officeDocument/2006/relationships" xmlns:p="http://schemas.openxmlformats.org/presentationml/2006/main">
-  <p:cSld>
-    <p:spTree>
-      <p:nvGrpSpPr>
-        <p:cNvPr id="1" name=""/>
-        <p:cNvGrpSpPr/>
-        <p:nvPr/>
-      </p:nvGrpSpPr>
-      <p:grpSpPr>
-        <a:xfrm>
-          <a:off x="0" y="0"/>
-          <a:ext cx="0" cy="0"/>
-          <a:chOff x="0" y="0"/>
-          <a:chExt cx="0" cy="0"/>
-        </a:xfrm>
-      </p:grpSpPr>
-      <p:sp>
-        <p:nvSpPr>
-          <p:cNvPr id="2" name="Title 1"/>
-          <p:cNvSpPr>
-            <a:spLocks noGrp="1"/>
-          </p:cNvSpPr>
-          <p:nvPr>
-            <p:ph type="title"/>
-          </p:nvPr>
-        </p:nvSpPr>
-        <p:spPr>
-          <a:xfrm>
-            <a:off x="457200" y="205979"/>
-            <a:ext cx="8229600" cy="857250"/>
-          </a:xfrm>
-        </p:spPr>
-        <p:txBody>
-          <a:bodyPr/>
-          <a:lstStyle/>
-          <a:p>
-            <a:pPr lvl="0" indent="0" marL="0">
-              <a:buNone/>
-            </a:pPr>
-            <a:r>
-              <a:rPr/>
-              <a:t>Leak 1: impute before splitting</a:t>
-            </a:r>
-          </a:p>
-        </p:txBody>
-      </p:sp>
-      <p:sp>
-        <p:nvSpPr>
-          <p:cNvPr id="3" name="Content Placeholder 2"/>
-          <p:cNvSpPr>
-            <a:spLocks noGrp="1"/>
-          </p:cNvSpPr>
-          <p:nvPr>
-            <p:ph idx="1"/>
-          </p:nvPr>
-        </p:nvSpPr>
-        <p:spPr>
-          <a:xfrm>
-            <a:off x="457200" y="1200151"/>
-            <a:ext cx="8229600" cy="3394472"/>
-          </a:xfrm>
-        </p:spPr>
-        <p:txBody>
-          <a:bodyPr/>
-          <a:lstStyle/>
-          <a:p>
-            <a:pPr lvl="0" indent="0" marL="0">
-              <a:buNone/>
-            </a:pPr>
-            <a:r>
-              <a:rPr>
-                <a:latin typeface="Courier"/>
-              </a:rPr>
-              <a:t>KNNImputer</a:t>
-            </a:r>
-            <a:r>
-              <a:rPr/>
-              <a:t> fills a gap using </a:t>
-            </a:r>
-            <a:r>
-              <a:rPr b="1"/>
-              <a:t>other rows’ values</a:t>
-            </a:r>
-            <a:r>
-              <a:rPr/>
-              <a:t>.</a:t>
-            </a:r>
-          </a:p>
-          <a:p>
-            <a:pPr lvl="0" indent="0" marL="0">
-              <a:buNone/>
-            </a:pPr>
-            <a:r>
-              <a:rPr/>
-              <a:t>Fit it on train + test, and some of those rows are in the test set.</a:t>
-            </a:r>
-          </a:p>
-        </p:txBody>
-      </p:sp>
-    </p:spTree>
-  </p:cSld>
-</p:sld>
-</file>
-
 <file path=ppt/slides/slide41.xml><?xml version="1.0" encoding="utf-8"?>
 <p:sld xmlns:a="http://schemas.openxmlformats.org/drawingml/2006/main" xmlns:r="http://schemas.openxmlformats.org/officeDocument/2006/relationships" xmlns:p="http://schemas.openxmlformats.org/presentationml/2006/main">
   <p:cSld>
@@ -12797,7 +12885,7 @@
             </a:pPr>
             <a:r>
               <a:rPr/>
-              <a:t>The smoking gun</a:t>
+              <a:t>Leak 1: impute before splitting</a:t>
             </a:r>
           </a:p>
         </p:txBody>
@@ -12826,29 +12914,31 @@
               <a:buNone/>
             </a:pPr>
             <a:r>
+              <a:rPr>
+                <a:latin typeface="Courier"/>
+              </a:rPr>
+              <a:t>KNNImputer</a:t>
+            </a:r>
+            <a:r>
+              <a:rPr/>
+              <a:t> fills a gap using </a:t>
+            </a:r>
+            <a:r>
               <a:rPr b="1"/>
-              <a:t>94 of 128</a:t>
-            </a:r>
-            <a:r>
-              <a:rPr/>
-              <a:t> training rows with missing age had a </a:t>
-            </a:r>
-            <a:r>
-              <a:rPr b="1"/>
-              <a:t>test-set row</a:t>
-            </a:r>
-            <a:r>
-              <a:rPr/>
-              <a:t> among the five donors used to fill it.</a:t>
-            </a:r>
-          </a:p>
-          <a:p>
-            <a:pPr lvl="0" indent="0" marL="0">
-              <a:buNone/>
-            </a:pPr>
-            <a:r>
-              <a:rPr/>
-              <a:t>Nothing raised an error.</a:t>
+              <a:t>other rows’ values</a:t>
+            </a:r>
+            <a:r>
+              <a:rPr/>
+              <a:t>.</a:t>
+            </a:r>
+          </a:p>
+          <a:p>
+            <a:pPr lvl="0" indent="0" marL="0">
+              <a:buNone/>
+            </a:pPr>
+            <a:r>
+              <a:rPr/>
+              <a:t>Fit it on train + test, and some of those rows are in the test set.</a:t>
             </a:r>
           </a:p>
         </p:txBody>
@@ -12859,6 +12949,109 @@
 </file>
 
 <file path=ppt/slides/slide42.xml><?xml version="1.0" encoding="utf-8"?>
+<p:sld xmlns:a="http://schemas.openxmlformats.org/drawingml/2006/main" xmlns:r="http://schemas.openxmlformats.org/officeDocument/2006/relationships" xmlns:p="http://schemas.openxmlformats.org/presentationml/2006/main">
+  <p:cSld>
+    <p:spTree>
+      <p:nvGrpSpPr>
+        <p:cNvPr id="1" name=""/>
+        <p:cNvGrpSpPr/>
+        <p:nvPr/>
+      </p:nvGrpSpPr>
+      <p:grpSpPr>
+        <a:xfrm>
+          <a:off x="0" y="0"/>
+          <a:ext cx="0" cy="0"/>
+          <a:chOff x="0" y="0"/>
+          <a:chExt cx="0" cy="0"/>
+        </a:xfrm>
+      </p:grpSpPr>
+      <p:sp>
+        <p:nvSpPr>
+          <p:cNvPr id="2" name="Title 1"/>
+          <p:cNvSpPr>
+            <a:spLocks noGrp="1"/>
+          </p:cNvSpPr>
+          <p:nvPr>
+            <p:ph type="title"/>
+          </p:nvPr>
+        </p:nvSpPr>
+        <p:spPr>
+          <a:xfrm>
+            <a:off x="457200" y="205979"/>
+            <a:ext cx="8229600" cy="857250"/>
+          </a:xfrm>
+        </p:spPr>
+        <p:txBody>
+          <a:bodyPr/>
+          <a:lstStyle/>
+          <a:p>
+            <a:pPr lvl="0" indent="0" marL="0">
+              <a:buNone/>
+            </a:pPr>
+            <a:r>
+              <a:rPr/>
+              <a:t>The smoking gun</a:t>
+            </a:r>
+          </a:p>
+        </p:txBody>
+      </p:sp>
+      <p:sp>
+        <p:nvSpPr>
+          <p:cNvPr id="3" name="Content Placeholder 2"/>
+          <p:cNvSpPr>
+            <a:spLocks noGrp="1"/>
+          </p:cNvSpPr>
+          <p:nvPr>
+            <p:ph idx="1"/>
+          </p:nvPr>
+        </p:nvSpPr>
+        <p:spPr>
+          <a:xfrm>
+            <a:off x="457200" y="1200151"/>
+            <a:ext cx="8229600" cy="3394472"/>
+          </a:xfrm>
+        </p:spPr>
+        <p:txBody>
+          <a:bodyPr/>
+          <a:lstStyle/>
+          <a:p>
+            <a:pPr lvl="0" indent="0" marL="0">
+              <a:buNone/>
+            </a:pPr>
+            <a:r>
+              <a:rPr b="1"/>
+              <a:t>94 of 128</a:t>
+            </a:r>
+            <a:r>
+              <a:rPr/>
+              <a:t> training rows with missing age had a </a:t>
+            </a:r>
+            <a:r>
+              <a:rPr b="1"/>
+              <a:t>test-set row</a:t>
+            </a:r>
+            <a:r>
+              <a:rPr/>
+              <a:t> among the five donors used to fill it.</a:t>
+            </a:r>
+          </a:p>
+          <a:p>
+            <a:pPr lvl="0" indent="0" marL="0">
+              <a:buNone/>
+            </a:pPr>
+            <a:r>
+              <a:rPr/>
+              <a:t>Nothing raised an error.</a:t>
+            </a:r>
+          </a:p>
+        </p:txBody>
+      </p:sp>
+    </p:spTree>
+  </p:cSld>
+</p:sld>
+</file>
+
+<file path=ppt/slides/slide43.xml><?xml version="1.0" encoding="utf-8"?>
 <p:sld xmlns:a="http://schemas.openxmlformats.org/drawingml/2006/main" xmlns:r="http://schemas.openxmlformats.org/officeDocument/2006/relationships" xmlns:p="http://schemas.openxmlformats.org/presentationml/2006/main">
   <p:cSld>
     <p:spTree>
@@ -12940,7 +13133,7 @@
 </p:sld>
 </file>
 
-<file path=ppt/slides/slide43.xml><?xml version="1.0" encoding="utf-8"?>
+<file path=ppt/slides/slide44.xml><?xml version="1.0" encoding="utf-8"?>
 <p:sld xmlns:a="http://schemas.openxmlformats.org/drawingml/2006/main" xmlns:r="http://schemas.openxmlformats.org/officeDocument/2006/relationships" xmlns:p="http://schemas.openxmlformats.org/presentationml/2006/main">
   <p:cSld>
     <p:spTree>
@@ -13040,7 +13233,7 @@
 </p:sld>
 </file>
 
-<file path=ppt/slides/slide44.xml><?xml version="1.0" encoding="utf-8"?>
+<file path=ppt/slides/slide45.xml><?xml version="1.0" encoding="utf-8"?>
 <p:sld xmlns:a="http://schemas.openxmlformats.org/drawingml/2006/main" xmlns:r="http://schemas.openxmlformats.org/officeDocument/2006/relationships" xmlns:p="http://schemas.openxmlformats.org/presentationml/2006/main">
   <p:cSld>
     <p:spTree>
@@ -13122,7 +13315,7 @@
 </p:sld>
 </file>
 
-<file path=ppt/slides/slide45.xml><?xml version="1.0" encoding="utf-8"?>
+<file path=ppt/slides/slide46.xml><?xml version="1.0" encoding="utf-8"?>
 <p:sld xmlns:a="http://schemas.openxmlformats.org/drawingml/2006/main" xmlns:r="http://schemas.openxmlformats.org/officeDocument/2006/relationships" xmlns:p="http://schemas.openxmlformats.org/presentationml/2006/main">
   <p:cSld>
     <p:spTree>
@@ -13204,7 +13397,7 @@
 </p:sld>
 </file>
 
-<file path=ppt/slides/slide46.xml><?xml version="1.0" encoding="utf-8"?>
+<file path=ppt/slides/slide47.xml><?xml version="1.0" encoding="utf-8"?>
 <p:sld xmlns:a="http://schemas.openxmlformats.org/drawingml/2006/main" xmlns:r="http://schemas.openxmlformats.org/officeDocument/2006/relationships" xmlns:p="http://schemas.openxmlformats.org/presentationml/2006/main">
   <p:cSld>
     <p:spTree>
@@ -13286,111 +13479,6 @@
 </p:sld>
 </file>
 
-<file path=ppt/slides/slide47.xml><?xml version="1.0" encoding="utf-8"?>
-<p:sld xmlns:a="http://schemas.openxmlformats.org/drawingml/2006/main" xmlns:r="http://schemas.openxmlformats.org/officeDocument/2006/relationships" xmlns:p="http://schemas.openxmlformats.org/presentationml/2006/main">
-  <p:cSld>
-    <p:spTree>
-      <p:nvGrpSpPr>
-        <p:cNvPr id="1" name=""/>
-        <p:cNvGrpSpPr/>
-        <p:nvPr/>
-      </p:nvGrpSpPr>
-      <p:grpSpPr>
-        <a:xfrm>
-          <a:off x="0" y="0"/>
-          <a:ext cx="0" cy="0"/>
-          <a:chOff x="0" y="0"/>
-          <a:chExt cx="0" cy="0"/>
-        </a:xfrm>
-      </p:grpSpPr>
-      <p:sp>
-        <p:nvSpPr>
-          <p:cNvPr id="2" name="Title 1"/>
-          <p:cNvSpPr>
-            <a:spLocks noGrp="1"/>
-          </p:cNvSpPr>
-          <p:nvPr>
-            <p:ph type="title"/>
-          </p:nvPr>
-        </p:nvSpPr>
-        <p:spPr>
-          <a:xfrm>
-            <a:off x="457200" y="205979"/>
-            <a:ext cx="8229600" cy="857250"/>
-          </a:xfrm>
-        </p:spPr>
-        <p:txBody>
-          <a:bodyPr/>
-          <a:lstStyle/>
-          <a:p>
-            <a:pPr lvl="0" indent="0" marL="0">
-              <a:buNone/>
-            </a:pPr>
-            <a:r>
-              <a:rPr/>
-              <a:t>The fix</a:t>
-            </a:r>
-          </a:p>
-        </p:txBody>
-      </p:sp>
-      <p:sp>
-        <p:nvSpPr>
-          <p:cNvPr id="3" name="Content Placeholder 2"/>
-          <p:cNvSpPr>
-            <a:spLocks noGrp="1"/>
-          </p:cNvSpPr>
-          <p:nvPr>
-            <p:ph idx="1"/>
-          </p:nvPr>
-        </p:nvSpPr>
-        <p:spPr>
-          <a:xfrm>
-            <a:off x="457200" y="1200151"/>
-            <a:ext cx="8229600" cy="3394472"/>
-          </a:xfrm>
-        </p:spPr>
-        <p:txBody>
-          <a:bodyPr/>
-          <a:lstStyle/>
-          <a:p>
-            <a:pPr lvl="0" indent="0" marL="0">
-              <a:buNone/>
-            </a:pPr>
-            <a:r>
-              <a:rPr>
-                <a:latin typeface="Courier"/>
-              </a:rPr>
-              <a:t>sklearn.preprocessing.TargetEncoder</a:t>
-            </a:r>
-            <a:r>
-              <a:rPr/>
-              <a:t>: cross-fitted inside the pipeline.</a:t>
-            </a:r>
-          </a:p>
-          <a:p>
-            <a:pPr lvl="0" indent="0" marL="0">
-              <a:buNone/>
-            </a:pPr>
-            <a:r>
-              <a:rPr/>
-              <a:t>Each row’s encoded value comes from </a:t>
-            </a:r>
-            <a:r>
-              <a:rPr b="1"/>
-              <a:t>other</a:t>
-            </a:r>
-            <a:r>
-              <a:rPr/>
-              <a:t> folds, never its own label.</a:t>
-            </a:r>
-          </a:p>
-        </p:txBody>
-      </p:sp>
-    </p:spTree>
-  </p:cSld>
-</p:sld>
-</file>
-
 <file path=ppt/slides/slide48.xml><?xml version="1.0" encoding="utf-8"?>
 <p:sld xmlns:a="http://schemas.openxmlformats.org/drawingml/2006/main" xmlns:r="http://schemas.openxmlformats.org/officeDocument/2006/relationships" xmlns:p="http://schemas.openxmlformats.org/presentationml/2006/main">
   <p:cSld>
@@ -13433,7 +13521,7 @@
             </a:pPr>
             <a:r>
               <a:rPr/>
-              <a:t>The rule, restated</a:t>
+              <a:t>The fix</a:t>
             </a:r>
           </a:p>
         </p:txBody>
@@ -13462,25 +13550,31 @@
               <a:buNone/>
             </a:pPr>
             <a:r>
-              <a:rPr/>
-              <a:t>Everything that </a:t>
+              <a:rPr>
+                <a:latin typeface="Courier"/>
+              </a:rPr>
+              <a:t>sklearn.preprocessing.TargetEncoder</a:t>
+            </a:r>
+            <a:r>
+              <a:rPr/>
+              <a:t>: cross-fitted inside the pipeline.</a:t>
+            </a:r>
+          </a:p>
+          <a:p>
+            <a:pPr lvl="0" indent="0" marL="0">
+              <a:buNone/>
+            </a:pPr>
+            <a:r>
+              <a:rPr/>
+              <a:t>Each row’s encoded value comes from </a:t>
             </a:r>
             <a:r>
               <a:rPr b="1"/>
-              <a:t>learns from data</a:t>
-            </a:r>
-            <a:r>
-              <a:rPr/>
-              <a:t> belongs inside the fold it is fitted on.</a:t>
-            </a:r>
-          </a:p>
-          <a:p>
-            <a:pPr lvl="0" indent="0" marL="0">
-              <a:buNone/>
-            </a:pPr>
-            <a:r>
-              <a:rPr/>
-              <a:t>A mean. A median. A set of neighbours. A per-category average. A set of bin edges.</a:t>
+              <a:t>other</a:t>
+            </a:r>
+            <a:r>
+              <a:rPr/>
+              <a:t> folds, never its own label.</a:t>
             </a:r>
           </a:p>
         </p:txBody>
@@ -13532,7 +13626,7 @@
             </a:pPr>
             <a:r>
               <a:rPr/>
-              <a:t>Notebook 3, live</a:t>
+              <a:t>The rule, restated</a:t>
             </a:r>
           </a:p>
         </p:txBody>
@@ -13562,7 +13656,24 @@
             </a:pPr>
             <a:r>
               <a:rPr/>
-              <a:t>Trace the imputation leak. Watch the encoding leak manufacture 0.89 from noise.</a:t>
+              <a:t>Everything that </a:t>
+            </a:r>
+            <a:r>
+              <a:rPr b="1"/>
+              <a:t>learns from data</a:t>
+            </a:r>
+            <a:r>
+              <a:rPr/>
+              <a:t> belongs inside the fold it is fitted on.</a:t>
+            </a:r>
+          </a:p>
+          <a:p>
+            <a:pPr lvl="0" indent="0" marL="0">
+              <a:buNone/>
+            </a:pPr>
+            <a:r>
+              <a:rPr/>
+              <a:t>A mean. A median. A set of neighbours. A per-category average. A set of bin edges.</a:t>
             </a:r>
           </a:p>
         </p:txBody>
@@ -13729,7 +13840,7 @@
             </a:pPr>
             <a:r>
               <a:rPr/>
-              <a:t>What we did today</a:t>
+              <a:t>Notebook 3, live</a:t>
             </a:r>
           </a:p>
         </p:txBody>
@@ -13754,56 +13865,12 @@
           <a:bodyPr/>
           <a:lstStyle/>
           <a:p>
-            <a:pPr lvl="0"/>
-            <a:r>
-              <a:rPr/>
-              <a:t>Explored before transforming: types, gaps, shape, correlations</a:t>
-            </a:r>
-          </a:p>
-          <a:p>
-            <a:pPr lvl="0"/>
-            <a:r>
-              <a:rPr/>
-              <a:t>Diagnosed </a:t>
-            </a:r>
-            <a:r>
-              <a:rPr i="1"/>
-              <a:t>why</a:t>
-            </a:r>
-            <a:r>
-              <a:rPr/>
-              <a:t> values are missing, not just </a:t>
-            </a:r>
-            <a:r>
-              <a:rPr i="1"/>
-              <a:t>how many</a:t>
-            </a:r>
-          </a:p>
-          <a:p>
-            <a:pPr lvl="0"/>
-            <a:r>
-              <a:rPr/>
-              <a:t>Two outlier rules, and what neither can tell you</a:t>
-            </a:r>
-          </a:p>
-          <a:p>
-            <a:pPr lvl="0"/>
-            <a:r>
-              <a:rPr/>
-              <a:t>Scaling, encoding, engineering: all inside </a:t>
-            </a:r>
-            <a:r>
-              <a:rPr>
-                <a:latin typeface="Courier"/>
-              </a:rPr>
-              <a:t>Pipeline</a:t>
-            </a:r>
-          </a:p>
-          <a:p>
-            <a:pPr lvl="0"/>
-            <a:r>
-              <a:rPr/>
-              <a:t>Two leaks that look nothing like leaking</a:t>
+            <a:pPr lvl="0" indent="0" marL="0">
+              <a:buNone/>
+            </a:pPr>
+            <a:r>
+              <a:rPr/>
+              <a:t>Trace the imputation leak. Watch the encoding leak manufacture 0.89 from noise.</a:t>
             </a:r>
           </a:p>
         </p:txBody>
@@ -13855,7 +13922,7 @@
             </a:pPr>
             <a:r>
               <a:rPr/>
-              <a:t>Homework: due Friday 9 October</a:t>
+              <a:t>What we did today</a:t>
             </a:r>
           </a:p>
         </p:txBody>
@@ -13880,31 +13947,56 @@
           <a:bodyPr/>
           <a:lstStyle/>
           <a:p>
-            <a:pPr lvl="0" indent="0" marL="0">
-              <a:buNone/>
-            </a:pPr>
+            <a:pPr lvl="0"/>
+            <a:r>
+              <a:rPr/>
+              <a:t>Explored before transforming: types, gaps, shape, correlations</a:t>
+            </a:r>
+          </a:p>
+          <a:p>
+            <a:pPr lvl="0"/>
+            <a:r>
+              <a:rPr/>
+              <a:t>Diagnosed </a:t>
+            </a:r>
+            <a:r>
+              <a:rPr i="1"/>
+              <a:t>why</a:t>
+            </a:r>
+            <a:r>
+              <a:rPr/>
+              <a:t> values are missing, not just </a:t>
+            </a:r>
+            <a:r>
+              <a:rPr i="1"/>
+              <a:t>how many</a:t>
+            </a:r>
+          </a:p>
+          <a:p>
+            <a:pPr lvl="0"/>
+            <a:r>
+              <a:rPr/>
+              <a:t>Two outlier rules, and what neither can tell you</a:t>
+            </a:r>
+          </a:p>
+          <a:p>
+            <a:pPr lvl="0"/>
+            <a:r>
+              <a:rPr/>
+              <a:t>Scaling, encoding, engineering: all inside </a:t>
+            </a:r>
             <a:r>
               <a:rPr>
                 <a:latin typeface="Courier"/>
               </a:rPr>
-              <a:t>Exercises/02_data_exploration_and_preparation.md</a:t>
-            </a:r>
-          </a:p>
-          <a:p>
-            <a:pPr lvl="0" indent="0" marL="0">
-              <a:buNone/>
-            </a:pPr>
-            <a:r>
-              <a:rPr/>
-              <a:t>Build the full preparation pipeline yourself, and </a:t>
-            </a:r>
-            <a:r>
-              <a:rPr b="1"/>
-              <a:t>find a leak on purpose</a:t>
-            </a:r>
-            <a:r>
-              <a:rPr/>
-              <a:t> before fixing it.</a:t>
+              <a:t>Pipeline</a:t>
+            </a:r>
+          </a:p>
+          <a:p>
+            <a:pPr lvl="0"/>
+            <a:r>
+              <a:rPr/>
+              <a:t>Two leaks that look nothing like leaking</a:t>
             </a:r>
           </a:p>
         </p:txBody>
@@ -13956,6 +14048,107 @@
             </a:pPr>
             <a:r>
               <a:rPr/>
+              <a:t>Homework: due Friday 9 October</a:t>
+            </a:r>
+          </a:p>
+        </p:txBody>
+      </p:sp>
+      <p:sp>
+        <p:nvSpPr>
+          <p:cNvPr id="3" name="Content Placeholder 2"/>
+          <p:cNvSpPr>
+            <a:spLocks noGrp="1"/>
+          </p:cNvSpPr>
+          <p:nvPr>
+            <p:ph idx="1"/>
+          </p:nvPr>
+        </p:nvSpPr>
+        <p:spPr>
+          <a:xfrm>
+            <a:off x="457200" y="1200151"/>
+            <a:ext cx="8229600" cy="3394472"/>
+          </a:xfrm>
+        </p:spPr>
+        <p:txBody>
+          <a:bodyPr/>
+          <a:lstStyle/>
+          <a:p>
+            <a:pPr lvl="0" indent="0" marL="0">
+              <a:buNone/>
+            </a:pPr>
+            <a:r>
+              <a:rPr>
+                <a:latin typeface="Courier"/>
+              </a:rPr>
+              <a:t>Exercises/02_data_exploration_and_preparation.md</a:t>
+            </a:r>
+          </a:p>
+          <a:p>
+            <a:pPr lvl="0" indent="0" marL="0">
+              <a:buNone/>
+            </a:pPr>
+            <a:r>
+              <a:rPr/>
+              <a:t>Build the full preparation pipeline yourself, and </a:t>
+            </a:r>
+            <a:r>
+              <a:rPr b="1"/>
+              <a:t>find a leak on purpose</a:t>
+            </a:r>
+            <a:r>
+              <a:rPr/>
+              <a:t> before fixing it.</a:t>
+            </a:r>
+          </a:p>
+        </p:txBody>
+      </p:sp>
+    </p:spTree>
+  </p:cSld>
+</p:sld>
+</file>
+
+<file path=ppt/slides/slide53.xml><?xml version="1.0" encoding="utf-8"?>
+<p:sld xmlns:a="http://schemas.openxmlformats.org/drawingml/2006/main" xmlns:r="http://schemas.openxmlformats.org/officeDocument/2006/relationships" xmlns:p="http://schemas.openxmlformats.org/presentationml/2006/main">
+  <p:cSld>
+    <p:spTree>
+      <p:nvGrpSpPr>
+        <p:cNvPr id="1" name=""/>
+        <p:cNvGrpSpPr/>
+        <p:nvPr/>
+      </p:nvGrpSpPr>
+      <p:grpSpPr>
+        <a:xfrm>
+          <a:off x="0" y="0"/>
+          <a:ext cx="0" cy="0"/>
+          <a:chOff x="0" y="0"/>
+          <a:chExt cx="0" cy="0"/>
+        </a:xfrm>
+      </p:grpSpPr>
+      <p:sp>
+        <p:nvSpPr>
+          <p:cNvPr id="2" name="Title 1"/>
+          <p:cNvSpPr>
+            <a:spLocks noGrp="1"/>
+          </p:cNvSpPr>
+          <p:nvPr>
+            <p:ph type="title"/>
+          </p:nvPr>
+        </p:nvSpPr>
+        <p:spPr>
+          <a:xfrm>
+            <a:off x="457200" y="205979"/>
+            <a:ext cx="8229600" cy="857250"/>
+          </a:xfrm>
+        </p:spPr>
+        <p:txBody>
+          <a:bodyPr/>
+          <a:lstStyle/>
+          <a:p>
+            <a:pPr lvl="0" indent="0" marL="0">
+              <a:buNone/>
+            </a:pPr>
+            <a:r>
+              <a:rPr/>
               <a:t>Before next week</a:t>
             </a:r>
           </a:p>
@@ -14053,8 +14246,8 @@
         </p:nvSpPr>
         <p:spPr>
           <a:xfrm>
-            <a:off x="457200" y="205740"/>
-            <a:ext cx="8229600" cy="874395"/>
+            <a:off x="457200" y="205979"/>
+            <a:ext cx="8229600" cy="857250"/>
           </a:xfrm>
         </p:spPr>
         <p:txBody>
@@ -14073,18 +14266,18 @@
       </p:sp>
       <p:sp>
         <p:nvSpPr>
-          <p:cNvPr id="4" name="Text Placeholder 3"/>
-          <p:cNvSpPr>
-            <a:spLocks noGrp="1"/>
-          </p:cNvSpPr>
-          <p:nvPr>
-            <p:ph idx="2" sz="half" type="body"/>
+          <p:cNvPr id="3" name="Content Placeholder 2"/>
+          <p:cNvSpPr>
+            <a:spLocks noGrp="1"/>
+          </p:cNvSpPr>
+          <p:nvPr>
+            <p:ph idx="1"/>
           </p:nvPr>
         </p:nvSpPr>
         <p:spPr>
           <a:xfrm>
-            <a:off x="457200" y="1183005"/>
-            <a:ext cx="8229600" cy="1748790"/>
+            <a:off x="457200" y="1200151"/>
+            <a:ext cx="8229600" cy="3394472"/>
           </a:xfrm>
         </p:spPr>
         <p:txBody>
@@ -14148,6 +14341,58 @@
             <a:r>
               <a:rPr/>
               <a:t> max: 999. Not a typo in the slide.</a:t>
+            </a:r>
+          </a:p>
+        </p:txBody>
+      </p:sp>
+    </p:spTree>
+  </p:cSld>
+</p:sld>
+</file>
+
+<file path=ppt/slides/slide7.xml><?xml version="1.0" encoding="utf-8"?>
+<p:sld xmlns:a="http://schemas.openxmlformats.org/drawingml/2006/main" xmlns:r="http://schemas.openxmlformats.org/officeDocument/2006/relationships" xmlns:p="http://schemas.openxmlformats.org/presentationml/2006/main">
+  <p:cSld>
+    <p:spTree>
+      <p:nvGrpSpPr>
+        <p:cNvPr id="1" name=""/>
+        <p:cNvGrpSpPr/>
+        <p:nvPr/>
+      </p:nvGrpSpPr>
+      <p:grpSpPr>
+        <a:xfrm>
+          <a:off x="0" y="0"/>
+          <a:ext cx="0" cy="0"/>
+          <a:chOff x="0" y="0"/>
+          <a:chExt cx="0" cy="0"/>
+        </a:xfrm>
+      </p:grpSpPr>
+      <p:sp>
+        <p:nvSpPr>
+          <p:cNvPr id="2" name="Title 1"/>
+          <p:cNvSpPr>
+            <a:spLocks noGrp="1"/>
+          </p:cNvSpPr>
+          <p:nvPr>
+            <p:ph type="title"/>
+          </p:nvPr>
+        </p:nvSpPr>
+        <p:spPr>
+          <a:xfrm>
+            <a:off x="457200" y="205979"/>
+            <a:ext cx="8229600" cy="857250"/>
+          </a:xfrm>
+        </p:spPr>
+        <p:txBody>
+          <a:bodyPr/>
+          <a:lstStyle/>
+          <a:p>
+            <a:pPr lvl="0" indent="0" marL="0">
+              <a:buNone/>
+            </a:pPr>
+            <a:r>
+              <a:rPr/>
+              <a:t>Two of these four have no shape left to read</a:t>
             </a:r>
           </a:p>
         </p:txBody>
@@ -14168,8 +14413,8 @@
         </p:blipFill>
         <p:spPr bwMode="auto">
           <a:xfrm>
-            <a:off x="1448931" y="3034665"/>
-            <a:ext cx="6246137" cy="1491615"/>
+            <a:off x="457200" y="1861939"/>
+            <a:ext cx="8229600" cy="1968500"/>
           </a:xfrm>
           <a:prstGeom prst="rect">
             <a:avLst/>
@@ -14187,7 +14432,7 @@
 </p:sld>
 </file>
 
-<file path=ppt/slides/slide7.xml><?xml version="1.0" encoding="utf-8"?>
+<file path=ppt/slides/slide8.xml><?xml version="1.0" encoding="utf-8"?>
 <p:sld xmlns:a="http://schemas.openxmlformats.org/drawingml/2006/main" xmlns:r="http://schemas.openxmlformats.org/officeDocument/2006/relationships" xmlns:p="http://schemas.openxmlformats.org/presentationml/2006/main">
   <p:cSld>
     <p:spTree>
@@ -14269,7 +14514,7 @@
 </p:sld>
 </file>
 
-<file path=ppt/slides/slide8.xml><?xml version="1.0" encoding="utf-8"?>
+<file path=ppt/slides/slide9.xml><?xml version="1.0" encoding="utf-8"?>
 <p:sld xmlns:a="http://schemas.openxmlformats.org/drawingml/2006/main" xmlns:r="http://schemas.openxmlformats.org/officeDocument/2006/relationships" xmlns:p="http://schemas.openxmlformats.org/presentationml/2006/main">
   <p:cSld>
     <p:spTree>
@@ -14346,102 +14591,6 @@
           </a:ln>
         </p:spPr>
       </p:pic>
-    </p:spTree>
-  </p:cSld>
-</p:sld>
-</file>
-
-<file path=ppt/slides/slide9.xml><?xml version="1.0" encoding="utf-8"?>
-<p:sld xmlns:a="http://schemas.openxmlformats.org/drawingml/2006/main" xmlns:r="http://schemas.openxmlformats.org/officeDocument/2006/relationships" xmlns:p="http://schemas.openxmlformats.org/presentationml/2006/main">
-  <p:cSld>
-    <p:spTree>
-      <p:nvGrpSpPr>
-        <p:cNvPr id="1" name=""/>
-        <p:cNvGrpSpPr/>
-        <p:nvPr/>
-      </p:nvGrpSpPr>
-      <p:grpSpPr>
-        <a:xfrm>
-          <a:off x="0" y="0"/>
-          <a:ext cx="0" cy="0"/>
-          <a:chOff x="0" y="0"/>
-          <a:chExt cx="0" cy="0"/>
-        </a:xfrm>
-      </p:grpSpPr>
-      <p:sp>
-        <p:nvSpPr>
-          <p:cNvPr id="2" name="Title 1"/>
-          <p:cNvSpPr>
-            <a:spLocks noGrp="1"/>
-          </p:cNvSpPr>
-          <p:nvPr>
-            <p:ph type="title"/>
-          </p:nvPr>
-        </p:nvSpPr>
-        <p:spPr>
-          <a:xfrm>
-            <a:off x="457200" y="205979"/>
-            <a:ext cx="8229600" cy="857250"/>
-          </a:xfrm>
-        </p:spPr>
-        <p:txBody>
-          <a:bodyPr/>
-          <a:lstStyle/>
-          <a:p>
-            <a:pPr lvl="0" indent="0" marL="0">
-              <a:buNone/>
-            </a:pPr>
-            <a:r>
-              <a:rPr/>
-              <a:t>age: MCAR</a:t>
-            </a:r>
-          </a:p>
-        </p:txBody>
-      </p:sp>
-      <p:sp>
-        <p:nvSpPr>
-          <p:cNvPr id="3" name="Content Placeholder 2"/>
-          <p:cNvSpPr>
-            <a:spLocks noGrp="1"/>
-          </p:cNvSpPr>
-          <p:nvPr>
-            <p:ph idx="1"/>
-          </p:nvPr>
-        </p:nvSpPr>
-        <p:spPr>
-          <a:xfrm>
-            <a:off x="457200" y="1200151"/>
-            <a:ext cx="8229600" cy="3394472"/>
-          </a:xfrm>
-        </p:spPr>
-        <p:txBody>
-          <a:bodyPr/>
-          <a:lstStyle/>
-          <a:p>
-            <a:pPr lvl="0" indent="0" marL="0">
-              <a:buNone/>
-            </a:pPr>
-            <a:r>
-              <a:rPr/>
-              <a:t>Some customers just left it blank. Nothing systematic.</a:t>
-            </a:r>
-          </a:p>
-          <a:p>
-            <a:pPr lvl="0"/>
-            <a:r>
-              <a:rPr/>
-              <a:t>Safe to impute with a fixed statistic</a:t>
-            </a:r>
-          </a:p>
-          <a:p>
-            <a:pPr lvl="0"/>
-            <a:r>
-              <a:rPr/>
-              <a:t>The bias question is not “is this fair”: it is “what does filling it cost”</a:t>
-            </a:r>
-          </a:p>
-        </p:txBody>
-      </p:sp>
     </p:spTree>
   </p:cSld>
 </p:sld>

--- a/Lessons/02_data_exploration_and_preparation/Slides/data_exploration_and_preparation_slides.pptx
+++ b/Lessons/02_data_exploration_and_preparation/Slides/data_exploration_and_preparation_slides.pptx
@@ -5676,7 +5676,7 @@
             </a:pPr>
             <a:r>
               <a:rPr/>
-              <a:t>Set the exercise explicitly and give the deadline - Friday 9 October, at the start of Lesson 3.</a:t>
+              <a:t>Set the exercise explicitly and give the deadline - Friday 9 October, 09:00, at the start of Lesson 3.</a:t>
             </a:r>
           </a:p>
           <a:p>
@@ -14048,7 +14048,7 @@
             </a:pPr>
             <a:r>
               <a:rPr/>
-              <a:t>Homework: due Friday 9 October</a:t>
+              <a:t>Homework: due Friday 9 October, 09:00</a:t>
             </a:r>
           </a:p>
         </p:txBody>

--- a/Lessons/02_data_exploration_and_preparation/Slides/data_exploration_and_preparation_slides.pptx
+++ b/Lessons/02_data_exploration_and_preparation/Slides/data_exploration_and_preparation_slides.pptx
@@ -576,21 +576,21 @@
             </a:pPr>
             <a:r>
               <a:rPr/>
-              <a:t>Open with the exercise, briefly - two or three minutes, not a review session. Ask for a show of hands: who treated quality as binary, who kept it as an integer regression problem? Both are defensible if justified; that was the whole point of Task 1.</a:t>
-            </a:r>
-          </a:p>
-          <a:p>
-            <a:pPr lvl="0" indent="0" marL="0">
-              <a:buNone/>
-            </a:pPr>
-          </a:p>
-          <a:p>
-            <a:pPr lvl="0" indent="0" marL="0">
-              <a:buNone/>
-            </a:pPr>
-            <a:r>
-              <a:rPr/>
-              <a:t>Do not dwell. The purpose of raising it is continuity, not grading feedback - say that detailed feedback comes separately, and move to today’s material.</a:t>
+              <a:t>Open with the exercise, briefly - two or three minutes, not a review session. Nothing is collected, so this is the whole of the feedback: ask for a show of hands, who treated quality as binary and who kept it as an integer regression problem. Both are defensible if justified; that was the whole point of Task 1.</a:t>
+            </a:r>
+          </a:p>
+          <a:p>
+            <a:pPr lvl="0" indent="0" marL="0">
+              <a:buNone/>
+            </a:pPr>
+          </a:p>
+          <a:p>
+            <a:pPr lvl="0" indent="0" marL="0">
+              <a:buNone/>
+            </a:pPr>
+            <a:r>
+              <a:rPr/>
+              <a:t>Say once, here and only here, why it is worth having done: at the exam one of the ten exercises is drawn and they talk through their own notebook for it. Then move to today’s material.</a:t>
             </a:r>
           </a:p>
         </p:txBody>
@@ -5676,7 +5676,7 @@
             </a:pPr>
             <a:r>
               <a:rPr/>
-              <a:t>Set the exercise explicitly and give the deadline - Friday 9 October, 09:00, at the start of Lesson 3.</a:t>
+              <a:t>Set the exercise explicitly and say when it is discussed - the first ten minutes of Lesson 3, Friday 9 October.</a:t>
             </a:r>
           </a:p>
           <a:p>
@@ -10358,7 +10358,7 @@
             </a:pPr>
             <a:r>
               <a:rPr/>
-              <a:t>Exercise 1 was due at the start of today’s lesson.</a:t>
+              <a:t>Exercise 1 was set last week. We discuss it now.</a:t>
             </a:r>
           </a:p>
           <a:p>
@@ -10372,7 +10372,7 @@
             <a:pPr lvl="0"/>
             <a:r>
               <a:rPr/>
-              <a:t>Marked on </a:t>
+              <a:t>What counts is </a:t>
             </a:r>
             <a:r>
               <a:rPr b="1"/>
@@ -10380,14 +10380,14 @@
             </a:r>
             <a:r>
               <a:rPr/>
-              <a:t>, not on accuracy</a:t>
+              <a:t>, not accuracy</a:t>
             </a:r>
           </a:p>
           <a:p>
             <a:pPr lvl="0"/>
             <a:r>
               <a:rPr/>
-              <a:t>We will look at a few submissions’ framing choices in a moment</a:t>
+              <a:t>A show of hands on how you framed it</a:t>
             </a:r>
           </a:p>
         </p:txBody>
@@ -14048,7 +14048,7 @@
             </a:pPr>
             <a:r>
               <a:rPr/>
-              <a:t>Homework: due Friday 9 October, 09:00</a:t>
+              <a:t>Homework: we discuss it on Friday 9 October</a:t>
             </a:r>
           </a:p>
         </p:txBody>

--- a/Lessons/02_data_exploration_and_preparation/Slides/data_exploration_and_preparation_slides.pptx
+++ b/Lessons/02_data_exploration_and_preparation/Slides/data_exploration_and_preparation_slides.pptx
@@ -5,7 +5,7 @@
     <p:sldMasterId id="2147483648" r:id="rId1"/>
   </p:sldMasterIdLst>
   <p:notesMasterIdLst>
-    <p:notesMasterId r:id="rId55"/>
+    <p:notesMasterId r:id="rId58"/>
   </p:notesMasterIdLst>
   <p:sldIdLst>
     <p:sldId id="256" r:id="rId2"/>
@@ -61,6 +61,9 @@
     <p:sldId id="306" r:id="rId52"/>
     <p:sldId id="307" r:id="rId53"/>
     <p:sldId id="308" r:id="rId54"/>
+    <p:sldId id="309" r:id="rId55"/>
+    <p:sldId id="310" r:id="rId56"/>
+    <p:sldId id="311" r:id="rId57"/>
   </p:sldIdLst>
   <p:sldSz cx="9144000" cy="5143500" type="screen16x9"/>
   <p:notesSz cx="6858000" cy="9144000"/>
@@ -1098,21 +1101,49 @@
             </a:pPr>
             <a:r>
               <a:rPr/>
-              <a:t>The z-score rule. Standardise the column, then flag anything more than k standard deviations from the mean - we use k = 3 throughout.</a:t>
-            </a:r>
-          </a:p>
-          <a:p>
-            <a:pPr lvl="0" indent="0" marL="0">
-              <a:buNone/>
-            </a:pPr>
-          </a:p>
-          <a:p>
-            <a:pPr lvl="0" indent="0" marL="0">
-              <a:buNone/>
-            </a:pPr>
-            <a:r>
-              <a:rPr/>
-              <a:t>Say what it assumes, because everything in the next three slides follows from it: measuring in standard deviations only means “surprising” if the column is a bell curve. It also computes its own ruler from the data being measured, which is the crack the section prises open.</a:t>
+              <a:t>Pay off the 999 from slide 6: they have already seen it, and now it gets a name.</a:t>
+            </a:r>
+          </a:p>
+          <a:p>
+            <a:pPr lvl="0" indent="0" marL="0">
+              <a:buNone/>
+            </a:pPr>
+          </a:p>
+          <a:p>
+            <a:pPr lvl="0" indent="0" marL="0">
+              <a:buNone/>
+            </a:pPr>
+            <a:r>
+              <a:rPr/>
+              <a:t>Put the three reasons to the room before reading them out - ask what could make a customer’s monthly charge 3,344.7 when everyone else is under 128. Someone will say typo; ask whether they are sure, and let the silence do the work. That is the point of the third bullet.</a:t>
+            </a:r>
+          </a:p>
+          <a:p>
+            <a:pPr lvl="0" indent="0" marL="0">
+              <a:buNone/>
+            </a:pPr>
+          </a:p>
+          <a:p>
+            <a:pPr lvl="0" indent="0" marL="0">
+              <a:buNone/>
+            </a:pPr>
+            <a:r>
+              <a:rPr/>
+              <a:t>The last bullet is the promise the next six slides keep: rule 1 in standard deviations, rule 2 in quartiles, then the slide where they disagree and the slide where the robust one is the one that got it wrong. Nothing here deletes a row - what to do once something is flagged is Section 4.2, and it has no automatic answer.</a:t>
+            </a:r>
+          </a:p>
+          <a:p>
+            <a:pPr lvl="0" indent="0" marL="0">
+              <a:buNone/>
+            </a:pPr>
+          </a:p>
+          <a:p>
+            <a:pPr lvl="0" indent="0" marL="0">
+              <a:buNone/>
+            </a:pPr>
+            <a:r>
+              <a:rPr/>
+              <a:t>Handout Section 4 opening.</a:t>
             </a:r>
           </a:p>
         </p:txBody>
@@ -1194,63 +1225,21 @@
             </a:pPr>
             <a:r>
               <a:rPr/>
-              <a:t>Tukey’s fence, built on the interquartile range (IQR) - the spread between the first and third quartiles, so the middle half of the data. Flag anything more than 1.5 interquartile ranges past the quartiles.</a:t>
-            </a:r>
-          </a:p>
-          <a:p>
-            <a:pPr lvl="0" indent="0" marL="0">
-              <a:buNone/>
-            </a:pPr>
-          </a:p>
-          <a:p>
-            <a:pPr lvl="0" indent="0" marL="0">
-              <a:buNone/>
-            </a:pPr>
-            <a:r>
-              <a:rPr/>
-              <a:t>It assumes no shape at all, and its ruler barely moves when a few points are extreme. That sounds strictly better than rule 1. Two slides from now it will be the rule making the mistakes.</a:t>
-            </a:r>
-          </a:p>
-          <a:p>
-            <a:pPr lvl="0" indent="0" marL="0">
-              <a:buNone/>
-            </a:pPr>
-          </a:p>
-          <a:p>
-            <a:pPr lvl="0" indent="0" marL="0">
-              <a:buNone/>
-            </a:pPr>
-            <a:r>
-              <a:rPr/>
-              <a:t>Now give the probabilistic reading of each, because it is what makes them more than recipes. Under normality |z| &gt; 3 flags 0.27% of a column, both tails together. And the 1.5 is not arbitrary: for a normal column the IQR is 1.349 sigma, so the fence lands at 2.698 sigma - just inside 3. Handout Section 4.1 derives it.</a:t>
-            </a:r>
-          </a:p>
-          <a:p>
-            <a:pPr lvl="0" indent="0" marL="0">
-              <a:buNone/>
-            </a:pPr>
-          </a:p>
-          <a:p>
-            <a:pPr lvl="0" indent="0" marL="0">
-              <a:buNone/>
-            </a:pPr>
-            <a:r>
-              <a:rPr/>
-              <a:t>Then put the two side by side, counting both tails each time, because this is where people quietly mislead themselves: 0.27% against 0.70%. The fences are 10% apart in position and a factor of 2.6 apart in what they flag. In 2,000 normal values that is about 5 points against about 14.</a:t>
-            </a:r>
-          </a:p>
-          <a:p>
-            <a:pPr lvl="0" indent="0" marL="0">
-              <a:buNone/>
-            </a:pPr>
-          </a:p>
-          <a:p>
-            <a:pPr lvl="0" indent="0" marL="0">
-              <a:buNone/>
-            </a:pPr>
-            <a:r>
-              <a:rPr/>
-              <a:t>The moral to state out loud: the two rules were built to sit in the same neighbourhood, not to agree, and even on perfect data Tukey’s is the readier of the two to call something an outlier. The next slide draws it.</a:t>
+              <a:t>The z-score rule. Standardise the column, then flag anything more than k standard deviations from the mean - we use k = 3 throughout.</a:t>
+            </a:r>
+          </a:p>
+          <a:p>
+            <a:pPr lvl="0" indent="0" marL="0">
+              <a:buNone/>
+            </a:pPr>
+          </a:p>
+          <a:p>
+            <a:pPr lvl="0" indent="0" marL="0">
+              <a:buNone/>
+            </a:pPr>
+            <a:r>
+              <a:rPr/>
+              <a:t>Say what it assumes, because everything in the next three slides follows from it: measuring in standard deviations only means “surprising” if the column is a bell curve. It also computes its own ruler from the data being measured, which is the crack the section prises open.</a:t>
             </a:r>
           </a:p>
         </p:txBody>
@@ -1332,49 +1321,77 @@
             </a:pPr>
             <a:r>
               <a:rPr/>
-              <a:t>Handout Section 4.1 derives the 1.5 constant from the standard normal quantile function.</a:t>
-            </a:r>
-          </a:p>
-          <a:p>
-            <a:pPr lvl="0" indent="0" marL="0">
-              <a:buNone/>
-            </a:pPr>
-          </a:p>
-          <a:p>
-            <a:pPr lvl="0" indent="0" marL="0">
-              <a:buNone/>
-            </a:pPr>
-            <a:r>
-              <a:rPr/>
-              <a:t>Work the two panels in order, because the slide is an argument and not an illustration. Left: the two fences are 0.30 sigma apart. Ask the room whether that looks like a difference worth caring about - it does not. Right: the same two rules flag 0.27% and 0.70% of a normal column, a factor of 2.6.</a:t>
-            </a:r>
-          </a:p>
-          <a:p>
-            <a:pPr lvl="0" indent="0" marL="0">
-              <a:buNone/>
-            </a:pPr>
-          </a:p>
-          <a:p>
-            <a:pPr lvl="0" indent="0" marL="0">
-              <a:buNone/>
-            </a:pPr>
-            <a:r>
-              <a:rPr/>
-              <a:t>The reason is the steepness of the tail. Move a fence in by a third of a standard deviation and you nearly triple the area beyond it. So resist saying “the two rules agree here”: they sit in the same neighbourhood, and out in the tail a neighbourhood is a factor of 2.6.</a:t>
-            </a:r>
-          </a:p>
-          <a:p>
-            <a:pPr lvl="0" indent="0" marL="0">
-              <a:buNone/>
-            </a:pPr>
-          </a:p>
-          <a:p>
-            <a:pPr lvl="0" indent="0" marL="0">
-              <a:buNone/>
-            </a:pPr>
-            <a:r>
-              <a:rPr/>
-              <a:t>Say this is a design choice with an assumption baked in, and the next slide is what happens when the assumption fails.</a:t>
+              <a:t>Tukey’s fence, built on the interquartile range (IQR) - the spread between the first and third quartiles, so the middle half of the data. Flag anything more than 1.5 interquartile ranges past the quartiles.</a:t>
+            </a:r>
+          </a:p>
+          <a:p>
+            <a:pPr lvl="0" indent="0" marL="0">
+              <a:buNone/>
+            </a:pPr>
+          </a:p>
+          <a:p>
+            <a:pPr lvl="0" indent="0" marL="0">
+              <a:buNone/>
+            </a:pPr>
+            <a:r>
+              <a:rPr/>
+              <a:t>It assumes no shape at all, and its ruler barely moves when a few points are extreme. That sounds strictly better than rule 1. Two slides from now it will be the rule making the mistakes.</a:t>
+            </a:r>
+          </a:p>
+          <a:p>
+            <a:pPr lvl="0" indent="0" marL="0">
+              <a:buNone/>
+            </a:pPr>
+          </a:p>
+          <a:p>
+            <a:pPr lvl="0" indent="0" marL="0">
+              <a:buNone/>
+            </a:pPr>
+            <a:r>
+              <a:rPr/>
+              <a:t>Now give the probabilistic reading of each, because it is what makes them more than recipes. Under normality |z| &gt; 3 flags 0.27% of a column, both tails together. And the 1.5 is not arbitrary: for a normal column the IQR is 1.349 sigma, so the fence lands at 2.698 sigma - just inside 3. Handout Section 4.1 derives it.</a:t>
+            </a:r>
+          </a:p>
+          <a:p>
+            <a:pPr lvl="0" indent="0" marL="0">
+              <a:buNone/>
+            </a:pPr>
+          </a:p>
+          <a:p>
+            <a:pPr lvl="0" indent="0" marL="0">
+              <a:buNone/>
+            </a:pPr>
+            <a:r>
+              <a:rPr/>
+              <a:t>Then put the two side by side, counting both tails each time, because this is where people quietly mislead themselves: 0.27% against 0.70%. The fences are 10% apart in position and a factor of 2.6 apart in what they flag.</a:t>
+            </a:r>
+          </a:p>
+          <a:p>
+            <a:pPr lvl="0" indent="0" marL="0">
+              <a:buNone/>
+            </a:pPr>
+          </a:p>
+          <a:p>
+            <a:pPr lvl="0" indent="0" marL="0">
+              <a:buNone/>
+            </a:pPr>
+            <a:r>
+              <a:rPr/>
+              <a:t>Then make that concrete, because a percentage does not land: take 2,000 values off a perfect bell curve, nothing wrong with any of them. The z-score rule still nominates about 5 and Tukey about 14 - false alarms both, the tail being flagged for being the tail. Say what that means for the twenty real billing errors in this dataset: neither rule can tell the two kinds apart, which is why a flag is a candidate and never a verdict.</a:t>
+            </a:r>
+          </a:p>
+          <a:p>
+            <a:pPr lvl="0" indent="0" marL="0">
+              <a:buNone/>
+            </a:pPr>
+          </a:p>
+          <a:p>
+            <a:pPr lvl="0" indent="0" marL="0">
+              <a:buNone/>
+            </a:pPr>
+            <a:r>
+              <a:rPr/>
+              <a:t>The moral to state out loud: the two rules were built to sit in the same neighbourhood, not to agree, and even on perfect data Tukey’s is the readier of the two to call something an outlier. The next slide draws it.</a:t>
             </a:r>
           </a:p>
         </p:txBody>
@@ -1456,77 +1473,49 @@
             </a:pPr>
             <a:r>
               <a:rPr/>
-              <a:t>Put the counts up before the picture is read: 20 genuine billing errors in monthly_charges. The z-score rule flags 20 - all of them, nothing else. Tukey flags 32 - the same 20, plus 12 ordinary customers.</a:t>
-            </a:r>
-          </a:p>
-          <a:p>
-            <a:pPr lvl="0" indent="0" marL="0">
-              <a:buNone/>
-            </a:pPr>
-          </a:p>
-          <a:p>
-            <a:pPr lvl="0" indent="0" marL="0">
-              <a:buNone/>
-            </a:pPr>
-            <a:r>
-              <a:rPr/>
-              <a:t>Ask the room to predict which rule was damaged by the contamination, then give them the number: the billing errors inflate s from 17.2 to 171.3, dragging the z-score fence from 115 out to 593. The rule was genuinely crippled. It got every error anyway, because the smallest of them is 780 - still past the ruined fence.</a:t>
-            </a:r>
-          </a:p>
-          <a:p>
-            <a:pPr lvl="0" indent="0" marL="0">
-              <a:buNone/>
-            </a:pPr>
-          </a:p>
-          <a:p>
-            <a:pPr lvl="0" indent="0" marL="0">
-              <a:buNone/>
-            </a:pPr>
-            <a:r>
-              <a:rPr/>
-              <a:t>Meanwhile the twelve Tukey extras are real people on real tariffs: eight paying 15 to 17, four paying 112 to 128, outside fences of 17.3 and 110.</a:t>
-            </a:r>
-          </a:p>
-          <a:p>
-            <a:pPr lvl="0" indent="0" marL="0">
-              <a:buNone/>
-            </a:pPr>
-          </a:p>
-          <a:p>
-            <a:pPr lvl="0" indent="0" marL="0">
-              <a:buNone/>
-            </a:pPr>
-            <a:r>
-              <a:rPr/>
-              <a:t>The line to land, and it is the whole point of the slide: a detector’s output does not report the detector’s health. The z-score rule was right by luck. Push those errors down towards 200 and its fence sails straight past them, exactly as the theory says. So the lesson is not “prefer IQR” - it is “recompute s without the candidates and see what moved”. Handout Section 4.2.</a:t>
-            </a:r>
-          </a:p>
-          <a:p>
-            <a:pPr lvl="0" indent="0" marL="0">
-              <a:buNone/>
-            </a:pPr>
-          </a:p>
-          <a:p>
-            <a:pPr lvl="0" indent="0" marL="0">
-              <a:buNone/>
-            </a:pPr>
-            <a:r>
-              <a:rPr/>
-              <a:t>Point at the left panel’s bottom band: those scattered red dots down in the ordinary customers are the twelve.</a:t>
-            </a:r>
-          </a:p>
-          <a:p>
-            <a:pPr lvl="0" indent="0" marL="0">
-              <a:buNone/>
-            </a:pPr>
-          </a:p>
-          <a:p>
-            <a:pPr lvl="0" indent="0" marL="0">
-              <a:buNone/>
-            </a:pPr>
-            <a:r>
-              <a:rPr/>
-              <a:t>tenure_months, right panel: only 4 flagged, all at 999, and here the two rules agree exactly. Ask the room: where did the negative values go? Nobody will know yet - next slide.</a:t>
+              <a:t>Handout Section 4.1 derives the 1.5 constant from the standard normal quantile function.</a:t>
+            </a:r>
+          </a:p>
+          <a:p>
+            <a:pPr lvl="0" indent="0" marL="0">
+              <a:buNone/>
+            </a:pPr>
+          </a:p>
+          <a:p>
+            <a:pPr lvl="0" indent="0" marL="0">
+              <a:buNone/>
+            </a:pPr>
+            <a:r>
+              <a:rPr/>
+              <a:t>Work the two panels in order, because the slide is an argument and not an illustration. Left: the two fences are 0.30 sigma apart. Ask the room whether that looks like a difference worth caring about - it does not. Right: the same two rules flag 0.27% and 0.70% of a normal column, a factor of 2.6.</a:t>
+            </a:r>
+          </a:p>
+          <a:p>
+            <a:pPr lvl="0" indent="0" marL="0">
+              <a:buNone/>
+            </a:pPr>
+          </a:p>
+          <a:p>
+            <a:pPr lvl="0" indent="0" marL="0">
+              <a:buNone/>
+            </a:pPr>
+            <a:r>
+              <a:rPr/>
+              <a:t>The reason is the steepness of the tail. Move a fence in by a third of a standard deviation and you nearly triple the area beyond it. So resist saying “the two rules agree here”: they sit in the same neighbourhood, and out in the tail a neighbourhood is a factor of 2.6.</a:t>
+            </a:r>
+          </a:p>
+          <a:p>
+            <a:pPr lvl="0" indent="0" marL="0">
+              <a:buNone/>
+            </a:pPr>
+          </a:p>
+          <a:p>
+            <a:pPr lvl="0" indent="0" marL="0">
+              <a:buNone/>
+            </a:pPr>
+            <a:r>
+              <a:rPr/>
+              <a:t>Say this is a design choice with an assumption baked in, and the next slide is what happens when the assumption fails.</a:t>
             </a:r>
           </a:p>
         </p:txBody>
@@ -1608,21 +1597,77 @@
             </a:pPr>
             <a:r>
               <a:rPr/>
-              <a:t>This is the slide worth remembering over the two formulas. Statistical rules find points that are unusual relative to the rest of a column; they know nothing about domain validity. A negative tenure sits comfortably inside the IQR fence because the column’s own spread is wide enough to hide it.</a:t>
-            </a:r>
-          </a:p>
-          <a:p>
-            <a:pPr lvl="0" indent="0" marL="0">
-              <a:buNone/>
-            </a:pPr>
-          </a:p>
-          <a:p>
-            <a:pPr lvl="0" indent="0" marL="0">
-              <a:buNone/>
-            </a:pPr>
-            <a:r>
-              <a:rPr/>
-              <a:t>The fix is a domain rule: 0 &lt;= tenure_months &lt;= some sane maximum. Say plainly: a thorough pass runs both kinds of check, because they catch different mistakes, and neither substitutes for the other. Handout Section 4.2.</a:t>
+              <a:t>Put the counts up before the picture is read: 20 genuine billing errors in monthly_charges. The z-score rule flags 20 - all of them, nothing else. Tukey flags 32 - the same 20, plus 12 ordinary customers.</a:t>
+            </a:r>
+          </a:p>
+          <a:p>
+            <a:pPr lvl="0" indent="0" marL="0">
+              <a:buNone/>
+            </a:pPr>
+          </a:p>
+          <a:p>
+            <a:pPr lvl="0" indent="0" marL="0">
+              <a:buNone/>
+            </a:pPr>
+            <a:r>
+              <a:rPr/>
+              <a:t>Ask the room to predict which rule was damaged by the contamination, then give them the number: the billing errors inflate s from 17.2 to 171.3, dragging the z-score fence from 115 out to 593. The rule was genuinely crippled. It got every error anyway, because the smallest of them is 780 - still past the ruined fence.</a:t>
+            </a:r>
+          </a:p>
+          <a:p>
+            <a:pPr lvl="0" indent="0" marL="0">
+              <a:buNone/>
+            </a:pPr>
+          </a:p>
+          <a:p>
+            <a:pPr lvl="0" indent="0" marL="0">
+              <a:buNone/>
+            </a:pPr>
+            <a:r>
+              <a:rPr/>
+              <a:t>Meanwhile the twelve Tukey extras are real people on real tariffs: eight paying 15 to 17, four paying 112 to 128, outside fences of 17.3 and 110.</a:t>
+            </a:r>
+          </a:p>
+          <a:p>
+            <a:pPr lvl="0" indent="0" marL="0">
+              <a:buNone/>
+            </a:pPr>
+          </a:p>
+          <a:p>
+            <a:pPr lvl="0" indent="0" marL="0">
+              <a:buNone/>
+            </a:pPr>
+            <a:r>
+              <a:rPr/>
+              <a:t>The line to land, and it is the whole point of the slide: a detector’s output does not report the detector’s health. The z-score rule was right by luck. Push those errors down towards 200 and its fence sails straight past them, exactly as the theory says. So the lesson is not “prefer IQR” - it is “recompute s without the candidates and see what moved”. Handout Section 4.2.</a:t>
+            </a:r>
+          </a:p>
+          <a:p>
+            <a:pPr lvl="0" indent="0" marL="0">
+              <a:buNone/>
+            </a:pPr>
+          </a:p>
+          <a:p>
+            <a:pPr lvl="0" indent="0" marL="0">
+              <a:buNone/>
+            </a:pPr>
+            <a:r>
+              <a:rPr/>
+              <a:t>Point at the left panel’s bottom band: those scattered red dots down in the ordinary customers are the twelve.</a:t>
+            </a:r>
+          </a:p>
+          <a:p>
+            <a:pPr lvl="0" indent="0" marL="0">
+              <a:buNone/>
+            </a:pPr>
+          </a:p>
+          <a:p>
+            <a:pPr lvl="0" indent="0" marL="0">
+              <a:buNone/>
+            </a:pPr>
+            <a:r>
+              <a:rPr/>
+              <a:t>tenure_months, right panel: only 4 flagged, all at 999, and here the two rules agree exactly. Ask the room: where did the negative values go? Nobody will know yet - next slide.</a:t>
             </a:r>
           </a:p>
         </p:txBody>
@@ -1704,35 +1749,21 @@
             </a:pPr>
             <a:r>
               <a:rPr/>
-              <a:t>A long-tenure, high-paying customer is not an error; a tenure of 999 months is. Say plainly that a statistical rule cannot make this call - it only nominates candidates, and the decision is a domain decision.</a:t>
-            </a:r>
-          </a:p>
-          <a:p>
-            <a:pPr lvl="0" indent="0" marL="0">
-              <a:buNone/>
-            </a:pPr>
-          </a:p>
-          <a:p>
-            <a:pPr lvl="0" indent="0" marL="0">
-              <a:buNone/>
-            </a:pPr>
-            <a:r>
-              <a:rPr/>
-              <a:t>Walk the four options and note that each is a different claim about the world. Capping says “the value is real but the scale is misleading”. Removing says “this row is not from the population I am modelling”. Correcting says “I know what it should have been”. Leaving it says “the model should handle this”.</a:t>
-            </a:r>
-          </a:p>
-          <a:p>
-            <a:pPr lvl="0" indent="0" marL="0">
-              <a:buNone/>
-            </a:pPr>
-          </a:p>
-          <a:p>
-            <a:pPr lvl="0" indent="0" marL="0">
-              <a:buNone/>
-            </a:pPr>
-            <a:r>
-              <a:rPr/>
-              <a:t>The one that gets chosen by default, without anyone deciding, is removal - and it is the one that silently reweights the sample. Handout Section 4.2 closes on exactly this. If a rule flags 3% of your rows and you drop them all, you have changed the population your model is trained on.</a:t>
+              <a:t>This is the slide worth remembering over the two formulas. Statistical rules find points that are unusual relative to the rest of a column; they know nothing about domain validity. A negative tenure sits comfortably inside the IQR fence because the column’s own spread is wide enough to hide it.</a:t>
+            </a:r>
+          </a:p>
+          <a:p>
+            <a:pPr lvl="0" indent="0" marL="0">
+              <a:buNone/>
+            </a:pPr>
+          </a:p>
+          <a:p>
+            <a:pPr lvl="0" indent="0" marL="0">
+              <a:buNone/>
+            </a:pPr>
+            <a:r>
+              <a:rPr/>
+              <a:t>The fix is a domain rule: 0 &lt;= tenure_months &lt;= some sane maximum. Say plainly: a thorough pass runs both kinds of check, because they catch different mistakes, and neither substitutes for the other. Handout Section 4.2.</a:t>
             </a:r>
           </a:p>
         </p:txBody>
@@ -1910,35 +1941,35 @@
             </a:pPr>
             <a:r>
               <a:rPr/>
-              <a:t>Work through notebook 1 now, 22 minutes. Let them drive; walk the room rather than presenting.</a:t>
-            </a:r>
-          </a:p>
-          <a:p>
-            <a:pPr lvl="0" indent="0" marL="0">
-              <a:buNone/>
-            </a:pPr>
-          </a:p>
-          <a:p>
-            <a:pPr lvl="0" indent="0" marL="0">
-              <a:buNone/>
-            </a:pPr>
-            <a:r>
-              <a:rPr/>
-              <a:t>The domain-rule cell is worth pausing on collectively: a two-line check for negative tenure catches something no statistical rule would flag, because a negative tenure is not extreme, it is impossible. That distinction - impossible versus unusual - is the lesson of the whole section, and it lands better from their own screen than from the projector.</a:t>
-            </a:r>
-          </a:p>
-          <a:p>
-            <a:pPr lvl="0" indent="0" marL="0">
-              <a:buNone/>
-            </a:pPr>
-          </a:p>
-          <a:p>
-            <a:pPr lvl="0" indent="0" marL="0">
-              <a:buNone/>
-            </a:pPr>
-            <a:r>
-              <a:rPr/>
-              <a:t>Watch for the group that finishes early. Point them at the “try this” in the notebook: change the missing fraction and watch the correlation attenuate as the derivation predicts.</a:t>
+              <a:t>A long-tenure, high-paying customer is not an error; a tenure of 999 months is. Say plainly that a statistical rule cannot make this call - it only nominates candidates, and the decision is a domain decision.</a:t>
+            </a:r>
+          </a:p>
+          <a:p>
+            <a:pPr lvl="0" indent="0" marL="0">
+              <a:buNone/>
+            </a:pPr>
+          </a:p>
+          <a:p>
+            <a:pPr lvl="0" indent="0" marL="0">
+              <a:buNone/>
+            </a:pPr>
+            <a:r>
+              <a:rPr/>
+              <a:t>Walk the four options and note that each is a different claim about the world. Capping - Winsorising, after Charles Winsor - replaces the value with the fence itself: the billing error of 3,344.7 becomes 110.0, the row keeps every other column it has, and the sample keeps its size. It says “the value is real but the scale is misleading”. Removing says “this row is not from the population I am modelling”. Correcting says “I know what it should have been”. Leaving it says “the model should handle this”.</a:t>
+            </a:r>
+          </a:p>
+          <a:p>
+            <a:pPr lvl="0" indent="0" marL="0">
+              <a:buNone/>
+            </a:pPr>
+          </a:p>
+          <a:p>
+            <a:pPr lvl="0" indent="0" marL="0">
+              <a:buNone/>
+            </a:pPr>
+            <a:r>
+              <a:rPr/>
+              <a:t>The one that gets chosen by default, without anyone deciding, is removal - and it is the one that silently reweights the sample. Handout Section 4.2 closes on exactly this. If a rule flags 3% of your rows and you drop them all, you have changed the population your model is trained on.</a:t>
             </a:r>
           </a:p>
         </p:txBody>
@@ -2020,21 +2051,35 @@
             </a:pPr>
             <a:r>
               <a:rPr/>
-              <a:t>15 minutes. Back for scaling, encoding and the pipeline.</a:t>
-            </a:r>
-          </a:p>
-          <a:p>
-            <a:pPr lvl="0" indent="0" marL="0">
-              <a:buNone/>
-            </a:pPr>
-          </a:p>
-          <a:p>
-            <a:pPr lvl="0" indent="0" marL="0">
-              <a:buNone/>
-            </a:pPr>
-            <a:r>
-              <a:rPr/>
-              <a:t>Use the break to check who is stuck in the notebook - the second half assumes everyone has a working ColumnTransformer, and it is much cheaper to fix now than during the leakage section.</a:t>
+              <a:t>Work through notebook 1 now, 20 minutes. Let them drive; walk the room rather than presenting.</a:t>
+            </a:r>
+          </a:p>
+          <a:p>
+            <a:pPr lvl="0" indent="0" marL="0">
+              <a:buNone/>
+            </a:pPr>
+          </a:p>
+          <a:p>
+            <a:pPr lvl="0" indent="0" marL="0">
+              <a:buNone/>
+            </a:pPr>
+            <a:r>
+              <a:rPr/>
+              <a:t>The domain-rule cell is worth pausing on collectively: a two-line check for negative tenure catches something no statistical rule would flag, because a negative tenure is not extreme, it is impossible. That distinction - impossible versus unusual - is the lesson of the whole section, and it lands better from their own screen than from the projector.</a:t>
+            </a:r>
+          </a:p>
+          <a:p>
+            <a:pPr lvl="0" indent="0" marL="0">
+              <a:buNone/>
+            </a:pPr>
+          </a:p>
+          <a:p>
+            <a:pPr lvl="0" indent="0" marL="0">
+              <a:buNone/>
+            </a:pPr>
+            <a:r>
+              <a:rPr/>
+              <a:t>Watch for the group that finishes early. Point them at the “try this” in the notebook: change the missing fraction and watch the correlation attenuate as the derivation predicts.</a:t>
             </a:r>
           </a:p>
         </p:txBody>
@@ -2116,35 +2161,21 @@
             </a:pPr>
             <a:r>
               <a:rPr/>
-              <a:t>Set up the problem before any mathematics. Ask: if two features live on very different scales, can a single step size be right for both directions at once? Let the room reason about it first.</a:t>
-            </a:r>
-          </a:p>
-          <a:p>
-            <a:pPr lvl="0" indent="0" marL="0">
-              <a:buNone/>
-            </a:pPr>
-          </a:p>
-          <a:p>
-            <a:pPr lvl="0" indent="0" marL="0">
-              <a:buNone/>
-            </a:pPr>
-            <a:r>
-              <a:rPr/>
-              <a:t>Be honest about this dataset, because a sharp student will check: once the outliers of Section 4 are removed, these two columns have comparable spreads - the ratio of their standard deviations is about 0.8. They are not a dramatic case, which is exactly why notebook 2 builds a toy pair with a 110:1 variance ratio to make the effect unambiguous. The point is not that churn data is pathological; it is that you cannot count on it not being.</a:t>
-            </a:r>
-          </a:p>
-          <a:p>
-            <a:pPr lvl="0" indent="0" marL="0">
-              <a:buNone/>
-            </a:pPr>
-          </a:p>
-          <a:p>
-            <a:pPr lvl="0" indent="0" marL="0">
-              <a:buNone/>
-            </a:pPr>
-            <a:r>
-              <a:rPr/>
-              <a:t>The punchline, which handout Section 5.2 states: the safe step size is set by the feature with the largest spread, so progress along the smallest-spread direction is throttled by their ratio. Scaling is not cosmetic - it changes how long training takes, and sometimes whether it converges at all. The derivation is deliberately NOT here: it belongs with gradient descent itself, Lesson 3.</a:t>
+              <a:t>15 minutes. Back for scaling, encoding and the pipeline.</a:t>
+            </a:r>
+          </a:p>
+          <a:p>
+            <a:pPr lvl="0" indent="0" marL="0">
+              <a:buNone/>
+            </a:pPr>
+          </a:p>
+          <a:p>
+            <a:pPr lvl="0" indent="0" marL="0">
+              <a:buNone/>
+            </a:pPr>
+            <a:r>
+              <a:rPr/>
+              <a:t>Use the break to check who is stuck in the notebook - the second half assumes everyone has a working ColumnTransformer, and it is much cheaper to fix now than during the leakage section.</a:t>
             </a:r>
           </a:p>
         </p:txBody>
@@ -2226,63 +2257,77 @@
             </a:pPr>
             <a:r>
               <a:rPr/>
-              <a:t>Do this one entirely on the picture; there is no algebra on this slide by choice.</a:t>
-            </a:r>
-          </a:p>
-          <a:p>
-            <a:pPr lvl="0" indent="0" marL="0">
-              <a:buNone/>
-            </a:pPr>
-          </a:p>
-          <a:p>
-            <a:pPr lvl="0" indent="0" marL="0">
-              <a:buNone/>
-            </a:pPr>
-            <a:r>
-              <a:rPr/>
-              <a:t>Left: the two features have different spreads, so the cost surface is a narrow ravine - steep across, almost flat along. One step size has to serve both. Long enough to advance along the flat direction and it overshoots the steep one and bounces from wall to wall; short enough to be safe on the steep one and it crawls along the flat one.</a:t>
-            </a:r>
-          </a:p>
-          <a:p>
-            <a:pPr lvl="0" indent="0" marL="0">
-              <a:buNone/>
-            </a:pPr>
-          </a:p>
-          <a:p>
-            <a:pPr lvl="0" indent="0" marL="0">
-              <a:buNone/>
-            </a:pPr>
-            <a:r>
-              <a:rPr/>
-              <a:t>Right: after scaling, the ravine is a bowl and every step points at the minimum.</a:t>
-            </a:r>
-          </a:p>
-          <a:p>
-            <a:pPr lvl="0" indent="0" marL="0">
-              <a:buNone/>
-            </a:pPr>
-          </a:p>
-          <a:p>
-            <a:pPr lvl="0" indent="0" marL="0">
-              <a:buNone/>
-            </a:pPr>
-            <a:r>
-              <a:rPr/>
-              <a:t>Give them the handle without the derivation: how stretched the ravine is - the ratio of the largest feature variance to the smallest - is called the condition number, and the number of steps you need grows with it.</a:t>
-            </a:r>
-          </a:p>
-          <a:p>
-            <a:pPr lvl="0" indent="0" marL="0">
-              <a:buNone/>
-            </a:pPr>
-          </a:p>
-          <a:p>
-            <a:pPr lvl="0" indent="0" marL="0">
-              <a:buNone/>
-            </a:pPr>
-            <a:r>
-              <a:rPr/>
-              <a:t>If someone asks WHY the surface has that shape, that is the right question and the honest answer is “Lesson 3, where we derive gradient descent” - its Section 4.4 puts the number on it: standardising the housing design matrix takes the condition number from 285 to 3.4.</a:t>
+              <a:t>Reconnect to Lesson 1 before anything else, because the vocabulary is already theirs: the empirical risk was the average loss over the rows we hold, and choosing the f that makes it small was the whole definition of learning. What was left open there is HOW you make it small. This is the how.</a:t>
+            </a:r>
+          </a:p>
+          <a:p>
+            <a:pPr lvl="0" indent="0" marL="0">
+              <a:buNone/>
+            </a:pPr>
+          </a:p>
+          <a:p>
+            <a:pPr lvl="0" indent="0" marL="0">
+              <a:buNone/>
+            </a:pPr>
+            <a:r>
+              <a:rPr/>
+              <a:t>Say what a model’s “numbers” are, once: one coefficient per feature, plus the intercept. Training is a search over those numbers, and every candidate set of them has a loss.</a:t>
+            </a:r>
+          </a:p>
+          <a:p>
+            <a:pPr lvl="0" indent="0" marL="0">
+              <a:buNone/>
+            </a:pPr>
+          </a:p>
+          <a:p>
+            <a:pPr lvl="0" indent="0" marL="0">
+              <a:buNone/>
+            </a:pPr>
+            <a:r>
+              <a:rPr/>
+              <a:t>Then say what a single step is, because the slide leans on it: gradient descent starts from some numbers, works out for each one whether nudging it up or down lowers the loss, and moves them all at once - each by the same step size, times how steeply the loss falls in that direction. One step size for the whole model, not one per feature. That is the sentence the next slide draws.</a:t>
+            </a:r>
+          </a:p>
+          <a:p>
+            <a:pPr lvl="0" indent="0" marL="0">
+              <a:buNone/>
+            </a:pPr>
+          </a:p>
+          <a:p>
+            <a:pPr lvl="0" indent="0" marL="0">
+              <a:buNone/>
+            </a:pPr>
+            <a:r>
+              <a:rPr/>
+              <a:t>Ask, before turning over: if two features live on very different scales, can a single step size be right for both directions at once? Let the room reason about it first.</a:t>
+            </a:r>
+          </a:p>
+          <a:p>
+            <a:pPr lvl="0" indent="0" marL="0">
+              <a:buNone/>
+            </a:pPr>
+          </a:p>
+          <a:p>
+            <a:pPr lvl="0" indent="0" marL="0">
+              <a:buNone/>
+            </a:pPr>
+            <a:r>
+              <a:rPr/>
+              <a:t>Be honest about this dataset, because a sharp student will check: once the outliers of Section 4 are removed, these two columns have comparable spreads - the ratio of their standard deviations is about 0.8. They are not a dramatic case, which is exactly why notebook 2 builds a toy pair with a 110:1 variance ratio to make the effect unambiguous. The point is not that churn data is pathological; it is that you cannot count on it not being.</a:t>
+            </a:r>
+          </a:p>
+          <a:p>
+            <a:pPr lvl="0" indent="0" marL="0">
+              <a:buNone/>
+            </a:pPr>
+          </a:p>
+          <a:p>
+            <a:pPr lvl="0" indent="0" marL="0">
+              <a:buNone/>
+            </a:pPr>
+            <a:r>
+              <a:rPr/>
+              <a:t>The punchline, which handout Section 5.2 states: the safe step size is set by the feature with the largest spread, so progress along the smallest-spread direction is throttled by their ratio. Scaling is not cosmetic - it changes how long training takes, and sometimes whether it converges at all. The derivation is deliberately NOT here: it belongs with gradient descent itself, Lesson 3.</a:t>
             </a:r>
           </a:p>
         </p:txBody>
@@ -2364,35 +2409,77 @@
             </a:pPr>
             <a:r>
               <a:rPr/>
-              <a:t>Left panel: each feature set at its OWN safe rate - standardised still gets there faster, because it tolerates a larger rate. Right panel is the sharper point: give the RAW features the rate the standardised ones handle comfortably and it does not converge slowly, it never converges at all.</a:t>
-            </a:r>
-          </a:p>
-          <a:p>
-            <a:pPr lvl="0" indent="0" marL="0">
-              <a:buNone/>
-            </a:pPr>
-          </a:p>
-          <a:p>
-            <a:pPr lvl="0" indent="0" marL="0">
-              <a:buNone/>
-            </a:pPr>
-            <a:r>
-              <a:rPr/>
-              <a:t>Be precise about the failure if anyone asks, because “diverges” is the word people reach for and it is not what this is. The loss does not climb away to infinity - it swings between 0.69 and 8.29 and stays there, bouncing off one wall of the ravine into the other. Run it for 2000 steps and it is still in the same band. Worse than slow, not better: a slow run finishes.</a:t>
-            </a:r>
-          </a:p>
-          <a:p>
-            <a:pPr lvl="0" indent="0" marL="0">
-              <a:buNone/>
-            </a:pPr>
-          </a:p>
-          <a:p>
-            <a:pPr lvl="0" indent="0" marL="0">
-              <a:buNone/>
-            </a:pPr>
-            <a:r>
-              <a:rPr/>
-              <a:t>This is a controlled toy (notebook 2), built to a 100:1 variance ratio and landing at 110 once drawn, so the effect is unambiguous. On the real churn columns, once cleaned, the two spreads are within about 20% of each other - so this toy is not exaggerating a big effect in the data, it is manufacturing a clear one to show a mechanism.</a:t>
+              <a:t>Do this one entirely on the picture; there is no algebra on this slide by choice.</a:t>
+            </a:r>
+          </a:p>
+          <a:p>
+            <a:pPr lvl="0" indent="0" marL="0">
+              <a:buNone/>
+            </a:pPr>
+          </a:p>
+          <a:p>
+            <a:pPr lvl="0" indent="0" marL="0">
+              <a:buNone/>
+            </a:pPr>
+            <a:r>
+              <a:rPr/>
+              <a:t>Read the axes first, and do not skip this - a contour plot of a loss surface is new to most of them and it is not a plot of the data. Neither axis is a column. The horizontal axis is the coefficient the model gives feature 1, the vertical axis is the coefficient it gives feature 2, so every point in the square is one candidate model. The grey rings join the models that fit equally badly, the way contour lines on a map join points of equal altitude. The blue star is the model with the lowest loss - what training is looking for. The rust dots are successive steps, and the line joining them is the search.</a:t>
+            </a:r>
+          </a:p>
+          <a:p>
+            <a:pPr lvl="0" indent="0" marL="0">
+              <a:buNone/>
+            </a:pPr>
+          </a:p>
+          <a:p>
+            <a:pPr lvl="0" indent="0" marL="0">
+              <a:buNone/>
+            </a:pPr>
+            <a:r>
+              <a:rPr/>
+              <a:t>Left: the two features have different spreads, so the loss surface is a narrow ravine - steep across, almost flat along. One step size has to serve both. Long enough to advance along the flat direction and it overshoots the steep one and bounces from wall to wall; short enough to be safe on the steep one and it crawls along the flat one. Count the dots out loud: twenty-six steps and it is still not at the star.</a:t>
+            </a:r>
+          </a:p>
+          <a:p>
+            <a:pPr lvl="0" indent="0" marL="0">
+              <a:buNone/>
+            </a:pPr>
+          </a:p>
+          <a:p>
+            <a:pPr lvl="0" indent="0" marL="0">
+              <a:buNone/>
+            </a:pPr>
+            <a:r>
+              <a:rPr/>
+              <a:t>Right: after scaling, the ravine is a bowl and every step points at the minimum.</a:t>
+            </a:r>
+          </a:p>
+          <a:p>
+            <a:pPr lvl="0" indent="0" marL="0">
+              <a:buNone/>
+            </a:pPr>
+          </a:p>
+          <a:p>
+            <a:pPr lvl="0" indent="0" marL="0">
+              <a:buNone/>
+            </a:pPr>
+            <a:r>
+              <a:rPr/>
+              <a:t>Give them the handle without the derivation: how stretched the ravine is - the ratio of the largest feature variance to the smallest - is called the condition number, and the number of steps you need grows with it.</a:t>
+            </a:r>
+          </a:p>
+          <a:p>
+            <a:pPr lvl="0" indent="0" marL="0">
+              <a:buNone/>
+            </a:pPr>
+          </a:p>
+          <a:p>
+            <a:pPr lvl="0" indent="0" marL="0">
+              <a:buNone/>
+            </a:pPr>
+            <a:r>
+              <a:rPr/>
+              <a:t>If someone asks WHY the surface has that shape, that is the right question and the honest answer is “Lesson 3, where we derive gradient descent” - its Section 4.4 puts the number on it: standardising the housing design matrix takes the condition number from 285 to 3.4.</a:t>
             </a:r>
           </a:p>
         </p:txBody>
@@ -2474,21 +2561,35 @@
             </a:pPr>
             <a:r>
               <a:rPr/>
-              <a:t>MinMaxScaler is the more outlier-sensitive of the two: one extreme billing error stretches the whole 0-1 range, compressing every ordinary customer into a sliver of it. StandardScaler is pulled too, through the mean and standard deviation, but far less dramatically.</a:t>
-            </a:r>
-          </a:p>
-          <a:p>
-            <a:pPr lvl="0" indent="0" marL="0">
-              <a:buNone/>
-            </a:pPr>
-          </a:p>
-          <a:p>
-            <a:pPr lvl="0" indent="0" marL="0">
-              <a:buNone/>
-            </a:pPr>
-            <a:r>
-              <a:rPr/>
-              <a:t>Both must be fitted on training data only - say this every time a fitted transform appears, because it is the thread the whole lesson hangs from.</a:t>
+              <a:t>Left panel: each feature set at its OWN safe rate - standardised still gets there faster, because it tolerates a larger rate. Right panel is the sharper point: give the RAW features the rate the standardised ones handle comfortably and it does not converge slowly, it never converges at all.</a:t>
+            </a:r>
+          </a:p>
+          <a:p>
+            <a:pPr lvl="0" indent="0" marL="0">
+              <a:buNone/>
+            </a:pPr>
+          </a:p>
+          <a:p>
+            <a:pPr lvl="0" indent="0" marL="0">
+              <a:buNone/>
+            </a:pPr>
+            <a:r>
+              <a:rPr/>
+              <a:t>Be precise about the failure if anyone asks, because “diverges” is the word people reach for and it is not what this is. The loss does not climb away to infinity - it swings between 0.69 and 8.29 and stays there, bouncing off one wall of the ravine into the other. Run it for 2000 steps and it is still in the same band. Worse than slow, not better: a slow run finishes.</a:t>
+            </a:r>
+          </a:p>
+          <a:p>
+            <a:pPr lvl="0" indent="0" marL="0">
+              <a:buNone/>
+            </a:pPr>
+          </a:p>
+          <a:p>
+            <a:pPr lvl="0" indent="0" marL="0">
+              <a:buNone/>
+            </a:pPr>
+            <a:r>
+              <a:rPr/>
+              <a:t>This is a controlled toy (notebook 2), built to a 100:1 variance ratio and landing at 110 once drawn, so the effect is unambiguous. On the real churn columns, once cleaned, the two spreads are within about 20% of each other - so this toy is not exaggerating a big effect in the data, it is manufacturing a clear one to show a mechanism.</a:t>
             </a:r>
           </a:p>
         </p:txBody>
@@ -2570,49 +2671,21 @@
             </a:pPr>
             <a:r>
               <a:rPr/>
-              <a:t>Read the slide as the sentence it is: one-hot encode all k categories AND fit an intercept, and this identity holds for every single row.</a:t>
-            </a:r>
-          </a:p>
-          <a:p>
-            <a:pPr lvl="0" indent="0" marL="0">
-              <a:buNone/>
-            </a:pPr>
-          </a:p>
-          <a:p>
-            <a:pPr lvl="0" indent="0" marL="0">
-              <a:buNone/>
-            </a:pPr>
-            <a:r>
-              <a:rPr/>
-              <a:t>The k dummy columns always sum to the intercept column, so they are not independent of it: the design matrix loses rank, and the normal equation has no unique solution.</a:t>
-            </a:r>
-          </a:p>
-          <a:p>
-            <a:pPr lvl="0" indent="0" marL="0">
-              <a:buNone/>
-            </a:pPr>
-          </a:p>
-          <a:p>
-            <a:pPr lvl="0" indent="0" marL="0">
-              <a:buNone/>
-            </a:pPr>
-            <a:r>
-              <a:rPr/>
-              <a:t>Stress that this is not a numerical inconvenience but an identifiability problem. There are infinitely many coefficient vectors that fit equally well, because you can add a constant to every dummy coefficient and subtract it from the intercept without changing a single prediction.</a:t>
-            </a:r>
-          </a:p>
-          <a:p>
-            <a:pPr lvl="0" indent="0" marL="0">
-              <a:buNone/>
-            </a:pPr>
-          </a:p>
-          <a:p>
-            <a:pPr lvl="0" indent="0" marL="0">
-              <a:buNone/>
-            </a:pPr>
-            <a:r>
-              <a:rPr/>
-              <a:t>Handout Section 6.1 has the proof; notebook 2 confirms it directly with matrix_rank, which is the version they will believe. The next slide shows it as arithmetic.</a:t>
+              <a:t>MinMaxScaler is the more outlier-sensitive of the two: one extreme billing error stretches the whole 0-1 range, compressing every ordinary customer into a sliver of it. StandardScaler is pulled too, through the mean and standard deviation, but far less dramatically.</a:t>
+            </a:r>
+          </a:p>
+          <a:p>
+            <a:pPr lvl="0" indent="0" marL="0">
+              <a:buNone/>
+            </a:pPr>
+          </a:p>
+          <a:p>
+            <a:pPr lvl="0" indent="0" marL="0">
+              <a:buNone/>
+            </a:pPr>
+            <a:r>
+              <a:rPr/>
+              <a:t>Both must be fitted on training data only - say this every time a fitted transform appears, because it is the thread the whole lesson hangs from.</a:t>
             </a:r>
           </a:p>
         </p:txBody>
@@ -2694,35 +2767,63 @@
             </a:pPr>
             <a:r>
               <a:rPr/>
-              <a:t>Point at the number: the rank is short by exactly one, not by an arbitrary amount. That is the signature of a single linear dependence - the sum of the dummies equalling the intercept - rather than of general collinearity.</a:t>
-            </a:r>
-          </a:p>
-          <a:p>
-            <a:pPr lvl="0" indent="0" marL="0">
-              <a:buNone/>
-            </a:pPr>
-          </a:p>
-          <a:p>
-            <a:pPr lvl="0" indent="0" marL="0">
-              <a:buNone/>
-            </a:pPr>
-            <a:r>
-              <a:rPr/>
-              <a:t>The fix is OneHotEncoder(drop=“first”). The dropped category becomes the reference level, absorbed into the intercept: no information is lost, and full rank is restored.</a:t>
-            </a:r>
-          </a:p>
-          <a:p>
-            <a:pPr lvl="0" indent="0" marL="0">
-              <a:buNone/>
-            </a:pPr>
-          </a:p>
-          <a:p>
-            <a:pPr lvl="0" indent="0" marL="0">
-              <a:buNone/>
-            </a:pPr>
-            <a:r>
-              <a:rPr/>
-              <a:t>Two caveats worth saying. Tree-based models (Lesson 7) do not need this, because they never invert a design matrix. And regularised models tolerate the rank deficiency, because the penalty term picks one solution out of the infinitely many - which is a good early illustration of what regularisation actually does, and we return to it in Lesson 3.</a:t>
+              <a:t>Open by saying what the problem is, because nothing so far has needed it: a model does arithmetic, and a column holding the words “month-to-month” offers nothing to do arithmetic with. It has to become numbers, and there is more than one way to do that.</a:t>
+            </a:r>
+          </a:p>
+          <a:p>
+            <a:pPr lvl="0" indent="0" marL="0">
+              <a:buNone/>
+            </a:pPr>
+          </a:p>
+          <a:p>
+            <a:pPr lvl="0" indent="0" marL="0">
+              <a:buNone/>
+            </a:pPr>
+            <a:r>
+              <a:rPr/>
+              <a:t>Give them the word: the distinct values a categorical column can take are its levels. contract_type has three, with 2,000 rows spread across them.</a:t>
+            </a:r>
+          </a:p>
+          <a:p>
+            <a:pPr lvl="0" indent="0" marL="0">
+              <a:buNone/>
+            </a:pPr>
+          </a:p>
+          <a:p>
+            <a:pPr lvl="0" indent="0" marL="0">
+              <a:buNone/>
+            </a:pPr>
+            <a:r>
+              <a:rPr/>
+              <a:t>Then the sentence the whole section hangs on, and it is worth saying slowly: every way of turning a category into numbers makes a claim about the categories. The claim is the part to get right - the code is three lines either way.</a:t>
+            </a:r>
+          </a:p>
+          <a:p>
+            <a:pPr lvl="0" indent="0" marL="0">
+              <a:buNone/>
+            </a:pPr>
+          </a:p>
+          <a:p>
+            <a:pPr lvl="0" indent="0" marL="0">
+              <a:buNone/>
+            </a:pPr>
+            <a:r>
+              <a:rPr/>
+              <a:t>Point at the churn column before moving on. It does double duty: it is what target encoding will use as the number, and it is the evidence that will convict ordinal encoding two slides from now.</a:t>
+            </a:r>
+          </a:p>
+          <a:p>
+            <a:pPr lvl="0" indent="0" marL="0">
+              <a:buNone/>
+            </a:pPr>
+          </a:p>
+          <a:p>
+            <a:pPr lvl="0" indent="0" marL="0">
+              <a:buNone/>
+            </a:pPr>
+            <a:r>
+              <a:rPr/>
+              <a:t>Handout Section 6.</a:t>
             </a:r>
           </a:p>
         </p:txBody>
@@ -2804,35 +2905,49 @@
             </a:pPr>
             <a:r>
               <a:rPr/>
-              <a:t>Three encodings of one column, and each makes a different claim.</a:t>
-            </a:r>
-          </a:p>
-          <a:p>
-            <a:pPr lvl="0" indent="0" marL="0">
-              <a:buNone/>
-            </a:pPr>
-          </a:p>
-          <a:p>
-            <a:pPr lvl="0" indent="0" marL="0">
-              <a:buNone/>
-            </a:pPr>
-            <a:r>
-              <a:rPr/>
-              <a:t>Ordinal claims the categories are equally spaced on a line - fine for small/medium/large, wrong for region. One-hot claims nothing at all, which is why it is the default, and costs k columns: 493 for zip code on 2000 rows. Target claims each category is summarised by its own churn rate, which is compact and, as the next section shows, computed from the labels.</a:t>
-            </a:r>
-          </a:p>
-          <a:p>
-            <a:pPr lvl="0" indent="0" marL="0">
-              <a:buNone/>
-            </a:pPr>
-          </a:p>
-          <a:p>
-            <a:pPr lvl="0" indent="0" marL="0">
-              <a:buNone/>
-            </a:pPr>
-            <a:r>
-              <a:rPr/>
-              <a:t>The question to leave them with: which claim is true for THIS column? It is a domain question, not a technical one.</a:t>
+              <a:t>One customer, one contract, three numbers. Read the table a row at a time and let the right-hand column do the work - it is what each encoding is asserting about the world, not about the data type.</a:t>
+            </a:r>
+          </a:p>
+          <a:p>
+            <a:pPr lvl="0" indent="0" marL="0">
+              <a:buNone/>
+            </a:pPr>
+          </a:p>
+          <a:p>
+            <a:pPr lvl="0" indent="0" marL="0">
+              <a:buNone/>
+            </a:pPr>
+            <a:r>
+              <a:rPr/>
+              <a:t>The middle row is where damage usually happens, and this column shows why the mistake is reasonable: the order is genuine. A one-year contract really does sit between the other two, so ordinal looks safe here in a way it would not for region or zip code.</a:t>
+            </a:r>
+          </a:p>
+          <a:p>
+            <a:pPr lvl="0" indent="0" marL="0">
+              <a:buNone/>
+            </a:pPr>
+          </a:p>
+          <a:p>
+            <a:pPr lvl="0" indent="0" marL="0">
+              <a:buNone/>
+            </a:pPr>
+            <a:r>
+              <a:rPr/>
+              <a:t>Ask the room which of the three claims is true for THIS column before turning over. It is a domain question, not a technical one, and no cross-validation score will answer it.</a:t>
+            </a:r>
+          </a:p>
+          <a:p>
+            <a:pPr lvl="0" indent="0" marL="0">
+              <a:buNone/>
+            </a:pPr>
+          </a:p>
+          <a:p>
+            <a:pPr lvl="0" indent="0" marL="0">
+              <a:buNone/>
+            </a:pPr>
+            <a:r>
+              <a:rPr/>
+              <a:t>Handout Section 6.</a:t>
             </a:r>
           </a:p>
         </p:txBody>
@@ -2914,63 +3029,63 @@
             </a:pPr>
             <a:r>
               <a:rPr/>
-              <a:t>The same column under all three schemes, and each makes a different claim about the world.</a:t>
-            </a:r>
-          </a:p>
-          <a:p>
-            <a:pPr lvl="0" indent="0" marL="0">
-              <a:buNone/>
-            </a:pPr>
-          </a:p>
-          <a:p>
-            <a:pPr lvl="0" indent="0" marL="0">
-              <a:buNone/>
-            </a:pPr>
-            <a:r>
-              <a:rPr/>
-              <a:t>Ordinal claims the categories are equally spaced along a line - fine for small/medium/large, wrong for region, and the model has no way to tell you it was the wrong claim.</a:t>
-            </a:r>
-          </a:p>
-          <a:p>
-            <a:pPr lvl="0" indent="0" marL="0">
-              <a:buNone/>
-            </a:pPr>
-          </a:p>
-          <a:p>
-            <a:pPr lvl="0" indent="0" marL="0">
-              <a:buNone/>
-            </a:pPr>
-            <a:r>
-              <a:rPr/>
-              <a:t>One-hot claims nothing at all, which is why it is the default, and pays for that neutrality in columns: 493 of them for zip code, on 2000 rows.</a:t>
-            </a:r>
-          </a:p>
-          <a:p>
-            <a:pPr lvl="0" indent="0" marL="0">
-              <a:buNone/>
-            </a:pPr>
-          </a:p>
-          <a:p>
-            <a:pPr lvl="0" indent="0" marL="0">
-              <a:buNone/>
-            </a:pPr>
-            <a:r>
-              <a:rPr/>
-              <a:t>Target claims each category is summarised by its own churn rate. Compact, effective - and computed from the labels, which is where the next section begins.</a:t>
-            </a:r>
-          </a:p>
-          <a:p>
-            <a:pPr lvl="0" indent="0" marL="0">
-              <a:buNone/>
-            </a:pPr>
-          </a:p>
-          <a:p>
-            <a:pPr lvl="0" indent="0" marL="0">
-              <a:buNone/>
-            </a:pPr>
-            <a:r>
-              <a:rPr/>
-              <a:t>The question to leave with them: which claim is true for THIS column? That is a domain question, not a technical one, and no cross-validation score will answer it.</a:t>
+              <a:t>Left panel against right panel - that is the whole slide, and it is the answer to the question left hanging.</a:t>
+            </a:r>
+          </a:p>
+          <a:p>
+            <a:pPr lvl="0" indent="0" marL="0">
+              <a:buNone/>
+            </a:pPr>
+          </a:p>
+          <a:p>
+            <a:pPr lvl="0" indent="0" marL="0">
+              <a:buNone/>
+            </a:pPr>
+            <a:r>
+              <a:rPr/>
+              <a:t>Ordinal spaces the levels 0, 1, 2: equal steps by construction. The churn rates those levels stand in for fall 0.266, 0.137, 0.071, so the first step is 0.129 and the second is 0.066 - the first is nearly twice the second. The encoding asserts a regularity the column does not have, and a linear model has exactly one coefficient with which to believe it.</a:t>
+            </a:r>
+          </a:p>
+          <a:p>
+            <a:pPr lvl="0" indent="0" marL="0">
+              <a:buNone/>
+            </a:pPr>
+          </a:p>
+          <a:p>
+            <a:pPr lvl="0" indent="0" marL="0">
+              <a:buNone/>
+            </a:pPr>
+            <a:r>
+              <a:rPr/>
+              <a:t>Then the middle panel, which claims nothing at all and pays for that neutrality in columns - the caption says k = 493 for zip_code, and that is the thread into the next three slides.</a:t>
+            </a:r>
+          </a:p>
+          <a:p>
+            <a:pPr lvl="0" indent="0" marL="0">
+              <a:buNone/>
+            </a:pPr>
+          </a:p>
+          <a:p>
+            <a:pPr lvl="0" indent="0" marL="0">
+              <a:buNone/>
+            </a:pPr>
+            <a:r>
+              <a:rPr/>
+              <a:t>The right panel is computed from the labels. Say that out loud and leave it there: it is the first appearance of the leak the last third of the lesson is about.</a:t>
+            </a:r>
+          </a:p>
+          <a:p>
+            <a:pPr lvl="0" indent="0" marL="0">
+              <a:buNone/>
+            </a:pPr>
+          </a:p>
+          <a:p>
+            <a:pPr lvl="0" indent="0" marL="0">
+              <a:buNone/>
+            </a:pPr>
+            <a:r>
+              <a:rPr/>
+              <a:t>Handout Section 6.2.</a:t>
             </a:r>
           </a:p>
         </p:txBody>
@@ -3148,35 +3263,77 @@
             </a:pPr>
             <a:r>
               <a:rPr/>
-              <a:t>Handout Section 6.3. Deliberately quick - the point is to motivate why target encoding looks attractive for high-cardinality columns, before the next section shows why it needs care.</a:t>
-            </a:r>
-          </a:p>
-          <a:p>
-            <a:pPr lvl="0" indent="0" marL="0">
-              <a:buNone/>
-            </a:pPr>
-          </a:p>
-          <a:p>
-            <a:pPr lvl="0" indent="0" marL="0">
-              <a:buNone/>
-            </a:pPr>
-            <a:r>
-              <a:rPr/>
-              <a:t>The number to dwell on: one-hot encoding zip_code produces 493 columns, almost all zero, on 2000 rows. More columns than a quarter of the sample size, for one field.</a:t>
-            </a:r>
-          </a:p>
-          <a:p>
-            <a:pPr lvl="0" indent="0" marL="0">
-              <a:buNone/>
-            </a:pPr>
-          </a:p>
-          <a:p>
-            <a:pPr lvl="0" indent="0" marL="0">
-              <a:buNone/>
-            </a:pPr>
-            <a:r>
-              <a:rPr/>
-              <a:t>Two consequences to name. Distance-based methods (Lesson 6) degrade, because in high dimensions everything becomes roughly equidistant from everything else. And every column is a parameter to estimate from the same fixed amount of data, which is the bias-variance trade-off from Lesson 1 arriving from a new direction.</a:t>
+              <a:t>This is the encoding to spend time on, because it is what scikit-learn’s OneHotEncoder does and what the pipeline later in the notebook uses.</a:t>
+            </a:r>
+          </a:p>
+          <a:p>
+            <a:pPr lvl="0" indent="0" marL="0">
+              <a:buNone/>
+            </a:pPr>
+          </a:p>
+          <a:p>
+            <a:pPr lvl="0" indent="0" marL="0">
+              <a:buNone/>
+            </a:pPr>
+            <a:r>
+              <a:rPr/>
+              <a:t>The mechanics first: k levels, k binary columns, exactly one 1 in every row. No category is closer to any other, which is precisely the neutrality that makes it the safe default.</a:t>
+            </a:r>
+          </a:p>
+          <a:p>
+            <a:pPr lvl="0" indent="0" marL="0">
+              <a:buNone/>
+            </a:pPr>
+          </a:p>
+          <a:p>
+            <a:pPr lvl="0" indent="0" marL="0">
+              <a:buNone/>
+            </a:pPr>
+            <a:r>
+              <a:rPr/>
+              <a:t>Then the cost, which is the honest trade: k columns. Three is nothing; 493 on 2,000 rows is the curse of dimensionality, two slides from here.</a:t>
+            </a:r>
+          </a:p>
+          <a:p>
+            <a:pPr lvl="0" indent="0" marL="0">
+              <a:buNone/>
+            </a:pPr>
+          </a:p>
+          <a:p>
+            <a:pPr lvl="0" indent="0" marL="0">
+              <a:buNone/>
+            </a:pPr>
+            <a:r>
+              <a:rPr/>
+              <a:t>The last bullet is the hook, not a conclusion. Target encoding is the obvious escape from the width problem and it is the more dangerous of the two encodings in this entire lesson. Do not resolve it - the leakage section does.</a:t>
+            </a:r>
+          </a:p>
+          <a:p>
+            <a:pPr lvl="0" indent="0" marL="0">
+              <a:buNone/>
+            </a:pPr>
+          </a:p>
+          <a:p>
+            <a:pPr lvl="0" indent="0" marL="0">
+              <a:buNone/>
+            </a:pPr>
+            <a:r>
+              <a:rPr/>
+              <a:t>One more thing this slide sets up: k columns plus an intercept is one column too many, which the next slide proves.</a:t>
+            </a:r>
+          </a:p>
+          <a:p>
+            <a:pPr lvl="0" indent="0" marL="0">
+              <a:buNone/>
+            </a:pPr>
+          </a:p>
+          <a:p>
+            <a:pPr lvl="0" indent="0" marL="0">
+              <a:buNone/>
+            </a:pPr>
+            <a:r>
+              <a:rPr/>
+              <a:t>Handout Section 6.1 and 6.2.</a:t>
             </a:r>
           </a:p>
         </p:txBody>
@@ -3258,7 +3415,63 @@
             </a:pPr>
             <a:r>
               <a:rPr/>
-              <a:t>Point at the zip_code row/column - or its absence, since it is not even numeric yet - and say: notebook 1’s correlation check already suggests this column carries nothing. One-hot encoding it would add 493 mostly-empty columns. The natural alternative - replace each code with the average churn rate of its customers - is exactly the technique the leakage section is about. Do not resolve the tension yet; let it hang until after the break-free run into notebook 2’s pipeline section.</a:t>
+              <a:t>Define the word before using it, because this is the first time in the course they meet it: a model that fits an intercept is carrying one extra column made entirely of ones, so that it has a baseline to work from. That is all they need today - Lesson 3 is where it becomes a coefficient in an equation.</a:t>
+            </a:r>
+          </a:p>
+          <a:p>
+            <a:pPr lvl="0" indent="0" marL="0">
+              <a:buNone/>
+            </a:pPr>
+          </a:p>
+          <a:p>
+            <a:pPr lvl="0" indent="0" marL="0">
+              <a:buNone/>
+            </a:pPr>
+            <a:r>
+              <a:rPr/>
+              <a:t>Now the redundancy, which needs no model at all. Ask them the survey question from the handout: you record whether someone travels by car, by bus or by bicycle, three yes/no columns, and everyone answered exactly once. How many of those columns do you actually have to read? Two. The third is whatever is left, which means the three columns carry two columns’ worth of information.</a:t>
+            </a:r>
+          </a:p>
+          <a:p>
+            <a:pPr lvl="0" indent="0" marL="0">
+              <a:buNone/>
+            </a:pPr>
+          </a:p>
+          <a:p>
+            <a:pPr lvl="0" indent="0" marL="0">
+              <a:buNone/>
+            </a:pPr>
+            <a:r>
+              <a:rPr/>
+              <a:t>The slide is that sentence in symbols, plus one step: the k dummies sum to 1 in every row, and a column of ones is exactly what the intercept is. So k dummies and an intercept are k+1 columns carrying k columns’ worth of information, and one of them is spare.</a:t>
+            </a:r>
+          </a:p>
+          <a:p>
+            <a:pPr lvl="0" indent="0" marL="0">
+              <a:buNone/>
+            </a:pPr>
+          </a:p>
+          <a:p>
+            <a:pPr lvl="0" indent="0" marL="0">
+              <a:buNone/>
+            </a:pPr>
+            <a:r>
+              <a:rPr/>
+              <a:t>Stop there. What exactly breaks - the design matrix losing rank, the normal equation no longer having a unique solution, infinitely many coefficient vectors fitting equally well - is Lesson 3’s machinery, and it is the right place for it. Today’s consequence is practical: pass drop=“first”.</a:t>
+            </a:r>
+          </a:p>
+          <a:p>
+            <a:pPr lvl="0" indent="0" marL="0">
+              <a:buNone/>
+            </a:pPr>
+          </a:p>
+          <a:p>
+            <a:pPr lvl="0" indent="0" marL="0">
+              <a:buNone/>
+            </a:pPr>
+            <a:r>
+              <a:rPr/>
+              <a:t>Handout Section 6.1 carries the proof for whoever wants it now. The next slide shows the redundancy as a number.</a:t>
             </a:r>
           </a:p>
         </p:txBody>
@@ -3340,21 +3553,63 @@
             </a:pPr>
             <a:r>
               <a:rPr/>
-              <a:t>Handout Section 8.1. Lesson 1’s unbiasedness argument never mentioned “the model” specifically - it is about f, whatever function maps raw inputs to predictions. In deployment, a fitted scaler or imputer travels WITH the model, so f includes their learned parameters too.</a:t>
-            </a:r>
-          </a:p>
-          <a:p>
-            <a:pPr lvl="0" indent="0" marL="0">
-              <a:buNone/>
-            </a:pPr>
-          </a:p>
-          <a:p>
-            <a:pPr lvl="0" indent="0" marL="0">
-              <a:buNone/>
-            </a:pPr>
-            <a:r>
-              <a:rPr/>
-              <a:t>The moment any of those parameters - a mean, a set of neighbours, a per-category average - is estimated using rows that later appear in T, f is no longer independent of T, and the equality breaks. This is the one-sentence version of everything Section 9 is about to demonstrate concretely.</a:t>
+              <a:t>This is the redundancy counted by numpy rather than argued, which is the version they will believe: matrix_rank on the k+1 columns comes back one short.</a:t>
+            </a:r>
+          </a:p>
+          <a:p>
+            <a:pPr lvl="0" indent="0" marL="0">
+              <a:buNone/>
+            </a:pPr>
+          </a:p>
+          <a:p>
+            <a:pPr lvl="0" indent="0" marL="0">
+              <a:buNone/>
+            </a:pPr>
+            <a:r>
+              <a:rPr/>
+              <a:t>Point at the number: short by exactly one, not by an arbitrary amount. That is the signature of a single dependence - the dummies summing to the intercept - and not of general collinearity.</a:t>
+            </a:r>
+          </a:p>
+          <a:p>
+            <a:pPr lvl="0" indent="0" marL="0">
+              <a:buNone/>
+            </a:pPr>
+          </a:p>
+          <a:p>
+            <a:pPr lvl="0" indent="0" marL="0">
+              <a:buNone/>
+            </a:pPr>
+            <a:r>
+              <a:rPr/>
+              <a:t>The fix is OneHotEncoder(drop=“first”). The dropped category becomes the reference level, absorbed into the intercept: no information is lost, because that category is still recoverable as “all the other dummies are 0”.</a:t>
+            </a:r>
+          </a:p>
+          <a:p>
+            <a:pPr lvl="0" indent="0" marL="0">
+              <a:buNone/>
+            </a:pPr>
+          </a:p>
+          <a:p>
+            <a:pPr lvl="0" indent="0" marL="0">
+              <a:buNone/>
+            </a:pPr>
+            <a:r>
+              <a:rPr/>
+              <a:t>What a rank-deficient matrix does to a fit - infinitely many coefficient vectors that predict identically, and a solver returning whichever one the arithmetic happens to land on - is Lesson 3, once the normal equation exists to say it with. Flag it as coming and move on.</a:t>
+            </a:r>
+          </a:p>
+          <a:p>
+            <a:pPr lvl="0" indent="0" marL="0">
+              <a:buNone/>
+            </a:pPr>
+          </a:p>
+          <a:p>
+            <a:pPr lvl="0" indent="0" marL="0">
+              <a:buNone/>
+            </a:pPr>
+            <a:r>
+              <a:rPr/>
+              <a:t>Two caveats worth saying now. Tree-based models (Lesson 7) do not need the drop at all. And regularised models tolerate the rank deficiency, because the penalty picks one solution out of the many - which is a good early sketch of what regularisation does, and Lesson 3 returns to it.</a:t>
             </a:r>
           </a:p>
         </p:txBody>
@@ -3436,21 +3691,35 @@
             </a:pPr>
             <a:r>
               <a:rPr/>
-              <a:t>The structural version of the argument just stated. Different columns need different treatment; ColumnTransformer routes each group through its own sub-pipeline and concatenates the result; the outer Pipeline adds the classifier.</a:t>
-            </a:r>
-          </a:p>
-          <a:p>
-            <a:pPr lvl="0" indent="0" marL="0">
-              <a:buNone/>
-            </a:pPr>
-          </a:p>
-          <a:p>
-            <a:pPr lvl="0" indent="0" marL="0">
-              <a:buNone/>
-            </a:pPr>
-            <a:r>
-              <a:rPr/>
-              <a:t>One fit() call, on X_train, fits every imputer, the scaler, the encoder AND the classifier - in that order, on training data only, by construction. Say explicitly: this is not tidiness. It is what makes “nothing learned before the split” true even when nobody is watching, which today’s leakage section is entirely about.</a:t>
+              <a:t>Handout Section 6.3. Deliberately quick - the point is to motivate why target encoding looks attractive for high-cardinality columns, before the next section shows why it needs care.</a:t>
+            </a:r>
+          </a:p>
+          <a:p>
+            <a:pPr lvl="0" indent="0" marL="0">
+              <a:buNone/>
+            </a:pPr>
+          </a:p>
+          <a:p>
+            <a:pPr lvl="0" indent="0" marL="0">
+              <a:buNone/>
+            </a:pPr>
+            <a:r>
+              <a:rPr/>
+              <a:t>The number to dwell on: one-hot encoding zip_code produces 493 columns, almost all zero, on 2000 rows. More columns than a quarter of the sample size, for one field.</a:t>
+            </a:r>
+          </a:p>
+          <a:p>
+            <a:pPr lvl="0" indent="0" marL="0">
+              <a:buNone/>
+            </a:pPr>
+          </a:p>
+          <a:p>
+            <a:pPr lvl="0" indent="0" marL="0">
+              <a:buNone/>
+            </a:pPr>
+            <a:r>
+              <a:rPr/>
+              <a:t>Two consequences to name. Distance-based methods (Lesson 6) degrade, because in high dimensions everything becomes roughly equidistant from everything else. And every column is a parameter to estimate from the same fixed amount of data, which is the bias-variance trade-off from Lesson 1 arriving from a new direction.</a:t>
             </a:r>
           </a:p>
         </p:txBody>
@@ -3532,35 +3801,21 @@
             </a:pPr>
             <a:r>
               <a:rPr/>
-              <a:t>Say out loud what the five short names stand for, or someone spends the next minute working it out instead of listening: num_pipe and cat_pipe are the impute-then-transform pairs from the diagram two slides back, num_cols and cat_cols are plain lists of column names, and clf is the classifier. They are abbreviated here only to fit the slide - handout Section 8.2 prints the same block with full names, every import, and both column lists, and it runs as printed.</a:t>
-            </a:r>
-          </a:p>
-          <a:p>
-            <a:pPr lvl="0" indent="0" marL="0">
-              <a:buNone/>
-            </a:pPr>
-          </a:p>
-          <a:p>
-            <a:pPr lvl="0" indent="0" marL="0">
-              <a:buNone/>
-            </a:pPr>
-            <a:r>
-              <a:rPr/>
-              <a:t>Point out there is exactly ONE call to fit, at the very bottom, on X_train alone - everything above it declares structure, not computation.</a:t>
-            </a:r>
-          </a:p>
-          <a:p>
-            <a:pPr lvl="0" indent="0" marL="0">
-              <a:buNone/>
-            </a:pPr>
-          </a:p>
-          <a:p>
-            <a:pPr lvl="0" indent="0" marL="0">
-              <a:buNone/>
-            </a:pPr>
-            <a:r>
-              <a:rPr/>
-              <a:t>This is the code notebook 2 runs, nearly verbatim. Say that reading it should now feel unremarkable - that is the goal, structure that makes the right thing the easy thing.</a:t>
+              <a:t>Read the right panel out loud before making any argument with it, because it is a histogram of the 493 codes and nobody reads that off a projector unaided: the horizontal axis is how many customers share one zip code, the vertical axis is how many zip codes that happens to. The tallest bar stands at 3 and 4 - about a hundred codes each - and the whole thing stops at 12.</a:t>
+            </a:r>
+          </a:p>
+          <a:p>
+            <a:pPr lvl="0" indent="0" marL="0">
+              <a:buNone/>
+            </a:pPr>
+          </a:p>
+          <a:p>
+            <a:pPr lvl="0" indent="0" marL="0">
+              <a:buNone/>
+            </a:pPr>
+            <a:r>
+              <a:rPr/>
+              <a:t>Then point at the zip_code row/column - or its absence, since it is not even numeric yet - and say: notebook 1’s correlation check already suggests this column carries nothing. One-hot encoding it would add 493 mostly-empty columns. The natural alternative - replace each code with the average churn rate of its customers - is exactly the technique the leakage section is about. Do not resolve the tension yet; let it hang until after the break-free run into notebook 2’s pipeline section.</a:t>
             </a:r>
           </a:p>
         </p:txBody>
@@ -3642,35 +3897,21 @@
             </a:pPr>
             <a:r>
               <a:rPr/>
-              <a:t>Let the room answer why the accuracy gain is modest. The dataset is 80/20 imbalanced, so accuracy is dominated by the majority class - exactly as Lesson 1 warned, and the first time they meet it on data they prepared themselves.</a:t>
-            </a:r>
-          </a:p>
-          <a:p>
-            <a:pPr lvl="0" indent="0" marL="0">
-              <a:buNone/>
-            </a:pPr>
-          </a:p>
-          <a:p>
-            <a:pPr lvl="0" indent="0" marL="0">
-              <a:buNone/>
-            </a:pPr>
-            <a:r>
-              <a:rPr/>
-              <a:t>The matrix shows where the errors sit: read the bottom-left cell, the churners the model missed. The area under the receiver operating characteristic curve - AUC, which Lesson 4 builds properly - at 0.751 is unaffected by the imbalance and says there is real signal that accuracy is hiding.</a:t>
-            </a:r>
-          </a:p>
-          <a:p>
-            <a:pPr lvl="0" indent="0" marL="0">
-              <a:buNone/>
-            </a:pPr>
-          </a:p>
-          <a:p>
-            <a:pPr lvl="0" indent="0" marL="0">
-              <a:buNone/>
-            </a:pPr>
-            <a:r>
-              <a:rPr/>
-              <a:t>Had we reported only accuracy, this model would look barely better than the baseline and someone would reasonably conclude the features were useless.</a:t>
+              <a:t>Handout Section 8.1. Lesson 1’s unbiasedness argument never mentioned “the model” specifically - it is about f, whatever function maps raw inputs to predictions. In deployment, a fitted scaler or imputer travels WITH the model, so f includes their learned parameters too.</a:t>
+            </a:r>
+          </a:p>
+          <a:p>
+            <a:pPr lvl="0" indent="0" marL="0">
+              <a:buNone/>
+            </a:pPr>
+          </a:p>
+          <a:p>
+            <a:pPr lvl="0" indent="0" marL="0">
+              <a:buNone/>
+            </a:pPr>
+            <a:r>
+              <a:rPr/>
+              <a:t>The moment any of those parameters - a mean, a set of neighbours, a per-category average - is estimated using rows that later appear in T, f is no longer independent of T, and the equality breaks. This is the one-sentence version of everything Section 9 is about to demonstrate concretely.</a:t>
             </a:r>
           </a:p>
         </p:txBody>
@@ -3752,35 +3993,21 @@
             </a:pPr>
             <a:r>
               <a:rPr/>
-              <a:t>The accuracy gain was fourteen thousandths. This is where those errors actually sit, and it explains why the gain is small.</a:t>
-            </a:r>
-          </a:p>
-          <a:p>
-            <a:pPr lvl="0" indent="0" marL="0">
-              <a:buNone/>
-            </a:pPr>
-          </a:p>
-          <a:p>
-            <a:pPr lvl="0" indent="0" marL="0">
-              <a:buNone/>
-            </a:pPr>
-            <a:r>
-              <a:rPr/>
-              <a:t>Read the bottom row: almost every customer who churned was predicted to stay. The model has learned to predict the majority class slightly more cleverly than the baseline does, and on the class the business would pay to identify it is close to useless.</a:t>
-            </a:r>
-          </a:p>
-          <a:p>
-            <a:pPr lvl="0" indent="0" marL="0">
-              <a:buNone/>
-            </a:pPr>
-          </a:p>
-          <a:p>
-            <a:pPr lvl="0" indent="0" marL="0">
-              <a:buNone/>
-            </a:pPr>
-            <a:r>
-              <a:rPr/>
-              <a:t>Then connect it back to lesson 1 and its imbalance slide. Same shape, different dataset, and it took a confusion matrix to see it in both cases. Accuracy on its own would have reported this as progress.</a:t>
+              <a:t>The structural version of the argument just stated. Different columns need different treatment; ColumnTransformer routes each group through its own sub-pipeline and concatenates the result; the outer Pipeline adds the classifier.</a:t>
+            </a:r>
+          </a:p>
+          <a:p>
+            <a:pPr lvl="0" indent="0" marL="0">
+              <a:buNone/>
+            </a:pPr>
+          </a:p>
+          <a:p>
+            <a:pPr lvl="0" indent="0" marL="0">
+              <a:buNone/>
+            </a:pPr>
+            <a:r>
+              <a:rPr/>
+              <a:t>One fit() call, on X_train, fits every imputer, the scaler, the encoder AND the classifier - in that order, on training data only, by construction. Say explicitly: this is not tidiness. It is what makes “nothing learned before the split” true even when nobody is watching, which today’s leakage section is entirely about.</a:t>
             </a:r>
           </a:p>
         </p:txBody>
@@ -3862,49 +4089,35 @@
             </a:pPr>
             <a:r>
               <a:rPr/>
-              <a:t>Do not let anyone in the room call two thousandths a win, and do not call it one yourself. It is a legitimate result, not a failed experiment - the hypothesis that cost intensity matters here was reasonable, it was tested, and the data declined it. Feature engineering is a hypothesis about the domain, not a guarantee. Handout Section 7.</a:t>
-            </a:r>
-          </a:p>
-          <a:p>
-            <a:pPr lvl="0" indent="0" marL="0">
-              <a:buNone/>
-            </a:pPr>
-          </a:p>
-          <a:p>
-            <a:pPr lvl="0" indent="0" marL="0">
-              <a:buNone/>
-            </a:pPr>
-            <a:r>
-              <a:rPr/>
-              <a:t>Then plant the flag for Lesson 5: a difference this small is inside the range a different train/test split would produce on its own, so a single split cannot settle it either way. Reporting it as an improvement is the first step onto exactly the path Lesson 5 exists to close off.</a:t>
-            </a:r>
-          </a:p>
-          <a:p>
-            <a:pPr lvl="0" indent="0" marL="0">
-              <a:buNone/>
-            </a:pPr>
-          </a:p>
-          <a:p>
-            <a:pPr lvl="0" indent="0" marL="0">
-              <a:buNone/>
-            </a:pPr>
-            <a:r>
-              <a:rPr/>
-              <a:t>Explain the max and the +1 rather than skating over them, because someone will ask. tenure_months holds zeros and, before Section 4’s domain rule, a -3: divide by it raw and you get an infinity and a sign flip. That is Section 4 turning up in Section 7, and it is what feature engineering on real data actually looks like - one line of algebra, three lines of defending it against the column you have.</a:t>
-            </a:r>
-          </a:p>
-          <a:p>
-            <a:pPr lvl="0" indent="0" marL="0">
-              <a:buNone/>
-            </a:pPr>
-          </a:p>
-          <a:p>
-            <a:pPr lvl="0" indent="0" marL="0">
-              <a:buNone/>
-            </a:pPr>
-            <a:r>
-              <a:rPr/>
-              <a:t>The point to land: any engineered feature that involves a statistic LEARNED from data - bin edges from quantiles, a scaled interaction - is subject to the same rule as scaling. A pure arithmetic combination (this ratio) needs no fold-awareness; a learned one does.</a:t>
+              <a:t>Say out loud what the five short names stand for, or someone spends the next minute working it out instead of listening: num_pipe and cat_pipe are the impute-then-transform pairs from the diagram two slides back, num_cols and cat_cols are plain lists of column names, and clf is the classifier. They are abbreviated here only to fit the slide - handout Section 8.2 prints the same block with full names, every import, and both column lists, and it runs as printed.</a:t>
+            </a:r>
+          </a:p>
+          <a:p>
+            <a:pPr lvl="0" indent="0" marL="0">
+              <a:buNone/>
+            </a:pPr>
+          </a:p>
+          <a:p>
+            <a:pPr lvl="0" indent="0" marL="0">
+              <a:buNone/>
+            </a:pPr>
+            <a:r>
+              <a:rPr/>
+              <a:t>Point out there is exactly ONE call to fit, at the very bottom, on X_train alone - everything above it declares structure, not computation.</a:t>
+            </a:r>
+          </a:p>
+          <a:p>
+            <a:pPr lvl="0" indent="0" marL="0">
+              <a:buNone/>
+            </a:pPr>
+          </a:p>
+          <a:p>
+            <a:pPr lvl="0" indent="0" marL="0">
+              <a:buNone/>
+            </a:pPr>
+            <a:r>
+              <a:rPr/>
+              <a:t>This is the code notebook 2 runs, nearly verbatim. Say that reading it should now feel unremarkable - that is the goal, structure that makes the right thing the easy thing.</a:t>
             </a:r>
           </a:p>
         </p:txBody>
@@ -3986,35 +4199,35 @@
             </a:pPr>
             <a:r>
               <a:rPr/>
-              <a:t>22 minutes. Let them work; circulate.</a:t>
-            </a:r>
-          </a:p>
-          <a:p>
-            <a:pPr lvl="0" indent="0" marL="0">
-              <a:buNone/>
-            </a:pPr>
-          </a:p>
-          <a:p>
-            <a:pPr lvl="0" indent="0" marL="0">
-              <a:buNone/>
-            </a:pPr>
-            <a:r>
-              <a:rPr/>
-              <a:t>The gradient descent toy is worth running interactively - change the variance ratio live and watch the iteration count move, per the handout’s “try this”. It makes the condition number argument concrete in a way the derivation alone does not.</a:t>
-            </a:r>
-          </a:p>
-          <a:p>
-            <a:pPr lvl="0" indent="0" marL="0">
-              <a:buNone/>
-            </a:pPr>
-          </a:p>
-          <a:p>
-            <a:pPr lvl="0" indent="0" marL="0">
-              <a:buNone/>
-            </a:pPr>
-            <a:r>
-              <a:rPr/>
-              <a:t>If the room is moving fast, the ColumnTransformer section is where to slow down: it is the piece they will reuse in every exercise and in the project, and getting the column selectors right is fiddlier than it looks.</a:t>
+              <a:t>Let the room answer why the accuracy gain is modest. The dataset is 80/20 imbalanced, so accuracy is dominated by the majority class - exactly as Lesson 1 warned, and the first time they meet it on data they prepared themselves.</a:t>
+            </a:r>
+          </a:p>
+          <a:p>
+            <a:pPr lvl="0" indent="0" marL="0">
+              <a:buNone/>
+            </a:pPr>
+          </a:p>
+          <a:p>
+            <a:pPr lvl="0" indent="0" marL="0">
+              <a:buNone/>
+            </a:pPr>
+            <a:r>
+              <a:rPr/>
+              <a:t>The matrix shows where the errors sit: read the bottom-left cell, the churners the model missed. The area under the receiver operating characteristic curve - AUC, which Lesson 4 builds properly - at 0.751 is unaffected by the imbalance and says there is real signal that accuracy is hiding.</a:t>
+            </a:r>
+          </a:p>
+          <a:p>
+            <a:pPr lvl="0" indent="0" marL="0">
+              <a:buNone/>
+            </a:pPr>
+          </a:p>
+          <a:p>
+            <a:pPr lvl="0" indent="0" marL="0">
+              <a:buNone/>
+            </a:pPr>
+            <a:r>
+              <a:rPr/>
+              <a:t>Had we reported only accuracy, this model would look barely better than the baseline and someone would reasonably conclude the features were useless.</a:t>
             </a:r>
           </a:p>
         </p:txBody>
@@ -4096,7 +4309,35 @@
             </a:pPr>
             <a:r>
               <a:rPr/>
-              <a:t>Set up the closing section. Lesson 1’s leak - selecting features on the full dataset - is visible once you know to look for it: an obviously extra step. Today’s two are not. Imputing a missing value and encoding a category both read as ordinary data cleaning, not as “training a model.” They ARE training a model, in the sense Section 8.1 makes precise: any fitted parameter is part of f, and f must be independent of the test set.</a:t>
+              <a:t>The accuracy gain was fourteen thousandths. This is where those errors actually sit, and it explains why the gain is small.</a:t>
+            </a:r>
+          </a:p>
+          <a:p>
+            <a:pPr lvl="0" indent="0" marL="0">
+              <a:buNone/>
+            </a:pPr>
+          </a:p>
+          <a:p>
+            <a:pPr lvl="0" indent="0" marL="0">
+              <a:buNone/>
+            </a:pPr>
+            <a:r>
+              <a:rPr/>
+              <a:t>Read the bottom row: almost every customer who churned was predicted to stay. The model has learned to predict the majority class slightly more cleverly than the baseline does, and on the class the business would pay to identify it is close to useless.</a:t>
+            </a:r>
+          </a:p>
+          <a:p>
+            <a:pPr lvl="0" indent="0" marL="0">
+              <a:buNone/>
+            </a:pPr>
+          </a:p>
+          <a:p>
+            <a:pPr lvl="0" indent="0" marL="0">
+              <a:buNone/>
+            </a:pPr>
+            <a:r>
+              <a:rPr/>
+              <a:t>Then connect it back to lesson 1 and its imbalance slide. Same shape, different dataset, and it took a confusion matrix to see it in both cases. Accuracy on its own would have reported this as progress.</a:t>
             </a:r>
           </a:p>
         </p:txBody>
@@ -4288,35 +4529,49 @@
             </a:pPr>
             <a:r>
               <a:rPr/>
-              <a:t>Walk the mechanism before the number. KNNImputer fills a gap using other rows’ values: it finds the nearest neighbours in feature space and averages them. “Nearest in the whole dataset” includes test rows, if it was fitted before the split existed.</a:t>
-            </a:r>
-          </a:p>
-          <a:p>
-            <a:pPr lvl="0" indent="0" marL="0">
-              <a:buNone/>
-            </a:pPr>
-          </a:p>
-          <a:p>
-            <a:pPr lvl="0" indent="0" marL="0">
-              <a:buNone/>
-            </a:pPr>
-            <a:r>
-              <a:rPr/>
-              <a:t>So a TRAINING row’s missing age can be filled with a value read off a TEST row - the test set writing into the training data, one gap at a time. Note the imputer never touches a label; it copies feature values. That is enough: those values are what the model then fits on. The imputer did nothing wrong; it was simply shown data it should not have seen.</a:t>
-            </a:r>
-          </a:p>
-          <a:p>
-            <a:pPr lvl="0" indent="0" marL="0">
-              <a:buNone/>
-            </a:pPr>
-          </a:p>
-          <a:p>
-            <a:pPr lvl="0" indent="0" marL="0">
-              <a:buNone/>
-            </a:pPr>
-            <a:r>
-              <a:rPr/>
-              <a:t>Notebook 3 measures the gap. Connect it back to Lesson 1: this is the same independence argument, applied to a step nobody thinks of as learning. The imputer learns; therefore it belongs inside the training fold.</a:t>
+              <a:t>Do not let anyone in the room call two thousandths a win, and do not call it one yourself. It is a legitimate result, not a failed experiment - the hypothesis that cost intensity matters here was reasonable, it was tested, and the data declined it. Feature engineering is a hypothesis about the domain, not a guarantee. Handout Section 7.</a:t>
+            </a:r>
+          </a:p>
+          <a:p>
+            <a:pPr lvl="0" indent="0" marL="0">
+              <a:buNone/>
+            </a:pPr>
+          </a:p>
+          <a:p>
+            <a:pPr lvl="0" indent="0" marL="0">
+              <a:buNone/>
+            </a:pPr>
+            <a:r>
+              <a:rPr/>
+              <a:t>Then plant the flag for Lesson 5: a difference this small is inside the range a different train/test split would produce on its own, so a single split cannot settle it either way. Reporting it as an improvement is the first step onto exactly the path Lesson 5 exists to close off.</a:t>
+            </a:r>
+          </a:p>
+          <a:p>
+            <a:pPr lvl="0" indent="0" marL="0">
+              <a:buNone/>
+            </a:pPr>
+          </a:p>
+          <a:p>
+            <a:pPr lvl="0" indent="0" marL="0">
+              <a:buNone/>
+            </a:pPr>
+            <a:r>
+              <a:rPr/>
+              <a:t>Explain the max and the +1 rather than skating over them, because someone will ask. tenure_months holds zeros and, before Section 4’s domain rule, a -3: divide by it raw and you get an infinity and a sign flip. That is Section 4 turning up in Section 7, and it is what feature engineering on real data actually looks like - one line of algebra, three lines of defending it against the column you have.</a:t>
+            </a:r>
+          </a:p>
+          <a:p>
+            <a:pPr lvl="0" indent="0" marL="0">
+              <a:buNone/>
+            </a:pPr>
+          </a:p>
+          <a:p>
+            <a:pPr lvl="0" indent="0" marL="0">
+              <a:buNone/>
+            </a:pPr>
+            <a:r>
+              <a:rPr/>
+              <a:t>The point to land: any engineered feature that involves a statistic LEARNED from data - bin edges from quantiles, a scaled interaction - is subject to the same rule as scaling. A pure arithmetic combination (this ratio) needs no fold-awareness; a learned one does.</a:t>
             </a:r>
           </a:p>
         </p:txBody>
@@ -4398,35 +4653,35 @@
             </a:pPr>
             <a:r>
               <a:rPr/>
-              <a:t>94 of 128. Not an edge case - nearly three quarters of the imputed training rows borrowed a value from at least one row the model would later be scored on.</a:t>
-            </a:r>
-          </a:p>
-          <a:p>
-            <a:pPr lvl="0" indent="0" marL="0">
-              <a:buNone/>
-            </a:pPr>
-          </a:p>
-          <a:p>
-            <a:pPr lvl="0" indent="0" marL="0">
-              <a:buNone/>
-            </a:pPr>
-            <a:r>
-              <a:rPr/>
-              <a:t>Stress that nothing in the code looks wrong. KNNImputer did exactly what it says: found the nearest neighbours in the data it was given. The error was in what it was given, and it happened one line earlier.</a:t>
-            </a:r>
-          </a:p>
-          <a:p>
-            <a:pPr lvl="0" indent="0" marL="0">
-              <a:buNone/>
-            </a:pPr>
-          </a:p>
-          <a:p>
-            <a:pPr lvl="0" indent="0" marL="0">
-              <a:buNone/>
-            </a:pPr>
-            <a:r>
-              <a:rPr/>
-              <a:t>This is the number to put on the board if only one number from today survives.</a:t>
+              <a:t>20 minutes. Let them work; circulate.</a:t>
+            </a:r>
+          </a:p>
+          <a:p>
+            <a:pPr lvl="0" indent="0" marL="0">
+              <a:buNone/>
+            </a:pPr>
+          </a:p>
+          <a:p>
+            <a:pPr lvl="0" indent="0" marL="0">
+              <a:buNone/>
+            </a:pPr>
+            <a:r>
+              <a:rPr/>
+              <a:t>The gradient descent toy is worth running interactively - change the variance ratio live and watch the iteration count move, per the handout’s “try this”. It makes the condition number argument concrete in a way the derivation alone does not.</a:t>
+            </a:r>
+          </a:p>
+          <a:p>
+            <a:pPr lvl="0" indent="0" marL="0">
+              <a:buNone/>
+            </a:pPr>
+          </a:p>
+          <a:p>
+            <a:pPr lvl="0" indent="0" marL="0">
+              <a:buNone/>
+            </a:pPr>
+            <a:r>
+              <a:rPr/>
+              <a:t>If the room is moving fast, the ColumnTransformer section is where to slow down: it is the piece they will reuse in every exercise and in the project, and getting the column selectors right is fiddlier than it looks.</a:t>
             </a:r>
           </a:p>
         </p:txBody>
@@ -4508,35 +4763,7 @@
             </a:pPr>
             <a:r>
               <a:rPr/>
-              <a:t>Ninety-four of a hundred and twenty-eight, drawn so the proportion lands.</a:t>
-            </a:r>
-          </a:p>
-          <a:p>
-            <a:pPr lvl="0" indent="0" marL="0">
-              <a:buNone/>
-            </a:pPr>
-          </a:p>
-          <a:p>
-            <a:pPr lvl="0" indent="0" marL="0">
-              <a:buNone/>
-            </a:pPr>
-            <a:r>
-              <a:rPr/>
-              <a:t>Say what was actually done: the imputer was fitted before the split, so when it filled a missing age it was allowed to look at test rows to decide what to fill it with. Nearly three quarters of the affected training rows had a test row among the five donors it consulted.</a:t>
-            </a:r>
-          </a:p>
-          <a:p>
-            <a:pPr lvl="0" indent="0" marL="0">
-              <a:buNone/>
-            </a:pPr>
-          </a:p>
-          <a:p>
-            <a:pPr lvl="0" indent="0" marL="0">
-              <a:buNone/>
-            </a:pPr>
-            <a:r>
-              <a:rPr/>
-              <a:t>The sentence to leave hanging is the one from the slide before: nothing raised an error. The notebook ran, the score improved, and the improvement was the test set leaking into the training data one imputed value at a time. This is the argument for the pipeline, made in numbers.</a:t>
+              <a:t>Set up the closing section. Lesson 1’s leak - selecting features on the full dataset - is visible once you know to look for it: an obviously extra step. Today’s two are not. Imputing a missing value and encoding a category both read as ordinary data cleaning, not as “training a model.” They ARE training a model, in the sense Section 8.1 makes precise: any fitted parameter is part of f, and f must be independent of the test set.</a:t>
             </a:r>
           </a:p>
         </p:txBody>
@@ -4618,35 +4845,35 @@
             </a:pPr>
             <a:r>
               <a:rPr/>
-              <a:t>zip_code has no real relationship with churn - the data was generated that way deliberately, so any apparent signal is an artefact we can measure exactly.</a:t>
-            </a:r>
-          </a:p>
-          <a:p>
-            <a:pPr lvl="0" indent="0" marL="0">
-              <a:buNone/>
-            </a:pPr>
-          </a:p>
-          <a:p>
-            <a:pPr lvl="0" indent="0" marL="0">
-              <a:buNone/>
-            </a:pPr>
-            <a:r>
-              <a:rPr/>
-              <a:t>Target encoding replaces each zip code with the average churn rate of its own customers. Computed before the split, that average includes the test rows’ labels. The feature now contains the answer, in diluted form.</a:t>
-            </a:r>
-          </a:p>
-          <a:p>
-            <a:pPr lvl="0" indent="0" marL="0">
-              <a:buNone/>
-            </a:pPr>
-          </a:p>
-          <a:p>
-            <a:pPr lvl="0" indent="0" marL="0">
-              <a:buNone/>
-            </a:pPr>
-            <a:r>
-              <a:rPr/>
-              <a:t>This is the most dangerous leak of the three, because the resulting column looks entirely reasonable in a dataframe: a number between 0 and 1, sensibly distributed, with no trace of where it came from. Nothing about it says “this was computed from the labels”.</a:t>
+              <a:t>Walk the mechanism before the number. KNNImputer fills a gap using other rows’ values: it finds the nearest neighbours in feature space and averages them. “Nearest in the whole dataset” includes test rows, if it was fitted before the split existed.</a:t>
+            </a:r>
+          </a:p>
+          <a:p>
+            <a:pPr lvl="0" indent="0" marL="0">
+              <a:buNone/>
+            </a:pPr>
+          </a:p>
+          <a:p>
+            <a:pPr lvl="0" indent="0" marL="0">
+              <a:buNone/>
+            </a:pPr>
+            <a:r>
+              <a:rPr/>
+              <a:t>So a TRAINING row’s missing age can be filled with a value read off a TEST row - the test set writing into the training data, one gap at a time. Note the imputer never touches a label; it copies feature values. That is enough: those values are what the model then fits on. The imputer did nothing wrong; it was simply shown data it should not have seen.</a:t>
+            </a:r>
+          </a:p>
+          <a:p>
+            <a:pPr lvl="0" indent="0" marL="0">
+              <a:buNone/>
+            </a:pPr>
+          </a:p>
+          <a:p>
+            <a:pPr lvl="0" indent="0" marL="0">
+              <a:buNone/>
+            </a:pPr>
+            <a:r>
+              <a:rPr/>
+              <a:t>Notebook 3 measures the gap. Connect it back to Lesson 1: this is the same independence argument, applied to a step nobody thinks of as learning. The imputer learns; therefore it belongs inside the training fold.</a:t>
             </a:r>
           </a:p>
         </p:txBody>
@@ -4728,21 +4955,35 @@
             </a:pPr>
             <a:r>
               <a:rPr/>
-              <a:t>Baseline without zip: AUC 0.751. Honest encoding (sklearn’s TargetEncoder, cross-fitted inside the pipeline): 0.751 - indistinguishable, correctly, since zip carries nothing. Leaky encoding, computed before the split: 0.891.</a:t>
-            </a:r>
-          </a:p>
-          <a:p>
-            <a:pPr lvl="0" indent="0" marL="0">
-              <a:buNone/>
-            </a:pPr>
-          </a:p>
-          <a:p>
-            <a:pPr lvl="0" indent="0" marL="0">
-              <a:buNone/>
-            </a:pPr>
-            <a:r>
-              <a:rPr/>
-              <a:t>Let that number sit. It looks like a genuinely better model. It is not one - the improvement is manufactured entirely by the mechanism on the next slide. This is Lesson 1’s 77%-on-coin-flip-labels story again, produced by two unremarkable lines of preprocessing instead of an obviously wrong one.</a:t>
+              <a:t>94 of 128. Not an edge case - nearly three quarters of the imputed training rows borrowed a value from at least one row the model would later be scored on.</a:t>
+            </a:r>
+          </a:p>
+          <a:p>
+            <a:pPr lvl="0" indent="0" marL="0">
+              <a:buNone/>
+            </a:pPr>
+          </a:p>
+          <a:p>
+            <a:pPr lvl="0" indent="0" marL="0">
+              <a:buNone/>
+            </a:pPr>
+            <a:r>
+              <a:rPr/>
+              <a:t>Stress that nothing in the code looks wrong. KNNImputer did exactly what it says: found the nearest neighbours in the data it was given. The error was in what it was given, and it happened one line earlier.</a:t>
+            </a:r>
+          </a:p>
+          <a:p>
+            <a:pPr lvl="0" indent="0" marL="0">
+              <a:buNone/>
+            </a:pPr>
+          </a:p>
+          <a:p>
+            <a:pPr lvl="0" indent="0" marL="0">
+              <a:buNone/>
+            </a:pPr>
+            <a:r>
+              <a:rPr/>
+              <a:t>This is the number to put on the board if only one number from today survives.</a:t>
             </a:r>
           </a:p>
         </p:txBody>
@@ -4824,49 +5065,35 @@
             </a:pPr>
             <a:r>
               <a:rPr/>
-              <a:t>Read the equation out as a sentence: the “leave-in” encoding differs from the honest leave-one-out encoding by the row’s own disagreement with its group, divided by how many people are in it.</a:t>
-            </a:r>
-          </a:p>
-          <a:p>
-            <a:pPr lvl="0" indent="0" marL="0">
-              <a:buNone/>
-            </a:pPr>
-          </a:p>
-          <a:p>
-            <a:pPr lvl="0" indent="0" marL="0">
-              <a:buNone/>
-            </a:pPr>
-            <a:r>
-              <a:rPr/>
-              <a:t>Handout Section 9.2 has the algebra. The intuition: for a zip code with a single customer, the target encoding IS that customer’s label, straight through. With two customers it is the average of two labels. Only as the group grows does the encoding become a genuine statistic rather than a copy of the answer.</a:t>
-            </a:r>
-          </a:p>
-          <a:p>
-            <a:pPr lvl="0" indent="0" marL="0">
-              <a:buNone/>
-            </a:pPr>
-          </a:p>
-          <a:p>
-            <a:pPr lvl="0" indent="0" marL="0">
-              <a:buNone/>
-            </a:pPr>
-            <a:r>
-              <a:rPr/>
-              <a:t>So the leak is worst exactly where the data is thinnest - which is also where high-cardinality columns spend most of their mass. Most zip codes here have a handful of customers.</a:t>
-            </a:r>
-          </a:p>
-          <a:p>
-            <a:pPr lvl="0" indent="0" marL="0">
-              <a:buNone/>
-            </a:pPr>
-          </a:p>
-          <a:p>
-            <a:pPr lvl="0" indent="0" marL="0">
-              <a:buNone/>
-            </a:pPr>
-            <a:r>
-              <a:rPr/>
-              <a:t>Give them the diagnostic to remember: if a feature’s usefulness comes mostly from its rarest levels, be suspicious. That is the shape of a leak, not of a signal.</a:t>
+              <a:t>Ninety-four of a hundred and twenty-eight, drawn so the proportion lands.</a:t>
+            </a:r>
+          </a:p>
+          <a:p>
+            <a:pPr lvl="0" indent="0" marL="0">
+              <a:buNone/>
+            </a:pPr>
+          </a:p>
+          <a:p>
+            <a:pPr lvl="0" indent="0" marL="0">
+              <a:buNone/>
+            </a:pPr>
+            <a:r>
+              <a:rPr/>
+              <a:t>Say what was actually done: the imputer was fitted before the split, so when it filled a missing age it was allowed to look at test rows to decide what to fill it with. Nearly three quarters of the affected training rows had a test row among the five donors it consulted.</a:t>
+            </a:r>
+          </a:p>
+          <a:p>
+            <a:pPr lvl="0" indent="0" marL="0">
+              <a:buNone/>
+            </a:pPr>
+          </a:p>
+          <a:p>
+            <a:pPr lvl="0" indent="0" marL="0">
+              <a:buNone/>
+            </a:pPr>
+            <a:r>
+              <a:rPr/>
+              <a:t>The sentence to leave hanging is the one from the slide before: nothing raised an error. The notebook ran, the score improved, and the improvement was the test set leaking into the training data one imputed value at a time. This is the argument for the pipeline, made in numbers.</a:t>
             </a:r>
           </a:p>
         </p:txBody>
@@ -4948,21 +5175,35 @@
             </a:pPr>
             <a:r>
               <a:rPr/>
-              <a:t>Notebook 3 shows the n_c=1 case literally: zip code Z472, one customer, churn label 0, encoded value 0.000. Not correlated with the label. IS the label, relabelled as an input.</a:t>
-            </a:r>
-          </a:p>
-          <a:p>
-            <a:pPr lvl="0" indent="0" marL="0">
-              <a:buNone/>
-            </a:pPr>
-          </a:p>
-          <a:p>
-            <a:pPr lvl="0" indent="0" marL="0">
-              <a:buNone/>
-            </a:pPr>
-            <a:r>
-              <a:rPr/>
-              <a:t>Connect to Section 6.3: high cardinality means small groups means a bigger leak by exactly this formula - the curse of dimensionality and the leakage risk are the same underlying fact.</a:t>
+              <a:t>zip_code has no real relationship with churn - the data was generated that way deliberately, so any apparent signal is an artefact we can measure exactly.</a:t>
+            </a:r>
+          </a:p>
+          <a:p>
+            <a:pPr lvl="0" indent="0" marL="0">
+              <a:buNone/>
+            </a:pPr>
+          </a:p>
+          <a:p>
+            <a:pPr lvl="0" indent="0" marL="0">
+              <a:buNone/>
+            </a:pPr>
+            <a:r>
+              <a:rPr/>
+              <a:t>Target encoding replaces each zip code with the average churn rate of its own customers. Computed before the split, that average includes the test rows’ labels. The feature now contains the answer, in diluted form.</a:t>
+            </a:r>
+          </a:p>
+          <a:p>
+            <a:pPr lvl="0" indent="0" marL="0">
+              <a:buNone/>
+            </a:pPr>
+          </a:p>
+          <a:p>
+            <a:pPr lvl="0" indent="0" marL="0">
+              <a:buNone/>
+            </a:pPr>
+            <a:r>
+              <a:rPr/>
+              <a:t>This is the most dangerous leak of the three, because the resulting column looks entirely reasonable in a dataframe: a number between 0 and 1, sensibly distributed, with no trace of where it came from. Nothing about it says “this was computed from the labels”.</a:t>
             </a:r>
           </a:p>
         </p:txBody>
@@ -5044,35 +5285,21 @@
             </a:pPr>
             <a:r>
               <a:rPr/>
-              <a:t>Smoothing pulls each group’s mean towards the global mean, weighted by group size, so a one-customer zip code barely moves from the overall rate. It reduces the leak but does not remove it.</a:t>
-            </a:r>
-          </a:p>
-          <a:p>
-            <a:pPr lvl="0" indent="0" marL="0">
-              <a:buNone/>
-            </a:pPr>
-          </a:p>
-          <a:p>
-            <a:pPr lvl="0" indent="0" marL="0">
-              <a:buNone/>
-            </a:pPr>
-            <a:r>
-              <a:rPr/>
-              <a:t>Say clearly what actually removes it: fitting the encoder inside the training fold, exactly as with every other learned step. Smoothing is a refinement on top of that, not a substitute for it.</a:t>
-            </a:r>
-          </a:p>
-          <a:p>
-            <a:pPr lvl="0" indent="0" marL="0">
-              <a:buNone/>
-            </a:pPr>
-          </a:p>
-          <a:p>
-            <a:pPr lvl="0" indent="0" marL="0">
-              <a:buNone/>
-            </a:pPr>
-            <a:r>
-              <a:rPr/>
-              <a:t>This is the third time today the same rule has appeared - imputation, scaling, encoding - and that repetition is the point of the lesson. Lesson 1 stated the rule for one case; today it turns out to be the same rule every time.</a:t>
+              <a:t>Baseline without zip: AUC 0.751. Honest encoding (sklearn’s TargetEncoder, cross-fitted inside the pipeline): 0.751 - indistinguishable, correctly, since zip carries nothing. Leaky encoding, computed before the split: 0.891.</a:t>
+            </a:r>
+          </a:p>
+          <a:p>
+            <a:pPr lvl="0" indent="0" marL="0">
+              <a:buNone/>
+            </a:pPr>
+          </a:p>
+          <a:p>
+            <a:pPr lvl="0" indent="0" marL="0">
+              <a:buNone/>
+            </a:pPr>
+            <a:r>
+              <a:rPr/>
+              <a:t>Let that number sit. It looks like a genuinely better model. It is not one - the improvement is manufactured entirely by the mechanism on the next slide. This is Lesson 1’s 77%-on-coin-flip-labels story again, produced by two unremarkable lines of preprocessing instead of an obviously wrong one.</a:t>
             </a:r>
           </a:p>
         </p:txBody>
@@ -5154,21 +5381,49 @@
             </a:pPr>
             <a:r>
               <a:rPr/>
-              <a:t>One test, not a growing list of special cases: does fitting this step compute anything from the rows it is given? If yes, it goes inside the pipeline. Handout Section 9.3.</a:t>
-            </a:r>
-          </a:p>
-          <a:p>
-            <a:pPr lvl="0" indent="0" marL="0">
-              <a:buNone/>
-            </a:pPr>
-          </a:p>
-          <a:p>
-            <a:pPr lvl="0" indent="0" marL="0">
-              <a:buNone/>
-            </a:pPr>
-            <a:r>
-              <a:rPr/>
-              <a:t>Say explicitly: Lesson 5 returns to leakage a third time, for hyperparameter tuning, where the same test applies once more.</a:t>
+              <a:t>Read the equation out as a sentence: the “leave-in” encoding differs from the honest leave-one-out encoding by the row’s own disagreement with its group, divided by how many people are in it.</a:t>
+            </a:r>
+          </a:p>
+          <a:p>
+            <a:pPr lvl="0" indent="0" marL="0">
+              <a:buNone/>
+            </a:pPr>
+          </a:p>
+          <a:p>
+            <a:pPr lvl="0" indent="0" marL="0">
+              <a:buNone/>
+            </a:pPr>
+            <a:r>
+              <a:rPr/>
+              <a:t>Handout Section 9.2 has the algebra. The intuition: for a zip code with a single customer, the target encoding IS that customer’s label, straight through. With two customers it is the average of two labels. Only as the group grows does the encoding become a genuine statistic rather than a copy of the answer.</a:t>
+            </a:r>
+          </a:p>
+          <a:p>
+            <a:pPr lvl="0" indent="0" marL="0">
+              <a:buNone/>
+            </a:pPr>
+          </a:p>
+          <a:p>
+            <a:pPr lvl="0" indent="0" marL="0">
+              <a:buNone/>
+            </a:pPr>
+            <a:r>
+              <a:rPr/>
+              <a:t>So the leak is worst exactly where the data is thinnest - which is also where high-cardinality columns spend most of their mass. Most zip codes here have a handful of customers.</a:t>
+            </a:r>
+          </a:p>
+          <a:p>
+            <a:pPr lvl="0" indent="0" marL="0">
+              <a:buNone/>
+            </a:pPr>
+          </a:p>
+          <a:p>
+            <a:pPr lvl="0" indent="0" marL="0">
+              <a:buNone/>
+            </a:pPr>
+            <a:r>
+              <a:rPr/>
+              <a:t>Give them the diagnostic to remember: if a feature’s usefulness comes mostly from its rarest levels, be suspicious. That is the shape of a leak, not of a signal.</a:t>
             </a:r>
           </a:p>
         </p:txBody>
@@ -5250,35 +5505,21 @@
             </a:pPr>
             <a:r>
               <a:rPr/>
-              <a:t>22 minutes. This notebook is the payoff of the lesson: the two leaks of today, each measured against an honest pipeline on the same data. The third way of breaking the rule, on the earlier diagram, was Lesson 1’s.</a:t>
-            </a:r>
-          </a:p>
-          <a:p>
-            <a:pPr lvl="0" indent="0" marL="0">
-              <a:buNone/>
-            </a:pPr>
-          </a:p>
-          <a:p>
-            <a:pPr lvl="0" indent="0" marL="0">
-              <a:buNone/>
-            </a:pPr>
-            <a:r>
-              <a:rPr/>
-              <a:t>The numbers matter less than the pattern - both leaks inflate the score, neither raises an error, and both are things a competent person does by accident. Ask them to predict the direction and rough size of each gap before running the cell.</a:t>
-            </a:r>
-          </a:p>
-          <a:p>
-            <a:pPr lvl="0" indent="0" marL="0">
-              <a:buNone/>
-            </a:pPr>
-          </a:p>
-          <a:p>
-            <a:pPr lvl="0" indent="0" marL="0">
-              <a:buNone/>
-            </a:pPr>
-            <a:r>
-              <a:rPr/>
-              <a:t>If time is short, the target encoding case is the one to keep: it is the subtlest and the one most likely to appear in their own project.</a:t>
+              <a:t>Notebook 3 shows the n_c=1 case literally: zip code Z472, one customer, churn label 0, encoded value 0.000. Not correlated with the label. IS the label, relabelled as an input.</a:t>
+            </a:r>
+          </a:p>
+          <a:p>
+            <a:pPr lvl="0" indent="0" marL="0">
+              <a:buNone/>
+            </a:pPr>
+          </a:p>
+          <a:p>
+            <a:pPr lvl="0" indent="0" marL="0">
+              <a:buNone/>
+            </a:pPr>
+            <a:r>
+              <a:rPr/>
+              <a:t>Connect to Section 6.3: high cardinality means small groups means a bigger leak by exactly this formula - the curse of dimensionality and the leakage risk are the same underlying fact.</a:t>
             </a:r>
           </a:p>
         </p:txBody>
@@ -5456,35 +5697,35 @@
             </a:pPr>
             <a:r>
               <a:rPr/>
-              <a:t>Draw the thread together explicitly. Lesson 1 said nothing is learned before the split, using feature selection as the example. Today every preprocessing step turned out to be a learning step: an imputer learns a mean or a set of neighbours, a scaler learns a mean and a standard deviation, an encoder learns a mapping from categories to numbers.</a:t>
-            </a:r>
-          </a:p>
-          <a:p>
-            <a:pPr lvl="0" indent="0" marL="0">
-              <a:buNone/>
-            </a:pPr>
-          </a:p>
-          <a:p>
-            <a:pPr lvl="0" indent="0" marL="0">
-              <a:buNone/>
-            </a:pPr>
-            <a:r>
-              <a:rPr/>
-              <a:t>So the rule did not get more complicated - it got more general. And the pipeline is not tidiness, it is the mechanism that enforces the rule structurally, which is why we now build one for everything.</a:t>
-            </a:r>
-          </a:p>
-          <a:p>
-            <a:pPr lvl="0" indent="0" marL="0">
-              <a:buNone/>
-            </a:pPr>
-          </a:p>
-          <a:p>
-            <a:pPr lvl="0" indent="0" marL="0">
-              <a:buNone/>
-            </a:pPr>
-            <a:r>
-              <a:rPr/>
-              <a:t>Preview Lesson 3 in one sentence: with the data prepared honestly, we can finally fit something and look at what the fitting actually does.</a:t>
+              <a:t>Smoothing pulls each group’s mean towards the global mean, weighted by group size, so a one-customer zip code barely moves from the overall rate. It reduces the leak but does not remove it.</a:t>
+            </a:r>
+          </a:p>
+          <a:p>
+            <a:pPr lvl="0" indent="0" marL="0">
+              <a:buNone/>
+            </a:pPr>
+          </a:p>
+          <a:p>
+            <a:pPr lvl="0" indent="0" marL="0">
+              <a:buNone/>
+            </a:pPr>
+            <a:r>
+              <a:rPr/>
+              <a:t>Say clearly what actually removes it: fitting the encoder inside the training fold, exactly as with every other learned step. Smoothing is a refinement on top of that, not a substitute for it.</a:t>
+            </a:r>
+          </a:p>
+          <a:p>
+            <a:pPr lvl="0" indent="0" marL="0">
+              <a:buNone/>
+            </a:pPr>
+          </a:p>
+          <a:p>
+            <a:pPr lvl="0" indent="0" marL="0">
+              <a:buNone/>
+            </a:pPr>
+            <a:r>
+              <a:rPr/>
+              <a:t>This is the third time today the same rule has appeared - imputation, scaling, encoding - and that repetition is the point of the lesson. Lesson 1 stated the rule for one case; today it turns out to be the same rule every time.</a:t>
             </a:r>
           </a:p>
         </p:txBody>
@@ -5566,35 +5807,21 @@
             </a:pPr>
             <a:r>
               <a:rPr/>
-              <a:t>Set it explicitly. The exercise reuses churn_data.py with a different seed, so results will not match today’s numbers exactly - that is intentional, it stops copy-pasted answers from working.</a:t>
-            </a:r>
-          </a:p>
-          <a:p>
-            <a:pPr lvl="0" indent="0" marL="0">
-              <a:buNone/>
-            </a:pPr>
-          </a:p>
-          <a:p>
-            <a:pPr lvl="0" indent="0" marL="0">
-              <a:buNone/>
-            </a:pPr>
-            <a:r>
-              <a:rPr/>
-              <a:t>Remind them: as in Exercise 1, there are no marks for accuracy. Marks are for methodological correctness, and specifically here for correctly identifying which preprocessing steps needed to be inside the pipeline and demonstrating, with a number, what leaving one out would have cost.</a:t>
-            </a:r>
-          </a:p>
-          <a:p>
-            <a:pPr lvl="0" indent="0" marL="0">
-              <a:buNone/>
-            </a:pPr>
-          </a:p>
-          <a:p>
-            <a:pPr lvl="0" indent="0" marL="0">
-              <a:buNone/>
-            </a:pPr>
-            <a:r>
-              <a:rPr/>
-              <a:t>Also point them at the quiz - the reasoning-tagged questions are the closest thing to the exam they will see before the sample papers.</a:t>
+              <a:t>One test, not a growing list of special cases: does fitting this step compute anything from the rows it is given? If yes, it goes inside the pipeline. Handout Section 9.3.</a:t>
+            </a:r>
+          </a:p>
+          <a:p>
+            <a:pPr lvl="0" indent="0" marL="0">
+              <a:buNone/>
+            </a:pPr>
+          </a:p>
+          <a:p>
+            <a:pPr lvl="0" indent="0" marL="0">
+              <a:buNone/>
+            </a:pPr>
+            <a:r>
+              <a:rPr/>
+              <a:t>Say explicitly: Lesson 5 returns to leakage a third time, for hyperparameter tuning, where the same test applies once more.</a:t>
             </a:r>
           </a:p>
         </p:txBody>
@@ -5676,35 +5903,35 @@
             </a:pPr>
             <a:r>
               <a:rPr/>
-              <a:t>Set the exercise explicitly and say when it is discussed - the first ten minutes of Lesson 3, Friday 9 October.</a:t>
-            </a:r>
-          </a:p>
-          <a:p>
-            <a:pPr lvl="0" indent="0" marL="0">
-              <a:buNone/>
-            </a:pPr>
-          </a:p>
-          <a:p>
-            <a:pPr lvl="0" indent="0" marL="0">
-              <a:buNone/>
-            </a:pPr>
-            <a:r>
-              <a:rPr/>
-              <a:t>Point out that it uses the same churn dataset, so the exploration they did today carries over, and that the marks are again on methodology: a pipeline that is correct but modest beats a better score obtained by preparing the full dataset before splitting.</a:t>
-            </a:r>
-          </a:p>
-          <a:p>
-            <a:pPr lvl="0" indent="0" marL="0">
-              <a:buNone/>
-            </a:pPr>
-          </a:p>
-          <a:p>
-            <a:pPr lvl="0" indent="0" marL="0">
-              <a:buNone/>
-            </a:pPr>
-            <a:r>
-              <a:rPr/>
-              <a:t>Remind them the Lesson 1 exercise is due today if anyone has not handed it in, and that the project topic must be confirmed by Lesson 4 - which is two weeks away, so now is the time to be reading dataset descriptions.</a:t>
+              <a:t>22 minutes. This notebook is the payoff of the lesson: the two leaks of today, each measured against an honest pipeline on the same data. The third way of breaking the rule, on the earlier diagram, was Lesson 1’s.</a:t>
+            </a:r>
+          </a:p>
+          <a:p>
+            <a:pPr lvl="0" indent="0" marL="0">
+              <a:buNone/>
+            </a:pPr>
+          </a:p>
+          <a:p>
+            <a:pPr lvl="0" indent="0" marL="0">
+              <a:buNone/>
+            </a:pPr>
+            <a:r>
+              <a:rPr/>
+              <a:t>The numbers matter less than the pattern - both leaks inflate the score, neither raises an error, and both are things a competent person does by accident. Ask them to predict the direction and rough size of each gap before running the cell.</a:t>
+            </a:r>
+          </a:p>
+          <a:p>
+            <a:pPr lvl="0" indent="0" marL="0">
+              <a:buNone/>
+            </a:pPr>
+          </a:p>
+          <a:p>
+            <a:pPr lvl="0" indent="0" marL="0">
+              <a:buNone/>
+            </a:pPr>
+            <a:r>
+              <a:rPr/>
+              <a:t>If time is short, the target encoding case is the one to keep: it is the subtlest and the one most likely to appear in their own project.</a:t>
             </a:r>
           </a:p>
         </p:txBody>
@@ -5727,6 +5954,336 @@
             <a:fld id="{18BDFEC3-8487-43E8-A154-7C12CBC1FFF2}" type="slidenum">
               <a:rPr lang="en-US"/>
               <a:t>53</a:t>
+            </a:fld>
+            <a:endParaRPr lang="en-US"/>
+          </a:p>
+        </p:txBody>
+      </p:sp>
+    </p:spTree>
+  </p:cSld>
+</p:notes>
+</file>
+
+<file path=ppt/notesSlides/notesSlide53.xml><?xml version="1.0" encoding="utf-8"?>
+<p:notes xmlns:a="http://schemas.openxmlformats.org/drawingml/2006/main" xmlns:r="http://schemas.openxmlformats.org/officeDocument/2006/relationships" xmlns:p="http://schemas.openxmlformats.org/presentationml/2006/main">
+  <p:cSld>
+    <p:spTree>
+      <p:nvGrpSpPr>
+        <p:cNvPr id="1" name=""/>
+        <p:cNvGrpSpPr/>
+        <p:nvPr/>
+      </p:nvGrpSpPr>
+      <p:grpSpPr>
+        <a:xfrm>
+          <a:off x="0" y="0"/>
+          <a:ext cx="0" cy="0"/>
+          <a:chOff x="0" y="0"/>
+          <a:chExt cx="0" cy="0"/>
+        </a:xfrm>
+      </p:grpSpPr>
+      <p:sp>
+        <p:nvSpPr>
+          <p:cNvPr id="2" name="Slide Image Placeholder 1"/>
+          <p:cNvSpPr>
+            <a:spLocks noGrp="1" noRot="1" noChangeAspect="1"/>
+          </p:cNvSpPr>
+          <p:nvPr>
+            <p:ph type="sldImg"/>
+          </p:nvPr>
+        </p:nvSpPr>
+        <p:spPr/>
+      </p:sp>
+      <p:sp>
+        <p:nvSpPr>
+          <p:cNvPr id="3" name="Notes Placeholder 2"/>
+          <p:cNvSpPr>
+            <a:spLocks noGrp="1"/>
+          </p:cNvSpPr>
+          <p:nvPr>
+            <p:ph type="body" idx="1"/>
+          </p:nvPr>
+        </p:nvSpPr>
+        <p:spPr/>
+        <p:txBody>
+          <a:bodyPr/>
+          <a:lstStyle/>
+          <a:p>
+            <a:pPr lvl="0" indent="0" marL="0">
+              <a:buNone/>
+            </a:pPr>
+            <a:r>
+              <a:rPr/>
+              <a:t>Draw the thread together explicitly. Lesson 1 said nothing is learned before the split, using feature selection as the example. Today every preprocessing step turned out to be a learning step: an imputer learns a mean or a set of neighbours, a scaler learns a mean and a standard deviation, an encoder learns a mapping from categories to numbers.</a:t>
+            </a:r>
+          </a:p>
+          <a:p>
+            <a:pPr lvl="0" indent="0" marL="0">
+              <a:buNone/>
+            </a:pPr>
+          </a:p>
+          <a:p>
+            <a:pPr lvl="0" indent="0" marL="0">
+              <a:buNone/>
+            </a:pPr>
+            <a:r>
+              <a:rPr/>
+              <a:t>So the rule did not get more complicated - it got more general. And the pipeline is not tidiness, it is the mechanism that enforces the rule structurally, which is why we now build one for everything.</a:t>
+            </a:r>
+          </a:p>
+          <a:p>
+            <a:pPr lvl="0" indent="0" marL="0">
+              <a:buNone/>
+            </a:pPr>
+          </a:p>
+          <a:p>
+            <a:pPr lvl="0" indent="0" marL="0">
+              <a:buNone/>
+            </a:pPr>
+            <a:r>
+              <a:rPr/>
+              <a:t>Preview Lesson 3 in one sentence: with the data prepared honestly, we can finally fit something and look at what the fitting actually does.</a:t>
+            </a:r>
+          </a:p>
+        </p:txBody>
+      </p:sp>
+      <p:sp>
+        <p:nvSpPr>
+          <p:cNvPr id="4" name="Slide Number Placeholder 3"/>
+          <p:cNvSpPr>
+            <a:spLocks noGrp="1"/>
+          </p:cNvSpPr>
+          <p:nvPr>
+            <p:ph type="sldNum" sz="quarter" idx="10"/>
+          </p:nvPr>
+        </p:nvSpPr>
+        <p:spPr/>
+        <p:txBody>
+          <a:bodyPr/>
+          <a:lstStyle/>
+          <a:p>
+            <a:fld id="{18BDFEC3-8487-43E8-A154-7C12CBC1FFF2}" type="slidenum">
+              <a:rPr lang="en-US"/>
+              <a:t>54</a:t>
+            </a:fld>
+            <a:endParaRPr lang="en-US"/>
+          </a:p>
+        </p:txBody>
+      </p:sp>
+    </p:spTree>
+  </p:cSld>
+</p:notes>
+</file>
+
+<file path=ppt/notesSlides/notesSlide54.xml><?xml version="1.0" encoding="utf-8"?>
+<p:notes xmlns:a="http://schemas.openxmlformats.org/drawingml/2006/main" xmlns:r="http://schemas.openxmlformats.org/officeDocument/2006/relationships" xmlns:p="http://schemas.openxmlformats.org/presentationml/2006/main">
+  <p:cSld>
+    <p:spTree>
+      <p:nvGrpSpPr>
+        <p:cNvPr id="1" name=""/>
+        <p:cNvGrpSpPr/>
+        <p:nvPr/>
+      </p:nvGrpSpPr>
+      <p:grpSpPr>
+        <a:xfrm>
+          <a:off x="0" y="0"/>
+          <a:ext cx="0" cy="0"/>
+          <a:chOff x="0" y="0"/>
+          <a:chExt cx="0" cy="0"/>
+        </a:xfrm>
+      </p:grpSpPr>
+      <p:sp>
+        <p:nvSpPr>
+          <p:cNvPr id="2" name="Slide Image Placeholder 1"/>
+          <p:cNvSpPr>
+            <a:spLocks noGrp="1" noRot="1" noChangeAspect="1"/>
+          </p:cNvSpPr>
+          <p:nvPr>
+            <p:ph type="sldImg"/>
+          </p:nvPr>
+        </p:nvSpPr>
+        <p:spPr/>
+      </p:sp>
+      <p:sp>
+        <p:nvSpPr>
+          <p:cNvPr id="3" name="Notes Placeholder 2"/>
+          <p:cNvSpPr>
+            <a:spLocks noGrp="1"/>
+          </p:cNvSpPr>
+          <p:nvPr>
+            <p:ph type="body" idx="1"/>
+          </p:nvPr>
+        </p:nvSpPr>
+        <p:spPr/>
+        <p:txBody>
+          <a:bodyPr/>
+          <a:lstStyle/>
+          <a:p>
+            <a:pPr lvl="0" indent="0" marL="0">
+              <a:buNone/>
+            </a:pPr>
+            <a:r>
+              <a:rPr/>
+              <a:t>Set it explicitly. The exercise reuses churn_data.py with a different seed, so results will not match today’s numbers exactly - that is intentional, it stops copy-pasted answers from working.</a:t>
+            </a:r>
+          </a:p>
+          <a:p>
+            <a:pPr lvl="0" indent="0" marL="0">
+              <a:buNone/>
+            </a:pPr>
+          </a:p>
+          <a:p>
+            <a:pPr lvl="0" indent="0" marL="0">
+              <a:buNone/>
+            </a:pPr>
+            <a:r>
+              <a:rPr/>
+              <a:t>Remind them: as in Exercise 1, there are no marks for accuracy. Marks are for methodological correctness, and specifically here for correctly identifying which preprocessing steps needed to be inside the pipeline and demonstrating, with a number, what leaving one out would have cost.</a:t>
+            </a:r>
+          </a:p>
+          <a:p>
+            <a:pPr lvl="0" indent="0" marL="0">
+              <a:buNone/>
+            </a:pPr>
+          </a:p>
+          <a:p>
+            <a:pPr lvl="0" indent="0" marL="0">
+              <a:buNone/>
+            </a:pPr>
+            <a:r>
+              <a:rPr/>
+              <a:t>Also point them at the quiz - the reasoning-tagged questions are the closest thing to the exam they will see before the sample papers.</a:t>
+            </a:r>
+          </a:p>
+        </p:txBody>
+      </p:sp>
+      <p:sp>
+        <p:nvSpPr>
+          <p:cNvPr id="4" name="Slide Number Placeholder 3"/>
+          <p:cNvSpPr>
+            <a:spLocks noGrp="1"/>
+          </p:cNvSpPr>
+          <p:nvPr>
+            <p:ph type="sldNum" sz="quarter" idx="10"/>
+          </p:nvPr>
+        </p:nvSpPr>
+        <p:spPr/>
+        <p:txBody>
+          <a:bodyPr/>
+          <a:lstStyle/>
+          <a:p>
+            <a:fld id="{18BDFEC3-8487-43E8-A154-7C12CBC1FFF2}" type="slidenum">
+              <a:rPr lang="en-US"/>
+              <a:t>55</a:t>
+            </a:fld>
+            <a:endParaRPr lang="en-US"/>
+          </a:p>
+        </p:txBody>
+      </p:sp>
+    </p:spTree>
+  </p:cSld>
+</p:notes>
+</file>
+
+<file path=ppt/notesSlides/notesSlide55.xml><?xml version="1.0" encoding="utf-8"?>
+<p:notes xmlns:a="http://schemas.openxmlformats.org/drawingml/2006/main" xmlns:r="http://schemas.openxmlformats.org/officeDocument/2006/relationships" xmlns:p="http://schemas.openxmlformats.org/presentationml/2006/main">
+  <p:cSld>
+    <p:spTree>
+      <p:nvGrpSpPr>
+        <p:cNvPr id="1" name=""/>
+        <p:cNvGrpSpPr/>
+        <p:nvPr/>
+      </p:nvGrpSpPr>
+      <p:grpSpPr>
+        <a:xfrm>
+          <a:off x="0" y="0"/>
+          <a:ext cx="0" cy="0"/>
+          <a:chOff x="0" y="0"/>
+          <a:chExt cx="0" cy="0"/>
+        </a:xfrm>
+      </p:grpSpPr>
+      <p:sp>
+        <p:nvSpPr>
+          <p:cNvPr id="2" name="Slide Image Placeholder 1"/>
+          <p:cNvSpPr>
+            <a:spLocks noGrp="1" noRot="1" noChangeAspect="1"/>
+          </p:cNvSpPr>
+          <p:nvPr>
+            <p:ph type="sldImg"/>
+          </p:nvPr>
+        </p:nvSpPr>
+        <p:spPr/>
+      </p:sp>
+      <p:sp>
+        <p:nvSpPr>
+          <p:cNvPr id="3" name="Notes Placeholder 2"/>
+          <p:cNvSpPr>
+            <a:spLocks noGrp="1"/>
+          </p:cNvSpPr>
+          <p:nvPr>
+            <p:ph type="body" idx="1"/>
+          </p:nvPr>
+        </p:nvSpPr>
+        <p:spPr/>
+        <p:txBody>
+          <a:bodyPr/>
+          <a:lstStyle/>
+          <a:p>
+            <a:pPr lvl="0" indent="0" marL="0">
+              <a:buNone/>
+            </a:pPr>
+            <a:r>
+              <a:rPr/>
+              <a:t>Set the exercise explicitly and say when it is discussed - the first ten minutes of Lesson 3, Friday 9 October.</a:t>
+            </a:r>
+          </a:p>
+          <a:p>
+            <a:pPr lvl="0" indent="0" marL="0">
+              <a:buNone/>
+            </a:pPr>
+          </a:p>
+          <a:p>
+            <a:pPr lvl="0" indent="0" marL="0">
+              <a:buNone/>
+            </a:pPr>
+            <a:r>
+              <a:rPr/>
+              <a:t>Point out that it uses the same churn dataset, so the exploration they did today carries over, and that the marks are again on methodology: a pipeline that is correct but modest beats a better score obtained by preparing the full dataset before splitting.</a:t>
+            </a:r>
+          </a:p>
+          <a:p>
+            <a:pPr lvl="0" indent="0" marL="0">
+              <a:buNone/>
+            </a:pPr>
+          </a:p>
+          <a:p>
+            <a:pPr lvl="0" indent="0" marL="0">
+              <a:buNone/>
+            </a:pPr>
+            <a:r>
+              <a:rPr/>
+              <a:t>Remind them the Lesson 1 exercise is due today if anyone has not handed it in, and that the project topic must be confirmed by Lesson 4 - which is two weeks away, so now is the time to be reading dataset descriptions.</a:t>
+            </a:r>
+          </a:p>
+        </p:txBody>
+      </p:sp>
+      <p:sp>
+        <p:nvSpPr>
+          <p:cNvPr id="4" name="Slide Number Placeholder 3"/>
+          <p:cNvSpPr>
+            <a:spLocks noGrp="1"/>
+          </p:cNvSpPr>
+          <p:nvPr>
+            <p:ph type="sldNum" sz="quarter" idx="10"/>
+          </p:nvPr>
+        </p:nvSpPr>
+        <p:spPr/>
+        <p:txBody>
+          <a:bodyPr/>
+          <a:lstStyle/>
+          <a:p>
+            <a:fld id="{18BDFEC3-8487-43E8-A154-7C12CBC1FFF2}" type="slidenum">
+              <a:rPr lang="en-US"/>
+              <a:t>56</a:t>
             </a:fld>
             <a:endParaRPr lang="en-US"/>
           </a:p>
@@ -9866,41 +10423,98 @@
             </a:pPr>
             <a:r>
               <a:rPr/>
-              <a:t>Rule 1: distance in standard deviations, flag beyond k = 3</a:t>
-            </a:r>
-          </a:p>
-        </p:txBody>
-      </p:sp>
-      <p:pic>
-        <p:nvPicPr>
-          <p:cNvPr descr="eq_fe122443eb.png" id="0" name="Picture 1"/>
-          <p:cNvPicPr>
-            <a:picLocks noGrp="1" noChangeAspect="1"/>
-          </p:cNvPicPr>
-          <p:nvPr/>
-        </p:nvPicPr>
-        <p:blipFill>
-          <a:blip r:embed="rId3"/>
-          <a:stretch>
-            <a:fillRect/>
-          </a:stretch>
-        </p:blipFill>
-        <p:spPr bwMode="auto">
+              <a:t>An outlier is far from the rest - not necessarily wrong</a:t>
+            </a:r>
+          </a:p>
+        </p:txBody>
+      </p:sp>
+      <p:sp>
+        <p:nvSpPr>
+          <p:cNvPr id="3" name="Content Placeholder 2"/>
+          <p:cNvSpPr>
+            <a:spLocks noGrp="1"/>
+          </p:cNvSpPr>
+          <p:nvPr>
+            <p:ph idx="1"/>
+          </p:nvPr>
+        </p:nvSpPr>
+        <p:spPr>
           <a:xfrm>
-            <a:off x="457200" y="1322189"/>
-            <a:ext cx="8229600" cy="3048000"/>
+            <a:off x="457200" y="1200151"/>
+            <a:ext cx="8229600" cy="3394472"/>
           </a:xfrm>
-          <a:prstGeom prst="rect">
-            <a:avLst/>
-          </a:prstGeom>
-          <a:noFill/>
-          <a:ln w="9525">
-            <a:noFill/>
-            <a:headEnd/>
-            <a:tailEnd/>
-          </a:ln>
         </p:spPr>
-      </p:pic>
+        <p:txBody>
+          <a:bodyPr/>
+          <a:lstStyle/>
+          <a:p>
+            <a:pPr lvl="0"/>
+            <a:r>
+              <a:rPr>
+                <a:latin typeface="Courier"/>
+              </a:rPr>
+              <a:t>tenure_months</a:t>
+            </a:r>
+            <a:r>
+              <a:rPr/>
+              <a:t> runs </a:t>
+            </a:r>
+            <a:r>
+              <a:rPr b="1"/>
+              <a:t>-3 to 999</a:t>
+            </a:r>
+            <a:r>
+              <a:rPr/>
+              <a:t>; ordinary customers sit at 0 to 72</a:t>
+            </a:r>
+          </a:p>
+          <a:p>
+            <a:pPr lvl="0"/>
+            <a:r>
+              <a:rPr/>
+              <a:t>Three reasons: a </a:t>
+            </a:r>
+            <a:r>
+              <a:rPr b="1"/>
+              <a:t>recording error</a:t>
+            </a:r>
+            <a:r>
+              <a:rPr/>
+              <a:t>, a </a:t>
+            </a:r>
+            <a:r>
+              <a:rPr b="1"/>
+              <a:t>rare but genuine</a:t>
+            </a:r>
+            <a:r>
+              <a:rPr/>
+              <a:t> value, a </a:t>
+            </a:r>
+            <a:r>
+              <a:rPr b="1"/>
+              <a:t>different population</a:t>
+            </a:r>
+          </a:p>
+          <a:p>
+            <a:pPr lvl="0"/>
+            <a:r>
+              <a:rPr/>
+              <a:t>The arithmetic cannot tell which: 3,344.7 may be a typo or a corporate account</a:t>
+            </a:r>
+          </a:p>
+          <a:p>
+            <a:pPr lvl="0"/>
+            <a:r>
+              <a:rPr/>
+              <a:t>Two rules follow - standard deviations, then quartiles - and both only </a:t>
+            </a:r>
+            <a:r>
+              <a:rPr b="1"/>
+              <a:t>flag</a:t>
+            </a:r>
+          </a:p>
+        </p:txBody>
+      </p:sp>
     </p:spTree>
   </p:cSld>
 </p:sld>
@@ -9948,14 +10562,14 @@
             </a:pPr>
             <a:r>
               <a:rPr/>
-              <a:t>Rule 2: distance measured in quartiles</a:t>
+              <a:t>Rule 1: distance in standard deviations, flag beyond k = 3</a:t>
             </a:r>
           </a:p>
         </p:txBody>
       </p:sp>
       <p:pic>
         <p:nvPicPr>
-          <p:cNvPr descr="eq_f508402a31.png" id="0" name="Picture 1"/>
+          <p:cNvPr descr="eq_fe122443eb.png" id="0" name="Picture 1"/>
           <p:cNvPicPr>
             <a:picLocks noGrp="1" noChangeAspect="1"/>
           </p:cNvPicPr>
@@ -9969,8 +10583,8 @@
         </p:blipFill>
         <p:spPr bwMode="auto">
           <a:xfrm>
-            <a:off x="457200" y="2484239"/>
-            <a:ext cx="8229600" cy="723900"/>
+            <a:off x="3115657" y="2349504"/>
+            <a:ext cx="2912686" cy="993370"/>
           </a:xfrm>
           <a:prstGeom prst="rect">
             <a:avLst/>
@@ -9989,6 +10603,88 @@
 </file>
 
 <file path=ppt/slides/slide17.xml><?xml version="1.0" encoding="utf-8"?>
+<p:sld xmlns:a="http://schemas.openxmlformats.org/drawingml/2006/main" xmlns:r="http://schemas.openxmlformats.org/officeDocument/2006/relationships" xmlns:p="http://schemas.openxmlformats.org/presentationml/2006/main">
+  <p:cSld>
+    <p:spTree>
+      <p:nvGrpSpPr>
+        <p:cNvPr id="1" name=""/>
+        <p:cNvGrpSpPr/>
+        <p:nvPr/>
+      </p:nvGrpSpPr>
+      <p:grpSpPr>
+        <a:xfrm>
+          <a:off x="0" y="0"/>
+          <a:ext cx="0" cy="0"/>
+          <a:chOff x="0" y="0"/>
+          <a:chExt cx="0" cy="0"/>
+        </a:xfrm>
+      </p:grpSpPr>
+      <p:sp>
+        <p:nvSpPr>
+          <p:cNvPr id="2" name="Title 1"/>
+          <p:cNvSpPr>
+            <a:spLocks noGrp="1"/>
+          </p:cNvSpPr>
+          <p:nvPr>
+            <p:ph type="title"/>
+          </p:nvPr>
+        </p:nvSpPr>
+        <p:spPr>
+          <a:xfrm>
+            <a:off x="457200" y="205979"/>
+            <a:ext cx="8229600" cy="857250"/>
+          </a:xfrm>
+        </p:spPr>
+        <p:txBody>
+          <a:bodyPr/>
+          <a:lstStyle/>
+          <a:p>
+            <a:pPr lvl="0" indent="0" marL="0">
+              <a:buNone/>
+            </a:pPr>
+            <a:r>
+              <a:rPr/>
+              <a:t>Rule 2: distance measured in quartiles</a:t>
+            </a:r>
+          </a:p>
+        </p:txBody>
+      </p:sp>
+      <p:pic>
+        <p:nvPicPr>
+          <p:cNvPr descr="eq_f508402a31.png" id="0" name="Picture 1"/>
+          <p:cNvPicPr>
+            <a:picLocks noGrp="1" noChangeAspect="1"/>
+          </p:cNvPicPr>
+          <p:nvPr/>
+        </p:nvPicPr>
+        <p:blipFill>
+          <a:blip r:embed="rId3"/>
+          <a:stretch>
+            <a:fillRect/>
+          </a:stretch>
+        </p:blipFill>
+        <p:spPr bwMode="auto">
+          <a:xfrm>
+            <a:off x="457200" y="2535039"/>
+            <a:ext cx="8229600" cy="622300"/>
+          </a:xfrm>
+          <a:prstGeom prst="rect">
+            <a:avLst/>
+          </a:prstGeom>
+          <a:noFill/>
+          <a:ln w="9525">
+            <a:noFill/>
+            <a:headEnd/>
+            <a:tailEnd/>
+          </a:ln>
+        </p:spPr>
+      </p:pic>
+    </p:spTree>
+  </p:cSld>
+</p:sld>
+</file>
+
+<file path=ppt/slides/slide18.xml><?xml version="1.0" encoding="utf-8"?>
 <p:sld xmlns:a="http://schemas.openxmlformats.org/drawingml/2006/main" xmlns:r="http://schemas.openxmlformats.org/officeDocument/2006/relationships" xmlns:p="http://schemas.openxmlformats.org/presentationml/2006/main">
   <p:cSld>
     <p:spTree>
@@ -10070,7 +10766,7 @@
 </p:sld>
 </file>
 
-<file path=ppt/slides/slide18.xml><?xml version="1.0" encoding="utf-8"?>
+<file path=ppt/slides/slide19.xml><?xml version="1.0" encoding="utf-8"?>
 <p:sld xmlns:a="http://schemas.openxmlformats.org/drawingml/2006/main" xmlns:r="http://schemas.openxmlformats.org/officeDocument/2006/relationships" xmlns:p="http://schemas.openxmlformats.org/presentationml/2006/main">
   <p:cSld>
     <p:spTree>
@@ -10152,140 +10848,6 @@
 </p:sld>
 </file>
 
-<file path=ppt/slides/slide19.xml><?xml version="1.0" encoding="utf-8"?>
-<p:sld xmlns:a="http://schemas.openxmlformats.org/drawingml/2006/main" xmlns:r="http://schemas.openxmlformats.org/officeDocument/2006/relationships" xmlns:p="http://schemas.openxmlformats.org/presentationml/2006/main">
-  <p:cSld>
-    <p:spTree>
-      <p:nvGrpSpPr>
-        <p:cNvPr id="1" name=""/>
-        <p:cNvGrpSpPr/>
-        <p:nvPr/>
-      </p:nvGrpSpPr>
-      <p:grpSpPr>
-        <a:xfrm>
-          <a:off x="0" y="0"/>
-          <a:ext cx="0" cy="0"/>
-          <a:chOff x="0" y="0"/>
-          <a:chExt cx="0" cy="0"/>
-        </a:xfrm>
-      </p:grpSpPr>
-      <p:sp>
-        <p:nvSpPr>
-          <p:cNvPr id="2" name="Title 1"/>
-          <p:cNvSpPr>
-            <a:spLocks noGrp="1"/>
-          </p:cNvSpPr>
-          <p:nvPr>
-            <p:ph type="title"/>
-          </p:nvPr>
-        </p:nvSpPr>
-        <p:spPr>
-          <a:xfrm>
-            <a:off x="457200" y="205979"/>
-            <a:ext cx="8229600" cy="857250"/>
-          </a:xfrm>
-        </p:spPr>
-        <p:txBody>
-          <a:bodyPr/>
-          <a:lstStyle/>
-          <a:p>
-            <a:pPr lvl="0" indent="0" marL="0">
-              <a:buNone/>
-            </a:pPr>
-            <a:r>
-              <a:rPr/>
-              <a:t>What neither rule can tell you</a:t>
-            </a:r>
-          </a:p>
-        </p:txBody>
-      </p:sp>
-      <p:sp>
-        <p:nvSpPr>
-          <p:cNvPr id="3" name="Content Placeholder 2"/>
-          <p:cNvSpPr>
-            <a:spLocks noGrp="1"/>
-          </p:cNvSpPr>
-          <p:nvPr>
-            <p:ph idx="1"/>
-          </p:nvPr>
-        </p:nvSpPr>
-        <p:spPr>
-          <a:xfrm>
-            <a:off x="457200" y="1200151"/>
-            <a:ext cx="8229600" cy="3394472"/>
-          </a:xfrm>
-        </p:spPr>
-        <p:txBody>
-          <a:bodyPr/>
-          <a:lstStyle/>
-          <a:p>
-            <a:pPr lvl="0" indent="0" marL="0">
-              <a:buNone/>
-            </a:pPr>
-            <a:r>
-              <a:rPr>
-                <a:latin typeface="Courier"/>
-              </a:rPr>
-              <a:t>tenure_months</a:t>
-            </a:r>
-            <a:r>
-              <a:rPr/>
-              <a:t> of </a:t>
-            </a:r>
-            <a:r>
-              <a:rPr b="1"/>
-              <a:t>-3</a:t>
-            </a:r>
-            <a:r>
-              <a:rPr/>
-              <a:t> is impossible. Neither rule flags it.</a:t>
-            </a:r>
-          </a:p>
-          <a:p>
-            <a:pPr lvl="0"/>
-            <a:r>
-              <a:rPr/>
-              <a:t>-3 is not </a:t>
-            </a:r>
-            <a:r>
-              <a:rPr i="1"/>
-              <a:t>extreme</a:t>
-            </a:r>
-            <a:r>
-              <a:rPr/>
-              <a:t> relative to a column spanning 0–72</a:t>
-            </a:r>
-          </a:p>
-          <a:p>
-            <a:pPr lvl="0"/>
-            <a:r>
-              <a:rPr/>
-              <a:t>It is not </a:t>
-            </a:r>
-            <a:r>
-              <a:rPr i="1"/>
-              <a:t>unusual</a:t>
-            </a:r>
-            <a:r>
-              <a:rPr/>
-              <a:t>. It is </a:t>
-            </a:r>
-            <a:r>
-              <a:rPr i="1"/>
-              <a:t>invalid</a:t>
-            </a:r>
-            <a:r>
-              <a:rPr/>
-              <a:t>: a different question entirely</a:t>
-            </a:r>
-          </a:p>
-        </p:txBody>
-      </p:sp>
-    </p:spTree>
-  </p:cSld>
-</p:sld>
-</file>
-
 <file path=ppt/slides/slide2.xml><?xml version="1.0" encoding="utf-8"?>
 <p:sld xmlns:a="http://schemas.openxmlformats.org/drawingml/2006/main" xmlns:r="http://schemas.openxmlformats.org/officeDocument/2006/relationships" xmlns:p="http://schemas.openxmlformats.org/presentationml/2006/main">
   <p:cSld>
@@ -10439,7 +11001,7 @@
             </a:pPr>
             <a:r>
               <a:rPr/>
-              <a:t>Once something is flagged</a:t>
+              <a:t>What neither rule can tell you</a:t>
             </a:r>
           </a:p>
         </p:txBody>
@@ -10468,60 +11030,60 @@
               <a:buNone/>
             </a:pPr>
             <a:r>
-              <a:rPr/>
-              <a:t>Detection finds candidates. What to do next is a </a:t>
+              <a:rPr>
+                <a:latin typeface="Courier"/>
+              </a:rPr>
+              <a:t>tenure_months</a:t>
+            </a:r>
+            <a:r>
+              <a:rPr/>
+              <a:t> of </a:t>
             </a:r>
             <a:r>
               <a:rPr b="1"/>
-              <a:t>domain</a:t>
-            </a:r>
-            <a:r>
-              <a:rPr/>
-              <a:t> decision.</a:t>
+              <a:t>-3</a:t>
+            </a:r>
+            <a:r>
+              <a:rPr/>
+              <a:t> is impossible. Neither rule flags it.</a:t>
             </a:r>
           </a:p>
           <a:p>
             <a:pPr lvl="0"/>
             <a:r>
-              <a:rPr b="1"/>
-              <a:t>Cap</a:t>
-            </a:r>
-            <a:r>
-              <a:rPr/>
-              <a:t> it at the fence (Winsorise)</a:t>
+              <a:rPr/>
+              <a:t>-3 is not </a:t>
+            </a:r>
+            <a:r>
+              <a:rPr i="1"/>
+              <a:t>extreme</a:t>
+            </a:r>
+            <a:r>
+              <a:rPr/>
+              <a:t> relative to a column spanning 0–72</a:t>
             </a:r>
           </a:p>
           <a:p>
             <a:pPr lvl="0"/>
             <a:r>
-              <a:rPr b="1"/>
-              <a:t>Remove</a:t>
-            </a:r>
-            <a:r>
-              <a:rPr/>
-              <a:t> the row</a:t>
-            </a:r>
-          </a:p>
-          <a:p>
-            <a:pPr lvl="0"/>
-            <a:r>
-              <a:rPr b="1"/>
-              <a:t>Correct</a:t>
-            </a:r>
-            <a:r>
-              <a:rPr/>
-              <a:t> it, if the true value is recoverable</a:t>
-            </a:r>
-          </a:p>
-          <a:p>
-            <a:pPr lvl="0"/>
-            <a:r>
-              <a:rPr b="1"/>
-              <a:t>Leave</a:t>
-            </a:r>
-            <a:r>
-              <a:rPr/>
-              <a:t> it: unusual is not the same as wrong</a:t>
+              <a:rPr/>
+              <a:t>It is not </a:t>
+            </a:r>
+            <a:r>
+              <a:rPr i="1"/>
+              <a:t>unusual</a:t>
+            </a:r>
+            <a:r>
+              <a:rPr/>
+              <a:t>. It is </a:t>
+            </a:r>
+            <a:r>
+              <a:rPr i="1"/>
+              <a:t>invalid</a:t>
+            </a:r>
+            <a:r>
+              <a:rPr/>
+              <a:t>: a different question entirely</a:t>
             </a:r>
           </a:p>
         </p:txBody>
@@ -10573,7 +11135,7 @@
             </a:pPr>
             <a:r>
               <a:rPr/>
-              <a:t>Notebook 1, live</a:t>
+              <a:t>Once something is flagged</a:t>
             </a:r>
           </a:p>
         </p:txBody>
@@ -10603,7 +11165,67 @@
             </a:pPr>
             <a:r>
               <a:rPr/>
-              <a:t>Exploration, missingness mechanisms, both outlier rules: from scratch.</a:t>
+              <a:t>Detection finds candidates. What to do next is a </a:t>
+            </a:r>
+            <a:r>
+              <a:rPr b="1"/>
+              <a:t>domain</a:t>
+            </a:r>
+            <a:r>
+              <a:rPr/>
+              <a:t> decision.</a:t>
+            </a:r>
+          </a:p>
+          <a:p>
+            <a:pPr lvl="0"/>
+            <a:r>
+              <a:rPr b="1"/>
+              <a:t>Cap</a:t>
+            </a:r>
+            <a:r>
+              <a:rPr/>
+              <a:t> it at the fence: 3,344.7 becomes 110.0 (</a:t>
+            </a:r>
+            <a:r>
+              <a:rPr i="1"/>
+              <a:t>Winsorising</a:t>
+            </a:r>
+            <a:r>
+              <a:rPr/>
+              <a:t>)</a:t>
+            </a:r>
+          </a:p>
+          <a:p>
+            <a:pPr lvl="0"/>
+            <a:r>
+              <a:rPr b="1"/>
+              <a:t>Remove</a:t>
+            </a:r>
+            <a:r>
+              <a:rPr/>
+              <a:t> the row</a:t>
+            </a:r>
+          </a:p>
+          <a:p>
+            <a:pPr lvl="0"/>
+            <a:r>
+              <a:rPr b="1"/>
+              <a:t>Correct</a:t>
+            </a:r>
+            <a:r>
+              <a:rPr/>
+              <a:t> it, if the true value is recoverable</a:t>
+            </a:r>
+          </a:p>
+          <a:p>
+            <a:pPr lvl="0"/>
+            <a:r>
+              <a:rPr b="1"/>
+              <a:t>Leave</a:t>
+            </a:r>
+            <a:r>
+              <a:rPr/>
+              <a:t> it: unusual is not the same as wrong</a:t>
             </a:r>
           </a:p>
         </p:txBody>
@@ -10655,7 +11277,37 @@
             </a:pPr>
             <a:r>
               <a:rPr/>
-              <a:t>Break</a:t>
+              <a:t>Notebook 1, live</a:t>
+            </a:r>
+          </a:p>
+        </p:txBody>
+      </p:sp>
+      <p:sp>
+        <p:nvSpPr>
+          <p:cNvPr id="3" name="Content Placeholder 2"/>
+          <p:cNvSpPr>
+            <a:spLocks noGrp="1"/>
+          </p:cNvSpPr>
+          <p:nvPr>
+            <p:ph idx="1"/>
+          </p:nvPr>
+        </p:nvSpPr>
+        <p:spPr>
+          <a:xfrm>
+            <a:off x="457200" y="1200151"/>
+            <a:ext cx="8229600" cy="3394472"/>
+          </a:xfrm>
+        </p:spPr>
+        <p:txBody>
+          <a:bodyPr/>
+          <a:lstStyle/>
+          <a:p>
+            <a:pPr lvl="0" indent="0" marL="0">
+              <a:buNone/>
+            </a:pPr>
+            <a:r>
+              <a:rPr/>
+              <a:t>Exploration, missingness mechanisms, both outlier rules: from scratch.</a:t>
             </a:r>
           </a:p>
         </p:txBody>
@@ -10707,66 +11359,7 @@
             </a:pPr>
             <a:r>
               <a:rPr/>
-              <a:t>Why scale?</a:t>
-            </a:r>
-          </a:p>
-        </p:txBody>
-      </p:sp>
-      <p:sp>
-        <p:nvSpPr>
-          <p:cNvPr id="3" name="Content Placeholder 2"/>
-          <p:cNvSpPr>
-            <a:spLocks noGrp="1"/>
-          </p:cNvSpPr>
-          <p:nvPr>
-            <p:ph idx="1"/>
-          </p:nvPr>
-        </p:nvSpPr>
-        <p:spPr>
-          <a:xfrm>
-            <a:off x="457200" y="1200151"/>
-            <a:ext cx="8229600" cy="3394472"/>
-          </a:xfrm>
-        </p:spPr>
-        <p:txBody>
-          <a:bodyPr/>
-          <a:lstStyle/>
-          <a:p>
-            <a:pPr lvl="0" indent="0" marL="0">
-              <a:buNone/>
-            </a:pPr>
-            <a:r>
-              <a:rPr>
-                <a:latin typeface="Courier"/>
-              </a:rPr>
-              <a:t>tenure_months</a:t>
-            </a:r>
-            <a:r>
-              <a:rPr/>
-              <a:t>: 0–72. </a:t>
-            </a:r>
-            <a:r>
-              <a:rPr>
-                <a:latin typeface="Courier"/>
-              </a:rPr>
-              <a:t>monthly_charges</a:t>
-            </a:r>
-            <a:r>
-              <a:rPr/>
-              <a:t>: 15–128.</a:t>
-            </a:r>
-          </a:p>
-          <a:p>
-            <a:pPr lvl="0" indent="0" marL="0">
-              <a:buNone/>
-            </a:pPr>
-            <a:r>
-              <a:rPr/>
-              <a:t>Gradient descent takes </a:t>
-            </a:r>
-            <a:r>
-              <a:rPr b="1"/>
-              <a:t>one step size, along every axis, every iteration.</a:t>
+              <a:t>Break</a:t>
             </a:r>
           </a:p>
         </p:txBody>
@@ -10818,6 +11411,131 @@
             </a:pPr>
             <a:r>
               <a:rPr/>
+              <a:t>Why scale?</a:t>
+            </a:r>
+          </a:p>
+        </p:txBody>
+      </p:sp>
+      <p:sp>
+        <p:nvSpPr>
+          <p:cNvPr id="3" name="Content Placeholder 2"/>
+          <p:cNvSpPr>
+            <a:spLocks noGrp="1"/>
+          </p:cNvSpPr>
+          <p:nvPr>
+            <p:ph idx="1"/>
+          </p:nvPr>
+        </p:nvSpPr>
+        <p:spPr>
+          <a:xfrm>
+            <a:off x="457200" y="1200151"/>
+            <a:ext cx="8229600" cy="3394472"/>
+          </a:xfrm>
+        </p:spPr>
+        <p:txBody>
+          <a:bodyPr/>
+          <a:lstStyle/>
+          <a:p>
+            <a:pPr lvl="0"/>
+            <a:r>
+              <a:rPr>
+                <a:latin typeface="Courier"/>
+              </a:rPr>
+              <a:t>tenure_months</a:t>
+            </a:r>
+            <a:r>
+              <a:rPr/>
+              <a:t>: 0–72. </a:t>
+            </a:r>
+            <a:r>
+              <a:rPr>
+                <a:latin typeface="Courier"/>
+              </a:rPr>
+              <a:t>monthly_charges</a:t>
+            </a:r>
+            <a:r>
+              <a:rPr/>
+              <a:t>: 15–128</a:t>
+            </a:r>
+          </a:p>
+          <a:p>
+            <a:pPr lvl="0"/>
+            <a:r>
+              <a:rPr b="1"/>
+              <a:t>Training</a:t>
+            </a:r>
+            <a:r>
+              <a:rPr/>
+              <a:t> = choosing the model’s numbers to make Lesson 1’s average loss small</a:t>
+            </a:r>
+          </a:p>
+          <a:p>
+            <a:pPr lvl="0"/>
+            <a:r>
+              <a:rPr b="1"/>
+              <a:t>Gradient descent</a:t>
+            </a:r>
+            <a:r>
+              <a:rPr/>
+              <a:t> does it by repeated small steps downhill on that loss</a:t>
+            </a:r>
+          </a:p>
+          <a:p>
+            <a:pPr lvl="0"/>
+            <a:r>
+              <a:rPr/>
+              <a:t>One step size, along every axis, every iteration. Can it suit both columns?</a:t>
+            </a:r>
+          </a:p>
+        </p:txBody>
+      </p:sp>
+    </p:spTree>
+  </p:cSld>
+</p:sld>
+</file>
+
+<file path=ppt/slides/slide25.xml><?xml version="1.0" encoding="utf-8"?>
+<p:sld xmlns:a="http://schemas.openxmlformats.org/drawingml/2006/main" xmlns:r="http://schemas.openxmlformats.org/officeDocument/2006/relationships" xmlns:p="http://schemas.openxmlformats.org/presentationml/2006/main">
+  <p:cSld>
+    <p:spTree>
+      <p:nvGrpSpPr>
+        <p:cNvPr id="1" name=""/>
+        <p:cNvGrpSpPr/>
+        <p:nvPr/>
+      </p:nvGrpSpPr>
+      <p:grpSpPr>
+        <a:xfrm>
+          <a:off x="0" y="0"/>
+          <a:ext cx="0" cy="0"/>
+          <a:chOff x="0" y="0"/>
+          <a:chExt cx="0" cy="0"/>
+        </a:xfrm>
+      </p:grpSpPr>
+      <p:sp>
+        <p:nvSpPr>
+          <p:cNvPr id="2" name="Title 1"/>
+          <p:cNvSpPr>
+            <a:spLocks noGrp="1"/>
+          </p:cNvSpPr>
+          <p:nvPr>
+            <p:ph type="title"/>
+          </p:nvPr>
+        </p:nvSpPr>
+        <p:spPr>
+          <a:xfrm>
+            <a:off x="457200" y="205979"/>
+            <a:ext cx="8229600" cy="857250"/>
+          </a:xfrm>
+        </p:spPr>
+        <p:txBody>
+          <a:bodyPr/>
+          <a:lstStyle/>
+          <a:p>
+            <a:pPr lvl="0" indent="0" marL="0">
+              <a:buNone/>
+            </a:pPr>
+            <a:r>
+              <a:rPr/>
               <a:t>A ravine, not a bowl</a:t>
             </a:r>
           </a:p>
@@ -10839,8 +11557,8 @@
         </p:blipFill>
         <p:spPr bwMode="auto">
           <a:xfrm>
-            <a:off x="1299914" y="1166099"/>
-            <a:ext cx="6544172" cy="3360181"/>
+            <a:off x="1262159" y="1166099"/>
+            <a:ext cx="6619682" cy="3360181"/>
           </a:xfrm>
           <a:prstGeom prst="rect">
             <a:avLst/>
@@ -10858,7 +11576,7 @@
 </p:sld>
 </file>
 
-<file path=ppt/slides/slide25.xml><?xml version="1.0" encoding="utf-8"?>
+<file path=ppt/slides/slide26.xml><?xml version="1.0" encoding="utf-8"?>
 <p:sld xmlns:a="http://schemas.openxmlformats.org/drawingml/2006/main" xmlns:r="http://schemas.openxmlformats.org/officeDocument/2006/relationships" xmlns:p="http://schemas.openxmlformats.org/presentationml/2006/main">
   <p:cSld>
     <p:spTree>
@@ -10940,7 +11658,7 @@
 </p:sld>
 </file>
 
-<file path=ppt/slides/slide26.xml><?xml version="1.0" encoding="utf-8"?>
+<file path=ppt/slides/slide27.xml><?xml version="1.0" encoding="utf-8"?>
 <p:sld xmlns:a="http://schemas.openxmlformats.org/drawingml/2006/main" xmlns:r="http://schemas.openxmlformats.org/officeDocument/2006/relationships" xmlns:p="http://schemas.openxmlformats.org/presentationml/2006/main">
   <p:cSld>
     <p:spTree>
@@ -11052,88 +11770,6 @@
 </p:sld>
 </file>
 
-<file path=ppt/slides/slide27.xml><?xml version="1.0" encoding="utf-8"?>
-<p:sld xmlns:a="http://schemas.openxmlformats.org/drawingml/2006/main" xmlns:r="http://schemas.openxmlformats.org/officeDocument/2006/relationships" xmlns:p="http://schemas.openxmlformats.org/presentationml/2006/main">
-  <p:cSld>
-    <p:spTree>
-      <p:nvGrpSpPr>
-        <p:cNvPr id="1" name=""/>
-        <p:cNvGrpSpPr/>
-        <p:nvPr/>
-      </p:nvGrpSpPr>
-      <p:grpSpPr>
-        <a:xfrm>
-          <a:off x="0" y="0"/>
-          <a:ext cx="0" cy="0"/>
-          <a:chOff x="0" y="0"/>
-          <a:chExt cx="0" cy="0"/>
-        </a:xfrm>
-      </p:grpSpPr>
-      <p:sp>
-        <p:nvSpPr>
-          <p:cNvPr id="2" name="Title 1"/>
-          <p:cNvSpPr>
-            <a:spLocks noGrp="1"/>
-          </p:cNvSpPr>
-          <p:nvPr>
-            <p:ph type="title"/>
-          </p:nvPr>
-        </p:nvSpPr>
-        <p:spPr>
-          <a:xfrm>
-            <a:off x="457200" y="205979"/>
-            <a:ext cx="8229600" cy="857250"/>
-          </a:xfrm>
-        </p:spPr>
-        <p:txBody>
-          <a:bodyPr/>
-          <a:lstStyle/>
-          <a:p>
-            <a:pPr lvl="0" indent="0" marL="0">
-              <a:buNone/>
-            </a:pPr>
-            <a:r>
-              <a:rPr/>
-              <a:t>All k dummies plus an intercept cannot both be free</a:t>
-            </a:r>
-          </a:p>
-        </p:txBody>
-      </p:sp>
-      <p:pic>
-        <p:nvPicPr>
-          <p:cNvPr descr="eq_3723e214d0.png" id="0" name="Picture 1"/>
-          <p:cNvPicPr>
-            <a:picLocks noGrp="1" noChangeAspect="1"/>
-          </p:cNvPicPr>
-          <p:nvPr/>
-        </p:nvPicPr>
-        <p:blipFill>
-          <a:blip r:embed="rId3"/>
-          <a:stretch>
-            <a:fillRect/>
-          </a:stretch>
-        </p:blipFill>
-        <p:spPr bwMode="auto">
-          <a:xfrm>
-            <a:off x="457200" y="1861939"/>
-            <a:ext cx="8229600" cy="1968500"/>
-          </a:xfrm>
-          <a:prstGeom prst="rect">
-            <a:avLst/>
-          </a:prstGeom>
-          <a:noFill/>
-          <a:ln w="9525">
-            <a:noFill/>
-            <a:headEnd/>
-            <a:tailEnd/>
-          </a:ln>
-        </p:spPr>
-      </p:pic>
-    </p:spTree>
-  </p:cSld>
-</p:sld>
-</file>
-
 <file path=ppt/slides/slide28.xml><?xml version="1.0" encoding="utf-8"?>
 <p:sld xmlns:a="http://schemas.openxmlformats.org/drawingml/2006/main" xmlns:r="http://schemas.openxmlformats.org/officeDocument/2006/relationships" xmlns:p="http://schemas.openxmlformats.org/presentationml/2006/main">
   <p:cSld>
@@ -11163,8 +11799,8 @@
         </p:nvSpPr>
         <p:spPr>
           <a:xfrm>
-            <a:off x="457200" y="205979"/>
-            <a:ext cx="8229600" cy="857250"/>
+            <a:off x="457200" y="205740"/>
+            <a:ext cx="8229600" cy="874395"/>
           </a:xfrm>
         </p:spPr>
         <p:txBody>
@@ -11176,41 +11812,279 @@
             </a:pPr>
             <a:r>
               <a:rPr/>
-              <a:t>Rank deficient by exactly one</a:t>
-            </a:r>
-          </a:p>
-        </p:txBody>
-      </p:sp>
-      <p:pic>
-        <p:nvPicPr>
-          <p:cNvPr descr="dummy_variable_trap.png" id="0" name="Picture 1"/>
-          <p:cNvPicPr>
-            <a:picLocks noGrp="1" noChangeAspect="1"/>
-          </p:cNvPicPr>
-          <p:nvPr/>
-        </p:nvPicPr>
-        <p:blipFill>
-          <a:blip r:embed="rId3"/>
-          <a:stretch>
-            <a:fillRect/>
-          </a:stretch>
-        </p:blipFill>
-        <p:spPr bwMode="auto">
+              <a:t>Every encoding makes a claim about the categories</a:t>
+            </a:r>
+          </a:p>
+        </p:txBody>
+      </p:sp>
+      <p:sp>
+        <p:nvSpPr>
+          <p:cNvPr id="4" name="Text Placeholder 3"/>
+          <p:cNvSpPr>
+            <a:spLocks noGrp="1"/>
+          </p:cNvSpPr>
+          <p:nvPr>
+            <p:ph idx="2" sz="half" type="body"/>
+          </p:nvPr>
+        </p:nvSpPr>
+        <p:spPr>
           <a:xfrm>
-            <a:off x="651789" y="1166099"/>
-            <a:ext cx="7840422" cy="3360181"/>
+            <a:off x="457200" y="1183005"/>
+            <a:ext cx="8229600" cy="874395"/>
           </a:xfrm>
-          <a:prstGeom prst="rect">
-            <a:avLst/>
-          </a:prstGeom>
-          <a:noFill/>
-          <a:ln w="9525">
-            <a:noFill/>
-            <a:headEnd/>
-            <a:tailEnd/>
-          </a:ln>
         </p:spPr>
-      </p:pic>
+        <p:txBody>
+          <a:bodyPr/>
+          <a:lstStyle/>
+          <a:p>
+            <a:pPr lvl="0" indent="0" marL="0">
+              <a:buNone/>
+            </a:pPr>
+            <a:r>
+              <a:rPr/>
+              <a:t>A model does arithmetic, and </a:t>
+            </a:r>
+            <a:r>
+              <a:rPr>
+                <a:latin typeface="Courier"/>
+              </a:rPr>
+              <a:t>"month-to-month"</a:t>
+            </a:r>
+            <a:r>
+              <a:rPr/>
+              <a:t> offers none.</a:t>
+            </a:r>
+          </a:p>
+        </p:txBody>
+      </p:sp>
+      <p:graphicFrame>
+        <p:nvGraphicFramePr>
+          <p:cNvPr id="6" name="Content Placeholder 5"/>
+          <p:cNvGraphicFramePr>
+            <a:graphicFrameLocks noGrp="1"/>
+          </p:cNvGraphicFramePr>
+          <p:nvPr>
+            <p:ph idx="1"/>
+          </p:nvPr>
+        </p:nvGraphicFramePr>
+        <p:xfrm>
+          <a:off x="457200" y="2160270"/>
+          <a:ext cx="8229600" cy="4381500"/>
+        </p:xfrm>
+        <a:graphic>
+          <a:graphicData uri="http://schemas.openxmlformats.org/drawingml/2006/table">
+            <a:tbl>
+              <a:tblPr firstRow="1" bandRow="1">
+                <a:tableStyleId>{5C22544A-7EE6-4342-B048-85BDC9FD1C3A}</a:tableStyleId>
+              </a:tblPr>
+              <a:tblGrid>
+                <a:gridCol w="2743200"/>
+                <a:gridCol w="2743200"/>
+                <a:gridCol w="2743200"/>
+              </a:tblGrid>
+              <a:tr h="0">
+                <a:tc>
+                  <a:txBody>
+                    <a:bodyPr/>
+                    <a:lstStyle/>
+                    <a:p>
+                      <a:pPr lvl="0" indent="0" marL="0">
+                        <a:buNone/>
+                      </a:pPr>
+                      <a:r>
+                        <a:rPr>
+                          <a:latin typeface="Courier"/>
+                        </a:rPr>
+                        <a:t>contract_type</a:t>
+                      </a:r>
+                    </a:p>
+                  </a:txBody>
+                  <a:tcPr/>
+                </a:tc>
+                <a:tc>
+                  <a:txBody>
+                    <a:bodyPr/>
+                    <a:lstStyle/>
+                    <a:p>
+                      <a:pPr lvl="0" indent="0" marL="0">
+                        <a:buNone/>
+                      </a:pPr>
+                      <a:r>
+                        <a:rPr/>
+                        <a:t>rows</a:t>
+                      </a:r>
+                    </a:p>
+                  </a:txBody>
+                  <a:tcPr/>
+                </a:tc>
+                <a:tc>
+                  <a:txBody>
+                    <a:bodyPr/>
+                    <a:lstStyle/>
+                    <a:p>
+                      <a:pPr lvl="0" indent="0" marL="0">
+                        <a:buNone/>
+                      </a:pPr>
+                      <a:r>
+                        <a:rPr/>
+                        <a:t>churn rate</a:t>
+                      </a:r>
+                    </a:p>
+                  </a:txBody>
+                  <a:tcPr/>
+                </a:tc>
+              </a:tr>
+              <a:tr h="0">
+                <a:tc>
+                  <a:txBody>
+                    <a:bodyPr/>
+                    <a:lstStyle/>
+                    <a:p>
+                      <a:pPr lvl="0" indent="0" marL="0">
+                        <a:buNone/>
+                      </a:pPr>
+                      <a:r>
+                        <a:rPr>
+                          <a:latin typeface="Courier"/>
+                        </a:rPr>
+                        <a:t>month-to-month</a:t>
+                      </a:r>
+                    </a:p>
+                  </a:txBody>
+                </a:tc>
+                <a:tc>
+                  <a:txBody>
+                    <a:bodyPr/>
+                    <a:lstStyle/>
+                    <a:p>
+                      <a:pPr lvl="0" indent="0" marL="0">
+                        <a:buNone/>
+                      </a:pPr>
+                      <a:r>
+                        <a:rPr/>
+                        <a:t>1,092</a:t>
+                      </a:r>
+                    </a:p>
+                  </a:txBody>
+                </a:tc>
+                <a:tc>
+                  <a:txBody>
+                    <a:bodyPr/>
+                    <a:lstStyle/>
+                    <a:p>
+                      <a:pPr lvl="0" indent="0" marL="0">
+                        <a:buNone/>
+                      </a:pPr>
+                      <a:r>
+                        <a:rPr/>
+                        <a:t>0.266</a:t>
+                      </a:r>
+                    </a:p>
+                  </a:txBody>
+                </a:tc>
+              </a:tr>
+              <a:tr h="0">
+                <a:tc>
+                  <a:txBody>
+                    <a:bodyPr/>
+                    <a:lstStyle/>
+                    <a:p>
+                      <a:pPr lvl="0" indent="0" marL="0">
+                        <a:buNone/>
+                      </a:pPr>
+                      <a:r>
+                        <a:rPr>
+                          <a:latin typeface="Courier"/>
+                        </a:rPr>
+                        <a:t>one-year</a:t>
+                      </a:r>
+                    </a:p>
+                  </a:txBody>
+                </a:tc>
+                <a:tc>
+                  <a:txBody>
+                    <a:bodyPr/>
+                    <a:lstStyle/>
+                    <a:p>
+                      <a:pPr lvl="0" indent="0" marL="0">
+                        <a:buNone/>
+                      </a:pPr>
+                      <a:r>
+                        <a:rPr/>
+                        <a:t>488</a:t>
+                      </a:r>
+                    </a:p>
+                  </a:txBody>
+                </a:tc>
+                <a:tc>
+                  <a:txBody>
+                    <a:bodyPr/>
+                    <a:lstStyle/>
+                    <a:p>
+                      <a:pPr lvl="0" indent="0" marL="0">
+                        <a:buNone/>
+                      </a:pPr>
+                      <a:r>
+                        <a:rPr/>
+                        <a:t>0.137</a:t>
+                      </a:r>
+                    </a:p>
+                  </a:txBody>
+                </a:tc>
+              </a:tr>
+              <a:tr h="0">
+                <a:tc>
+                  <a:txBody>
+                    <a:bodyPr/>
+                    <a:lstStyle/>
+                    <a:p>
+                      <a:pPr lvl="0" indent="0" marL="0">
+                        <a:buNone/>
+                      </a:pPr>
+                      <a:r>
+                        <a:rPr>
+                          <a:latin typeface="Courier"/>
+                        </a:rPr>
+                        <a:t>two-year</a:t>
+                      </a:r>
+                    </a:p>
+                  </a:txBody>
+                </a:tc>
+                <a:tc>
+                  <a:txBody>
+                    <a:bodyPr/>
+                    <a:lstStyle/>
+                    <a:p>
+                      <a:pPr lvl="0" indent="0" marL="0">
+                        <a:buNone/>
+                      </a:pPr>
+                      <a:r>
+                        <a:rPr/>
+                        <a:t>420</a:t>
+                      </a:r>
+                    </a:p>
+                  </a:txBody>
+                </a:tc>
+                <a:tc>
+                  <a:txBody>
+                    <a:bodyPr/>
+                    <a:lstStyle/>
+                    <a:p>
+                      <a:pPr lvl="0" indent="0" marL="0">
+                        <a:buNone/>
+                      </a:pPr>
+                      <a:r>
+                        <a:rPr/>
+                        <a:t>0.071</a:t>
+                      </a:r>
+                    </a:p>
+                  </a:txBody>
+                </a:tc>
+              </a:tr>
+            </a:tbl>
+          </a:graphicData>
+        </a:graphic>
+      </p:graphicFrame>
     </p:spTree>
   </p:cSld>
 </p:sld>
@@ -11258,143 +12132,245 @@
             </a:pPr>
             <a:r>
               <a:rPr/>
-              <a:t>Ordinal vs target encoding</a:t>
-            </a:r>
-          </a:p>
-        </p:txBody>
-      </p:sp>
-      <p:sp>
-        <p:nvSpPr>
-          <p:cNvPr id="3" name="Content Placeholder 2"/>
-          <p:cNvSpPr>
-            <a:spLocks noGrp="1"/>
-          </p:cNvSpPr>
-          <p:nvPr>
-            <p:ph idx="1" sz="half"/>
-          </p:nvPr>
-        </p:nvSpPr>
-        <p:spPr>
-          <a:xfrm>
-            <a:off x="457200" y="1200151"/>
-            <a:ext cx="4038600" cy="3394472"/>
-          </a:xfrm>
-        </p:spPr>
-        <p:txBody>
-          <a:bodyPr/>
-          <a:lstStyle/>
-          <a:p>
-            <a:pPr lvl="0" indent="0" marL="0">
-              <a:buNone/>
-            </a:pPr>
-            <a:r>
-              <a:rPr b="1"/>
-              <a:t>Ordinal</a:t>
-            </a:r>
-          </a:p>
-          <a:p>
-            <a:pPr lvl="0"/>
-            <a:r>
-              <a:rPr/>
-              <a:t>Categories → integers</a:t>
-            </a:r>
-          </a:p>
-          <a:p>
-            <a:pPr lvl="0"/>
-            <a:r>
-              <a:rPr/>
-              <a:t>Only valid if a real </a:t>
-            </a:r>
-            <a:r>
-              <a:rPr b="1"/>
-              <a:t>order</a:t>
-            </a:r>
-            <a:r>
-              <a:rPr/>
-              <a:t> exists</a:t>
-            </a:r>
-          </a:p>
-          <a:p>
-            <a:pPr lvl="0"/>
-            <a:r>
-              <a:rPr>
-                <a:latin typeface="Courier"/>
-              </a:rPr>
-              <a:t>low</a:t>
-            </a:r>
-            <a:r>
-              <a:rPr/>
-              <a:t> &lt; </a:t>
-            </a:r>
-            <a:r>
-              <a:rPr>
-                <a:latin typeface="Courier"/>
-              </a:rPr>
-              <a:t>medium</a:t>
-            </a:r>
-            <a:r>
-              <a:rPr/>
-              <a:t> &lt; </a:t>
-            </a:r>
-            <a:r>
-              <a:rPr>
-                <a:latin typeface="Courier"/>
-              </a:rPr>
-              <a:t>high</a:t>
-            </a:r>
-          </a:p>
-        </p:txBody>
-      </p:sp>
-      <p:sp>
-        <p:nvSpPr>
-          <p:cNvPr id="4" name="Content Placeholder 3"/>
-          <p:cNvSpPr>
-            <a:spLocks noGrp="1"/>
-          </p:cNvSpPr>
-          <p:nvPr>
-            <p:ph idx="2" sz="half"/>
-          </p:nvPr>
-        </p:nvSpPr>
-        <p:spPr>
-          <a:xfrm>
-            <a:off x="4648200" y="1200151"/>
-            <a:ext cx="4038600" cy="3394472"/>
-          </a:xfrm>
-        </p:spPr>
-        <p:txBody>
-          <a:bodyPr/>
-          <a:lstStyle/>
-          <a:p>
-            <a:pPr lvl="0" indent="0" marL="0">
-              <a:buNone/>
-            </a:pPr>
-            <a:r>
-              <a:rPr b="1"/>
-              <a:t>Target</a:t>
-            </a:r>
-          </a:p>
-          <a:p>
-            <a:pPr lvl="0"/>
-            <a:r>
-              <a:rPr/>
-              <a:t>Category → a statistic of y</a:t>
-            </a:r>
-          </a:p>
-          <a:p>
-            <a:pPr lvl="0"/>
-            <a:r>
-              <a:rPr/>
-              <a:t>Compresses any cardinality to one column</a:t>
-            </a:r>
-          </a:p>
-          <a:p>
-            <a:pPr lvl="0"/>
-            <a:r>
-              <a:rPr/>
-              <a:t>The dangerous one comes next</a:t>
-            </a:r>
-          </a:p>
-        </p:txBody>
-      </p:sp>
+              <a:t>One customer, three encodings</a:t>
+            </a:r>
+          </a:p>
+        </p:txBody>
+      </p:sp>
+      <p:graphicFrame>
+        <p:nvGraphicFramePr>
+          <p:cNvPr id="6" name="Content Placeholder 5"/>
+          <p:cNvGraphicFramePr>
+            <a:graphicFrameLocks noGrp="1"/>
+          </p:cNvGraphicFramePr>
+          <p:nvPr>
+            <p:ph idx="1"/>
+          </p:nvPr>
+        </p:nvGraphicFramePr>
+        <p:xfrm>
+          <a:off x="457200" y="1166099"/>
+          <a:ext cx="8229600" cy="3390900"/>
+        </p:xfrm>
+        <a:graphic>
+          <a:graphicData uri="http://schemas.openxmlformats.org/drawingml/2006/table">
+            <a:tbl>
+              <a:tblPr firstRow="1" bandRow="1">
+                <a:tableStyleId>{5C22544A-7EE6-4342-B048-85BDC9FD1C3A}</a:tableStyleId>
+              </a:tblPr>
+              <a:tblGrid>
+                <a:gridCol w="2743200"/>
+                <a:gridCol w="2743200"/>
+                <a:gridCol w="2743200"/>
+              </a:tblGrid>
+              <a:tr h="0">
+                <a:tc>
+                  <a:txBody>
+                    <a:bodyPr/>
+                    <a:lstStyle/>
+                    <a:p>
+                      <a:pPr lvl="0" indent="0" marL="0">
+                        <a:buNone/>
+                      </a:pPr>
+                      <a:r>
+                        <a:rPr/>
+                        <a:t>Encoding</a:t>
+                      </a:r>
+                    </a:p>
+                  </a:txBody>
+                  <a:tcPr/>
+                </a:tc>
+                <a:tc>
+                  <a:txBody>
+                    <a:bodyPr/>
+                    <a:lstStyle/>
+                    <a:p>
+                      <a:pPr lvl="0" indent="0" marL="0">
+                        <a:buNone/>
+                      </a:pPr>
+                      <a:r>
+                        <a:rPr/>
+                        <a:t>A one-year customer becomes</a:t>
+                      </a:r>
+                    </a:p>
+                  </a:txBody>
+                  <a:tcPr/>
+                </a:tc>
+                <a:tc>
+                  <a:txBody>
+                    <a:bodyPr/>
+                    <a:lstStyle/>
+                    <a:p>
+                      <a:pPr lvl="0" indent="0" marL="0">
+                        <a:buNone/>
+                      </a:pPr>
+                      <a:r>
+                        <a:rPr/>
+                        <a:t>What that asserts</a:t>
+                      </a:r>
+                    </a:p>
+                  </a:txBody>
+                  <a:tcPr/>
+                </a:tc>
+              </a:tr>
+              <a:tr h="0">
+                <a:tc>
+                  <a:txBody>
+                    <a:bodyPr/>
+                    <a:lstStyle/>
+                    <a:p>
+                      <a:pPr lvl="0" indent="0" marL="0">
+                        <a:buNone/>
+                      </a:pPr>
+                      <a:r>
+                        <a:rPr b="1"/>
+                        <a:t>One-hot</a:t>
+                      </a:r>
+                    </a:p>
+                  </a:txBody>
+                </a:tc>
+                <a:tc>
+                  <a:txBody>
+                    <a:bodyPr/>
+                    <a:lstStyle/>
+                    <a:p>
+                      <a:pPr lvl="0" indent="0" marL="0">
+                        <a:buNone/>
+                      </a:pPr>
+                      <a:r>
+                        <a:rPr>
+                          <a:latin typeface="Courier"/>
+                        </a:rPr>
+                        <a:t>[0, 1, 0]</a:t>
+                      </a:r>
+                    </a:p>
+                  </a:txBody>
+                </a:tc>
+                <a:tc>
+                  <a:txBody>
+                    <a:bodyPr/>
+                    <a:lstStyle/>
+                    <a:p>
+                      <a:pPr lvl="0" indent="0" marL="0">
+                        <a:buNone/>
+                      </a:pPr>
+                      <a:r>
+                        <a:rPr/>
+                        <a:t>simply different: no order, no distances</a:t>
+                      </a:r>
+                    </a:p>
+                  </a:txBody>
+                </a:tc>
+              </a:tr>
+              <a:tr h="0">
+                <a:tc>
+                  <a:txBody>
+                    <a:bodyPr/>
+                    <a:lstStyle/>
+                    <a:p>
+                      <a:pPr lvl="0" indent="0" marL="0">
+                        <a:buNone/>
+                      </a:pPr>
+                      <a:r>
+                        <a:rPr b="1"/>
+                        <a:t>Ordinal</a:t>
+                      </a:r>
+                    </a:p>
+                  </a:txBody>
+                </a:tc>
+                <a:tc>
+                  <a:txBody>
+                    <a:bodyPr/>
+                    <a:lstStyle/>
+                    <a:p>
+                      <a:pPr lvl="0" indent="0" marL="0">
+                        <a:buNone/>
+                      </a:pPr>
+                      <a:r>
+                        <a:rPr>
+                          <a:latin typeface="Courier"/>
+                        </a:rPr>
+                        <a:t>1</a:t>
+                      </a:r>
+                    </a:p>
+                  </a:txBody>
+                </a:tc>
+                <a:tc>
+                  <a:txBody>
+                    <a:bodyPr/>
+                    <a:lstStyle/>
+                    <a:p>
+                      <a:pPr lvl="0" indent="0" marL="0">
+                        <a:buNone/>
+                      </a:pPr>
+                      <a:r>
+                        <a:rPr/>
+                        <a:t>ordered, </a:t>
+                      </a:r>
+                      <a:r>
+                        <a:rPr b="1"/>
+                        <a:t>and</a:t>
+                      </a:r>
+                      <a:r>
+                        <a:rPr/>
+                        <a:t> equally spaced</a:t>
+                      </a:r>
+                    </a:p>
+                  </a:txBody>
+                </a:tc>
+              </a:tr>
+              <a:tr h="0">
+                <a:tc>
+                  <a:txBody>
+                    <a:bodyPr/>
+                    <a:lstStyle/>
+                    <a:p>
+                      <a:pPr lvl="0" indent="0" marL="0">
+                        <a:buNone/>
+                      </a:pPr>
+                      <a:r>
+                        <a:rPr b="1"/>
+                        <a:t>Target</a:t>
+                      </a:r>
+                    </a:p>
+                  </a:txBody>
+                </a:tc>
+                <a:tc>
+                  <a:txBody>
+                    <a:bodyPr/>
+                    <a:lstStyle/>
+                    <a:p>
+                      <a:pPr lvl="0" indent="0" marL="0">
+                        <a:buNone/>
+                      </a:pPr>
+                      <a:r>
+                        <a:rPr>
+                          <a:latin typeface="Courier"/>
+                        </a:rPr>
+                        <a:t>0.137</a:t>
+                      </a:r>
+                    </a:p>
+                  </a:txBody>
+                </a:tc>
+                <a:tc>
+                  <a:txBody>
+                    <a:bodyPr/>
+                    <a:lstStyle/>
+                    <a:p>
+                      <a:pPr lvl="0" indent="0" marL="0">
+                        <a:buNone/>
+                      </a:pPr>
+                      <a:r>
+                        <a:rPr/>
+                        <a:t>the level’s own average outcome stands in for it</a:t>
+                      </a:r>
+                    </a:p>
+                  </a:txBody>
+                </a:tc>
+              </a:tr>
+            </a:tbl>
+          </a:graphicData>
+        </a:graphic>
+      </p:graphicFrame>
     </p:spTree>
   </p:cSld>
 </p:sld>
@@ -11550,7 +12526,7 @@
             </a:pPr>
             <a:r>
               <a:rPr/>
-              <a:t>Three encodings, three claims</a:t>
+              <a:t>Equal steps, unequal meaning</a:t>
             </a:r>
           </a:p>
         </p:txBody>
@@ -11632,7 +12608,7 @@
             </a:pPr>
             <a:r>
               <a:rPr/>
-              <a:t>The curse of dimensionality, briefly</a:t>
+              <a:t>One-hot claims nothing, and pays in columns</a:t>
             </a:r>
           </a:p>
         </p:txBody>
@@ -11657,12 +12633,24 @@
           <a:bodyPr/>
           <a:lstStyle/>
           <a:p>
-            <a:pPr lvl="0" indent="0" marL="0">
-              <a:buNone/>
-            </a:pPr>
-            <a:r>
-              <a:rPr/>
-              <a:t>One-hot </a:t>
+            <a:pPr lvl="0"/>
+            <a:r>
+              <a:rPr/>
+              <a:t>A column with k levels becomes k binary columns, one 1 per row</a:t>
+            </a:r>
+          </a:p>
+          <a:p>
+            <a:pPr lvl="0"/>
+            <a:r>
+              <a:rPr/>
+              <a:t>It asserts no order and no distance - which is why it is the default</a:t>
+            </a:r>
+          </a:p>
+          <a:p>
+            <a:pPr lvl="0"/>
+            <a:r>
+              <a:rPr/>
+              <a:t>The price is width: </a:t>
             </a:r>
             <a:r>
               <a:rPr>
@@ -11672,7 +12660,7 @@
             </a:r>
             <a:r>
               <a:rPr/>
-              <a:t>: </a:t>
+              <a:t> would add </a:t>
             </a:r>
             <a:r>
               <a:rPr b="1"/>
@@ -11680,21 +12668,14 @@
             </a:r>
             <a:r>
               <a:rPr/>
-              <a:t> new columns, mostly zero.</a:t>
+              <a:t> columns to 2,000 rows</a:t>
             </a:r>
           </a:p>
           <a:p>
             <a:pPr lvl="0"/>
             <a:r>
               <a:rPr/>
-              <a:t>Distance-based methods (Lesson 6): everything looks equidistant</a:t>
-            </a:r>
-          </a:p>
-          <a:p>
-            <a:pPr lvl="0"/>
-            <a:r>
-              <a:rPr/>
-              <a:t>More parameters to estimate, same sample size → more variance</a:t>
+              <a:t>Target encoding compresses any cardinality into one column - computed from the labels, which is where leakage gets in</a:t>
             </a:r>
           </a:p>
         </p:txBody>
@@ -11733,8 +12714,8 @@
         </p:nvSpPr>
         <p:spPr>
           <a:xfrm>
-            <a:off x="457200" y="205979"/>
-            <a:ext cx="8229600" cy="857250"/>
+            <a:off x="457200" y="205740"/>
+            <a:ext cx="8229600" cy="874395"/>
           </a:xfrm>
         </p:spPr>
         <p:txBody>
@@ -11746,14 +12727,52 @@
             </a:pPr>
             <a:r>
               <a:rPr/>
-              <a:t>zip_code: 493 levels</a:t>
+              <a:t>All k dummies plus an intercept cannot both be free</a:t>
+            </a:r>
+          </a:p>
+        </p:txBody>
+      </p:sp>
+      <p:sp>
+        <p:nvSpPr>
+          <p:cNvPr id="4" name="Text Placeholder 3"/>
+          <p:cNvSpPr>
+            <a:spLocks noGrp="1"/>
+          </p:cNvSpPr>
+          <p:nvPr>
+            <p:ph idx="2" sz="half" type="body"/>
+          </p:nvPr>
+        </p:nvSpPr>
+        <p:spPr>
+          <a:xfrm>
+            <a:off x="457200" y="1183005"/>
+            <a:ext cx="8229600" cy="874395"/>
+          </a:xfrm>
+        </p:spPr>
+        <p:txBody>
+          <a:bodyPr/>
+          <a:lstStyle/>
+          <a:p>
+            <a:pPr lvl="0" indent="0" marL="0">
+              <a:buNone/>
+            </a:pPr>
+            <a:r>
+              <a:rPr/>
+              <a:t>Most models carry a column of ones - the </a:t>
+            </a:r>
+            <a:r>
+              <a:rPr b="1"/>
+              <a:t>intercept</a:t>
+            </a:r>
+            <a:r>
+              <a:rPr/>
+              <a:t> - so they can fit a baseline level.</a:t>
             </a:r>
           </a:p>
         </p:txBody>
       </p:sp>
       <p:pic>
         <p:nvPicPr>
-          <p:cNvPr descr="onehot_width.png" id="0" name="Picture 1"/>
+          <p:cNvPr descr="eq_3723e214d0.png" id="0" name="Picture 1"/>
           <p:cNvPicPr>
             <a:picLocks noGrp="1" noChangeAspect="1"/>
           </p:cNvPicPr>
@@ -11767,8 +12786,8 @@
         </p:blipFill>
         <p:spPr bwMode="auto">
           <a:xfrm>
-            <a:off x="457200" y="1493639"/>
-            <a:ext cx="8229600" cy="2705100"/>
+            <a:off x="457200" y="2401579"/>
+            <a:ext cx="8229599" cy="1883391"/>
           </a:xfrm>
           <a:prstGeom prst="rect">
             <a:avLst/>
@@ -11815,8 +12834,8 @@
         </p:nvSpPr>
         <p:spPr>
           <a:xfrm>
-            <a:off x="457200" y="205740"/>
-            <a:ext cx="8229600" cy="874395"/>
+            <a:off x="457200" y="205979"/>
+            <a:ext cx="8229600" cy="857250"/>
           </a:xfrm>
         </p:spPr>
         <p:txBody>
@@ -11828,52 +12847,14 @@
             </a:pPr>
             <a:r>
               <a:rPr/>
-              <a:t>Restating Lesson 1’s argument</a:t>
-            </a:r>
-          </a:p>
-        </p:txBody>
-      </p:sp>
-      <p:sp>
-        <p:nvSpPr>
-          <p:cNvPr id="4" name="Text Placeholder 3"/>
-          <p:cNvSpPr>
-            <a:spLocks noGrp="1"/>
-          </p:cNvSpPr>
-          <p:nvPr>
-            <p:ph idx="2" sz="half" type="body"/>
-          </p:nvPr>
-        </p:nvSpPr>
-        <p:spPr>
-          <a:xfrm>
-            <a:off x="457200" y="1183005"/>
-            <a:ext cx="8229600" cy="874395"/>
-          </a:xfrm>
-        </p:spPr>
-        <p:txBody>
-          <a:bodyPr/>
-          <a:lstStyle/>
-          <a:p>
-            <a:pPr lvl="0" indent="0" marL="0">
-              <a:buNone/>
-            </a:pPr>
-            <a:r>
-              <a:rPr/>
-              <a:t>f includes </a:t>
-            </a:r>
-            <a:r>
-              <a:rPr b="1"/>
-              <a:t>every</a:t>
-            </a:r>
-            <a:r>
-              <a:rPr/>
-              <a:t> learned parameter, not just “the model part”.</a:t>
+              <a:t>Rank deficient by exactly one</a:t>
             </a:r>
           </a:p>
         </p:txBody>
       </p:sp>
       <p:pic>
         <p:nvPicPr>
-          <p:cNvPr descr="eq_4c26f16b0d.png" id="0" name="Picture 1"/>
+          <p:cNvPr descr="dummy_variable_trap.png" id="0" name="Picture 1"/>
           <p:cNvPicPr>
             <a:picLocks noGrp="1" noChangeAspect="1"/>
           </p:cNvPicPr>
@@ -11887,8 +12868,8 @@
         </p:blipFill>
         <p:spPr bwMode="auto">
           <a:xfrm>
-            <a:off x="457207" y="3056672"/>
-            <a:ext cx="8229586" cy="573205"/>
+            <a:off x="651789" y="1166099"/>
+            <a:ext cx="7840422" cy="3360181"/>
           </a:xfrm>
           <a:prstGeom prst="rect">
             <a:avLst/>
@@ -11907,6 +12888,322 @@
 </file>
 
 <file path=ppt/slides/slide34.xml><?xml version="1.0" encoding="utf-8"?>
+<p:sld xmlns:a="http://schemas.openxmlformats.org/drawingml/2006/main" xmlns:r="http://schemas.openxmlformats.org/officeDocument/2006/relationships" xmlns:p="http://schemas.openxmlformats.org/presentationml/2006/main">
+  <p:cSld>
+    <p:spTree>
+      <p:nvGrpSpPr>
+        <p:cNvPr id="1" name=""/>
+        <p:cNvGrpSpPr/>
+        <p:nvPr/>
+      </p:nvGrpSpPr>
+      <p:grpSpPr>
+        <a:xfrm>
+          <a:off x="0" y="0"/>
+          <a:ext cx="0" cy="0"/>
+          <a:chOff x="0" y="0"/>
+          <a:chExt cx="0" cy="0"/>
+        </a:xfrm>
+      </p:grpSpPr>
+      <p:sp>
+        <p:nvSpPr>
+          <p:cNvPr id="2" name="Title 1"/>
+          <p:cNvSpPr>
+            <a:spLocks noGrp="1"/>
+          </p:cNvSpPr>
+          <p:nvPr>
+            <p:ph type="title"/>
+          </p:nvPr>
+        </p:nvSpPr>
+        <p:spPr>
+          <a:xfrm>
+            <a:off x="457200" y="205979"/>
+            <a:ext cx="8229600" cy="857250"/>
+          </a:xfrm>
+        </p:spPr>
+        <p:txBody>
+          <a:bodyPr/>
+          <a:lstStyle/>
+          <a:p>
+            <a:pPr lvl="0" indent="0" marL="0">
+              <a:buNone/>
+            </a:pPr>
+            <a:r>
+              <a:rPr/>
+              <a:t>The curse of dimensionality, briefly</a:t>
+            </a:r>
+          </a:p>
+        </p:txBody>
+      </p:sp>
+      <p:sp>
+        <p:nvSpPr>
+          <p:cNvPr id="3" name="Content Placeholder 2"/>
+          <p:cNvSpPr>
+            <a:spLocks noGrp="1"/>
+          </p:cNvSpPr>
+          <p:nvPr>
+            <p:ph idx="1"/>
+          </p:nvPr>
+        </p:nvSpPr>
+        <p:spPr>
+          <a:xfrm>
+            <a:off x="457200" y="1200151"/>
+            <a:ext cx="8229600" cy="3394472"/>
+          </a:xfrm>
+        </p:spPr>
+        <p:txBody>
+          <a:bodyPr/>
+          <a:lstStyle/>
+          <a:p>
+            <a:pPr lvl="0" indent="0" marL="0">
+              <a:buNone/>
+            </a:pPr>
+            <a:r>
+              <a:rPr/>
+              <a:t>One-hot </a:t>
+            </a:r>
+            <a:r>
+              <a:rPr>
+                <a:latin typeface="Courier"/>
+              </a:rPr>
+              <a:t>zip_code</a:t>
+            </a:r>
+            <a:r>
+              <a:rPr/>
+              <a:t>: </a:t>
+            </a:r>
+            <a:r>
+              <a:rPr b="1"/>
+              <a:t>493</a:t>
+            </a:r>
+            <a:r>
+              <a:rPr/>
+              <a:t> new columns, mostly zero.</a:t>
+            </a:r>
+          </a:p>
+          <a:p>
+            <a:pPr lvl="0"/>
+            <a:r>
+              <a:rPr/>
+              <a:t>Distance-based methods (Lesson 6): everything looks equidistant</a:t>
+            </a:r>
+          </a:p>
+          <a:p>
+            <a:pPr lvl="0"/>
+            <a:r>
+              <a:rPr/>
+              <a:t>More parameters to estimate, same sample size → more variance</a:t>
+            </a:r>
+          </a:p>
+        </p:txBody>
+      </p:sp>
+    </p:spTree>
+  </p:cSld>
+</p:sld>
+</file>
+
+<file path=ppt/slides/slide35.xml><?xml version="1.0" encoding="utf-8"?>
+<p:sld xmlns:a="http://schemas.openxmlformats.org/drawingml/2006/main" xmlns:r="http://schemas.openxmlformats.org/officeDocument/2006/relationships" xmlns:p="http://schemas.openxmlformats.org/presentationml/2006/main">
+  <p:cSld>
+    <p:spTree>
+      <p:nvGrpSpPr>
+        <p:cNvPr id="1" name=""/>
+        <p:cNvGrpSpPr/>
+        <p:nvPr/>
+      </p:nvGrpSpPr>
+      <p:grpSpPr>
+        <a:xfrm>
+          <a:off x="0" y="0"/>
+          <a:ext cx="0" cy="0"/>
+          <a:chOff x="0" y="0"/>
+          <a:chExt cx="0" cy="0"/>
+        </a:xfrm>
+      </p:grpSpPr>
+      <p:sp>
+        <p:nvSpPr>
+          <p:cNvPr id="2" name="Title 1"/>
+          <p:cNvSpPr>
+            <a:spLocks noGrp="1"/>
+          </p:cNvSpPr>
+          <p:nvPr>
+            <p:ph type="title"/>
+          </p:nvPr>
+        </p:nvSpPr>
+        <p:spPr>
+          <a:xfrm>
+            <a:off x="457200" y="205979"/>
+            <a:ext cx="8229600" cy="857250"/>
+          </a:xfrm>
+        </p:spPr>
+        <p:txBody>
+          <a:bodyPr/>
+          <a:lstStyle/>
+          <a:p>
+            <a:pPr lvl="0" indent="0" marL="0">
+              <a:buNone/>
+            </a:pPr>
+            <a:r>
+              <a:rPr/>
+              <a:t>zip_code: 493 levels</a:t>
+            </a:r>
+          </a:p>
+        </p:txBody>
+      </p:sp>
+      <p:pic>
+        <p:nvPicPr>
+          <p:cNvPr descr="onehot_width.png" id="0" name="Picture 1"/>
+          <p:cNvPicPr>
+            <a:picLocks noGrp="1" noChangeAspect="1"/>
+          </p:cNvPicPr>
+          <p:nvPr/>
+        </p:nvPicPr>
+        <p:blipFill>
+          <a:blip r:embed="rId3"/>
+          <a:stretch>
+            <a:fillRect/>
+          </a:stretch>
+        </p:blipFill>
+        <p:spPr bwMode="auto">
+          <a:xfrm>
+            <a:off x="457200" y="1499989"/>
+            <a:ext cx="8229600" cy="2692400"/>
+          </a:xfrm>
+          <a:prstGeom prst="rect">
+            <a:avLst/>
+          </a:prstGeom>
+          <a:noFill/>
+          <a:ln w="9525">
+            <a:noFill/>
+            <a:headEnd/>
+            <a:tailEnd/>
+          </a:ln>
+        </p:spPr>
+      </p:pic>
+    </p:spTree>
+  </p:cSld>
+</p:sld>
+</file>
+
+<file path=ppt/slides/slide36.xml><?xml version="1.0" encoding="utf-8"?>
+<p:sld xmlns:a="http://schemas.openxmlformats.org/drawingml/2006/main" xmlns:r="http://schemas.openxmlformats.org/officeDocument/2006/relationships" xmlns:p="http://schemas.openxmlformats.org/presentationml/2006/main">
+  <p:cSld>
+    <p:spTree>
+      <p:nvGrpSpPr>
+        <p:cNvPr id="1" name=""/>
+        <p:cNvGrpSpPr/>
+        <p:nvPr/>
+      </p:nvGrpSpPr>
+      <p:grpSpPr>
+        <a:xfrm>
+          <a:off x="0" y="0"/>
+          <a:ext cx="0" cy="0"/>
+          <a:chOff x="0" y="0"/>
+          <a:chExt cx="0" cy="0"/>
+        </a:xfrm>
+      </p:grpSpPr>
+      <p:sp>
+        <p:nvSpPr>
+          <p:cNvPr id="2" name="Title 1"/>
+          <p:cNvSpPr>
+            <a:spLocks noGrp="1"/>
+          </p:cNvSpPr>
+          <p:nvPr>
+            <p:ph type="title"/>
+          </p:nvPr>
+        </p:nvSpPr>
+        <p:spPr>
+          <a:xfrm>
+            <a:off x="457200" y="205740"/>
+            <a:ext cx="8229600" cy="874395"/>
+          </a:xfrm>
+        </p:spPr>
+        <p:txBody>
+          <a:bodyPr/>
+          <a:lstStyle/>
+          <a:p>
+            <a:pPr lvl="0" indent="0" marL="0">
+              <a:buNone/>
+            </a:pPr>
+            <a:r>
+              <a:rPr/>
+              <a:t>Restating Lesson 1’s argument</a:t>
+            </a:r>
+          </a:p>
+        </p:txBody>
+      </p:sp>
+      <p:sp>
+        <p:nvSpPr>
+          <p:cNvPr id="4" name="Text Placeholder 3"/>
+          <p:cNvSpPr>
+            <a:spLocks noGrp="1"/>
+          </p:cNvSpPr>
+          <p:nvPr>
+            <p:ph idx="2" sz="half" type="body"/>
+          </p:nvPr>
+        </p:nvSpPr>
+        <p:spPr>
+          <a:xfrm>
+            <a:off x="457200" y="1183005"/>
+            <a:ext cx="8229600" cy="874395"/>
+          </a:xfrm>
+        </p:spPr>
+        <p:txBody>
+          <a:bodyPr/>
+          <a:lstStyle/>
+          <a:p>
+            <a:pPr lvl="0" indent="0" marL="0">
+              <a:buNone/>
+            </a:pPr>
+            <a:r>
+              <a:rPr/>
+              <a:t>f includes </a:t>
+            </a:r>
+            <a:r>
+              <a:rPr b="1"/>
+              <a:t>every</a:t>
+            </a:r>
+            <a:r>
+              <a:rPr/>
+              <a:t> learned parameter, not just “the model part”.</a:t>
+            </a:r>
+          </a:p>
+        </p:txBody>
+      </p:sp>
+      <p:pic>
+        <p:nvPicPr>
+          <p:cNvPr descr="eq_4c26f16b0d.png" id="0" name="Picture 1"/>
+          <p:cNvPicPr>
+            <a:picLocks noGrp="1" noChangeAspect="1"/>
+          </p:cNvPicPr>
+          <p:nvPr/>
+        </p:nvPicPr>
+        <p:blipFill>
+          <a:blip r:embed="rId3"/>
+          <a:stretch>
+            <a:fillRect/>
+          </a:stretch>
+        </p:blipFill>
+        <p:spPr bwMode="auto">
+          <a:xfrm>
+            <a:off x="457200" y="3087379"/>
+            <a:ext cx="8229599" cy="511791"/>
+          </a:xfrm>
+          <a:prstGeom prst="rect">
+            <a:avLst/>
+          </a:prstGeom>
+          <a:noFill/>
+          <a:ln w="9525">
+            <a:noFill/>
+            <a:headEnd/>
+            <a:tailEnd/>
+          </a:ln>
+        </p:spPr>
+      </p:pic>
+    </p:spTree>
+  </p:cSld>
+</p:sld>
+</file>
+
+<file path=ppt/slides/slide37.xml><?xml version="1.0" encoding="utf-8"?>
 <p:sld xmlns:a="http://schemas.openxmlformats.org/drawingml/2006/main" xmlns:r="http://schemas.openxmlformats.org/officeDocument/2006/relationships" xmlns:p="http://schemas.openxmlformats.org/presentationml/2006/main">
   <p:cSld>
     <p:spTree>
@@ -12000,7 +13297,7 @@
 </p:sld>
 </file>
 
-<file path=ppt/slides/slide35.xml><?xml version="1.0" encoding="utf-8"?>
+<file path=ppt/slides/slide38.xml><?xml version="1.0" encoding="utf-8"?>
 <p:sld xmlns:a="http://schemas.openxmlformats.org/drawingml/2006/main" xmlns:r="http://schemas.openxmlformats.org/officeDocument/2006/relationships" xmlns:p="http://schemas.openxmlformats.org/presentationml/2006/main">
   <p:cSld>
     <p:spTree>
@@ -12230,7 +13527,7 @@
 </p:sld>
 </file>
 
-<file path=ppt/slides/slide36.xml><?xml version="1.0" encoding="utf-8"?>
+<file path=ppt/slides/slide39.xml><?xml version="1.0" encoding="utf-8"?>
 <p:sld xmlns:a="http://schemas.openxmlformats.org/drawingml/2006/main" xmlns:r="http://schemas.openxmlformats.org/officeDocument/2006/relationships" xmlns:p="http://schemas.openxmlformats.org/presentationml/2006/main">
   <p:cSld>
     <p:spTree>
@@ -12346,7 +13643,122 @@
 </p:sld>
 </file>
 
-<file path=ppt/slides/slide37.xml><?xml version="1.0" encoding="utf-8"?>
+<file path=ppt/slides/slide4.xml><?xml version="1.0" encoding="utf-8"?>
+<p:sld xmlns:a="http://schemas.openxmlformats.org/drawingml/2006/main" xmlns:r="http://schemas.openxmlformats.org/officeDocument/2006/relationships" xmlns:p="http://schemas.openxmlformats.org/presentationml/2006/main">
+  <p:cSld>
+    <p:spTree>
+      <p:nvGrpSpPr>
+        <p:cNvPr id="1" name=""/>
+        <p:cNvGrpSpPr/>
+        <p:nvPr/>
+      </p:nvGrpSpPr>
+      <p:grpSpPr>
+        <a:xfrm>
+          <a:off x="0" y="0"/>
+          <a:ext cx="0" cy="0"/>
+          <a:chOff x="0" y="0"/>
+          <a:chExt cx="0" cy="0"/>
+        </a:xfrm>
+      </p:grpSpPr>
+      <p:sp>
+        <p:nvSpPr>
+          <p:cNvPr id="2" name="Title 1"/>
+          <p:cNvSpPr>
+            <a:spLocks noGrp="1"/>
+          </p:cNvSpPr>
+          <p:nvPr>
+            <p:ph type="title"/>
+          </p:nvPr>
+        </p:nvSpPr>
+        <p:spPr>
+          <a:xfrm>
+            <a:off x="457200" y="205979"/>
+            <a:ext cx="8229600" cy="857250"/>
+          </a:xfrm>
+        </p:spPr>
+        <p:txBody>
+          <a:bodyPr/>
+          <a:lstStyle/>
+          <a:p>
+            <a:pPr lvl="0" indent="0" marL="0">
+              <a:buNone/>
+            </a:pPr>
+            <a:r>
+              <a:rPr/>
+              <a:t>Today</a:t>
+            </a:r>
+          </a:p>
+        </p:txBody>
+      </p:sp>
+      <p:sp>
+        <p:nvSpPr>
+          <p:cNvPr id="3" name="Content Placeholder 2"/>
+          <p:cNvSpPr>
+            <a:spLocks noGrp="1"/>
+          </p:cNvSpPr>
+          <p:nvPr>
+            <p:ph idx="1"/>
+          </p:nvPr>
+        </p:nvSpPr>
+        <p:spPr>
+          <a:xfrm>
+            <a:off x="457200" y="1200151"/>
+            <a:ext cx="8229600" cy="3394472"/>
+          </a:xfrm>
+        </p:spPr>
+        <p:txBody>
+          <a:bodyPr/>
+          <a:lstStyle/>
+          <a:p>
+            <a:pPr lvl="0"/>
+            <a:r>
+              <a:rPr/>
+              <a:t>Exploratory analysis</a:t>
+            </a:r>
+          </a:p>
+          <a:p>
+            <a:pPr lvl="0"/>
+            <a:r>
+              <a:rPr/>
+              <a:t>Missing values</a:t>
+            </a:r>
+          </a:p>
+          <a:p>
+            <a:pPr lvl="0"/>
+            <a:r>
+              <a:rPr/>
+              <a:t>Outliers</a:t>
+            </a:r>
+          </a:p>
+          <a:p>
+            <a:pPr lvl="0"/>
+            <a:r>
+              <a:rPr/>
+              <a:t>Scaling and encoding</a:t>
+            </a:r>
+          </a:p>
+          <a:p>
+            <a:pPr lvl="0"/>
+            <a:r>
+              <a:rPr/>
+              <a:t>Feature engineering and pipelines</a:t>
+            </a:r>
+          </a:p>
+          <a:p>
+            <a:pPr lvl="0"/>
+            <a:r>
+              <a:rPr/>
+              <a:t>Leakage, in a form nothing warns you about</a:t>
+            </a:r>
+          </a:p>
+        </p:txBody>
+      </p:sp>
+    </p:spTree>
+  </p:cSld>
+</p:sld>
+</file>
+
+<file path=ppt/slides/slide40.xml><?xml version="1.0" encoding="utf-8"?>
 <p:sld xmlns:a="http://schemas.openxmlformats.org/drawingml/2006/main" xmlns:r="http://schemas.openxmlformats.org/officeDocument/2006/relationships" xmlns:p="http://schemas.openxmlformats.org/presentationml/2006/main">
   <p:cSld>
     <p:spTree>
@@ -12428,7 +13840,7 @@
 </p:sld>
 </file>
 
-<file path=ppt/slides/slide38.xml><?xml version="1.0" encoding="utf-8"?>
+<file path=ppt/slides/slide41.xml><?xml version="1.0" encoding="utf-8"?>
 <p:sld xmlns:a="http://schemas.openxmlformats.org/drawingml/2006/main" xmlns:r="http://schemas.openxmlformats.org/officeDocument/2006/relationships" xmlns:p="http://schemas.openxmlformats.org/presentationml/2006/main">
   <p:cSld>
     <p:spTree>
@@ -12525,8 +13937,8 @@
         </p:blipFill>
         <p:spPr bwMode="auto">
           <a:xfrm>
-            <a:off x="457204" y="3183148"/>
-            <a:ext cx="8229591" cy="757450"/>
+            <a:off x="457205" y="3213856"/>
+            <a:ext cx="8229590" cy="696035"/>
           </a:xfrm>
           <a:prstGeom prst="rect">
             <a:avLst/>
@@ -12544,7 +13956,7 @@
 </p:sld>
 </file>
 
-<file path=ppt/slides/slide39.xml><?xml version="1.0" encoding="utf-8"?>
+<file path=ppt/slides/slide42.xml><?xml version="1.0" encoding="utf-8"?>
 <p:sld xmlns:a="http://schemas.openxmlformats.org/drawingml/2006/main" xmlns:r="http://schemas.openxmlformats.org/officeDocument/2006/relationships" xmlns:p="http://schemas.openxmlformats.org/presentationml/2006/main">
   <p:cSld>
     <p:spTree>
@@ -12646,122 +14058,7 @@
 </p:sld>
 </file>
 
-<file path=ppt/slides/slide4.xml><?xml version="1.0" encoding="utf-8"?>
-<p:sld xmlns:a="http://schemas.openxmlformats.org/drawingml/2006/main" xmlns:r="http://schemas.openxmlformats.org/officeDocument/2006/relationships" xmlns:p="http://schemas.openxmlformats.org/presentationml/2006/main">
-  <p:cSld>
-    <p:spTree>
-      <p:nvGrpSpPr>
-        <p:cNvPr id="1" name=""/>
-        <p:cNvGrpSpPr/>
-        <p:nvPr/>
-      </p:nvGrpSpPr>
-      <p:grpSpPr>
-        <a:xfrm>
-          <a:off x="0" y="0"/>
-          <a:ext cx="0" cy="0"/>
-          <a:chOff x="0" y="0"/>
-          <a:chExt cx="0" cy="0"/>
-        </a:xfrm>
-      </p:grpSpPr>
-      <p:sp>
-        <p:nvSpPr>
-          <p:cNvPr id="2" name="Title 1"/>
-          <p:cNvSpPr>
-            <a:spLocks noGrp="1"/>
-          </p:cNvSpPr>
-          <p:nvPr>
-            <p:ph type="title"/>
-          </p:nvPr>
-        </p:nvSpPr>
-        <p:spPr>
-          <a:xfrm>
-            <a:off x="457200" y="205979"/>
-            <a:ext cx="8229600" cy="857250"/>
-          </a:xfrm>
-        </p:spPr>
-        <p:txBody>
-          <a:bodyPr/>
-          <a:lstStyle/>
-          <a:p>
-            <a:pPr lvl="0" indent="0" marL="0">
-              <a:buNone/>
-            </a:pPr>
-            <a:r>
-              <a:rPr/>
-              <a:t>Today</a:t>
-            </a:r>
-          </a:p>
-        </p:txBody>
-      </p:sp>
-      <p:sp>
-        <p:nvSpPr>
-          <p:cNvPr id="3" name="Content Placeholder 2"/>
-          <p:cNvSpPr>
-            <a:spLocks noGrp="1"/>
-          </p:cNvSpPr>
-          <p:nvPr>
-            <p:ph idx="1"/>
-          </p:nvPr>
-        </p:nvSpPr>
-        <p:spPr>
-          <a:xfrm>
-            <a:off x="457200" y="1200151"/>
-            <a:ext cx="8229600" cy="3394472"/>
-          </a:xfrm>
-        </p:spPr>
-        <p:txBody>
-          <a:bodyPr/>
-          <a:lstStyle/>
-          <a:p>
-            <a:pPr lvl="0"/>
-            <a:r>
-              <a:rPr/>
-              <a:t>Exploratory analysis</a:t>
-            </a:r>
-          </a:p>
-          <a:p>
-            <a:pPr lvl="0"/>
-            <a:r>
-              <a:rPr/>
-              <a:t>Missing values</a:t>
-            </a:r>
-          </a:p>
-          <a:p>
-            <a:pPr lvl="0"/>
-            <a:r>
-              <a:rPr/>
-              <a:t>Outliers</a:t>
-            </a:r>
-          </a:p>
-          <a:p>
-            <a:pPr lvl="0"/>
-            <a:r>
-              <a:rPr/>
-              <a:t>Scaling and encoding</a:t>
-            </a:r>
-          </a:p>
-          <a:p>
-            <a:pPr lvl="0"/>
-            <a:r>
-              <a:rPr/>
-              <a:t>Feature engineering and pipelines</a:t>
-            </a:r>
-          </a:p>
-          <a:p>
-            <a:pPr lvl="0"/>
-            <a:r>
-              <a:rPr/>
-              <a:t>Leakage, in a form nothing warns you about</a:t>
-            </a:r>
-          </a:p>
-        </p:txBody>
-      </p:sp>
-    </p:spTree>
-  </p:cSld>
-</p:sld>
-</file>
-
-<file path=ppt/slides/slide40.xml><?xml version="1.0" encoding="utf-8"?>
+<file path=ppt/slides/slide43.xml><?xml version="1.0" encoding="utf-8"?>
 <p:sld xmlns:a="http://schemas.openxmlformats.org/drawingml/2006/main" xmlns:r="http://schemas.openxmlformats.org/officeDocument/2006/relationships" xmlns:p="http://schemas.openxmlformats.org/presentationml/2006/main">
   <p:cSld>
     <p:spTree>
@@ -12843,7 +14140,7 @@
 </p:sld>
 </file>
 
-<file path=ppt/slides/slide41.xml><?xml version="1.0" encoding="utf-8"?>
+<file path=ppt/slides/slide44.xml><?xml version="1.0" encoding="utf-8"?>
 <p:sld xmlns:a="http://schemas.openxmlformats.org/drawingml/2006/main" xmlns:r="http://schemas.openxmlformats.org/officeDocument/2006/relationships" xmlns:p="http://schemas.openxmlformats.org/presentationml/2006/main">
   <p:cSld>
     <p:spTree>
@@ -12948,7 +14245,7 @@
 </p:sld>
 </file>
 
-<file path=ppt/slides/slide42.xml><?xml version="1.0" encoding="utf-8"?>
+<file path=ppt/slides/slide45.xml><?xml version="1.0" encoding="utf-8"?>
 <p:sld xmlns:a="http://schemas.openxmlformats.org/drawingml/2006/main" xmlns:r="http://schemas.openxmlformats.org/officeDocument/2006/relationships" xmlns:p="http://schemas.openxmlformats.org/presentationml/2006/main">
   <p:cSld>
     <p:spTree>
@@ -13051,7 +14348,7 @@
 </p:sld>
 </file>
 
-<file path=ppt/slides/slide43.xml><?xml version="1.0" encoding="utf-8"?>
+<file path=ppt/slides/slide46.xml><?xml version="1.0" encoding="utf-8"?>
 <p:sld xmlns:a="http://schemas.openxmlformats.org/drawingml/2006/main" xmlns:r="http://schemas.openxmlformats.org/officeDocument/2006/relationships" xmlns:p="http://schemas.openxmlformats.org/presentationml/2006/main">
   <p:cSld>
     <p:spTree>
@@ -13133,7 +14430,7 @@
 </p:sld>
 </file>
 
-<file path=ppt/slides/slide44.xml><?xml version="1.0" encoding="utf-8"?>
+<file path=ppt/slides/slide47.xml><?xml version="1.0" encoding="utf-8"?>
 <p:sld xmlns:a="http://schemas.openxmlformats.org/drawingml/2006/main" xmlns:r="http://schemas.openxmlformats.org/officeDocument/2006/relationships" xmlns:p="http://schemas.openxmlformats.org/presentationml/2006/main">
   <p:cSld>
     <p:spTree>
@@ -13233,7 +14530,7 @@
 </p:sld>
 </file>
 
-<file path=ppt/slides/slide45.xml><?xml version="1.0" encoding="utf-8"?>
+<file path=ppt/slides/slide48.xml><?xml version="1.0" encoding="utf-8"?>
 <p:sld xmlns:a="http://schemas.openxmlformats.org/drawingml/2006/main" xmlns:r="http://schemas.openxmlformats.org/officeDocument/2006/relationships" xmlns:p="http://schemas.openxmlformats.org/presentationml/2006/main">
   <p:cSld>
     <p:spTree>
@@ -13315,7 +14612,7 @@
 </p:sld>
 </file>
 
-<file path=ppt/slides/slide46.xml><?xml version="1.0" encoding="utf-8"?>
+<file path=ppt/slides/slide49.xml><?xml version="1.0" encoding="utf-8"?>
 <p:sld xmlns:a="http://schemas.openxmlformats.org/drawingml/2006/main" xmlns:r="http://schemas.openxmlformats.org/officeDocument/2006/relationships" xmlns:p="http://schemas.openxmlformats.org/presentationml/2006/main">
   <p:cSld>
     <p:spTree>
@@ -13378,8 +14675,8 @@
         </p:blipFill>
         <p:spPr bwMode="auto">
           <a:xfrm>
-            <a:off x="457200" y="1919089"/>
-            <a:ext cx="8229600" cy="1854200"/>
+            <a:off x="1512306" y="2204031"/>
+            <a:ext cx="6119388" cy="1284316"/>
           </a:xfrm>
           <a:prstGeom prst="rect">
             <a:avLst/>
@@ -13397,7 +14694,122 @@
 </p:sld>
 </file>
 
-<file path=ppt/slides/slide47.xml><?xml version="1.0" encoding="utf-8"?>
+<file path=ppt/slides/slide5.xml><?xml version="1.0" encoding="utf-8"?>
+<p:sld xmlns:a="http://schemas.openxmlformats.org/drawingml/2006/main" xmlns:r="http://schemas.openxmlformats.org/officeDocument/2006/relationships" xmlns:p="http://schemas.openxmlformats.org/presentationml/2006/main">
+  <p:cSld>
+    <p:spTree>
+      <p:nvGrpSpPr>
+        <p:cNvPr id="1" name=""/>
+        <p:cNvGrpSpPr/>
+        <p:nvPr/>
+      </p:nvGrpSpPr>
+      <p:grpSpPr>
+        <a:xfrm>
+          <a:off x="0" y="0"/>
+          <a:ext cx="0" cy="0"/>
+          <a:chOff x="0" y="0"/>
+          <a:chExt cx="0" cy="0"/>
+        </a:xfrm>
+      </p:grpSpPr>
+      <p:sp>
+        <p:nvSpPr>
+          <p:cNvPr id="2" name="Title 1"/>
+          <p:cNvSpPr>
+            <a:spLocks noGrp="1"/>
+          </p:cNvSpPr>
+          <p:nvPr>
+            <p:ph type="title"/>
+          </p:nvPr>
+        </p:nvSpPr>
+        <p:spPr>
+          <a:xfrm>
+            <a:off x="457200" y="205979"/>
+            <a:ext cx="8229600" cy="857250"/>
+          </a:xfrm>
+        </p:spPr>
+        <p:txBody>
+          <a:bodyPr/>
+          <a:lstStyle/>
+          <a:p>
+            <a:pPr lvl="0" indent="0" marL="0">
+              <a:buNone/>
+            </a:pPr>
+            <a:r>
+              <a:rPr/>
+              <a:t>One dataset, all lesson long</a:t>
+            </a:r>
+          </a:p>
+        </p:txBody>
+      </p:sp>
+      <p:sp>
+        <p:nvSpPr>
+          <p:cNvPr id="3" name="Content Placeholder 2"/>
+          <p:cNvSpPr>
+            <a:spLocks noGrp="1"/>
+          </p:cNvSpPr>
+          <p:nvPr>
+            <p:ph idx="1"/>
+          </p:nvPr>
+        </p:nvSpPr>
+        <p:spPr>
+          <a:xfrm>
+            <a:off x="457200" y="1200151"/>
+            <a:ext cx="8229600" cy="3394472"/>
+          </a:xfrm>
+        </p:spPr>
+        <p:txBody>
+          <a:bodyPr/>
+          <a:lstStyle/>
+          <a:p>
+            <a:pPr lvl="0" indent="0" marL="0">
+              <a:buNone/>
+            </a:pPr>
+            <a:r>
+              <a:rPr/>
+              <a:t>2000 synthetic telecom customers. Will they </a:t>
+            </a:r>
+            <a:r>
+              <a:rPr b="1"/>
+              <a:t>churn</a:t>
+            </a:r>
+            <a:r>
+              <a:rPr/>
+              <a:t>?</a:t>
+            </a:r>
+          </a:p>
+          <a:p>
+            <a:pPr lvl="0"/>
+            <a:r>
+              <a:rPr/>
+              <a:t>Numeric: tenure, monthly charges, age, support calls</a:t>
+            </a:r>
+          </a:p>
+          <a:p>
+            <a:pPr lvl="0"/>
+            <a:r>
+              <a:rPr/>
+              <a:t>Categorical: contract type, region, zip code (493 levels)</a:t>
+            </a:r>
+          </a:p>
+          <a:p>
+            <a:pPr lvl="0"/>
+            <a:r>
+              <a:rPr/>
+              <a:t>Missing values, outliers, and one column built to carry </a:t>
+            </a:r>
+            <a:r>
+              <a:rPr b="1"/>
+              <a:t>no signal</a:t>
+            </a:r>
+          </a:p>
+        </p:txBody>
+      </p:sp>
+    </p:spTree>
+  </p:cSld>
+</p:sld>
+</file>
+
+<file path=ppt/slides/slide50.xml><?xml version="1.0" encoding="utf-8"?>
 <p:sld xmlns:a="http://schemas.openxmlformats.org/drawingml/2006/main" xmlns:r="http://schemas.openxmlformats.org/officeDocument/2006/relationships" xmlns:p="http://schemas.openxmlformats.org/presentationml/2006/main">
   <p:cSld>
     <p:spTree>
@@ -13479,407 +14891,6 @@
 </p:sld>
 </file>
 
-<file path=ppt/slides/slide48.xml><?xml version="1.0" encoding="utf-8"?>
-<p:sld xmlns:a="http://schemas.openxmlformats.org/drawingml/2006/main" xmlns:r="http://schemas.openxmlformats.org/officeDocument/2006/relationships" xmlns:p="http://schemas.openxmlformats.org/presentationml/2006/main">
-  <p:cSld>
-    <p:spTree>
-      <p:nvGrpSpPr>
-        <p:cNvPr id="1" name=""/>
-        <p:cNvGrpSpPr/>
-        <p:nvPr/>
-      </p:nvGrpSpPr>
-      <p:grpSpPr>
-        <a:xfrm>
-          <a:off x="0" y="0"/>
-          <a:ext cx="0" cy="0"/>
-          <a:chOff x="0" y="0"/>
-          <a:chExt cx="0" cy="0"/>
-        </a:xfrm>
-      </p:grpSpPr>
-      <p:sp>
-        <p:nvSpPr>
-          <p:cNvPr id="2" name="Title 1"/>
-          <p:cNvSpPr>
-            <a:spLocks noGrp="1"/>
-          </p:cNvSpPr>
-          <p:nvPr>
-            <p:ph type="title"/>
-          </p:nvPr>
-        </p:nvSpPr>
-        <p:spPr>
-          <a:xfrm>
-            <a:off x="457200" y="205979"/>
-            <a:ext cx="8229600" cy="857250"/>
-          </a:xfrm>
-        </p:spPr>
-        <p:txBody>
-          <a:bodyPr/>
-          <a:lstStyle/>
-          <a:p>
-            <a:pPr lvl="0" indent="0" marL="0">
-              <a:buNone/>
-            </a:pPr>
-            <a:r>
-              <a:rPr/>
-              <a:t>The fix</a:t>
-            </a:r>
-          </a:p>
-        </p:txBody>
-      </p:sp>
-      <p:sp>
-        <p:nvSpPr>
-          <p:cNvPr id="3" name="Content Placeholder 2"/>
-          <p:cNvSpPr>
-            <a:spLocks noGrp="1"/>
-          </p:cNvSpPr>
-          <p:nvPr>
-            <p:ph idx="1"/>
-          </p:nvPr>
-        </p:nvSpPr>
-        <p:spPr>
-          <a:xfrm>
-            <a:off x="457200" y="1200151"/>
-            <a:ext cx="8229600" cy="3394472"/>
-          </a:xfrm>
-        </p:spPr>
-        <p:txBody>
-          <a:bodyPr/>
-          <a:lstStyle/>
-          <a:p>
-            <a:pPr lvl="0" indent="0" marL="0">
-              <a:buNone/>
-            </a:pPr>
-            <a:r>
-              <a:rPr>
-                <a:latin typeface="Courier"/>
-              </a:rPr>
-              <a:t>sklearn.preprocessing.TargetEncoder</a:t>
-            </a:r>
-            <a:r>
-              <a:rPr/>
-              <a:t>: cross-fitted inside the pipeline.</a:t>
-            </a:r>
-          </a:p>
-          <a:p>
-            <a:pPr lvl="0" indent="0" marL="0">
-              <a:buNone/>
-            </a:pPr>
-            <a:r>
-              <a:rPr/>
-              <a:t>Each row’s encoded value comes from </a:t>
-            </a:r>
-            <a:r>
-              <a:rPr b="1"/>
-              <a:t>other</a:t>
-            </a:r>
-            <a:r>
-              <a:rPr/>
-              <a:t> folds, never its own label.</a:t>
-            </a:r>
-          </a:p>
-        </p:txBody>
-      </p:sp>
-    </p:spTree>
-  </p:cSld>
-</p:sld>
-</file>
-
-<file path=ppt/slides/slide49.xml><?xml version="1.0" encoding="utf-8"?>
-<p:sld xmlns:a="http://schemas.openxmlformats.org/drawingml/2006/main" xmlns:r="http://schemas.openxmlformats.org/officeDocument/2006/relationships" xmlns:p="http://schemas.openxmlformats.org/presentationml/2006/main">
-  <p:cSld>
-    <p:spTree>
-      <p:nvGrpSpPr>
-        <p:cNvPr id="1" name=""/>
-        <p:cNvGrpSpPr/>
-        <p:nvPr/>
-      </p:nvGrpSpPr>
-      <p:grpSpPr>
-        <a:xfrm>
-          <a:off x="0" y="0"/>
-          <a:ext cx="0" cy="0"/>
-          <a:chOff x="0" y="0"/>
-          <a:chExt cx="0" cy="0"/>
-        </a:xfrm>
-      </p:grpSpPr>
-      <p:sp>
-        <p:nvSpPr>
-          <p:cNvPr id="2" name="Title 1"/>
-          <p:cNvSpPr>
-            <a:spLocks noGrp="1"/>
-          </p:cNvSpPr>
-          <p:nvPr>
-            <p:ph type="title"/>
-          </p:nvPr>
-        </p:nvSpPr>
-        <p:spPr>
-          <a:xfrm>
-            <a:off x="457200" y="205979"/>
-            <a:ext cx="8229600" cy="857250"/>
-          </a:xfrm>
-        </p:spPr>
-        <p:txBody>
-          <a:bodyPr/>
-          <a:lstStyle/>
-          <a:p>
-            <a:pPr lvl="0" indent="0" marL="0">
-              <a:buNone/>
-            </a:pPr>
-            <a:r>
-              <a:rPr/>
-              <a:t>The rule, restated</a:t>
-            </a:r>
-          </a:p>
-        </p:txBody>
-      </p:sp>
-      <p:sp>
-        <p:nvSpPr>
-          <p:cNvPr id="3" name="Content Placeholder 2"/>
-          <p:cNvSpPr>
-            <a:spLocks noGrp="1"/>
-          </p:cNvSpPr>
-          <p:nvPr>
-            <p:ph idx="1"/>
-          </p:nvPr>
-        </p:nvSpPr>
-        <p:spPr>
-          <a:xfrm>
-            <a:off x="457200" y="1200151"/>
-            <a:ext cx="8229600" cy="3394472"/>
-          </a:xfrm>
-        </p:spPr>
-        <p:txBody>
-          <a:bodyPr/>
-          <a:lstStyle/>
-          <a:p>
-            <a:pPr lvl="0" indent="0" marL="0">
-              <a:buNone/>
-            </a:pPr>
-            <a:r>
-              <a:rPr/>
-              <a:t>Everything that </a:t>
-            </a:r>
-            <a:r>
-              <a:rPr b="1"/>
-              <a:t>learns from data</a:t>
-            </a:r>
-            <a:r>
-              <a:rPr/>
-              <a:t> belongs inside the fold it is fitted on.</a:t>
-            </a:r>
-          </a:p>
-          <a:p>
-            <a:pPr lvl="0" indent="0" marL="0">
-              <a:buNone/>
-            </a:pPr>
-            <a:r>
-              <a:rPr/>
-              <a:t>A mean. A median. A set of neighbours. A per-category average. A set of bin edges.</a:t>
-            </a:r>
-          </a:p>
-        </p:txBody>
-      </p:sp>
-    </p:spTree>
-  </p:cSld>
-</p:sld>
-</file>
-
-<file path=ppt/slides/slide5.xml><?xml version="1.0" encoding="utf-8"?>
-<p:sld xmlns:a="http://schemas.openxmlformats.org/drawingml/2006/main" xmlns:r="http://schemas.openxmlformats.org/officeDocument/2006/relationships" xmlns:p="http://schemas.openxmlformats.org/presentationml/2006/main">
-  <p:cSld>
-    <p:spTree>
-      <p:nvGrpSpPr>
-        <p:cNvPr id="1" name=""/>
-        <p:cNvGrpSpPr/>
-        <p:nvPr/>
-      </p:nvGrpSpPr>
-      <p:grpSpPr>
-        <a:xfrm>
-          <a:off x="0" y="0"/>
-          <a:ext cx="0" cy="0"/>
-          <a:chOff x="0" y="0"/>
-          <a:chExt cx="0" cy="0"/>
-        </a:xfrm>
-      </p:grpSpPr>
-      <p:sp>
-        <p:nvSpPr>
-          <p:cNvPr id="2" name="Title 1"/>
-          <p:cNvSpPr>
-            <a:spLocks noGrp="1"/>
-          </p:cNvSpPr>
-          <p:nvPr>
-            <p:ph type="title"/>
-          </p:nvPr>
-        </p:nvSpPr>
-        <p:spPr>
-          <a:xfrm>
-            <a:off x="457200" y="205979"/>
-            <a:ext cx="8229600" cy="857250"/>
-          </a:xfrm>
-        </p:spPr>
-        <p:txBody>
-          <a:bodyPr/>
-          <a:lstStyle/>
-          <a:p>
-            <a:pPr lvl="0" indent="0" marL="0">
-              <a:buNone/>
-            </a:pPr>
-            <a:r>
-              <a:rPr/>
-              <a:t>One dataset, all lesson long</a:t>
-            </a:r>
-          </a:p>
-        </p:txBody>
-      </p:sp>
-      <p:sp>
-        <p:nvSpPr>
-          <p:cNvPr id="3" name="Content Placeholder 2"/>
-          <p:cNvSpPr>
-            <a:spLocks noGrp="1"/>
-          </p:cNvSpPr>
-          <p:nvPr>
-            <p:ph idx="1"/>
-          </p:nvPr>
-        </p:nvSpPr>
-        <p:spPr>
-          <a:xfrm>
-            <a:off x="457200" y="1200151"/>
-            <a:ext cx="8229600" cy="3394472"/>
-          </a:xfrm>
-        </p:spPr>
-        <p:txBody>
-          <a:bodyPr/>
-          <a:lstStyle/>
-          <a:p>
-            <a:pPr lvl="0" indent="0" marL="0">
-              <a:buNone/>
-            </a:pPr>
-            <a:r>
-              <a:rPr/>
-              <a:t>2000 synthetic telecom customers. Will they </a:t>
-            </a:r>
-            <a:r>
-              <a:rPr b="1"/>
-              <a:t>churn</a:t>
-            </a:r>
-            <a:r>
-              <a:rPr/>
-              <a:t>?</a:t>
-            </a:r>
-          </a:p>
-          <a:p>
-            <a:pPr lvl="0"/>
-            <a:r>
-              <a:rPr/>
-              <a:t>Numeric: tenure, monthly charges, age, support calls</a:t>
-            </a:r>
-          </a:p>
-          <a:p>
-            <a:pPr lvl="0"/>
-            <a:r>
-              <a:rPr/>
-              <a:t>Categorical: contract type, region, zip code (493 levels)</a:t>
-            </a:r>
-          </a:p>
-          <a:p>
-            <a:pPr lvl="0"/>
-            <a:r>
-              <a:rPr/>
-              <a:t>Missing values, outliers, and one column built to carry </a:t>
-            </a:r>
-            <a:r>
-              <a:rPr b="1"/>
-              <a:t>no signal</a:t>
-            </a:r>
-          </a:p>
-        </p:txBody>
-      </p:sp>
-    </p:spTree>
-  </p:cSld>
-</p:sld>
-</file>
-
-<file path=ppt/slides/slide50.xml><?xml version="1.0" encoding="utf-8"?>
-<p:sld xmlns:a="http://schemas.openxmlformats.org/drawingml/2006/main" xmlns:r="http://schemas.openxmlformats.org/officeDocument/2006/relationships" xmlns:p="http://schemas.openxmlformats.org/presentationml/2006/main">
-  <p:cSld>
-    <p:spTree>
-      <p:nvGrpSpPr>
-        <p:cNvPr id="1" name=""/>
-        <p:cNvGrpSpPr/>
-        <p:nvPr/>
-      </p:nvGrpSpPr>
-      <p:grpSpPr>
-        <a:xfrm>
-          <a:off x="0" y="0"/>
-          <a:ext cx="0" cy="0"/>
-          <a:chOff x="0" y="0"/>
-          <a:chExt cx="0" cy="0"/>
-        </a:xfrm>
-      </p:grpSpPr>
-      <p:sp>
-        <p:nvSpPr>
-          <p:cNvPr id="2" name="Title 1"/>
-          <p:cNvSpPr>
-            <a:spLocks noGrp="1"/>
-          </p:cNvSpPr>
-          <p:nvPr>
-            <p:ph type="title"/>
-          </p:nvPr>
-        </p:nvSpPr>
-        <p:spPr>
-          <a:xfrm>
-            <a:off x="457200" y="205979"/>
-            <a:ext cx="8229600" cy="857250"/>
-          </a:xfrm>
-        </p:spPr>
-        <p:txBody>
-          <a:bodyPr/>
-          <a:lstStyle/>
-          <a:p>
-            <a:pPr lvl="0" indent="0" marL="0">
-              <a:buNone/>
-            </a:pPr>
-            <a:r>
-              <a:rPr/>
-              <a:t>Notebook 3, live</a:t>
-            </a:r>
-          </a:p>
-        </p:txBody>
-      </p:sp>
-      <p:sp>
-        <p:nvSpPr>
-          <p:cNvPr id="3" name="Content Placeholder 2"/>
-          <p:cNvSpPr>
-            <a:spLocks noGrp="1"/>
-          </p:cNvSpPr>
-          <p:nvPr>
-            <p:ph idx="1"/>
-          </p:nvPr>
-        </p:nvSpPr>
-        <p:spPr>
-          <a:xfrm>
-            <a:off x="457200" y="1200151"/>
-            <a:ext cx="8229600" cy="3394472"/>
-          </a:xfrm>
-        </p:spPr>
-        <p:txBody>
-          <a:bodyPr/>
-          <a:lstStyle/>
-          <a:p>
-            <a:pPr lvl="0" indent="0" marL="0">
-              <a:buNone/>
-            </a:pPr>
-            <a:r>
-              <a:rPr/>
-              <a:t>Trace the imputation leak. Watch the encoding leak manufacture 0.89 from noise.</a:t>
-            </a:r>
-          </a:p>
-        </p:txBody>
-      </p:sp>
-    </p:spTree>
-  </p:cSld>
-</p:sld>
-</file>
-
 <file path=ppt/slides/slide51.xml><?xml version="1.0" encoding="utf-8"?>
 <p:sld xmlns:a="http://schemas.openxmlformats.org/drawingml/2006/main" xmlns:r="http://schemas.openxmlformats.org/officeDocument/2006/relationships" xmlns:p="http://schemas.openxmlformats.org/presentationml/2006/main">
   <p:cSld>
@@ -13922,7 +14933,7 @@
             </a:pPr>
             <a:r>
               <a:rPr/>
-              <a:t>What we did today</a:t>
+              <a:t>The fix</a:t>
             </a:r>
           </a:p>
         </p:txBody>
@@ -13947,56 +14958,35 @@
           <a:bodyPr/>
           <a:lstStyle/>
           <a:p>
-            <a:pPr lvl="0"/>
-            <a:r>
-              <a:rPr/>
-              <a:t>Explored before transforming: types, gaps, shape, correlations</a:t>
-            </a:r>
-          </a:p>
-          <a:p>
-            <a:pPr lvl="0"/>
-            <a:r>
-              <a:rPr/>
-              <a:t>Diagnosed </a:t>
-            </a:r>
-            <a:r>
-              <a:rPr i="1"/>
-              <a:t>why</a:t>
-            </a:r>
-            <a:r>
-              <a:rPr/>
-              <a:t> values are missing, not just </a:t>
-            </a:r>
-            <a:r>
-              <a:rPr i="1"/>
-              <a:t>how many</a:t>
-            </a:r>
-          </a:p>
-          <a:p>
-            <a:pPr lvl="0"/>
-            <a:r>
-              <a:rPr/>
-              <a:t>Two outlier rules, and what neither can tell you</a:t>
-            </a:r>
-          </a:p>
-          <a:p>
-            <a:pPr lvl="0"/>
-            <a:r>
-              <a:rPr/>
-              <a:t>Scaling, encoding, engineering: all inside </a:t>
-            </a:r>
+            <a:pPr lvl="0" indent="0" marL="0">
+              <a:buNone/>
+            </a:pPr>
             <a:r>
               <a:rPr>
                 <a:latin typeface="Courier"/>
               </a:rPr>
-              <a:t>Pipeline</a:t>
-            </a:r>
-          </a:p>
-          <a:p>
-            <a:pPr lvl="0"/>
-            <a:r>
-              <a:rPr/>
-              <a:t>Two leaks that look nothing like leaking</a:t>
+              <a:t>sklearn.preprocessing.TargetEncoder</a:t>
+            </a:r>
+            <a:r>
+              <a:rPr/>
+              <a:t>: cross-fitted inside the pipeline.</a:t>
+            </a:r>
+          </a:p>
+          <a:p>
+            <a:pPr lvl="0" indent="0" marL="0">
+              <a:buNone/>
+            </a:pPr>
+            <a:r>
+              <a:rPr/>
+              <a:t>Each row’s encoded value comes from </a:t>
+            </a:r>
+            <a:r>
+              <a:rPr b="1"/>
+              <a:t>other</a:t>
+            </a:r>
+            <a:r>
+              <a:rPr/>
+              <a:t> folds, never its own label.</a:t>
             </a:r>
           </a:p>
         </p:txBody>
@@ -14048,7 +15038,7 @@
             </a:pPr>
             <a:r>
               <a:rPr/>
-              <a:t>Homework: we discuss it on Friday 9 October</a:t>
+              <a:t>The rule, restated</a:t>
             </a:r>
           </a:p>
         </p:txBody>
@@ -14077,27 +15067,25 @@
               <a:buNone/>
             </a:pPr>
             <a:r>
-              <a:rPr>
-                <a:latin typeface="Courier"/>
-              </a:rPr>
-              <a:t>Exercises/02_data_exploration_and_preparation.md</a:t>
-            </a:r>
-          </a:p>
-          <a:p>
-            <a:pPr lvl="0" indent="0" marL="0">
-              <a:buNone/>
-            </a:pPr>
-            <a:r>
-              <a:rPr/>
-              <a:t>Build the full preparation pipeline yourself, and </a:t>
+              <a:rPr/>
+              <a:t>Everything that </a:t>
             </a:r>
             <a:r>
               <a:rPr b="1"/>
-              <a:t>find a leak on purpose</a:t>
-            </a:r>
-            <a:r>
-              <a:rPr/>
-              <a:t> before fixing it.</a:t>
+              <a:t>learns from data</a:t>
+            </a:r>
+            <a:r>
+              <a:rPr/>
+              <a:t> belongs inside the fold it is fitted on.</a:t>
+            </a:r>
+          </a:p>
+          <a:p>
+            <a:pPr lvl="0" indent="0" marL="0">
+              <a:buNone/>
+            </a:pPr>
+            <a:r>
+              <a:rPr/>
+              <a:t>A mean. A median. A set of neighbours. A per-category average. A set of bin edges.</a:t>
             </a:r>
           </a:p>
         </p:txBody>
@@ -14108,6 +15096,315 @@
 </file>
 
 <file path=ppt/slides/slide53.xml><?xml version="1.0" encoding="utf-8"?>
+<p:sld xmlns:a="http://schemas.openxmlformats.org/drawingml/2006/main" xmlns:r="http://schemas.openxmlformats.org/officeDocument/2006/relationships" xmlns:p="http://schemas.openxmlformats.org/presentationml/2006/main">
+  <p:cSld>
+    <p:spTree>
+      <p:nvGrpSpPr>
+        <p:cNvPr id="1" name=""/>
+        <p:cNvGrpSpPr/>
+        <p:nvPr/>
+      </p:nvGrpSpPr>
+      <p:grpSpPr>
+        <a:xfrm>
+          <a:off x="0" y="0"/>
+          <a:ext cx="0" cy="0"/>
+          <a:chOff x="0" y="0"/>
+          <a:chExt cx="0" cy="0"/>
+        </a:xfrm>
+      </p:grpSpPr>
+      <p:sp>
+        <p:nvSpPr>
+          <p:cNvPr id="2" name="Title 1"/>
+          <p:cNvSpPr>
+            <a:spLocks noGrp="1"/>
+          </p:cNvSpPr>
+          <p:nvPr>
+            <p:ph type="title"/>
+          </p:nvPr>
+        </p:nvSpPr>
+        <p:spPr>
+          <a:xfrm>
+            <a:off x="457200" y="205979"/>
+            <a:ext cx="8229600" cy="857250"/>
+          </a:xfrm>
+        </p:spPr>
+        <p:txBody>
+          <a:bodyPr/>
+          <a:lstStyle/>
+          <a:p>
+            <a:pPr lvl="0" indent="0" marL="0">
+              <a:buNone/>
+            </a:pPr>
+            <a:r>
+              <a:rPr/>
+              <a:t>Notebook 3, live</a:t>
+            </a:r>
+          </a:p>
+        </p:txBody>
+      </p:sp>
+      <p:sp>
+        <p:nvSpPr>
+          <p:cNvPr id="3" name="Content Placeholder 2"/>
+          <p:cNvSpPr>
+            <a:spLocks noGrp="1"/>
+          </p:cNvSpPr>
+          <p:nvPr>
+            <p:ph idx="1"/>
+          </p:nvPr>
+        </p:nvSpPr>
+        <p:spPr>
+          <a:xfrm>
+            <a:off x="457200" y="1200151"/>
+            <a:ext cx="8229600" cy="3394472"/>
+          </a:xfrm>
+        </p:spPr>
+        <p:txBody>
+          <a:bodyPr/>
+          <a:lstStyle/>
+          <a:p>
+            <a:pPr lvl="0" indent="0" marL="0">
+              <a:buNone/>
+            </a:pPr>
+            <a:r>
+              <a:rPr/>
+              <a:t>Trace the imputation leak. Watch the encoding leak manufacture 0.89 from noise.</a:t>
+            </a:r>
+          </a:p>
+        </p:txBody>
+      </p:sp>
+    </p:spTree>
+  </p:cSld>
+</p:sld>
+</file>
+
+<file path=ppt/slides/slide54.xml><?xml version="1.0" encoding="utf-8"?>
+<p:sld xmlns:a="http://schemas.openxmlformats.org/drawingml/2006/main" xmlns:r="http://schemas.openxmlformats.org/officeDocument/2006/relationships" xmlns:p="http://schemas.openxmlformats.org/presentationml/2006/main">
+  <p:cSld>
+    <p:spTree>
+      <p:nvGrpSpPr>
+        <p:cNvPr id="1" name=""/>
+        <p:cNvGrpSpPr/>
+        <p:nvPr/>
+      </p:nvGrpSpPr>
+      <p:grpSpPr>
+        <a:xfrm>
+          <a:off x="0" y="0"/>
+          <a:ext cx="0" cy="0"/>
+          <a:chOff x="0" y="0"/>
+          <a:chExt cx="0" cy="0"/>
+        </a:xfrm>
+      </p:grpSpPr>
+      <p:sp>
+        <p:nvSpPr>
+          <p:cNvPr id="2" name="Title 1"/>
+          <p:cNvSpPr>
+            <a:spLocks noGrp="1"/>
+          </p:cNvSpPr>
+          <p:nvPr>
+            <p:ph type="title"/>
+          </p:nvPr>
+        </p:nvSpPr>
+        <p:spPr>
+          <a:xfrm>
+            <a:off x="457200" y="205979"/>
+            <a:ext cx="8229600" cy="857250"/>
+          </a:xfrm>
+        </p:spPr>
+        <p:txBody>
+          <a:bodyPr/>
+          <a:lstStyle/>
+          <a:p>
+            <a:pPr lvl="0" indent="0" marL="0">
+              <a:buNone/>
+            </a:pPr>
+            <a:r>
+              <a:rPr/>
+              <a:t>What we did today</a:t>
+            </a:r>
+          </a:p>
+        </p:txBody>
+      </p:sp>
+      <p:sp>
+        <p:nvSpPr>
+          <p:cNvPr id="3" name="Content Placeholder 2"/>
+          <p:cNvSpPr>
+            <a:spLocks noGrp="1"/>
+          </p:cNvSpPr>
+          <p:nvPr>
+            <p:ph idx="1"/>
+          </p:nvPr>
+        </p:nvSpPr>
+        <p:spPr>
+          <a:xfrm>
+            <a:off x="457200" y="1200151"/>
+            <a:ext cx="8229600" cy="3394472"/>
+          </a:xfrm>
+        </p:spPr>
+        <p:txBody>
+          <a:bodyPr/>
+          <a:lstStyle/>
+          <a:p>
+            <a:pPr lvl="0"/>
+            <a:r>
+              <a:rPr/>
+              <a:t>Explored before transforming: types, gaps, shape, correlations</a:t>
+            </a:r>
+          </a:p>
+          <a:p>
+            <a:pPr lvl="0"/>
+            <a:r>
+              <a:rPr/>
+              <a:t>Diagnosed </a:t>
+            </a:r>
+            <a:r>
+              <a:rPr i="1"/>
+              <a:t>why</a:t>
+            </a:r>
+            <a:r>
+              <a:rPr/>
+              <a:t> values are missing, not just </a:t>
+            </a:r>
+            <a:r>
+              <a:rPr i="1"/>
+              <a:t>how many</a:t>
+            </a:r>
+          </a:p>
+          <a:p>
+            <a:pPr lvl="0"/>
+            <a:r>
+              <a:rPr/>
+              <a:t>Two outlier rules, and what neither can tell you</a:t>
+            </a:r>
+          </a:p>
+          <a:p>
+            <a:pPr lvl="0"/>
+            <a:r>
+              <a:rPr/>
+              <a:t>Scaling, encoding, engineering: all inside </a:t>
+            </a:r>
+            <a:r>
+              <a:rPr>
+                <a:latin typeface="Courier"/>
+              </a:rPr>
+              <a:t>Pipeline</a:t>
+            </a:r>
+          </a:p>
+          <a:p>
+            <a:pPr lvl="0"/>
+            <a:r>
+              <a:rPr/>
+              <a:t>Two leaks that look nothing like leaking</a:t>
+            </a:r>
+          </a:p>
+        </p:txBody>
+      </p:sp>
+    </p:spTree>
+  </p:cSld>
+</p:sld>
+</file>
+
+<file path=ppt/slides/slide55.xml><?xml version="1.0" encoding="utf-8"?>
+<p:sld xmlns:a="http://schemas.openxmlformats.org/drawingml/2006/main" xmlns:r="http://schemas.openxmlformats.org/officeDocument/2006/relationships" xmlns:p="http://schemas.openxmlformats.org/presentationml/2006/main">
+  <p:cSld>
+    <p:spTree>
+      <p:nvGrpSpPr>
+        <p:cNvPr id="1" name=""/>
+        <p:cNvGrpSpPr/>
+        <p:nvPr/>
+      </p:nvGrpSpPr>
+      <p:grpSpPr>
+        <a:xfrm>
+          <a:off x="0" y="0"/>
+          <a:ext cx="0" cy="0"/>
+          <a:chOff x="0" y="0"/>
+          <a:chExt cx="0" cy="0"/>
+        </a:xfrm>
+      </p:grpSpPr>
+      <p:sp>
+        <p:nvSpPr>
+          <p:cNvPr id="2" name="Title 1"/>
+          <p:cNvSpPr>
+            <a:spLocks noGrp="1"/>
+          </p:cNvSpPr>
+          <p:nvPr>
+            <p:ph type="title"/>
+          </p:nvPr>
+        </p:nvSpPr>
+        <p:spPr>
+          <a:xfrm>
+            <a:off x="457200" y="205979"/>
+            <a:ext cx="8229600" cy="857250"/>
+          </a:xfrm>
+        </p:spPr>
+        <p:txBody>
+          <a:bodyPr/>
+          <a:lstStyle/>
+          <a:p>
+            <a:pPr lvl="0" indent="0" marL="0">
+              <a:buNone/>
+            </a:pPr>
+            <a:r>
+              <a:rPr/>
+              <a:t>Homework: we discuss it on Friday 9 October</a:t>
+            </a:r>
+          </a:p>
+        </p:txBody>
+      </p:sp>
+      <p:sp>
+        <p:nvSpPr>
+          <p:cNvPr id="3" name="Content Placeholder 2"/>
+          <p:cNvSpPr>
+            <a:spLocks noGrp="1"/>
+          </p:cNvSpPr>
+          <p:nvPr>
+            <p:ph idx="1"/>
+          </p:nvPr>
+        </p:nvSpPr>
+        <p:spPr>
+          <a:xfrm>
+            <a:off x="457200" y="1200151"/>
+            <a:ext cx="8229600" cy="3394472"/>
+          </a:xfrm>
+        </p:spPr>
+        <p:txBody>
+          <a:bodyPr/>
+          <a:lstStyle/>
+          <a:p>
+            <a:pPr lvl="0" indent="0" marL="0">
+              <a:buNone/>
+            </a:pPr>
+            <a:r>
+              <a:rPr>
+                <a:latin typeface="Courier"/>
+              </a:rPr>
+              <a:t>Exercises/02_data_exploration_and_preparation.md</a:t>
+            </a:r>
+          </a:p>
+          <a:p>
+            <a:pPr lvl="0" indent="0" marL="0">
+              <a:buNone/>
+            </a:pPr>
+            <a:r>
+              <a:rPr/>
+              <a:t>Build the full preparation pipeline yourself, and </a:t>
+            </a:r>
+            <a:r>
+              <a:rPr b="1"/>
+              <a:t>find a leak on purpose</a:t>
+            </a:r>
+            <a:r>
+              <a:rPr/>
+              <a:t> before fixing it.</a:t>
+            </a:r>
+          </a:p>
+        </p:txBody>
+      </p:sp>
+    </p:spTree>
+  </p:cSld>
+</p:sld>
+</file>
+
+<file path=ppt/slides/slide56.xml><?xml version="1.0" encoding="utf-8"?>
 <p:sld xmlns:a="http://schemas.openxmlformats.org/drawingml/2006/main" xmlns:r="http://schemas.openxmlformats.org/officeDocument/2006/relationships" xmlns:p="http://schemas.openxmlformats.org/presentationml/2006/main">
   <p:cSld>
     <p:spTree>

--- a/Lessons/02_data_exploration_and_preparation/Slides/data_exploration_and_preparation_slides.pptx
+++ b/Lessons/02_data_exploration_and_preparation/Slides/data_exploration_and_preparation_slides.pptx
@@ -4303,6 +4303,20 @@
         <p:txBody>
           <a:bodyPr/>
           <a:lstStyle/>
+          <a:p>
+            <a:pPr lvl="0" indent="0" marL="0">
+              <a:buNone/>
+            </a:pPr>
+            <a:r>
+              <a:rPr/>
+              <a:t>Say what the picture is before reading anything off it: a confusion matrix is a table counting predictions against truth, one cell per combination - predicted stay and did stay, predicted stay and churned, and so on. Lesson 4 gives it its proper treatment; today it is a way of seeing where an accuracy number comes from.</a:t>
+            </a:r>
+          </a:p>
+          <a:p>
+            <a:pPr lvl="0" indent="0" marL="0">
+              <a:buNone/>
+            </a:pPr>
+          </a:p>
           <a:p>
             <a:pPr lvl="0" indent="0" marL="0">
               <a:buNone/>
@@ -13043,7 +13057,7 @@
             </a:pPr>
             <a:r>
               <a:rPr/>
-              <a:t>zip_code: 493 levels</a:t>
+              <a:t>zip_code: 493 codes, 2,000 customers</a:t>
             </a:r>
           </a:p>
         </p:txBody>

--- a/Lessons/02_data_exploration_and_preparation/Slides/data_exploration_and_preparation_slides.pptx
+++ b/Lessons/02_data_exploration_and_preparation/Slides/data_exploration_and_preparation_slides.pptx
@@ -4543,7 +4543,7 @@
             </a:pPr>
             <a:r>
               <a:rPr/>
-              <a:t>Do not let anyone in the room call two thousandths a win, and do not call it one yourself. It is a legitimate result, not a failed experiment - the hypothesis that cost intensity matters here was reasonable, it was tested, and the data declined it. Feature engineering is a hypothesis about the domain, not a guarantee. Handout Section 7.</a:t>
+              <a:t>Do not let anyone in the room call three thousandths a win, and do not call it one yourself. Quote the four decimals: at three, 0.751 against 0.754 sounds like a difference of 0.003, and the difference is 0.0028. It is a legitimate result, not a failed experiment - the hypothesis that cost intensity matters here was reasonable, it was tested, and the data declined it. Feature engineering is a hypothesis about the domain, not a guarantee. Handout Section 7.</a:t>
             </a:r>
           </a:p>
           <a:p>
@@ -13914,7 +13914,7 @@
         <p:spPr>
           <a:xfrm>
             <a:off x="457200" y="1183005"/>
-            <a:ext cx="8229600" cy="1311592"/>
+            <a:ext cx="8229600" cy="1748790"/>
           </a:xfrm>
         </p:spPr>
         <p:txBody>
@@ -13926,11 +13926,11 @@
             </a:pPr>
             <a:r>
               <a:rPr/>
-              <a:t>Ratios, interactions, binning: a linear model cannot invent these itself. AUC: 0.751 → 0.754. </a:t>
+              <a:t>Ratios, interactions, binning: a linear model cannot invent these itself. AUC: 0.7514 → 0.7542. </a:t>
             </a:r>
             <a:r>
               <a:rPr b="1"/>
-              <a:t>Two thousandths: one split cannot tell that from noise.</a:t>
+              <a:t>Under three thousandths: one split cannot tell that from noise.</a:t>
             </a:r>
           </a:p>
         </p:txBody>
@@ -13951,7 +13951,7 @@
         </p:blipFill>
         <p:spPr bwMode="auto">
           <a:xfrm>
-            <a:off x="457205" y="3213856"/>
+            <a:off x="457205" y="3432455"/>
             <a:ext cx="8229590" cy="696035"/>
           </a:xfrm>
           <a:prstGeom prst="rect">

--- a/Lessons/02_data_exploration_and_preparation/Slides/data_exploration_and_preparation_slides.pptx
+++ b/Lessons/02_data_exploration_and_preparation/Slides/data_exploration_and_preparation_slides.pptx
@@ -4543,7 +4543,21 @@
             </a:pPr>
             <a:r>
               <a:rPr/>
-              <a:t>Do not let anyone in the room call three thousandths a win, and do not call it one yourself. Quote the four decimals: at three, 0.751 against 0.754 sounds like a difference of 0.003, and the difference is 0.0028. It is a legitimate result, not a failed experiment - the hypothesis that cost intensity matters here was reasonable, it was tested, and the data declined it. Feature engineering is a hypothesis about the domain, not a guarantee. Handout Section 7.</a:t>
+              <a:t>Do not let anyone in the room call three thousandths a win, and do not call it one yourself. Quote the four decimals: at three, 0.751 against 0.755 sounds like a difference of 0.004, and the difference is 0.0034. It is a legitimate result, not a failed experiment - the hypothesis that what a customer has been worth so far predicts whether they leave was reasonable, it was tested, and the data declined it. Feature engineering is a hypothesis about the domain, not a guarantee. Handout Section 7.</a:t>
+            </a:r>
+          </a:p>
+          <a:p>
+            <a:pPr lvl="0" indent="0" marL="0">
+              <a:buNone/>
+            </a:pPr>
+          </a:p>
+          <a:p>
+            <a:pPr lvl="0" indent="0" marL="0">
+              <a:buNone/>
+            </a:pPr>
+            <a:r>
+              <a:rPr/>
+              <a:t>Then the second number, which is the one to spend time on. Rebuild the same column after Section 4’s domain rule - tenure clipped to 0-120, not just at zero - and +0.0034 becomes -0.0075. The gain was never about what the customer paid: 999 months times a billing error of 3,344.7 is a total_paid no real customer could have, and those rows line up with the target well enough to move the score. Multiplying two contaminated columns concentrates the contamination. Say the moral out loud: the order of the steps is part of the method.</a:t>
             </a:r>
           </a:p>
           <a:p>
@@ -4571,21 +4585,35 @@
             </a:pPr>
             <a:r>
               <a:rPr/>
-              <a:t>Explain the max and the +1 rather than skating over them, because someone will ask. tenure_months holds zeros and, before Section 4’s domain rule, a -3: divide by it raw and you get an infinity and a sign flip. That is Section 4 turning up in Section 7, and it is what feature engineering on real data actually looks like - one line of algebra, three lines of defending it against the column you have.</a:t>
-            </a:r>
-          </a:p>
-          <a:p>
-            <a:pPr lvl="0" indent="0" marL="0">
-              <a:buNone/>
-            </a:pPr>
-          </a:p>
-          <a:p>
-            <a:pPr lvl="0" indent="0" marL="0">
-              <a:buNone/>
-            </a:pPr>
-            <a:r>
-              <a:rPr/>
-              <a:t>The point to land: any engineered feature that involves a statistic LEARNED from data - bin edges from quantiles, a scaled interaction - is subject to the same rule as scaling. A pure arithmetic combination (this ratio) needs no fold-awareness; a learned one does.</a:t>
+              <a:t>Explain the max rather than skating over it, because someone will ask. tenure_months still holds the -3 of Section 4 at this point, and multiplying by it unclipped hands the model a customer who has paid minus two hundred euros. That is Section 4 turning up in Section 7, and it is what feature engineering on real data actually looks like - one line of algebra, three lines of defending it against the column you have.</a:t>
+            </a:r>
+          </a:p>
+          <a:p>
+            <a:pPr lvl="0" indent="0" marL="0">
+              <a:buNone/>
+            </a:pPr>
+          </a:p>
+          <a:p>
+            <a:pPr lvl="0" indent="0" marL="0">
+              <a:buNone/>
+            </a:pPr>
+            <a:r>
+              <a:rPr/>
+              <a:t>If someone objects to the obvious alternative, monthly_charges divided by tenure_months, they are right to: monthly_charges is already a rate, so dividing it by months again gives euros per month per month. Check the units before trusting a construction.</a:t>
+            </a:r>
+          </a:p>
+          <a:p>
+            <a:pPr lvl="0" indent="0" marL="0">
+              <a:buNone/>
+            </a:pPr>
+          </a:p>
+          <a:p>
+            <a:pPr lvl="0" indent="0" marL="0">
+              <a:buNone/>
+            </a:pPr>
+            <a:r>
+              <a:rPr/>
+              <a:t>The point to land: any engineered feature that involves a statistic LEARNED from data - bin edges from quantiles, a scaled interaction - is subject to the same rule as scaling. A pure arithmetic combination (this product) needs no fold-awareness; a learned one does.</a:t>
             </a:r>
           </a:p>
         </p:txBody>
@@ -13914,7 +13942,7 @@
         <p:spPr>
           <a:xfrm>
             <a:off x="457200" y="1183005"/>
-            <a:ext cx="8229600" cy="1748790"/>
+            <a:ext cx="8229600" cy="2185987"/>
           </a:xfrm>
         </p:spPr>
         <p:txBody>
@@ -13926,18 +13954,32 @@
             </a:pPr>
             <a:r>
               <a:rPr/>
-              <a:t>Ratios, interactions, binning: a linear model cannot invent these itself. AUC: 0.7514 → 0.7542. </a:t>
+              <a:t>Ratios, interactions, binning: a linear model cannot invent these itself. AUC: 0.7514 → 0.7548, under four thousandths. Clean </a:t>
+            </a:r>
+            <a:r>
+              <a:rPr>
+                <a:latin typeface="Courier"/>
+              </a:rPr>
+              <a:t>tenure_months</a:t>
+            </a:r>
+            <a:r>
+              <a:rPr/>
+              <a:t> first and the same feature scores </a:t>
             </a:r>
             <a:r>
               <a:rPr b="1"/>
-              <a:t>Under three thousandths: one split cannot tell that from noise.</a:t>
+              <a:t>0.7439</a:t>
+            </a:r>
+            <a:r>
+              <a:rPr/>
+              <a:t> — the gain was living in the 999s.</a:t>
             </a:r>
           </a:p>
         </p:txBody>
       </p:sp>
       <p:pic>
         <p:nvPicPr>
-          <p:cNvPr descr="eq_708e41c00f.png" id="0" name="Picture 1"/>
+          <p:cNvPr descr="eq_5d70f44e8e.png" id="0" name="Picture 1"/>
           <p:cNvPicPr>
             <a:picLocks noGrp="1" noChangeAspect="1"/>
           </p:cNvPicPr>
@@ -13951,8 +13993,8 @@
         </p:blipFill>
         <p:spPr bwMode="auto">
           <a:xfrm>
-            <a:off x="457205" y="3432455"/>
-            <a:ext cx="8229590" cy="696035"/>
+            <a:off x="457203" y="3835298"/>
+            <a:ext cx="8229593" cy="327546"/>
           </a:xfrm>
           <a:prstGeom prst="rect">
             <a:avLst/>

--- a/Lessons/02_data_exploration_and_preparation/Slides/data_exploration_and_preparation_slides.pptx
+++ b/Lessons/02_data_exploration_and_preparation/Slides/data_exploration_and_preparation_slides.pptx
@@ -4709,21 +4709,63 @@
             </a:pPr>
             <a:r>
               <a:rPr/>
-              <a:t>The gradient descent toy is worth running interactively - change the variance ratio live and watch the iteration count move, per the handout’s “try this”. It makes the condition number argument concrete in a way the derivation alone does not.</a:t>
-            </a:r>
-          </a:p>
-          <a:p>
-            <a:pPr lvl="0" indent="0" marL="0">
-              <a:buNone/>
-            </a:pPr>
-          </a:p>
-          <a:p>
-            <a:pPr lvl="0" indent="0" marL="0">
-              <a:buNone/>
-            </a:pPr>
-            <a:r>
-              <a:rPr/>
-              <a:t>If the room is moving fast, the ColumnTransformer section is where to slow down: it is the piece they will reuse in every exercise and in the project, and getting the column selectors right is fiddlier than it looks.</a:t>
+              <a:t>Say what the eight sections are for before they start, because the notebook is long and the middle of it looks like plumbing: sections 3 and 4 are why we scale, 5 and 6 are why we encode and what zip_code costs, 7 is the pipeline that makes the rule true by construction, and 8 is the feature that does not work.</a:t>
+            </a:r>
+          </a:p>
+          <a:p>
+            <a:pPr lvl="0" indent="0" marL="0">
+              <a:buNone/>
+            </a:pPr>
+          </a:p>
+          <a:p>
+            <a:pPr lvl="0" indent="0" marL="0">
+              <a:buNone/>
+            </a:pPr>
+            <a:r>
+              <a:rPr/>
+              <a:t>The gradient descent toy in section 3 is worth running interactively - change the variance ratio live and watch the iteration count move, per the handout’s “try this”. It makes the condition number argument concrete in a way the derivation alone does not. The number to make them say out loud is the second one on the slide: the raw features do not diverge to infinity, they oscillate between 0.69 and 8.29 and never settle. That is a worse failure than slowness, because nothing errors.</a:t>
+            </a:r>
+          </a:p>
+          <a:p>
+            <a:pPr lvl="0" indent="0" marL="0">
+              <a:buNone/>
+            </a:pPr>
+          </a:p>
+          <a:p>
+            <a:pPr lvl="0" indent="0" marL="0">
+              <a:buNone/>
+            </a:pPr>
+            <a:r>
+              <a:rPr/>
+              <a:t>Section 5 is the one that lands without discussion: matrix_rank returns 3 for four columns, and short by exactly one is the signature of a single dependence. They believe numpy where they might not believe the algebra.</a:t>
+            </a:r>
+          </a:p>
+          <a:p>
+            <a:pPr lvl="0" indent="0" marL="0">
+              <a:buNone/>
+            </a:pPr>
+          </a:p>
+          <a:p>
+            <a:pPr lvl="0" indent="0" marL="0">
+              <a:buNone/>
+            </a:pPr>
+            <a:r>
+              <a:rPr/>
+              <a:t>If the room is moving fast, section 7 is where to slow down: ColumnTransformer is the piece they will reuse in every exercise and in the project, and getting the column selectors right is fiddlier than it looks.</a:t>
+            </a:r>
+          </a:p>
+          <a:p>
+            <a:pPr lvl="0" indent="0" marL="0">
+              <a:buNone/>
+            </a:pPr>
+          </a:p>
+          <a:p>
+            <a:pPr lvl="0" indent="0" marL="0">
+              <a:buNone/>
+            </a:pPr>
+            <a:r>
+              <a:rPr/>
+              <a:t>And leave time for section 8, which is the one they will get wrong on their own data: the engineered feature gains 0.0034, then loses 0.0075 once tenure is cleaned first. Ask them why before telling them.</a:t>
             </a:r>
           </a:p>
         </p:txBody>
@@ -14084,18 +14126,68 @@
             </a:pPr>
             <a:r>
               <a:rPr/>
-              <a:t>Scaling from scratch, the dummy trap, </a:t>
-            </a:r>
-            <a:r>
-              <a:rPr>
-                <a:latin typeface="Courier"/>
-              </a:rPr>
-              <a:t>ColumnTransformer</a:t>
-            </a:r>
-            <a:r>
-              <a:rPr/>
-              <a:t>, </a:t>
-            </a:r>
+              <a:t>Four numbers to come back with:</a:t>
+            </a:r>
+          </a:p>
+          <a:p>
+            <a:pPr lvl="0"/>
+            <a:r>
+              <a:rPr/>
+              <a:t>Variance ratio </a:t>
+            </a:r>
+            <a:r>
+              <a:rPr b="1"/>
+              <a:t>110:1</a:t>
+            </a:r>
+            <a:r>
+              <a:rPr/>
+              <a:t> - learning rate </a:t>
+            </a:r>
+            <a:r>
+              <a:rPr b="1"/>
+              <a:t>2.0</a:t>
+            </a:r>
+            <a:r>
+              <a:rPr/>
+              <a:t> scaled, </a:t>
+            </a:r>
+            <a:r>
+              <a:rPr b="1"/>
+              <a:t>0.1</a:t>
+            </a:r>
+            <a:r>
+              <a:rPr/>
+              <a:t> raw</a:t>
+            </a:r>
+          </a:p>
+          <a:p>
+            <a:pPr lvl="0"/>
+            <a:r>
+              <a:rPr/>
+              <a:t>That rate on raw features: loss swings </a:t>
+            </a:r>
+            <a:r>
+              <a:rPr b="1"/>
+              <a:t>0.69 to 8.29</a:t>
+            </a:r>
+            <a:r>
+              <a:rPr/>
+              <a:t>, for ever</a:t>
+            </a:r>
+          </a:p>
+          <a:p>
+            <a:pPr lvl="0"/>
+            <a:r>
+              <a:rPr/>
+              <a:t>k dummies + intercept: </a:t>
+            </a:r>
+            <a:r>
+              <a:rPr b="1"/>
+              <a:t>4 columns, rank 3</a:t>
+            </a:r>
+          </a:p>
+          <a:p>
+            <a:pPr lvl="0"/>
             <a:r>
               <a:rPr>
                 <a:latin typeface="Courier"/>
@@ -14104,7 +14196,21 @@
             </a:r>
             <a:r>
               <a:rPr/>
-              <a:t>.</a:t>
+              <a:t>, then </a:t>
+            </a:r>
+            <a:r>
+              <a:rPr>
+                <a:latin typeface="Courier"/>
+              </a:rPr>
+              <a:t>total_paid</a:t>
+            </a:r>
+            <a:r>
+              <a:rPr/>
+              <a:t>: </a:t>
+            </a:r>
+            <a:r>
+              <a:rPr b="1"/>
+              <a:t>0.7514 → 0.7548 → 0.7439</a:t>
             </a:r>
           </a:p>
         </p:txBody>

--- a/Lessons/02_data_exploration_and_preparation/Slides/data_exploration_and_preparation_slides.pptx
+++ b/Lessons/02_data_exploration_and_preparation/Slides/data_exploration_and_preparation_slides.pptx
@@ -10667,8 +10667,8 @@
         </p:blipFill>
         <p:spPr bwMode="auto">
           <a:xfrm>
-            <a:off x="3115657" y="2349504"/>
-            <a:ext cx="2912686" cy="993370"/>
+            <a:off x="3149925" y="2297549"/>
+            <a:ext cx="2844149" cy="1097280"/>
           </a:xfrm>
           <a:prstGeom prst="rect">
             <a:avLst/>
@@ -10749,8 +10749,8 @@
         </p:blipFill>
         <p:spPr bwMode="auto">
           <a:xfrm>
-            <a:off x="457200" y="2535039"/>
-            <a:ext cx="8229600" cy="622300"/>
+            <a:off x="457200" y="2541389"/>
+            <a:ext cx="8229600" cy="609600"/>
           </a:xfrm>
           <a:prstGeom prst="rect">
             <a:avLst/>
@@ -14035,8 +14035,8 @@
         </p:blipFill>
         <p:spPr bwMode="auto">
           <a:xfrm>
-            <a:off x="457203" y="3835298"/>
-            <a:ext cx="8229593" cy="327546"/>
+            <a:off x="457211" y="3825062"/>
+            <a:ext cx="8229578" cy="348017"/>
           </a:xfrm>
           <a:prstGeom prst="rect">
             <a:avLst/>
@@ -14837,8 +14837,8 @@
         </p:blipFill>
         <p:spPr bwMode="auto">
           <a:xfrm>
-            <a:off x="1512306" y="2204031"/>
-            <a:ext cx="6119388" cy="1284316"/>
+            <a:off x="1553951" y="2189484"/>
+            <a:ext cx="6036097" cy="1313410"/>
           </a:xfrm>
           <a:prstGeom prst="rect">
             <a:avLst/>

--- a/Lessons/02_data_exploration_and_preparation/Slides/data_exploration_and_preparation_slides.pptx
+++ b/Lessons/02_data_exploration_and_preparation/Slides/data_exploration_and_preparation_slides.pptx
@@ -3897,6 +3897,20 @@
             </a:pPr>
             <a:r>
               <a:rPr/>
+              <a:t>Say the condition out loud, because it is no longer written on the slide and it is the whole content: this equality holds ONLY IF f is independent of T. It was on the slide and made the formula too small to read from the back; it belongs in your mouth, not in the image.</a:t>
+            </a:r>
+          </a:p>
+          <a:p>
+            <a:pPr lvl="0" indent="0" marL="0">
+              <a:buNone/>
+            </a:pPr>
+          </a:p>
+          <a:p>
+            <a:pPr lvl="0" indent="0" marL="0">
+              <a:buNone/>
+            </a:pPr>
+            <a:r>
+              <a:rPr/>
               <a:t>Handout Section 8.1. Lesson 1’s unbiasedness argument never mentioned “the model” specifically - it is about f, whatever function maps raw inputs to predictions. In deployment, a fitted scaler or imputer travels WITH the model, so f includes their learned parameters too.</a:t>
             </a:r>
           </a:p>
@@ -4537,6 +4551,20 @@
         <p:txBody>
           <a:bodyPr/>
           <a:lstStyle/>
+          <a:p>
+            <a:pPr lvl="0" indent="0" marL="0">
+              <a:buNone/>
+            </a:pPr>
+            <a:r>
+              <a:rPr/>
+              <a:t>The formula was on this slide as a rendered equation and came out at 23pt, the smallest in the course: the column names are long enough that no amount of trimming saves it. It is one sentence to say — total_paid is the monthly charge times the months stayed, with tenure clipped at zero first — and the three AUCs are what does the work in the room.</a:t>
+            </a:r>
+          </a:p>
+          <a:p>
+            <a:pPr lvl="0" indent="0" marL="0">
+              <a:buNone/>
+            </a:pPr>
+          </a:p>
           <a:p>
             <a:pPr lvl="0" indent="0" marL="0">
               <a:buNone/>
@@ -13254,7 +13282,7 @@
       </p:sp>
       <p:pic>
         <p:nvPicPr>
-          <p:cNvPr descr="eq_4c26f16b0d.png" id="0" name="Picture 1"/>
+          <p:cNvPr descr="eq_3460d29d6f.png" id="0" name="Picture 1"/>
           <p:cNvPicPr>
             <a:picLocks noGrp="1" noChangeAspect="1"/>
           </p:cNvPicPr>
@@ -13268,8 +13296,8 @@
         </p:blipFill>
         <p:spPr bwMode="auto">
           <a:xfrm>
-            <a:off x="457200" y="3087379"/>
-            <a:ext cx="8229599" cy="511791"/>
+            <a:off x="1296590" y="2829964"/>
+            <a:ext cx="6550819" cy="1026621"/>
           </a:xfrm>
           <a:prstGeom prst="rect">
             <a:avLst/>
@@ -13953,8 +13981,8 @@
         </p:nvSpPr>
         <p:spPr>
           <a:xfrm>
-            <a:off x="457200" y="205740"/>
-            <a:ext cx="8229600" cy="874395"/>
+            <a:off x="457200" y="205979"/>
+            <a:ext cx="8229600" cy="857250"/>
           </a:xfrm>
         </p:spPr>
         <p:txBody>
@@ -13973,18 +14001,18 @@
       </p:sp>
       <p:sp>
         <p:nvSpPr>
-          <p:cNvPr id="4" name="Text Placeholder 3"/>
-          <p:cNvSpPr>
-            <a:spLocks noGrp="1"/>
-          </p:cNvSpPr>
-          <p:nvPr>
-            <p:ph idx="2" sz="half" type="body"/>
+          <p:cNvPr id="3" name="Content Placeholder 2"/>
+          <p:cNvSpPr>
+            <a:spLocks noGrp="1"/>
+          </p:cNvSpPr>
+          <p:nvPr>
+            <p:ph idx="1"/>
           </p:nvPr>
         </p:nvSpPr>
         <p:spPr>
           <a:xfrm>
-            <a:off x="457200" y="1183005"/>
-            <a:ext cx="8229600" cy="2185987"/>
+            <a:off x="457200" y="1200151"/>
+            <a:ext cx="8229600" cy="3394472"/>
           </a:xfrm>
         </p:spPr>
         <p:txBody>
@@ -13996,7 +14024,22 @@
             </a:pPr>
             <a:r>
               <a:rPr/>
-              <a:t>Ratios, interactions, binning: a linear model cannot invent these itself. AUC: 0.7514 → 0.7548, under four thousandths. Clean </a:t>
+              <a:t>Ratios, interactions, binning: a linear model cannot invent these itself.</a:t>
+            </a:r>
+          </a:p>
+          <a:p>
+            <a:pPr lvl="0" indent="0" marL="0">
+              <a:buNone/>
+            </a:pPr>
+            <a:r>
+              <a:rPr>
+                <a:latin typeface="Courier"/>
+              </a:rPr>
+              <a:t>total_paid</a:t>
+            </a:r>
+            <a:r>
+              <a:rPr/>
+              <a:t> = charge × months stayed. AUC: 0.7514 → 0.7548, under four thousandths. Clean </a:t>
             </a:r>
             <a:r>
               <a:rPr>
@@ -14019,36 +14062,6 @@
           </a:p>
         </p:txBody>
       </p:sp>
-      <p:pic>
-        <p:nvPicPr>
-          <p:cNvPr descr="eq_5d70f44e8e.png" id="0" name="Picture 1"/>
-          <p:cNvPicPr>
-            <a:picLocks noGrp="1" noChangeAspect="1"/>
-          </p:cNvPicPr>
-          <p:nvPr/>
-        </p:nvPicPr>
-        <p:blipFill>
-          <a:blip r:embed="rId3"/>
-          <a:stretch>
-            <a:fillRect/>
-          </a:stretch>
-        </p:blipFill>
-        <p:spPr bwMode="auto">
-          <a:xfrm>
-            <a:off x="457211" y="3825062"/>
-            <a:ext cx="8229578" cy="348017"/>
-          </a:xfrm>
-          <a:prstGeom prst="rect">
-            <a:avLst/>
-          </a:prstGeom>
-          <a:noFill/>
-          <a:ln w="9525">
-            <a:noFill/>
-            <a:headEnd/>
-            <a:tailEnd/>
-          </a:ln>
-        </p:spPr>
-      </p:pic>
     </p:spTree>
   </p:cSld>
 </p:sld>

--- a/Lessons/02_data_exploration_and_preparation/Slides/data_exploration_and_preparation_slides.pptx
+++ b/Lessons/02_data_exploration_and_preparation/Slides/data_exploration_and_preparation_slides.pptx
@@ -4557,7 +4557,7 @@
             </a:pPr>
             <a:r>
               <a:rPr/>
-              <a:t>The formula was on this slide as a rendered equation and came out at 23pt, the smallest in the course: the column names are long enough that no amount of trimming saves it. It is one sentence to say — total_paid is the monthly charge times the months stayed, with tenure clipped at zero first — and the three AUCs are what does the work in the room.</a:t>
+              <a:t>The formula was on this slide as a rendered equation and came out at 23pt, the smallest in the course: the column names are long enough that no amount of trimming saves it. It is one sentence to say - total_paid is the monthly charge times the months stayed, with tenure clipped at zero first - and the three AUCs are what does the work in the room.</a:t>
             </a:r>
           </a:p>
           <a:p>
@@ -14057,7 +14057,7 @@
             </a:r>
             <a:r>
               <a:rPr/>
-              <a:t> — the gain was living in the 999s.</a:t>
+              <a:t> - the gain was living in the 999s.</a:t>
             </a:r>
           </a:p>
         </p:txBody>
